--- a/청호나이스-브랜드전략-제안.pptx
+++ b/청호나이스-브랜드전략-제안.pptx
@@ -8139,7 +8139,7 @@
                 <a:ea typeface="Pretendard" pitchFamily="34" charset="-122"/>
                 <a:cs typeface="Pretendard" pitchFamily="34" charset="-120"/>
               </a:rPr>
-              <a:t>13 · 캐릭터 자산 현대화 사례</a:t>
+              <a:t>13 · 현대화 사례 · 두꺼비</a:t>
             </a:r>
             <a:endParaRPr lang="en-US" sz="1200" dirty="0"/>
           </a:p>
@@ -11332,7 +11332,7 @@
                 <a:ea typeface="Pretendard" pitchFamily="34" charset="-122"/>
                 <a:cs typeface="Pretendard" pitchFamily="34" charset="-120"/>
               </a:rPr>
-              <a:t>03 · 브랜드 전략</a:t>
+              <a:t>03 · 브랜드 전략 · 모범 사례</a:t>
             </a:r>
             <a:endParaRPr lang="en-US" sz="1250" dirty="0"/>
           </a:p>
@@ -11374,7 +11374,7 @@
                 <a:ea typeface="Pretendard" pitchFamily="34" charset="-122"/>
                 <a:cs typeface="Pretendard" pitchFamily="34" charset="-120"/>
               </a:rPr>
-              <a:t>과거 캐릭터를 되살린 브랜드들은,</a:t>
+              <a:t>두꺼비는 복원된 것이 아니라,</a:t>
             </a:r>
             <a:endParaRPr lang="en-US" sz="2200" dirty="0"/>
           </a:p>
@@ -11394,7 +11394,7 @@
                 <a:ea typeface="Pretendard" pitchFamily="34" charset="-122"/>
                 <a:cs typeface="Pretendard" pitchFamily="34" charset="-120"/>
               </a:rPr>
-              <a:t>외형이 아니라 </a:t>
+              <a:t>지금의 </a:t>
             </a:r>
             <a:pPr indent="0" marL="0">
               <a:lnSpc>
@@ -11411,7 +11411,7 @@
                 <a:ea typeface="Pretendard" pitchFamily="34" charset="-122"/>
                 <a:cs typeface="Pretendard" pitchFamily="34" charset="-120"/>
               </a:rPr>
-              <a:t>역할</a:t>
+              <a:t>역할로 다시 배치</a:t>
             </a:r>
             <a:pPr indent="0" marL="0">
               <a:lnSpc>
@@ -11428,7 +11428,7 @@
                 <a:ea typeface="Pretendard" pitchFamily="34" charset="-122"/>
                 <a:cs typeface="Pretendard" pitchFamily="34" charset="-120"/>
               </a:rPr>
-              <a:t>을 바꿨다.</a:t>
+              <a:t>됐다.</a:t>
             </a:r>
             <a:endParaRPr lang="en-US" sz="2200" dirty="0"/>
           </a:p>
@@ -11442,12 +11442,12 @@
         </p:nvSpPr>
         <p:spPr>
           <a:xfrm>
-            <a:off x="658368" y="2176272"/>
-            <a:ext cx="10874959" cy="384048"/>
+            <a:off x="658368" y="2121408"/>
+            <a:ext cx="10874959" cy="365760"/>
           </a:xfrm>
           <a:prstGeom prst="roundRect">
             <a:avLst>
-              <a:gd name="adj" fmla="val 21429"/>
+              <a:gd name="adj" fmla="val 22500"/>
             </a:avLst>
           </a:prstGeom>
           <a:solidFill>
@@ -11464,8 +11464,8 @@
         </p:nvSpPr>
         <p:spPr>
           <a:xfrm>
-            <a:off x="896112" y="2176272"/>
-            <a:ext cx="10399471" cy="384048"/>
+            <a:off x="877824" y="2121408"/>
+            <a:ext cx="10436047" cy="365760"/>
           </a:xfrm>
           <a:prstGeom prst="rect">
             <a:avLst/>
@@ -11481,7 +11481,7 @@
               <a:buNone/>
             </a:pPr>
             <a:r>
-              <a:rPr lang="en-US" sz="950" dirty="0">
+              <a:rPr lang="en-US" sz="900" dirty="0">
                 <a:solidFill>
                   <a:srgbClr val="3C3C3C"/>
                 </a:solidFill>
@@ -11489,13 +11489,13 @@
                 <a:ea typeface="Pretendard" pitchFamily="34" charset="-122"/>
                 <a:cs typeface="Pretendard" pitchFamily="34" charset="-120"/>
               </a:rPr>
-              <a:t>리트로 브랜딩 연구는 성공한 부활을 ‘복원’이 아니라 </a:t>
-            </a:r>
-            <a:pPr indent="0" marL="0">
-              <a:buNone/>
-            </a:pPr>
-            <a:r>
-              <a:rPr lang="en-US" sz="950" b="1" dirty="0">
+              <a:t>리트로 브랜딩 연구가 말하는 성공 조건 — </a:t>
+            </a:r>
+            <a:pPr indent="0" marL="0">
+              <a:buNone/>
+            </a:pPr>
+            <a:r>
+              <a:rPr lang="en-US" sz="900" b="1" dirty="0">
                 <a:solidFill>
                   <a:srgbClr val="191919"/>
                 </a:solidFill>
@@ -11509,7 +11509,7 @@
               <a:buNone/>
             </a:pPr>
             <a:r>
-              <a:rPr lang="en-US" sz="950" dirty="0">
+              <a:rPr lang="en-US" sz="900" dirty="0">
                 <a:solidFill>
                   <a:srgbClr val="707070"/>
                 </a:solidFill>
@@ -11517,26 +11517,418 @@
                 <a:ea typeface="Pretendard" pitchFamily="34" charset="-122"/>
                 <a:cs typeface="Pretendard" pitchFamily="34" charset="-120"/>
               </a:rPr>
-              <a:t>으로 설명한다.  Brown, Kozinets &amp; Sherry, Journal of Marketing (2003)</a:t>
-            </a:r>
-            <a:endParaRPr lang="en-US" sz="950" dirty="0"/>
-          </a:p>
-        </p:txBody>
-      </p:sp>
-      <p:sp>
-        <p:nvSpPr>
-          <p:cNvPr id="7" name="Shape 5"/>
-          <p:cNvSpPr/>
-          <p:nvPr/>
-        </p:nvSpPr>
-        <p:spPr>
-          <a:xfrm>
-            <a:off x="658368" y="2724912"/>
-            <a:ext cx="2554148" cy="2212848"/>
+              <a:t>. 두꺼비는 이 조건을 그대로 밟았다.  Brown, Kozinets &amp; Sherry, Journal of Marketing (2003)</a:t>
+            </a:r>
+            <a:endParaRPr lang="en-US" sz="900" dirty="0"/>
+          </a:p>
+        </p:txBody>
+      </p:sp>
+      <p:sp>
+        <p:nvSpPr>
+          <p:cNvPr id="7" name="Text 5"/>
+          <p:cNvSpPr/>
+          <p:nvPr/>
+        </p:nvSpPr>
+        <p:spPr>
+          <a:xfrm>
+            <a:off x="658368" y="2651760"/>
+            <a:ext cx="2788920" cy="219456"/>
+          </a:xfrm>
+          <a:prstGeom prst="rect">
+            <a:avLst/>
+          </a:prstGeom>
+          <a:noFill/>
+          <a:ln/>
+        </p:spPr>
+        <p:txBody>
+          <a:bodyPr wrap="square" lIns="0" tIns="0" rIns="0" bIns="0" rtlCol="0" anchor="t"/>
+          <a:lstStyle/>
+          <a:p>
+            <a:pPr indent="0" marL="0">
+              <a:buNone/>
+            </a:pPr>
+            <a:r>
+              <a:rPr lang="en-US" sz="1050" b="1" dirty="0">
+                <a:solidFill>
+                  <a:srgbClr val="191919"/>
+                </a:solidFill>
+                <a:latin typeface="Pretendard" pitchFamily="34" charset="0"/>
+                <a:ea typeface="Pretendard" pitchFamily="34" charset="-122"/>
+                <a:cs typeface="Pretendard" pitchFamily="34" charset="-120"/>
+              </a:rPr>
+              <a:t>잠들어 있던 자산</a:t>
+            </a:r>
+            <a:endParaRPr lang="en-US" sz="1050" dirty="0"/>
+          </a:p>
+        </p:txBody>
+      </p:sp>
+      <p:sp>
+        <p:nvSpPr>
+          <p:cNvPr id="8" name="Shape 6"/>
+          <p:cNvSpPr/>
+          <p:nvPr/>
+        </p:nvSpPr>
+        <p:spPr>
+          <a:xfrm>
+            <a:off x="658368" y="2944368"/>
+            <a:ext cx="2788920" cy="530352"/>
           </a:xfrm>
           <a:prstGeom prst="roundRect">
             <a:avLst>
-              <a:gd name="adj" fmla="val 3719"/>
+              <a:gd name="adj" fmla="val 15517"/>
+            </a:avLst>
+          </a:prstGeom>
+          <a:solidFill>
+            <a:srgbClr val="F5F5F7"/>
+          </a:solidFill>
+          <a:ln/>
+        </p:spPr>
+      </p:sp>
+      <p:sp>
+        <p:nvSpPr>
+          <p:cNvPr id="9" name="Text 7"/>
+          <p:cNvSpPr/>
+          <p:nvPr/>
+        </p:nvSpPr>
+        <p:spPr>
+          <a:xfrm>
+            <a:off x="804672" y="3026664"/>
+            <a:ext cx="658368" cy="219456"/>
+          </a:xfrm>
+          <a:prstGeom prst="rect">
+            <a:avLst/>
+          </a:prstGeom>
+          <a:noFill/>
+          <a:ln/>
+        </p:spPr>
+        <p:txBody>
+          <a:bodyPr wrap="square" lIns="0" tIns="0" rIns="0" bIns="0" rtlCol="0" anchor="t"/>
+          <a:lstStyle/>
+          <a:p>
+            <a:pPr indent="0" marL="0">
+              <a:buNone/>
+            </a:pPr>
+            <a:r>
+              <a:rPr lang="en-US" sz="950" b="1" dirty="0">
+                <a:solidFill>
+                  <a:srgbClr val="959595"/>
+                </a:solidFill>
+                <a:latin typeface="Pretendard" pitchFamily="34" charset="0"/>
+                <a:ea typeface="Pretendard" pitchFamily="34" charset="-122"/>
+                <a:cs typeface="Pretendard" pitchFamily="34" charset="-120"/>
+              </a:rPr>
+              <a:t>1950년대</a:t>
+            </a:r>
+            <a:endParaRPr lang="en-US" sz="950" dirty="0"/>
+          </a:p>
+        </p:txBody>
+      </p:sp>
+      <p:sp>
+        <p:nvSpPr>
+          <p:cNvPr id="10" name="Text 8"/>
+          <p:cNvSpPr/>
+          <p:nvPr/>
+        </p:nvSpPr>
+        <p:spPr>
+          <a:xfrm>
+            <a:off x="1499616" y="3017520"/>
+            <a:ext cx="1801368" cy="438912"/>
+          </a:xfrm>
+          <a:prstGeom prst="rect">
+            <a:avLst/>
+          </a:prstGeom>
+          <a:noFill/>
+          <a:ln/>
+        </p:spPr>
+        <p:txBody>
+          <a:bodyPr wrap="square" lIns="0" tIns="0" rIns="0" bIns="0" rtlCol="0" anchor="t"/>
+          <a:lstStyle/>
+          <a:p>
+            <a:pPr indent="0" marL="0">
+              <a:lnSpc>
+                <a:spcPts val="1150"/>
+              </a:lnSpc>
+              <a:buNone/>
+            </a:pPr>
+            <a:r>
+              <a:rPr lang="en-US" sz="900" dirty="0">
+                <a:solidFill>
+                  <a:srgbClr val="3C3C3C"/>
+                </a:solidFill>
+                <a:latin typeface="Pretendard" pitchFamily="34" charset="0"/>
+                <a:ea typeface="Pretendard" pitchFamily="34" charset="-122"/>
+                <a:cs typeface="Pretendard" pitchFamily="34" charset="-120"/>
+              </a:rPr>
+              <a:t>진로 상표의 두꺼비. 장수와 복을 뜻하는 상징</a:t>
+            </a:r>
+            <a:endParaRPr lang="en-US" sz="900" dirty="0"/>
+          </a:p>
+        </p:txBody>
+      </p:sp>
+      <p:sp>
+        <p:nvSpPr>
+          <p:cNvPr id="11" name="Shape 9"/>
+          <p:cNvSpPr/>
+          <p:nvPr/>
+        </p:nvSpPr>
+        <p:spPr>
+          <a:xfrm>
+            <a:off x="658368" y="3566160"/>
+            <a:ext cx="2788920" cy="530352"/>
+          </a:xfrm>
+          <a:prstGeom prst="roundRect">
+            <a:avLst>
+              <a:gd name="adj" fmla="val 15517"/>
+            </a:avLst>
+          </a:prstGeom>
+          <a:solidFill>
+            <a:srgbClr val="F5F5F7"/>
+          </a:solidFill>
+          <a:ln/>
+        </p:spPr>
+      </p:sp>
+      <p:sp>
+        <p:nvSpPr>
+          <p:cNvPr id="12" name="Text 10"/>
+          <p:cNvSpPr/>
+          <p:nvPr/>
+        </p:nvSpPr>
+        <p:spPr>
+          <a:xfrm>
+            <a:off x="804672" y="3648456"/>
+            <a:ext cx="658368" cy="219456"/>
+          </a:xfrm>
+          <a:prstGeom prst="rect">
+            <a:avLst/>
+          </a:prstGeom>
+          <a:noFill/>
+          <a:ln/>
+        </p:spPr>
+        <p:txBody>
+          <a:bodyPr wrap="square" lIns="0" tIns="0" rIns="0" bIns="0" rtlCol="0" anchor="t"/>
+          <a:lstStyle/>
+          <a:p>
+            <a:pPr indent="0" marL="0">
+              <a:buNone/>
+            </a:pPr>
+            <a:r>
+              <a:rPr lang="en-US" sz="950" b="1" dirty="0">
+                <a:solidFill>
+                  <a:srgbClr val="959595"/>
+                </a:solidFill>
+                <a:latin typeface="Pretendard" pitchFamily="34" charset="0"/>
+                <a:ea typeface="Pretendard" pitchFamily="34" charset="-122"/>
+                <a:cs typeface="Pretendard" pitchFamily="34" charset="-120"/>
+              </a:rPr>
+              <a:t>1990년대</a:t>
+            </a:r>
+            <a:endParaRPr lang="en-US" sz="950" dirty="0"/>
+          </a:p>
+        </p:txBody>
+      </p:sp>
+      <p:sp>
+        <p:nvSpPr>
+          <p:cNvPr id="13" name="Text 11"/>
+          <p:cNvSpPr/>
+          <p:nvPr/>
+        </p:nvSpPr>
+        <p:spPr>
+          <a:xfrm>
+            <a:off x="1499616" y="3639312"/>
+            <a:ext cx="1801368" cy="438912"/>
+          </a:xfrm>
+          <a:prstGeom prst="rect">
+            <a:avLst/>
+          </a:prstGeom>
+          <a:noFill/>
+          <a:ln/>
+        </p:spPr>
+        <p:txBody>
+          <a:bodyPr wrap="square" lIns="0" tIns="0" rIns="0" bIns="0" rtlCol="0" anchor="t"/>
+          <a:lstStyle/>
+          <a:p>
+            <a:pPr indent="0" marL="0">
+              <a:lnSpc>
+                <a:spcPts val="1150"/>
+              </a:lnSpc>
+              <a:buNone/>
+            </a:pPr>
+            <a:r>
+              <a:rPr lang="en-US" sz="900" dirty="0">
+                <a:solidFill>
+                  <a:srgbClr val="3C3C3C"/>
+                </a:solidFill>
+                <a:latin typeface="Pretendard" pitchFamily="34" charset="0"/>
+                <a:ea typeface="Pretendard" pitchFamily="34" charset="-122"/>
+                <a:cs typeface="Pretendard" pitchFamily="34" charset="-120"/>
+              </a:rPr>
+              <a:t>‘골드’ 시대를 지나며 사용 중단. 사실상 잠든 자산</a:t>
+            </a:r>
+            <a:endParaRPr lang="en-US" sz="900" dirty="0"/>
+          </a:p>
+        </p:txBody>
+      </p:sp>
+      <p:sp>
+        <p:nvSpPr>
+          <p:cNvPr id="14" name="Shape 12"/>
+          <p:cNvSpPr/>
+          <p:nvPr/>
+        </p:nvSpPr>
+        <p:spPr>
+          <a:xfrm>
+            <a:off x="658368" y="4187952"/>
+            <a:ext cx="2788920" cy="530352"/>
+          </a:xfrm>
+          <a:prstGeom prst="roundRect">
+            <a:avLst>
+              <a:gd name="adj" fmla="val 15517"/>
+            </a:avLst>
+          </a:prstGeom>
+          <a:solidFill>
+            <a:srgbClr val="EAF1FF"/>
+          </a:solidFill>
+          <a:ln w="12700">
+            <a:solidFill>
+              <a:srgbClr val="0057FF"/>
+            </a:solidFill>
+            <a:prstDash val="solid"/>
+          </a:ln>
+        </p:spPr>
+      </p:sp>
+      <p:sp>
+        <p:nvSpPr>
+          <p:cNvPr id="15" name="Text 13"/>
+          <p:cNvSpPr/>
+          <p:nvPr/>
+        </p:nvSpPr>
+        <p:spPr>
+          <a:xfrm>
+            <a:off x="804672" y="4270248"/>
+            <a:ext cx="658368" cy="219456"/>
+          </a:xfrm>
+          <a:prstGeom prst="rect">
+            <a:avLst/>
+          </a:prstGeom>
+          <a:noFill/>
+          <a:ln/>
+        </p:spPr>
+        <p:txBody>
+          <a:bodyPr wrap="square" lIns="0" tIns="0" rIns="0" bIns="0" rtlCol="0" anchor="t"/>
+          <a:lstStyle/>
+          <a:p>
+            <a:pPr indent="0" marL="0">
+              <a:buNone/>
+            </a:pPr>
+            <a:r>
+              <a:rPr lang="en-US" sz="950" b="1" dirty="0">
+                <a:solidFill>
+                  <a:srgbClr val="0057FF"/>
+                </a:solidFill>
+                <a:latin typeface="Pretendard" pitchFamily="34" charset="0"/>
+                <a:ea typeface="Pretendard" pitchFamily="34" charset="-122"/>
+                <a:cs typeface="Pretendard" pitchFamily="34" charset="-120"/>
+              </a:rPr>
+              <a:t>2019.4</a:t>
+            </a:r>
+            <a:endParaRPr lang="en-US" sz="950" dirty="0"/>
+          </a:p>
+        </p:txBody>
+      </p:sp>
+      <p:sp>
+        <p:nvSpPr>
+          <p:cNvPr id="16" name="Text 14"/>
+          <p:cNvSpPr/>
+          <p:nvPr/>
+        </p:nvSpPr>
+        <p:spPr>
+          <a:xfrm>
+            <a:off x="1499616" y="4261104"/>
+            <a:ext cx="1801368" cy="438912"/>
+          </a:xfrm>
+          <a:prstGeom prst="rect">
+            <a:avLst/>
+          </a:prstGeom>
+          <a:noFill/>
+          <a:ln/>
+        </p:spPr>
+        <p:txBody>
+          <a:bodyPr wrap="square" lIns="0" tIns="0" rIns="0" bIns="0" rtlCol="0" anchor="t"/>
+          <a:lstStyle/>
+          <a:p>
+            <a:pPr indent="0" marL="0">
+              <a:lnSpc>
+                <a:spcPts val="1150"/>
+              </a:lnSpc>
+              <a:buNone/>
+            </a:pPr>
+            <a:r>
+              <a:rPr lang="en-US" sz="900" dirty="0">
+                <a:solidFill>
+                  <a:srgbClr val="191919"/>
+                </a:solidFill>
+                <a:latin typeface="Pretendard" pitchFamily="34" charset="0"/>
+                <a:ea typeface="Pretendard" pitchFamily="34" charset="-122"/>
+                <a:cs typeface="Pretendard" pitchFamily="34" charset="-120"/>
+              </a:rPr>
+              <a:t>‘진로 이즈백’으로 부활 — 겨냥한 세대는 2030</a:t>
+            </a:r>
+            <a:endParaRPr lang="en-US" sz="900" dirty="0"/>
+          </a:p>
+        </p:txBody>
+      </p:sp>
+      <p:sp>
+        <p:nvSpPr>
+          <p:cNvPr id="17" name="Text 15"/>
+          <p:cNvSpPr/>
+          <p:nvPr/>
+        </p:nvSpPr>
+        <p:spPr>
+          <a:xfrm>
+            <a:off x="3703320" y="2651760"/>
+            <a:ext cx="6001207" cy="219456"/>
+          </a:xfrm>
+          <a:prstGeom prst="rect">
+            <a:avLst/>
+          </a:prstGeom>
+          <a:noFill/>
+          <a:ln/>
+        </p:spPr>
+        <p:txBody>
+          <a:bodyPr wrap="square" lIns="0" tIns="0" rIns="0" bIns="0" rtlCol="0" anchor="t"/>
+          <a:lstStyle/>
+          <a:p>
+            <a:pPr indent="0" marL="0">
+              <a:buNone/>
+            </a:pPr>
+            <a:r>
+              <a:rPr lang="en-US" sz="1050" b="1" dirty="0">
+                <a:solidFill>
+                  <a:srgbClr val="191919"/>
+                </a:solidFill>
+                <a:latin typeface="Pretendard" pitchFamily="34" charset="0"/>
+                <a:ea typeface="Pretendard" pitchFamily="34" charset="-122"/>
+                <a:cs typeface="Pretendard" pitchFamily="34" charset="-120"/>
+              </a:rPr>
+              <a:t>무엇을 바꿨나</a:t>
+            </a:r>
+            <a:endParaRPr lang="en-US" sz="1050" dirty="0"/>
+          </a:p>
+        </p:txBody>
+      </p:sp>
+      <p:sp>
+        <p:nvSpPr>
+          <p:cNvPr id="18" name="Shape 16"/>
+          <p:cNvSpPr/>
+          <p:nvPr/>
+        </p:nvSpPr>
+        <p:spPr>
+          <a:xfrm>
+            <a:off x="3703320" y="2944368"/>
+            <a:ext cx="6001207" cy="530352"/>
+          </a:xfrm>
+          <a:prstGeom prst="roundRect">
+            <a:avLst>
+              <a:gd name="adj" fmla="val 15517"/>
             </a:avLst>
           </a:prstGeom>
           <a:solidFill>
@@ -11552,30 +11944,30 @@
       </p:sp>
       <p:sp>
         <p:nvSpPr>
-          <p:cNvPr id="8" name="Text 6"/>
-          <p:cNvSpPr/>
-          <p:nvPr/>
-        </p:nvSpPr>
-        <p:spPr>
-          <a:xfrm>
-            <a:off x="841248" y="2889504"/>
-            <a:ext cx="2188388" cy="219456"/>
-          </a:xfrm>
-          <a:prstGeom prst="rect">
-            <a:avLst/>
-          </a:prstGeom>
-          <a:noFill/>
-          <a:ln/>
-        </p:spPr>
-        <p:txBody>
-          <a:bodyPr wrap="square" lIns="0" tIns="0" rIns="0" bIns="0" rtlCol="0" anchor="t"/>
-          <a:lstStyle/>
-          <a:p>
-            <a:pPr indent="0" marL="0">
-              <a:buNone/>
-            </a:pPr>
-            <a:r>
-              <a:rPr lang="en-US" sz="1050" b="1" dirty="0">
+          <p:cNvPr id="19" name="Text 17"/>
+          <p:cNvSpPr/>
+          <p:nvPr/>
+        </p:nvSpPr>
+        <p:spPr>
+          <a:xfrm>
+            <a:off x="3867912" y="3035808"/>
+            <a:ext cx="274320" cy="201168"/>
+          </a:xfrm>
+          <a:prstGeom prst="rect">
+            <a:avLst/>
+          </a:prstGeom>
+          <a:noFill/>
+          <a:ln/>
+        </p:spPr>
+        <p:txBody>
+          <a:bodyPr wrap="square" lIns="0" tIns="0" rIns="0" bIns="0" rtlCol="0" anchor="t"/>
+          <a:lstStyle/>
+          <a:p>
+            <a:pPr indent="0" marL="0">
+              <a:buNone/>
+            </a:pPr>
+            <a:r>
+              <a:rPr lang="en-US" sz="950" b="1" dirty="0">
                 <a:solidFill>
                   <a:srgbClr val="0057FF"/>
                 </a:solidFill>
@@ -11583,22 +11975,61 @@
                 <a:ea typeface="Pretendard" pitchFamily="34" charset="-122"/>
                 <a:cs typeface="Pretendard" pitchFamily="34" charset="-120"/>
               </a:rPr>
-              <a:t>하이트진로 · 두꺼비</a:t>
-            </a:r>
-            <a:endParaRPr lang="en-US" sz="1050" dirty="0"/>
-          </a:p>
-        </p:txBody>
-      </p:sp>
-      <p:sp>
-        <p:nvSpPr>
-          <p:cNvPr id="9" name="Text 7"/>
-          <p:cNvSpPr/>
-          <p:nvPr/>
-        </p:nvSpPr>
-        <p:spPr>
-          <a:xfrm>
-            <a:off x="841248" y="3108960"/>
-            <a:ext cx="2188388" cy="274320"/>
+              <a:t>01</a:t>
+            </a:r>
+            <a:endParaRPr lang="en-US" sz="950" dirty="0"/>
+          </a:p>
+        </p:txBody>
+      </p:sp>
+      <p:sp>
+        <p:nvSpPr>
+          <p:cNvPr id="20" name="Text 18"/>
+          <p:cNvSpPr/>
+          <p:nvPr/>
+        </p:nvSpPr>
+        <p:spPr>
+          <a:xfrm>
+            <a:off x="4197096" y="3017520"/>
+            <a:ext cx="5342839" cy="219456"/>
+          </a:xfrm>
+          <a:prstGeom prst="rect">
+            <a:avLst/>
+          </a:prstGeom>
+          <a:noFill/>
+          <a:ln/>
+        </p:spPr>
+        <p:txBody>
+          <a:bodyPr wrap="square" lIns="0" tIns="0" rIns="0" bIns="0" rtlCol="0" anchor="t"/>
+          <a:lstStyle/>
+          <a:p>
+            <a:pPr indent="0" marL="0">
+              <a:buNone/>
+            </a:pPr>
+            <a:r>
+              <a:rPr lang="en-US" sz="1100" b="1" dirty="0">
+                <a:solidFill>
+                  <a:srgbClr val="191919"/>
+                </a:solidFill>
+                <a:latin typeface="Pretendard" pitchFamily="34" charset="0"/>
+                <a:ea typeface="Pretendard" pitchFamily="34" charset="-122"/>
+                <a:cs typeface="Pretendard" pitchFamily="34" charset="-120"/>
+              </a:rPr>
+              <a:t>외형은 복원하고, 타깃은 옮겼다</a:t>
+            </a:r>
+            <a:endParaRPr lang="en-US" sz="1100" dirty="0"/>
+          </a:p>
+        </p:txBody>
+      </p:sp>
+      <p:sp>
+        <p:nvSpPr>
+          <p:cNvPr id="21" name="Text 19"/>
+          <p:cNvSpPr/>
+          <p:nvPr/>
+        </p:nvSpPr>
+        <p:spPr>
+          <a:xfrm>
+            <a:off x="4197096" y="3227832"/>
+            <a:ext cx="5342839" cy="237744"/>
           </a:xfrm>
           <a:prstGeom prst="rect">
             <a:avLst/>
@@ -11612,54 +12043,12 @@
           <a:p>
             <a:pPr indent="0" marL="0">
               <a:lnSpc>
-                <a:spcPts val="1000"/>
+                <a:spcPts val="1100"/>
               </a:lnSpc>
               <a:buNone/>
             </a:pPr>
             <a:r>
-              <a:rPr lang="en-US" sz="800" dirty="0">
-                <a:solidFill>
-                  <a:srgbClr val="959595"/>
-                </a:solidFill>
-                <a:latin typeface="Pretendard" pitchFamily="34" charset="0"/>
-                <a:ea typeface="Pretendard" pitchFamily="34" charset="-122"/>
-                <a:cs typeface="Pretendard" pitchFamily="34" charset="-120"/>
-              </a:rPr>
-              <a:t>1950년대 상표 캐릭터 · 90년대 이후 중단</a:t>
-            </a:r>
-            <a:endParaRPr lang="en-US" sz="800" dirty="0"/>
-          </a:p>
-        </p:txBody>
-      </p:sp>
-      <p:sp>
-        <p:nvSpPr>
-          <p:cNvPr id="10" name="Text 8"/>
-          <p:cNvSpPr/>
-          <p:nvPr/>
-        </p:nvSpPr>
-        <p:spPr>
-          <a:xfrm>
-            <a:off x="841248" y="3438144"/>
-            <a:ext cx="2188388" cy="658368"/>
-          </a:xfrm>
-          <a:prstGeom prst="rect">
-            <a:avLst/>
-          </a:prstGeom>
-          <a:noFill/>
-          <a:ln/>
-        </p:spPr>
-        <p:txBody>
-          <a:bodyPr wrap="square" lIns="0" tIns="0" rIns="0" bIns="0" rtlCol="0" anchor="t"/>
-          <a:lstStyle/>
-          <a:p>
-            <a:pPr indent="0" marL="0">
-              <a:lnSpc>
-                <a:spcPts val="1200"/>
-              </a:lnSpc>
-              <a:buNone/>
-            </a:pPr>
-            <a:r>
-              <a:rPr lang="en-US" sz="900" dirty="0">
+              <a:rPr lang="en-US" sz="850" dirty="0">
                 <a:solidFill>
                   <a:srgbClr val="3C3C3C"/>
                 </a:solidFill>
@@ -11667,164 +12056,26 @@
                 <a:ea typeface="Pretendard" pitchFamily="34" charset="-122"/>
                 <a:cs typeface="Pretendard" pitchFamily="34" charset="-120"/>
               </a:rPr>
-              <a:t>라벨과 캐릭터는 복원하되 </a:t>
-            </a:r>
-            <a:pPr indent="0" marL="0">
-              <a:lnSpc>
-                <a:spcPts val="1200"/>
-              </a:lnSpc>
-              <a:buNone/>
-            </a:pPr>
-            <a:r>
-              <a:rPr lang="en-US" sz="900" b="1" dirty="0">
-                <a:solidFill>
-                  <a:srgbClr val="191919"/>
-                </a:solidFill>
-                <a:latin typeface="Pretendard" pitchFamily="34" charset="0"/>
-                <a:ea typeface="Pretendard" pitchFamily="34" charset="-122"/>
-                <a:cs typeface="Pretendard" pitchFamily="34" charset="-120"/>
-              </a:rPr>
-              <a:t>2030용으로 재배치</a:t>
-            </a:r>
-            <a:pPr indent="0" marL="0">
-              <a:lnSpc>
-                <a:spcPts val="1200"/>
-              </a:lnSpc>
-              <a:buNone/>
-            </a:pPr>
-            <a:r>
-              <a:rPr lang="en-US" sz="900" dirty="0">
-                <a:solidFill>
-                  <a:srgbClr val="3C3C3C"/>
-                </a:solidFill>
-                <a:latin typeface="Pretendard" pitchFamily="34" charset="0"/>
-                <a:ea typeface="Pretendard" pitchFamily="34" charset="-122"/>
-                <a:cs typeface="Pretendard" pitchFamily="34" charset="-120"/>
-              </a:rPr>
-              <a:t>(도수 16.9도). 팝업·굿즈·숏폼으로 확장.</a:t>
-            </a:r>
-            <a:endParaRPr lang="en-US" sz="900" dirty="0"/>
-          </a:p>
-        </p:txBody>
-      </p:sp>
-      <p:sp>
-        <p:nvSpPr>
-          <p:cNvPr id="11" name="Text 9"/>
-          <p:cNvSpPr/>
-          <p:nvPr/>
-        </p:nvSpPr>
-        <p:spPr>
-          <a:xfrm>
-            <a:off x="841248" y="4151376"/>
-            <a:ext cx="2188388" cy="420624"/>
-          </a:xfrm>
-          <a:prstGeom prst="rect">
-            <a:avLst/>
-          </a:prstGeom>
-          <a:noFill/>
-          <a:ln/>
-        </p:spPr>
-        <p:txBody>
-          <a:bodyPr wrap="square" lIns="0" tIns="0" rIns="0" bIns="0" rtlCol="0" anchor="t"/>
-          <a:lstStyle/>
-          <a:p>
-            <a:pPr indent="0" marL="0">
-              <a:lnSpc>
-                <a:spcPts val="1250"/>
-              </a:lnSpc>
-              <a:buNone/>
-            </a:pPr>
-            <a:r>
-              <a:rPr lang="en-US" sz="950" b="1" dirty="0">
-                <a:solidFill>
-                  <a:srgbClr val="0057FF"/>
-                </a:solidFill>
-                <a:latin typeface="Pretendard" pitchFamily="34" charset="0"/>
-                <a:ea typeface="Pretendard" pitchFamily="34" charset="-122"/>
-                <a:cs typeface="Pretendard" pitchFamily="34" charset="-120"/>
-              </a:rPr>
-              <a:t>연간 목표를 2개월에 달성</a:t>
-            </a:r>
-            <a:endParaRPr lang="en-US" sz="950" dirty="0"/>
-          </a:p>
-          <a:p>
-            <a:pPr indent="0" marL="0">
-              <a:lnSpc>
-                <a:spcPts val="1250"/>
-              </a:lnSpc>
-              <a:buNone/>
-            </a:pPr>
-            <a:r>
-              <a:rPr lang="en-US" sz="950" b="1" dirty="0">
-                <a:solidFill>
-                  <a:srgbClr val="0057FF"/>
-                </a:solidFill>
-                <a:latin typeface="Pretendard" pitchFamily="34" charset="0"/>
-                <a:ea typeface="Pretendard" pitchFamily="34" charset="-122"/>
-                <a:cs typeface="Pretendard" pitchFamily="34" charset="-120"/>
-              </a:rPr>
-              <a:t>4년 만에 누적 15억 병</a:t>
-            </a:r>
-            <a:endParaRPr lang="en-US" sz="950" dirty="0"/>
-          </a:p>
-        </p:txBody>
-      </p:sp>
-      <p:sp>
-        <p:nvSpPr>
-          <p:cNvPr id="12" name="Text 10"/>
-          <p:cNvSpPr/>
-          <p:nvPr/>
-        </p:nvSpPr>
-        <p:spPr>
-          <a:xfrm>
-            <a:off x="841248" y="4581144"/>
-            <a:ext cx="2188388" cy="292608"/>
-          </a:xfrm>
-          <a:prstGeom prst="rect">
-            <a:avLst/>
-          </a:prstGeom>
-          <a:noFill/>
-          <a:ln/>
-        </p:spPr>
-        <p:txBody>
-          <a:bodyPr wrap="square" lIns="0" tIns="0" rIns="0" bIns="0" rtlCol="0" anchor="t"/>
-          <a:lstStyle/>
-          <a:p>
-            <a:pPr indent="0" marL="0">
-              <a:lnSpc>
-                <a:spcPts val="1000"/>
-              </a:lnSpc>
-              <a:buNone/>
-            </a:pPr>
-            <a:r>
-              <a:rPr lang="en-US" sz="800" dirty="0">
-                <a:solidFill>
-                  <a:srgbClr val="707070"/>
-                </a:solidFill>
-                <a:latin typeface="Pretendard" pitchFamily="34" charset="0"/>
-                <a:ea typeface="Pretendard" pitchFamily="34" charset="-122"/>
-                <a:cs typeface="Pretendard" pitchFamily="34" charset="-120"/>
-              </a:rPr>
-              <a:t>캐릭터샵 ‘두껍상회’ 누적 45만 명</a:t>
-            </a:r>
-            <a:endParaRPr lang="en-US" sz="800" dirty="0"/>
-          </a:p>
-        </p:txBody>
-      </p:sp>
-      <p:sp>
-        <p:nvSpPr>
-          <p:cNvPr id="13" name="Shape 11"/>
-          <p:cNvSpPr/>
-          <p:nvPr/>
-        </p:nvSpPr>
-        <p:spPr>
-          <a:xfrm>
-            <a:off x="3431972" y="2724912"/>
-            <a:ext cx="2554148" cy="2212848"/>
+              <a:t>70~80년대 라벨과 캐릭터는 그대로 살리되, 말을 거는 세대를 2030으로 바꿨다.</a:t>
+            </a:r>
+            <a:endParaRPr lang="en-US" sz="850" dirty="0"/>
+          </a:p>
+        </p:txBody>
+      </p:sp>
+      <p:sp>
+        <p:nvSpPr>
+          <p:cNvPr id="22" name="Shape 20"/>
+          <p:cNvSpPr/>
+          <p:nvPr/>
+        </p:nvSpPr>
+        <p:spPr>
+          <a:xfrm>
+            <a:off x="3703320" y="3566160"/>
+            <a:ext cx="6001207" cy="530352"/>
           </a:xfrm>
           <a:prstGeom prst="roundRect">
             <a:avLst>
-              <a:gd name="adj" fmla="val 3719"/>
+              <a:gd name="adj" fmla="val 15517"/>
             </a:avLst>
           </a:prstGeom>
           <a:solidFill>
@@ -11840,30 +12091,30 @@
       </p:sp>
       <p:sp>
         <p:nvSpPr>
-          <p:cNvPr id="14" name="Text 12"/>
-          <p:cNvSpPr/>
-          <p:nvPr/>
-        </p:nvSpPr>
-        <p:spPr>
-          <a:xfrm>
-            <a:off x="3614852" y="2889504"/>
-            <a:ext cx="2188388" cy="219456"/>
-          </a:xfrm>
-          <a:prstGeom prst="rect">
-            <a:avLst/>
-          </a:prstGeom>
-          <a:noFill/>
-          <a:ln/>
-        </p:spPr>
-        <p:txBody>
-          <a:bodyPr wrap="square" lIns="0" tIns="0" rIns="0" bIns="0" rtlCol="0" anchor="t"/>
-          <a:lstStyle/>
-          <a:p>
-            <a:pPr indent="0" marL="0">
-              <a:buNone/>
-            </a:pPr>
-            <a:r>
-              <a:rPr lang="en-US" sz="1050" b="1" dirty="0">
+          <p:cNvPr id="23" name="Text 21"/>
+          <p:cNvSpPr/>
+          <p:nvPr/>
+        </p:nvSpPr>
+        <p:spPr>
+          <a:xfrm>
+            <a:off x="3867912" y="3657600"/>
+            <a:ext cx="274320" cy="201168"/>
+          </a:xfrm>
+          <a:prstGeom prst="rect">
+            <a:avLst/>
+          </a:prstGeom>
+          <a:noFill/>
+          <a:ln/>
+        </p:spPr>
+        <p:txBody>
+          <a:bodyPr wrap="square" lIns="0" tIns="0" rIns="0" bIns="0" rtlCol="0" anchor="t"/>
+          <a:lstStyle/>
+          <a:p>
+            <a:pPr indent="0" marL="0">
+              <a:buNone/>
+            </a:pPr>
+            <a:r>
+              <a:rPr lang="en-US" sz="950" b="1" dirty="0">
                 <a:solidFill>
                   <a:srgbClr val="0057FF"/>
                 </a:solidFill>
@@ -11871,22 +12122,61 @@
                 <a:ea typeface="Pretendard" pitchFamily="34" charset="-122"/>
                 <a:cs typeface="Pretendard" pitchFamily="34" charset="-120"/>
               </a:rPr>
-              <a:t>대한제분 · 곰표</a:t>
-            </a:r>
-            <a:endParaRPr lang="en-US" sz="1050" dirty="0"/>
-          </a:p>
-        </p:txBody>
-      </p:sp>
-      <p:sp>
-        <p:nvSpPr>
-          <p:cNvPr id="15" name="Text 13"/>
-          <p:cNvSpPr/>
-          <p:nvPr/>
-        </p:nvSpPr>
-        <p:spPr>
-          <a:xfrm>
-            <a:off x="3614852" y="3108960"/>
-            <a:ext cx="2188388" cy="274320"/>
+              <a:t>02</a:t>
+            </a:r>
+            <a:endParaRPr lang="en-US" sz="950" dirty="0"/>
+          </a:p>
+        </p:txBody>
+      </p:sp>
+      <p:sp>
+        <p:nvSpPr>
+          <p:cNvPr id="24" name="Text 22"/>
+          <p:cNvSpPr/>
+          <p:nvPr/>
+        </p:nvSpPr>
+        <p:spPr>
+          <a:xfrm>
+            <a:off x="4197096" y="3639312"/>
+            <a:ext cx="5342839" cy="219456"/>
+          </a:xfrm>
+          <a:prstGeom prst="rect">
+            <a:avLst/>
+          </a:prstGeom>
+          <a:noFill/>
+          <a:ln/>
+        </p:spPr>
+        <p:txBody>
+          <a:bodyPr wrap="square" lIns="0" tIns="0" rIns="0" bIns="0" rtlCol="0" anchor="t"/>
+          <a:lstStyle/>
+          <a:p>
+            <a:pPr indent="0" marL="0">
+              <a:buNone/>
+            </a:pPr>
+            <a:r>
+              <a:rPr lang="en-US" sz="1100" b="1" dirty="0">
+                <a:solidFill>
+                  <a:srgbClr val="191919"/>
+                </a:solidFill>
+                <a:latin typeface="Pretendard" pitchFamily="34" charset="0"/>
+                <a:ea typeface="Pretendard" pitchFamily="34" charset="-122"/>
+                <a:cs typeface="Pretendard" pitchFamily="34" charset="-120"/>
+              </a:rPr>
+              <a:t>캐릭터만 바꾸지 않았다</a:t>
+            </a:r>
+            <a:endParaRPr lang="en-US" sz="1100" dirty="0"/>
+          </a:p>
+        </p:txBody>
+      </p:sp>
+      <p:sp>
+        <p:nvSpPr>
+          <p:cNvPr id="25" name="Text 23"/>
+          <p:cNvSpPr/>
+          <p:nvPr/>
+        </p:nvSpPr>
+        <p:spPr>
+          <a:xfrm>
+            <a:off x="4197096" y="3849624"/>
+            <a:ext cx="5342839" cy="237744"/>
           </a:xfrm>
           <a:prstGeom prst="rect">
             <a:avLst/>
@@ -11900,54 +12190,12 @@
           <a:p>
             <a:pPr indent="0" marL="0">
               <a:lnSpc>
-                <a:spcPts val="1000"/>
+                <a:spcPts val="1100"/>
               </a:lnSpc>
               <a:buNone/>
             </a:pPr>
             <a:r>
-              <a:rPr lang="en-US" sz="800" dirty="0">
-                <a:solidFill>
-                  <a:srgbClr val="959595"/>
-                </a:solidFill>
-                <a:latin typeface="Pretendard" pitchFamily="34" charset="0"/>
-                <a:ea typeface="Pretendard" pitchFamily="34" charset="-122"/>
-                <a:cs typeface="Pretendard" pitchFamily="34" charset="-120"/>
-              </a:rPr>
-              <a:t>1952년 밀가루 포대의 곰</a:t>
-            </a:r>
-            <a:endParaRPr lang="en-US" sz="800" dirty="0"/>
-          </a:p>
-        </p:txBody>
-      </p:sp>
-      <p:sp>
-        <p:nvSpPr>
-          <p:cNvPr id="16" name="Text 14"/>
-          <p:cNvSpPr/>
-          <p:nvPr/>
-        </p:nvSpPr>
-        <p:spPr>
-          <a:xfrm>
-            <a:off x="3614852" y="3438144"/>
-            <a:ext cx="2188388" cy="658368"/>
-          </a:xfrm>
-          <a:prstGeom prst="rect">
-            <a:avLst/>
-          </a:prstGeom>
-          <a:noFill/>
-          <a:ln/>
-        </p:spPr>
-        <p:txBody>
-          <a:bodyPr wrap="square" lIns="0" tIns="0" rIns="0" bIns="0" rtlCol="0" anchor="t"/>
-          <a:lstStyle/>
-          <a:p>
-            <a:pPr indent="0" marL="0">
-              <a:lnSpc>
-                <a:spcPts val="1200"/>
-              </a:lnSpc>
-              <a:buNone/>
-            </a:pPr>
-            <a:r>
-              <a:rPr lang="en-US" sz="900" dirty="0">
+              <a:rPr lang="en-US" sz="850" dirty="0">
                 <a:solidFill>
                   <a:srgbClr val="3C3C3C"/>
                 </a:solidFill>
@@ -11955,164 +12203,26 @@
                 <a:ea typeface="Pretendard" pitchFamily="34" charset="-122"/>
                 <a:cs typeface="Pretendard" pitchFamily="34" charset="-120"/>
               </a:rPr>
-              <a:t>촌스러움을 </a:t>
-            </a:r>
-            <a:pPr indent="0" marL="0">
-              <a:lnSpc>
-                <a:spcPts val="1200"/>
-              </a:lnSpc>
-              <a:buNone/>
-            </a:pPr>
-            <a:r>
-              <a:rPr lang="en-US" sz="900" b="1" dirty="0">
-                <a:solidFill>
-                  <a:srgbClr val="191919"/>
-                </a:solidFill>
-                <a:latin typeface="Pretendard" pitchFamily="34" charset="0"/>
-                <a:ea typeface="Pretendard" pitchFamily="34" charset="-122"/>
-                <a:cs typeface="Pretendard" pitchFamily="34" charset="-120"/>
-              </a:rPr>
-              <a:t>지우지 않고</a:t>
-            </a:r>
-            <a:pPr indent="0" marL="0">
-              <a:lnSpc>
-                <a:spcPts val="1200"/>
-              </a:lnSpc>
-              <a:buNone/>
-            </a:pPr>
-            <a:r>
-              <a:rPr lang="en-US" sz="900" dirty="0">
-                <a:solidFill>
-                  <a:srgbClr val="3C3C3C"/>
-                </a:solidFill>
-                <a:latin typeface="Pretendard" pitchFamily="34" charset="0"/>
-                <a:ea typeface="Pretendard" pitchFamily="34" charset="-122"/>
-                <a:cs typeface="Pretendard" pitchFamily="34" charset="-120"/>
-              </a:rPr>
-              <a:t> 뉴트로 감각으로 재해석. 이종 카테고리 협업으로 노출.</a:t>
-            </a:r>
-            <a:endParaRPr lang="en-US" sz="900" dirty="0"/>
-          </a:p>
-        </p:txBody>
-      </p:sp>
-      <p:sp>
-        <p:nvSpPr>
-          <p:cNvPr id="17" name="Text 15"/>
-          <p:cNvSpPr/>
-          <p:nvPr/>
-        </p:nvSpPr>
-        <p:spPr>
-          <a:xfrm>
-            <a:off x="3614852" y="4151376"/>
-            <a:ext cx="2188388" cy="420624"/>
-          </a:xfrm>
-          <a:prstGeom prst="rect">
-            <a:avLst/>
-          </a:prstGeom>
-          <a:noFill/>
-          <a:ln/>
-        </p:spPr>
-        <p:txBody>
-          <a:bodyPr wrap="square" lIns="0" tIns="0" rIns="0" bIns="0" rtlCol="0" anchor="t"/>
-          <a:lstStyle/>
-          <a:p>
-            <a:pPr indent="0" marL="0">
-              <a:lnSpc>
-                <a:spcPts val="1250"/>
-              </a:lnSpc>
-              <a:buNone/>
-            </a:pPr>
-            <a:r>
-              <a:rPr lang="en-US" sz="950" b="1" dirty="0">
-                <a:solidFill>
-                  <a:srgbClr val="0057FF"/>
-                </a:solidFill>
-                <a:latin typeface="Pretendard" pitchFamily="34" charset="0"/>
-                <a:ea typeface="Pretendard" pitchFamily="34" charset="-122"/>
-                <a:cs typeface="Pretendard" pitchFamily="34" charset="-120"/>
-              </a:rPr>
-              <a:t>밀맥주 약 3년간 6천만 캔</a:t>
-            </a:r>
-            <a:endParaRPr lang="en-US" sz="950" dirty="0"/>
-          </a:p>
-          <a:p>
-            <a:pPr indent="0" marL="0">
-              <a:lnSpc>
-                <a:spcPts val="1250"/>
-              </a:lnSpc>
-              <a:buNone/>
-            </a:pPr>
-            <a:r>
-              <a:rPr lang="en-US" sz="950" b="1" dirty="0">
-                <a:solidFill>
-                  <a:srgbClr val="0057FF"/>
-                </a:solidFill>
-                <a:latin typeface="Pretendard" pitchFamily="34" charset="0"/>
-                <a:ea typeface="Pretendard" pitchFamily="34" charset="-122"/>
-                <a:cs typeface="Pretendard" pitchFamily="34" charset="-120"/>
-              </a:rPr>
-              <a:t>TV 광고 없이 편의점 1위</a:t>
-            </a:r>
-            <a:endParaRPr lang="en-US" sz="950" dirty="0"/>
-          </a:p>
-        </p:txBody>
-      </p:sp>
-      <p:sp>
-        <p:nvSpPr>
-          <p:cNvPr id="18" name="Text 16"/>
-          <p:cNvSpPr/>
-          <p:nvPr/>
-        </p:nvSpPr>
-        <p:spPr>
-          <a:xfrm>
-            <a:off x="3614852" y="4581144"/>
-            <a:ext cx="2188388" cy="292608"/>
-          </a:xfrm>
-          <a:prstGeom prst="rect">
-            <a:avLst/>
-          </a:prstGeom>
-          <a:noFill/>
-          <a:ln/>
-        </p:spPr>
-        <p:txBody>
-          <a:bodyPr wrap="square" lIns="0" tIns="0" rIns="0" bIns="0" rtlCol="0" anchor="t"/>
-          <a:lstStyle/>
-          <a:p>
-            <a:pPr indent="0" marL="0">
-              <a:lnSpc>
-                <a:spcPts val="1000"/>
-              </a:lnSpc>
-              <a:buNone/>
-            </a:pPr>
-            <a:r>
-              <a:rPr lang="en-US" sz="800" dirty="0">
-                <a:solidFill>
-                  <a:srgbClr val="707070"/>
-                </a:solidFill>
-                <a:latin typeface="Pretendard" pitchFamily="34" charset="0"/>
-                <a:ea typeface="Pretendard" pitchFamily="34" charset="-122"/>
-                <a:cs typeface="Pretendard" pitchFamily="34" charset="-120"/>
-              </a:rPr>
-              <a:t>협업 제품 20여 종으로 확장</a:t>
-            </a:r>
-            <a:endParaRPr lang="en-US" sz="800" dirty="0"/>
-          </a:p>
-        </p:txBody>
-      </p:sp>
-      <p:sp>
-        <p:nvSpPr>
-          <p:cNvPr id="19" name="Shape 17"/>
-          <p:cNvSpPr/>
-          <p:nvPr/>
-        </p:nvSpPr>
-        <p:spPr>
-          <a:xfrm>
-            <a:off x="6205576" y="2724912"/>
-            <a:ext cx="2554148" cy="2212848"/>
+              <a:t>도수를 16.9도로 낮춰 제품 자체를 젊은 층 입맛에 맞췄다. 캐릭터와 제품이 같은 말을 했다.</a:t>
+            </a:r>
+            <a:endParaRPr lang="en-US" sz="850" dirty="0"/>
+          </a:p>
+        </p:txBody>
+      </p:sp>
+      <p:sp>
+        <p:nvSpPr>
+          <p:cNvPr id="26" name="Shape 24"/>
+          <p:cNvSpPr/>
+          <p:nvPr/>
+        </p:nvSpPr>
+        <p:spPr>
+          <a:xfrm>
+            <a:off x="3703320" y="4187952"/>
+            <a:ext cx="6001207" cy="530352"/>
           </a:xfrm>
           <a:prstGeom prst="roundRect">
             <a:avLst>
-              <a:gd name="adj" fmla="val 3719"/>
+              <a:gd name="adj" fmla="val 15517"/>
             </a:avLst>
           </a:prstGeom>
           <a:solidFill>
@@ -12128,14 +12238,134 @@
       </p:sp>
       <p:sp>
         <p:nvSpPr>
-          <p:cNvPr id="20" name="Text 18"/>
-          <p:cNvSpPr/>
-          <p:nvPr/>
-        </p:nvSpPr>
-        <p:spPr>
-          <a:xfrm>
-            <a:off x="6388456" y="2889504"/>
-            <a:ext cx="2188388" cy="219456"/>
+          <p:cNvPr id="27" name="Text 25"/>
+          <p:cNvSpPr/>
+          <p:nvPr/>
+        </p:nvSpPr>
+        <p:spPr>
+          <a:xfrm>
+            <a:off x="3867912" y="4279392"/>
+            <a:ext cx="274320" cy="201168"/>
+          </a:xfrm>
+          <a:prstGeom prst="rect">
+            <a:avLst/>
+          </a:prstGeom>
+          <a:noFill/>
+          <a:ln/>
+        </p:spPr>
+        <p:txBody>
+          <a:bodyPr wrap="square" lIns="0" tIns="0" rIns="0" bIns="0" rtlCol="0" anchor="t"/>
+          <a:lstStyle/>
+          <a:p>
+            <a:pPr indent="0" marL="0">
+              <a:buNone/>
+            </a:pPr>
+            <a:r>
+              <a:rPr lang="en-US" sz="950" b="1" dirty="0">
+                <a:solidFill>
+                  <a:srgbClr val="0057FF"/>
+                </a:solidFill>
+                <a:latin typeface="Pretendard" pitchFamily="34" charset="0"/>
+                <a:ea typeface="Pretendard" pitchFamily="34" charset="-122"/>
+                <a:cs typeface="Pretendard" pitchFamily="34" charset="-120"/>
+              </a:rPr>
+              <a:t>03</a:t>
+            </a:r>
+            <a:endParaRPr lang="en-US" sz="950" dirty="0"/>
+          </a:p>
+        </p:txBody>
+      </p:sp>
+      <p:sp>
+        <p:nvSpPr>
+          <p:cNvPr id="28" name="Text 26"/>
+          <p:cNvSpPr/>
+          <p:nvPr/>
+        </p:nvSpPr>
+        <p:spPr>
+          <a:xfrm>
+            <a:off x="4197096" y="4261104"/>
+            <a:ext cx="5342839" cy="219456"/>
+          </a:xfrm>
+          <a:prstGeom prst="rect">
+            <a:avLst/>
+          </a:prstGeom>
+          <a:noFill/>
+          <a:ln/>
+        </p:spPr>
+        <p:txBody>
+          <a:bodyPr wrap="square" lIns="0" tIns="0" rIns="0" bIns="0" rtlCol="0" anchor="t"/>
+          <a:lstStyle/>
+          <a:p>
+            <a:pPr indent="0" marL="0">
+              <a:buNone/>
+            </a:pPr>
+            <a:r>
+              <a:rPr lang="en-US" sz="1100" b="1" dirty="0">
+                <a:solidFill>
+                  <a:srgbClr val="191919"/>
+                </a:solidFill>
+                <a:latin typeface="Pretendard" pitchFamily="34" charset="0"/>
+                <a:ea typeface="Pretendard" pitchFamily="34" charset="-122"/>
+                <a:cs typeface="Pretendard" pitchFamily="34" charset="-120"/>
+              </a:rPr>
+              <a:t>광고 한 편으로 끝내지 않았다</a:t>
+            </a:r>
+            <a:endParaRPr lang="en-US" sz="1100" dirty="0"/>
+          </a:p>
+        </p:txBody>
+      </p:sp>
+      <p:sp>
+        <p:nvSpPr>
+          <p:cNvPr id="29" name="Text 27"/>
+          <p:cNvSpPr/>
+          <p:nvPr/>
+        </p:nvSpPr>
+        <p:spPr>
+          <a:xfrm>
+            <a:off x="4197096" y="4471416"/>
+            <a:ext cx="5342839" cy="237744"/>
+          </a:xfrm>
+          <a:prstGeom prst="rect">
+            <a:avLst/>
+          </a:prstGeom>
+          <a:noFill/>
+          <a:ln/>
+        </p:spPr>
+        <p:txBody>
+          <a:bodyPr wrap="square" lIns="0" tIns="0" rIns="0" bIns="0" rtlCol="0" anchor="t"/>
+          <a:lstStyle/>
+          <a:p>
+            <a:pPr indent="0" marL="0">
+              <a:lnSpc>
+                <a:spcPts val="1100"/>
+              </a:lnSpc>
+              <a:buNone/>
+            </a:pPr>
+            <a:r>
+              <a:rPr lang="en-US" sz="850" dirty="0">
+                <a:solidFill>
+                  <a:srgbClr val="3C3C3C"/>
+                </a:solidFill>
+                <a:latin typeface="Pretendard" pitchFamily="34" charset="0"/>
+                <a:ea typeface="Pretendard" pitchFamily="34" charset="-122"/>
+                <a:cs typeface="Pretendard" pitchFamily="34" charset="-120"/>
+              </a:rPr>
+              <a:t>팝업 ‘두껍상회’·굿즈·인스타 숏폼·웹예능으로 같은 캐릭터를 반복해 쌓았다.</a:t>
+            </a:r>
+            <a:endParaRPr lang="en-US" sz="850" dirty="0"/>
+          </a:p>
+        </p:txBody>
+      </p:sp>
+      <p:sp>
+        <p:nvSpPr>
+          <p:cNvPr id="30" name="Text 28"/>
+          <p:cNvSpPr/>
+          <p:nvPr/>
+        </p:nvSpPr>
+        <p:spPr>
+          <a:xfrm>
+            <a:off x="9960559" y="2651760"/>
+            <a:ext cx="1572768" cy="219456"/>
           </a:xfrm>
           <a:prstGeom prst="rect">
             <a:avLst/>
@@ -12153,13 +12383,13 @@
             <a:r>
               <a:rPr lang="en-US" sz="1050" b="1" dirty="0">
                 <a:solidFill>
-                  <a:srgbClr val="0057FF"/>
-                </a:solidFill>
-                <a:latin typeface="Pretendard" pitchFamily="34" charset="0"/>
-                <a:ea typeface="Pretendard" pitchFamily="34" charset="-122"/>
-                <a:cs typeface="Pretendard" pitchFamily="34" charset="-120"/>
-              </a:rPr>
-              <a:t>KFC · 커널 샌더스</a:t>
+                  <a:srgbClr val="191919"/>
+                </a:solidFill>
+                <a:latin typeface="Pretendard" pitchFamily="34" charset="0"/>
+                <a:ea typeface="Pretendard" pitchFamily="34" charset="-122"/>
+                <a:cs typeface="Pretendard" pitchFamily="34" charset="-120"/>
+              </a:rPr>
+              <a:t>결과</a:t>
             </a:r>
             <a:endParaRPr lang="en-US" sz="1050" dirty="0"/>
           </a:p>
@@ -12167,240 +12397,18 @@
       </p:sp>
       <p:sp>
         <p:nvSpPr>
-          <p:cNvPr id="21" name="Text 19"/>
-          <p:cNvSpPr/>
-          <p:nvPr/>
-        </p:nvSpPr>
-        <p:spPr>
-          <a:xfrm>
-            <a:off x="6388456" y="3108960"/>
-            <a:ext cx="2188388" cy="274320"/>
-          </a:xfrm>
-          <a:prstGeom prst="rect">
-            <a:avLst/>
-          </a:prstGeom>
-          <a:noFill/>
-          <a:ln/>
-        </p:spPr>
-        <p:txBody>
-          <a:bodyPr wrap="square" lIns="0" tIns="0" rIns="0" bIns="0" rtlCol="0" anchor="t"/>
-          <a:lstStyle/>
-          <a:p>
-            <a:pPr indent="0" marL="0">
-              <a:lnSpc>
-                <a:spcPts val="1000"/>
-              </a:lnSpc>
-              <a:buNone/>
-            </a:pPr>
-            <a:r>
-              <a:rPr lang="en-US" sz="800" dirty="0">
-                <a:solidFill>
-                  <a:srgbClr val="959595"/>
-                </a:solidFill>
-                <a:latin typeface="Pretendard" pitchFamily="34" charset="0"/>
-                <a:ea typeface="Pretendard" pitchFamily="34" charset="-122"/>
-                <a:cs typeface="Pretendard" pitchFamily="34" charset="-120"/>
-              </a:rPr>
-              <a:t>창업자 캐릭터 · 사실상 방치</a:t>
-            </a:r>
-            <a:endParaRPr lang="en-US" sz="800" dirty="0"/>
-          </a:p>
-        </p:txBody>
-      </p:sp>
-      <p:sp>
-        <p:nvSpPr>
-          <p:cNvPr id="22" name="Text 20"/>
-          <p:cNvSpPr/>
-          <p:nvPr/>
-        </p:nvSpPr>
-        <p:spPr>
-          <a:xfrm>
-            <a:off x="6388456" y="3438144"/>
-            <a:ext cx="2188388" cy="658368"/>
-          </a:xfrm>
-          <a:prstGeom prst="rect">
-            <a:avLst/>
-          </a:prstGeom>
-          <a:noFill/>
-          <a:ln/>
-        </p:spPr>
-        <p:txBody>
-          <a:bodyPr wrap="square" lIns="0" tIns="0" rIns="0" bIns="0" rtlCol="0" anchor="t"/>
-          <a:lstStyle/>
-          <a:p>
-            <a:pPr indent="0" marL="0">
-              <a:lnSpc>
-                <a:spcPts val="1200"/>
-              </a:lnSpc>
-              <a:buNone/>
-            </a:pPr>
-            <a:r>
-              <a:rPr lang="en-US" sz="900" dirty="0">
-                <a:solidFill>
-                  <a:srgbClr val="3C3C3C"/>
-                </a:solidFill>
-                <a:latin typeface="Pretendard" pitchFamily="34" charset="0"/>
-                <a:ea typeface="Pretendard" pitchFamily="34" charset="-122"/>
-                <a:cs typeface="Pretendard" pitchFamily="34" charset="-120"/>
-              </a:rPr>
-              <a:t>창업자를 광고 </a:t>
-            </a:r>
-            <a:pPr indent="0" marL="0">
-              <a:lnSpc>
-                <a:spcPts val="1200"/>
-              </a:lnSpc>
-              <a:buNone/>
-            </a:pPr>
-            <a:r>
-              <a:rPr lang="en-US" sz="900" b="1" dirty="0">
-                <a:solidFill>
-                  <a:srgbClr val="191919"/>
-                </a:solidFill>
-                <a:latin typeface="Pretendard" pitchFamily="34" charset="0"/>
-                <a:ea typeface="Pretendard" pitchFamily="34" charset="-122"/>
-                <a:cs typeface="Pretendard" pitchFamily="34" charset="-120"/>
-              </a:rPr>
-              <a:t>전면으로 복귀</a:t>
-            </a:r>
-            <a:pPr indent="0" marL="0">
-              <a:lnSpc>
-                <a:spcPts val="1200"/>
-              </a:lnSpc>
-              <a:buNone/>
-            </a:pPr>
-            <a:r>
-              <a:rPr lang="en-US" sz="900" dirty="0">
-                <a:solidFill>
-                  <a:srgbClr val="3C3C3C"/>
-                </a:solidFill>
-                <a:latin typeface="Pretendard" pitchFamily="34" charset="0"/>
-                <a:ea typeface="Pretendard" pitchFamily="34" charset="-122"/>
-                <a:cs typeface="Pretendard" pitchFamily="34" charset="-120"/>
-              </a:rPr>
-              <a:t>시키고, 연기하는 배우를 계속 교체해 화제성을 유지.</a:t>
-            </a:r>
-            <a:endParaRPr lang="en-US" sz="900" dirty="0"/>
-          </a:p>
-        </p:txBody>
-      </p:sp>
-      <p:sp>
-        <p:nvSpPr>
-          <p:cNvPr id="23" name="Text 21"/>
-          <p:cNvSpPr/>
-          <p:nvPr/>
-        </p:nvSpPr>
-        <p:spPr>
-          <a:xfrm>
-            <a:off x="6388456" y="4151376"/>
-            <a:ext cx="2188388" cy="420624"/>
-          </a:xfrm>
-          <a:prstGeom prst="rect">
-            <a:avLst/>
-          </a:prstGeom>
-          <a:noFill/>
-          <a:ln/>
-        </p:spPr>
-        <p:txBody>
-          <a:bodyPr wrap="square" lIns="0" tIns="0" rIns="0" bIns="0" rtlCol="0" anchor="t"/>
-          <a:lstStyle/>
-          <a:p>
-            <a:pPr indent="0" marL="0">
-              <a:lnSpc>
-                <a:spcPts val="1250"/>
-              </a:lnSpc>
-              <a:buNone/>
-            </a:pPr>
-            <a:r>
-              <a:rPr lang="en-US" sz="950" b="1" dirty="0">
-                <a:solidFill>
-                  <a:srgbClr val="0057FF"/>
-                </a:solidFill>
-                <a:latin typeface="Pretendard" pitchFamily="34" charset="0"/>
-                <a:ea typeface="Pretendard" pitchFamily="34" charset="-122"/>
-                <a:cs typeface="Pretendard" pitchFamily="34" charset="-120"/>
-              </a:rPr>
-              <a:t>약 10년 하락 뒤</a:t>
-            </a:r>
-            <a:endParaRPr lang="en-US" sz="950" dirty="0"/>
-          </a:p>
-          <a:p>
-            <a:pPr indent="0" marL="0">
-              <a:lnSpc>
-                <a:spcPts val="1250"/>
-              </a:lnSpc>
-              <a:buNone/>
-            </a:pPr>
-            <a:r>
-              <a:rPr lang="en-US" sz="950" b="1" dirty="0">
-                <a:solidFill>
-                  <a:srgbClr val="0057FF"/>
-                </a:solidFill>
-                <a:latin typeface="Pretendard" pitchFamily="34" charset="0"/>
-                <a:ea typeface="Pretendard" pitchFamily="34" charset="-122"/>
-                <a:cs typeface="Pretendard" pitchFamily="34" charset="-120"/>
-              </a:rPr>
-              <a:t>매출 3% 성장 전환</a:t>
-            </a:r>
-            <a:endParaRPr lang="en-US" sz="950" dirty="0"/>
-          </a:p>
-        </p:txBody>
-      </p:sp>
-      <p:sp>
-        <p:nvSpPr>
-          <p:cNvPr id="24" name="Text 22"/>
-          <p:cNvSpPr/>
-          <p:nvPr/>
-        </p:nvSpPr>
-        <p:spPr>
-          <a:xfrm>
-            <a:off x="6388456" y="4581144"/>
-            <a:ext cx="2188388" cy="292608"/>
-          </a:xfrm>
-          <a:prstGeom prst="rect">
-            <a:avLst/>
-          </a:prstGeom>
-          <a:noFill/>
-          <a:ln/>
-        </p:spPr>
-        <p:txBody>
-          <a:bodyPr wrap="square" lIns="0" tIns="0" rIns="0" bIns="0" rtlCol="0" anchor="t"/>
-          <a:lstStyle/>
-          <a:p>
-            <a:pPr indent="0" marL="0">
-              <a:lnSpc>
-                <a:spcPts val="1000"/>
-              </a:lnSpc>
-              <a:buNone/>
-            </a:pPr>
-            <a:r>
-              <a:rPr lang="en-US" sz="800" dirty="0">
-                <a:solidFill>
-                  <a:srgbClr val="707070"/>
-                </a:solidFill>
-                <a:latin typeface="Pretendard" pitchFamily="34" charset="0"/>
-                <a:ea typeface="Pretendard" pitchFamily="34" charset="-122"/>
-                <a:cs typeface="Pretendard" pitchFamily="34" charset="-120"/>
-              </a:rPr>
-              <a:t>“초기 반응 80% 긍정·20% 부정 — 무관심 100%보다 낫다”</a:t>
-            </a:r>
-            <a:endParaRPr lang="en-US" sz="800" dirty="0"/>
-          </a:p>
-        </p:txBody>
-      </p:sp>
-      <p:sp>
-        <p:nvSpPr>
-          <p:cNvPr id="25" name="Shape 23"/>
-          <p:cNvSpPr/>
-          <p:nvPr/>
-        </p:nvSpPr>
-        <p:spPr>
-          <a:xfrm>
-            <a:off x="8979179" y="2724912"/>
-            <a:ext cx="2554148" cy="2212848"/>
+          <p:cNvPr id="31" name="Shape 29"/>
+          <p:cNvSpPr/>
+          <p:nvPr/>
+        </p:nvSpPr>
+        <p:spPr>
+          <a:xfrm>
+            <a:off x="9960559" y="2944368"/>
+            <a:ext cx="1572768" cy="530352"/>
           </a:xfrm>
           <a:prstGeom prst="roundRect">
             <a:avLst>
-              <a:gd name="adj" fmla="val 3719"/>
+              <a:gd name="adj" fmla="val 15517"/>
             </a:avLst>
           </a:prstGeom>
           <a:solidFill>
@@ -12416,30 +12424,30 @@
       </p:sp>
       <p:sp>
         <p:nvSpPr>
-          <p:cNvPr id="26" name="Text 24"/>
-          <p:cNvSpPr/>
-          <p:nvPr/>
-        </p:nvSpPr>
-        <p:spPr>
-          <a:xfrm>
-            <a:off x="9162059" y="2889504"/>
-            <a:ext cx="2188388" cy="219456"/>
-          </a:xfrm>
-          <a:prstGeom prst="rect">
-            <a:avLst/>
-          </a:prstGeom>
-          <a:noFill/>
-          <a:ln/>
-        </p:spPr>
-        <p:txBody>
-          <a:bodyPr wrap="square" lIns="0" tIns="0" rIns="0" bIns="0" rtlCol="0" anchor="t"/>
-          <a:lstStyle/>
-          <a:p>
-            <a:pPr indent="0" marL="0">
-              <a:buNone/>
-            </a:pPr>
-            <a:r>
-              <a:rPr lang="en-US" sz="1050" b="1" dirty="0">
+          <p:cNvPr id="32" name="Text 30"/>
+          <p:cNvSpPr/>
+          <p:nvPr/>
+        </p:nvSpPr>
+        <p:spPr>
+          <a:xfrm>
+            <a:off x="9960559" y="3008376"/>
+            <a:ext cx="1572768" cy="237744"/>
+          </a:xfrm>
+          <a:prstGeom prst="rect">
+            <a:avLst/>
+          </a:prstGeom>
+          <a:noFill/>
+          <a:ln/>
+        </p:spPr>
+        <p:txBody>
+          <a:bodyPr wrap="square" lIns="0" tIns="0" rIns="0" bIns="0" rtlCol="0" anchor="t"/>
+          <a:lstStyle/>
+          <a:p>
+            <a:pPr algn="ctr" indent="0" marL="0">
+              <a:buNone/>
+            </a:pPr>
+            <a:r>
+              <a:rPr lang="en-US" sz="1500" b="1" dirty="0">
                 <a:solidFill>
                   <a:srgbClr val="0057FF"/>
                 </a:solidFill>
@@ -12447,221 +12455,61 @@
                 <a:ea typeface="Pretendard" pitchFamily="34" charset="-122"/>
                 <a:cs typeface="Pretendard" pitchFamily="34" charset="-120"/>
               </a:rPr>
-              <a:t>미쉐린 · 비벤덤</a:t>
-            </a:r>
-            <a:endParaRPr lang="en-US" sz="1050" dirty="0"/>
-          </a:p>
-        </p:txBody>
-      </p:sp>
-      <p:sp>
-        <p:nvSpPr>
-          <p:cNvPr id="27" name="Text 25"/>
-          <p:cNvSpPr/>
-          <p:nvPr/>
-        </p:nvSpPr>
-        <p:spPr>
-          <a:xfrm>
-            <a:off x="9162059" y="3108960"/>
-            <a:ext cx="2188388" cy="274320"/>
-          </a:xfrm>
-          <a:prstGeom prst="rect">
-            <a:avLst/>
-          </a:prstGeom>
-          <a:noFill/>
-          <a:ln/>
-        </p:spPr>
-        <p:txBody>
-          <a:bodyPr wrap="square" lIns="0" tIns="0" rIns="0" bIns="0" rtlCol="0" anchor="t"/>
-          <a:lstStyle/>
-          <a:p>
-            <a:pPr indent="0" marL="0">
+              <a:t>2개월</a:t>
+            </a:r>
+            <a:endParaRPr lang="en-US" sz="1500" dirty="0"/>
+          </a:p>
+        </p:txBody>
+      </p:sp>
+      <p:sp>
+        <p:nvSpPr>
+          <p:cNvPr id="33" name="Text 31"/>
+          <p:cNvSpPr/>
+          <p:nvPr/>
+        </p:nvSpPr>
+        <p:spPr>
+          <a:xfrm>
+            <a:off x="10015423" y="3255264"/>
+            <a:ext cx="1463040" cy="237744"/>
+          </a:xfrm>
+          <a:prstGeom prst="rect">
+            <a:avLst/>
+          </a:prstGeom>
+          <a:noFill/>
+          <a:ln/>
+        </p:spPr>
+        <p:txBody>
+          <a:bodyPr wrap="square" lIns="0" tIns="0" rIns="0" bIns="0" rtlCol="0" anchor="t"/>
+          <a:lstStyle/>
+          <a:p>
+            <a:pPr algn="ctr" indent="0" marL="0">
               <a:lnSpc>
-                <a:spcPts val="1000"/>
+                <a:spcPts val="950"/>
               </a:lnSpc>
               <a:buNone/>
             </a:pPr>
             <a:r>
-              <a:rPr lang="en-US" sz="800" dirty="0">
-                <a:solidFill>
-                  <a:srgbClr val="959595"/>
-                </a:solidFill>
-                <a:latin typeface="Pretendard" pitchFamily="34" charset="0"/>
-                <a:ea typeface="Pretendard" pitchFamily="34" charset="-122"/>
-                <a:cs typeface="Pretendard" pitchFamily="34" charset="-120"/>
-              </a:rPr>
-              <a:t>1898년 마스코트 · 내구재 카테고리</a:t>
-            </a:r>
-            <a:endParaRPr lang="en-US" sz="800" dirty="0"/>
-          </a:p>
-        </p:txBody>
-      </p:sp>
-      <p:sp>
-        <p:nvSpPr>
-          <p:cNvPr id="28" name="Text 26"/>
-          <p:cNvSpPr/>
-          <p:nvPr/>
-        </p:nvSpPr>
-        <p:spPr>
-          <a:xfrm>
-            <a:off x="9162059" y="3438144"/>
-            <a:ext cx="2188388" cy="658368"/>
-          </a:xfrm>
-          <a:prstGeom prst="rect">
-            <a:avLst/>
-          </a:prstGeom>
-          <a:noFill/>
-          <a:ln/>
-        </p:spPr>
-        <p:txBody>
-          <a:bodyPr wrap="square" lIns="0" tIns="0" rIns="0" bIns="0" rtlCol="0" anchor="t"/>
-          <a:lstStyle/>
-          <a:p>
-            <a:pPr indent="0" marL="0">
+              <a:rPr lang="en-US" sz="750" dirty="0">
+                <a:solidFill>
+                  <a:srgbClr val="707070"/>
+                </a:solidFill>
+                <a:latin typeface="Pretendard" pitchFamily="34" charset="0"/>
+                <a:ea typeface="Pretendard" pitchFamily="34" charset="-122"/>
+                <a:cs typeface="Pretendard" pitchFamily="34" charset="-120"/>
+              </a:rPr>
+              <a:t>출시 연간 판매 목표</a:t>
+            </a:r>
+            <a:endParaRPr lang="en-US" sz="750" dirty="0"/>
+          </a:p>
+          <a:p>
+            <a:pPr algn="ctr" indent="0" marL="0">
               <a:lnSpc>
-                <a:spcPts val="1200"/>
+                <a:spcPts val="950"/>
               </a:lnSpc>
               <a:buNone/>
             </a:pPr>
             <a:r>
-              <a:rPr lang="en-US" sz="900" dirty="0">
-                <a:solidFill>
-                  <a:srgbClr val="3C3C3C"/>
-                </a:solidFill>
-                <a:latin typeface="Pretendard" pitchFamily="34" charset="0"/>
-                <a:ea typeface="Pretendard" pitchFamily="34" charset="-122"/>
-                <a:cs typeface="Pretendard" pitchFamily="34" charset="-120"/>
-              </a:rPr>
-              <a:t>1998년 100주년에 체형을 슬림하게, 시가·모노클 제거. </a:t>
-            </a:r>
-            <a:pPr indent="0" marL="0">
-              <a:lnSpc>
-                <a:spcPts val="1200"/>
-              </a:lnSpc>
-              <a:buNone/>
-            </a:pPr>
-            <a:r>
-              <a:rPr lang="en-US" sz="900" b="1" dirty="0">
-                <a:solidFill>
-                  <a:srgbClr val="191919"/>
-                </a:solidFill>
-                <a:latin typeface="Pretendard" pitchFamily="34" charset="0"/>
-                <a:ea typeface="Pretendard" pitchFamily="34" charset="-122"/>
-                <a:cs typeface="Pretendard" pitchFamily="34" charset="-120"/>
-              </a:rPr>
-              <a:t>제품 변화에 맞춰</a:t>
-            </a:r>
-            <a:pPr indent="0" marL="0">
-              <a:lnSpc>
-                <a:spcPts val="1200"/>
-              </a:lnSpc>
-              <a:buNone/>
-            </a:pPr>
-            <a:r>
-              <a:rPr lang="en-US" sz="900" dirty="0">
-                <a:solidFill>
-                  <a:srgbClr val="3C3C3C"/>
-                </a:solidFill>
-                <a:latin typeface="Pretendard" pitchFamily="34" charset="0"/>
-                <a:ea typeface="Pretendard" pitchFamily="34" charset="-122"/>
-                <a:cs typeface="Pretendard" pitchFamily="34" charset="-120"/>
-              </a:rPr>
-              <a:t> 형태를 갱신.</a:t>
-            </a:r>
-            <a:endParaRPr lang="en-US" sz="900" dirty="0"/>
-          </a:p>
-        </p:txBody>
-      </p:sp>
-      <p:sp>
-        <p:nvSpPr>
-          <p:cNvPr id="29" name="Text 27"/>
-          <p:cNvSpPr/>
-          <p:nvPr/>
-        </p:nvSpPr>
-        <p:spPr>
-          <a:xfrm>
-            <a:off x="9162059" y="4151376"/>
-            <a:ext cx="2188388" cy="420624"/>
-          </a:xfrm>
-          <a:prstGeom prst="rect">
-            <a:avLst/>
-          </a:prstGeom>
-          <a:noFill/>
-          <a:ln/>
-        </p:spPr>
-        <p:txBody>
-          <a:bodyPr wrap="square" lIns="0" tIns="0" rIns="0" bIns="0" rtlCol="0" anchor="t"/>
-          <a:lstStyle/>
-          <a:p>
-            <a:pPr indent="0" marL="0">
-              <a:lnSpc>
-                <a:spcPts val="1250"/>
-              </a:lnSpc>
-              <a:buNone/>
-            </a:pPr>
-            <a:r>
-              <a:rPr lang="en-US" sz="950" b="1" dirty="0">
-                <a:solidFill>
-                  <a:srgbClr val="0057FF"/>
-                </a:solidFill>
-                <a:latin typeface="Pretendard" pitchFamily="34" charset="0"/>
-                <a:ea typeface="Pretendard" pitchFamily="34" charset="-122"/>
-                <a:cs typeface="Pretendard" pitchFamily="34" charset="-120"/>
-              </a:rPr>
-              <a:t>고관여 내구재에서</a:t>
-            </a:r>
-            <a:endParaRPr lang="en-US" sz="950" dirty="0"/>
-          </a:p>
-          <a:p>
-            <a:pPr indent="0" marL="0">
-              <a:lnSpc>
-                <a:spcPts val="1250"/>
-              </a:lnSpc>
-              <a:buNone/>
-            </a:pPr>
-            <a:r>
-              <a:rPr lang="en-US" sz="950" b="1" dirty="0">
-                <a:solidFill>
-                  <a:srgbClr val="0057FF"/>
-                </a:solidFill>
-                <a:latin typeface="Pretendard" pitchFamily="34" charset="0"/>
-                <a:ea typeface="Pretendard" pitchFamily="34" charset="-122"/>
-                <a:cs typeface="Pretendard" pitchFamily="34" charset="-120"/>
-              </a:rPr>
-              <a:t>100년 넘게 식별 자산 유지</a:t>
-            </a:r>
-            <a:endParaRPr lang="en-US" sz="950" dirty="0"/>
-          </a:p>
-        </p:txBody>
-      </p:sp>
-      <p:sp>
-        <p:nvSpPr>
-          <p:cNvPr id="30" name="Text 28"/>
-          <p:cNvSpPr/>
-          <p:nvPr/>
-        </p:nvSpPr>
-        <p:spPr>
-          <a:xfrm>
-            <a:off x="9162059" y="4581144"/>
-            <a:ext cx="2188388" cy="292608"/>
-          </a:xfrm>
-          <a:prstGeom prst="rect">
-            <a:avLst/>
-          </a:prstGeom>
-          <a:noFill/>
-          <a:ln/>
-        </p:spPr>
-        <p:txBody>
-          <a:bodyPr wrap="square" lIns="0" tIns="0" rIns="0" bIns="0" rtlCol="0" anchor="t"/>
-          <a:lstStyle/>
-          <a:p>
-            <a:pPr indent="0" marL="0">
-              <a:lnSpc>
-                <a:spcPts val="1000"/>
-              </a:lnSpc>
-              <a:buNone/>
-            </a:pPr>
-            <a:r>
-              <a:rPr lang="en-US" sz="800" dirty="0">
+              <a:rPr lang="en-US" sz="750" dirty="0">
                 <a:solidFill>
                   <a:srgbClr val="707070"/>
                 </a:solidFill>
@@ -12669,34 +12517,34 @@
                 <a:ea typeface="Pretendard" pitchFamily="34" charset="-122"/>
                 <a:cs typeface="Pretendard" pitchFamily="34" charset="-120"/>
               </a:rPr>
-              <a:t>정수기와 같은 고관여·장기 사용 제품군</a:t>
-            </a:r>
-            <a:endParaRPr lang="en-US" sz="800" dirty="0"/>
-          </a:p>
-        </p:txBody>
-      </p:sp>
-      <p:sp>
-        <p:nvSpPr>
-          <p:cNvPr id="31" name="Shape 29"/>
-          <p:cNvSpPr/>
-          <p:nvPr/>
-        </p:nvSpPr>
-        <p:spPr>
-          <a:xfrm>
-            <a:off x="658368" y="5084064"/>
-            <a:ext cx="5981228" cy="713232"/>
+              <a:t>달성까지</a:t>
+            </a:r>
+            <a:endParaRPr lang="en-US" sz="750" dirty="0"/>
+          </a:p>
+        </p:txBody>
+      </p:sp>
+      <p:sp>
+        <p:nvSpPr>
+          <p:cNvPr id="34" name="Shape 32"/>
+          <p:cNvSpPr/>
+          <p:nvPr/>
+        </p:nvSpPr>
+        <p:spPr>
+          <a:xfrm>
+            <a:off x="9960559" y="3566160"/>
+            <a:ext cx="1572768" cy="530352"/>
           </a:xfrm>
           <a:prstGeom prst="roundRect">
             <a:avLst>
-              <a:gd name="adj" fmla="val 11538"/>
+              <a:gd name="adj" fmla="val 15517"/>
             </a:avLst>
           </a:prstGeom>
           <a:solidFill>
-            <a:srgbClr val="FDF5F5"/>
+            <a:srgbClr val="FFFFFF"/>
           </a:solidFill>
           <a:ln w="12700">
             <a:solidFill>
-              <a:srgbClr val="F0C9CB"/>
+              <a:srgbClr val="E8E8E8"/>
             </a:solidFill>
             <a:prstDash val="solid"/>
           </a:ln>
@@ -12704,53 +12552,366 @@
       </p:sp>
       <p:sp>
         <p:nvSpPr>
-          <p:cNvPr id="32" name="Text 30"/>
-          <p:cNvSpPr/>
-          <p:nvPr/>
-        </p:nvSpPr>
-        <p:spPr>
-          <a:xfrm>
-            <a:off x="859536" y="5193792"/>
-            <a:ext cx="5578892" cy="201168"/>
-          </a:xfrm>
-          <a:prstGeom prst="rect">
-            <a:avLst/>
-          </a:prstGeom>
-          <a:noFill/>
-          <a:ln/>
-        </p:spPr>
-        <p:txBody>
-          <a:bodyPr wrap="square" lIns="0" tIns="0" rIns="0" bIns="0" rtlCol="0" anchor="t"/>
-          <a:lstStyle/>
-          <a:p>
-            <a:pPr indent="0" marL="0">
-              <a:buNone/>
-            </a:pPr>
-            <a:r>
-              <a:rPr lang="en-US" sz="950" b="1" dirty="0">
-                <a:solidFill>
-                  <a:srgbClr val="E5484D"/>
-                </a:solidFill>
-                <a:latin typeface="Pretendard" pitchFamily="34" charset="0"/>
-                <a:ea typeface="Pretendard" pitchFamily="34" charset="-122"/>
-                <a:cs typeface="Pretendard" pitchFamily="34" charset="-120"/>
-              </a:rPr>
-              <a:t>반대 사례 · 실패는 여기서 나왔다</a:t>
-            </a:r>
-            <a:endParaRPr lang="en-US" sz="950" dirty="0"/>
-          </a:p>
-        </p:txBody>
-      </p:sp>
-      <p:sp>
-        <p:nvSpPr>
-          <p:cNvPr id="33" name="Text 31"/>
-          <p:cNvSpPr/>
-          <p:nvPr/>
-        </p:nvSpPr>
-        <p:spPr>
-          <a:xfrm>
-            <a:off x="859536" y="5413248"/>
-            <a:ext cx="5578892" cy="347472"/>
+          <p:cNvPr id="35" name="Text 33"/>
+          <p:cNvSpPr/>
+          <p:nvPr/>
+        </p:nvSpPr>
+        <p:spPr>
+          <a:xfrm>
+            <a:off x="9960559" y="3630168"/>
+            <a:ext cx="1572768" cy="237744"/>
+          </a:xfrm>
+          <a:prstGeom prst="rect">
+            <a:avLst/>
+          </a:prstGeom>
+          <a:noFill/>
+          <a:ln/>
+        </p:spPr>
+        <p:txBody>
+          <a:bodyPr wrap="square" lIns="0" tIns="0" rIns="0" bIns="0" rtlCol="0" anchor="t"/>
+          <a:lstStyle/>
+          <a:p>
+            <a:pPr algn="ctr" indent="0" marL="0">
+              <a:buNone/>
+            </a:pPr>
+            <a:r>
+              <a:rPr lang="en-US" sz="1500" b="1" dirty="0">
+                <a:solidFill>
+                  <a:srgbClr val="0057FF"/>
+                </a:solidFill>
+                <a:latin typeface="Pretendard" pitchFamily="34" charset="0"/>
+                <a:ea typeface="Pretendard" pitchFamily="34" charset="-122"/>
+                <a:cs typeface="Pretendard" pitchFamily="34" charset="-120"/>
+              </a:rPr>
+              <a:t>15억 병</a:t>
+            </a:r>
+            <a:endParaRPr lang="en-US" sz="1500" dirty="0"/>
+          </a:p>
+        </p:txBody>
+      </p:sp>
+      <p:sp>
+        <p:nvSpPr>
+          <p:cNvPr id="36" name="Text 34"/>
+          <p:cNvSpPr/>
+          <p:nvPr/>
+        </p:nvSpPr>
+        <p:spPr>
+          <a:xfrm>
+            <a:off x="10015423" y="3877056"/>
+            <a:ext cx="1463040" cy="237744"/>
+          </a:xfrm>
+          <a:prstGeom prst="rect">
+            <a:avLst/>
+          </a:prstGeom>
+          <a:noFill/>
+          <a:ln/>
+        </p:spPr>
+        <p:txBody>
+          <a:bodyPr wrap="square" lIns="0" tIns="0" rIns="0" bIns="0" rtlCol="0" anchor="t"/>
+          <a:lstStyle/>
+          <a:p>
+            <a:pPr algn="ctr" indent="0" marL="0">
+              <a:lnSpc>
+                <a:spcPts val="950"/>
+              </a:lnSpc>
+              <a:buNone/>
+            </a:pPr>
+            <a:r>
+              <a:rPr lang="en-US" sz="750" dirty="0">
+                <a:solidFill>
+                  <a:srgbClr val="707070"/>
+                </a:solidFill>
+                <a:latin typeface="Pretendard" pitchFamily="34" charset="0"/>
+                <a:ea typeface="Pretendard" pitchFamily="34" charset="-122"/>
+                <a:cs typeface="Pretendard" pitchFamily="34" charset="-120"/>
+              </a:rPr>
+              <a:t>4년 만의 누적 판매</a:t>
+            </a:r>
+            <a:endParaRPr lang="en-US" sz="750" dirty="0"/>
+          </a:p>
+          <a:p>
+            <a:pPr algn="ctr" indent="0" marL="0">
+              <a:lnSpc>
+                <a:spcPts val="950"/>
+              </a:lnSpc>
+              <a:buNone/>
+            </a:pPr>
+            <a:r>
+              <a:rPr lang="en-US" sz="750" dirty="0">
+                <a:solidFill>
+                  <a:srgbClr val="707070"/>
+                </a:solidFill>
+                <a:latin typeface="Pretendard" pitchFamily="34" charset="0"/>
+                <a:ea typeface="Pretendard" pitchFamily="34" charset="-122"/>
+                <a:cs typeface="Pretendard" pitchFamily="34" charset="-120"/>
+              </a:rPr>
+              <a:t>(2023.4)</a:t>
+            </a:r>
+            <a:endParaRPr lang="en-US" sz="750" dirty="0"/>
+          </a:p>
+        </p:txBody>
+      </p:sp>
+      <p:sp>
+        <p:nvSpPr>
+          <p:cNvPr id="37" name="Shape 35"/>
+          <p:cNvSpPr/>
+          <p:nvPr/>
+        </p:nvSpPr>
+        <p:spPr>
+          <a:xfrm>
+            <a:off x="9960559" y="4187952"/>
+            <a:ext cx="1572768" cy="530352"/>
+          </a:xfrm>
+          <a:prstGeom prst="roundRect">
+            <a:avLst>
+              <a:gd name="adj" fmla="val 15517"/>
+            </a:avLst>
+          </a:prstGeom>
+          <a:solidFill>
+            <a:srgbClr val="FFFFFF"/>
+          </a:solidFill>
+          <a:ln w="12700">
+            <a:solidFill>
+              <a:srgbClr val="E8E8E8"/>
+            </a:solidFill>
+            <a:prstDash val="solid"/>
+          </a:ln>
+        </p:spPr>
+      </p:sp>
+      <p:sp>
+        <p:nvSpPr>
+          <p:cNvPr id="38" name="Text 36"/>
+          <p:cNvSpPr/>
+          <p:nvPr/>
+        </p:nvSpPr>
+        <p:spPr>
+          <a:xfrm>
+            <a:off x="9960559" y="4251960"/>
+            <a:ext cx="1572768" cy="237744"/>
+          </a:xfrm>
+          <a:prstGeom prst="rect">
+            <a:avLst/>
+          </a:prstGeom>
+          <a:noFill/>
+          <a:ln/>
+        </p:spPr>
+        <p:txBody>
+          <a:bodyPr wrap="square" lIns="0" tIns="0" rIns="0" bIns="0" rtlCol="0" anchor="t"/>
+          <a:lstStyle/>
+          <a:p>
+            <a:pPr algn="ctr" indent="0" marL="0">
+              <a:buNone/>
+            </a:pPr>
+            <a:r>
+              <a:rPr lang="en-US" sz="1500" b="1" dirty="0">
+                <a:solidFill>
+                  <a:srgbClr val="0057FF"/>
+                </a:solidFill>
+                <a:latin typeface="Pretendard" pitchFamily="34" charset="0"/>
+                <a:ea typeface="Pretendard" pitchFamily="34" charset="-122"/>
+                <a:cs typeface="Pretendard" pitchFamily="34" charset="-120"/>
+              </a:rPr>
+              <a:t>45만 명</a:t>
+            </a:r>
+            <a:endParaRPr lang="en-US" sz="1500" dirty="0"/>
+          </a:p>
+        </p:txBody>
+      </p:sp>
+      <p:sp>
+        <p:nvSpPr>
+          <p:cNvPr id="39" name="Text 37"/>
+          <p:cNvSpPr/>
+          <p:nvPr/>
+        </p:nvSpPr>
+        <p:spPr>
+          <a:xfrm>
+            <a:off x="10015423" y="4498848"/>
+            <a:ext cx="1463040" cy="237744"/>
+          </a:xfrm>
+          <a:prstGeom prst="rect">
+            <a:avLst/>
+          </a:prstGeom>
+          <a:noFill/>
+          <a:ln/>
+        </p:spPr>
+        <p:txBody>
+          <a:bodyPr wrap="square" lIns="0" tIns="0" rIns="0" bIns="0" rtlCol="0" anchor="t"/>
+          <a:lstStyle/>
+          <a:p>
+            <a:pPr algn="ctr" indent="0" marL="0">
+              <a:lnSpc>
+                <a:spcPts val="950"/>
+              </a:lnSpc>
+              <a:buNone/>
+            </a:pPr>
+            <a:r>
+              <a:rPr lang="en-US" sz="750" dirty="0">
+                <a:solidFill>
+                  <a:srgbClr val="707070"/>
+                </a:solidFill>
+                <a:latin typeface="Pretendard" pitchFamily="34" charset="0"/>
+                <a:ea typeface="Pretendard" pitchFamily="34" charset="-122"/>
+                <a:cs typeface="Pretendard" pitchFamily="34" charset="-120"/>
+              </a:rPr>
+              <a:t>캐릭터샵 ‘두껍상회’</a:t>
+            </a:r>
+            <a:endParaRPr lang="en-US" sz="750" dirty="0"/>
+          </a:p>
+          <a:p>
+            <a:pPr algn="ctr" indent="0" marL="0">
+              <a:lnSpc>
+                <a:spcPts val="950"/>
+              </a:lnSpc>
+              <a:buNone/>
+            </a:pPr>
+            <a:r>
+              <a:rPr lang="en-US" sz="750" dirty="0">
+                <a:solidFill>
+                  <a:srgbClr val="707070"/>
+                </a:solidFill>
+                <a:latin typeface="Pretendard" pitchFamily="34" charset="0"/>
+                <a:ea typeface="Pretendard" pitchFamily="34" charset="-122"/>
+                <a:cs typeface="Pretendard" pitchFamily="34" charset="-120"/>
+              </a:rPr>
+              <a:t>누적 방문</a:t>
+            </a:r>
+            <a:endParaRPr lang="en-US" sz="750" dirty="0"/>
+          </a:p>
+        </p:txBody>
+      </p:sp>
+      <p:sp>
+        <p:nvSpPr>
+          <p:cNvPr id="40" name="Shape 38"/>
+          <p:cNvSpPr/>
+          <p:nvPr/>
+        </p:nvSpPr>
+        <p:spPr>
+          <a:xfrm>
+            <a:off x="658368" y="4937760"/>
+            <a:ext cx="10874959" cy="822960"/>
+          </a:xfrm>
+          <a:prstGeom prst="roundRect">
+            <a:avLst>
+              <a:gd name="adj" fmla="val 10000"/>
+            </a:avLst>
+          </a:prstGeom>
+          <a:solidFill>
+            <a:srgbClr val="191919"/>
+          </a:solidFill>
+          <a:ln/>
+        </p:spPr>
+      </p:sp>
+      <p:sp>
+        <p:nvSpPr>
+          <p:cNvPr id="41" name="Text 39"/>
+          <p:cNvSpPr/>
+          <p:nvPr/>
+        </p:nvSpPr>
+        <p:spPr>
+          <a:xfrm>
+            <a:off x="914400" y="5138928"/>
+            <a:ext cx="1280160" cy="457200"/>
+          </a:xfrm>
+          <a:prstGeom prst="rect">
+            <a:avLst/>
+          </a:prstGeom>
+          <a:noFill/>
+          <a:ln/>
+        </p:spPr>
+        <p:txBody>
+          <a:bodyPr wrap="square" lIns="0" tIns="0" rIns="0" bIns="0" rtlCol="0" anchor="t"/>
+          <a:lstStyle/>
+          <a:p>
+            <a:pPr indent="0" marL="0">
+              <a:lnSpc>
+                <a:spcPts val="1500"/>
+              </a:lnSpc>
+              <a:buNone/>
+            </a:pPr>
+            <a:r>
+              <a:rPr lang="en-US" sz="1200" b="1" dirty="0">
+                <a:solidFill>
+                  <a:srgbClr val="FFFFFF"/>
+                </a:solidFill>
+                <a:latin typeface="Pretendard" pitchFamily="34" charset="0"/>
+                <a:ea typeface="Pretendard" pitchFamily="34" charset="-122"/>
+                <a:cs typeface="Pretendard" pitchFamily="34" charset="-120"/>
+              </a:rPr>
+              <a:t>우리는 이렇게</a:t>
+            </a:r>
+            <a:endParaRPr lang="en-US" sz="1200" dirty="0"/>
+          </a:p>
+          <a:p>
+            <a:pPr indent="0" marL="0">
+              <a:lnSpc>
+                <a:spcPts val="1500"/>
+              </a:lnSpc>
+              <a:buNone/>
+            </a:pPr>
+            <a:r>
+              <a:rPr lang="en-US" sz="1200" b="1" dirty="0">
+                <a:solidFill>
+                  <a:srgbClr val="FFFFFF"/>
+                </a:solidFill>
+                <a:latin typeface="Pretendard" pitchFamily="34" charset="0"/>
+                <a:ea typeface="Pretendard" pitchFamily="34" charset="-122"/>
+                <a:cs typeface="Pretendard" pitchFamily="34" charset="-120"/>
+              </a:rPr>
+              <a:t>적용한다</a:t>
+            </a:r>
+            <a:endParaRPr lang="en-US" sz="1200" dirty="0"/>
+          </a:p>
+        </p:txBody>
+      </p:sp>
+      <p:sp>
+        <p:nvSpPr>
+          <p:cNvPr id="42" name="Text 40"/>
+          <p:cNvSpPr/>
+          <p:nvPr/>
+        </p:nvSpPr>
+        <p:spPr>
+          <a:xfrm>
+            <a:off x="2395728" y="5074920"/>
+            <a:ext cx="2777642" cy="201168"/>
+          </a:xfrm>
+          <a:prstGeom prst="rect">
+            <a:avLst/>
+          </a:prstGeom>
+          <a:noFill/>
+          <a:ln/>
+        </p:spPr>
+        <p:txBody>
+          <a:bodyPr wrap="square" lIns="0" tIns="0" rIns="0" bIns="0" rtlCol="0" anchor="t"/>
+          <a:lstStyle/>
+          <a:p>
+            <a:pPr indent="0" marL="0">
+              <a:buNone/>
+            </a:pPr>
+            <a:r>
+              <a:rPr lang="en-US" sz="850" b="1" spc="50" kern="0" dirty="0">
+                <a:solidFill>
+                  <a:srgbClr val="2997FF"/>
+                </a:solidFill>
+                <a:latin typeface="Pretendard" pitchFamily="34" charset="0"/>
+                <a:ea typeface="Pretendard" pitchFamily="34" charset="-122"/>
+                <a:cs typeface="Pretendard" pitchFamily="34" charset="-120"/>
+              </a:rPr>
+              <a:t>역할을 옮긴다</a:t>
+            </a:r>
+            <a:endParaRPr lang="en-US" sz="850" dirty="0"/>
+          </a:p>
+        </p:txBody>
+      </p:sp>
+      <p:sp>
+        <p:nvSpPr>
+          <p:cNvPr id="43" name="Text 41"/>
+          <p:cNvSpPr/>
+          <p:nvPr/>
+        </p:nvSpPr>
+        <p:spPr>
+          <a:xfrm>
+            <a:off x="2395728" y="5303520"/>
+            <a:ext cx="2777642" cy="402336"/>
           </a:xfrm>
           <a:prstGeom prst="rect">
             <a:avLst/>
@@ -12771,13 +12932,47 @@
             <a:r>
               <a:rPr lang="en-US" sz="850" dirty="0">
                 <a:solidFill>
-                  <a:srgbClr val="3C3C3C"/>
-                </a:solidFill>
-                <a:latin typeface="Pretendard" pitchFamily="34" charset="0"/>
-                <a:ea typeface="Pretendard" pitchFamily="34" charset="-122"/>
-                <a:cs typeface="Pretendard" pitchFamily="34" charset="-120"/>
-              </a:rPr>
-              <a:t>Planters ‘Mr. Peanut’을 더 어린 캐릭터로 교체(2020) → 역할·톤 혼란과 반발. Cracker Barrel이 캐릭터 로고를 지움(2025) → 주가 급락 뒤 며칠 내 원복.</a:t>
+                  <a:srgbClr val="D6D7DB"/>
+                </a:solidFill>
+                <a:latin typeface="Pretendard" pitchFamily="34" charset="0"/>
+                <a:ea typeface="Pretendard" pitchFamily="34" charset="-122"/>
+                <a:cs typeface="Pretendard" pitchFamily="34" charset="-120"/>
+              </a:rPr>
+              <a:t>펭귄을 ‘얼음정수기 광고 캐릭터’에서 </a:t>
+            </a:r>
+            <a:pPr indent="0" marL="0">
+              <a:lnSpc>
+                <a:spcPts val="1100"/>
+              </a:lnSpc>
+              <a:buNone/>
+            </a:pPr>
+            <a:r>
+              <a:rPr lang="en-US" sz="850" b="1" dirty="0">
+                <a:solidFill>
+                  <a:srgbClr val="FFFFFF"/>
+                </a:solidFill>
+                <a:latin typeface="Pretendard" pitchFamily="34" charset="0"/>
+                <a:ea typeface="Pretendard" pitchFamily="34" charset="-122"/>
+                <a:cs typeface="Pretendard" pitchFamily="34" charset="-120"/>
+              </a:rPr>
+              <a:t>우리 집 준비 매니저</a:t>
+            </a:r>
+            <a:pPr indent="0" marL="0">
+              <a:lnSpc>
+                <a:spcPts val="1100"/>
+              </a:lnSpc>
+              <a:buNone/>
+            </a:pPr>
+            <a:r>
+              <a:rPr lang="en-US" sz="850" dirty="0">
+                <a:solidFill>
+                  <a:srgbClr val="D6D7DB"/>
+                </a:solidFill>
+                <a:latin typeface="Pretendard" pitchFamily="34" charset="0"/>
+                <a:ea typeface="Pretendard" pitchFamily="34" charset="-122"/>
+                <a:cs typeface="Pretendard" pitchFamily="34" charset="-120"/>
+              </a:rPr>
+              <a:t>로 다시 정의한다.</a:t>
             </a:r>
             <a:endParaRPr lang="en-US" sz="850" dirty="0"/>
           </a:p>
@@ -12785,150 +12980,243 @@
       </p:sp>
       <p:sp>
         <p:nvSpPr>
-          <p:cNvPr id="34" name="Shape 32"/>
-          <p:cNvSpPr/>
-          <p:nvPr/>
-        </p:nvSpPr>
-        <p:spPr>
-          <a:xfrm>
-            <a:off x="6859052" y="5084064"/>
-            <a:ext cx="4674276" cy="713232"/>
-          </a:xfrm>
-          <a:prstGeom prst="roundRect">
-            <a:avLst>
-              <a:gd name="adj" fmla="val 11538"/>
-            </a:avLst>
-          </a:prstGeom>
-          <a:solidFill>
-            <a:srgbClr val="EAF1FF"/>
-          </a:solidFill>
-          <a:ln w="15875">
-            <a:solidFill>
-              <a:srgbClr val="0057FF"/>
-            </a:solidFill>
-            <a:prstDash val="solid"/>
-          </a:ln>
-        </p:spPr>
-      </p:sp>
-      <p:sp>
-        <p:nvSpPr>
-          <p:cNvPr id="35" name="Text 33"/>
-          <p:cNvSpPr/>
-          <p:nvPr/>
-        </p:nvSpPr>
-        <p:spPr>
-          <a:xfrm>
-            <a:off x="7060220" y="5084064"/>
-            <a:ext cx="4271940" cy="713232"/>
-          </a:xfrm>
-          <a:prstGeom prst="rect">
-            <a:avLst/>
-          </a:prstGeom>
-          <a:noFill/>
-          <a:ln/>
-        </p:spPr>
-        <p:txBody>
-          <a:bodyPr wrap="square" lIns="0" tIns="0" rIns="0" bIns="0" rtlCol="0" anchor="ctr"/>
+          <p:cNvPr id="44" name="Text 42"/>
+          <p:cNvSpPr/>
+          <p:nvPr/>
+        </p:nvSpPr>
+        <p:spPr>
+          <a:xfrm>
+            <a:off x="5447690" y="5074920"/>
+            <a:ext cx="2777642" cy="201168"/>
+          </a:xfrm>
+          <a:prstGeom prst="rect">
+            <a:avLst/>
+          </a:prstGeom>
+          <a:noFill/>
+          <a:ln/>
+        </p:spPr>
+        <p:txBody>
+          <a:bodyPr wrap="square" lIns="0" tIns="0" rIns="0" bIns="0" rtlCol="0" anchor="t"/>
+          <a:lstStyle/>
+          <a:p>
+            <a:pPr indent="0" marL="0">
+              <a:buNone/>
+            </a:pPr>
+            <a:r>
+              <a:rPr lang="en-US" sz="850" b="1" spc="50" kern="0" dirty="0">
+                <a:solidFill>
+                  <a:srgbClr val="2997FF"/>
+                </a:solidFill>
+                <a:latin typeface="Pretendard" pitchFamily="34" charset="0"/>
+                <a:ea typeface="Pretendard" pitchFamily="34" charset="-122"/>
+                <a:cs typeface="Pretendard" pitchFamily="34" charset="-120"/>
+              </a:rPr>
+              <a:t>제품과 같은 말을 시킨다</a:t>
+            </a:r>
+            <a:endParaRPr lang="en-US" sz="850" dirty="0"/>
+          </a:p>
+        </p:txBody>
+      </p:sp>
+      <p:sp>
+        <p:nvSpPr>
+          <p:cNvPr id="45" name="Text 43"/>
+          <p:cNvSpPr/>
+          <p:nvPr/>
+        </p:nvSpPr>
+        <p:spPr>
+          <a:xfrm>
+            <a:off x="5447690" y="5303520"/>
+            <a:ext cx="2777642" cy="402336"/>
+          </a:xfrm>
+          <a:prstGeom prst="rect">
+            <a:avLst/>
+          </a:prstGeom>
+          <a:noFill/>
+          <a:ln/>
+        </p:spPr>
+        <p:txBody>
+          <a:bodyPr wrap="square" lIns="0" tIns="0" rIns="0" bIns="0" rtlCol="0" anchor="t"/>
           <a:lstStyle/>
           <a:p>
             <a:pPr indent="0" marL="0">
               <a:lnSpc>
-                <a:spcPts val="1600"/>
+                <a:spcPts val="1100"/>
               </a:lnSpc>
               <a:buNone/>
             </a:pPr>
             <a:r>
-              <a:rPr lang="en-US" sz="1200" b="1" dirty="0">
-                <a:solidFill>
-                  <a:srgbClr val="191919"/>
-                </a:solidFill>
-                <a:latin typeface="Pretendard" pitchFamily="34" charset="0"/>
-                <a:ea typeface="Pretendard" pitchFamily="34" charset="-122"/>
-                <a:cs typeface="Pretendard" pitchFamily="34" charset="-120"/>
-              </a:rPr>
-              <a:t>캐릭터를 </a:t>
+              <a:rPr lang="en-US" sz="850" dirty="0">
+                <a:solidFill>
+                  <a:srgbClr val="D6D7DB"/>
+                </a:solidFill>
+                <a:latin typeface="Pretendard" pitchFamily="34" charset="0"/>
+                <a:ea typeface="Pretendard" pitchFamily="34" charset="-122"/>
+                <a:cs typeface="Pretendard" pitchFamily="34" charset="-120"/>
+              </a:rPr>
+              <a:t>펭귄이 줄여주는 준비를 </a:t>
             </a:r>
             <a:pPr indent="0" marL="0">
               <a:lnSpc>
-                <a:spcPts val="1600"/>
+                <a:spcPts val="1100"/>
               </a:lnSpc>
               <a:buNone/>
             </a:pPr>
             <a:r>
-              <a:rPr lang="en-US" sz="1200" b="1" dirty="0">
-                <a:solidFill>
-                  <a:srgbClr val="0057FF"/>
-                </a:solidFill>
-                <a:latin typeface="Pretendard" pitchFamily="34" charset="0"/>
-                <a:ea typeface="Pretendard" pitchFamily="34" charset="-122"/>
-                <a:cs typeface="Pretendard" pitchFamily="34" charset="-120"/>
-              </a:rPr>
-              <a:t>더 어리고 귀엽게</a:t>
+              <a:rPr lang="en-US" sz="850" b="1" dirty="0">
+                <a:solidFill>
+                  <a:srgbClr val="FFFFFF"/>
+                </a:solidFill>
+                <a:latin typeface="Pretendard" pitchFamily="34" charset="0"/>
+                <a:ea typeface="Pretendard" pitchFamily="34" charset="-122"/>
+                <a:cs typeface="Pretendard" pitchFamily="34" charset="-120"/>
+              </a:rPr>
+              <a:t>에스프레카페가 실제로 줄이는 일</a:t>
             </a:r>
             <a:pPr indent="0" marL="0">
               <a:lnSpc>
-                <a:spcPts val="1600"/>
+                <a:spcPts val="1100"/>
               </a:lnSpc>
               <a:buNone/>
             </a:pPr>
             <a:r>
-              <a:rPr lang="en-US" sz="1200" b="1" dirty="0">
-                <a:solidFill>
-                  <a:srgbClr val="191919"/>
-                </a:solidFill>
-                <a:latin typeface="Pretendard" pitchFamily="34" charset="0"/>
-                <a:ea typeface="Pretendard" pitchFamily="34" charset="-122"/>
-                <a:cs typeface="Pretendard" pitchFamily="34" charset="-120"/>
-              </a:rPr>
-              <a:t> 바꾼 쪽이 실패했고, </a:t>
-            </a:r>
+              <a:rPr lang="en-US" sz="850" dirty="0">
+                <a:solidFill>
+                  <a:srgbClr val="D6D7DB"/>
+                </a:solidFill>
+                <a:latin typeface="Pretendard" pitchFamily="34" charset="0"/>
+                <a:ea typeface="Pretendard" pitchFamily="34" charset="-122"/>
+                <a:cs typeface="Pretendard" pitchFamily="34" charset="-120"/>
+              </a:rPr>
+              <a:t>과 일치시킨다.</a:t>
+            </a:r>
+            <a:endParaRPr lang="en-US" sz="850" dirty="0"/>
+          </a:p>
+        </p:txBody>
+      </p:sp>
+      <p:sp>
+        <p:nvSpPr>
+          <p:cNvPr id="46" name="Text 44"/>
+          <p:cNvSpPr/>
+          <p:nvPr/>
+        </p:nvSpPr>
+        <p:spPr>
+          <a:xfrm>
+            <a:off x="8499653" y="5074920"/>
+            <a:ext cx="2777642" cy="201168"/>
+          </a:xfrm>
+          <a:prstGeom prst="rect">
+            <a:avLst/>
+          </a:prstGeom>
+          <a:noFill/>
+          <a:ln/>
+        </p:spPr>
+        <p:txBody>
+          <a:bodyPr wrap="square" lIns="0" tIns="0" rIns="0" bIns="0" rtlCol="0" anchor="t"/>
+          <a:lstStyle/>
+          <a:p>
+            <a:pPr indent="0" marL="0">
+              <a:buNone/>
+            </a:pPr>
+            <a:r>
+              <a:rPr lang="en-US" sz="850" b="1" spc="50" kern="0" dirty="0">
+                <a:solidFill>
+                  <a:srgbClr val="2997FF"/>
+                </a:solidFill>
+                <a:latin typeface="Pretendard" pitchFamily="34" charset="0"/>
+                <a:ea typeface="Pretendard" pitchFamily="34" charset="-122"/>
+                <a:cs typeface="Pretendard" pitchFamily="34" charset="-120"/>
+              </a:rPr>
+              <a:t>축적한다</a:t>
+            </a:r>
+            <a:endParaRPr lang="en-US" sz="850" dirty="0"/>
+          </a:p>
+        </p:txBody>
+      </p:sp>
+      <p:sp>
+        <p:nvSpPr>
+          <p:cNvPr id="47" name="Text 45"/>
+          <p:cNvSpPr/>
+          <p:nvPr/>
+        </p:nvSpPr>
+        <p:spPr>
+          <a:xfrm>
+            <a:off x="8499653" y="5303520"/>
+            <a:ext cx="2777642" cy="402336"/>
+          </a:xfrm>
+          <a:prstGeom prst="rect">
+            <a:avLst/>
+          </a:prstGeom>
+          <a:noFill/>
+          <a:ln/>
+        </p:spPr>
+        <p:txBody>
+          <a:bodyPr wrap="square" lIns="0" tIns="0" rIns="0" bIns="0" rtlCol="0" anchor="t"/>
+          <a:lstStyle/>
+          <a:p>
             <a:pPr indent="0" marL="0">
               <a:lnSpc>
-                <a:spcPts val="1600"/>
+                <a:spcPts val="1100"/>
               </a:lnSpc>
               <a:buNone/>
             </a:pPr>
             <a:r>
-              <a:rPr lang="en-US" sz="1200" b="1" dirty="0">
-                <a:solidFill>
-                  <a:srgbClr val="0057FF"/>
-                </a:solidFill>
-                <a:latin typeface="Pretendard" pitchFamily="34" charset="0"/>
-                <a:ea typeface="Pretendard" pitchFamily="34" charset="-122"/>
-                <a:cs typeface="Pretendard" pitchFamily="34" charset="-120"/>
-              </a:rPr>
-              <a:t>역할을 바꾼</a:t>
+              <a:rPr lang="en-US" sz="850" dirty="0">
+                <a:solidFill>
+                  <a:srgbClr val="D6D7DB"/>
+                </a:solidFill>
+                <a:latin typeface="Pretendard" pitchFamily="34" charset="0"/>
+                <a:ea typeface="Pretendard" pitchFamily="34" charset="-122"/>
+                <a:cs typeface="Pretendard" pitchFamily="34" charset="-120"/>
+              </a:rPr>
+              <a:t>광고 한 편이 아니라 </a:t>
             </a:r>
             <a:pPr indent="0" marL="0">
               <a:lnSpc>
-                <a:spcPts val="1600"/>
+                <a:spcPts val="1100"/>
               </a:lnSpc>
               <a:buNone/>
             </a:pPr>
             <a:r>
-              <a:rPr lang="en-US" sz="1200" b="1" dirty="0">
-                <a:solidFill>
-                  <a:srgbClr val="191919"/>
-                </a:solidFill>
-                <a:latin typeface="Pretendard" pitchFamily="34" charset="0"/>
-                <a:ea typeface="Pretendard" pitchFamily="34" charset="-122"/>
-                <a:cs typeface="Pretendard" pitchFamily="34" charset="-120"/>
-              </a:rPr>
-              <a:t> 쪽이 성공했다.</a:t>
-            </a:r>
-            <a:endParaRPr lang="en-US" sz="1200" dirty="0"/>
-          </a:p>
-        </p:txBody>
-      </p:sp>
-      <p:sp>
-        <p:nvSpPr>
-          <p:cNvPr id="36" name="Text 34"/>
-          <p:cNvSpPr/>
-          <p:nvPr/>
-        </p:nvSpPr>
-        <p:spPr>
-          <a:xfrm>
-            <a:off x="658368" y="5943600"/>
+              <a:rPr lang="en-US" sz="850" b="1" dirty="0">
+                <a:solidFill>
+                  <a:srgbClr val="FFFFFF"/>
+                </a:solidFill>
+                <a:latin typeface="Pretendard" pitchFamily="34" charset="0"/>
+                <a:ea typeface="Pretendard" pitchFamily="34" charset="-122"/>
+                <a:cs typeface="Pretendard" pitchFamily="34" charset="-120"/>
+              </a:rPr>
+              <a:t>숏폼·계산기·팝업·굿즈·CRM</a:t>
+            </a:r>
+            <a:pPr indent="0" marL="0">
+              <a:lnSpc>
+                <a:spcPts val="1100"/>
+              </a:lnSpc>
+              <a:buNone/>
+            </a:pPr>
+            <a:r>
+              <a:rPr lang="en-US" sz="850" dirty="0">
+                <a:solidFill>
+                  <a:srgbClr val="D6D7DB"/>
+                </a:solidFill>
+                <a:latin typeface="Pretendard" pitchFamily="34" charset="0"/>
+                <a:ea typeface="Pretendard" pitchFamily="34" charset="-122"/>
+                <a:cs typeface="Pretendard" pitchFamily="34" charset="-120"/>
+              </a:rPr>
+              <a:t>에 같은 펭귄을 반복한다.</a:t>
+            </a:r>
+            <a:endParaRPr lang="en-US" sz="850" dirty="0"/>
+          </a:p>
+        </p:txBody>
+      </p:sp>
+      <p:sp>
+        <p:nvSpPr>
+          <p:cNvPr id="48" name="Text 46"/>
+          <p:cNvSpPr/>
+          <p:nvPr/>
+        </p:nvSpPr>
+        <p:spPr>
+          <a:xfrm>
+            <a:off x="658368" y="5888736"/>
             <a:ext cx="10874959" cy="219456"/>
           </a:xfrm>
           <a:prstGeom prst="rect">
@@ -12953,7 +13241,7 @@
                 <a:ea typeface="Pretendard" pitchFamily="34" charset="-122"/>
                 <a:cs typeface="Pretendard" pitchFamily="34" charset="-120"/>
               </a:rPr>
-              <a:t>출처: 하이트진로·대한제분 보도자료 및 언론 보도, KFC 캠페인 사례 보도, Michelin 공식 브랜드 히스토리. 상세 링크는 부록.</a:t>
+              <a:t>출처: 하이트진로 보도자료 및 언론 보도(누적 판매 15억 병 2023.4 기준, 두껍상회 누적 방문 45만 명), 이노션 캠페인 사례. 상세 링크는 부록.</a:t>
             </a:r>
             <a:endParaRPr lang="en-US" sz="800" dirty="0"/>
           </a:p>
@@ -12961,7 +13249,7 @@
       </p:sp>
       <p:sp>
         <p:nvSpPr>
-          <p:cNvPr id="37" name="Text 35"/>
+          <p:cNvPr id="49" name="Text 47"/>
           <p:cNvSpPr/>
           <p:nvPr/>
         </p:nvSpPr>
@@ -13000,7 +13288,7 @@
       </p:sp>
       <p:sp>
         <p:nvSpPr>
-          <p:cNvPr id="38" name="Text 36"/>
+          <p:cNvPr id="50" name="Text 48"/>
           <p:cNvSpPr/>
           <p:nvPr/>
         </p:nvSpPr>

--- a/청호나이스-브랜드전략-제안.pptx
+++ b/청호나이스-브랜드전략-제안.pptx
@@ -9481,7 +9481,7 @@
         <p:spPr>
           <a:xfrm>
             <a:off x="658368" y="1024128"/>
-            <a:ext cx="10874959" cy="731520"/>
+            <a:ext cx="10874959" cy="868680"/>
           </a:xfrm>
           <a:prstGeom prst="rect">
             <a:avLst/>
@@ -9495,12 +9495,12 @@
           <a:p>
             <a:pPr indent="0" marL="0">
               <a:lnSpc>
-                <a:spcPts val="3328"/>
+                <a:spcPts val="3200"/>
               </a:lnSpc>
               <a:buNone/>
             </a:pPr>
             <a:r>
-              <a:rPr lang="en-US" sz="2600" b="1" dirty="0">
+              <a:rPr lang="en-US" sz="2500" b="1" dirty="0">
                 <a:solidFill>
                   <a:srgbClr val="191919"/>
                 </a:solidFill>
@@ -9508,16 +9508,16 @@
                 <a:ea typeface="Pretendard" pitchFamily="34" charset="-122"/>
                 <a:cs typeface="Pretendard" pitchFamily="34" charset="-120"/>
               </a:rPr>
-              <a:t>캐릭터를 이용한 </a:t>
+              <a:t>연예인은 주목을 </a:t>
             </a:r>
             <a:pPr indent="0" marL="0">
               <a:lnSpc>
-                <a:spcPts val="3328"/>
+                <a:spcPts val="3200"/>
               </a:lnSpc>
               <a:buNone/>
             </a:pPr>
             <a:r>
-              <a:rPr lang="en-US" sz="2600" b="1" dirty="0">
+              <a:rPr lang="en-US" sz="2500" b="1" dirty="0">
                 <a:solidFill>
                   <a:srgbClr val="0057FF"/>
                 </a:solidFill>
@@ -9525,16 +9525,16 @@
                 <a:ea typeface="Pretendard" pitchFamily="34" charset="-122"/>
                 <a:cs typeface="Pretendard" pitchFamily="34" charset="-120"/>
               </a:rPr>
-              <a:t>브랜드 마케팅</a:t>
+              <a:t>빌리고</a:t>
             </a:r>
             <a:pPr indent="0" marL="0">
               <a:lnSpc>
-                <a:spcPts val="3328"/>
+                <a:spcPts val="3200"/>
               </a:lnSpc>
               <a:buNone/>
             </a:pPr>
             <a:r>
-              <a:rPr lang="en-US" sz="2600" b="1" dirty="0">
+              <a:rPr lang="en-US" sz="2500" b="1" dirty="0">
                 <a:solidFill>
                   <a:srgbClr val="191919"/>
                 </a:solidFill>
@@ -9542,9 +9542,63 @@
                 <a:ea typeface="Pretendard" pitchFamily="34" charset="-122"/>
                 <a:cs typeface="Pretendard" pitchFamily="34" charset="-120"/>
               </a:rPr>
-              <a:t>의 효과.</a:t>
-            </a:r>
-            <a:endParaRPr lang="en-US" sz="2600" dirty="0"/>
+              <a:t>,</a:t>
+            </a:r>
+            <a:endParaRPr lang="en-US" sz="2500" dirty="0"/>
+          </a:p>
+          <a:p>
+            <a:pPr indent="0" marL="0">
+              <a:lnSpc>
+                <a:spcPts val="3200"/>
+              </a:lnSpc>
+              <a:buNone/>
+            </a:pPr>
+            <a:r>
+              <a:rPr lang="en-US" sz="2500" b="1" dirty="0">
+                <a:solidFill>
+                  <a:srgbClr val="191919"/>
+                </a:solidFill>
+                <a:latin typeface="Pretendard" pitchFamily="34" charset="0"/>
+                <a:ea typeface="Pretendard" pitchFamily="34" charset="-122"/>
+                <a:cs typeface="Pretendard" pitchFamily="34" charset="-120"/>
+              </a:rPr>
+              <a:t>캐릭터는 자산을 </a:t>
+            </a:r>
+            <a:pPr indent="0" marL="0">
+              <a:lnSpc>
+                <a:spcPts val="3200"/>
+              </a:lnSpc>
+              <a:buNone/>
+            </a:pPr>
+            <a:r>
+              <a:rPr lang="en-US" sz="2500" b="1" dirty="0">
+                <a:solidFill>
+                  <a:srgbClr val="0057FF"/>
+                </a:solidFill>
+                <a:latin typeface="Pretendard" pitchFamily="34" charset="0"/>
+                <a:ea typeface="Pretendard" pitchFamily="34" charset="-122"/>
+                <a:cs typeface="Pretendard" pitchFamily="34" charset="-120"/>
+              </a:rPr>
+              <a:t>쌓는다</a:t>
+            </a:r>
+            <a:pPr indent="0" marL="0">
+              <a:lnSpc>
+                <a:spcPts val="3200"/>
+              </a:lnSpc>
+              <a:buNone/>
+            </a:pPr>
+            <a:r>
+              <a:rPr lang="en-US" sz="2500" b="1" dirty="0">
+                <a:solidFill>
+                  <a:srgbClr val="191919"/>
+                </a:solidFill>
+                <a:latin typeface="Pretendard" pitchFamily="34" charset="0"/>
+                <a:ea typeface="Pretendard" pitchFamily="34" charset="-122"/>
+                <a:cs typeface="Pretendard" pitchFamily="34" charset="-120"/>
+              </a:rPr>
+              <a:t>.</a:t>
+            </a:r>
+            <a:endParaRPr lang="en-US" sz="2500" dirty="0"/>
           </a:p>
         </p:txBody>
       </p:sp>
@@ -9556,785 +9610,91 @@
         </p:nvSpPr>
         <p:spPr>
           <a:xfrm>
-            <a:off x="658368" y="1810512"/>
-            <a:ext cx="3611880" cy="237744"/>
-          </a:xfrm>
-          <a:prstGeom prst="rect">
-            <a:avLst/>
-          </a:prstGeom>
-          <a:noFill/>
-          <a:ln/>
-        </p:spPr>
-        <p:txBody>
-          <a:bodyPr wrap="square" lIns="0" tIns="0" rIns="0" bIns="0" rtlCol="0" anchor="t"/>
-          <a:lstStyle/>
-          <a:p>
-            <a:pPr indent="0" marL="0">
-              <a:buNone/>
-            </a:pPr>
-            <a:r>
-              <a:rPr lang="en-US" sz="1150" b="1" dirty="0">
-                <a:solidFill>
-                  <a:srgbClr val="191919"/>
-                </a:solidFill>
-                <a:latin typeface="Pretendard" pitchFamily="34" charset="0"/>
-                <a:ea typeface="Pretendard" pitchFamily="34" charset="-122"/>
-                <a:cs typeface="Pretendard" pitchFamily="34" charset="-120"/>
-              </a:rPr>
-              <a:t>캐릭터가 작동하는 방식</a:t>
-            </a:r>
-            <a:endParaRPr lang="en-US" sz="1150" dirty="0"/>
-          </a:p>
-        </p:txBody>
-      </p:sp>
-      <p:sp>
-        <p:nvSpPr>
-          <p:cNvPr id="6" name="Shape 4"/>
-          <p:cNvSpPr/>
-          <p:nvPr/>
-        </p:nvSpPr>
-        <p:spPr>
-          <a:xfrm>
-            <a:off x="795528" y="2450592"/>
-            <a:ext cx="0" cy="384048"/>
+            <a:off x="1408176" y="2395728"/>
+            <a:ext cx="1522476" cy="219456"/>
+          </a:xfrm>
+          <a:prstGeom prst="rect">
+            <a:avLst/>
+          </a:prstGeom>
+          <a:noFill/>
+          <a:ln/>
+        </p:spPr>
+        <p:txBody>
+          <a:bodyPr wrap="square" lIns="0" tIns="0" rIns="0" bIns="0" rtlCol="0" anchor="t"/>
+          <a:lstStyle/>
+          <a:p>
+            <a:pPr indent="0" marL="0">
+              <a:buNone/>
+            </a:pPr>
+            <a:r>
+              <a:rPr lang="en-US" sz="1050" b="1" dirty="0">
+                <a:solidFill>
+                  <a:srgbClr val="707070"/>
+                </a:solidFill>
+                <a:latin typeface="Pretendard" pitchFamily="34" charset="0"/>
+                <a:ea typeface="Pretendard" pitchFamily="34" charset="-122"/>
+                <a:cs typeface="Pretendard" pitchFamily="34" charset="-120"/>
+              </a:rPr>
+              <a:t>연예인 · 빌린다</a:t>
+            </a:r>
+            <a:endParaRPr lang="en-US" sz="1050" dirty="0"/>
+          </a:p>
+        </p:txBody>
+      </p:sp>
+      <p:sp>
+        <p:nvSpPr>
+          <p:cNvPr id="6" name="Text 4"/>
+          <p:cNvSpPr/>
+          <p:nvPr/>
+        </p:nvSpPr>
+        <p:spPr>
+          <a:xfrm>
+            <a:off x="2930652" y="2395728"/>
+            <a:ext cx="1522476" cy="219456"/>
+          </a:xfrm>
+          <a:prstGeom prst="rect">
+            <a:avLst/>
+          </a:prstGeom>
+          <a:noFill/>
+          <a:ln/>
+        </p:spPr>
+        <p:txBody>
+          <a:bodyPr wrap="square" lIns="0" tIns="0" rIns="0" bIns="0" rtlCol="0" anchor="t"/>
+          <a:lstStyle/>
+          <a:p>
+            <a:pPr indent="0" marL="0">
+              <a:buNone/>
+            </a:pPr>
+            <a:r>
+              <a:rPr lang="en-US" sz="1050" b="1" dirty="0">
+                <a:solidFill>
+                  <a:srgbClr val="0057FF"/>
+                </a:solidFill>
+                <a:latin typeface="Pretendard" pitchFamily="34" charset="0"/>
+                <a:ea typeface="Pretendard" pitchFamily="34" charset="-122"/>
+                <a:cs typeface="Pretendard" pitchFamily="34" charset="-120"/>
+              </a:rPr>
+              <a:t>캐릭터 · 가진다</a:t>
+            </a:r>
+            <a:endParaRPr lang="en-US" sz="1050" dirty="0"/>
+          </a:p>
+        </p:txBody>
+      </p:sp>
+      <p:sp>
+        <p:nvSpPr>
+          <p:cNvPr id="7" name="Shape 5"/>
+          <p:cNvSpPr/>
+          <p:nvPr/>
+        </p:nvSpPr>
+        <p:spPr>
+          <a:xfrm>
+            <a:off x="658368" y="2670048"/>
+            <a:ext cx="3794760" cy="0"/>
           </a:xfrm>
           <a:prstGeom prst="line">
             <a:avLst/>
           </a:prstGeom>
           <a:noFill/>
-          <a:ln w="19050">
-            <a:solidFill>
-              <a:srgbClr val="DEE8FF"/>
-            </a:solidFill>
-            <a:prstDash val="solid"/>
-          </a:ln>
-        </p:spPr>
-      </p:sp>
-      <p:sp>
-        <p:nvSpPr>
-          <p:cNvPr id="7" name="Shape 5"/>
-          <p:cNvSpPr/>
-          <p:nvPr/>
-        </p:nvSpPr>
-        <p:spPr>
-          <a:xfrm>
-            <a:off x="658368" y="2176272"/>
-            <a:ext cx="274320" cy="274320"/>
-          </a:xfrm>
-          <a:prstGeom prst="ellipse">
-            <a:avLst/>
-          </a:prstGeom>
-          <a:solidFill>
-            <a:srgbClr val="1E9BE6"/>
-          </a:solidFill>
-          <a:ln/>
-        </p:spPr>
-      </p:sp>
-      <p:sp>
-        <p:nvSpPr>
-          <p:cNvPr id="8" name="Text 6"/>
-          <p:cNvSpPr/>
-          <p:nvPr/>
-        </p:nvSpPr>
-        <p:spPr>
-          <a:xfrm>
-            <a:off x="658368" y="2176272"/>
-            <a:ext cx="274320" cy="274320"/>
-          </a:xfrm>
-          <a:prstGeom prst="rect">
-            <a:avLst/>
-          </a:prstGeom>
-          <a:noFill/>
-          <a:ln/>
-        </p:spPr>
-        <p:txBody>
-          <a:bodyPr wrap="square" lIns="0" tIns="0" rIns="0" bIns="0" rtlCol="0" anchor="ctr"/>
-          <a:lstStyle/>
-          <a:p>
-            <a:pPr algn="ctr" indent="0" marL="0">
-              <a:buNone/>
-            </a:pPr>
-            <a:r>
-              <a:rPr lang="en-US" sz="1000" b="1" dirty="0">
-                <a:solidFill>
-                  <a:srgbClr val="FFFFFF"/>
-                </a:solidFill>
-                <a:latin typeface="Pretendard" pitchFamily="34" charset="0"/>
-                <a:ea typeface="Pretendard" pitchFamily="34" charset="-122"/>
-                <a:cs typeface="Pretendard" pitchFamily="34" charset="-120"/>
-              </a:rPr>
-              <a:t>1</a:t>
-            </a:r>
-            <a:endParaRPr lang="en-US" sz="1000" dirty="0"/>
-          </a:p>
-        </p:txBody>
-      </p:sp>
-      <p:sp>
-        <p:nvSpPr>
-          <p:cNvPr id="9" name="Text 7"/>
-          <p:cNvSpPr/>
-          <p:nvPr/>
-        </p:nvSpPr>
-        <p:spPr>
-          <a:xfrm>
-            <a:off x="1069848" y="2157984"/>
-            <a:ext cx="3200400" cy="237744"/>
-          </a:xfrm>
-          <a:prstGeom prst="rect">
-            <a:avLst/>
-          </a:prstGeom>
-          <a:noFill/>
-          <a:ln/>
-        </p:spPr>
-        <p:txBody>
-          <a:bodyPr wrap="square" lIns="0" tIns="0" rIns="0" bIns="0" rtlCol="0" anchor="t"/>
-          <a:lstStyle/>
-          <a:p>
-            <a:pPr indent="0" marL="0">
-              <a:buNone/>
-            </a:pPr>
-            <a:r>
-              <a:rPr lang="en-US" sz="1250" b="1" dirty="0">
-                <a:solidFill>
-                  <a:srgbClr val="191919"/>
-                </a:solidFill>
-                <a:latin typeface="Pretendard" pitchFamily="34" charset="0"/>
-                <a:ea typeface="Pretendard" pitchFamily="34" charset="-122"/>
-                <a:cs typeface="Pretendard" pitchFamily="34" charset="-120"/>
-              </a:rPr>
-              <a:t>주목</a:t>
-            </a:r>
-            <a:endParaRPr lang="en-US" sz="1250" dirty="0"/>
-          </a:p>
-        </p:txBody>
-      </p:sp>
-      <p:sp>
-        <p:nvSpPr>
-          <p:cNvPr id="10" name="Text 8"/>
-          <p:cNvSpPr/>
-          <p:nvPr/>
-        </p:nvSpPr>
-        <p:spPr>
-          <a:xfrm>
-            <a:off x="1069848" y="2395728"/>
-            <a:ext cx="3200400" cy="402336"/>
-          </a:xfrm>
-          <a:prstGeom prst="rect">
-            <a:avLst/>
-          </a:prstGeom>
-          <a:noFill/>
-          <a:ln/>
-        </p:spPr>
-        <p:txBody>
-          <a:bodyPr wrap="square" lIns="0" tIns="0" rIns="0" bIns="0" rtlCol="0" anchor="t"/>
-          <a:lstStyle/>
-          <a:p>
-            <a:pPr indent="0" marL="0">
-              <a:lnSpc>
-                <a:spcPts val="1350"/>
-              </a:lnSpc>
-              <a:buNone/>
-            </a:pPr>
-            <a:r>
-              <a:rPr lang="en-US" sz="1050" dirty="0">
-                <a:solidFill>
-                  <a:srgbClr val="3C3C3C"/>
-                </a:solidFill>
-                <a:latin typeface="Pretendard" pitchFamily="34" charset="0"/>
-                <a:ea typeface="Pretendard" pitchFamily="34" charset="-122"/>
-                <a:cs typeface="Pretendard" pitchFamily="34" charset="-120"/>
-              </a:rPr>
-              <a:t>사람은 얼굴과 캐릭터에 먼저 시선을 준다.</a:t>
-            </a:r>
-            <a:endParaRPr lang="en-US" sz="1050" dirty="0"/>
-          </a:p>
-        </p:txBody>
-      </p:sp>
-      <p:sp>
-        <p:nvSpPr>
-          <p:cNvPr id="11" name="Shape 9"/>
-          <p:cNvSpPr/>
-          <p:nvPr/>
-        </p:nvSpPr>
-        <p:spPr>
-          <a:xfrm>
-            <a:off x="795528" y="3108960"/>
-            <a:ext cx="0" cy="384048"/>
-          </a:xfrm>
-          <a:prstGeom prst="line">
-            <a:avLst/>
-          </a:prstGeom>
-          <a:noFill/>
-          <a:ln w="19050">
-            <a:solidFill>
-              <a:srgbClr val="DEE8FF"/>
-            </a:solidFill>
-            <a:prstDash val="solid"/>
-          </a:ln>
-        </p:spPr>
-      </p:sp>
-      <p:sp>
-        <p:nvSpPr>
-          <p:cNvPr id="12" name="Shape 10"/>
-          <p:cNvSpPr/>
-          <p:nvPr/>
-        </p:nvSpPr>
-        <p:spPr>
-          <a:xfrm>
-            <a:off x="658368" y="2834640"/>
-            <a:ext cx="274320" cy="274320"/>
-          </a:xfrm>
-          <a:prstGeom prst="ellipse">
-            <a:avLst/>
-          </a:prstGeom>
-          <a:solidFill>
-            <a:srgbClr val="1E9BE6"/>
-          </a:solidFill>
-          <a:ln/>
-        </p:spPr>
-      </p:sp>
-      <p:sp>
-        <p:nvSpPr>
-          <p:cNvPr id="13" name="Text 11"/>
-          <p:cNvSpPr/>
-          <p:nvPr/>
-        </p:nvSpPr>
-        <p:spPr>
-          <a:xfrm>
-            <a:off x="658368" y="2834640"/>
-            <a:ext cx="274320" cy="274320"/>
-          </a:xfrm>
-          <a:prstGeom prst="rect">
-            <a:avLst/>
-          </a:prstGeom>
-          <a:noFill/>
-          <a:ln/>
-        </p:spPr>
-        <p:txBody>
-          <a:bodyPr wrap="square" lIns="0" tIns="0" rIns="0" bIns="0" rtlCol="0" anchor="ctr"/>
-          <a:lstStyle/>
-          <a:p>
-            <a:pPr algn="ctr" indent="0" marL="0">
-              <a:buNone/>
-            </a:pPr>
-            <a:r>
-              <a:rPr lang="en-US" sz="1000" b="1" dirty="0">
-                <a:solidFill>
-                  <a:srgbClr val="FFFFFF"/>
-                </a:solidFill>
-                <a:latin typeface="Pretendard" pitchFamily="34" charset="0"/>
-                <a:ea typeface="Pretendard" pitchFamily="34" charset="-122"/>
-                <a:cs typeface="Pretendard" pitchFamily="34" charset="-120"/>
-              </a:rPr>
-              <a:t>2</a:t>
-            </a:r>
-            <a:endParaRPr lang="en-US" sz="1000" dirty="0"/>
-          </a:p>
-        </p:txBody>
-      </p:sp>
-      <p:sp>
-        <p:nvSpPr>
-          <p:cNvPr id="14" name="Text 12"/>
-          <p:cNvSpPr/>
-          <p:nvPr/>
-        </p:nvSpPr>
-        <p:spPr>
-          <a:xfrm>
-            <a:off x="1069848" y="2816352"/>
-            <a:ext cx="3200400" cy="237744"/>
-          </a:xfrm>
-          <a:prstGeom prst="rect">
-            <a:avLst/>
-          </a:prstGeom>
-          <a:noFill/>
-          <a:ln/>
-        </p:spPr>
-        <p:txBody>
-          <a:bodyPr wrap="square" lIns="0" tIns="0" rIns="0" bIns="0" rtlCol="0" anchor="t"/>
-          <a:lstStyle/>
-          <a:p>
-            <a:pPr indent="0" marL="0">
-              <a:buNone/>
-            </a:pPr>
-            <a:r>
-              <a:rPr lang="en-US" sz="1250" b="1" dirty="0">
-                <a:solidFill>
-                  <a:srgbClr val="191919"/>
-                </a:solidFill>
-                <a:latin typeface="Pretendard" pitchFamily="34" charset="0"/>
-                <a:ea typeface="Pretendard" pitchFamily="34" charset="-122"/>
-                <a:cs typeface="Pretendard" pitchFamily="34" charset="-120"/>
-              </a:rPr>
-              <a:t>이해</a:t>
-            </a:r>
-            <a:endParaRPr lang="en-US" sz="1250" dirty="0"/>
-          </a:p>
-        </p:txBody>
-      </p:sp>
-      <p:sp>
-        <p:nvSpPr>
-          <p:cNvPr id="15" name="Text 13"/>
-          <p:cNvSpPr/>
-          <p:nvPr/>
-        </p:nvSpPr>
-        <p:spPr>
-          <a:xfrm>
-            <a:off x="1069848" y="3054096"/>
-            <a:ext cx="3200400" cy="402336"/>
-          </a:xfrm>
-          <a:prstGeom prst="rect">
-            <a:avLst/>
-          </a:prstGeom>
-          <a:noFill/>
-          <a:ln/>
-        </p:spPr>
-        <p:txBody>
-          <a:bodyPr wrap="square" lIns="0" tIns="0" rIns="0" bIns="0" rtlCol="0" anchor="t"/>
-          <a:lstStyle/>
-          <a:p>
-            <a:pPr indent="0" marL="0">
-              <a:lnSpc>
-                <a:spcPts val="1350"/>
-              </a:lnSpc>
-              <a:buNone/>
-            </a:pPr>
-            <a:r>
-              <a:rPr lang="en-US" sz="1050" dirty="0">
-                <a:solidFill>
-                  <a:srgbClr val="3C3C3C"/>
-                </a:solidFill>
-                <a:latin typeface="Pretendard" pitchFamily="34" charset="0"/>
-                <a:ea typeface="Pretendard" pitchFamily="34" charset="-122"/>
-                <a:cs typeface="Pretendard" pitchFamily="34" charset="-120"/>
-              </a:rPr>
-              <a:t>복잡한 기능을 하나의 성격과 행동으로 번역한다.</a:t>
-            </a:r>
-            <a:endParaRPr lang="en-US" sz="1050" dirty="0"/>
-          </a:p>
-        </p:txBody>
-      </p:sp>
-      <p:sp>
-        <p:nvSpPr>
-          <p:cNvPr id="16" name="Shape 14"/>
-          <p:cNvSpPr/>
-          <p:nvPr/>
-        </p:nvSpPr>
-        <p:spPr>
-          <a:xfrm>
-            <a:off x="795528" y="3767328"/>
-            <a:ext cx="0" cy="384048"/>
-          </a:xfrm>
-          <a:prstGeom prst="line">
-            <a:avLst/>
-          </a:prstGeom>
-          <a:noFill/>
-          <a:ln w="19050">
-            <a:solidFill>
-              <a:srgbClr val="DEE8FF"/>
-            </a:solidFill>
-            <a:prstDash val="solid"/>
-          </a:ln>
-        </p:spPr>
-      </p:sp>
-      <p:sp>
-        <p:nvSpPr>
-          <p:cNvPr id="17" name="Shape 15"/>
-          <p:cNvSpPr/>
-          <p:nvPr/>
-        </p:nvSpPr>
-        <p:spPr>
-          <a:xfrm>
-            <a:off x="658368" y="3493008"/>
-            <a:ext cx="274320" cy="274320"/>
-          </a:xfrm>
-          <a:prstGeom prst="ellipse">
-            <a:avLst/>
-          </a:prstGeom>
-          <a:solidFill>
-            <a:srgbClr val="1E9BE6"/>
-          </a:solidFill>
-          <a:ln/>
-        </p:spPr>
-      </p:sp>
-      <p:sp>
-        <p:nvSpPr>
-          <p:cNvPr id="18" name="Text 16"/>
-          <p:cNvSpPr/>
-          <p:nvPr/>
-        </p:nvSpPr>
-        <p:spPr>
-          <a:xfrm>
-            <a:off x="658368" y="3493008"/>
-            <a:ext cx="274320" cy="274320"/>
-          </a:xfrm>
-          <a:prstGeom prst="rect">
-            <a:avLst/>
-          </a:prstGeom>
-          <a:noFill/>
-          <a:ln/>
-        </p:spPr>
-        <p:txBody>
-          <a:bodyPr wrap="square" lIns="0" tIns="0" rIns="0" bIns="0" rtlCol="0" anchor="ctr"/>
-          <a:lstStyle/>
-          <a:p>
-            <a:pPr algn="ctr" indent="0" marL="0">
-              <a:buNone/>
-            </a:pPr>
-            <a:r>
-              <a:rPr lang="en-US" sz="1000" b="1" dirty="0">
-                <a:solidFill>
-                  <a:srgbClr val="FFFFFF"/>
-                </a:solidFill>
-                <a:latin typeface="Pretendard" pitchFamily="34" charset="0"/>
-                <a:ea typeface="Pretendard" pitchFamily="34" charset="-122"/>
-                <a:cs typeface="Pretendard" pitchFamily="34" charset="-120"/>
-              </a:rPr>
-              <a:t>3</a:t>
-            </a:r>
-            <a:endParaRPr lang="en-US" sz="1000" dirty="0"/>
-          </a:p>
-        </p:txBody>
-      </p:sp>
-      <p:sp>
-        <p:nvSpPr>
-          <p:cNvPr id="19" name="Text 17"/>
-          <p:cNvSpPr/>
-          <p:nvPr/>
-        </p:nvSpPr>
-        <p:spPr>
-          <a:xfrm>
-            <a:off x="1069848" y="3474720"/>
-            <a:ext cx="3200400" cy="237744"/>
-          </a:xfrm>
-          <a:prstGeom prst="rect">
-            <a:avLst/>
-          </a:prstGeom>
-          <a:noFill/>
-          <a:ln/>
-        </p:spPr>
-        <p:txBody>
-          <a:bodyPr wrap="square" lIns="0" tIns="0" rIns="0" bIns="0" rtlCol="0" anchor="t"/>
-          <a:lstStyle/>
-          <a:p>
-            <a:pPr indent="0" marL="0">
-              <a:buNone/>
-            </a:pPr>
-            <a:r>
-              <a:rPr lang="en-US" sz="1250" b="1" dirty="0">
-                <a:solidFill>
-                  <a:srgbClr val="191919"/>
-                </a:solidFill>
-                <a:latin typeface="Pretendard" pitchFamily="34" charset="0"/>
-                <a:ea typeface="Pretendard" pitchFamily="34" charset="-122"/>
-                <a:cs typeface="Pretendard" pitchFamily="34" charset="-120"/>
-              </a:rPr>
-              <a:t>친숙</a:t>
-            </a:r>
-            <a:endParaRPr lang="en-US" sz="1250" dirty="0"/>
-          </a:p>
-        </p:txBody>
-      </p:sp>
-      <p:sp>
-        <p:nvSpPr>
-          <p:cNvPr id="20" name="Text 18"/>
-          <p:cNvSpPr/>
-          <p:nvPr/>
-        </p:nvSpPr>
-        <p:spPr>
-          <a:xfrm>
-            <a:off x="1069848" y="3712464"/>
-            <a:ext cx="3200400" cy="402336"/>
-          </a:xfrm>
-          <a:prstGeom prst="rect">
-            <a:avLst/>
-          </a:prstGeom>
-          <a:noFill/>
-          <a:ln/>
-        </p:spPr>
-        <p:txBody>
-          <a:bodyPr wrap="square" lIns="0" tIns="0" rIns="0" bIns="0" rtlCol="0" anchor="t"/>
-          <a:lstStyle/>
-          <a:p>
-            <a:pPr indent="0" marL="0">
-              <a:lnSpc>
-                <a:spcPts val="1350"/>
-              </a:lnSpc>
-              <a:buNone/>
-            </a:pPr>
-            <a:r>
-              <a:rPr lang="en-US" sz="1050" dirty="0">
-                <a:solidFill>
-                  <a:srgbClr val="3C3C3C"/>
-                </a:solidFill>
-                <a:latin typeface="Pretendard" pitchFamily="34" charset="0"/>
-                <a:ea typeface="Pretendard" pitchFamily="34" charset="-122"/>
-                <a:cs typeface="Pretendard" pitchFamily="34" charset="-120"/>
-              </a:rPr>
-              <a:t>의인화된 존재는 거래처럼 느껴지는 서비스에 관계감을 더한다.</a:t>
-            </a:r>
-            <a:endParaRPr lang="en-US" sz="1050" dirty="0"/>
-          </a:p>
-        </p:txBody>
-      </p:sp>
-      <p:sp>
-        <p:nvSpPr>
-          <p:cNvPr id="21" name="Shape 19"/>
-          <p:cNvSpPr/>
-          <p:nvPr/>
-        </p:nvSpPr>
-        <p:spPr>
-          <a:xfrm>
-            <a:off x="658368" y="4151376"/>
-            <a:ext cx="274320" cy="274320"/>
-          </a:xfrm>
-          <a:prstGeom prst="ellipse">
-            <a:avLst/>
-          </a:prstGeom>
-          <a:solidFill>
-            <a:srgbClr val="0057FF"/>
-          </a:solidFill>
-          <a:ln/>
-        </p:spPr>
-      </p:sp>
-      <p:sp>
-        <p:nvSpPr>
-          <p:cNvPr id="22" name="Text 20"/>
-          <p:cNvSpPr/>
-          <p:nvPr/>
-        </p:nvSpPr>
-        <p:spPr>
-          <a:xfrm>
-            <a:off x="658368" y="4151376"/>
-            <a:ext cx="274320" cy="274320"/>
-          </a:xfrm>
-          <a:prstGeom prst="rect">
-            <a:avLst/>
-          </a:prstGeom>
-          <a:noFill/>
-          <a:ln/>
-        </p:spPr>
-        <p:txBody>
-          <a:bodyPr wrap="square" lIns="0" tIns="0" rIns="0" bIns="0" rtlCol="0" anchor="ctr"/>
-          <a:lstStyle/>
-          <a:p>
-            <a:pPr algn="ctr" indent="0" marL="0">
-              <a:buNone/>
-            </a:pPr>
-            <a:r>
-              <a:rPr lang="en-US" sz="1000" b="1" dirty="0">
-                <a:solidFill>
-                  <a:srgbClr val="FFFFFF"/>
-                </a:solidFill>
-                <a:latin typeface="Pretendard" pitchFamily="34" charset="0"/>
-                <a:ea typeface="Pretendard" pitchFamily="34" charset="-122"/>
-                <a:cs typeface="Pretendard" pitchFamily="34" charset="-120"/>
-              </a:rPr>
-              <a:t>4</a:t>
-            </a:r>
-            <a:endParaRPr lang="en-US" sz="1000" dirty="0"/>
-          </a:p>
-        </p:txBody>
-      </p:sp>
-      <p:sp>
-        <p:nvSpPr>
-          <p:cNvPr id="23" name="Text 21"/>
-          <p:cNvSpPr/>
-          <p:nvPr/>
-        </p:nvSpPr>
-        <p:spPr>
-          <a:xfrm>
-            <a:off x="1069848" y="4133088"/>
-            <a:ext cx="3200400" cy="237744"/>
-          </a:xfrm>
-          <a:prstGeom prst="rect">
-            <a:avLst/>
-          </a:prstGeom>
-          <a:noFill/>
-          <a:ln/>
-        </p:spPr>
-        <p:txBody>
-          <a:bodyPr wrap="square" lIns="0" tIns="0" rIns="0" bIns="0" rtlCol="0" anchor="t"/>
-          <a:lstStyle/>
-          <a:p>
-            <a:pPr indent="0" marL="0">
-              <a:buNone/>
-            </a:pPr>
-            <a:r>
-              <a:rPr lang="en-US" sz="1250" b="1" dirty="0">
-                <a:solidFill>
-                  <a:srgbClr val="0057FF"/>
-                </a:solidFill>
-                <a:latin typeface="Pretendard" pitchFamily="34" charset="0"/>
-                <a:ea typeface="Pretendard" pitchFamily="34" charset="-122"/>
-                <a:cs typeface="Pretendard" pitchFamily="34" charset="-120"/>
-              </a:rPr>
-              <a:t>축적</a:t>
-            </a:r>
-            <a:endParaRPr lang="en-US" sz="1250" dirty="0"/>
-          </a:p>
-        </p:txBody>
-      </p:sp>
-      <p:sp>
-        <p:nvSpPr>
-          <p:cNvPr id="24" name="Text 22"/>
-          <p:cNvSpPr/>
-          <p:nvPr/>
-        </p:nvSpPr>
-        <p:spPr>
-          <a:xfrm>
-            <a:off x="1069848" y="4370832"/>
-            <a:ext cx="3200400" cy="402336"/>
-          </a:xfrm>
-          <a:prstGeom prst="rect">
-            <a:avLst/>
-          </a:prstGeom>
-          <a:noFill/>
-          <a:ln/>
-        </p:spPr>
-        <p:txBody>
-          <a:bodyPr wrap="square" lIns="0" tIns="0" rIns="0" bIns="0" rtlCol="0" anchor="t"/>
-          <a:lstStyle/>
-          <a:p>
-            <a:pPr indent="0" marL="0">
-              <a:lnSpc>
-                <a:spcPts val="1350"/>
-              </a:lnSpc>
-              <a:buNone/>
-            </a:pPr>
-            <a:r>
-              <a:rPr lang="en-US" sz="1050" dirty="0">
-                <a:solidFill>
-                  <a:srgbClr val="3C3C3C"/>
-                </a:solidFill>
-                <a:latin typeface="Pretendard" pitchFamily="34" charset="0"/>
-                <a:ea typeface="Pretendard" pitchFamily="34" charset="-122"/>
-                <a:cs typeface="Pretendard" pitchFamily="34" charset="-120"/>
-              </a:rPr>
-              <a:t>채널이 달라도 같은 캐릭터가 하나의 인상으로 쌓인다.</a:t>
-            </a:r>
-            <a:endParaRPr lang="en-US" sz="1050" dirty="0"/>
-          </a:p>
-        </p:txBody>
-      </p:sp>
-      <p:sp>
-        <p:nvSpPr>
-          <p:cNvPr id="25" name="Shape 23"/>
-          <p:cNvSpPr/>
-          <p:nvPr/>
-        </p:nvSpPr>
-        <p:spPr>
-          <a:xfrm>
-            <a:off x="4727448" y="1810512"/>
-            <a:ext cx="6805879" cy="1783080"/>
-          </a:xfrm>
-          <a:prstGeom prst="roundRect">
-            <a:avLst>
-              <a:gd name="adj" fmla="val 4615"/>
-            </a:avLst>
-          </a:prstGeom>
-          <a:solidFill>
-            <a:srgbClr val="F5F5F7"/>
-          </a:solidFill>
-          <a:ln/>
-        </p:spPr>
-      </p:sp>
-      <p:sp>
-        <p:nvSpPr>
-          <p:cNvPr id="26" name="Text 24"/>
-          <p:cNvSpPr/>
-          <p:nvPr/>
-        </p:nvSpPr>
-        <p:spPr>
-          <a:xfrm>
-            <a:off x="4946904" y="1956816"/>
-            <a:ext cx="3657600" cy="219456"/>
-          </a:xfrm>
-          <a:prstGeom prst="rect">
-            <a:avLst/>
-          </a:prstGeom>
-          <a:noFill/>
-          <a:ln/>
-        </p:spPr>
-        <p:txBody>
-          <a:bodyPr wrap="square" lIns="0" tIns="0" rIns="0" bIns="0" rtlCol="0" anchor="t"/>
-          <a:lstStyle/>
-          <a:p>
-            <a:pPr indent="0" marL="0">
-              <a:buNone/>
-            </a:pPr>
-            <a:r>
-              <a:rPr lang="en-US" sz="1050" b="1" dirty="0">
-                <a:solidFill>
-                  <a:srgbClr val="0057FF"/>
-                </a:solidFill>
-                <a:latin typeface="Pretendard" pitchFamily="34" charset="0"/>
-                <a:ea typeface="Pretendard" pitchFamily="34" charset="-122"/>
-                <a:cs typeface="Pretendard" pitchFamily="34" charset="-120"/>
-              </a:rPr>
-              <a:t>빌린 주목과 가진 주목</a:t>
-            </a:r>
-            <a:endParaRPr lang="en-US" sz="1050" dirty="0"/>
-          </a:p>
-        </p:txBody>
-      </p:sp>
-      <p:sp>
-        <p:nvSpPr>
-          <p:cNvPr id="27" name="Text 25"/>
-          <p:cNvSpPr/>
-          <p:nvPr/>
-        </p:nvSpPr>
-        <p:spPr>
-          <a:xfrm>
-            <a:off x="8607247" y="1965960"/>
-            <a:ext cx="2706624" cy="201168"/>
-          </a:xfrm>
-          <a:prstGeom prst="rect">
-            <a:avLst/>
-          </a:prstGeom>
-          <a:noFill/>
-          <a:ln/>
-        </p:spPr>
-        <p:txBody>
-          <a:bodyPr wrap="square" lIns="0" tIns="0" rIns="0" bIns="0" rtlCol="0" anchor="t"/>
-          <a:lstStyle/>
-          <a:p>
-            <a:pPr algn="r" indent="0" marL="0">
-              <a:buNone/>
-            </a:pPr>
-            <a:r>
-              <a:rPr lang="en-US" sz="850" dirty="0">
-                <a:solidFill>
-                  <a:srgbClr val="959595"/>
-                </a:solidFill>
-                <a:latin typeface="Pretendard" pitchFamily="34" charset="0"/>
-                <a:ea typeface="Pretendard" pitchFamily="34" charset="-122"/>
-                <a:cs typeface="Pretendard" pitchFamily="34" charset="-120"/>
-              </a:rPr>
-              <a:t>System1 · 슈퍼볼 광고 2020–2023</a:t>
-            </a:r>
-            <a:endParaRPr lang="en-US" sz="850" dirty="0"/>
-          </a:p>
-        </p:txBody>
-      </p:sp>
-      <p:sp>
-        <p:nvSpPr>
-          <p:cNvPr id="28" name="Shape 26"/>
-          <p:cNvSpPr/>
-          <p:nvPr/>
-        </p:nvSpPr>
-        <p:spPr>
-          <a:xfrm>
-            <a:off x="4946904" y="2249424"/>
-            <a:ext cx="2024786" cy="658368"/>
-          </a:xfrm>
-          <a:prstGeom prst="roundRect">
-            <a:avLst>
-              <a:gd name="adj" fmla="val 8333"/>
-            </a:avLst>
-          </a:prstGeom>
-          <a:solidFill>
-            <a:srgbClr val="FFFFFF"/>
-          </a:solidFill>
           <a:ln w="12700">
             <a:solidFill>
               <a:srgbClr val="E8E8E8"/>
@@ -10345,127 +9705,145 @@
       </p:sp>
       <p:sp>
         <p:nvSpPr>
-          <p:cNvPr id="29" name="Text 27"/>
-          <p:cNvSpPr/>
-          <p:nvPr/>
-        </p:nvSpPr>
-        <p:spPr>
-          <a:xfrm>
-            <a:off x="4946904" y="2313432"/>
-            <a:ext cx="2024786" cy="256032"/>
-          </a:xfrm>
-          <a:prstGeom prst="rect">
-            <a:avLst/>
-          </a:prstGeom>
-          <a:noFill/>
-          <a:ln/>
-        </p:spPr>
-        <p:txBody>
-          <a:bodyPr wrap="square" lIns="0" tIns="0" rIns="0" bIns="0" rtlCol="0" anchor="t"/>
-          <a:lstStyle/>
-          <a:p>
-            <a:pPr algn="ctr" indent="0" marL="0">
-              <a:buNone/>
-            </a:pPr>
-            <a:r>
-              <a:rPr lang="en-US" sz="1500" b="1" dirty="0">
-                <a:solidFill>
-                  <a:srgbClr val="707070"/>
-                </a:solidFill>
-                <a:latin typeface="Pretendard" pitchFamily="34" charset="0"/>
-                <a:ea typeface="Pretendard" pitchFamily="34" charset="-122"/>
-                <a:cs typeface="Pretendard" pitchFamily="34" charset="-120"/>
-              </a:rPr>
-              <a:t>2.8★</a:t>
-            </a:r>
-            <a:endParaRPr lang="en-US" sz="1500" dirty="0"/>
-          </a:p>
-        </p:txBody>
-      </p:sp>
-      <p:sp>
-        <p:nvSpPr>
-          <p:cNvPr id="30" name="Text 28"/>
-          <p:cNvSpPr/>
-          <p:nvPr/>
-        </p:nvSpPr>
-        <p:spPr>
-          <a:xfrm>
-            <a:off x="5001768" y="2578608"/>
-            <a:ext cx="1915058" cy="310896"/>
-          </a:xfrm>
-          <a:prstGeom prst="rect">
-            <a:avLst/>
-          </a:prstGeom>
-          <a:noFill/>
-          <a:ln/>
-        </p:spPr>
-        <p:txBody>
-          <a:bodyPr wrap="square" lIns="0" tIns="0" rIns="0" bIns="0" rtlCol="0" anchor="t"/>
-          <a:lstStyle/>
-          <a:p>
-            <a:pPr algn="ctr" indent="0" marL="0">
+          <p:cNvPr id="8" name="Text 6"/>
+          <p:cNvSpPr/>
+          <p:nvPr/>
+        </p:nvSpPr>
+        <p:spPr>
+          <a:xfrm>
+            <a:off x="658368" y="2807208"/>
+            <a:ext cx="749808" cy="237744"/>
+          </a:xfrm>
+          <a:prstGeom prst="rect">
+            <a:avLst/>
+          </a:prstGeom>
+          <a:noFill/>
+          <a:ln/>
+        </p:spPr>
+        <p:txBody>
+          <a:bodyPr wrap="square" lIns="0" tIns="0" rIns="0" bIns="0" rtlCol="0" anchor="t"/>
+          <a:lstStyle/>
+          <a:p>
+            <a:pPr indent="0" marL="0">
+              <a:buNone/>
+            </a:pPr>
+            <a:r>
+              <a:rPr lang="en-US" sz="950" dirty="0">
+                <a:solidFill>
+                  <a:srgbClr val="959595"/>
+                </a:solidFill>
+                <a:latin typeface="Pretendard" pitchFamily="34" charset="0"/>
+                <a:ea typeface="Pretendard" pitchFamily="34" charset="-122"/>
+                <a:cs typeface="Pretendard" pitchFamily="34" charset="-120"/>
+              </a:rPr>
+              <a:t>사용 기간</a:t>
+            </a:r>
+            <a:endParaRPr lang="en-US" sz="950" dirty="0"/>
+          </a:p>
+        </p:txBody>
+      </p:sp>
+      <p:sp>
+        <p:nvSpPr>
+          <p:cNvPr id="9" name="Text 7"/>
+          <p:cNvSpPr/>
+          <p:nvPr/>
+        </p:nvSpPr>
+        <p:spPr>
+          <a:xfrm>
+            <a:off x="1408176" y="2761488"/>
+            <a:ext cx="1431036" cy="329184"/>
+          </a:xfrm>
+          <a:prstGeom prst="rect">
+            <a:avLst/>
+          </a:prstGeom>
+          <a:noFill/>
+          <a:ln/>
+        </p:spPr>
+        <p:txBody>
+          <a:bodyPr wrap="square" lIns="0" tIns="0" rIns="0" bIns="0" rtlCol="0" anchor="t"/>
+          <a:lstStyle/>
+          <a:p>
+            <a:pPr indent="0" marL="0">
               <a:lnSpc>
-                <a:spcPts val="1050"/>
+                <a:spcPts val="1400"/>
               </a:lnSpc>
               <a:buNone/>
             </a:pPr>
             <a:r>
-              <a:rPr lang="en-US" sz="850" dirty="0">
-                <a:solidFill>
-                  <a:srgbClr val="707070"/>
-                </a:solidFill>
-                <a:latin typeface="Pretendard" pitchFamily="34" charset="0"/>
-                <a:ea typeface="Pretendard" pitchFamily="34" charset="-122"/>
-                <a:cs typeface="Pretendard" pitchFamily="34" charset="-120"/>
-              </a:rPr>
-              <a:t>연예인 기용 광고</a:t>
-            </a:r>
-            <a:endParaRPr lang="en-US" sz="850" dirty="0"/>
-          </a:p>
-          <a:p>
-            <a:pPr algn="ctr" indent="0" marL="0">
+              <a:rPr lang="en-US" sz="1100" dirty="0">
+                <a:solidFill>
+                  <a:srgbClr val="3C3C3C"/>
+                </a:solidFill>
+                <a:latin typeface="Pretendard" pitchFamily="34" charset="0"/>
+                <a:ea typeface="Pretendard" pitchFamily="34" charset="-122"/>
+                <a:cs typeface="Pretendard" pitchFamily="34" charset="-120"/>
+              </a:rPr>
+              <a:t>계약 기간에만</a:t>
+            </a:r>
+            <a:endParaRPr lang="en-US" sz="1100" dirty="0"/>
+          </a:p>
+        </p:txBody>
+      </p:sp>
+      <p:sp>
+        <p:nvSpPr>
+          <p:cNvPr id="10" name="Text 8"/>
+          <p:cNvSpPr/>
+          <p:nvPr/>
+        </p:nvSpPr>
+        <p:spPr>
+          <a:xfrm>
+            <a:off x="2930652" y="2761488"/>
+            <a:ext cx="1431036" cy="329184"/>
+          </a:xfrm>
+          <a:prstGeom prst="rect">
+            <a:avLst/>
+          </a:prstGeom>
+          <a:noFill/>
+          <a:ln/>
+        </p:spPr>
+        <p:txBody>
+          <a:bodyPr wrap="square" lIns="0" tIns="0" rIns="0" bIns="0" rtlCol="0" anchor="t"/>
+          <a:lstStyle/>
+          <a:p>
+            <a:pPr indent="0" marL="0">
               <a:lnSpc>
-                <a:spcPts val="1050"/>
+                <a:spcPts val="1400"/>
               </a:lnSpc>
               <a:buNone/>
             </a:pPr>
             <a:r>
-              <a:rPr lang="en-US" sz="850" dirty="0">
-                <a:solidFill>
-                  <a:srgbClr val="707070"/>
-                </a:solidFill>
-                <a:latin typeface="Pretendard" pitchFamily="34" charset="0"/>
-                <a:ea typeface="Pretendard" pitchFamily="34" charset="-122"/>
-                <a:cs typeface="Pretendard" pitchFamily="34" charset="-120"/>
-              </a:rPr>
-              <a:t>전체의 37%</a:t>
-            </a:r>
-            <a:endParaRPr lang="en-US" sz="850" dirty="0"/>
-          </a:p>
-        </p:txBody>
-      </p:sp>
-      <p:sp>
-        <p:nvSpPr>
-          <p:cNvPr id="31" name="Shape 29"/>
-          <p:cNvSpPr/>
-          <p:nvPr/>
-        </p:nvSpPr>
-        <p:spPr>
-          <a:xfrm>
-            <a:off x="7117994" y="2249424"/>
-            <a:ext cx="2024786" cy="658368"/>
-          </a:xfrm>
-          <a:prstGeom prst="roundRect">
-            <a:avLst>
-              <a:gd name="adj" fmla="val 8333"/>
-            </a:avLst>
-          </a:prstGeom>
-          <a:solidFill>
-            <a:srgbClr val="FFFFFF"/>
-          </a:solidFill>
+              <a:rPr lang="en-US" sz="1100" b="1" dirty="0">
+                <a:solidFill>
+                  <a:srgbClr val="191919"/>
+                </a:solidFill>
+                <a:latin typeface="Pretendard" pitchFamily="34" charset="0"/>
+                <a:ea typeface="Pretendard" pitchFamily="34" charset="-122"/>
+                <a:cs typeface="Pretendard" pitchFamily="34" charset="-120"/>
+              </a:rPr>
+              <a:t>끝나는 계약이 없다</a:t>
+            </a:r>
+            <a:endParaRPr lang="en-US" sz="1100" dirty="0"/>
+          </a:p>
+        </p:txBody>
+      </p:sp>
+      <p:sp>
+        <p:nvSpPr>
+          <p:cNvPr id="11" name="Shape 9"/>
+          <p:cNvSpPr/>
+          <p:nvPr/>
+        </p:nvSpPr>
+        <p:spPr>
+          <a:xfrm>
+            <a:off x="658368" y="3163824"/>
+            <a:ext cx="3794760" cy="0"/>
+          </a:xfrm>
+          <a:prstGeom prst="line">
+            <a:avLst/>
+          </a:prstGeom>
+          <a:noFill/>
           <a:ln w="12700">
             <a:solidFill>
-              <a:srgbClr val="E8E8E8"/>
+              <a:srgbClr val="F0F0F0"/>
             </a:solidFill>
             <a:prstDash val="solid"/>
           </a:ln>
@@ -10473,127 +9851,145 @@
       </p:sp>
       <p:sp>
         <p:nvSpPr>
-          <p:cNvPr id="32" name="Text 30"/>
-          <p:cNvSpPr/>
-          <p:nvPr/>
-        </p:nvSpPr>
-        <p:spPr>
-          <a:xfrm>
-            <a:off x="7117994" y="2313432"/>
-            <a:ext cx="2024786" cy="256032"/>
-          </a:xfrm>
-          <a:prstGeom prst="rect">
-            <a:avLst/>
-          </a:prstGeom>
-          <a:noFill/>
-          <a:ln/>
-        </p:spPr>
-        <p:txBody>
-          <a:bodyPr wrap="square" lIns="0" tIns="0" rIns="0" bIns="0" rtlCol="0" anchor="t"/>
-          <a:lstStyle/>
-          <a:p>
-            <a:pPr algn="ctr" indent="0" marL="0">
-              <a:buNone/>
-            </a:pPr>
-            <a:r>
-              <a:rPr lang="en-US" sz="1500" b="1" dirty="0">
-                <a:solidFill>
-                  <a:srgbClr val="707070"/>
-                </a:solidFill>
-                <a:latin typeface="Pretendard" pitchFamily="34" charset="0"/>
-                <a:ea typeface="Pretendard" pitchFamily="34" charset="-122"/>
-                <a:cs typeface="Pretendard" pitchFamily="34" charset="-120"/>
-              </a:rPr>
-              <a:t>2.8★</a:t>
-            </a:r>
-            <a:endParaRPr lang="en-US" sz="1500" dirty="0"/>
-          </a:p>
-        </p:txBody>
-      </p:sp>
-      <p:sp>
-        <p:nvSpPr>
-          <p:cNvPr id="33" name="Text 31"/>
-          <p:cNvSpPr/>
-          <p:nvPr/>
-        </p:nvSpPr>
-        <p:spPr>
-          <a:xfrm>
-            <a:off x="7172858" y="2578608"/>
-            <a:ext cx="1915058" cy="310896"/>
-          </a:xfrm>
-          <a:prstGeom prst="rect">
-            <a:avLst/>
-          </a:prstGeom>
-          <a:noFill/>
-          <a:ln/>
-        </p:spPr>
-        <p:txBody>
-          <a:bodyPr wrap="square" lIns="0" tIns="0" rIns="0" bIns="0" rtlCol="0" anchor="t"/>
-          <a:lstStyle/>
-          <a:p>
-            <a:pPr algn="ctr" indent="0" marL="0">
+          <p:cNvPr id="12" name="Text 10"/>
+          <p:cNvSpPr/>
+          <p:nvPr/>
+        </p:nvSpPr>
+        <p:spPr>
+          <a:xfrm>
+            <a:off x="658368" y="3264408"/>
+            <a:ext cx="749808" cy="237744"/>
+          </a:xfrm>
+          <a:prstGeom prst="rect">
+            <a:avLst/>
+          </a:prstGeom>
+          <a:noFill/>
+          <a:ln/>
+        </p:spPr>
+        <p:txBody>
+          <a:bodyPr wrap="square" lIns="0" tIns="0" rIns="0" bIns="0" rtlCol="0" anchor="t"/>
+          <a:lstStyle/>
+          <a:p>
+            <a:pPr indent="0" marL="0">
+              <a:buNone/>
+            </a:pPr>
+            <a:r>
+              <a:rPr lang="en-US" sz="950" dirty="0">
+                <a:solidFill>
+                  <a:srgbClr val="959595"/>
+                </a:solidFill>
+                <a:latin typeface="Pretendard" pitchFamily="34" charset="0"/>
+                <a:ea typeface="Pretendard" pitchFamily="34" charset="-122"/>
+                <a:cs typeface="Pretendard" pitchFamily="34" charset="-120"/>
+              </a:rPr>
+              <a:t>독점</a:t>
+            </a:r>
+            <a:endParaRPr lang="en-US" sz="950" dirty="0"/>
+          </a:p>
+        </p:txBody>
+      </p:sp>
+      <p:sp>
+        <p:nvSpPr>
+          <p:cNvPr id="13" name="Text 11"/>
+          <p:cNvSpPr/>
+          <p:nvPr/>
+        </p:nvSpPr>
+        <p:spPr>
+          <a:xfrm>
+            <a:off x="1408176" y="3218688"/>
+            <a:ext cx="1431036" cy="329184"/>
+          </a:xfrm>
+          <a:prstGeom prst="rect">
+            <a:avLst/>
+          </a:prstGeom>
+          <a:noFill/>
+          <a:ln/>
+        </p:spPr>
+        <p:txBody>
+          <a:bodyPr wrap="square" lIns="0" tIns="0" rIns="0" bIns="0" rtlCol="0" anchor="t"/>
+          <a:lstStyle/>
+          <a:p>
+            <a:pPr indent="0" marL="0">
               <a:lnSpc>
-                <a:spcPts val="1050"/>
+                <a:spcPts val="1400"/>
               </a:lnSpc>
               <a:buNone/>
             </a:pPr>
             <a:r>
-              <a:rPr lang="en-US" sz="850" dirty="0">
-                <a:solidFill>
-                  <a:srgbClr val="707070"/>
-                </a:solidFill>
-                <a:latin typeface="Pretendard" pitchFamily="34" charset="0"/>
-                <a:ea typeface="Pretendard" pitchFamily="34" charset="-122"/>
-                <a:cs typeface="Pretendard" pitchFamily="34" charset="-120"/>
-              </a:rPr>
-              <a:t>연예인 없는 광고</a:t>
-            </a:r>
-            <a:endParaRPr lang="en-US" sz="850" dirty="0"/>
-          </a:p>
-          <a:p>
-            <a:pPr algn="ctr" indent="0" marL="0">
+              <a:rPr lang="en-US" sz="1100" dirty="0">
+                <a:solidFill>
+                  <a:srgbClr val="3C3C3C"/>
+                </a:solidFill>
+                <a:latin typeface="Pretendard" pitchFamily="34" charset="0"/>
+                <a:ea typeface="Pretendard" pitchFamily="34" charset="-122"/>
+                <a:cs typeface="Pretendard" pitchFamily="34" charset="-120"/>
+              </a:rPr>
+              <a:t>다른 브랜드에도 나온다</a:t>
+            </a:r>
+            <a:endParaRPr lang="en-US" sz="1100" dirty="0"/>
+          </a:p>
+        </p:txBody>
+      </p:sp>
+      <p:sp>
+        <p:nvSpPr>
+          <p:cNvPr id="14" name="Text 12"/>
+          <p:cNvSpPr/>
+          <p:nvPr/>
+        </p:nvSpPr>
+        <p:spPr>
+          <a:xfrm>
+            <a:off x="2930652" y="3218688"/>
+            <a:ext cx="1431036" cy="329184"/>
+          </a:xfrm>
+          <a:prstGeom prst="rect">
+            <a:avLst/>
+          </a:prstGeom>
+          <a:noFill/>
+          <a:ln/>
+        </p:spPr>
+        <p:txBody>
+          <a:bodyPr wrap="square" lIns="0" tIns="0" rIns="0" bIns="0" rtlCol="0" anchor="t"/>
+          <a:lstStyle/>
+          <a:p>
+            <a:pPr indent="0" marL="0">
               <a:lnSpc>
-                <a:spcPts val="1050"/>
+                <a:spcPts val="1400"/>
               </a:lnSpc>
               <a:buNone/>
             </a:pPr>
             <a:r>
-              <a:rPr lang="en-US" sz="850" dirty="0">
-                <a:solidFill>
-                  <a:srgbClr val="707070"/>
-                </a:solidFill>
-                <a:latin typeface="Pretendard" pitchFamily="34" charset="0"/>
-                <a:ea typeface="Pretendard" pitchFamily="34" charset="-122"/>
-                <a:cs typeface="Pretendard" pitchFamily="34" charset="-120"/>
-              </a:rPr>
-              <a:t>전체의 38%</a:t>
-            </a:r>
-            <a:endParaRPr lang="en-US" sz="850" dirty="0"/>
-          </a:p>
-        </p:txBody>
-      </p:sp>
-      <p:sp>
-        <p:nvSpPr>
-          <p:cNvPr id="34" name="Shape 32"/>
-          <p:cNvSpPr/>
-          <p:nvPr/>
-        </p:nvSpPr>
-        <p:spPr>
-          <a:xfrm>
-            <a:off x="9289085" y="2249424"/>
-            <a:ext cx="2024786" cy="658368"/>
-          </a:xfrm>
-          <a:prstGeom prst="roundRect">
-            <a:avLst>
-              <a:gd name="adj" fmla="val 8333"/>
-            </a:avLst>
-          </a:prstGeom>
-          <a:solidFill>
-            <a:srgbClr val="EAF1FF"/>
-          </a:solidFill>
-          <a:ln w="19050">
+              <a:rPr lang="en-US" sz="1100" b="1" dirty="0">
+                <a:solidFill>
+                  <a:srgbClr val="191919"/>
+                </a:solidFill>
+                <a:latin typeface="Pretendard" pitchFamily="34" charset="0"/>
+                <a:ea typeface="Pretendard" pitchFamily="34" charset="-122"/>
+                <a:cs typeface="Pretendard" pitchFamily="34" charset="-120"/>
+              </a:rPr>
+              <a:t>우리만 쓴다</a:t>
+            </a:r>
+            <a:endParaRPr lang="en-US" sz="1100" dirty="0"/>
+          </a:p>
+        </p:txBody>
+      </p:sp>
+      <p:sp>
+        <p:nvSpPr>
+          <p:cNvPr id="15" name="Shape 13"/>
+          <p:cNvSpPr/>
+          <p:nvPr/>
+        </p:nvSpPr>
+        <p:spPr>
+          <a:xfrm>
+            <a:off x="658368" y="3621024"/>
+            <a:ext cx="3794760" cy="0"/>
+          </a:xfrm>
+          <a:prstGeom prst="line">
+            <a:avLst/>
+          </a:prstGeom>
+          <a:noFill/>
+          <a:ln w="12700">
             <a:solidFill>
-              <a:srgbClr val="0057FF"/>
+              <a:srgbClr val="F0F0F0"/>
             </a:solidFill>
             <a:prstDash val="solid"/>
           </a:ln>
@@ -10601,72 +9997,114 @@
       </p:sp>
       <p:sp>
         <p:nvSpPr>
-          <p:cNvPr id="35" name="Text 33"/>
-          <p:cNvSpPr/>
-          <p:nvPr/>
-        </p:nvSpPr>
-        <p:spPr>
-          <a:xfrm>
-            <a:off x="9289085" y="2313432"/>
-            <a:ext cx="2024786" cy="256032"/>
-          </a:xfrm>
-          <a:prstGeom prst="rect">
-            <a:avLst/>
-          </a:prstGeom>
-          <a:noFill/>
-          <a:ln/>
-        </p:spPr>
-        <p:txBody>
-          <a:bodyPr wrap="square" lIns="0" tIns="0" rIns="0" bIns="0" rtlCol="0" anchor="t"/>
-          <a:lstStyle/>
-          <a:p>
-            <a:pPr algn="ctr" indent="0" marL="0">
-              <a:buNone/>
-            </a:pPr>
-            <a:r>
-              <a:rPr lang="en-US" sz="1500" b="1" dirty="0">
-                <a:solidFill>
-                  <a:srgbClr val="0057FF"/>
-                </a:solidFill>
-                <a:latin typeface="Pretendard" pitchFamily="34" charset="0"/>
-                <a:ea typeface="Pretendard" pitchFamily="34" charset="-122"/>
-                <a:cs typeface="Pretendard" pitchFamily="34" charset="-120"/>
-              </a:rPr>
-              <a:t>3.7★</a:t>
-            </a:r>
-            <a:endParaRPr lang="en-US" sz="1500" dirty="0"/>
-          </a:p>
-        </p:txBody>
-      </p:sp>
-      <p:sp>
-        <p:nvSpPr>
-          <p:cNvPr id="36" name="Text 34"/>
-          <p:cNvSpPr/>
-          <p:nvPr/>
-        </p:nvSpPr>
-        <p:spPr>
-          <a:xfrm>
-            <a:off x="9343949" y="2578608"/>
-            <a:ext cx="1915058" cy="310896"/>
-          </a:xfrm>
-          <a:prstGeom prst="rect">
-            <a:avLst/>
-          </a:prstGeom>
-          <a:noFill/>
-          <a:ln/>
-        </p:spPr>
-        <p:txBody>
-          <a:bodyPr wrap="square" lIns="0" tIns="0" rIns="0" bIns="0" rtlCol="0" anchor="t"/>
-          <a:lstStyle/>
-          <a:p>
-            <a:pPr algn="ctr" indent="0" marL="0">
+          <p:cNvPr id="16" name="Text 14"/>
+          <p:cNvSpPr/>
+          <p:nvPr/>
+        </p:nvSpPr>
+        <p:spPr>
+          <a:xfrm>
+            <a:off x="658368" y="3721608"/>
+            <a:ext cx="749808" cy="237744"/>
+          </a:xfrm>
+          <a:prstGeom prst="rect">
+            <a:avLst/>
+          </a:prstGeom>
+          <a:noFill/>
+          <a:ln/>
+        </p:spPr>
+        <p:txBody>
+          <a:bodyPr wrap="square" lIns="0" tIns="0" rIns="0" bIns="0" rtlCol="0" anchor="t"/>
+          <a:lstStyle/>
+          <a:p>
+            <a:pPr indent="0" marL="0">
+              <a:buNone/>
+            </a:pPr>
+            <a:r>
+              <a:rPr lang="en-US" sz="950" dirty="0">
+                <a:solidFill>
+                  <a:srgbClr val="959595"/>
+                </a:solidFill>
+                <a:latin typeface="Pretendard" pitchFamily="34" charset="0"/>
+                <a:ea typeface="Pretendard" pitchFamily="34" charset="-122"/>
+                <a:cs typeface="Pretendard" pitchFamily="34" charset="-120"/>
+              </a:rPr>
+              <a:t>남는 것</a:t>
+            </a:r>
+            <a:endParaRPr lang="en-US" sz="950" dirty="0"/>
+          </a:p>
+        </p:txBody>
+      </p:sp>
+      <p:sp>
+        <p:nvSpPr>
+          <p:cNvPr id="17" name="Text 15"/>
+          <p:cNvSpPr/>
+          <p:nvPr/>
+        </p:nvSpPr>
+        <p:spPr>
+          <a:xfrm>
+            <a:off x="1408176" y="3675888"/>
+            <a:ext cx="1431036" cy="329184"/>
+          </a:xfrm>
+          <a:prstGeom prst="rect">
+            <a:avLst/>
+          </a:prstGeom>
+          <a:noFill/>
+          <a:ln/>
+        </p:spPr>
+        <p:txBody>
+          <a:bodyPr wrap="square" lIns="0" tIns="0" rIns="0" bIns="0" rtlCol="0" anchor="t"/>
+          <a:lstStyle/>
+          <a:p>
+            <a:pPr indent="0" marL="0">
               <a:lnSpc>
-                <a:spcPts val="1050"/>
+                <a:spcPts val="1400"/>
               </a:lnSpc>
               <a:buNone/>
             </a:pPr>
             <a:r>
-              <a:rPr lang="en-US" sz="850" dirty="0">
+              <a:rPr lang="en-US" sz="1100" dirty="0">
+                <a:solidFill>
+                  <a:srgbClr val="3C3C3C"/>
+                </a:solidFill>
+                <a:latin typeface="Pretendard" pitchFamily="34" charset="0"/>
+                <a:ea typeface="Pretendard" pitchFamily="34" charset="-122"/>
+                <a:cs typeface="Pretendard" pitchFamily="34" charset="-120"/>
+              </a:rPr>
+              <a:t>주목이 그 사람에게</a:t>
+            </a:r>
+            <a:endParaRPr lang="en-US" sz="1100" dirty="0"/>
+          </a:p>
+        </p:txBody>
+      </p:sp>
+      <p:sp>
+        <p:nvSpPr>
+          <p:cNvPr id="18" name="Text 16"/>
+          <p:cNvSpPr/>
+          <p:nvPr/>
+        </p:nvSpPr>
+        <p:spPr>
+          <a:xfrm>
+            <a:off x="2930652" y="3675888"/>
+            <a:ext cx="1431036" cy="329184"/>
+          </a:xfrm>
+          <a:prstGeom prst="rect">
+            <a:avLst/>
+          </a:prstGeom>
+          <a:noFill/>
+          <a:ln/>
+        </p:spPr>
+        <p:txBody>
+          <a:bodyPr wrap="square" lIns="0" tIns="0" rIns="0" bIns="0" rtlCol="0" anchor="t"/>
+          <a:lstStyle/>
+          <a:p>
+            <a:pPr indent="0" marL="0">
+              <a:lnSpc>
+                <a:spcPts val="1400"/>
+              </a:lnSpc>
+              <a:buNone/>
+            </a:pPr>
+            <a:r>
+              <a:rPr lang="en-US" sz="1100" b="1" dirty="0">
                 <a:solidFill>
                   <a:srgbClr val="191919"/>
                 </a:solidFill>
@@ -10674,122 +10112,26 @@
                 <a:ea typeface="Pretendard" pitchFamily="34" charset="-122"/>
                 <a:cs typeface="Pretendard" pitchFamily="34" charset="-120"/>
               </a:rPr>
-              <a:t>브랜드가 소유한</a:t>
-            </a:r>
-            <a:endParaRPr lang="en-US" sz="850" dirty="0"/>
-          </a:p>
-          <a:p>
-            <a:pPr algn="ctr" indent="0" marL="0">
-              <a:lnSpc>
-                <a:spcPts val="1050"/>
-              </a:lnSpc>
-              <a:buNone/>
-            </a:pPr>
-            <a:r>
-              <a:rPr lang="en-US" sz="850" dirty="0">
-                <a:solidFill>
-                  <a:srgbClr val="191919"/>
-                </a:solidFill>
-                <a:latin typeface="Pretendard" pitchFamily="34" charset="0"/>
-                <a:ea typeface="Pretendard" pitchFamily="34" charset="-122"/>
-                <a:cs typeface="Pretendard" pitchFamily="34" charset="-120"/>
-              </a:rPr>
-              <a:t>반복 캐릭터</a:t>
-            </a:r>
-            <a:endParaRPr lang="en-US" sz="850" dirty="0"/>
-          </a:p>
-        </p:txBody>
-      </p:sp>
-      <p:sp>
-        <p:nvSpPr>
-          <p:cNvPr id="37" name="Text 35"/>
-          <p:cNvSpPr/>
-          <p:nvPr/>
-        </p:nvSpPr>
-        <p:spPr>
-          <a:xfrm>
-            <a:off x="4946904" y="2999232"/>
-            <a:ext cx="6366967" cy="530352"/>
-          </a:xfrm>
-          <a:prstGeom prst="rect">
-            <a:avLst/>
-          </a:prstGeom>
-          <a:noFill/>
-          <a:ln/>
-        </p:spPr>
-        <p:txBody>
-          <a:bodyPr wrap="square" lIns="0" tIns="0" rIns="0" bIns="0" rtlCol="0" anchor="t"/>
-          <a:lstStyle/>
-          <a:p>
-            <a:pPr indent="0" marL="0">
-              <a:lnSpc>
-                <a:spcPts val="1250"/>
-              </a:lnSpc>
-              <a:buNone/>
-            </a:pPr>
-            <a:r>
-              <a:rPr lang="en-US" sz="950" dirty="0">
-                <a:solidFill>
-                  <a:srgbClr val="3C3C3C"/>
-                </a:solidFill>
-                <a:latin typeface="Pretendard" pitchFamily="34" charset="0"/>
-                <a:ea typeface="Pretendard" pitchFamily="34" charset="-122"/>
-                <a:cs typeface="Pretendard" pitchFamily="34" charset="-120"/>
-              </a:rPr>
-              <a:t>연예인을 쓴다는 사실만으로는 효과 차이가 없었다. 차이를 만든 건 </a:t>
-            </a:r>
-            <a:pPr indent="0" marL="0">
-              <a:lnSpc>
-                <a:spcPts val="1250"/>
-              </a:lnSpc>
-              <a:buNone/>
-            </a:pPr>
-            <a:r>
-              <a:rPr lang="en-US" sz="950" b="1" dirty="0">
-                <a:solidFill>
-                  <a:srgbClr val="191919"/>
-                </a:solidFill>
-                <a:latin typeface="Pretendard" pitchFamily="34" charset="0"/>
-                <a:ea typeface="Pretendard" pitchFamily="34" charset="-122"/>
-                <a:cs typeface="Pretendard" pitchFamily="34" charset="-120"/>
-              </a:rPr>
-              <a:t>브랜드가 반복해서 쓰는 캐릭터</a:t>
-            </a:r>
-            <a:pPr indent="0" marL="0">
-              <a:lnSpc>
-                <a:spcPts val="1250"/>
-              </a:lnSpc>
-              <a:buNone/>
-            </a:pPr>
-            <a:r>
-              <a:rPr lang="en-US" sz="950" dirty="0">
-                <a:solidFill>
-                  <a:srgbClr val="3C3C3C"/>
-                </a:solidFill>
-                <a:latin typeface="Pretendard" pitchFamily="34" charset="0"/>
-                <a:ea typeface="Pretendard" pitchFamily="34" charset="-122"/>
-                <a:cs typeface="Pretendard" pitchFamily="34" charset="-120"/>
-              </a:rPr>
-              <a:t>였다. IPA 사업 데이터 분석에서도 캐릭터가 연예인보다 크고 오래가는 효과를 냈다.</a:t>
-            </a:r>
-            <a:endParaRPr lang="en-US" sz="950" dirty="0"/>
-          </a:p>
-        </p:txBody>
-      </p:sp>
-      <p:sp>
-        <p:nvSpPr>
-          <p:cNvPr id="38" name="Shape 36"/>
-          <p:cNvSpPr/>
-          <p:nvPr/>
-        </p:nvSpPr>
-        <p:spPr>
-          <a:xfrm>
-            <a:off x="4727448" y="3712464"/>
-            <a:ext cx="6805879" cy="1298448"/>
+              <a:t>주목이 브랜드에 쌓인다</a:t>
+            </a:r>
+            <a:endParaRPr lang="en-US" sz="1100" dirty="0"/>
+          </a:p>
+        </p:txBody>
+      </p:sp>
+      <p:sp>
+        <p:nvSpPr>
+          <p:cNvPr id="19" name="Shape 17"/>
+          <p:cNvSpPr/>
+          <p:nvPr/>
+        </p:nvSpPr>
+        <p:spPr>
+          <a:xfrm>
+            <a:off x="5001768" y="2084832"/>
+            <a:ext cx="6531559" cy="896112"/>
           </a:xfrm>
           <a:prstGeom prst="roundRect">
             <a:avLst>
-              <a:gd name="adj" fmla="val 6338"/>
+              <a:gd name="adj" fmla="val 9184"/>
             </a:avLst>
           </a:prstGeom>
           <a:solidFill>
@@ -10800,30 +10142,30 @@
       </p:sp>
       <p:sp>
         <p:nvSpPr>
-          <p:cNvPr id="39" name="Text 37"/>
-          <p:cNvSpPr/>
-          <p:nvPr/>
-        </p:nvSpPr>
-        <p:spPr>
-          <a:xfrm>
-            <a:off x="4946904" y="3858768"/>
-            <a:ext cx="3657600" cy="219456"/>
-          </a:xfrm>
-          <a:prstGeom prst="rect">
-            <a:avLst/>
-          </a:prstGeom>
-          <a:noFill/>
-          <a:ln/>
-        </p:spPr>
-        <p:txBody>
-          <a:bodyPr wrap="square" lIns="0" tIns="0" rIns="0" bIns="0" rtlCol="0" anchor="t"/>
-          <a:lstStyle/>
-          <a:p>
-            <a:pPr indent="0" marL="0">
-              <a:buNone/>
-            </a:pPr>
-            <a:r>
-              <a:rPr lang="en-US" sz="1050" b="1" dirty="0">
+          <p:cNvPr id="20" name="Text 18"/>
+          <p:cNvSpPr/>
+          <p:nvPr/>
+        </p:nvSpPr>
+        <p:spPr>
+          <a:xfrm>
+            <a:off x="5202936" y="2212848"/>
+            <a:ext cx="6129223" cy="201168"/>
+          </a:xfrm>
+          <a:prstGeom prst="rect">
+            <a:avLst/>
+          </a:prstGeom>
+          <a:noFill/>
+          <a:ln/>
+        </p:spPr>
+        <p:txBody>
+          <a:bodyPr wrap="square" lIns="0" tIns="0" rIns="0" bIns="0" rtlCol="0" anchor="t"/>
+          <a:lstStyle/>
+          <a:p>
+            <a:pPr indent="0" marL="0">
+              <a:buNone/>
+            </a:pPr>
+            <a:r>
+              <a:rPr lang="en-US" sz="1000" b="1" dirty="0">
                 <a:solidFill>
                   <a:srgbClr val="0057FF"/>
                 </a:solidFill>
@@ -10831,61 +10173,22 @@
                 <a:ea typeface="Pretendard" pitchFamily="34" charset="-122"/>
                 <a:cs typeface="Pretendard" pitchFamily="34" charset="-120"/>
               </a:rPr>
-              <a:t>구별 자산으로 관리한다</a:t>
-            </a:r>
-            <a:endParaRPr lang="en-US" sz="1050" dirty="0"/>
-          </a:p>
-        </p:txBody>
-      </p:sp>
-      <p:sp>
-        <p:nvSpPr>
-          <p:cNvPr id="40" name="Text 38"/>
-          <p:cNvSpPr/>
-          <p:nvPr/>
-        </p:nvSpPr>
-        <p:spPr>
-          <a:xfrm>
-            <a:off x="8607247" y="3867912"/>
-            <a:ext cx="2706624" cy="201168"/>
-          </a:xfrm>
-          <a:prstGeom prst="rect">
-            <a:avLst/>
-          </a:prstGeom>
-          <a:noFill/>
-          <a:ln/>
-        </p:spPr>
-        <p:txBody>
-          <a:bodyPr wrap="square" lIns="0" tIns="0" rIns="0" bIns="0" rtlCol="0" anchor="t"/>
-          <a:lstStyle/>
-          <a:p>
-            <a:pPr algn="r" indent="0" marL="0">
-              <a:buNone/>
-            </a:pPr>
-            <a:r>
-              <a:rPr lang="en-US" sz="850" dirty="0">
-                <a:solidFill>
-                  <a:srgbClr val="959595"/>
-                </a:solidFill>
-                <a:latin typeface="Pretendard" pitchFamily="34" charset="0"/>
-                <a:ea typeface="Pretendard" pitchFamily="34" charset="-122"/>
-                <a:cs typeface="Pretendard" pitchFamily="34" charset="-120"/>
-              </a:rPr>
-              <a:t>Romaniuk · Ehrenberg-Bass</a:t>
-            </a:r>
-            <a:endParaRPr lang="en-US" sz="850" dirty="0"/>
-          </a:p>
-        </p:txBody>
-      </p:sp>
-      <p:sp>
-        <p:nvSpPr>
-          <p:cNvPr id="41" name="Text 39"/>
-          <p:cNvSpPr/>
-          <p:nvPr/>
-        </p:nvSpPr>
-        <p:spPr>
-          <a:xfrm>
-            <a:off x="4946904" y="4133088"/>
-            <a:ext cx="6366967" cy="566928"/>
+              <a:t>이 조사는 무엇인가</a:t>
+            </a:r>
+            <a:endParaRPr lang="en-US" sz="1000" dirty="0"/>
+          </a:p>
+        </p:txBody>
+      </p:sp>
+      <p:sp>
+        <p:nvSpPr>
+          <p:cNvPr id="21" name="Text 19"/>
+          <p:cNvSpPr/>
+          <p:nvPr/>
+        </p:nvSpPr>
+        <p:spPr>
+          <a:xfrm>
+            <a:off x="5202936" y="2450592"/>
+            <a:ext cx="6129223" cy="475488"/>
           </a:xfrm>
           <a:prstGeom prst="rect">
             <a:avLst/>
@@ -10899,11 +10202,155 @@
           <a:p>
             <a:pPr indent="0" marL="0">
               <a:lnSpc>
-                <a:spcPts val="1300"/>
+                <a:spcPts val="1200"/>
               </a:lnSpc>
               <a:buNone/>
             </a:pPr>
             <a:r>
+              <a:rPr lang="en-US" sz="900" dirty="0">
+                <a:solidFill>
+                  <a:srgbClr val="3C3C3C"/>
+                </a:solidFill>
+                <a:latin typeface="Pretendard" pitchFamily="34" charset="0"/>
+                <a:ea typeface="Pretendard" pitchFamily="34" charset="-122"/>
+                <a:cs typeface="Pretendard" pitchFamily="34" charset="-120"/>
+              </a:rPr>
+              <a:t>광고 효과 조사기관 </a:t>
+            </a:r>
+            <a:pPr indent="0" marL="0">
+              <a:lnSpc>
+                <a:spcPts val="1200"/>
+              </a:lnSpc>
+              <a:buNone/>
+            </a:pPr>
+            <a:r>
+              <a:rPr lang="en-US" sz="900" b="1" dirty="0">
+                <a:solidFill>
+                  <a:srgbClr val="191919"/>
+                </a:solidFill>
+                <a:latin typeface="Pretendard" pitchFamily="34" charset="0"/>
+                <a:ea typeface="Pretendard" pitchFamily="34" charset="-122"/>
+                <a:cs typeface="Pretendard" pitchFamily="34" charset="-120"/>
+              </a:rPr>
+              <a:t>System1</a:t>
+            </a:r>
+            <a:pPr indent="0" marL="0">
+              <a:lnSpc>
+                <a:spcPts val="1200"/>
+              </a:lnSpc>
+              <a:buNone/>
+            </a:pPr>
+            <a:r>
+              <a:rPr lang="en-US" sz="900" dirty="0">
+                <a:solidFill>
+                  <a:srgbClr val="3C3C3C"/>
+                </a:solidFill>
+                <a:latin typeface="Pretendard" pitchFamily="34" charset="0"/>
+                <a:ea typeface="Pretendard" pitchFamily="34" charset="-122"/>
+                <a:cs typeface="Pretendard" pitchFamily="34" charset="-120"/>
+              </a:rPr>
+              <a:t>이 미국 슈퍼볼 광고 </a:t>
+            </a:r>
+            <a:pPr indent="0" marL="0">
+              <a:lnSpc>
+                <a:spcPts val="1200"/>
+              </a:lnSpc>
+              <a:buNone/>
+            </a:pPr>
+            <a:r>
+              <a:rPr lang="en-US" sz="900" b="1" dirty="0">
+                <a:solidFill>
+                  <a:srgbClr val="191919"/>
+                </a:solidFill>
+                <a:latin typeface="Pretendard" pitchFamily="34" charset="0"/>
+                <a:ea typeface="Pretendard" pitchFamily="34" charset="-122"/>
+                <a:cs typeface="Pretendard" pitchFamily="34" charset="-120"/>
+              </a:rPr>
+              <a:t>2020~2023년</a:t>
+            </a:r>
+            <a:pPr indent="0" marL="0">
+              <a:lnSpc>
+                <a:spcPts val="1200"/>
+              </a:lnSpc>
+              <a:buNone/>
+            </a:pPr>
+            <a:r>
+              <a:rPr lang="en-US" sz="900" dirty="0">
+                <a:solidFill>
+                  <a:srgbClr val="3C3C3C"/>
+                </a:solidFill>
+                <a:latin typeface="Pretendard" pitchFamily="34" charset="0"/>
+                <a:ea typeface="Pretendard" pitchFamily="34" charset="-122"/>
+                <a:cs typeface="Pretendard" pitchFamily="34" charset="-120"/>
+              </a:rPr>
+              <a:t>분을 분석했다. 시청자의 감정 반응을 측정해, 그 광고가 </a:t>
+            </a:r>
+            <a:pPr indent="0" marL="0">
+              <a:lnSpc>
+                <a:spcPts val="1200"/>
+              </a:lnSpc>
+              <a:buNone/>
+            </a:pPr>
+            <a:r>
+              <a:rPr lang="en-US" sz="900" b="1" dirty="0">
+                <a:solidFill>
+                  <a:srgbClr val="191919"/>
+                </a:solidFill>
+                <a:latin typeface="Pretendard" pitchFamily="34" charset="0"/>
+                <a:ea typeface="Pretendard" pitchFamily="34" charset="-122"/>
+                <a:cs typeface="Pretendard" pitchFamily="34" charset="-120"/>
+              </a:rPr>
+              <a:t>장기적으로 브랜드를 키울 가능성</a:t>
+            </a:r>
+            <a:pPr indent="0" marL="0">
+              <a:lnSpc>
+                <a:spcPts val="1200"/>
+              </a:lnSpc>
+              <a:buNone/>
+            </a:pPr>
+            <a:r>
+              <a:rPr lang="en-US" sz="900" dirty="0">
+                <a:solidFill>
+                  <a:srgbClr val="3C3C3C"/>
+                </a:solidFill>
+                <a:latin typeface="Pretendard" pitchFamily="34" charset="0"/>
+                <a:ea typeface="Pretendard" pitchFamily="34" charset="-122"/>
+                <a:cs typeface="Pretendard" pitchFamily="34" charset="-120"/>
+              </a:rPr>
+              <a:t>을 1.0~5.9점으로 환산한 점수다.</a:t>
+            </a:r>
+            <a:endParaRPr lang="en-US" sz="900" dirty="0"/>
+          </a:p>
+        </p:txBody>
+      </p:sp>
+      <p:sp>
+        <p:nvSpPr>
+          <p:cNvPr id="22" name="Text 20"/>
+          <p:cNvSpPr/>
+          <p:nvPr/>
+        </p:nvSpPr>
+        <p:spPr>
+          <a:xfrm>
+            <a:off x="5001768" y="3191256"/>
+            <a:ext cx="1481328" cy="329184"/>
+          </a:xfrm>
+          <a:prstGeom prst="rect">
+            <a:avLst/>
+          </a:prstGeom>
+          <a:noFill/>
+          <a:ln/>
+        </p:spPr>
+        <p:txBody>
+          <a:bodyPr wrap="square" lIns="0" tIns="0" rIns="0" bIns="0" rtlCol="0" anchor="ctr"/>
+          <a:lstStyle/>
+          <a:p>
+            <a:pPr indent="0" marL="0">
+              <a:lnSpc>
+                <a:spcPts val="1200"/>
+              </a:lnSpc>
+              <a:buNone/>
+            </a:pPr>
+            <a:r>
               <a:rPr lang="en-US" sz="1000" dirty="0">
                 <a:solidFill>
                   <a:srgbClr val="3C3C3C"/>
@@ -10912,75 +10359,7 @@
                 <a:ea typeface="Pretendard" pitchFamily="34" charset="-122"/>
                 <a:cs typeface="Pretendard" pitchFamily="34" charset="-120"/>
               </a:rPr>
-              <a:t>캐릭터는 감각이 아니라 두 축으로 관리하는 자산이다. </a:t>
-            </a:r>
-            <a:pPr indent="0" marL="0">
-              <a:lnSpc>
-                <a:spcPts val="1300"/>
-              </a:lnSpc>
-              <a:buNone/>
-            </a:pPr>
-            <a:r>
-              <a:rPr lang="en-US" sz="1000" b="1" dirty="0">
-                <a:solidFill>
-                  <a:srgbClr val="191919"/>
-                </a:solidFill>
-                <a:latin typeface="Pretendard" pitchFamily="34" charset="0"/>
-                <a:ea typeface="Pretendard" pitchFamily="34" charset="-122"/>
-                <a:cs typeface="Pretendard" pitchFamily="34" charset="-120"/>
-              </a:rPr>
-              <a:t>인지도</a:t>
-            </a:r>
-            <a:pPr indent="0" marL="0">
-              <a:lnSpc>
-                <a:spcPts val="1300"/>
-              </a:lnSpc>
-              <a:buNone/>
-            </a:pPr>
-            <a:r>
-              <a:rPr lang="en-US" sz="1000" dirty="0">
-                <a:solidFill>
-                  <a:srgbClr val="3C3C3C"/>
-                </a:solidFill>
-                <a:latin typeface="Pretendard" pitchFamily="34" charset="0"/>
-                <a:ea typeface="Pretendard" pitchFamily="34" charset="-122"/>
-                <a:cs typeface="Pretendard" pitchFamily="34" charset="-120"/>
-              </a:rPr>
-              <a:t>(얼마나 많은 사람이 브랜드와 연결하는가)와 </a:t>
-            </a:r>
-            <a:pPr indent="0" marL="0">
-              <a:lnSpc>
-                <a:spcPts val="1300"/>
-              </a:lnSpc>
-              <a:buNone/>
-            </a:pPr>
-            <a:r>
-              <a:rPr lang="en-US" sz="1000" b="1" dirty="0">
-                <a:solidFill>
-                  <a:srgbClr val="191919"/>
-                </a:solidFill>
-                <a:latin typeface="Pretendard" pitchFamily="34" charset="0"/>
-                <a:ea typeface="Pretendard" pitchFamily="34" charset="-122"/>
-                <a:cs typeface="Pretendard" pitchFamily="34" charset="-120"/>
-              </a:rPr>
-              <a:t>고유성</a:t>
-            </a:r>
-            <a:pPr indent="0" marL="0">
-              <a:lnSpc>
-                <a:spcPts val="1300"/>
-              </a:lnSpc>
-              <a:buNone/>
-            </a:pPr>
-            <a:r>
-              <a:rPr lang="en-US" sz="1000" dirty="0">
-                <a:solidFill>
-                  <a:srgbClr val="3C3C3C"/>
-                </a:solidFill>
-                <a:latin typeface="Pretendard" pitchFamily="34" charset="0"/>
-                <a:ea typeface="Pretendard" pitchFamily="34" charset="-122"/>
-                <a:cs typeface="Pretendard" pitchFamily="34" charset="-120"/>
-              </a:rPr>
-              <a:t>(그 연결이 우리 브랜드에만 걸리는가). 두 축이 함께 높을 때만 식별 장치로 작동하고, 통상 50%를 기준선으로 본다.</a:t>
+              <a:t>연예인을 쓴 광고  37%</a:t>
             </a:r>
             <a:endParaRPr lang="en-US" sz="1000" dirty="0"/>
           </a:p>
@@ -10988,57 +10367,566 @@
       </p:sp>
       <p:sp>
         <p:nvSpPr>
-          <p:cNvPr id="42" name="Text 40"/>
-          <p:cNvSpPr/>
-          <p:nvPr/>
-        </p:nvSpPr>
-        <p:spPr>
-          <a:xfrm>
-            <a:off x="4946904" y="4700016"/>
-            <a:ext cx="6366967" cy="219456"/>
-          </a:xfrm>
-          <a:prstGeom prst="rect">
-            <a:avLst/>
-          </a:prstGeom>
-          <a:noFill/>
-          <a:ln/>
-        </p:spPr>
-        <p:txBody>
-          <a:bodyPr wrap="square" lIns="0" tIns="0" rIns="0" bIns="0" rtlCol="0" anchor="t"/>
-          <a:lstStyle/>
-          <a:p>
-            <a:pPr indent="0" marL="0">
-              <a:buNone/>
-            </a:pPr>
-            <a:r>
-              <a:rPr lang="en-US" sz="950" dirty="0">
-                <a:solidFill>
-                  <a:srgbClr val="707070"/>
-                </a:solidFill>
-                <a:latin typeface="Pretendard" pitchFamily="34" charset="0"/>
-                <a:ea typeface="Pretendard" pitchFamily="34" charset="-122"/>
-                <a:cs typeface="Pretendard" pitchFamily="34" charset="-120"/>
-              </a:rPr>
-              <a:t>→ 16장의 검증 설계가 이 두 축을 그대로 측정한다.</a:t>
-            </a:r>
-            <a:endParaRPr lang="en-US" sz="950" dirty="0"/>
-          </a:p>
-        </p:txBody>
-      </p:sp>
-      <p:sp>
-        <p:nvSpPr>
-          <p:cNvPr id="43" name="Shape 41"/>
-          <p:cNvSpPr/>
-          <p:nvPr/>
-        </p:nvSpPr>
-        <p:spPr>
-          <a:xfrm>
-            <a:off x="658368" y="5138928"/>
-            <a:ext cx="10874959" cy="749808"/>
+          <p:cNvPr id="23" name="Shape 21"/>
+          <p:cNvSpPr/>
+          <p:nvPr/>
+        </p:nvSpPr>
+        <p:spPr>
+          <a:xfrm>
+            <a:off x="6611112" y="3218688"/>
+            <a:ext cx="4410151" cy="256032"/>
           </a:xfrm>
           <a:prstGeom prst="roundRect">
             <a:avLst>
-              <a:gd name="adj" fmla="val 10976"/>
+              <a:gd name="adj" fmla="val 19643"/>
+            </a:avLst>
+          </a:prstGeom>
+          <a:solidFill>
+            <a:srgbClr val="F0F0F0"/>
+          </a:solidFill>
+          <a:ln/>
+        </p:spPr>
+      </p:sp>
+      <p:sp>
+        <p:nvSpPr>
+          <p:cNvPr id="24" name="Shape 22"/>
+          <p:cNvSpPr/>
+          <p:nvPr/>
+        </p:nvSpPr>
+        <p:spPr>
+          <a:xfrm>
+            <a:off x="6611112" y="3218688"/>
+            <a:ext cx="1620056" cy="256032"/>
+          </a:xfrm>
+          <a:prstGeom prst="roundRect">
+            <a:avLst>
+              <a:gd name="adj" fmla="val 19643"/>
+            </a:avLst>
+          </a:prstGeom>
+          <a:solidFill>
+            <a:srgbClr val="BFC0C4"/>
+          </a:solidFill>
+          <a:ln/>
+        </p:spPr>
+      </p:sp>
+      <p:sp>
+        <p:nvSpPr>
+          <p:cNvPr id="25" name="Text 23"/>
+          <p:cNvSpPr/>
+          <p:nvPr/>
+        </p:nvSpPr>
+        <p:spPr>
+          <a:xfrm>
+            <a:off x="11094415" y="3218688"/>
+            <a:ext cx="384048" cy="256032"/>
+          </a:xfrm>
+          <a:prstGeom prst="rect">
+            <a:avLst/>
+          </a:prstGeom>
+          <a:noFill/>
+          <a:ln/>
+        </p:spPr>
+        <p:txBody>
+          <a:bodyPr wrap="square" lIns="0" tIns="0" rIns="0" bIns="0" rtlCol="0" anchor="ctr"/>
+          <a:lstStyle/>
+          <a:p>
+            <a:pPr algn="r" indent="0" marL="0">
+              <a:buNone/>
+            </a:pPr>
+            <a:r>
+              <a:rPr lang="en-US" sz="1250" b="1" dirty="0">
+                <a:solidFill>
+                  <a:srgbClr val="707070"/>
+                </a:solidFill>
+                <a:latin typeface="Pretendard" pitchFamily="34" charset="0"/>
+                <a:ea typeface="Pretendard" pitchFamily="34" charset="-122"/>
+                <a:cs typeface="Pretendard" pitchFamily="34" charset="-120"/>
+              </a:rPr>
+              <a:t>2.8</a:t>
+            </a:r>
+            <a:endParaRPr lang="en-US" sz="1250" dirty="0"/>
+          </a:p>
+        </p:txBody>
+      </p:sp>
+      <p:sp>
+        <p:nvSpPr>
+          <p:cNvPr id="26" name="Text 24"/>
+          <p:cNvSpPr/>
+          <p:nvPr/>
+        </p:nvSpPr>
+        <p:spPr>
+          <a:xfrm>
+            <a:off x="5001768" y="3575304"/>
+            <a:ext cx="1481328" cy="329184"/>
+          </a:xfrm>
+          <a:prstGeom prst="rect">
+            <a:avLst/>
+          </a:prstGeom>
+          <a:noFill/>
+          <a:ln/>
+        </p:spPr>
+        <p:txBody>
+          <a:bodyPr wrap="square" lIns="0" tIns="0" rIns="0" bIns="0" rtlCol="0" anchor="ctr"/>
+          <a:lstStyle/>
+          <a:p>
+            <a:pPr indent="0" marL="0">
+              <a:lnSpc>
+                <a:spcPts val="1200"/>
+              </a:lnSpc>
+              <a:buNone/>
+            </a:pPr>
+            <a:r>
+              <a:rPr lang="en-US" sz="1000" dirty="0">
+                <a:solidFill>
+                  <a:srgbClr val="3C3C3C"/>
+                </a:solidFill>
+                <a:latin typeface="Pretendard" pitchFamily="34" charset="0"/>
+                <a:ea typeface="Pretendard" pitchFamily="34" charset="-122"/>
+                <a:cs typeface="Pretendard" pitchFamily="34" charset="-120"/>
+              </a:rPr>
+              <a:t>연예인 없는 광고  38%</a:t>
+            </a:r>
+            <a:endParaRPr lang="en-US" sz="1000" dirty="0"/>
+          </a:p>
+        </p:txBody>
+      </p:sp>
+      <p:sp>
+        <p:nvSpPr>
+          <p:cNvPr id="27" name="Shape 25"/>
+          <p:cNvSpPr/>
+          <p:nvPr/>
+        </p:nvSpPr>
+        <p:spPr>
+          <a:xfrm>
+            <a:off x="6611112" y="3602736"/>
+            <a:ext cx="4410151" cy="256032"/>
+          </a:xfrm>
+          <a:prstGeom prst="roundRect">
+            <a:avLst>
+              <a:gd name="adj" fmla="val 19643"/>
+            </a:avLst>
+          </a:prstGeom>
+          <a:solidFill>
+            <a:srgbClr val="F0F0F0"/>
+          </a:solidFill>
+          <a:ln/>
+        </p:spPr>
+      </p:sp>
+      <p:sp>
+        <p:nvSpPr>
+          <p:cNvPr id="28" name="Shape 26"/>
+          <p:cNvSpPr/>
+          <p:nvPr/>
+        </p:nvSpPr>
+        <p:spPr>
+          <a:xfrm>
+            <a:off x="6611112" y="3602736"/>
+            <a:ext cx="1620056" cy="256032"/>
+          </a:xfrm>
+          <a:prstGeom prst="roundRect">
+            <a:avLst>
+              <a:gd name="adj" fmla="val 19643"/>
+            </a:avLst>
+          </a:prstGeom>
+          <a:solidFill>
+            <a:srgbClr val="BFC0C4"/>
+          </a:solidFill>
+          <a:ln/>
+        </p:spPr>
+      </p:sp>
+      <p:sp>
+        <p:nvSpPr>
+          <p:cNvPr id="29" name="Text 27"/>
+          <p:cNvSpPr/>
+          <p:nvPr/>
+        </p:nvSpPr>
+        <p:spPr>
+          <a:xfrm>
+            <a:off x="11094415" y="3602736"/>
+            <a:ext cx="384048" cy="256032"/>
+          </a:xfrm>
+          <a:prstGeom prst="rect">
+            <a:avLst/>
+          </a:prstGeom>
+          <a:noFill/>
+          <a:ln/>
+        </p:spPr>
+        <p:txBody>
+          <a:bodyPr wrap="square" lIns="0" tIns="0" rIns="0" bIns="0" rtlCol="0" anchor="ctr"/>
+          <a:lstStyle/>
+          <a:p>
+            <a:pPr algn="r" indent="0" marL="0">
+              <a:buNone/>
+            </a:pPr>
+            <a:r>
+              <a:rPr lang="en-US" sz="1250" b="1" dirty="0">
+                <a:solidFill>
+                  <a:srgbClr val="707070"/>
+                </a:solidFill>
+                <a:latin typeface="Pretendard" pitchFamily="34" charset="0"/>
+                <a:ea typeface="Pretendard" pitchFamily="34" charset="-122"/>
+                <a:cs typeface="Pretendard" pitchFamily="34" charset="-120"/>
+              </a:rPr>
+              <a:t>2.8</a:t>
+            </a:r>
+            <a:endParaRPr lang="en-US" sz="1250" dirty="0"/>
+          </a:p>
+        </p:txBody>
+      </p:sp>
+      <p:sp>
+        <p:nvSpPr>
+          <p:cNvPr id="30" name="Text 28"/>
+          <p:cNvSpPr/>
+          <p:nvPr/>
+        </p:nvSpPr>
+        <p:spPr>
+          <a:xfrm>
+            <a:off x="5001768" y="3959352"/>
+            <a:ext cx="1481328" cy="329184"/>
+          </a:xfrm>
+          <a:prstGeom prst="rect">
+            <a:avLst/>
+          </a:prstGeom>
+          <a:noFill/>
+          <a:ln/>
+        </p:spPr>
+        <p:txBody>
+          <a:bodyPr wrap="square" lIns="0" tIns="0" rIns="0" bIns="0" rtlCol="0" anchor="ctr"/>
+          <a:lstStyle/>
+          <a:p>
+            <a:pPr indent="0" marL="0">
+              <a:lnSpc>
+                <a:spcPts val="1200"/>
+              </a:lnSpc>
+              <a:buNone/>
+            </a:pPr>
+            <a:r>
+              <a:rPr lang="en-US" sz="1000" b="1" dirty="0">
+                <a:solidFill>
+                  <a:srgbClr val="191919"/>
+                </a:solidFill>
+                <a:latin typeface="Pretendard" pitchFamily="34" charset="0"/>
+                <a:ea typeface="Pretendard" pitchFamily="34" charset="-122"/>
+                <a:cs typeface="Pretendard" pitchFamily="34" charset="-120"/>
+              </a:rPr>
+              <a:t>브랜드가 소유한</a:t>
+            </a:r>
+            <a:endParaRPr lang="en-US" sz="1000" dirty="0"/>
+          </a:p>
+          <a:p>
+            <a:pPr indent="0" marL="0">
+              <a:lnSpc>
+                <a:spcPts val="1200"/>
+              </a:lnSpc>
+              <a:buNone/>
+            </a:pPr>
+            <a:r>
+              <a:rPr lang="en-US" sz="1000" b="1" dirty="0">
+                <a:solidFill>
+                  <a:srgbClr val="191919"/>
+                </a:solidFill>
+                <a:latin typeface="Pretendard" pitchFamily="34" charset="0"/>
+                <a:ea typeface="Pretendard" pitchFamily="34" charset="-122"/>
+                <a:cs typeface="Pretendard" pitchFamily="34" charset="-120"/>
+              </a:rPr>
+              <a:t>반복 캐릭터</a:t>
+            </a:r>
+            <a:endParaRPr lang="en-US" sz="1000" dirty="0"/>
+          </a:p>
+        </p:txBody>
+      </p:sp>
+      <p:sp>
+        <p:nvSpPr>
+          <p:cNvPr id="31" name="Shape 29"/>
+          <p:cNvSpPr/>
+          <p:nvPr/>
+        </p:nvSpPr>
+        <p:spPr>
+          <a:xfrm>
+            <a:off x="6611112" y="3986784"/>
+            <a:ext cx="4410151" cy="256032"/>
+          </a:xfrm>
+          <a:prstGeom prst="roundRect">
+            <a:avLst>
+              <a:gd name="adj" fmla="val 19643"/>
+            </a:avLst>
+          </a:prstGeom>
+          <a:solidFill>
+            <a:srgbClr val="F0F0F0"/>
+          </a:solidFill>
+          <a:ln/>
+        </p:spPr>
+      </p:sp>
+      <p:sp>
+        <p:nvSpPr>
+          <p:cNvPr id="32" name="Shape 30"/>
+          <p:cNvSpPr/>
+          <p:nvPr/>
+        </p:nvSpPr>
+        <p:spPr>
+          <a:xfrm>
+            <a:off x="6611112" y="3986784"/>
+            <a:ext cx="2430083" cy="256032"/>
+          </a:xfrm>
+          <a:prstGeom prst="roundRect">
+            <a:avLst>
+              <a:gd name="adj" fmla="val 19643"/>
+            </a:avLst>
+          </a:prstGeom>
+          <a:solidFill>
+            <a:srgbClr val="0057FF"/>
+          </a:solidFill>
+          <a:ln/>
+        </p:spPr>
+      </p:sp>
+      <p:sp>
+        <p:nvSpPr>
+          <p:cNvPr id="33" name="Text 31"/>
+          <p:cNvSpPr/>
+          <p:nvPr/>
+        </p:nvSpPr>
+        <p:spPr>
+          <a:xfrm>
+            <a:off x="11094415" y="3986784"/>
+            <a:ext cx="384048" cy="256032"/>
+          </a:xfrm>
+          <a:prstGeom prst="rect">
+            <a:avLst/>
+          </a:prstGeom>
+          <a:noFill/>
+          <a:ln/>
+        </p:spPr>
+        <p:txBody>
+          <a:bodyPr wrap="square" lIns="0" tIns="0" rIns="0" bIns="0" rtlCol="0" anchor="ctr"/>
+          <a:lstStyle/>
+          <a:p>
+            <a:pPr algn="r" indent="0" marL="0">
+              <a:buNone/>
+            </a:pPr>
+            <a:r>
+              <a:rPr lang="en-US" sz="1250" b="1" dirty="0">
+                <a:solidFill>
+                  <a:srgbClr val="0057FF"/>
+                </a:solidFill>
+                <a:latin typeface="Pretendard" pitchFamily="34" charset="0"/>
+                <a:ea typeface="Pretendard" pitchFamily="34" charset="-122"/>
+                <a:cs typeface="Pretendard" pitchFamily="34" charset="-120"/>
+              </a:rPr>
+              <a:t>3.7</a:t>
+            </a:r>
+            <a:endParaRPr lang="en-US" sz="1250" dirty="0"/>
+          </a:p>
+        </p:txBody>
+      </p:sp>
+      <p:sp>
+        <p:nvSpPr>
+          <p:cNvPr id="34" name="Text 32"/>
+          <p:cNvSpPr/>
+          <p:nvPr/>
+        </p:nvSpPr>
+        <p:spPr>
+          <a:xfrm>
+            <a:off x="6611112" y="4315968"/>
+            <a:ext cx="685800" cy="182880"/>
+          </a:xfrm>
+          <a:prstGeom prst="rect">
+            <a:avLst/>
+          </a:prstGeom>
+          <a:noFill/>
+          <a:ln/>
+        </p:spPr>
+        <p:txBody>
+          <a:bodyPr wrap="square" lIns="0" tIns="0" rIns="0" bIns="0" rtlCol="0" anchor="t"/>
+          <a:lstStyle/>
+          <a:p>
+            <a:pPr indent="0" marL="0">
+              <a:buNone/>
+            </a:pPr>
+            <a:r>
+              <a:rPr lang="en-US" sz="800" dirty="0">
+                <a:solidFill>
+                  <a:srgbClr val="959595"/>
+                </a:solidFill>
+                <a:latin typeface="Pretendard" pitchFamily="34" charset="0"/>
+                <a:ea typeface="Pretendard" pitchFamily="34" charset="-122"/>
+                <a:cs typeface="Pretendard" pitchFamily="34" charset="-120"/>
+              </a:rPr>
+              <a:t>1.0</a:t>
+            </a:r>
+            <a:endParaRPr lang="en-US" sz="800" dirty="0"/>
+          </a:p>
+        </p:txBody>
+      </p:sp>
+      <p:sp>
+        <p:nvSpPr>
+          <p:cNvPr id="35" name="Text 33"/>
+          <p:cNvSpPr/>
+          <p:nvPr/>
+        </p:nvSpPr>
+        <p:spPr>
+          <a:xfrm>
+            <a:off x="7510783" y="4315968"/>
+            <a:ext cx="685800" cy="182880"/>
+          </a:xfrm>
+          <a:prstGeom prst="rect">
+            <a:avLst/>
+          </a:prstGeom>
+          <a:noFill/>
+          <a:ln/>
+        </p:spPr>
+        <p:txBody>
+          <a:bodyPr wrap="square" lIns="0" tIns="0" rIns="0" bIns="0" rtlCol="0" anchor="t"/>
+          <a:lstStyle/>
+          <a:p>
+            <a:pPr indent="0" marL="0">
+              <a:buNone/>
+            </a:pPr>
+            <a:r>
+              <a:rPr lang="en-US" sz="800" dirty="0">
+                <a:solidFill>
+                  <a:srgbClr val="959595"/>
+                </a:solidFill>
+                <a:latin typeface="Pretendard" pitchFamily="34" charset="0"/>
+                <a:ea typeface="Pretendard" pitchFamily="34" charset="-122"/>
+                <a:cs typeface="Pretendard" pitchFamily="34" charset="-120"/>
+              </a:rPr>
+              <a:t>2 보통</a:t>
+            </a:r>
+            <a:endParaRPr lang="en-US" sz="800" dirty="0"/>
+          </a:p>
+        </p:txBody>
+      </p:sp>
+      <p:sp>
+        <p:nvSpPr>
+          <p:cNvPr id="36" name="Text 34"/>
+          <p:cNvSpPr/>
+          <p:nvPr/>
+        </p:nvSpPr>
+        <p:spPr>
+          <a:xfrm>
+            <a:off x="8410454" y="4315968"/>
+            <a:ext cx="685800" cy="182880"/>
+          </a:xfrm>
+          <a:prstGeom prst="rect">
+            <a:avLst/>
+          </a:prstGeom>
+          <a:noFill/>
+          <a:ln/>
+        </p:spPr>
+        <p:txBody>
+          <a:bodyPr wrap="square" lIns="0" tIns="0" rIns="0" bIns="0" rtlCol="0" anchor="t"/>
+          <a:lstStyle/>
+          <a:p>
+            <a:pPr indent="0" marL="0">
+              <a:buNone/>
+            </a:pPr>
+            <a:r>
+              <a:rPr lang="en-US" sz="800" dirty="0">
+                <a:solidFill>
+                  <a:srgbClr val="959595"/>
+                </a:solidFill>
+                <a:latin typeface="Pretendard" pitchFamily="34" charset="0"/>
+                <a:ea typeface="Pretendard" pitchFamily="34" charset="-122"/>
+                <a:cs typeface="Pretendard" pitchFamily="34" charset="-120"/>
+              </a:rPr>
+              <a:t>3 양호</a:t>
+            </a:r>
+            <a:endParaRPr lang="en-US" sz="800" dirty="0"/>
+          </a:p>
+        </p:txBody>
+      </p:sp>
+      <p:sp>
+        <p:nvSpPr>
+          <p:cNvPr id="37" name="Text 35"/>
+          <p:cNvSpPr/>
+          <p:nvPr/>
+        </p:nvSpPr>
+        <p:spPr>
+          <a:xfrm>
+            <a:off x="9310125" y="4315968"/>
+            <a:ext cx="685800" cy="182880"/>
+          </a:xfrm>
+          <a:prstGeom prst="rect">
+            <a:avLst/>
+          </a:prstGeom>
+          <a:noFill/>
+          <a:ln/>
+        </p:spPr>
+        <p:txBody>
+          <a:bodyPr wrap="square" lIns="0" tIns="0" rIns="0" bIns="0" rtlCol="0" anchor="t"/>
+          <a:lstStyle/>
+          <a:p>
+            <a:pPr indent="0" marL="0">
+              <a:buNone/>
+            </a:pPr>
+            <a:r>
+              <a:rPr lang="en-US" sz="800" dirty="0">
+                <a:solidFill>
+                  <a:srgbClr val="959595"/>
+                </a:solidFill>
+                <a:latin typeface="Pretendard" pitchFamily="34" charset="0"/>
+                <a:ea typeface="Pretendard" pitchFamily="34" charset="-122"/>
+                <a:cs typeface="Pretendard" pitchFamily="34" charset="-120"/>
+              </a:rPr>
+              <a:t>4 강함</a:t>
+            </a:r>
+            <a:endParaRPr lang="en-US" sz="800" dirty="0"/>
+          </a:p>
+        </p:txBody>
+      </p:sp>
+      <p:sp>
+        <p:nvSpPr>
+          <p:cNvPr id="38" name="Text 36"/>
+          <p:cNvSpPr/>
+          <p:nvPr/>
+        </p:nvSpPr>
+        <p:spPr>
+          <a:xfrm>
+            <a:off x="10712553" y="4315968"/>
+            <a:ext cx="685800" cy="182880"/>
+          </a:xfrm>
+          <a:prstGeom prst="rect">
+            <a:avLst/>
+          </a:prstGeom>
+          <a:noFill/>
+          <a:ln/>
+        </p:spPr>
+        <p:txBody>
+          <a:bodyPr wrap="square" lIns="0" tIns="0" rIns="0" bIns="0" rtlCol="0" anchor="t"/>
+          <a:lstStyle/>
+          <a:p>
+            <a:pPr indent="0" marL="0">
+              <a:buNone/>
+            </a:pPr>
+            <a:r>
+              <a:rPr lang="en-US" sz="800" dirty="0">
+                <a:solidFill>
+                  <a:srgbClr val="959595"/>
+                </a:solidFill>
+                <a:latin typeface="Pretendard" pitchFamily="34" charset="0"/>
+                <a:ea typeface="Pretendard" pitchFamily="34" charset="-122"/>
+                <a:cs typeface="Pretendard" pitchFamily="34" charset="-120"/>
+              </a:rPr>
+              <a:t>5.9</a:t>
+            </a:r>
+            <a:endParaRPr lang="en-US" sz="800" dirty="0"/>
+          </a:p>
+        </p:txBody>
+      </p:sp>
+      <p:sp>
+        <p:nvSpPr>
+          <p:cNvPr id="39" name="Shape 37"/>
+          <p:cNvSpPr/>
+          <p:nvPr/>
+        </p:nvSpPr>
+        <p:spPr>
+          <a:xfrm>
+            <a:off x="658368" y="4956048"/>
+            <a:ext cx="10874959" cy="822960"/>
+          </a:xfrm>
+          <a:prstGeom prst="roundRect">
+            <a:avLst>
+              <a:gd name="adj" fmla="val 10000"/>
             </a:avLst>
           </a:prstGeom>
           <a:solidFill>
@@ -11054,14 +10942,14 @@
       </p:sp>
       <p:sp>
         <p:nvSpPr>
-          <p:cNvPr id="44" name="Text 42"/>
-          <p:cNvSpPr/>
-          <p:nvPr/>
-        </p:nvSpPr>
-        <p:spPr>
-          <a:xfrm>
-            <a:off x="658368" y="5248656"/>
-            <a:ext cx="10874959" cy="274320"/>
+          <p:cNvPr id="40" name="Text 38"/>
+          <p:cNvSpPr/>
+          <p:nvPr/>
+        </p:nvSpPr>
+        <p:spPr>
+          <a:xfrm>
+            <a:off x="658368" y="5084064"/>
+            <a:ext cx="10874959" cy="292608"/>
           </a:xfrm>
           <a:prstGeom prst="rect">
             <a:avLst/>
@@ -11077,7 +10965,7 @@
               <a:buNone/>
             </a:pPr>
             <a:r>
-              <a:rPr lang="en-US" sz="1550" b="1" dirty="0">
+              <a:rPr lang="en-US" sz="1500" b="1" dirty="0">
                 <a:solidFill>
                   <a:srgbClr val="FFFFFF"/>
                 </a:solidFill>
@@ -11085,21 +10973,21 @@
                 <a:ea typeface="Pretendard" pitchFamily="34" charset="-122"/>
                 <a:cs typeface="Pretendard" pitchFamily="34" charset="-120"/>
               </a:rPr>
-              <a:t>캐릭터는 장식이 아니라, 흩어진 콘텐츠를 하나의 브랜드 인상으로 묶는 장치다.</a:t>
-            </a:r>
-            <a:endParaRPr lang="en-US" sz="1550" dirty="0"/>
-          </a:p>
-        </p:txBody>
-      </p:sp>
-      <p:sp>
-        <p:nvSpPr>
-          <p:cNvPr id="45" name="Text 43"/>
-          <p:cNvSpPr/>
-          <p:nvPr/>
-        </p:nvSpPr>
-        <p:spPr>
-          <a:xfrm>
-            <a:off x="658368" y="5550408"/>
+              <a:t>연예인을 쓴다는 사실만으로는 차이가 없었다. 차이를 만든 건 브랜드가 반복해서 쓰는 캐릭터였다.</a:t>
+            </a:r>
+            <a:endParaRPr lang="en-US" sz="1500" dirty="0"/>
+          </a:p>
+        </p:txBody>
+      </p:sp>
+      <p:sp>
+        <p:nvSpPr>
+          <p:cNvPr id="41" name="Text 39"/>
+          <p:cNvSpPr/>
+          <p:nvPr/>
+        </p:nvSpPr>
+        <p:spPr>
+          <a:xfrm>
+            <a:off x="658368" y="5413248"/>
             <a:ext cx="10874959" cy="237744"/>
           </a:xfrm>
           <a:prstGeom prst="rect">
@@ -11132,13 +11020,13 @@
       </p:sp>
       <p:sp>
         <p:nvSpPr>
-          <p:cNvPr id="46" name="Text 44"/>
-          <p:cNvSpPr/>
-          <p:nvPr/>
-        </p:nvSpPr>
-        <p:spPr>
-          <a:xfrm>
-            <a:off x="658368" y="5980176"/>
+          <p:cNvPr id="42" name="Text 40"/>
+          <p:cNvSpPr/>
+          <p:nvPr/>
+        </p:nvSpPr>
+        <p:spPr>
+          <a:xfrm>
+            <a:off x="658368" y="5907024"/>
             <a:ext cx="10874959" cy="219456"/>
           </a:xfrm>
           <a:prstGeom prst="rect">
@@ -11163,7 +11051,7 @@
                 <a:ea typeface="Pretendard" pitchFamily="34" charset="-122"/>
                 <a:cs typeface="Pretendard" pitchFamily="34" charset="-120"/>
               </a:rPr>
-              <a:t>캐릭터는 통상 3년 정도 일관되게 써야 효과가 측정된다(System1). 재인용 수치(회상률 88%·수익 73% 등)는 원 출처 확보 전까지 본문 제외. 상세 출처는 부록.</a:t>
+              <a:t>System1 · 미국 슈퍼볼 광고 2020~2023 분석. 캐릭터는 통상 3년 정도 일관되게 써야 효과가 측정된다.</a:t>
             </a:r>
             <a:endParaRPr lang="en-US" sz="800" dirty="0"/>
           </a:p>
@@ -11171,7 +11059,7 @@
       </p:sp>
       <p:sp>
         <p:nvSpPr>
-          <p:cNvPr id="47" name="Text 45"/>
+          <p:cNvPr id="43" name="Text 41"/>
           <p:cNvSpPr/>
           <p:nvPr/>
         </p:nvSpPr>
@@ -11210,7 +11098,7 @@
       </p:sp>
       <p:sp>
         <p:nvSpPr>
-          <p:cNvPr id="48" name="Text 46"/>
+          <p:cNvPr id="44" name="Text 42"/>
           <p:cNvSpPr/>
           <p:nvPr/>
         </p:nvSpPr>
@@ -18269,7 +18157,7 @@
                 <a:ea typeface="Pretendard" pitchFamily="34" charset="-122"/>
                 <a:cs typeface="Pretendard" pitchFamily="34" charset="-120"/>
               </a:rPr>
-              <a:t>측정 지표 — 인지도(Fame)·고유성(Uniqueness) 두 축을 함께 본다. 비보조 펭귄 회상률 · 광고 보조 인지 · 청호나이스 연결률 · 얼음정수기 연상 · 현대화 시안 선호 · 노출 전후 제품 관심 · 프리미엄 이미지 훼손 우려</a:t>
+              <a:t>측정은 구별 자산(Distinctive Brand Assets)의 두 축 — 인지도와 고유성 — 을 따른다(Romaniuk, Ehrenberg-Bass). 지표: 비보조 펭귄 회상률 · 청호나이스 연결률 · 얼음정수기 연상 · 현대화 시안 선호 · 노출 전후 제품 관심 · 프리미엄 이미지 훼손 우려</a:t>
             </a:r>
             <a:endParaRPr lang="en-US" sz="800" dirty="0"/>
           </a:p>

--- a/청호나이스-브랜드전략-제안.pptx
+++ b/청호나이스-브랜드전략-제안.pptx
@@ -8099,7 +8099,7 @@
                 <a:ea typeface="Pretendard" pitchFamily="34" charset="-122"/>
                 <a:cs typeface="Pretendard" pitchFamily="34" charset="-120"/>
               </a:rPr>
-              <a:t>11 · 브랜드가 맡을 역할</a:t>
+              <a:t>11 · 제품이 맡을 역할</a:t>
             </a:r>
             <a:endParaRPr lang="en-US" sz="1200" dirty="0"/>
           </a:p>
@@ -8119,7 +8119,7 @@
                 <a:ea typeface="Pretendard" pitchFamily="34" charset="-122"/>
                 <a:cs typeface="Pretendard" pitchFamily="34" charset="-120"/>
               </a:rPr>
-              <a:t>12 · 캐릭터 마케팅의 효과</a:t>
+              <a:t>12 · 왜 캐릭터인가</a:t>
             </a:r>
             <a:endParaRPr lang="en-US" sz="1200" dirty="0"/>
           </a:p>
@@ -8139,7 +8139,7 @@
                 <a:ea typeface="Pretendard" pitchFamily="34" charset="-122"/>
                 <a:cs typeface="Pretendard" pitchFamily="34" charset="-120"/>
               </a:rPr>
-              <a:t>13 · 현대화 사례 · 두꺼비</a:t>
+              <a:t>13 · 되살린 사례 · 두꺼비</a:t>
             </a:r>
             <a:endParaRPr lang="en-US" sz="1200" dirty="0"/>
           </a:p>
@@ -8159,7 +8159,7 @@
                 <a:ea typeface="Pretendard" pitchFamily="34" charset="-122"/>
                 <a:cs typeface="Pretendard" pitchFamily="34" charset="-120"/>
               </a:rPr>
-              <a:t>14 · 펭귄을 선택한 이유</a:t>
+              <a:t>14 · 왜 펭귄인가</a:t>
             </a:r>
             <a:endParaRPr lang="en-US" sz="1200" dirty="0"/>
           </a:p>
@@ -8179,7 +8179,7 @@
                 <a:ea typeface="Pretendard" pitchFamily="34" charset="-122"/>
                 <a:cs typeface="Pretendard" pitchFamily="34" charset="-120"/>
               </a:rPr>
-              <a:t>15 · 펭귄의 재정의</a:t>
+              <a:t>15 · 펭귄의 역할 정의</a:t>
             </a:r>
             <a:endParaRPr lang="en-US" sz="1200" dirty="0"/>
           </a:p>
@@ -8290,7 +8290,7 @@
                 <a:ea typeface="Pretendard" pitchFamily="34" charset="-122"/>
                 <a:cs typeface="Pretendard" pitchFamily="34" charset="-120"/>
               </a:rPr>
-              <a:t>03 · 브랜드 전략</a:t>
+              <a:t>03 · 브랜드 전략 · 01 제품이 맡을 역할</a:t>
             </a:r>
             <a:endParaRPr lang="en-US" sz="1250" dirty="0"/>
           </a:p>
@@ -9466,7 +9466,7 @@
                 <a:ea typeface="Pretendard" pitchFamily="34" charset="-122"/>
                 <a:cs typeface="Pretendard" pitchFamily="34" charset="-120"/>
               </a:rPr>
-              <a:t>03 · 브랜드 전략</a:t>
+              <a:t>03 · 브랜드 전략 · 02 왜 캐릭터인가</a:t>
             </a:r>
             <a:endParaRPr lang="en-US" sz="1250" dirty="0"/>
           </a:p>
@@ -9480,8 +9480,8 @@
         </p:nvSpPr>
         <p:spPr>
           <a:xfrm>
-            <a:off x="658368" y="1024128"/>
-            <a:ext cx="10874959" cy="868680"/>
+            <a:off x="658368" y="987552"/>
+            <a:ext cx="10874959" cy="822960"/>
           </a:xfrm>
           <a:prstGeom prst="rect">
             <a:avLst/>
@@ -9495,12 +9495,12 @@
           <a:p>
             <a:pPr indent="0" marL="0">
               <a:lnSpc>
-                <a:spcPts val="3200"/>
+                <a:spcPts val="3000"/>
               </a:lnSpc>
               <a:buNone/>
             </a:pPr>
             <a:r>
-              <a:rPr lang="en-US" sz="2500" b="1" dirty="0">
+              <a:rPr lang="en-US" sz="2300" b="1" dirty="0">
                 <a:solidFill>
                   <a:srgbClr val="191919"/>
                 </a:solidFill>
@@ -9508,16 +9508,19 @@
                 <a:ea typeface="Pretendard" pitchFamily="34" charset="-122"/>
                 <a:cs typeface="Pretendard" pitchFamily="34" charset="-120"/>
               </a:rPr>
-              <a:t>연예인은 주목을 </a:t>
-            </a:r>
+              <a:t>캐릭터는 취향의 문제가 아니라,</a:t>
+            </a:r>
+            <a:endParaRPr lang="en-US" sz="2300" dirty="0"/>
+          </a:p>
+          <a:p>
             <a:pPr indent="0" marL="0">
               <a:lnSpc>
-                <a:spcPts val="3200"/>
+                <a:spcPts val="3000"/>
               </a:lnSpc>
               <a:buNone/>
             </a:pPr>
             <a:r>
-              <a:rPr lang="en-US" sz="2500" b="1" dirty="0">
+              <a:rPr lang="en-US" sz="2300" b="1" dirty="0">
                 <a:solidFill>
                   <a:srgbClr val="0057FF"/>
                 </a:solidFill>
@@ -9525,16 +9528,16 @@
                 <a:ea typeface="Pretendard" pitchFamily="34" charset="-122"/>
                 <a:cs typeface="Pretendard" pitchFamily="34" charset="-120"/>
               </a:rPr>
-              <a:t>빌리고</a:t>
+              <a:t>검증된 브랜드 장치</a:t>
             </a:r>
             <a:pPr indent="0" marL="0">
               <a:lnSpc>
-                <a:spcPts val="3200"/>
+                <a:spcPts val="3000"/>
               </a:lnSpc>
               <a:buNone/>
             </a:pPr>
             <a:r>
-              <a:rPr lang="en-US" sz="2500" b="1" dirty="0">
+              <a:rPr lang="en-US" sz="2300" b="1" dirty="0">
                 <a:solidFill>
                   <a:srgbClr val="191919"/>
                 </a:solidFill>
@@ -9542,19 +9545,38 @@
                 <a:ea typeface="Pretendard" pitchFamily="34" charset="-122"/>
                 <a:cs typeface="Pretendard" pitchFamily="34" charset="-120"/>
               </a:rPr>
-              <a:t>,</a:t>
-            </a:r>
-            <a:endParaRPr lang="en-US" sz="2500" dirty="0"/>
-          </a:p>
-          <a:p>
-            <a:pPr indent="0" marL="0">
-              <a:lnSpc>
-                <a:spcPts val="3200"/>
-              </a:lnSpc>
-              <a:buNone/>
-            </a:pPr>
-            <a:r>
-              <a:rPr lang="en-US" sz="2500" b="1" dirty="0">
+              <a:t>다.</a:t>
+            </a:r>
+            <a:endParaRPr lang="en-US" sz="2300" dirty="0"/>
+          </a:p>
+        </p:txBody>
+      </p:sp>
+      <p:sp>
+        <p:nvSpPr>
+          <p:cNvPr id="5" name="Text 3"/>
+          <p:cNvSpPr/>
+          <p:nvPr/>
+        </p:nvSpPr>
+        <p:spPr>
+          <a:xfrm>
+            <a:off x="658368" y="2084832"/>
+            <a:ext cx="4069080" cy="219456"/>
+          </a:xfrm>
+          <a:prstGeom prst="rect">
+            <a:avLst/>
+          </a:prstGeom>
+          <a:noFill/>
+          <a:ln/>
+        </p:spPr>
+        <p:txBody>
+          <a:bodyPr wrap="square" lIns="0" tIns="0" rIns="0" bIns="0" rtlCol="0" anchor="t"/>
+          <a:lstStyle/>
+          <a:p>
+            <a:pPr indent="0" marL="0">
+              <a:buNone/>
+            </a:pPr>
+            <a:r>
+              <a:rPr lang="en-US" sz="1050" b="1" dirty="0">
                 <a:solidFill>
                   <a:srgbClr val="191919"/>
                 </a:solidFill>
@@ -9562,80 +9584,7 @@
                 <a:ea typeface="Pretendard" pitchFamily="34" charset="-122"/>
                 <a:cs typeface="Pretendard" pitchFamily="34" charset="-120"/>
               </a:rPr>
-              <a:t>캐릭터는 자산을 </a:t>
-            </a:r>
-            <a:pPr indent="0" marL="0">
-              <a:lnSpc>
-                <a:spcPts val="3200"/>
-              </a:lnSpc>
-              <a:buNone/>
-            </a:pPr>
-            <a:r>
-              <a:rPr lang="en-US" sz="2500" b="1" dirty="0">
-                <a:solidFill>
-                  <a:srgbClr val="0057FF"/>
-                </a:solidFill>
-                <a:latin typeface="Pretendard" pitchFamily="34" charset="0"/>
-                <a:ea typeface="Pretendard" pitchFamily="34" charset="-122"/>
-                <a:cs typeface="Pretendard" pitchFamily="34" charset="-120"/>
-              </a:rPr>
-              <a:t>쌓는다</a:t>
-            </a:r>
-            <a:pPr indent="0" marL="0">
-              <a:lnSpc>
-                <a:spcPts val="3200"/>
-              </a:lnSpc>
-              <a:buNone/>
-            </a:pPr>
-            <a:r>
-              <a:rPr lang="en-US" sz="2500" b="1" dirty="0">
-                <a:solidFill>
-                  <a:srgbClr val="191919"/>
-                </a:solidFill>
-                <a:latin typeface="Pretendard" pitchFamily="34" charset="0"/>
-                <a:ea typeface="Pretendard" pitchFamily="34" charset="-122"/>
-                <a:cs typeface="Pretendard" pitchFamily="34" charset="-120"/>
-              </a:rPr>
-              <a:t>.</a:t>
-            </a:r>
-            <a:endParaRPr lang="en-US" sz="2500" dirty="0"/>
-          </a:p>
-        </p:txBody>
-      </p:sp>
-      <p:sp>
-        <p:nvSpPr>
-          <p:cNvPr id="5" name="Text 3"/>
-          <p:cNvSpPr/>
-          <p:nvPr/>
-        </p:nvSpPr>
-        <p:spPr>
-          <a:xfrm>
-            <a:off x="1408176" y="2395728"/>
-            <a:ext cx="1522476" cy="219456"/>
-          </a:xfrm>
-          <a:prstGeom prst="rect">
-            <a:avLst/>
-          </a:prstGeom>
-          <a:noFill/>
-          <a:ln/>
-        </p:spPr>
-        <p:txBody>
-          <a:bodyPr wrap="square" lIns="0" tIns="0" rIns="0" bIns="0" rtlCol="0" anchor="t"/>
-          <a:lstStyle/>
-          <a:p>
-            <a:pPr indent="0" marL="0">
-              <a:buNone/>
-            </a:pPr>
-            <a:r>
-              <a:rPr lang="en-US" sz="1050" b="1" dirty="0">
-                <a:solidFill>
-                  <a:srgbClr val="707070"/>
-                </a:solidFill>
-                <a:latin typeface="Pretendard" pitchFamily="34" charset="0"/>
-                <a:ea typeface="Pretendard" pitchFamily="34" charset="-122"/>
-                <a:cs typeface="Pretendard" pitchFamily="34" charset="-120"/>
-              </a:rPr>
-              <a:t>연예인 · 빌린다</a:t>
+              <a:t>왜 작동하는가 · 학술 근거</a:t>
             </a:r>
             <a:endParaRPr lang="en-US" sz="1050" dirty="0"/>
           </a:p>
@@ -9643,491 +9592,14 @@
       </p:sp>
       <p:sp>
         <p:nvSpPr>
-          <p:cNvPr id="6" name="Text 4"/>
-          <p:cNvSpPr/>
-          <p:nvPr/>
-        </p:nvSpPr>
-        <p:spPr>
-          <a:xfrm>
-            <a:off x="2930652" y="2395728"/>
-            <a:ext cx="1522476" cy="219456"/>
-          </a:xfrm>
-          <a:prstGeom prst="rect">
-            <a:avLst/>
-          </a:prstGeom>
-          <a:noFill/>
-          <a:ln/>
-        </p:spPr>
-        <p:txBody>
-          <a:bodyPr wrap="square" lIns="0" tIns="0" rIns="0" bIns="0" rtlCol="0" anchor="t"/>
-          <a:lstStyle/>
-          <a:p>
-            <a:pPr indent="0" marL="0">
-              <a:buNone/>
-            </a:pPr>
-            <a:r>
-              <a:rPr lang="en-US" sz="1050" b="1" dirty="0">
-                <a:solidFill>
-                  <a:srgbClr val="0057FF"/>
-                </a:solidFill>
-                <a:latin typeface="Pretendard" pitchFamily="34" charset="0"/>
-                <a:ea typeface="Pretendard" pitchFamily="34" charset="-122"/>
-                <a:cs typeface="Pretendard" pitchFamily="34" charset="-120"/>
-              </a:rPr>
-              <a:t>캐릭터 · 가진다</a:t>
-            </a:r>
-            <a:endParaRPr lang="en-US" sz="1050" dirty="0"/>
-          </a:p>
-        </p:txBody>
-      </p:sp>
-      <p:sp>
-        <p:nvSpPr>
-          <p:cNvPr id="7" name="Shape 5"/>
-          <p:cNvSpPr/>
-          <p:nvPr/>
-        </p:nvSpPr>
-        <p:spPr>
-          <a:xfrm>
-            <a:off x="658368" y="2670048"/>
-            <a:ext cx="3794760" cy="0"/>
-          </a:xfrm>
-          <a:prstGeom prst="line">
-            <a:avLst/>
-          </a:prstGeom>
-          <a:noFill/>
-          <a:ln w="12700">
-            <a:solidFill>
-              <a:srgbClr val="E8E8E8"/>
-            </a:solidFill>
-            <a:prstDash val="solid"/>
-          </a:ln>
-        </p:spPr>
-      </p:sp>
-      <p:sp>
-        <p:nvSpPr>
-          <p:cNvPr id="8" name="Text 6"/>
-          <p:cNvSpPr/>
-          <p:nvPr/>
-        </p:nvSpPr>
-        <p:spPr>
-          <a:xfrm>
-            <a:off x="658368" y="2807208"/>
-            <a:ext cx="749808" cy="237744"/>
-          </a:xfrm>
-          <a:prstGeom prst="rect">
-            <a:avLst/>
-          </a:prstGeom>
-          <a:noFill/>
-          <a:ln/>
-        </p:spPr>
-        <p:txBody>
-          <a:bodyPr wrap="square" lIns="0" tIns="0" rIns="0" bIns="0" rtlCol="0" anchor="t"/>
-          <a:lstStyle/>
-          <a:p>
-            <a:pPr indent="0" marL="0">
-              <a:buNone/>
-            </a:pPr>
-            <a:r>
-              <a:rPr lang="en-US" sz="950" dirty="0">
-                <a:solidFill>
-                  <a:srgbClr val="959595"/>
-                </a:solidFill>
-                <a:latin typeface="Pretendard" pitchFamily="34" charset="0"/>
-                <a:ea typeface="Pretendard" pitchFamily="34" charset="-122"/>
-                <a:cs typeface="Pretendard" pitchFamily="34" charset="-120"/>
-              </a:rPr>
-              <a:t>사용 기간</a:t>
-            </a:r>
-            <a:endParaRPr lang="en-US" sz="950" dirty="0"/>
-          </a:p>
-        </p:txBody>
-      </p:sp>
-      <p:sp>
-        <p:nvSpPr>
-          <p:cNvPr id="9" name="Text 7"/>
-          <p:cNvSpPr/>
-          <p:nvPr/>
-        </p:nvSpPr>
-        <p:spPr>
-          <a:xfrm>
-            <a:off x="1408176" y="2761488"/>
-            <a:ext cx="1431036" cy="329184"/>
-          </a:xfrm>
-          <a:prstGeom prst="rect">
-            <a:avLst/>
-          </a:prstGeom>
-          <a:noFill/>
-          <a:ln/>
-        </p:spPr>
-        <p:txBody>
-          <a:bodyPr wrap="square" lIns="0" tIns="0" rIns="0" bIns="0" rtlCol="0" anchor="t"/>
-          <a:lstStyle/>
-          <a:p>
-            <a:pPr indent="0" marL="0">
-              <a:lnSpc>
-                <a:spcPts val="1400"/>
-              </a:lnSpc>
-              <a:buNone/>
-            </a:pPr>
-            <a:r>
-              <a:rPr lang="en-US" sz="1100" dirty="0">
-                <a:solidFill>
-                  <a:srgbClr val="3C3C3C"/>
-                </a:solidFill>
-                <a:latin typeface="Pretendard" pitchFamily="34" charset="0"/>
-                <a:ea typeface="Pretendard" pitchFamily="34" charset="-122"/>
-                <a:cs typeface="Pretendard" pitchFamily="34" charset="-120"/>
-              </a:rPr>
-              <a:t>계약 기간에만</a:t>
-            </a:r>
-            <a:endParaRPr lang="en-US" sz="1100" dirty="0"/>
-          </a:p>
-        </p:txBody>
-      </p:sp>
-      <p:sp>
-        <p:nvSpPr>
-          <p:cNvPr id="10" name="Text 8"/>
-          <p:cNvSpPr/>
-          <p:nvPr/>
-        </p:nvSpPr>
-        <p:spPr>
-          <a:xfrm>
-            <a:off x="2930652" y="2761488"/>
-            <a:ext cx="1431036" cy="329184"/>
-          </a:xfrm>
-          <a:prstGeom prst="rect">
-            <a:avLst/>
-          </a:prstGeom>
-          <a:noFill/>
-          <a:ln/>
-        </p:spPr>
-        <p:txBody>
-          <a:bodyPr wrap="square" lIns="0" tIns="0" rIns="0" bIns="0" rtlCol="0" anchor="t"/>
-          <a:lstStyle/>
-          <a:p>
-            <a:pPr indent="0" marL="0">
-              <a:lnSpc>
-                <a:spcPts val="1400"/>
-              </a:lnSpc>
-              <a:buNone/>
-            </a:pPr>
-            <a:r>
-              <a:rPr lang="en-US" sz="1100" b="1" dirty="0">
-                <a:solidFill>
-                  <a:srgbClr val="191919"/>
-                </a:solidFill>
-                <a:latin typeface="Pretendard" pitchFamily="34" charset="0"/>
-                <a:ea typeface="Pretendard" pitchFamily="34" charset="-122"/>
-                <a:cs typeface="Pretendard" pitchFamily="34" charset="-120"/>
-              </a:rPr>
-              <a:t>끝나는 계약이 없다</a:t>
-            </a:r>
-            <a:endParaRPr lang="en-US" sz="1100" dirty="0"/>
-          </a:p>
-        </p:txBody>
-      </p:sp>
-      <p:sp>
-        <p:nvSpPr>
-          <p:cNvPr id="11" name="Shape 9"/>
-          <p:cNvSpPr/>
-          <p:nvPr/>
-        </p:nvSpPr>
-        <p:spPr>
-          <a:xfrm>
-            <a:off x="658368" y="3163824"/>
-            <a:ext cx="3794760" cy="0"/>
-          </a:xfrm>
-          <a:prstGeom prst="line">
-            <a:avLst/>
-          </a:prstGeom>
-          <a:noFill/>
-          <a:ln w="12700">
-            <a:solidFill>
-              <a:srgbClr val="F0F0F0"/>
-            </a:solidFill>
-            <a:prstDash val="solid"/>
-          </a:ln>
-        </p:spPr>
-      </p:sp>
-      <p:sp>
-        <p:nvSpPr>
-          <p:cNvPr id="12" name="Text 10"/>
-          <p:cNvSpPr/>
-          <p:nvPr/>
-        </p:nvSpPr>
-        <p:spPr>
-          <a:xfrm>
-            <a:off x="658368" y="3264408"/>
-            <a:ext cx="749808" cy="237744"/>
-          </a:xfrm>
-          <a:prstGeom prst="rect">
-            <a:avLst/>
-          </a:prstGeom>
-          <a:noFill/>
-          <a:ln/>
-        </p:spPr>
-        <p:txBody>
-          <a:bodyPr wrap="square" lIns="0" tIns="0" rIns="0" bIns="0" rtlCol="0" anchor="t"/>
-          <a:lstStyle/>
-          <a:p>
-            <a:pPr indent="0" marL="0">
-              <a:buNone/>
-            </a:pPr>
-            <a:r>
-              <a:rPr lang="en-US" sz="950" dirty="0">
-                <a:solidFill>
-                  <a:srgbClr val="959595"/>
-                </a:solidFill>
-                <a:latin typeface="Pretendard" pitchFamily="34" charset="0"/>
-                <a:ea typeface="Pretendard" pitchFamily="34" charset="-122"/>
-                <a:cs typeface="Pretendard" pitchFamily="34" charset="-120"/>
-              </a:rPr>
-              <a:t>독점</a:t>
-            </a:r>
-            <a:endParaRPr lang="en-US" sz="950" dirty="0"/>
-          </a:p>
-        </p:txBody>
-      </p:sp>
-      <p:sp>
-        <p:nvSpPr>
-          <p:cNvPr id="13" name="Text 11"/>
-          <p:cNvSpPr/>
-          <p:nvPr/>
-        </p:nvSpPr>
-        <p:spPr>
-          <a:xfrm>
-            <a:off x="1408176" y="3218688"/>
-            <a:ext cx="1431036" cy="329184"/>
-          </a:xfrm>
-          <a:prstGeom prst="rect">
-            <a:avLst/>
-          </a:prstGeom>
-          <a:noFill/>
-          <a:ln/>
-        </p:spPr>
-        <p:txBody>
-          <a:bodyPr wrap="square" lIns="0" tIns="0" rIns="0" bIns="0" rtlCol="0" anchor="t"/>
-          <a:lstStyle/>
-          <a:p>
-            <a:pPr indent="0" marL="0">
-              <a:lnSpc>
-                <a:spcPts val="1400"/>
-              </a:lnSpc>
-              <a:buNone/>
-            </a:pPr>
-            <a:r>
-              <a:rPr lang="en-US" sz="1100" dirty="0">
-                <a:solidFill>
-                  <a:srgbClr val="3C3C3C"/>
-                </a:solidFill>
-                <a:latin typeface="Pretendard" pitchFamily="34" charset="0"/>
-                <a:ea typeface="Pretendard" pitchFamily="34" charset="-122"/>
-                <a:cs typeface="Pretendard" pitchFamily="34" charset="-120"/>
-              </a:rPr>
-              <a:t>다른 브랜드에도 나온다</a:t>
-            </a:r>
-            <a:endParaRPr lang="en-US" sz="1100" dirty="0"/>
-          </a:p>
-        </p:txBody>
-      </p:sp>
-      <p:sp>
-        <p:nvSpPr>
-          <p:cNvPr id="14" name="Text 12"/>
-          <p:cNvSpPr/>
-          <p:nvPr/>
-        </p:nvSpPr>
-        <p:spPr>
-          <a:xfrm>
-            <a:off x="2930652" y="3218688"/>
-            <a:ext cx="1431036" cy="329184"/>
-          </a:xfrm>
-          <a:prstGeom prst="rect">
-            <a:avLst/>
-          </a:prstGeom>
-          <a:noFill/>
-          <a:ln/>
-        </p:spPr>
-        <p:txBody>
-          <a:bodyPr wrap="square" lIns="0" tIns="0" rIns="0" bIns="0" rtlCol="0" anchor="t"/>
-          <a:lstStyle/>
-          <a:p>
-            <a:pPr indent="0" marL="0">
-              <a:lnSpc>
-                <a:spcPts val="1400"/>
-              </a:lnSpc>
-              <a:buNone/>
-            </a:pPr>
-            <a:r>
-              <a:rPr lang="en-US" sz="1100" b="1" dirty="0">
-                <a:solidFill>
-                  <a:srgbClr val="191919"/>
-                </a:solidFill>
-                <a:latin typeface="Pretendard" pitchFamily="34" charset="0"/>
-                <a:ea typeface="Pretendard" pitchFamily="34" charset="-122"/>
-                <a:cs typeface="Pretendard" pitchFamily="34" charset="-120"/>
-              </a:rPr>
-              <a:t>우리만 쓴다</a:t>
-            </a:r>
-            <a:endParaRPr lang="en-US" sz="1100" dirty="0"/>
-          </a:p>
-        </p:txBody>
-      </p:sp>
-      <p:sp>
-        <p:nvSpPr>
-          <p:cNvPr id="15" name="Shape 13"/>
-          <p:cNvSpPr/>
-          <p:nvPr/>
-        </p:nvSpPr>
-        <p:spPr>
-          <a:xfrm>
-            <a:off x="658368" y="3621024"/>
-            <a:ext cx="3794760" cy="0"/>
-          </a:xfrm>
-          <a:prstGeom prst="line">
-            <a:avLst/>
-          </a:prstGeom>
-          <a:noFill/>
-          <a:ln w="12700">
-            <a:solidFill>
-              <a:srgbClr val="F0F0F0"/>
-            </a:solidFill>
-            <a:prstDash val="solid"/>
-          </a:ln>
-        </p:spPr>
-      </p:sp>
-      <p:sp>
-        <p:nvSpPr>
-          <p:cNvPr id="16" name="Text 14"/>
-          <p:cNvSpPr/>
-          <p:nvPr/>
-        </p:nvSpPr>
-        <p:spPr>
-          <a:xfrm>
-            <a:off x="658368" y="3721608"/>
-            <a:ext cx="749808" cy="237744"/>
-          </a:xfrm>
-          <a:prstGeom prst="rect">
-            <a:avLst/>
-          </a:prstGeom>
-          <a:noFill/>
-          <a:ln/>
-        </p:spPr>
-        <p:txBody>
-          <a:bodyPr wrap="square" lIns="0" tIns="0" rIns="0" bIns="0" rtlCol="0" anchor="t"/>
-          <a:lstStyle/>
-          <a:p>
-            <a:pPr indent="0" marL="0">
-              <a:buNone/>
-            </a:pPr>
-            <a:r>
-              <a:rPr lang="en-US" sz="950" dirty="0">
-                <a:solidFill>
-                  <a:srgbClr val="959595"/>
-                </a:solidFill>
-                <a:latin typeface="Pretendard" pitchFamily="34" charset="0"/>
-                <a:ea typeface="Pretendard" pitchFamily="34" charset="-122"/>
-                <a:cs typeface="Pretendard" pitchFamily="34" charset="-120"/>
-              </a:rPr>
-              <a:t>남는 것</a:t>
-            </a:r>
-            <a:endParaRPr lang="en-US" sz="950" dirty="0"/>
-          </a:p>
-        </p:txBody>
-      </p:sp>
-      <p:sp>
-        <p:nvSpPr>
-          <p:cNvPr id="17" name="Text 15"/>
-          <p:cNvSpPr/>
-          <p:nvPr/>
-        </p:nvSpPr>
-        <p:spPr>
-          <a:xfrm>
-            <a:off x="1408176" y="3675888"/>
-            <a:ext cx="1431036" cy="329184"/>
-          </a:xfrm>
-          <a:prstGeom prst="rect">
-            <a:avLst/>
-          </a:prstGeom>
-          <a:noFill/>
-          <a:ln/>
-        </p:spPr>
-        <p:txBody>
-          <a:bodyPr wrap="square" lIns="0" tIns="0" rIns="0" bIns="0" rtlCol="0" anchor="t"/>
-          <a:lstStyle/>
-          <a:p>
-            <a:pPr indent="0" marL="0">
-              <a:lnSpc>
-                <a:spcPts val="1400"/>
-              </a:lnSpc>
-              <a:buNone/>
-            </a:pPr>
-            <a:r>
-              <a:rPr lang="en-US" sz="1100" dirty="0">
-                <a:solidFill>
-                  <a:srgbClr val="3C3C3C"/>
-                </a:solidFill>
-                <a:latin typeface="Pretendard" pitchFamily="34" charset="0"/>
-                <a:ea typeface="Pretendard" pitchFamily="34" charset="-122"/>
-                <a:cs typeface="Pretendard" pitchFamily="34" charset="-120"/>
-              </a:rPr>
-              <a:t>주목이 그 사람에게</a:t>
-            </a:r>
-            <a:endParaRPr lang="en-US" sz="1100" dirty="0"/>
-          </a:p>
-        </p:txBody>
-      </p:sp>
-      <p:sp>
-        <p:nvSpPr>
-          <p:cNvPr id="18" name="Text 16"/>
-          <p:cNvSpPr/>
-          <p:nvPr/>
-        </p:nvSpPr>
-        <p:spPr>
-          <a:xfrm>
-            <a:off x="2930652" y="3675888"/>
-            <a:ext cx="1431036" cy="329184"/>
-          </a:xfrm>
-          <a:prstGeom prst="rect">
-            <a:avLst/>
-          </a:prstGeom>
-          <a:noFill/>
-          <a:ln/>
-        </p:spPr>
-        <p:txBody>
-          <a:bodyPr wrap="square" lIns="0" tIns="0" rIns="0" bIns="0" rtlCol="0" anchor="t"/>
-          <a:lstStyle/>
-          <a:p>
-            <a:pPr indent="0" marL="0">
-              <a:lnSpc>
-                <a:spcPts val="1400"/>
-              </a:lnSpc>
-              <a:buNone/>
-            </a:pPr>
-            <a:r>
-              <a:rPr lang="en-US" sz="1100" b="1" dirty="0">
-                <a:solidFill>
-                  <a:srgbClr val="191919"/>
-                </a:solidFill>
-                <a:latin typeface="Pretendard" pitchFamily="34" charset="0"/>
-                <a:ea typeface="Pretendard" pitchFamily="34" charset="-122"/>
-                <a:cs typeface="Pretendard" pitchFamily="34" charset="-120"/>
-              </a:rPr>
-              <a:t>주목이 브랜드에 쌓인다</a:t>
-            </a:r>
-            <a:endParaRPr lang="en-US" sz="1100" dirty="0"/>
-          </a:p>
-        </p:txBody>
-      </p:sp>
-      <p:sp>
-        <p:nvSpPr>
-          <p:cNvPr id="19" name="Shape 17"/>
-          <p:cNvSpPr/>
-          <p:nvPr/>
-        </p:nvSpPr>
-        <p:spPr>
-          <a:xfrm>
-            <a:off x="5001768" y="2084832"/>
-            <a:ext cx="6531559" cy="896112"/>
+          <p:cNvPr id="6" name="Shape 4"/>
+          <p:cNvSpPr/>
+          <p:nvPr/>
+        </p:nvSpPr>
+        <p:spPr>
+          <a:xfrm>
+            <a:off x="658368" y="2377440"/>
+            <a:ext cx="4069080" cy="896112"/>
           </a:xfrm>
           <a:prstGeom prst="roundRect">
             <a:avLst>
@@ -10142,14 +9614,14 @@
       </p:sp>
       <p:sp>
         <p:nvSpPr>
-          <p:cNvPr id="20" name="Text 18"/>
-          <p:cNvSpPr/>
-          <p:nvPr/>
-        </p:nvSpPr>
-        <p:spPr>
-          <a:xfrm>
-            <a:off x="5202936" y="2212848"/>
-            <a:ext cx="6129223" cy="201168"/>
+          <p:cNvPr id="7" name="Text 5"/>
+          <p:cNvSpPr/>
+          <p:nvPr/>
+        </p:nvSpPr>
+        <p:spPr>
+          <a:xfrm>
+            <a:off x="841248" y="2487168"/>
+            <a:ext cx="3703320" cy="201168"/>
           </a:xfrm>
           <a:prstGeom prst="rect">
             <a:avLst/>
@@ -10173,7 +9645,7 @@
                 <a:ea typeface="Pretendard" pitchFamily="34" charset="-122"/>
                 <a:cs typeface="Pretendard" pitchFamily="34" charset="-120"/>
               </a:rPr>
-              <a:t>이 조사는 무엇인가</a:t>
+              <a:t>01 · 의인화는 조건부로 작동한다</a:t>
             </a:r>
             <a:endParaRPr lang="en-US" sz="1000" dirty="0"/>
           </a:p>
@@ -10181,14 +9653,14 @@
       </p:sp>
       <p:sp>
         <p:nvSpPr>
-          <p:cNvPr id="21" name="Text 19"/>
-          <p:cNvSpPr/>
-          <p:nvPr/>
-        </p:nvSpPr>
-        <p:spPr>
-          <a:xfrm>
-            <a:off x="5202936" y="2450592"/>
-            <a:ext cx="6129223" cy="475488"/>
+          <p:cNvPr id="8" name="Text 6"/>
+          <p:cNvSpPr/>
+          <p:nvPr/>
+        </p:nvSpPr>
+        <p:spPr>
+          <a:xfrm>
+            <a:off x="841248" y="2706624"/>
+            <a:ext cx="3703320" cy="365760"/>
           </a:xfrm>
           <a:prstGeom prst="rect">
             <a:avLst/>
@@ -10202,12 +9674,12 @@
           <a:p>
             <a:pPr indent="0" marL="0">
               <a:lnSpc>
-                <a:spcPts val="1200"/>
+                <a:spcPts val="1100"/>
               </a:lnSpc>
               <a:buNone/>
             </a:pPr>
             <a:r>
-              <a:rPr lang="en-US" sz="900" dirty="0">
+              <a:rPr lang="en-US" sz="850" dirty="0">
                 <a:solidFill>
                   <a:srgbClr val="3C3C3C"/>
                 </a:solidFill>
@@ -10215,16 +9687,16 @@
                 <a:ea typeface="Pretendard" pitchFamily="34" charset="-122"/>
                 <a:cs typeface="Pretendard" pitchFamily="34" charset="-120"/>
               </a:rPr>
-              <a:t>광고 효과 조사기관 </a:t>
+              <a:t>사물에 사람의 성격을 부여하면 더 호의적으로 평가한다. 단, </a:t>
             </a:r>
             <a:pPr indent="0" marL="0">
               <a:lnSpc>
-                <a:spcPts val="1200"/>
+                <a:spcPts val="1100"/>
               </a:lnSpc>
               <a:buNone/>
             </a:pPr>
             <a:r>
-              <a:rPr lang="en-US" sz="900" b="1" dirty="0">
+              <a:rPr lang="en-US" sz="850" b="1" dirty="0">
                 <a:solidFill>
                   <a:srgbClr val="191919"/>
                 </a:solidFill>
@@ -10232,16 +9704,16 @@
                 <a:ea typeface="Pretendard" pitchFamily="34" charset="-122"/>
                 <a:cs typeface="Pretendard" pitchFamily="34" charset="-120"/>
               </a:rPr>
-              <a:t>System1</a:t>
+              <a:t>제품의 특징과 그 성격이 맞을 때</a:t>
             </a:r>
             <a:pPr indent="0" marL="0">
               <a:lnSpc>
-                <a:spcPts val="1200"/>
+                <a:spcPts val="1100"/>
               </a:lnSpc>
               <a:buNone/>
             </a:pPr>
             <a:r>
-              <a:rPr lang="en-US" sz="900" dirty="0">
+              <a:rPr lang="en-US" sz="850" dirty="0">
                 <a:solidFill>
                   <a:srgbClr val="3C3C3C"/>
                 </a:solidFill>
@@ -10249,136 +9721,664 @@
                 <a:ea typeface="Pretendard" pitchFamily="34" charset="-122"/>
                 <a:cs typeface="Pretendard" pitchFamily="34" charset="-120"/>
               </a:rPr>
-              <a:t>이 미국 슈퍼볼 광고 </a:t>
-            </a:r>
-            <a:pPr indent="0" marL="0">
-              <a:lnSpc>
-                <a:spcPts val="1200"/>
-              </a:lnSpc>
-              <a:buNone/>
-            </a:pPr>
-            <a:r>
-              <a:rPr lang="en-US" sz="900" b="1" dirty="0">
-                <a:solidFill>
-                  <a:srgbClr val="191919"/>
-                </a:solidFill>
-                <a:latin typeface="Pretendard" pitchFamily="34" charset="0"/>
-                <a:ea typeface="Pretendard" pitchFamily="34" charset="-122"/>
-                <a:cs typeface="Pretendard" pitchFamily="34" charset="-120"/>
-              </a:rPr>
-              <a:t>2020~2023년</a:t>
-            </a:r>
-            <a:pPr indent="0" marL="0">
-              <a:lnSpc>
-                <a:spcPts val="1200"/>
-              </a:lnSpc>
-              <a:buNone/>
-            </a:pPr>
-            <a:r>
-              <a:rPr lang="en-US" sz="900" dirty="0">
-                <a:solidFill>
-                  <a:srgbClr val="3C3C3C"/>
-                </a:solidFill>
-                <a:latin typeface="Pretendard" pitchFamily="34" charset="0"/>
-                <a:ea typeface="Pretendard" pitchFamily="34" charset="-122"/>
-                <a:cs typeface="Pretendard" pitchFamily="34" charset="-120"/>
-              </a:rPr>
-              <a:t>분을 분석했다. 시청자의 감정 반응을 측정해, 그 광고가 </a:t>
-            </a:r>
-            <a:pPr indent="0" marL="0">
-              <a:lnSpc>
-                <a:spcPts val="1200"/>
-              </a:lnSpc>
-              <a:buNone/>
-            </a:pPr>
-            <a:r>
-              <a:rPr lang="en-US" sz="900" b="1" dirty="0">
-                <a:solidFill>
-                  <a:srgbClr val="191919"/>
-                </a:solidFill>
-                <a:latin typeface="Pretendard" pitchFamily="34" charset="0"/>
-                <a:ea typeface="Pretendard" pitchFamily="34" charset="-122"/>
-                <a:cs typeface="Pretendard" pitchFamily="34" charset="-120"/>
-              </a:rPr>
-              <a:t>장기적으로 브랜드를 키울 가능성</a:t>
-            </a:r>
-            <a:pPr indent="0" marL="0">
-              <a:lnSpc>
-                <a:spcPts val="1200"/>
-              </a:lnSpc>
-              <a:buNone/>
-            </a:pPr>
-            <a:r>
-              <a:rPr lang="en-US" sz="900" dirty="0">
-                <a:solidFill>
-                  <a:srgbClr val="3C3C3C"/>
-                </a:solidFill>
-                <a:latin typeface="Pretendard" pitchFamily="34" charset="0"/>
-                <a:ea typeface="Pretendard" pitchFamily="34" charset="-122"/>
-                <a:cs typeface="Pretendard" pitchFamily="34" charset="-120"/>
-              </a:rPr>
-              <a:t>을 1.0~5.9점으로 환산한 점수다.</a:t>
-            </a:r>
-            <a:endParaRPr lang="en-US" sz="900" dirty="0"/>
-          </a:p>
-        </p:txBody>
-      </p:sp>
-      <p:sp>
-        <p:nvSpPr>
-          <p:cNvPr id="22" name="Text 20"/>
-          <p:cNvSpPr/>
-          <p:nvPr/>
-        </p:nvSpPr>
-        <p:spPr>
-          <a:xfrm>
-            <a:off x="5001768" y="3191256"/>
-            <a:ext cx="1481328" cy="329184"/>
-          </a:xfrm>
-          <a:prstGeom prst="rect">
-            <a:avLst/>
-          </a:prstGeom>
-          <a:noFill/>
-          <a:ln/>
-        </p:spPr>
-        <p:txBody>
-          <a:bodyPr wrap="square" lIns="0" tIns="0" rIns="0" bIns="0" rtlCol="0" anchor="ctr"/>
-          <a:lstStyle/>
-          <a:p>
-            <a:pPr indent="0" marL="0">
-              <a:lnSpc>
-                <a:spcPts val="1200"/>
-              </a:lnSpc>
-              <a:buNone/>
-            </a:pPr>
-            <a:r>
-              <a:rPr lang="en-US" sz="1000" dirty="0">
-                <a:solidFill>
-                  <a:srgbClr val="3C3C3C"/>
-                </a:solidFill>
-                <a:latin typeface="Pretendard" pitchFamily="34" charset="0"/>
-                <a:ea typeface="Pretendard" pitchFamily="34" charset="-122"/>
-                <a:cs typeface="Pretendard" pitchFamily="34" charset="-120"/>
-              </a:rPr>
-              <a:t>연예인을 쓴 광고  37%</a:t>
-            </a:r>
-            <a:endParaRPr lang="en-US" sz="1000" dirty="0"/>
-          </a:p>
-        </p:txBody>
-      </p:sp>
-      <p:sp>
-        <p:nvSpPr>
-          <p:cNvPr id="23" name="Shape 21"/>
-          <p:cNvSpPr/>
-          <p:nvPr/>
-        </p:nvSpPr>
-        <p:spPr>
-          <a:xfrm>
-            <a:off x="6611112" y="3218688"/>
-            <a:ext cx="4410151" cy="256032"/>
+              <a:t>만 효과가 난다.</a:t>
+            </a:r>
+            <a:endParaRPr lang="en-US" sz="850" dirty="0"/>
+          </a:p>
+        </p:txBody>
+      </p:sp>
+      <p:sp>
+        <p:nvSpPr>
+          <p:cNvPr id="9" name="Text 7"/>
+          <p:cNvSpPr/>
+          <p:nvPr/>
+        </p:nvSpPr>
+        <p:spPr>
+          <a:xfrm>
+            <a:off x="841248" y="3072384"/>
+            <a:ext cx="3703320" cy="164592"/>
+          </a:xfrm>
+          <a:prstGeom prst="rect">
+            <a:avLst/>
+          </a:prstGeom>
+          <a:noFill/>
+          <a:ln/>
+        </p:spPr>
+        <p:txBody>
+          <a:bodyPr wrap="square" lIns="0" tIns="0" rIns="0" bIns="0" rtlCol="0" anchor="t"/>
+          <a:lstStyle/>
+          <a:p>
+            <a:pPr indent="0" marL="0">
+              <a:buNone/>
+            </a:pPr>
+            <a:r>
+              <a:rPr lang="en-US" sz="750" dirty="0">
+                <a:solidFill>
+                  <a:srgbClr val="959595"/>
+                </a:solidFill>
+                <a:latin typeface="Pretendard" pitchFamily="34" charset="0"/>
+                <a:ea typeface="Pretendard" pitchFamily="34" charset="-122"/>
+                <a:cs typeface="Pretendard" pitchFamily="34" charset="-120"/>
+              </a:rPr>
+              <a:t>Aggarwal &amp; McGill, Journal of Consumer Research (2007)</a:t>
+            </a:r>
+            <a:endParaRPr lang="en-US" sz="750" dirty="0"/>
+          </a:p>
+        </p:txBody>
+      </p:sp>
+      <p:sp>
+        <p:nvSpPr>
+          <p:cNvPr id="10" name="Shape 8"/>
+          <p:cNvSpPr/>
+          <p:nvPr/>
+        </p:nvSpPr>
+        <p:spPr>
+          <a:xfrm>
+            <a:off x="658368" y="3346704"/>
+            <a:ext cx="4069080" cy="896112"/>
           </a:xfrm>
           <a:prstGeom prst="roundRect">
             <a:avLst>
-              <a:gd name="adj" fmla="val 19643"/>
+              <a:gd name="adj" fmla="val 9184"/>
+            </a:avLst>
+          </a:prstGeom>
+          <a:solidFill>
+            <a:srgbClr val="F5F5F7"/>
+          </a:solidFill>
+          <a:ln/>
+        </p:spPr>
+      </p:sp>
+      <p:sp>
+        <p:nvSpPr>
+          <p:cNvPr id="11" name="Text 9"/>
+          <p:cNvSpPr/>
+          <p:nvPr/>
+        </p:nvSpPr>
+        <p:spPr>
+          <a:xfrm>
+            <a:off x="841248" y="3456432"/>
+            <a:ext cx="3703320" cy="201168"/>
+          </a:xfrm>
+          <a:prstGeom prst="rect">
+            <a:avLst/>
+          </a:prstGeom>
+          <a:noFill/>
+          <a:ln/>
+        </p:spPr>
+        <p:txBody>
+          <a:bodyPr wrap="square" lIns="0" tIns="0" rIns="0" bIns="0" rtlCol="0" anchor="t"/>
+          <a:lstStyle/>
+          <a:p>
+            <a:pPr indent="0" marL="0">
+              <a:buNone/>
+            </a:pPr>
+            <a:r>
+              <a:rPr lang="en-US" sz="1000" b="1" dirty="0">
+                <a:solidFill>
+                  <a:srgbClr val="0057FF"/>
+                </a:solidFill>
+                <a:latin typeface="Pretendard" pitchFamily="34" charset="0"/>
+                <a:ea typeface="Pretendard" pitchFamily="34" charset="-122"/>
+                <a:cs typeface="Pretendard" pitchFamily="34" charset="-120"/>
+              </a:rPr>
+              <a:t>02 · 신뢰가 브랜드로 옮겨간다</a:t>
+            </a:r>
+            <a:endParaRPr lang="en-US" sz="1000" dirty="0"/>
+          </a:p>
+        </p:txBody>
+      </p:sp>
+      <p:sp>
+        <p:nvSpPr>
+          <p:cNvPr id="12" name="Text 10"/>
+          <p:cNvSpPr/>
+          <p:nvPr/>
+        </p:nvSpPr>
+        <p:spPr>
+          <a:xfrm>
+            <a:off x="841248" y="3675888"/>
+            <a:ext cx="3703320" cy="365760"/>
+          </a:xfrm>
+          <a:prstGeom prst="rect">
+            <a:avLst/>
+          </a:prstGeom>
+          <a:noFill/>
+          <a:ln/>
+        </p:spPr>
+        <p:txBody>
+          <a:bodyPr wrap="square" lIns="0" tIns="0" rIns="0" bIns="0" rtlCol="0" anchor="t"/>
+          <a:lstStyle/>
+          <a:p>
+            <a:pPr indent="0" marL="0">
+              <a:lnSpc>
+                <a:spcPts val="1100"/>
+              </a:lnSpc>
+              <a:buNone/>
+            </a:pPr>
+            <a:r>
+              <a:rPr lang="en-US" sz="850" dirty="0">
+                <a:solidFill>
+                  <a:srgbClr val="3C3C3C"/>
+                </a:solidFill>
+                <a:latin typeface="Pretendard" pitchFamily="34" charset="0"/>
+                <a:ea typeface="Pretendard" pitchFamily="34" charset="-122"/>
+                <a:cs typeface="Pretendard" pitchFamily="34" charset="-120"/>
+              </a:rPr>
+              <a:t>캐릭터에 대한 신뢰는 브랜드 태도로 옮겨간다. 그 브랜드를 </a:t>
+            </a:r>
+            <a:pPr indent="0" marL="0">
+              <a:lnSpc>
+                <a:spcPts val="1100"/>
+              </a:lnSpc>
+              <a:buNone/>
+            </a:pPr>
+            <a:r>
+              <a:rPr lang="en-US" sz="850" b="1" dirty="0">
+                <a:solidFill>
+                  <a:srgbClr val="191919"/>
+                </a:solidFill>
+                <a:latin typeface="Pretendard" pitchFamily="34" charset="0"/>
+                <a:ea typeface="Pretendard" pitchFamily="34" charset="-122"/>
+                <a:cs typeface="Pretendard" pitchFamily="34" charset="-120"/>
+              </a:rPr>
+              <a:t>잘 모르는 소비자일수록 효과가 컸다</a:t>
+            </a:r>
+            <a:pPr indent="0" marL="0">
+              <a:lnSpc>
+                <a:spcPts val="1100"/>
+              </a:lnSpc>
+              <a:buNone/>
+            </a:pPr>
+            <a:r>
+              <a:rPr lang="en-US" sz="850" dirty="0">
+                <a:solidFill>
+                  <a:srgbClr val="3C3C3C"/>
+                </a:solidFill>
+                <a:latin typeface="Pretendard" pitchFamily="34" charset="0"/>
+                <a:ea typeface="Pretendard" pitchFamily="34" charset="-122"/>
+                <a:cs typeface="Pretendard" pitchFamily="34" charset="-120"/>
+              </a:rPr>
+              <a:t> — 청호나이스를 아직 모르는 2030에게 유리한 조건.</a:t>
+            </a:r>
+            <a:endParaRPr lang="en-US" sz="850" dirty="0"/>
+          </a:p>
+        </p:txBody>
+      </p:sp>
+      <p:sp>
+        <p:nvSpPr>
+          <p:cNvPr id="13" name="Text 11"/>
+          <p:cNvSpPr/>
+          <p:nvPr/>
+        </p:nvSpPr>
+        <p:spPr>
+          <a:xfrm>
+            <a:off x="841248" y="4041648"/>
+            <a:ext cx="3703320" cy="164592"/>
+          </a:xfrm>
+          <a:prstGeom prst="rect">
+            <a:avLst/>
+          </a:prstGeom>
+          <a:noFill/>
+          <a:ln/>
+        </p:spPr>
+        <p:txBody>
+          <a:bodyPr wrap="square" lIns="0" tIns="0" rIns="0" bIns="0" rtlCol="0" anchor="t"/>
+          <a:lstStyle/>
+          <a:p>
+            <a:pPr indent="0" marL="0">
+              <a:buNone/>
+            </a:pPr>
+            <a:r>
+              <a:rPr lang="en-US" sz="750" dirty="0">
+                <a:solidFill>
+                  <a:srgbClr val="959595"/>
+                </a:solidFill>
+                <a:latin typeface="Pretendard" pitchFamily="34" charset="0"/>
+                <a:ea typeface="Pretendard" pitchFamily="34" charset="-122"/>
+                <a:cs typeface="Pretendard" pitchFamily="34" charset="-120"/>
+              </a:rPr>
+              <a:t>Garretson &amp; Niedrich, Journal of Advertising (2004)</a:t>
+            </a:r>
+            <a:endParaRPr lang="en-US" sz="750" dirty="0"/>
+          </a:p>
+        </p:txBody>
+      </p:sp>
+      <p:sp>
+        <p:nvSpPr>
+          <p:cNvPr id="14" name="Shape 12"/>
+          <p:cNvSpPr/>
+          <p:nvPr/>
+        </p:nvSpPr>
+        <p:spPr>
+          <a:xfrm>
+            <a:off x="658368" y="4315968"/>
+            <a:ext cx="4069080" cy="896112"/>
+          </a:xfrm>
+          <a:prstGeom prst="roundRect">
+            <a:avLst>
+              <a:gd name="adj" fmla="val 9184"/>
+            </a:avLst>
+          </a:prstGeom>
+          <a:solidFill>
+            <a:srgbClr val="F5F5F7"/>
+          </a:solidFill>
+          <a:ln/>
+        </p:spPr>
+      </p:sp>
+      <p:sp>
+        <p:nvSpPr>
+          <p:cNvPr id="15" name="Text 13"/>
+          <p:cNvSpPr/>
+          <p:nvPr/>
+        </p:nvSpPr>
+        <p:spPr>
+          <a:xfrm>
+            <a:off x="841248" y="4425696"/>
+            <a:ext cx="3703320" cy="201168"/>
+          </a:xfrm>
+          <a:prstGeom prst="rect">
+            <a:avLst/>
+          </a:prstGeom>
+          <a:noFill/>
+          <a:ln/>
+        </p:spPr>
+        <p:txBody>
+          <a:bodyPr wrap="square" lIns="0" tIns="0" rIns="0" bIns="0" rtlCol="0" anchor="t"/>
+          <a:lstStyle/>
+          <a:p>
+            <a:pPr indent="0" marL="0">
+              <a:buNone/>
+            </a:pPr>
+            <a:r>
+              <a:rPr lang="en-US" sz="1000" b="1" dirty="0">
+                <a:solidFill>
+                  <a:srgbClr val="0057FF"/>
+                </a:solidFill>
+                <a:latin typeface="Pretendard" pitchFamily="34" charset="0"/>
+                <a:ea typeface="Pretendard" pitchFamily="34" charset="-122"/>
+                <a:cs typeface="Pretendard" pitchFamily="34" charset="-120"/>
+              </a:rPr>
+              <a:t>03 · 반복하면 기억의 단서가 된다</a:t>
+            </a:r>
+            <a:endParaRPr lang="en-US" sz="1000" dirty="0"/>
+          </a:p>
+        </p:txBody>
+      </p:sp>
+      <p:sp>
+        <p:nvSpPr>
+          <p:cNvPr id="16" name="Text 14"/>
+          <p:cNvSpPr/>
+          <p:nvPr/>
+        </p:nvSpPr>
+        <p:spPr>
+          <a:xfrm>
+            <a:off x="841248" y="4645152"/>
+            <a:ext cx="3703320" cy="365760"/>
+          </a:xfrm>
+          <a:prstGeom prst="rect">
+            <a:avLst/>
+          </a:prstGeom>
+          <a:noFill/>
+          <a:ln/>
+        </p:spPr>
+        <p:txBody>
+          <a:bodyPr wrap="square" lIns="0" tIns="0" rIns="0" bIns="0" rtlCol="0" anchor="t"/>
+          <a:lstStyle/>
+          <a:p>
+            <a:pPr indent="0" marL="0">
+              <a:lnSpc>
+                <a:spcPts val="1100"/>
+              </a:lnSpc>
+              <a:buNone/>
+            </a:pPr>
+            <a:r>
+              <a:rPr lang="en-US" sz="850" dirty="0">
+                <a:solidFill>
+                  <a:srgbClr val="3C3C3C"/>
+                </a:solidFill>
+                <a:latin typeface="Pretendard" pitchFamily="34" charset="0"/>
+                <a:ea typeface="Pretendard" pitchFamily="34" charset="-122"/>
+                <a:cs typeface="Pretendard" pitchFamily="34" charset="-120"/>
+              </a:rPr>
+              <a:t>일관되게 쓰인 캐릭터는 브랜드를 떠올리게 하는 </a:t>
+            </a:r>
+            <a:pPr indent="0" marL="0">
+              <a:lnSpc>
+                <a:spcPts val="1100"/>
+              </a:lnSpc>
+              <a:buNone/>
+            </a:pPr>
+            <a:r>
+              <a:rPr lang="en-US" sz="850" b="1" dirty="0">
+                <a:solidFill>
+                  <a:srgbClr val="191919"/>
+                </a:solidFill>
+                <a:latin typeface="Pretendard" pitchFamily="34" charset="0"/>
+                <a:ea typeface="Pretendard" pitchFamily="34" charset="-122"/>
+                <a:cs typeface="Pretendard" pitchFamily="34" charset="-120"/>
+              </a:rPr>
+              <a:t>구별 자산</a:t>
+            </a:r>
+            <a:pPr indent="0" marL="0">
+              <a:lnSpc>
+                <a:spcPts val="1100"/>
+              </a:lnSpc>
+              <a:buNone/>
+            </a:pPr>
+            <a:r>
+              <a:rPr lang="en-US" sz="850" dirty="0">
+                <a:solidFill>
+                  <a:srgbClr val="3C3C3C"/>
+                </a:solidFill>
+                <a:latin typeface="Pretendard" pitchFamily="34" charset="0"/>
+                <a:ea typeface="Pretendard" pitchFamily="34" charset="-122"/>
+                <a:cs typeface="Pretendard" pitchFamily="34" charset="-120"/>
+              </a:rPr>
+              <a:t>이 된다. 인지도·고유성 두 축으로 관리한다.</a:t>
+            </a:r>
+            <a:endParaRPr lang="en-US" sz="850" dirty="0"/>
+          </a:p>
+        </p:txBody>
+      </p:sp>
+      <p:sp>
+        <p:nvSpPr>
+          <p:cNvPr id="17" name="Text 15"/>
+          <p:cNvSpPr/>
+          <p:nvPr/>
+        </p:nvSpPr>
+        <p:spPr>
+          <a:xfrm>
+            <a:off x="841248" y="5010912"/>
+            <a:ext cx="3703320" cy="164592"/>
+          </a:xfrm>
+          <a:prstGeom prst="rect">
+            <a:avLst/>
+          </a:prstGeom>
+          <a:noFill/>
+          <a:ln/>
+        </p:spPr>
+        <p:txBody>
+          <a:bodyPr wrap="square" lIns="0" tIns="0" rIns="0" bIns="0" rtlCol="0" anchor="t"/>
+          <a:lstStyle/>
+          <a:p>
+            <a:pPr indent="0" marL="0">
+              <a:buNone/>
+            </a:pPr>
+            <a:r>
+              <a:rPr lang="en-US" sz="750" dirty="0">
+                <a:solidFill>
+                  <a:srgbClr val="959595"/>
+                </a:solidFill>
+                <a:latin typeface="Pretendard" pitchFamily="34" charset="0"/>
+                <a:ea typeface="Pretendard" pitchFamily="34" charset="-122"/>
+                <a:cs typeface="Pretendard" pitchFamily="34" charset="-120"/>
+              </a:rPr>
+              <a:t>Romaniuk, Ehrenberg-Bass — 16장 검증 설계의 기준</a:t>
+            </a:r>
+            <a:endParaRPr lang="en-US" sz="750" dirty="0"/>
+          </a:p>
+        </p:txBody>
+      </p:sp>
+      <p:sp>
+        <p:nvSpPr>
+          <p:cNvPr id="18" name="Text 16"/>
+          <p:cNvSpPr/>
+          <p:nvPr/>
+        </p:nvSpPr>
+        <p:spPr>
+          <a:xfrm>
+            <a:off x="5230368" y="2084832"/>
+            <a:ext cx="6302959" cy="219456"/>
+          </a:xfrm>
+          <a:prstGeom prst="rect">
+            <a:avLst/>
+          </a:prstGeom>
+          <a:noFill/>
+          <a:ln/>
+        </p:spPr>
+        <p:txBody>
+          <a:bodyPr wrap="square" lIns="0" tIns="0" rIns="0" bIns="0" rtlCol="0" anchor="t"/>
+          <a:lstStyle/>
+          <a:p>
+            <a:pPr indent="0" marL="0">
+              <a:buNone/>
+            </a:pPr>
+            <a:r>
+              <a:rPr lang="en-US" sz="1050" b="1" dirty="0">
+                <a:solidFill>
+                  <a:srgbClr val="191919"/>
+                </a:solidFill>
+                <a:latin typeface="Pretendard" pitchFamily="34" charset="0"/>
+                <a:ea typeface="Pretendard" pitchFamily="34" charset="-122"/>
+                <a:cs typeface="Pretendard" pitchFamily="34" charset="-120"/>
+              </a:rPr>
+              <a:t>실제로 효과가 있었는가 · 광고 효과 조사</a:t>
+            </a:r>
+            <a:endParaRPr lang="en-US" sz="1050" dirty="0"/>
+          </a:p>
+        </p:txBody>
+      </p:sp>
+      <p:sp>
+        <p:nvSpPr>
+          <p:cNvPr id="19" name="Shape 17"/>
+          <p:cNvSpPr/>
+          <p:nvPr/>
+        </p:nvSpPr>
+        <p:spPr>
+          <a:xfrm>
+            <a:off x="5230368" y="2377440"/>
+            <a:ext cx="6302959" cy="749808"/>
+          </a:xfrm>
+          <a:prstGeom prst="roundRect">
+            <a:avLst>
+              <a:gd name="adj" fmla="val 10976"/>
+            </a:avLst>
+          </a:prstGeom>
+          <a:solidFill>
+            <a:srgbClr val="F5F5F7"/>
+          </a:solidFill>
+          <a:ln/>
+        </p:spPr>
+      </p:sp>
+      <p:sp>
+        <p:nvSpPr>
+          <p:cNvPr id="20" name="Text 18"/>
+          <p:cNvSpPr/>
+          <p:nvPr/>
+        </p:nvSpPr>
+        <p:spPr>
+          <a:xfrm>
+            <a:off x="5413248" y="2487168"/>
+            <a:ext cx="5937199" cy="548640"/>
+          </a:xfrm>
+          <a:prstGeom prst="rect">
+            <a:avLst/>
+          </a:prstGeom>
+          <a:noFill/>
+          <a:ln/>
+        </p:spPr>
+        <p:txBody>
+          <a:bodyPr wrap="square" lIns="0" tIns="0" rIns="0" bIns="0" rtlCol="0" anchor="t"/>
+          <a:lstStyle/>
+          <a:p>
+            <a:pPr indent="0" marL="0">
+              <a:lnSpc>
+                <a:spcPts val="1100"/>
+              </a:lnSpc>
+              <a:buNone/>
+            </a:pPr>
+            <a:r>
+              <a:rPr lang="en-US" sz="850" dirty="0">
+                <a:solidFill>
+                  <a:srgbClr val="3C3C3C"/>
+                </a:solidFill>
+                <a:latin typeface="Pretendard" pitchFamily="34" charset="0"/>
+                <a:ea typeface="Pretendard" pitchFamily="34" charset="-122"/>
+                <a:cs typeface="Pretendard" pitchFamily="34" charset="-120"/>
+              </a:rPr>
+              <a:t>조사기관 </a:t>
+            </a:r>
+            <a:pPr indent="0" marL="0">
+              <a:lnSpc>
+                <a:spcPts val="1100"/>
+              </a:lnSpc>
+              <a:buNone/>
+            </a:pPr>
+            <a:r>
+              <a:rPr lang="en-US" sz="850" b="1" dirty="0">
+                <a:solidFill>
+                  <a:srgbClr val="191919"/>
+                </a:solidFill>
+                <a:latin typeface="Pretendard" pitchFamily="34" charset="0"/>
+                <a:ea typeface="Pretendard" pitchFamily="34" charset="-122"/>
+                <a:cs typeface="Pretendard" pitchFamily="34" charset="-120"/>
+              </a:rPr>
+              <a:t>System1</a:t>
+            </a:r>
+            <a:pPr indent="0" marL="0">
+              <a:lnSpc>
+                <a:spcPts val="1100"/>
+              </a:lnSpc>
+              <a:buNone/>
+            </a:pPr>
+            <a:r>
+              <a:rPr lang="en-US" sz="850" dirty="0">
+                <a:solidFill>
+                  <a:srgbClr val="3C3C3C"/>
+                </a:solidFill>
+                <a:latin typeface="Pretendard" pitchFamily="34" charset="0"/>
+                <a:ea typeface="Pretendard" pitchFamily="34" charset="-122"/>
+                <a:cs typeface="Pretendard" pitchFamily="34" charset="-120"/>
+              </a:rPr>
+              <a:t>이 미국 슈퍼볼 광고 </a:t>
+            </a:r>
+            <a:pPr indent="0" marL="0">
+              <a:lnSpc>
+                <a:spcPts val="1100"/>
+              </a:lnSpc>
+              <a:buNone/>
+            </a:pPr>
+            <a:r>
+              <a:rPr lang="en-US" sz="850" b="1" dirty="0">
+                <a:solidFill>
+                  <a:srgbClr val="191919"/>
+                </a:solidFill>
+                <a:latin typeface="Pretendard" pitchFamily="34" charset="0"/>
+                <a:ea typeface="Pretendard" pitchFamily="34" charset="-122"/>
+                <a:cs typeface="Pretendard" pitchFamily="34" charset="-120"/>
+              </a:rPr>
+              <a:t>2020~2023년</a:t>
+            </a:r>
+            <a:pPr indent="0" marL="0">
+              <a:lnSpc>
+                <a:spcPts val="1100"/>
+              </a:lnSpc>
+              <a:buNone/>
+            </a:pPr>
+            <a:r>
+              <a:rPr lang="en-US" sz="850" dirty="0">
+                <a:solidFill>
+                  <a:srgbClr val="3C3C3C"/>
+                </a:solidFill>
+                <a:latin typeface="Pretendard" pitchFamily="34" charset="0"/>
+                <a:ea typeface="Pretendard" pitchFamily="34" charset="-122"/>
+                <a:cs typeface="Pretendard" pitchFamily="34" charset="-120"/>
+              </a:rPr>
+              <a:t>분을 분석했다. 시청자의 감정 반응을 측정해, 그 광고가 </a:t>
+            </a:r>
+            <a:pPr indent="0" marL="0">
+              <a:lnSpc>
+                <a:spcPts val="1100"/>
+              </a:lnSpc>
+              <a:buNone/>
+            </a:pPr>
+            <a:r>
+              <a:rPr lang="en-US" sz="850" b="1" dirty="0">
+                <a:solidFill>
+                  <a:srgbClr val="191919"/>
+                </a:solidFill>
+                <a:latin typeface="Pretendard" pitchFamily="34" charset="0"/>
+                <a:ea typeface="Pretendard" pitchFamily="34" charset="-122"/>
+                <a:cs typeface="Pretendard" pitchFamily="34" charset="-120"/>
+              </a:rPr>
+              <a:t>장기적으로 브랜드를 키울 가능성</a:t>
+            </a:r>
+            <a:pPr indent="0" marL="0">
+              <a:lnSpc>
+                <a:spcPts val="1100"/>
+              </a:lnSpc>
+              <a:buNone/>
+            </a:pPr>
+            <a:r>
+              <a:rPr lang="en-US" sz="850" dirty="0">
+                <a:solidFill>
+                  <a:srgbClr val="3C3C3C"/>
+                </a:solidFill>
+                <a:latin typeface="Pretendard" pitchFamily="34" charset="0"/>
+                <a:ea typeface="Pretendard" pitchFamily="34" charset="-122"/>
+                <a:cs typeface="Pretendard" pitchFamily="34" charset="-120"/>
+              </a:rPr>
+              <a:t>을 1.0~5.9점으로 환산한 점수다.</a:t>
+            </a:r>
+            <a:endParaRPr lang="en-US" sz="850" dirty="0"/>
+          </a:p>
+        </p:txBody>
+      </p:sp>
+      <p:sp>
+        <p:nvSpPr>
+          <p:cNvPr id="21" name="Text 19"/>
+          <p:cNvSpPr/>
+          <p:nvPr/>
+        </p:nvSpPr>
+        <p:spPr>
+          <a:xfrm>
+            <a:off x="5230368" y="3310128"/>
+            <a:ext cx="1389888" cy="310896"/>
+          </a:xfrm>
+          <a:prstGeom prst="rect">
+            <a:avLst/>
+          </a:prstGeom>
+          <a:noFill/>
+          <a:ln/>
+        </p:spPr>
+        <p:txBody>
+          <a:bodyPr wrap="square" lIns="0" tIns="0" rIns="0" bIns="0" rtlCol="0" anchor="ctr"/>
+          <a:lstStyle/>
+          <a:p>
+            <a:pPr indent="0" marL="0">
+              <a:lnSpc>
+                <a:spcPts val="1150"/>
+              </a:lnSpc>
+              <a:buNone/>
+            </a:pPr>
+            <a:r>
+              <a:rPr lang="en-US" sz="950" dirty="0">
+                <a:solidFill>
+                  <a:srgbClr val="3C3C3C"/>
+                </a:solidFill>
+                <a:latin typeface="Pretendard" pitchFamily="34" charset="0"/>
+                <a:ea typeface="Pretendard" pitchFamily="34" charset="-122"/>
+                <a:cs typeface="Pretendard" pitchFamily="34" charset="-120"/>
+              </a:rPr>
+              <a:t>연예인을 쓴 광고  37%</a:t>
+            </a:r>
+            <a:endParaRPr lang="en-US" sz="950" dirty="0"/>
+          </a:p>
+        </p:txBody>
+      </p:sp>
+      <p:sp>
+        <p:nvSpPr>
+          <p:cNvPr id="22" name="Shape 20"/>
+          <p:cNvSpPr/>
+          <p:nvPr/>
+        </p:nvSpPr>
+        <p:spPr>
+          <a:xfrm>
+            <a:off x="6729984" y="3346704"/>
+            <a:ext cx="4327855" cy="237744"/>
+          </a:xfrm>
+          <a:prstGeom prst="roundRect">
+            <a:avLst>
+              <a:gd name="adj" fmla="val 19231"/>
             </a:avLst>
           </a:prstGeom>
           <a:solidFill>
@@ -10389,18 +10389,18 @@
       </p:sp>
       <p:sp>
         <p:nvSpPr>
-          <p:cNvPr id="24" name="Shape 22"/>
-          <p:cNvSpPr/>
-          <p:nvPr/>
-        </p:nvSpPr>
-        <p:spPr>
-          <a:xfrm>
-            <a:off x="6611112" y="3218688"/>
-            <a:ext cx="1620056" cy="256032"/>
+          <p:cNvPr id="23" name="Shape 21"/>
+          <p:cNvSpPr/>
+          <p:nvPr/>
+        </p:nvSpPr>
+        <p:spPr>
+          <a:xfrm>
+            <a:off x="6729984" y="3346704"/>
+            <a:ext cx="1589824" cy="237744"/>
           </a:xfrm>
           <a:prstGeom prst="roundRect">
             <a:avLst>
-              <a:gd name="adj" fmla="val 19643"/>
+              <a:gd name="adj" fmla="val 19231"/>
             </a:avLst>
           </a:prstGeom>
           <a:solidFill>
@@ -10411,14 +10411,53 @@
       </p:sp>
       <p:sp>
         <p:nvSpPr>
+          <p:cNvPr id="24" name="Text 22"/>
+          <p:cNvSpPr/>
+          <p:nvPr/>
+        </p:nvSpPr>
+        <p:spPr>
+          <a:xfrm>
+            <a:off x="11112703" y="3346704"/>
+            <a:ext cx="365760" cy="237744"/>
+          </a:xfrm>
+          <a:prstGeom prst="rect">
+            <a:avLst/>
+          </a:prstGeom>
+          <a:noFill/>
+          <a:ln/>
+        </p:spPr>
+        <p:txBody>
+          <a:bodyPr wrap="square" lIns="0" tIns="0" rIns="0" bIns="0" rtlCol="0" anchor="ctr"/>
+          <a:lstStyle/>
+          <a:p>
+            <a:pPr algn="r" indent="0" marL="0">
+              <a:buNone/>
+            </a:pPr>
+            <a:r>
+              <a:rPr lang="en-US" sz="1200" b="1" dirty="0">
+                <a:solidFill>
+                  <a:srgbClr val="707070"/>
+                </a:solidFill>
+                <a:latin typeface="Pretendard" pitchFamily="34" charset="0"/>
+                <a:ea typeface="Pretendard" pitchFamily="34" charset="-122"/>
+                <a:cs typeface="Pretendard" pitchFamily="34" charset="-120"/>
+              </a:rPr>
+              <a:t>2.8</a:t>
+            </a:r>
+            <a:endParaRPr lang="en-US" sz="1200" dirty="0"/>
+          </a:p>
+        </p:txBody>
+      </p:sp>
+      <p:sp>
+        <p:nvSpPr>
           <p:cNvPr id="25" name="Text 23"/>
           <p:cNvSpPr/>
           <p:nvPr/>
         </p:nvSpPr>
         <p:spPr>
           <a:xfrm>
-            <a:off x="11094415" y="3218688"/>
-            <a:ext cx="384048" cy="256032"/>
+            <a:off x="5230368" y="3675888"/>
+            <a:ext cx="1389888" cy="310896"/>
           </a:xfrm>
           <a:prstGeom prst="rect">
             <a:avLst/>
@@ -10430,53 +10469,14 @@
           <a:bodyPr wrap="square" lIns="0" tIns="0" rIns="0" bIns="0" rtlCol="0" anchor="ctr"/>
           <a:lstStyle/>
           <a:p>
-            <a:pPr algn="r" indent="0" marL="0">
-              <a:buNone/>
-            </a:pPr>
-            <a:r>
-              <a:rPr lang="en-US" sz="1250" b="1" dirty="0">
-                <a:solidFill>
-                  <a:srgbClr val="707070"/>
-                </a:solidFill>
-                <a:latin typeface="Pretendard" pitchFamily="34" charset="0"/>
-                <a:ea typeface="Pretendard" pitchFamily="34" charset="-122"/>
-                <a:cs typeface="Pretendard" pitchFamily="34" charset="-120"/>
-              </a:rPr>
-              <a:t>2.8</a:t>
-            </a:r>
-            <a:endParaRPr lang="en-US" sz="1250" dirty="0"/>
-          </a:p>
-        </p:txBody>
-      </p:sp>
-      <p:sp>
-        <p:nvSpPr>
-          <p:cNvPr id="26" name="Text 24"/>
-          <p:cNvSpPr/>
-          <p:nvPr/>
-        </p:nvSpPr>
-        <p:spPr>
-          <a:xfrm>
-            <a:off x="5001768" y="3575304"/>
-            <a:ext cx="1481328" cy="329184"/>
-          </a:xfrm>
-          <a:prstGeom prst="rect">
-            <a:avLst/>
-          </a:prstGeom>
-          <a:noFill/>
-          <a:ln/>
-        </p:spPr>
-        <p:txBody>
-          <a:bodyPr wrap="square" lIns="0" tIns="0" rIns="0" bIns="0" rtlCol="0" anchor="ctr"/>
-          <a:lstStyle/>
-          <a:p>
             <a:pPr indent="0" marL="0">
               <a:lnSpc>
-                <a:spcPts val="1200"/>
+                <a:spcPts val="1150"/>
               </a:lnSpc>
               <a:buNone/>
             </a:pPr>
             <a:r>
-              <a:rPr lang="en-US" sz="1000" dirty="0">
+              <a:rPr lang="en-US" sz="950" dirty="0">
                 <a:solidFill>
                   <a:srgbClr val="3C3C3C"/>
                 </a:solidFill>
@@ -10486,24 +10486,24 @@
               </a:rPr>
               <a:t>연예인 없는 광고  38%</a:t>
             </a:r>
-            <a:endParaRPr lang="en-US" sz="1000" dirty="0"/>
-          </a:p>
-        </p:txBody>
-      </p:sp>
-      <p:sp>
-        <p:nvSpPr>
-          <p:cNvPr id="27" name="Shape 25"/>
-          <p:cNvSpPr/>
-          <p:nvPr/>
-        </p:nvSpPr>
-        <p:spPr>
-          <a:xfrm>
-            <a:off x="6611112" y="3602736"/>
-            <a:ext cx="4410151" cy="256032"/>
+            <a:endParaRPr lang="en-US" sz="950" dirty="0"/>
+          </a:p>
+        </p:txBody>
+      </p:sp>
+      <p:sp>
+        <p:nvSpPr>
+          <p:cNvPr id="26" name="Shape 24"/>
+          <p:cNvSpPr/>
+          <p:nvPr/>
+        </p:nvSpPr>
+        <p:spPr>
+          <a:xfrm>
+            <a:off x="6729984" y="3712464"/>
+            <a:ext cx="4327855" cy="237744"/>
           </a:xfrm>
           <a:prstGeom prst="roundRect">
             <a:avLst>
-              <a:gd name="adj" fmla="val 19643"/>
+              <a:gd name="adj" fmla="val 19231"/>
             </a:avLst>
           </a:prstGeom>
           <a:solidFill>
@@ -10514,18 +10514,18 @@
       </p:sp>
       <p:sp>
         <p:nvSpPr>
-          <p:cNvPr id="28" name="Shape 26"/>
-          <p:cNvSpPr/>
-          <p:nvPr/>
-        </p:nvSpPr>
-        <p:spPr>
-          <a:xfrm>
-            <a:off x="6611112" y="3602736"/>
-            <a:ext cx="1620056" cy="256032"/>
+          <p:cNvPr id="27" name="Shape 25"/>
+          <p:cNvSpPr/>
+          <p:nvPr/>
+        </p:nvSpPr>
+        <p:spPr>
+          <a:xfrm>
+            <a:off x="6729984" y="3712464"/>
+            <a:ext cx="1589824" cy="237744"/>
           </a:xfrm>
           <a:prstGeom prst="roundRect">
             <a:avLst>
-              <a:gd name="adj" fmla="val 19643"/>
+              <a:gd name="adj" fmla="val 19231"/>
             </a:avLst>
           </a:prstGeom>
           <a:solidFill>
@@ -10536,14 +10536,53 @@
       </p:sp>
       <p:sp>
         <p:nvSpPr>
+          <p:cNvPr id="28" name="Text 26"/>
+          <p:cNvSpPr/>
+          <p:nvPr/>
+        </p:nvSpPr>
+        <p:spPr>
+          <a:xfrm>
+            <a:off x="11112703" y="3712464"/>
+            <a:ext cx="365760" cy="237744"/>
+          </a:xfrm>
+          <a:prstGeom prst="rect">
+            <a:avLst/>
+          </a:prstGeom>
+          <a:noFill/>
+          <a:ln/>
+        </p:spPr>
+        <p:txBody>
+          <a:bodyPr wrap="square" lIns="0" tIns="0" rIns="0" bIns="0" rtlCol="0" anchor="ctr"/>
+          <a:lstStyle/>
+          <a:p>
+            <a:pPr algn="r" indent="0" marL="0">
+              <a:buNone/>
+            </a:pPr>
+            <a:r>
+              <a:rPr lang="en-US" sz="1200" b="1" dirty="0">
+                <a:solidFill>
+                  <a:srgbClr val="707070"/>
+                </a:solidFill>
+                <a:latin typeface="Pretendard" pitchFamily="34" charset="0"/>
+                <a:ea typeface="Pretendard" pitchFamily="34" charset="-122"/>
+                <a:cs typeface="Pretendard" pitchFamily="34" charset="-120"/>
+              </a:rPr>
+              <a:t>2.8</a:t>
+            </a:r>
+            <a:endParaRPr lang="en-US" sz="1200" dirty="0"/>
+          </a:p>
+        </p:txBody>
+      </p:sp>
+      <p:sp>
+        <p:nvSpPr>
           <p:cNvPr id="29" name="Text 27"/>
           <p:cNvSpPr/>
           <p:nvPr/>
         </p:nvSpPr>
         <p:spPr>
           <a:xfrm>
-            <a:off x="11094415" y="3602736"/>
-            <a:ext cx="384048" cy="256032"/>
+            <a:off x="5230368" y="4041648"/>
+            <a:ext cx="1389888" cy="310896"/>
           </a:xfrm>
           <a:prstGeom prst="rect">
             <a:avLst/>
@@ -10555,53 +10594,14 @@
           <a:bodyPr wrap="square" lIns="0" tIns="0" rIns="0" bIns="0" rtlCol="0" anchor="ctr"/>
           <a:lstStyle/>
           <a:p>
-            <a:pPr algn="r" indent="0" marL="0">
-              <a:buNone/>
-            </a:pPr>
-            <a:r>
-              <a:rPr lang="en-US" sz="1250" b="1" dirty="0">
-                <a:solidFill>
-                  <a:srgbClr val="707070"/>
-                </a:solidFill>
-                <a:latin typeface="Pretendard" pitchFamily="34" charset="0"/>
-                <a:ea typeface="Pretendard" pitchFamily="34" charset="-122"/>
-                <a:cs typeface="Pretendard" pitchFamily="34" charset="-120"/>
-              </a:rPr>
-              <a:t>2.8</a:t>
-            </a:r>
-            <a:endParaRPr lang="en-US" sz="1250" dirty="0"/>
-          </a:p>
-        </p:txBody>
-      </p:sp>
-      <p:sp>
-        <p:nvSpPr>
-          <p:cNvPr id="30" name="Text 28"/>
-          <p:cNvSpPr/>
-          <p:nvPr/>
-        </p:nvSpPr>
-        <p:spPr>
-          <a:xfrm>
-            <a:off x="5001768" y="3959352"/>
-            <a:ext cx="1481328" cy="329184"/>
-          </a:xfrm>
-          <a:prstGeom prst="rect">
-            <a:avLst/>
-          </a:prstGeom>
-          <a:noFill/>
-          <a:ln/>
-        </p:spPr>
-        <p:txBody>
-          <a:bodyPr wrap="square" lIns="0" tIns="0" rIns="0" bIns="0" rtlCol="0" anchor="ctr"/>
-          <a:lstStyle/>
-          <a:p>
             <a:pPr indent="0" marL="0">
               <a:lnSpc>
-                <a:spcPts val="1200"/>
+                <a:spcPts val="1150"/>
               </a:lnSpc>
               <a:buNone/>
             </a:pPr>
             <a:r>
-              <a:rPr lang="en-US" sz="1000" b="1" dirty="0">
+              <a:rPr lang="en-US" sz="950" b="1" dirty="0">
                 <a:solidFill>
                   <a:srgbClr val="191919"/>
                 </a:solidFill>
@@ -10611,17 +10611,17 @@
               </a:rPr>
               <a:t>브랜드가 소유한</a:t>
             </a:r>
-            <a:endParaRPr lang="en-US" sz="1000" dirty="0"/>
+            <a:endParaRPr lang="en-US" sz="950" dirty="0"/>
           </a:p>
           <a:p>
             <a:pPr indent="0" marL="0">
               <a:lnSpc>
-                <a:spcPts val="1200"/>
+                <a:spcPts val="1150"/>
               </a:lnSpc>
               <a:buNone/>
             </a:pPr>
             <a:r>
-              <a:rPr lang="en-US" sz="1000" b="1" dirty="0">
+              <a:rPr lang="en-US" sz="950" b="1" dirty="0">
                 <a:solidFill>
                   <a:srgbClr val="191919"/>
                 </a:solidFill>
@@ -10631,24 +10631,24 @@
               </a:rPr>
               <a:t>반복 캐릭터</a:t>
             </a:r>
-            <a:endParaRPr lang="en-US" sz="1000" dirty="0"/>
-          </a:p>
-        </p:txBody>
-      </p:sp>
-      <p:sp>
-        <p:nvSpPr>
-          <p:cNvPr id="31" name="Shape 29"/>
-          <p:cNvSpPr/>
-          <p:nvPr/>
-        </p:nvSpPr>
-        <p:spPr>
-          <a:xfrm>
-            <a:off x="6611112" y="3986784"/>
-            <a:ext cx="4410151" cy="256032"/>
+            <a:endParaRPr lang="en-US" sz="950" dirty="0"/>
+          </a:p>
+        </p:txBody>
+      </p:sp>
+      <p:sp>
+        <p:nvSpPr>
+          <p:cNvPr id="30" name="Shape 28"/>
+          <p:cNvSpPr/>
+          <p:nvPr/>
+        </p:nvSpPr>
+        <p:spPr>
+          <a:xfrm>
+            <a:off x="6729984" y="4078224"/>
+            <a:ext cx="4327855" cy="237744"/>
           </a:xfrm>
           <a:prstGeom prst="roundRect">
             <a:avLst>
-              <a:gd name="adj" fmla="val 19643"/>
+              <a:gd name="adj" fmla="val 19231"/>
             </a:avLst>
           </a:prstGeom>
           <a:solidFill>
@@ -10659,18 +10659,18 @@
       </p:sp>
       <p:sp>
         <p:nvSpPr>
-          <p:cNvPr id="32" name="Shape 30"/>
-          <p:cNvSpPr/>
-          <p:nvPr/>
-        </p:nvSpPr>
-        <p:spPr>
-          <a:xfrm>
-            <a:off x="6611112" y="3986784"/>
-            <a:ext cx="2430083" cy="256032"/>
+          <p:cNvPr id="31" name="Shape 29"/>
+          <p:cNvSpPr/>
+          <p:nvPr/>
+        </p:nvSpPr>
+        <p:spPr>
+          <a:xfrm>
+            <a:off x="6729984" y="4078224"/>
+            <a:ext cx="2384737" cy="237744"/>
           </a:xfrm>
           <a:prstGeom prst="roundRect">
             <a:avLst>
-              <a:gd name="adj" fmla="val 19643"/>
+              <a:gd name="adj" fmla="val 19231"/>
             </a:avLst>
           </a:prstGeom>
           <a:solidFill>
@@ -10681,40 +10681,79 @@
       </p:sp>
       <p:sp>
         <p:nvSpPr>
+          <p:cNvPr id="32" name="Text 30"/>
+          <p:cNvSpPr/>
+          <p:nvPr/>
+        </p:nvSpPr>
+        <p:spPr>
+          <a:xfrm>
+            <a:off x="11112703" y="4078224"/>
+            <a:ext cx="365760" cy="237744"/>
+          </a:xfrm>
+          <a:prstGeom prst="rect">
+            <a:avLst/>
+          </a:prstGeom>
+          <a:noFill/>
+          <a:ln/>
+        </p:spPr>
+        <p:txBody>
+          <a:bodyPr wrap="square" lIns="0" tIns="0" rIns="0" bIns="0" rtlCol="0" anchor="ctr"/>
+          <a:lstStyle/>
+          <a:p>
+            <a:pPr algn="r" indent="0" marL="0">
+              <a:buNone/>
+            </a:pPr>
+            <a:r>
+              <a:rPr lang="en-US" sz="1200" b="1" dirty="0">
+                <a:solidFill>
+                  <a:srgbClr val="0057FF"/>
+                </a:solidFill>
+                <a:latin typeface="Pretendard" pitchFamily="34" charset="0"/>
+                <a:ea typeface="Pretendard" pitchFamily="34" charset="-122"/>
+                <a:cs typeface="Pretendard" pitchFamily="34" charset="-120"/>
+              </a:rPr>
+              <a:t>3.7</a:t>
+            </a:r>
+            <a:endParaRPr lang="en-US" sz="1200" dirty="0"/>
+          </a:p>
+        </p:txBody>
+      </p:sp>
+      <p:sp>
+        <p:nvSpPr>
           <p:cNvPr id="33" name="Text 31"/>
           <p:cNvSpPr/>
           <p:nvPr/>
         </p:nvSpPr>
         <p:spPr>
           <a:xfrm>
-            <a:off x="11094415" y="3986784"/>
-            <a:ext cx="384048" cy="256032"/>
-          </a:xfrm>
-          <a:prstGeom prst="rect">
-            <a:avLst/>
-          </a:prstGeom>
-          <a:noFill/>
-          <a:ln/>
-        </p:spPr>
-        <p:txBody>
-          <a:bodyPr wrap="square" lIns="0" tIns="0" rIns="0" bIns="0" rtlCol="0" anchor="ctr"/>
-          <a:lstStyle/>
-          <a:p>
-            <a:pPr algn="r" indent="0" marL="0">
-              <a:buNone/>
-            </a:pPr>
-            <a:r>
-              <a:rPr lang="en-US" sz="1250" b="1" dirty="0">
-                <a:solidFill>
-                  <a:srgbClr val="0057FF"/>
-                </a:solidFill>
-                <a:latin typeface="Pretendard" pitchFamily="34" charset="0"/>
-                <a:ea typeface="Pretendard" pitchFamily="34" charset="-122"/>
-                <a:cs typeface="Pretendard" pitchFamily="34" charset="-120"/>
-              </a:rPr>
-              <a:t>3.7</a:t>
-            </a:r>
-            <a:endParaRPr lang="en-US" sz="1250" dirty="0"/>
+            <a:off x="6729984" y="4398264"/>
+            <a:ext cx="658368" cy="182880"/>
+          </a:xfrm>
+          <a:prstGeom prst="rect">
+            <a:avLst/>
+          </a:prstGeom>
+          <a:noFill/>
+          <a:ln/>
+        </p:spPr>
+        <p:txBody>
+          <a:bodyPr wrap="square" lIns="0" tIns="0" rIns="0" bIns="0" rtlCol="0" anchor="t"/>
+          <a:lstStyle/>
+          <a:p>
+            <a:pPr indent="0" marL="0">
+              <a:buNone/>
+            </a:pPr>
+            <a:r>
+              <a:rPr lang="en-US" sz="750" dirty="0">
+                <a:solidFill>
+                  <a:srgbClr val="959595"/>
+                </a:solidFill>
+                <a:latin typeface="Pretendard" pitchFamily="34" charset="0"/>
+                <a:ea typeface="Pretendard" pitchFamily="34" charset="-122"/>
+                <a:cs typeface="Pretendard" pitchFamily="34" charset="-120"/>
+              </a:rPr>
+              <a:t>1.0</a:t>
+            </a:r>
+            <a:endParaRPr lang="en-US" sz="750" dirty="0"/>
           </a:p>
         </p:txBody>
       </p:sp>
@@ -10726,24 +10765,24 @@
         </p:nvSpPr>
         <p:spPr>
           <a:xfrm>
-            <a:off x="6611112" y="4315968"/>
-            <a:ext cx="685800" cy="182880"/>
-          </a:xfrm>
-          <a:prstGeom prst="rect">
-            <a:avLst/>
-          </a:prstGeom>
-          <a:noFill/>
-          <a:ln/>
-        </p:spPr>
-        <p:txBody>
-          <a:bodyPr wrap="square" lIns="0" tIns="0" rIns="0" bIns="0" rtlCol="0" anchor="t"/>
-          <a:lstStyle/>
-          <a:p>
-            <a:pPr indent="0" marL="0">
-              <a:buNone/>
-            </a:pPr>
-            <a:r>
-              <a:rPr lang="en-US" sz="800" dirty="0">
+            <a:off x="7612866" y="4398264"/>
+            <a:ext cx="658368" cy="182880"/>
+          </a:xfrm>
+          <a:prstGeom prst="rect">
+            <a:avLst/>
+          </a:prstGeom>
+          <a:noFill/>
+          <a:ln/>
+        </p:spPr>
+        <p:txBody>
+          <a:bodyPr wrap="square" lIns="0" tIns="0" rIns="0" bIns="0" rtlCol="0" anchor="t"/>
+          <a:lstStyle/>
+          <a:p>
+            <a:pPr indent="0" marL="0">
+              <a:buNone/>
+            </a:pPr>
+            <a:r>
+              <a:rPr lang="en-US" sz="750" dirty="0">
                 <a:solidFill>
                   <a:srgbClr val="959595"/>
                 </a:solidFill>
@@ -10751,9 +10790,9 @@
                 <a:ea typeface="Pretendard" pitchFamily="34" charset="-122"/>
                 <a:cs typeface="Pretendard" pitchFamily="34" charset="-120"/>
               </a:rPr>
-              <a:t>1.0</a:t>
-            </a:r>
-            <a:endParaRPr lang="en-US" sz="800" dirty="0"/>
+              <a:t>2 보통</a:t>
+            </a:r>
+            <a:endParaRPr lang="en-US" sz="750" dirty="0"/>
           </a:p>
         </p:txBody>
       </p:sp>
@@ -10765,24 +10804,24 @@
         </p:nvSpPr>
         <p:spPr>
           <a:xfrm>
-            <a:off x="7510783" y="4315968"/>
-            <a:ext cx="685800" cy="182880"/>
-          </a:xfrm>
-          <a:prstGeom prst="rect">
-            <a:avLst/>
-          </a:prstGeom>
-          <a:noFill/>
-          <a:ln/>
-        </p:spPr>
-        <p:txBody>
-          <a:bodyPr wrap="square" lIns="0" tIns="0" rIns="0" bIns="0" rtlCol="0" anchor="t"/>
-          <a:lstStyle/>
-          <a:p>
-            <a:pPr indent="0" marL="0">
-              <a:buNone/>
-            </a:pPr>
-            <a:r>
-              <a:rPr lang="en-US" sz="800" dirty="0">
+            <a:off x="8495749" y="4398264"/>
+            <a:ext cx="658368" cy="182880"/>
+          </a:xfrm>
+          <a:prstGeom prst="rect">
+            <a:avLst/>
+          </a:prstGeom>
+          <a:noFill/>
+          <a:ln/>
+        </p:spPr>
+        <p:txBody>
+          <a:bodyPr wrap="square" lIns="0" tIns="0" rIns="0" bIns="0" rtlCol="0" anchor="t"/>
+          <a:lstStyle/>
+          <a:p>
+            <a:pPr indent="0" marL="0">
+              <a:buNone/>
+            </a:pPr>
+            <a:r>
+              <a:rPr lang="en-US" sz="750" dirty="0">
                 <a:solidFill>
                   <a:srgbClr val="959595"/>
                 </a:solidFill>
@@ -10790,9 +10829,9 @@
                 <a:ea typeface="Pretendard" pitchFamily="34" charset="-122"/>
                 <a:cs typeface="Pretendard" pitchFamily="34" charset="-120"/>
               </a:rPr>
-              <a:t>2 보통</a:t>
-            </a:r>
-            <a:endParaRPr lang="en-US" sz="800" dirty="0"/>
+              <a:t>3 양호</a:t>
+            </a:r>
+            <a:endParaRPr lang="en-US" sz="750" dirty="0"/>
           </a:p>
         </p:txBody>
       </p:sp>
@@ -10804,24 +10843,24 @@
         </p:nvSpPr>
         <p:spPr>
           <a:xfrm>
-            <a:off x="8410454" y="4315968"/>
-            <a:ext cx="685800" cy="182880"/>
-          </a:xfrm>
-          <a:prstGeom prst="rect">
-            <a:avLst/>
-          </a:prstGeom>
-          <a:noFill/>
-          <a:ln/>
-        </p:spPr>
-        <p:txBody>
-          <a:bodyPr wrap="square" lIns="0" tIns="0" rIns="0" bIns="0" rtlCol="0" anchor="t"/>
-          <a:lstStyle/>
-          <a:p>
-            <a:pPr indent="0" marL="0">
-              <a:buNone/>
-            </a:pPr>
-            <a:r>
-              <a:rPr lang="en-US" sz="800" dirty="0">
+            <a:off x="9378631" y="4398264"/>
+            <a:ext cx="658368" cy="182880"/>
+          </a:xfrm>
+          <a:prstGeom prst="rect">
+            <a:avLst/>
+          </a:prstGeom>
+          <a:noFill/>
+          <a:ln/>
+        </p:spPr>
+        <p:txBody>
+          <a:bodyPr wrap="square" lIns="0" tIns="0" rIns="0" bIns="0" rtlCol="0" anchor="t"/>
+          <a:lstStyle/>
+          <a:p>
+            <a:pPr indent="0" marL="0">
+              <a:buNone/>
+            </a:pPr>
+            <a:r>
+              <a:rPr lang="en-US" sz="750" dirty="0">
                 <a:solidFill>
                   <a:srgbClr val="959595"/>
                 </a:solidFill>
@@ -10829,9 +10868,9 @@
                 <a:ea typeface="Pretendard" pitchFamily="34" charset="-122"/>
                 <a:cs typeface="Pretendard" pitchFamily="34" charset="-120"/>
               </a:rPr>
-              <a:t>3 양호</a:t>
-            </a:r>
-            <a:endParaRPr lang="en-US" sz="800" dirty="0"/>
+              <a:t>4 강함</a:t>
+            </a:r>
+            <a:endParaRPr lang="en-US" sz="750" dirty="0"/>
           </a:p>
         </p:txBody>
       </p:sp>
@@ -10843,24 +10882,24 @@
         </p:nvSpPr>
         <p:spPr>
           <a:xfrm>
-            <a:off x="9310125" y="4315968"/>
-            <a:ext cx="685800" cy="182880"/>
-          </a:xfrm>
-          <a:prstGeom prst="rect">
-            <a:avLst/>
-          </a:prstGeom>
-          <a:noFill/>
-          <a:ln/>
-        </p:spPr>
-        <p:txBody>
-          <a:bodyPr wrap="square" lIns="0" tIns="0" rIns="0" bIns="0" rtlCol="0" anchor="t"/>
-          <a:lstStyle/>
-          <a:p>
-            <a:pPr indent="0" marL="0">
-              <a:buNone/>
-            </a:pPr>
-            <a:r>
-              <a:rPr lang="en-US" sz="800" dirty="0">
+            <a:off x="10754889" y="4398264"/>
+            <a:ext cx="658368" cy="182880"/>
+          </a:xfrm>
+          <a:prstGeom prst="rect">
+            <a:avLst/>
+          </a:prstGeom>
+          <a:noFill/>
+          <a:ln/>
+        </p:spPr>
+        <p:txBody>
+          <a:bodyPr wrap="square" lIns="0" tIns="0" rIns="0" bIns="0" rtlCol="0" anchor="t"/>
+          <a:lstStyle/>
+          <a:p>
+            <a:pPr indent="0" marL="0">
+              <a:buNone/>
+            </a:pPr>
+            <a:r>
+              <a:rPr lang="en-US" sz="750" dirty="0">
                 <a:solidFill>
                   <a:srgbClr val="959595"/>
                 </a:solidFill>
@@ -10868,65 +10907,26 @@
                 <a:ea typeface="Pretendard" pitchFamily="34" charset="-122"/>
                 <a:cs typeface="Pretendard" pitchFamily="34" charset="-120"/>
               </a:rPr>
-              <a:t>4 강함</a:t>
-            </a:r>
-            <a:endParaRPr lang="en-US" sz="800" dirty="0"/>
-          </a:p>
-        </p:txBody>
-      </p:sp>
-      <p:sp>
-        <p:nvSpPr>
-          <p:cNvPr id="38" name="Text 36"/>
-          <p:cNvSpPr/>
-          <p:nvPr/>
-        </p:nvSpPr>
-        <p:spPr>
-          <a:xfrm>
-            <a:off x="10712553" y="4315968"/>
-            <a:ext cx="685800" cy="182880"/>
-          </a:xfrm>
-          <a:prstGeom prst="rect">
-            <a:avLst/>
-          </a:prstGeom>
-          <a:noFill/>
-          <a:ln/>
-        </p:spPr>
-        <p:txBody>
-          <a:bodyPr wrap="square" lIns="0" tIns="0" rIns="0" bIns="0" rtlCol="0" anchor="t"/>
-          <a:lstStyle/>
-          <a:p>
-            <a:pPr indent="0" marL="0">
-              <a:buNone/>
-            </a:pPr>
-            <a:r>
-              <a:rPr lang="en-US" sz="800" dirty="0">
-                <a:solidFill>
-                  <a:srgbClr val="959595"/>
-                </a:solidFill>
-                <a:latin typeface="Pretendard" pitchFamily="34" charset="0"/>
-                <a:ea typeface="Pretendard" pitchFamily="34" charset="-122"/>
-                <a:cs typeface="Pretendard" pitchFamily="34" charset="-120"/>
-              </a:rPr>
               <a:t>5.9</a:t>
             </a:r>
-            <a:endParaRPr lang="en-US" sz="800" dirty="0"/>
-          </a:p>
-        </p:txBody>
-      </p:sp>
-      <p:sp>
-        <p:nvSpPr>
-          <p:cNvPr id="39" name="Shape 37"/>
-          <p:cNvSpPr/>
-          <p:nvPr/>
-        </p:nvSpPr>
-        <p:spPr>
-          <a:xfrm>
-            <a:off x="658368" y="4956048"/>
-            <a:ext cx="10874959" cy="822960"/>
+            <a:endParaRPr lang="en-US" sz="750" dirty="0"/>
+          </a:p>
+        </p:txBody>
+      </p:sp>
+      <p:sp>
+        <p:nvSpPr>
+          <p:cNvPr id="38" name="Shape 36"/>
+          <p:cNvSpPr/>
+          <p:nvPr/>
+        </p:nvSpPr>
+        <p:spPr>
+          <a:xfrm>
+            <a:off x="658368" y="5230368"/>
+            <a:ext cx="10874959" cy="713232"/>
           </a:xfrm>
           <a:prstGeom prst="roundRect">
             <a:avLst>
-              <a:gd name="adj" fmla="val 10000"/>
+              <a:gd name="adj" fmla="val 11538"/>
             </a:avLst>
           </a:prstGeom>
           <a:solidFill>
@@ -10942,14 +10942,53 @@
       </p:sp>
       <p:sp>
         <p:nvSpPr>
+          <p:cNvPr id="39" name="Text 37"/>
+          <p:cNvSpPr/>
+          <p:nvPr/>
+        </p:nvSpPr>
+        <p:spPr>
+          <a:xfrm>
+            <a:off x="658368" y="5330952"/>
+            <a:ext cx="10874959" cy="274320"/>
+          </a:xfrm>
+          <a:prstGeom prst="rect">
+            <a:avLst/>
+          </a:prstGeom>
+          <a:noFill/>
+          <a:ln/>
+        </p:spPr>
+        <p:txBody>
+          <a:bodyPr wrap="square" lIns="0" tIns="0" rIns="0" bIns="0" rtlCol="0" anchor="t"/>
+          <a:lstStyle/>
+          <a:p>
+            <a:pPr algn="ctr" indent="0" marL="0">
+              <a:buNone/>
+            </a:pPr>
+            <a:r>
+              <a:rPr lang="en-US" sz="1500" b="1" dirty="0">
+                <a:solidFill>
+                  <a:srgbClr val="FFFFFF"/>
+                </a:solidFill>
+                <a:latin typeface="Pretendard" pitchFamily="34" charset="0"/>
+                <a:ea typeface="Pretendard" pitchFamily="34" charset="-122"/>
+                <a:cs typeface="Pretendard" pitchFamily="34" charset="-120"/>
+              </a:rPr>
+              <a:t>캐릭터는 이론과 데이터 양쪽에서 효과가 확인된 방법이다.</a:t>
+            </a:r>
+            <a:endParaRPr lang="en-US" sz="1500" dirty="0"/>
+          </a:p>
+        </p:txBody>
+      </p:sp>
+      <p:sp>
+        <p:nvSpPr>
           <p:cNvPr id="40" name="Text 38"/>
           <p:cNvSpPr/>
           <p:nvPr/>
         </p:nvSpPr>
         <p:spPr>
           <a:xfrm>
-            <a:off x="658368" y="5084064"/>
-            <a:ext cx="10874959" cy="292608"/>
+            <a:off x="658368" y="5623560"/>
+            <a:ext cx="10874959" cy="219456"/>
           </a:xfrm>
           <a:prstGeom prst="rect">
             <a:avLst/>
@@ -10965,17 +11004,17 @@
               <a:buNone/>
             </a:pPr>
             <a:r>
-              <a:rPr lang="en-US" sz="1500" b="1" dirty="0">
-                <a:solidFill>
-                  <a:srgbClr val="FFFFFF"/>
-                </a:solidFill>
-                <a:latin typeface="Pretendard" pitchFamily="34" charset="0"/>
-                <a:ea typeface="Pretendard" pitchFamily="34" charset="-122"/>
-                <a:cs typeface="Pretendard" pitchFamily="34" charset="-120"/>
-              </a:rPr>
-              <a:t>연예인을 쓴다는 사실만으로는 차이가 없었다. 차이를 만든 건 브랜드가 반복해서 쓰는 캐릭터였다.</a:t>
-            </a:r>
-            <a:endParaRPr lang="en-US" sz="1500" dirty="0"/>
+              <a:rPr lang="en-US" sz="1000" dirty="0">
+                <a:solidFill>
+                  <a:srgbClr val="DCE6FF"/>
+                </a:solidFill>
+                <a:latin typeface="Pretendard" pitchFamily="34" charset="0"/>
+                <a:ea typeface="Pretendard" pitchFamily="34" charset="-122"/>
+                <a:cs typeface="Pretendard" pitchFamily="34" charset="-120"/>
+              </a:rPr>
+              <a:t>연예인은 주목을 빌리지만 캐릭터는 브랜드에 쌓인다. 그리고 이 카테고리에는 아직 주인이 없다.</a:t>
+            </a:r>
+            <a:endParaRPr lang="en-US" sz="1000" dirty="0"/>
           </a:p>
         </p:txBody>
       </p:sp>
@@ -10987,34 +11026,34 @@
         </p:nvSpPr>
         <p:spPr>
           <a:xfrm>
-            <a:off x="658368" y="5413248"/>
-            <a:ext cx="10874959" cy="237744"/>
-          </a:xfrm>
-          <a:prstGeom prst="rect">
-            <a:avLst/>
-          </a:prstGeom>
-          <a:noFill/>
-          <a:ln/>
-        </p:spPr>
-        <p:txBody>
-          <a:bodyPr wrap="square" lIns="0" tIns="0" rIns="0" bIns="0" rtlCol="0" anchor="t"/>
-          <a:lstStyle/>
-          <a:p>
-            <a:pPr algn="ctr" indent="0" marL="0">
-              <a:buNone/>
-            </a:pPr>
-            <a:r>
-              <a:rPr lang="en-US" sz="1050" dirty="0">
-                <a:solidFill>
-                  <a:srgbClr val="DCE6FF"/>
-                </a:solidFill>
-                <a:latin typeface="Pretendard" pitchFamily="34" charset="0"/>
-                <a:ea typeface="Pretendard" pitchFamily="34" charset="-122"/>
-                <a:cs typeface="Pretendard" pitchFamily="34" charset="-120"/>
-              </a:rPr>
-              <a:t>그리고 이 카테고리는 연예인 모델 중심이다 — 소유된 캐릭터 자산은 아직 비어 있다.</a:t>
-            </a:r>
-            <a:endParaRPr lang="en-US" sz="1050" dirty="0"/>
+            <a:off x="658368" y="6035040"/>
+            <a:ext cx="7680960" cy="219456"/>
+          </a:xfrm>
+          <a:prstGeom prst="rect">
+            <a:avLst/>
+          </a:prstGeom>
+          <a:noFill/>
+          <a:ln/>
+        </p:spPr>
+        <p:txBody>
+          <a:bodyPr wrap="square" lIns="0" tIns="0" rIns="0" bIns="0" rtlCol="0" anchor="t"/>
+          <a:lstStyle/>
+          <a:p>
+            <a:pPr indent="0" marL="0">
+              <a:buNone/>
+            </a:pPr>
+            <a:r>
+              <a:rPr lang="en-US" sz="750" dirty="0">
+                <a:solidFill>
+                  <a:srgbClr val="959595"/>
+                </a:solidFill>
+                <a:latin typeface="Pretendard" pitchFamily="34" charset="0"/>
+                <a:ea typeface="Pretendard" pitchFamily="34" charset="-122"/>
+                <a:cs typeface="Pretendard" pitchFamily="34" charset="-120"/>
+              </a:rPr>
+              <a:t>Aggarwal &amp; McGill(2007) · Garretson &amp; Niedrich(2004) · Romaniuk, Ehrenberg-Bass · System1 슈퍼볼 광고 2020~2023 분석.</a:t>
+            </a:r>
+            <a:endParaRPr lang="en-US" sz="750" dirty="0"/>
           </a:p>
         </p:txBody>
       </p:sp>
@@ -11026,34 +11065,34 @@
         </p:nvSpPr>
         <p:spPr>
           <a:xfrm>
-            <a:off x="658368" y="5907024"/>
-            <a:ext cx="10874959" cy="219456"/>
-          </a:xfrm>
-          <a:prstGeom prst="rect">
-            <a:avLst/>
-          </a:prstGeom>
-          <a:noFill/>
-          <a:ln/>
-        </p:spPr>
-        <p:txBody>
-          <a:bodyPr wrap="square" lIns="0" tIns="0" rIns="0" bIns="0" rtlCol="0" anchor="t"/>
-          <a:lstStyle/>
-          <a:p>
-            <a:pPr indent="0" marL="0">
-              <a:buNone/>
-            </a:pPr>
-            <a:r>
-              <a:rPr lang="en-US" sz="800" dirty="0">
-                <a:solidFill>
-                  <a:srgbClr val="959595"/>
-                </a:solidFill>
-                <a:latin typeface="Pretendard" pitchFamily="34" charset="0"/>
-                <a:ea typeface="Pretendard" pitchFamily="34" charset="-122"/>
-                <a:cs typeface="Pretendard" pitchFamily="34" charset="-120"/>
-              </a:rPr>
-              <a:t>System1 · 미국 슈퍼볼 광고 2020~2023 분석. 캐릭터는 통상 3년 정도 일관되게 써야 효과가 측정된다.</a:t>
-            </a:r>
-            <a:endParaRPr lang="en-US" sz="800" dirty="0"/>
+            <a:off x="7875727" y="6035040"/>
+            <a:ext cx="3657600" cy="219456"/>
+          </a:xfrm>
+          <a:prstGeom prst="rect">
+            <a:avLst/>
+          </a:prstGeom>
+          <a:noFill/>
+          <a:ln/>
+        </p:spPr>
+        <p:txBody>
+          <a:bodyPr wrap="square" lIns="0" tIns="0" rIns="0" bIns="0" rtlCol="0" anchor="t"/>
+          <a:lstStyle/>
+          <a:p>
+            <a:pPr algn="r" indent="0" marL="0">
+              <a:buNone/>
+            </a:pPr>
+            <a:r>
+              <a:rPr lang="en-US" sz="950" b="1" dirty="0">
+                <a:solidFill>
+                  <a:srgbClr val="0057FF"/>
+                </a:solidFill>
+                <a:latin typeface="Pretendard" pitchFamily="34" charset="0"/>
+                <a:ea typeface="Pretendard" pitchFamily="34" charset="-122"/>
+                <a:cs typeface="Pretendard" pitchFamily="34" charset="-120"/>
+              </a:rPr>
+              <a:t>→ 그런데 우리는 캐릭터를 새로 만들 필요가 없다.</a:t>
+            </a:r>
+            <a:endParaRPr lang="en-US" sz="950" dirty="0"/>
           </a:p>
         </p:txBody>
       </p:sp>
@@ -11220,7 +11259,7 @@
                 <a:ea typeface="Pretendard" pitchFamily="34" charset="-122"/>
                 <a:cs typeface="Pretendard" pitchFamily="34" charset="-120"/>
               </a:rPr>
-              <a:t>03 · 브랜드 전략 · 모범 사례</a:t>
+              <a:t>03 · 브랜드 전략 · 03 되살린 사례</a:t>
             </a:r>
             <a:endParaRPr lang="en-US" sz="1250" dirty="0"/>
           </a:p>
@@ -13298,7 +13337,7 @@
                 <a:ea typeface="Pretendard" pitchFamily="34" charset="-122"/>
                 <a:cs typeface="Pretendard" pitchFamily="34" charset="-120"/>
               </a:rPr>
-              <a:t>03 · 브랜드 전략</a:t>
+              <a:t>03 · 브랜드 전략 · 04 왜 펭귄인가</a:t>
             </a:r>
             <a:endParaRPr lang="en-US" sz="1250" dirty="0"/>
           </a:p>
@@ -15229,7 +15268,7 @@
                 <a:ea typeface="Pretendard" pitchFamily="34" charset="-122"/>
                 <a:cs typeface="Pretendard" pitchFamily="34" charset="-120"/>
               </a:rPr>
-              <a:t>03 · 브랜드 전략</a:t>
+              <a:t>03 · 브랜드 전략 · 05 역할 정의</a:t>
             </a:r>
             <a:endParaRPr lang="en-US" sz="1250" dirty="0"/>
           </a:p>
@@ -17360,7 +17399,7 @@
                 <a:ea typeface="Pretendard" pitchFamily="34" charset="-122"/>
                 <a:cs typeface="Pretendard" pitchFamily="34" charset="-120"/>
               </a:rPr>
-              <a:t>03 · 브랜드 전략</a:t>
+              <a:t>03 · 브랜드 전략 · 06 자산 검증</a:t>
             </a:r>
             <a:endParaRPr lang="en-US" sz="1250" dirty="0"/>
           </a:p>

--- a/청호나이스-브랜드전략-제안.pptx
+++ b/청호나이스-브랜드전략-제안.pptx
@@ -3498,82 +3498,39 @@
           </a:p>
         </p:txBody>
       </p:sp>
-      <p:sp>
-        <p:nvSpPr>
-          <p:cNvPr id="6" name="Shape 4"/>
-          <p:cNvSpPr/>
-          <p:nvPr/>
-        </p:nvSpPr>
+      <p:pic>
+        <p:nvPicPr>
+          <p:cNvPr id="6" name="Image 0" descr="/home/user/CHAI-AI/assets/img/espre-product.jpg">    </p:cNvPr>
+          <p:cNvPicPr>
+            <a:picLocks noChangeAspect="1"/>
+          </p:cNvPicPr>
+          <p:nvPr/>
+        </p:nvPicPr>
+        <p:blipFill>
+          <a:blip r:embed="rId1"/>
+          <a:srcRect l="0" r="0" t="0" b="0"/>
+          <a:stretch/>
+        </p:blipFill>
         <p:spPr>
           <a:xfrm>
             <a:off x="3352648" y="3429000"/>
             <a:ext cx="5486400" cy="2148840"/>
           </a:xfrm>
-          <a:prstGeom prst="roundRect">
-            <a:avLst>
-              <a:gd name="adj" fmla="val 3830"/>
-            </a:avLst>
-          </a:prstGeom>
-          <a:solidFill>
-            <a:srgbClr val="26262B"/>
-          </a:solidFill>
-          <a:ln w="12700">
-            <a:solidFill>
-              <a:srgbClr val="303036"/>
-            </a:solidFill>
-            <a:prstDash val="solid"/>
-          </a:ln>
+          <a:prstGeom prst="rect">
+            <a:avLst/>
+          </a:prstGeom>
           <a:effectLst>
-            <a:outerShdw sx="100000" sy="100000" kx="0" ky="0" algn="bl" rotWithShape="0" blurRad="203200" dist="63500" dir="5400000">
+            <a:outerShdw sx="100000" sy="100000" kx="0" ky="0" algn="bl" rotWithShape="0" blurRad="177800" dist="50800" dir="5400000">
               <a:srgbClr val="191919">
-                <a:alpha val="24000"/>
+                <a:alpha val="22000"/>
               </a:srgbClr>
             </a:outerShdw>
           </a:effectLst>
         </p:spPr>
-      </p:sp>
-      <p:sp>
-        <p:nvSpPr>
-          <p:cNvPr id="7" name="Text 5"/>
-          <p:cNvSpPr/>
-          <p:nvPr/>
-        </p:nvSpPr>
-        <p:spPr>
-          <a:xfrm>
-            <a:off x="3407512" y="3483864"/>
-            <a:ext cx="5376672" cy="2039112"/>
-          </a:xfrm>
-          <a:prstGeom prst="rect">
-            <a:avLst/>
-          </a:prstGeom>
-          <a:noFill/>
-          <a:ln/>
-        </p:spPr>
-        <p:txBody>
-          <a:bodyPr wrap="square" lIns="0" tIns="0" rIns="0" bIns="0" rtlCol="0" anchor="ctr"/>
-          <a:lstStyle/>
-          <a:p>
-            <a:pPr algn="ctr" indent="0" marL="0">
-              <a:buNone/>
-            </a:pPr>
-            <a:r>
-              <a:rPr lang="en-US" sz="1100" b="1" dirty="0">
-                <a:solidFill>
-                  <a:srgbClr val="6C6D74"/>
-                </a:solidFill>
-                <a:latin typeface="Pretendard" pitchFamily="34" charset="0"/>
-                <a:ea typeface="Pretendard" pitchFamily="34" charset="-122"/>
-                <a:cs typeface="Pretendard" pitchFamily="34" charset="-120"/>
-              </a:rPr>
-              <a:t>[ 에스프레카페 정수기 옆에 펭귄이 지키고 선 이미지 ]</a:t>
-            </a:r>
-            <a:endParaRPr lang="en-US" sz="1100" dirty="0"/>
-          </a:p>
-        </p:txBody>
-      </p:sp>
-      <p:sp>
-        <p:nvSpPr>
-          <p:cNvPr id="8" name="Text 6"/>
+      </p:pic>
+      <p:sp>
+        <p:nvSpPr>
+          <p:cNvPr id="7" name="Text 4"/>
           <p:cNvSpPr/>
           <p:nvPr/>
         </p:nvSpPr>
@@ -3612,7 +3569,7 @@
       </p:sp>
       <p:sp>
         <p:nvSpPr>
-          <p:cNvPr id="9" name="Text 7"/>
+          <p:cNvPr id="8" name="Text 5"/>
           <p:cNvSpPr/>
           <p:nvPr/>
         </p:nvSpPr>
@@ -9508,7 +9465,7 @@
                 <a:ea typeface="Pretendard" pitchFamily="34" charset="-122"/>
                 <a:cs typeface="Pretendard" pitchFamily="34" charset="-120"/>
               </a:rPr>
-              <a:t>캐릭터는 취향의 문제가 아니라,</a:t>
+              <a:t>캐릭터가 왜 통하는지는</a:t>
             </a:r>
             <a:endParaRPr lang="en-US" sz="2300" dirty="0"/>
           </a:p>
@@ -9522,13 +9479,13 @@
             <a:r>
               <a:rPr lang="en-US" sz="2300" b="1" dirty="0">
                 <a:solidFill>
-                  <a:srgbClr val="0057FF"/>
-                </a:solidFill>
-                <a:latin typeface="Pretendard" pitchFamily="34" charset="0"/>
-                <a:ea typeface="Pretendard" pitchFamily="34" charset="-122"/>
-                <a:cs typeface="Pretendard" pitchFamily="34" charset="-120"/>
-              </a:rPr>
-              <a:t>검증된 브랜드 장치</a:t>
+                  <a:srgbClr val="191919"/>
+                </a:solidFill>
+                <a:latin typeface="Pretendard" pitchFamily="34" charset="0"/>
+                <a:ea typeface="Pretendard" pitchFamily="34" charset="-122"/>
+                <a:cs typeface="Pretendard" pitchFamily="34" charset="-120"/>
+              </a:rPr>
+              <a:t>이미 </a:t>
             </a:r>
             <a:pPr indent="0" marL="0">
               <a:lnSpc>
@@ -9539,13 +9496,30 @@
             <a:r>
               <a:rPr lang="en-US" sz="2300" b="1" dirty="0">
                 <a:solidFill>
+                  <a:srgbClr val="0057FF"/>
+                </a:solidFill>
+                <a:latin typeface="Pretendard" pitchFamily="34" charset="0"/>
+                <a:ea typeface="Pretendard" pitchFamily="34" charset="-122"/>
+                <a:cs typeface="Pretendard" pitchFamily="34" charset="-120"/>
+              </a:rPr>
+              <a:t>연구되어 있다</a:t>
+            </a:r>
+            <a:pPr indent="0" marL="0">
+              <a:lnSpc>
+                <a:spcPts val="3000"/>
+              </a:lnSpc>
+              <a:buNone/>
+            </a:pPr>
+            <a:r>
+              <a:rPr lang="en-US" sz="2300" b="1" dirty="0">
+                <a:solidFill>
                   <a:srgbClr val="191919"/>
                 </a:solidFill>
                 <a:latin typeface="Pretendard" pitchFamily="34" charset="0"/>
                 <a:ea typeface="Pretendard" pitchFamily="34" charset="-122"/>
                 <a:cs typeface="Pretendard" pitchFamily="34" charset="-120"/>
               </a:rPr>
-              <a:t>다.</a:t>
+              <a:t>.</a:t>
             </a:r>
             <a:endParaRPr lang="en-US" sz="2300" dirty="0"/>
           </a:p>
@@ -9645,7 +9619,7 @@
                 <a:ea typeface="Pretendard" pitchFamily="34" charset="-122"/>
                 <a:cs typeface="Pretendard" pitchFamily="34" charset="-120"/>
               </a:rPr>
-              <a:t>01 · 의인화는 조건부로 작동한다</a:t>
+              <a:t>01 · 아무 캐릭터나 통하지는 않는다</a:t>
             </a:r>
             <a:endParaRPr lang="en-US" sz="1000" dirty="0"/>
           </a:p>
@@ -9687,7 +9661,7 @@
                 <a:ea typeface="Pretendard" pitchFamily="34" charset="-122"/>
                 <a:cs typeface="Pretendard" pitchFamily="34" charset="-120"/>
               </a:rPr>
-              <a:t>사물에 사람의 성격을 부여하면 더 호의적으로 평가한다. 단, </a:t>
+              <a:t>사물에 사람 성격을 입히면 사람들은 그 대상을 더 좋게 본다. 다만 </a:t>
             </a:r>
             <a:pPr indent="0" marL="0">
               <a:lnSpc>
@@ -9721,7 +9695,7 @@
                 <a:ea typeface="Pretendard" pitchFamily="34" charset="-122"/>
                 <a:cs typeface="Pretendard" pitchFamily="34" charset="-120"/>
               </a:rPr>
-              <a:t>만 효과가 난다.</a:t>
+              <a:t>만 그렇다.</a:t>
             </a:r>
             <a:endParaRPr lang="en-US" sz="850" dirty="0"/>
           </a:p>
@@ -9863,7 +9837,7 @@
                 <a:ea typeface="Pretendard" pitchFamily="34" charset="-122"/>
                 <a:cs typeface="Pretendard" pitchFamily="34" charset="-120"/>
               </a:rPr>
-              <a:t>캐릭터에 대한 신뢰는 브랜드 태도로 옮겨간다. 그 브랜드를 </a:t>
+              <a:t>캐릭터를 믿게 되면 그 호감이 브랜드로 넘어간다. 그 브랜드를 </a:t>
             </a:r>
             <a:pPr indent="0" marL="0">
               <a:lnSpc>
@@ -9880,7 +9854,7 @@
                 <a:ea typeface="Pretendard" pitchFamily="34" charset="-122"/>
                 <a:cs typeface="Pretendard" pitchFamily="34" charset="-120"/>
               </a:rPr>
-              <a:t>잘 모르는 소비자일수록 효과가 컸다</a:t>
+              <a:t>잘 모르는 사람일수록 효과가 컸다.</a:t>
             </a:r>
             <a:pPr indent="0" marL="0">
               <a:lnSpc>
@@ -9897,7 +9871,7 @@
                 <a:ea typeface="Pretendard" pitchFamily="34" charset="-122"/>
                 <a:cs typeface="Pretendard" pitchFamily="34" charset="-120"/>
               </a:rPr>
-              <a:t> — 청호나이스를 아직 모르는 2030에게 유리한 조건.</a:t>
+              <a:t> 청호나이스를 아직 모르는 2030이 여기 해당한다.</a:t>
             </a:r>
             <a:endParaRPr lang="en-US" sz="850" dirty="0"/>
           </a:p>
@@ -10039,7 +10013,7 @@
                 <a:ea typeface="Pretendard" pitchFamily="34" charset="-122"/>
                 <a:cs typeface="Pretendard" pitchFamily="34" charset="-120"/>
               </a:rPr>
-              <a:t>일관되게 쓰인 캐릭터는 브랜드를 떠올리게 하는 </a:t>
+              <a:t>같은 캐릭터를 오래 쓰면 브랜드를 떠올리게 하는 </a:t>
             </a:r>
             <a:pPr indent="0" marL="0">
               <a:lnSpc>
@@ -10073,7 +10047,7 @@
                 <a:ea typeface="Pretendard" pitchFamily="34" charset="-122"/>
                 <a:cs typeface="Pretendard" pitchFamily="34" charset="-120"/>
               </a:rPr>
-              <a:t>이 된다. 인지도·고유성 두 축으로 관리한다.</a:t>
+              <a:t>이 된다. 인지도와 고유성 두 축으로 관리한다.</a:t>
             </a:r>
             <a:endParaRPr lang="en-US" sz="850" dirty="0"/>
           </a:p>
@@ -10112,7 +10086,7 @@
                 <a:ea typeface="Pretendard" pitchFamily="34" charset="-122"/>
                 <a:cs typeface="Pretendard" pitchFamily="34" charset="-120"/>
               </a:rPr>
-              <a:t>Romaniuk, Ehrenberg-Bass — 16장 검증 설계의 기준</a:t>
+              <a:t>Romaniuk, Ehrenberg-Bass. 16장 검증 설계가 이 두 축을 쓴다</a:t>
             </a:r>
             <a:endParaRPr lang="en-US" sz="750" dirty="0"/>
           </a:p>
@@ -10973,7 +10947,7 @@
                 <a:ea typeface="Pretendard" pitchFamily="34" charset="-122"/>
                 <a:cs typeface="Pretendard" pitchFamily="34" charset="-120"/>
               </a:rPr>
-              <a:t>캐릭터는 이론과 데이터 양쪽에서 효과가 확인된 방법이다.</a:t>
+              <a:t>이론에서도, 실제 광고 성적에서도 같은 쪽을 가리킨다.</a:t>
             </a:r>
             <a:endParaRPr lang="en-US" sz="1500" dirty="0"/>
           </a:p>
@@ -11012,7 +10986,7 @@
                 <a:ea typeface="Pretendard" pitchFamily="34" charset="-122"/>
                 <a:cs typeface="Pretendard" pitchFamily="34" charset="-120"/>
               </a:rPr>
-              <a:t>연예인은 주목을 빌리지만 캐릭터는 브랜드에 쌓인다. 그리고 이 카테고리에는 아직 주인이 없다.</a:t>
+              <a:t>연예인의 주목은 빌려 쓰는 것이고, 캐릭터는 브랜드에 남는다. 정수기 광고에는 아직 그런 캐릭터가 없다.</a:t>
             </a:r>
             <a:endParaRPr lang="en-US" sz="1000" dirty="0"/>
           </a:p>
@@ -11301,7 +11275,7 @@
                 <a:ea typeface="Pretendard" pitchFamily="34" charset="-122"/>
                 <a:cs typeface="Pretendard" pitchFamily="34" charset="-120"/>
               </a:rPr>
-              <a:t>두꺼비는 복원된 것이 아니라,</a:t>
+              <a:t>잠들어 있던 두꺼비를,</a:t>
             </a:r>
             <a:endParaRPr lang="en-US" sz="2200" dirty="0"/>
           </a:p>
@@ -11321,7 +11295,7 @@
                 <a:ea typeface="Pretendard" pitchFamily="34" charset="-122"/>
                 <a:cs typeface="Pretendard" pitchFamily="34" charset="-120"/>
               </a:rPr>
-              <a:t>지금의 </a:t>
+              <a:t>지금 자리에 </a:t>
             </a:r>
             <a:pPr indent="0" marL="0">
               <a:lnSpc>
@@ -11338,7 +11312,7 @@
                 <a:ea typeface="Pretendard" pitchFamily="34" charset="-122"/>
                 <a:cs typeface="Pretendard" pitchFamily="34" charset="-120"/>
               </a:rPr>
-              <a:t>역할로 다시 배치</a:t>
+              <a:t>다시 앉혔다</a:t>
             </a:r>
             <a:pPr indent="0" marL="0">
               <a:lnSpc>
@@ -11355,7 +11329,7 @@
                 <a:ea typeface="Pretendard" pitchFamily="34" charset="-122"/>
                 <a:cs typeface="Pretendard" pitchFamily="34" charset="-120"/>
               </a:rPr>
-              <a:t>됐다.</a:t>
+              <a:t>.</a:t>
             </a:r>
             <a:endParaRPr lang="en-US" sz="2200" dirty="0"/>
           </a:p>
@@ -11416,7 +11390,7 @@
                 <a:ea typeface="Pretendard" pitchFamily="34" charset="-122"/>
                 <a:cs typeface="Pretendard" pitchFamily="34" charset="-120"/>
               </a:rPr>
-              <a:t>리트로 브랜딩 연구가 말하는 성공 조건 — </a:t>
+              <a:t>리트로 브랜딩 연구는 성공한 부활을 </a:t>
             </a:r>
             <a:pPr indent="0" marL="0">
               <a:buNone/>
@@ -11430,7 +11404,7 @@
                 <a:ea typeface="Pretendard" pitchFamily="34" charset="-122"/>
                 <a:cs typeface="Pretendard" pitchFamily="34" charset="-120"/>
               </a:rPr>
-              <a:t>‘과거의 의미 + 지금의 기능’의 결합</a:t>
+              <a:t>과거의 의미에 지금의 기능을 얹은 것</a:t>
             </a:r>
             <a:pPr indent="0" marL="0">
               <a:buNone/>
@@ -11444,7 +11418,7 @@
                 <a:ea typeface="Pretendard" pitchFamily="34" charset="-122"/>
                 <a:cs typeface="Pretendard" pitchFamily="34" charset="-120"/>
               </a:rPr>
-              <a:t>. 두꺼비는 이 조건을 그대로 밟았다.  Brown, Kozinets &amp; Sherry, Journal of Marketing (2003)</a:t>
+              <a:t>으로 설명한다. 두꺼비가 밟은 순서가 그대로다.  Brown, Kozinets &amp; Sherry, Journal of Marketing (2003)</a:t>
             </a:r>
             <a:endParaRPr lang="en-US" sz="900" dirty="0"/>
           </a:p>
@@ -11489,54 +11463,138 @@
           </a:p>
         </p:txBody>
       </p:sp>
-      <p:sp>
-        <p:nvSpPr>
-          <p:cNvPr id="8" name="Shape 6"/>
-          <p:cNvSpPr/>
-          <p:nvPr/>
-        </p:nvSpPr>
-        <p:spPr>
-          <a:xfrm>
-            <a:off x="658368" y="2944368"/>
-            <a:ext cx="2788920" cy="530352"/>
-          </a:xfrm>
-          <a:prstGeom prst="roundRect">
-            <a:avLst>
-              <a:gd name="adj" fmla="val 15517"/>
-            </a:avLst>
-          </a:prstGeom>
-          <a:solidFill>
-            <a:srgbClr val="F5F5F7"/>
-          </a:solidFill>
-          <a:ln/>
-        </p:spPr>
-      </p:sp>
-      <p:sp>
-        <p:nvSpPr>
-          <p:cNvPr id="9" name="Text 7"/>
-          <p:cNvSpPr/>
-          <p:nvPr/>
-        </p:nvSpPr>
-        <p:spPr>
-          <a:xfrm>
-            <a:off x="804672" y="3026664"/>
-            <a:ext cx="658368" cy="219456"/>
-          </a:xfrm>
-          <a:prstGeom prst="rect">
-            <a:avLst/>
-          </a:prstGeom>
-          <a:noFill/>
-          <a:ln/>
-        </p:spPr>
-        <p:txBody>
-          <a:bodyPr wrap="square" lIns="0" tIns="0" rIns="0" bIns="0" rtlCol="0" anchor="t"/>
-          <a:lstStyle/>
-          <a:p>
-            <a:pPr indent="0" marL="0">
-              <a:buNone/>
-            </a:pPr>
-            <a:r>
-              <a:rPr lang="en-US" sz="950" b="1" dirty="0">
+      <p:pic>
+        <p:nvPicPr>
+          <p:cNvPr id="8" name="Image 0" descr="/home/user/CHAI-AI/assets/img/jinro-isback.jpg">    </p:cNvPr>
+          <p:cNvPicPr>
+            <a:picLocks noChangeAspect="1"/>
+          </p:cNvPicPr>
+          <p:nvPr/>
+        </p:nvPicPr>
+        <p:blipFill>
+          <a:blip r:embed="rId1"/>
+          <a:srcRect l="0" r="0" t="0" b="0"/>
+          <a:stretch/>
+        </p:blipFill>
+        <p:spPr>
+          <a:xfrm>
+            <a:off x="658368" y="2926080"/>
+            <a:ext cx="2788920" cy="1463040"/>
+          </a:xfrm>
+          <a:prstGeom prst="rect">
+            <a:avLst/>
+          </a:prstGeom>
+          <a:effectLst>
+            <a:outerShdw sx="100000" sy="100000" kx="0" ky="0" algn="bl" rotWithShape="0" blurRad="177800" dist="50800" dir="5400000">
+              <a:srgbClr val="191919">
+                <a:alpha val="22000"/>
+              </a:srgbClr>
+            </a:outerShdw>
+          </a:effectLst>
+        </p:spPr>
+      </p:pic>
+      <p:sp>
+        <p:nvSpPr>
+          <p:cNvPr id="9" name="Text 6"/>
+          <p:cNvSpPr/>
+          <p:nvPr/>
+        </p:nvSpPr>
+        <p:spPr>
+          <a:xfrm>
+            <a:off x="658368" y="4443984"/>
+            <a:ext cx="2788920" cy="402336"/>
+          </a:xfrm>
+          <a:prstGeom prst="rect">
+            <a:avLst/>
+          </a:prstGeom>
+          <a:noFill/>
+          <a:ln/>
+        </p:spPr>
+        <p:txBody>
+          <a:bodyPr wrap="square" lIns="0" tIns="0" rIns="0" bIns="0" rtlCol="0" anchor="t"/>
+          <a:lstStyle/>
+          <a:p>
+            <a:pPr indent="0" marL="0">
+              <a:lnSpc>
+                <a:spcPts val="1100"/>
+              </a:lnSpc>
+              <a:buNone/>
+            </a:pPr>
+            <a:r>
+              <a:rPr lang="en-US" sz="850" dirty="0">
+                <a:solidFill>
+                  <a:srgbClr val="3C3C3C"/>
+                </a:solidFill>
+                <a:latin typeface="Pretendard" pitchFamily="34" charset="0"/>
+                <a:ea typeface="Pretendard" pitchFamily="34" charset="-122"/>
+                <a:cs typeface="Pretendard" pitchFamily="34" charset="-120"/>
+              </a:rPr>
+              <a:t>1950년대 진로 상표의 두꺼비. 1990년대에 광고에서 사라졌다가 </a:t>
+            </a:r>
+            <a:pPr indent="0" marL="0">
+              <a:lnSpc>
+                <a:spcPts val="1100"/>
+              </a:lnSpc>
+              <a:buNone/>
+            </a:pPr>
+            <a:r>
+              <a:rPr lang="en-US" sz="850" b="1" dirty="0">
+                <a:solidFill>
+                  <a:srgbClr val="191919"/>
+                </a:solidFill>
+                <a:latin typeface="Pretendard" pitchFamily="34" charset="0"/>
+                <a:ea typeface="Pretendard" pitchFamily="34" charset="-122"/>
+                <a:cs typeface="Pretendard" pitchFamily="34" charset="-120"/>
+              </a:rPr>
+              <a:t>2019년 4월 ‘진로 이즈백’</a:t>
+            </a:r>
+            <a:pPr indent="0" marL="0">
+              <a:lnSpc>
+                <a:spcPts val="1100"/>
+              </a:lnSpc>
+              <a:buNone/>
+            </a:pPr>
+            <a:r>
+              <a:rPr lang="en-US" sz="850" dirty="0">
+                <a:solidFill>
+                  <a:srgbClr val="3C3C3C"/>
+                </a:solidFill>
+                <a:latin typeface="Pretendard" pitchFamily="34" charset="0"/>
+                <a:ea typeface="Pretendard" pitchFamily="34" charset="-122"/>
+                <a:cs typeface="Pretendard" pitchFamily="34" charset="-120"/>
+              </a:rPr>
+              <a:t>으로 돌아왔다.</a:t>
+            </a:r>
+            <a:endParaRPr lang="en-US" sz="850" dirty="0"/>
+          </a:p>
+        </p:txBody>
+      </p:sp>
+      <p:sp>
+        <p:nvSpPr>
+          <p:cNvPr id="10" name="Text 7"/>
+          <p:cNvSpPr/>
+          <p:nvPr/>
+        </p:nvSpPr>
+        <p:spPr>
+          <a:xfrm>
+            <a:off x="658368" y="4846320"/>
+            <a:ext cx="2788920" cy="201168"/>
+          </a:xfrm>
+          <a:prstGeom prst="rect">
+            <a:avLst/>
+          </a:prstGeom>
+          <a:noFill/>
+          <a:ln/>
+        </p:spPr>
+        <p:txBody>
+          <a:bodyPr wrap="square" lIns="0" tIns="0" rIns="0" bIns="0" rtlCol="0" anchor="t"/>
+          <a:lstStyle/>
+          <a:p>
+            <a:pPr indent="0" marL="0">
+              <a:buNone/>
+            </a:pPr>
+            <a:r>
+              <a:rPr lang="en-US" sz="750" dirty="0">
                 <a:solidFill>
                   <a:srgbClr val="959595"/>
                 </a:solidFill>
@@ -11544,268 +11602,15 @@
                 <a:ea typeface="Pretendard" pitchFamily="34" charset="-122"/>
                 <a:cs typeface="Pretendard" pitchFamily="34" charset="-120"/>
               </a:rPr>
-              <a:t>1950년대</a:t>
-            </a:r>
-            <a:endParaRPr lang="en-US" sz="950" dirty="0"/>
-          </a:p>
-        </p:txBody>
-      </p:sp>
-      <p:sp>
-        <p:nvSpPr>
-          <p:cNvPr id="10" name="Text 8"/>
-          <p:cNvSpPr/>
-          <p:nvPr/>
-        </p:nvSpPr>
-        <p:spPr>
-          <a:xfrm>
-            <a:off x="1499616" y="3017520"/>
-            <a:ext cx="1801368" cy="438912"/>
-          </a:xfrm>
-          <a:prstGeom prst="rect">
-            <a:avLst/>
-          </a:prstGeom>
-          <a:noFill/>
-          <a:ln/>
-        </p:spPr>
-        <p:txBody>
-          <a:bodyPr wrap="square" lIns="0" tIns="0" rIns="0" bIns="0" rtlCol="0" anchor="t"/>
-          <a:lstStyle/>
-          <a:p>
-            <a:pPr indent="0" marL="0">
-              <a:lnSpc>
-                <a:spcPts val="1150"/>
-              </a:lnSpc>
-              <a:buNone/>
-            </a:pPr>
-            <a:r>
-              <a:rPr lang="en-US" sz="900" dirty="0">
-                <a:solidFill>
-                  <a:srgbClr val="3C3C3C"/>
-                </a:solidFill>
-                <a:latin typeface="Pretendard" pitchFamily="34" charset="0"/>
-                <a:ea typeface="Pretendard" pitchFamily="34" charset="-122"/>
-                <a:cs typeface="Pretendard" pitchFamily="34" charset="-120"/>
-              </a:rPr>
-              <a:t>진로 상표의 두꺼비. 장수와 복을 뜻하는 상징</a:t>
-            </a:r>
-            <a:endParaRPr lang="en-US" sz="900" dirty="0"/>
-          </a:p>
-        </p:txBody>
-      </p:sp>
-      <p:sp>
-        <p:nvSpPr>
-          <p:cNvPr id="11" name="Shape 9"/>
-          <p:cNvSpPr/>
-          <p:nvPr/>
-        </p:nvSpPr>
-        <p:spPr>
-          <a:xfrm>
-            <a:off x="658368" y="3566160"/>
-            <a:ext cx="2788920" cy="530352"/>
-          </a:xfrm>
-          <a:prstGeom prst="roundRect">
-            <a:avLst>
-              <a:gd name="adj" fmla="val 15517"/>
-            </a:avLst>
-          </a:prstGeom>
-          <a:solidFill>
-            <a:srgbClr val="F5F5F7"/>
-          </a:solidFill>
-          <a:ln/>
-        </p:spPr>
-      </p:sp>
-      <p:sp>
-        <p:nvSpPr>
-          <p:cNvPr id="12" name="Text 10"/>
-          <p:cNvSpPr/>
-          <p:nvPr/>
-        </p:nvSpPr>
-        <p:spPr>
-          <a:xfrm>
-            <a:off x="804672" y="3648456"/>
-            <a:ext cx="658368" cy="219456"/>
-          </a:xfrm>
-          <a:prstGeom prst="rect">
-            <a:avLst/>
-          </a:prstGeom>
-          <a:noFill/>
-          <a:ln/>
-        </p:spPr>
-        <p:txBody>
-          <a:bodyPr wrap="square" lIns="0" tIns="0" rIns="0" bIns="0" rtlCol="0" anchor="t"/>
-          <a:lstStyle/>
-          <a:p>
-            <a:pPr indent="0" marL="0">
-              <a:buNone/>
-            </a:pPr>
-            <a:r>
-              <a:rPr lang="en-US" sz="950" b="1" dirty="0">
-                <a:solidFill>
-                  <a:srgbClr val="959595"/>
-                </a:solidFill>
-                <a:latin typeface="Pretendard" pitchFamily="34" charset="0"/>
-                <a:ea typeface="Pretendard" pitchFamily="34" charset="-122"/>
-                <a:cs typeface="Pretendard" pitchFamily="34" charset="-120"/>
-              </a:rPr>
-              <a:t>1990년대</a:t>
-            </a:r>
-            <a:endParaRPr lang="en-US" sz="950" dirty="0"/>
-          </a:p>
-        </p:txBody>
-      </p:sp>
-      <p:sp>
-        <p:nvSpPr>
-          <p:cNvPr id="13" name="Text 11"/>
-          <p:cNvSpPr/>
-          <p:nvPr/>
-        </p:nvSpPr>
-        <p:spPr>
-          <a:xfrm>
-            <a:off x="1499616" y="3639312"/>
-            <a:ext cx="1801368" cy="438912"/>
-          </a:xfrm>
-          <a:prstGeom prst="rect">
-            <a:avLst/>
-          </a:prstGeom>
-          <a:noFill/>
-          <a:ln/>
-        </p:spPr>
-        <p:txBody>
-          <a:bodyPr wrap="square" lIns="0" tIns="0" rIns="0" bIns="0" rtlCol="0" anchor="t"/>
-          <a:lstStyle/>
-          <a:p>
-            <a:pPr indent="0" marL="0">
-              <a:lnSpc>
-                <a:spcPts val="1150"/>
-              </a:lnSpc>
-              <a:buNone/>
-            </a:pPr>
-            <a:r>
-              <a:rPr lang="en-US" sz="900" dirty="0">
-                <a:solidFill>
-                  <a:srgbClr val="3C3C3C"/>
-                </a:solidFill>
-                <a:latin typeface="Pretendard" pitchFamily="34" charset="0"/>
-                <a:ea typeface="Pretendard" pitchFamily="34" charset="-122"/>
-                <a:cs typeface="Pretendard" pitchFamily="34" charset="-120"/>
-              </a:rPr>
-              <a:t>‘골드’ 시대를 지나며 사용 중단. 사실상 잠든 자산</a:t>
-            </a:r>
-            <a:endParaRPr lang="en-US" sz="900" dirty="0"/>
-          </a:p>
-        </p:txBody>
-      </p:sp>
-      <p:sp>
-        <p:nvSpPr>
-          <p:cNvPr id="14" name="Shape 12"/>
-          <p:cNvSpPr/>
-          <p:nvPr/>
-        </p:nvSpPr>
-        <p:spPr>
-          <a:xfrm>
-            <a:off x="658368" y="4187952"/>
-            <a:ext cx="2788920" cy="530352"/>
-          </a:xfrm>
-          <a:prstGeom prst="roundRect">
-            <a:avLst>
-              <a:gd name="adj" fmla="val 15517"/>
-            </a:avLst>
-          </a:prstGeom>
-          <a:solidFill>
-            <a:srgbClr val="EAF1FF"/>
-          </a:solidFill>
-          <a:ln w="12700">
-            <a:solidFill>
-              <a:srgbClr val="0057FF"/>
-            </a:solidFill>
-            <a:prstDash val="solid"/>
-          </a:ln>
-        </p:spPr>
-      </p:sp>
-      <p:sp>
-        <p:nvSpPr>
-          <p:cNvPr id="15" name="Text 13"/>
-          <p:cNvSpPr/>
-          <p:nvPr/>
-        </p:nvSpPr>
-        <p:spPr>
-          <a:xfrm>
-            <a:off x="804672" y="4270248"/>
-            <a:ext cx="658368" cy="219456"/>
-          </a:xfrm>
-          <a:prstGeom prst="rect">
-            <a:avLst/>
-          </a:prstGeom>
-          <a:noFill/>
-          <a:ln/>
-        </p:spPr>
-        <p:txBody>
-          <a:bodyPr wrap="square" lIns="0" tIns="0" rIns="0" bIns="0" rtlCol="0" anchor="t"/>
-          <a:lstStyle/>
-          <a:p>
-            <a:pPr indent="0" marL="0">
-              <a:buNone/>
-            </a:pPr>
-            <a:r>
-              <a:rPr lang="en-US" sz="950" b="1" dirty="0">
-                <a:solidFill>
-                  <a:srgbClr val="0057FF"/>
-                </a:solidFill>
-                <a:latin typeface="Pretendard" pitchFamily="34" charset="0"/>
-                <a:ea typeface="Pretendard" pitchFamily="34" charset="-122"/>
-                <a:cs typeface="Pretendard" pitchFamily="34" charset="-120"/>
-              </a:rPr>
-              <a:t>2019.4</a:t>
-            </a:r>
-            <a:endParaRPr lang="en-US" sz="950" dirty="0"/>
-          </a:p>
-        </p:txBody>
-      </p:sp>
-      <p:sp>
-        <p:nvSpPr>
-          <p:cNvPr id="16" name="Text 14"/>
-          <p:cNvSpPr/>
-          <p:nvPr/>
-        </p:nvSpPr>
-        <p:spPr>
-          <a:xfrm>
-            <a:off x="1499616" y="4261104"/>
-            <a:ext cx="1801368" cy="438912"/>
-          </a:xfrm>
-          <a:prstGeom prst="rect">
-            <a:avLst/>
-          </a:prstGeom>
-          <a:noFill/>
-          <a:ln/>
-        </p:spPr>
-        <p:txBody>
-          <a:bodyPr wrap="square" lIns="0" tIns="0" rIns="0" bIns="0" rtlCol="0" anchor="t"/>
-          <a:lstStyle/>
-          <a:p>
-            <a:pPr indent="0" marL="0">
-              <a:lnSpc>
-                <a:spcPts val="1150"/>
-              </a:lnSpc>
-              <a:buNone/>
-            </a:pPr>
-            <a:r>
-              <a:rPr lang="en-US" sz="900" dirty="0">
-                <a:solidFill>
-                  <a:srgbClr val="191919"/>
-                </a:solidFill>
-                <a:latin typeface="Pretendard" pitchFamily="34" charset="0"/>
-                <a:ea typeface="Pretendard" pitchFamily="34" charset="-122"/>
-                <a:cs typeface="Pretendard" pitchFamily="34" charset="-120"/>
-              </a:rPr>
-              <a:t>‘진로 이즈백’으로 부활 — 겨냥한 세대는 2030</a:t>
-            </a:r>
-            <a:endParaRPr lang="en-US" sz="900" dirty="0"/>
-          </a:p>
-        </p:txBody>
-      </p:sp>
-      <p:sp>
-        <p:nvSpPr>
-          <p:cNvPr id="17" name="Text 15"/>
+              <a:t>광고 뒷벽에 옛 두꺼비 그림이 걸려 있다.</a:t>
+            </a:r>
+            <a:endParaRPr lang="en-US" sz="750" dirty="0"/>
+          </a:p>
+        </p:txBody>
+      </p:sp>
+      <p:sp>
+        <p:nvSpPr>
+          <p:cNvPr id="11" name="Text 8"/>
           <p:cNvSpPr/>
           <p:nvPr/>
         </p:nvSpPr>
@@ -11844,7 +11649,7 @@
       </p:sp>
       <p:sp>
         <p:nvSpPr>
-          <p:cNvPr id="18" name="Shape 16"/>
+          <p:cNvPr id="12" name="Shape 9"/>
           <p:cNvSpPr/>
           <p:nvPr/>
         </p:nvSpPr>
@@ -11871,7 +11676,7 @@
       </p:sp>
       <p:sp>
         <p:nvSpPr>
-          <p:cNvPr id="19" name="Text 17"/>
+          <p:cNvPr id="13" name="Text 10"/>
           <p:cNvSpPr/>
           <p:nvPr/>
         </p:nvSpPr>
@@ -11910,7 +11715,7 @@
       </p:sp>
       <p:sp>
         <p:nvSpPr>
-          <p:cNvPr id="20" name="Text 18"/>
+          <p:cNvPr id="14" name="Text 11"/>
           <p:cNvSpPr/>
           <p:nvPr/>
         </p:nvSpPr>
@@ -11949,7 +11754,7 @@
       </p:sp>
       <p:sp>
         <p:nvSpPr>
-          <p:cNvPr id="21" name="Text 19"/>
+          <p:cNvPr id="15" name="Text 12"/>
           <p:cNvSpPr/>
           <p:nvPr/>
         </p:nvSpPr>
@@ -11991,7 +11796,7 @@
       </p:sp>
       <p:sp>
         <p:nvSpPr>
-          <p:cNvPr id="22" name="Shape 20"/>
+          <p:cNvPr id="16" name="Shape 13"/>
           <p:cNvSpPr/>
           <p:nvPr/>
         </p:nvSpPr>
@@ -12018,7 +11823,7 @@
       </p:sp>
       <p:sp>
         <p:nvSpPr>
-          <p:cNvPr id="23" name="Text 21"/>
+          <p:cNvPr id="17" name="Text 14"/>
           <p:cNvSpPr/>
           <p:nvPr/>
         </p:nvSpPr>
@@ -12057,7 +11862,7 @@
       </p:sp>
       <p:sp>
         <p:nvSpPr>
-          <p:cNvPr id="24" name="Text 22"/>
+          <p:cNvPr id="18" name="Text 15"/>
           <p:cNvSpPr/>
           <p:nvPr/>
         </p:nvSpPr>
@@ -12096,7 +11901,7 @@
       </p:sp>
       <p:sp>
         <p:nvSpPr>
-          <p:cNvPr id="25" name="Text 23"/>
+          <p:cNvPr id="19" name="Text 16"/>
           <p:cNvSpPr/>
           <p:nvPr/>
         </p:nvSpPr>
@@ -12138,7 +11943,7 @@
       </p:sp>
       <p:sp>
         <p:nvSpPr>
-          <p:cNvPr id="26" name="Shape 24"/>
+          <p:cNvPr id="20" name="Shape 17"/>
           <p:cNvSpPr/>
           <p:nvPr/>
         </p:nvSpPr>
@@ -12165,7 +11970,7 @@
       </p:sp>
       <p:sp>
         <p:nvSpPr>
-          <p:cNvPr id="27" name="Text 25"/>
+          <p:cNvPr id="21" name="Text 18"/>
           <p:cNvSpPr/>
           <p:nvPr/>
         </p:nvSpPr>
@@ -12204,7 +12009,7 @@
       </p:sp>
       <p:sp>
         <p:nvSpPr>
-          <p:cNvPr id="28" name="Text 26"/>
+          <p:cNvPr id="22" name="Text 19"/>
           <p:cNvSpPr/>
           <p:nvPr/>
         </p:nvSpPr>
@@ -12243,7 +12048,7 @@
       </p:sp>
       <p:sp>
         <p:nvSpPr>
-          <p:cNvPr id="29" name="Text 27"/>
+          <p:cNvPr id="23" name="Text 20"/>
           <p:cNvSpPr/>
           <p:nvPr/>
         </p:nvSpPr>
@@ -12285,7 +12090,7 @@
       </p:sp>
       <p:sp>
         <p:nvSpPr>
-          <p:cNvPr id="30" name="Text 28"/>
+          <p:cNvPr id="24" name="Text 21"/>
           <p:cNvSpPr/>
           <p:nvPr/>
         </p:nvSpPr>
@@ -12324,7 +12129,7 @@
       </p:sp>
       <p:sp>
         <p:nvSpPr>
-          <p:cNvPr id="31" name="Shape 29"/>
+          <p:cNvPr id="25" name="Shape 22"/>
           <p:cNvSpPr/>
           <p:nvPr/>
         </p:nvSpPr>
@@ -12351,7 +12156,7 @@
       </p:sp>
       <p:sp>
         <p:nvSpPr>
-          <p:cNvPr id="32" name="Text 30"/>
+          <p:cNvPr id="26" name="Text 23"/>
           <p:cNvSpPr/>
           <p:nvPr/>
         </p:nvSpPr>
@@ -12390,7 +12195,7 @@
       </p:sp>
       <p:sp>
         <p:nvSpPr>
-          <p:cNvPr id="33" name="Text 31"/>
+          <p:cNvPr id="27" name="Text 24"/>
           <p:cNvSpPr/>
           <p:nvPr/>
         </p:nvSpPr>
@@ -12452,7 +12257,7 @@
       </p:sp>
       <p:sp>
         <p:nvSpPr>
-          <p:cNvPr id="34" name="Shape 32"/>
+          <p:cNvPr id="28" name="Shape 25"/>
           <p:cNvSpPr/>
           <p:nvPr/>
         </p:nvSpPr>
@@ -12479,7 +12284,7 @@
       </p:sp>
       <p:sp>
         <p:nvSpPr>
-          <p:cNvPr id="35" name="Text 33"/>
+          <p:cNvPr id="29" name="Text 26"/>
           <p:cNvSpPr/>
           <p:nvPr/>
         </p:nvSpPr>
@@ -12518,7 +12323,7 @@
       </p:sp>
       <p:sp>
         <p:nvSpPr>
-          <p:cNvPr id="36" name="Text 34"/>
+          <p:cNvPr id="30" name="Text 27"/>
           <p:cNvSpPr/>
           <p:nvPr/>
         </p:nvSpPr>
@@ -12580,7 +12385,7 @@
       </p:sp>
       <p:sp>
         <p:nvSpPr>
-          <p:cNvPr id="37" name="Shape 35"/>
+          <p:cNvPr id="31" name="Shape 28"/>
           <p:cNvSpPr/>
           <p:nvPr/>
         </p:nvSpPr>
@@ -12607,7 +12412,7 @@
       </p:sp>
       <p:sp>
         <p:nvSpPr>
-          <p:cNvPr id="38" name="Text 36"/>
+          <p:cNvPr id="32" name="Text 29"/>
           <p:cNvSpPr/>
           <p:nvPr/>
         </p:nvSpPr>
@@ -12646,7 +12451,7 @@
       </p:sp>
       <p:sp>
         <p:nvSpPr>
-          <p:cNvPr id="39" name="Text 37"/>
+          <p:cNvPr id="33" name="Text 30"/>
           <p:cNvSpPr/>
           <p:nvPr/>
         </p:nvSpPr>
@@ -12708,7 +12513,7 @@
       </p:sp>
       <p:sp>
         <p:nvSpPr>
-          <p:cNvPr id="40" name="Shape 38"/>
+          <p:cNvPr id="34" name="Shape 31"/>
           <p:cNvSpPr/>
           <p:nvPr/>
         </p:nvSpPr>
@@ -12730,7 +12535,7 @@
       </p:sp>
       <p:sp>
         <p:nvSpPr>
-          <p:cNvPr id="41" name="Text 39"/>
+          <p:cNvPr id="35" name="Text 32"/>
           <p:cNvSpPr/>
           <p:nvPr/>
         </p:nvSpPr>
@@ -12792,7 +12597,7 @@
       </p:sp>
       <p:sp>
         <p:nvSpPr>
-          <p:cNvPr id="42" name="Text 40"/>
+          <p:cNvPr id="36" name="Text 33"/>
           <p:cNvSpPr/>
           <p:nvPr/>
         </p:nvSpPr>
@@ -12831,7 +12636,7 @@
       </p:sp>
       <p:sp>
         <p:nvSpPr>
-          <p:cNvPr id="43" name="Text 41"/>
+          <p:cNvPr id="37" name="Text 34"/>
           <p:cNvSpPr/>
           <p:nvPr/>
         </p:nvSpPr>
@@ -12907,7 +12712,7 @@
       </p:sp>
       <p:sp>
         <p:nvSpPr>
-          <p:cNvPr id="44" name="Text 42"/>
+          <p:cNvPr id="38" name="Text 35"/>
           <p:cNvSpPr/>
           <p:nvPr/>
         </p:nvSpPr>
@@ -12946,7 +12751,7 @@
       </p:sp>
       <p:sp>
         <p:nvSpPr>
-          <p:cNvPr id="45" name="Text 43"/>
+          <p:cNvPr id="39" name="Text 36"/>
           <p:cNvSpPr/>
           <p:nvPr/>
         </p:nvSpPr>
@@ -13022,7 +12827,7 @@
       </p:sp>
       <p:sp>
         <p:nvSpPr>
-          <p:cNvPr id="46" name="Text 44"/>
+          <p:cNvPr id="40" name="Text 37"/>
           <p:cNvSpPr/>
           <p:nvPr/>
         </p:nvSpPr>
@@ -13061,7 +12866,7 @@
       </p:sp>
       <p:sp>
         <p:nvSpPr>
-          <p:cNvPr id="47" name="Text 45"/>
+          <p:cNvPr id="41" name="Text 38"/>
           <p:cNvSpPr/>
           <p:nvPr/>
         </p:nvSpPr>
@@ -13137,7 +12942,7 @@
       </p:sp>
       <p:sp>
         <p:nvSpPr>
-          <p:cNvPr id="48" name="Text 46"/>
+          <p:cNvPr id="42" name="Text 39"/>
           <p:cNvSpPr/>
           <p:nvPr/>
         </p:nvSpPr>
@@ -13176,7 +12981,7 @@
       </p:sp>
       <p:sp>
         <p:nvSpPr>
-          <p:cNvPr id="49" name="Text 47"/>
+          <p:cNvPr id="43" name="Text 40"/>
           <p:cNvSpPr/>
           <p:nvPr/>
         </p:nvSpPr>
@@ -13215,7 +13020,7 @@
       </p:sp>
       <p:sp>
         <p:nvSpPr>
-          <p:cNvPr id="50" name="Text 48"/>
+          <p:cNvPr id="44" name="Text 41"/>
           <p:cNvSpPr/>
           <p:nvPr/>
         </p:nvSpPr>
@@ -27397,7 +27202,7 @@
         <p:spPr>
           <a:xfrm>
             <a:off x="658368" y="1024128"/>
-            <a:ext cx="10874959" cy="548640"/>
+            <a:ext cx="10874959" cy="731520"/>
           </a:xfrm>
           <a:prstGeom prst="rect">
             <a:avLst/>
@@ -27411,12 +27216,12 @@
           <a:p>
             <a:pPr indent="0" marL="0">
               <a:lnSpc>
-                <a:spcPts val="2944"/>
+                <a:spcPts val="3328"/>
               </a:lnSpc>
               <a:buNone/>
             </a:pPr>
             <a:r>
-              <a:rPr lang="en-US" sz="2300" b="1" dirty="0">
+              <a:rPr lang="en-US" sz="2600" b="1" dirty="0">
                 <a:solidFill>
                   <a:srgbClr val="191919"/>
                 </a:solidFill>
@@ -27428,12 +27233,12 @@
             </a:r>
             <a:pPr indent="0" marL="0">
               <a:lnSpc>
-                <a:spcPts val="2944"/>
+                <a:spcPts val="3328"/>
               </a:lnSpc>
               <a:buNone/>
             </a:pPr>
             <a:r>
-              <a:rPr lang="en-US" sz="2300" b="1" dirty="0">
+              <a:rPr lang="en-US" sz="2600" b="1" dirty="0">
                 <a:solidFill>
                   <a:srgbClr val="0057FF"/>
                 </a:solidFill>
@@ -27445,12 +27250,12 @@
             </a:r>
             <a:pPr indent="0" marL="0">
               <a:lnSpc>
-                <a:spcPts val="2944"/>
+                <a:spcPts val="3328"/>
               </a:lnSpc>
               <a:buNone/>
             </a:pPr>
             <a:r>
-              <a:rPr lang="en-US" sz="2300" b="1" dirty="0">
+              <a:rPr lang="en-US" sz="2600" b="1" dirty="0">
                 <a:solidFill>
                   <a:srgbClr val="191919"/>
                 </a:solidFill>
@@ -27460,311 +27265,307 @@
               </a:rPr>
               <a:t>.</a:t>
             </a:r>
-            <a:endParaRPr lang="en-US" sz="2300" dirty="0"/>
-          </a:p>
-        </p:txBody>
-      </p:sp>
-      <p:sp>
-        <p:nvSpPr>
-          <p:cNvPr id="5" name="Shape 3"/>
-          <p:cNvSpPr/>
-          <p:nvPr/>
-        </p:nvSpPr>
-        <p:spPr>
-          <a:xfrm>
-            <a:off x="658368" y="2148840"/>
-            <a:ext cx="2526716" cy="2194560"/>
-          </a:xfrm>
-          <a:prstGeom prst="roundRect">
-            <a:avLst>
-              <a:gd name="adj" fmla="val 3750"/>
-            </a:avLst>
-          </a:prstGeom>
-          <a:solidFill>
-            <a:srgbClr val="ECEEF2"/>
-          </a:solidFill>
-          <a:ln w="12700">
-            <a:solidFill>
-              <a:srgbClr val="E8E8E8"/>
-            </a:solidFill>
-            <a:prstDash val="solid"/>
-          </a:ln>
+            <a:endParaRPr lang="en-US" sz="2600" dirty="0"/>
+          </a:p>
+        </p:txBody>
+      </p:sp>
+      <p:pic>
+        <p:nvPicPr>
+          <p:cNvPr id="5" name="Image 0" descr="/home/user/CHAI-AI/assets/img/cho-coolcool.jpg">    </p:cNvPr>
+          <p:cNvPicPr>
+            <a:picLocks noChangeAspect="1"/>
+          </p:cNvPicPr>
+          <p:nvPr/>
+        </p:nvPicPr>
+        <p:blipFill>
+          <a:blip r:embed="rId1"/>
+          <a:srcRect l="0" r="0" t="0" b="0"/>
+          <a:stretch/>
+        </p:blipFill>
+        <p:spPr>
+          <a:xfrm>
+            <a:off x="658368" y="2057400"/>
+            <a:ext cx="2540432" cy="1428993"/>
+          </a:xfrm>
+          <a:prstGeom prst="rect">
+            <a:avLst/>
+          </a:prstGeom>
           <a:effectLst>
-            <a:outerShdw sx="100000" sy="100000" kx="0" ky="0" algn="bl" rotWithShape="0" blurRad="203200" dist="63500" dir="5400000">
+            <a:outerShdw sx="100000" sy="100000" kx="0" ky="0" algn="bl" rotWithShape="0" blurRad="177800" dist="50800" dir="5400000">
               <a:srgbClr val="191919">
-                <a:alpha val="24000"/>
+                <a:alpha val="22000"/>
               </a:srgbClr>
             </a:outerShdw>
           </a:effectLst>
         </p:spPr>
-      </p:sp>
-      <p:sp>
-        <p:nvSpPr>
-          <p:cNvPr id="6" name="Text 4"/>
-          <p:cNvSpPr/>
-          <p:nvPr/>
-        </p:nvSpPr>
-        <p:spPr>
-          <a:xfrm>
-            <a:off x="713232" y="2203704"/>
-            <a:ext cx="2416988" cy="2084832"/>
-          </a:xfrm>
-          <a:prstGeom prst="rect">
-            <a:avLst/>
-          </a:prstGeom>
-          <a:noFill/>
-          <a:ln/>
-        </p:spPr>
-        <p:txBody>
-          <a:bodyPr wrap="square" lIns="0" tIns="0" rIns="0" bIns="0" rtlCol="0" anchor="ctr"/>
-          <a:lstStyle/>
-          <a:p>
-            <a:pPr algn="ctr" indent="0" marL="0">
-              <a:buNone/>
-            </a:pPr>
-            <a:r>
-              <a:rPr lang="en-US" sz="1100" b="1" dirty="0">
-                <a:solidFill>
-                  <a:srgbClr val="959595"/>
-                </a:solidFill>
-                <a:latin typeface="Pretendard" pitchFamily="34" charset="0"/>
-                <a:ea typeface="Pretendard" pitchFamily="34" charset="-122"/>
-                <a:cs typeface="Pretendard" pitchFamily="34" charset="-120"/>
-              </a:rPr>
-              <a:t>[ 영상 01 ]</a:t>
-            </a:r>
-            <a:endParaRPr lang="en-US" sz="1100" dirty="0"/>
-          </a:p>
-        </p:txBody>
-      </p:sp>
-      <p:sp>
-        <p:nvSpPr>
-          <p:cNvPr id="7" name="Shape 5"/>
-          <p:cNvSpPr/>
-          <p:nvPr/>
-        </p:nvSpPr>
-        <p:spPr>
-          <a:xfrm>
-            <a:off x="3441116" y="2148840"/>
-            <a:ext cx="2526716" cy="2194560"/>
-          </a:xfrm>
-          <a:prstGeom prst="roundRect">
-            <a:avLst>
-              <a:gd name="adj" fmla="val 3750"/>
-            </a:avLst>
-          </a:prstGeom>
-          <a:solidFill>
-            <a:srgbClr val="ECEEF2"/>
-          </a:solidFill>
-          <a:ln w="12700">
-            <a:solidFill>
-              <a:srgbClr val="E8E8E8"/>
-            </a:solidFill>
-            <a:prstDash val="solid"/>
-          </a:ln>
+      </p:pic>
+      <p:sp>
+        <p:nvSpPr>
+          <p:cNvPr id="6" name="Text 3"/>
+          <p:cNvSpPr/>
+          <p:nvPr/>
+        </p:nvSpPr>
+        <p:spPr>
+          <a:xfrm>
+            <a:off x="658368" y="3596121"/>
+            <a:ext cx="2540432" cy="256032"/>
+          </a:xfrm>
+          <a:prstGeom prst="rect">
+            <a:avLst/>
+          </a:prstGeom>
+          <a:noFill/>
+          <a:ln/>
+        </p:spPr>
+        <p:txBody>
+          <a:bodyPr wrap="square" lIns="0" tIns="0" rIns="0" bIns="0" rtlCol="0" anchor="t"/>
+          <a:lstStyle/>
+          <a:p>
+            <a:pPr indent="0" marL="0">
+              <a:lnSpc>
+                <a:spcPts val="1100"/>
+              </a:lnSpc>
+              <a:buNone/>
+            </a:pPr>
+            <a:r>
+              <a:rPr lang="en-US" sz="850" dirty="0">
+                <a:solidFill>
+                  <a:srgbClr val="707070"/>
+                </a:solidFill>
+                <a:latin typeface="Pretendard" pitchFamily="34" charset="0"/>
+                <a:ea typeface="Pretendard" pitchFamily="34" charset="-122"/>
+                <a:cs typeface="Pretendard" pitchFamily="34" charset="-120"/>
+              </a:rPr>
+              <a:t>The M 얼음정수기 ‘시원시원’편</a:t>
+            </a:r>
+            <a:endParaRPr lang="en-US" sz="850" dirty="0"/>
+          </a:p>
+        </p:txBody>
+      </p:sp>
+      <p:pic>
+        <p:nvPicPr>
+          <p:cNvPr id="7" name="Image 1" descr="/home/user/CHAI-AI/assets/img/cho-icetree.jpg">    </p:cNvPr>
+          <p:cNvPicPr>
+            <a:picLocks noChangeAspect="1"/>
+          </p:cNvPicPr>
+          <p:nvPr/>
+        </p:nvPicPr>
+        <p:blipFill>
+          <a:blip r:embed="rId2"/>
+          <a:srcRect l="0" r="0" t="0" b="0"/>
+          <a:stretch/>
+        </p:blipFill>
+        <p:spPr>
+          <a:xfrm>
+            <a:off x="3436544" y="2057400"/>
+            <a:ext cx="2540432" cy="1428993"/>
+          </a:xfrm>
+          <a:prstGeom prst="rect">
+            <a:avLst/>
+          </a:prstGeom>
           <a:effectLst>
-            <a:outerShdw sx="100000" sy="100000" kx="0" ky="0" algn="bl" rotWithShape="0" blurRad="203200" dist="63500" dir="5400000">
+            <a:outerShdw sx="100000" sy="100000" kx="0" ky="0" algn="bl" rotWithShape="0" blurRad="177800" dist="50800" dir="5400000">
               <a:srgbClr val="191919">
-                <a:alpha val="24000"/>
+                <a:alpha val="22000"/>
               </a:srgbClr>
             </a:outerShdw>
           </a:effectLst>
         </p:spPr>
-      </p:sp>
-      <p:sp>
-        <p:nvSpPr>
-          <p:cNvPr id="8" name="Text 6"/>
-          <p:cNvSpPr/>
-          <p:nvPr/>
-        </p:nvSpPr>
-        <p:spPr>
-          <a:xfrm>
-            <a:off x="3495980" y="2203704"/>
-            <a:ext cx="2416988" cy="2084832"/>
-          </a:xfrm>
-          <a:prstGeom prst="rect">
-            <a:avLst/>
-          </a:prstGeom>
-          <a:noFill/>
-          <a:ln/>
-        </p:spPr>
-        <p:txBody>
-          <a:bodyPr wrap="square" lIns="0" tIns="0" rIns="0" bIns="0" rtlCol="0" anchor="ctr"/>
-          <a:lstStyle/>
-          <a:p>
-            <a:pPr algn="ctr" indent="0" marL="0">
-              <a:buNone/>
-            </a:pPr>
-            <a:r>
-              <a:rPr lang="en-US" sz="1100" b="1" dirty="0">
-                <a:solidFill>
-                  <a:srgbClr val="959595"/>
-                </a:solidFill>
-                <a:latin typeface="Pretendard" pitchFamily="34" charset="0"/>
-                <a:ea typeface="Pretendard" pitchFamily="34" charset="-122"/>
-                <a:cs typeface="Pretendard" pitchFamily="34" charset="-120"/>
-              </a:rPr>
-              <a:t>[ 영상 02 ]</a:t>
-            </a:r>
-            <a:endParaRPr lang="en-US" sz="1100" dirty="0"/>
-          </a:p>
-        </p:txBody>
-      </p:sp>
-      <p:sp>
-        <p:nvSpPr>
-          <p:cNvPr id="9" name="Shape 7"/>
-          <p:cNvSpPr/>
-          <p:nvPr/>
-        </p:nvSpPr>
-        <p:spPr>
-          <a:xfrm>
-            <a:off x="6223864" y="2148840"/>
-            <a:ext cx="2526716" cy="2194560"/>
-          </a:xfrm>
-          <a:prstGeom prst="roundRect">
-            <a:avLst>
-              <a:gd name="adj" fmla="val 3750"/>
-            </a:avLst>
-          </a:prstGeom>
-          <a:solidFill>
-            <a:srgbClr val="ECEEF2"/>
-          </a:solidFill>
-          <a:ln w="12700">
-            <a:solidFill>
-              <a:srgbClr val="E8E8E8"/>
-            </a:solidFill>
-            <a:prstDash val="solid"/>
-          </a:ln>
+      </p:pic>
+      <p:sp>
+        <p:nvSpPr>
+          <p:cNvPr id="8" name="Text 4"/>
+          <p:cNvSpPr/>
+          <p:nvPr/>
+        </p:nvSpPr>
+        <p:spPr>
+          <a:xfrm>
+            <a:off x="3436544" y="3596121"/>
+            <a:ext cx="2540432" cy="256032"/>
+          </a:xfrm>
+          <a:prstGeom prst="rect">
+            <a:avLst/>
+          </a:prstGeom>
+          <a:noFill/>
+          <a:ln/>
+        </p:spPr>
+        <p:txBody>
+          <a:bodyPr wrap="square" lIns="0" tIns="0" rIns="0" bIns="0" rtlCol="0" anchor="t"/>
+          <a:lstStyle/>
+          <a:p>
+            <a:pPr indent="0" marL="0">
+              <a:lnSpc>
+                <a:spcPts val="1100"/>
+              </a:lnSpc>
+              <a:buNone/>
+            </a:pPr>
+            <a:r>
+              <a:rPr lang="en-US" sz="850" dirty="0">
+                <a:solidFill>
+                  <a:srgbClr val="707070"/>
+                </a:solidFill>
+                <a:latin typeface="Pretendard" pitchFamily="34" charset="0"/>
+                <a:ea typeface="Pretendard" pitchFamily="34" charset="-122"/>
+                <a:cs typeface="Pretendard" pitchFamily="34" charset="-120"/>
+              </a:rPr>
+              <a:t>뉴 아이스트리 ‘얼음나무’편</a:t>
+            </a:r>
+            <a:endParaRPr lang="en-US" sz="850" dirty="0"/>
+          </a:p>
+        </p:txBody>
+      </p:sp>
+      <p:pic>
+        <p:nvPicPr>
+          <p:cNvPr id="9" name="Image 2" descr="/home/user/CHAI-AI/assets/img/cho-lovelytree.jpg">    </p:cNvPr>
+          <p:cNvPicPr>
+            <a:picLocks noChangeAspect="1"/>
+          </p:cNvPicPr>
+          <p:nvPr/>
+        </p:nvPicPr>
+        <p:blipFill>
+          <a:blip r:embed="rId3"/>
+          <a:srcRect l="0" r="0" t="0" b="0"/>
+          <a:stretch/>
+        </p:blipFill>
+        <p:spPr>
+          <a:xfrm>
+            <a:off x="6214720" y="2057400"/>
+            <a:ext cx="2540432" cy="1428993"/>
+          </a:xfrm>
+          <a:prstGeom prst="rect">
+            <a:avLst/>
+          </a:prstGeom>
           <a:effectLst>
-            <a:outerShdw sx="100000" sy="100000" kx="0" ky="0" algn="bl" rotWithShape="0" blurRad="203200" dist="63500" dir="5400000">
+            <a:outerShdw sx="100000" sy="100000" kx="0" ky="0" algn="bl" rotWithShape="0" blurRad="177800" dist="50800" dir="5400000">
               <a:srgbClr val="191919">
-                <a:alpha val="24000"/>
+                <a:alpha val="22000"/>
               </a:srgbClr>
             </a:outerShdw>
           </a:effectLst>
         </p:spPr>
-      </p:sp>
-      <p:sp>
-        <p:nvSpPr>
-          <p:cNvPr id="10" name="Text 8"/>
-          <p:cNvSpPr/>
-          <p:nvPr/>
-        </p:nvSpPr>
-        <p:spPr>
-          <a:xfrm>
-            <a:off x="6278728" y="2203704"/>
-            <a:ext cx="2416988" cy="2084832"/>
-          </a:xfrm>
-          <a:prstGeom prst="rect">
-            <a:avLst/>
-          </a:prstGeom>
-          <a:noFill/>
-          <a:ln/>
-        </p:spPr>
-        <p:txBody>
-          <a:bodyPr wrap="square" lIns="0" tIns="0" rIns="0" bIns="0" rtlCol="0" anchor="ctr"/>
-          <a:lstStyle/>
-          <a:p>
-            <a:pPr algn="ctr" indent="0" marL="0">
-              <a:buNone/>
-            </a:pPr>
-            <a:r>
-              <a:rPr lang="en-US" sz="1100" b="1" dirty="0">
-                <a:solidFill>
-                  <a:srgbClr val="959595"/>
-                </a:solidFill>
-                <a:latin typeface="Pretendard" pitchFamily="34" charset="0"/>
-                <a:ea typeface="Pretendard" pitchFamily="34" charset="-122"/>
-                <a:cs typeface="Pretendard" pitchFamily="34" charset="-120"/>
-              </a:rPr>
-              <a:t>[ 영상 03 ]</a:t>
-            </a:r>
-            <a:endParaRPr lang="en-US" sz="1100" dirty="0"/>
-          </a:p>
-        </p:txBody>
-      </p:sp>
-      <p:sp>
-        <p:nvSpPr>
-          <p:cNvPr id="11" name="Shape 9"/>
-          <p:cNvSpPr/>
-          <p:nvPr/>
-        </p:nvSpPr>
-        <p:spPr>
-          <a:xfrm>
-            <a:off x="9006611" y="2148840"/>
-            <a:ext cx="2526716" cy="2194560"/>
-          </a:xfrm>
-          <a:prstGeom prst="roundRect">
-            <a:avLst>
-              <a:gd name="adj" fmla="val 3750"/>
-            </a:avLst>
-          </a:prstGeom>
-          <a:solidFill>
-            <a:srgbClr val="ECEEF2"/>
-          </a:solidFill>
-          <a:ln w="12700">
-            <a:solidFill>
-              <a:srgbClr val="E8E8E8"/>
-            </a:solidFill>
-            <a:prstDash val="solid"/>
-          </a:ln>
+      </p:pic>
+      <p:sp>
+        <p:nvSpPr>
+          <p:cNvPr id="10" name="Text 5"/>
+          <p:cNvSpPr/>
+          <p:nvPr/>
+        </p:nvSpPr>
+        <p:spPr>
+          <a:xfrm>
+            <a:off x="6214720" y="3596121"/>
+            <a:ext cx="2540432" cy="256032"/>
+          </a:xfrm>
+          <a:prstGeom prst="rect">
+            <a:avLst/>
+          </a:prstGeom>
+          <a:noFill/>
+          <a:ln/>
+        </p:spPr>
+        <p:txBody>
+          <a:bodyPr wrap="square" lIns="0" tIns="0" rIns="0" bIns="0" rtlCol="0" anchor="t"/>
+          <a:lstStyle/>
+          <a:p>
+            <a:pPr indent="0" marL="0">
+              <a:lnSpc>
+                <a:spcPts val="1100"/>
+              </a:lnSpc>
+              <a:buNone/>
+            </a:pPr>
+            <a:r>
+              <a:rPr lang="en-US" sz="850" dirty="0">
+                <a:solidFill>
+                  <a:srgbClr val="707070"/>
+                </a:solidFill>
+                <a:latin typeface="Pretendard" pitchFamily="34" charset="0"/>
+                <a:ea typeface="Pretendard" pitchFamily="34" charset="-122"/>
+                <a:cs typeface="Pretendard" pitchFamily="34" charset="-120"/>
+              </a:rPr>
+              <a:t>뉴 러블리트리 브랜드필름</a:t>
+            </a:r>
+            <a:endParaRPr lang="en-US" sz="850" dirty="0"/>
+          </a:p>
+        </p:txBody>
+      </p:sp>
+      <p:pic>
+        <p:nvPicPr>
+          <p:cNvPr id="11" name="Image 3" descr="/home/user/CHAI-AI/assets/img/cho-whicafe.jpg">    </p:cNvPr>
+          <p:cNvPicPr>
+            <a:picLocks noChangeAspect="1"/>
+          </p:cNvPicPr>
+          <p:nvPr/>
+        </p:nvPicPr>
+        <p:blipFill>
+          <a:blip r:embed="rId4"/>
+          <a:srcRect l="0" r="0" t="0" b="0"/>
+          <a:stretch/>
+        </p:blipFill>
+        <p:spPr>
+          <a:xfrm>
+            <a:off x="8992895" y="2057400"/>
+            <a:ext cx="2540432" cy="1428993"/>
+          </a:xfrm>
+          <a:prstGeom prst="rect">
+            <a:avLst/>
+          </a:prstGeom>
           <a:effectLst>
-            <a:outerShdw sx="100000" sy="100000" kx="0" ky="0" algn="bl" rotWithShape="0" blurRad="203200" dist="63500" dir="5400000">
+            <a:outerShdw sx="100000" sy="100000" kx="0" ky="0" algn="bl" rotWithShape="0" blurRad="177800" dist="50800" dir="5400000">
               <a:srgbClr val="191919">
-                <a:alpha val="24000"/>
+                <a:alpha val="22000"/>
               </a:srgbClr>
             </a:outerShdw>
           </a:effectLst>
         </p:spPr>
-      </p:sp>
-      <p:sp>
-        <p:nvSpPr>
-          <p:cNvPr id="12" name="Text 10"/>
-          <p:cNvSpPr/>
-          <p:nvPr/>
-        </p:nvSpPr>
-        <p:spPr>
-          <a:xfrm>
-            <a:off x="9061475" y="2203704"/>
-            <a:ext cx="2416988" cy="2084832"/>
-          </a:xfrm>
-          <a:prstGeom prst="rect">
-            <a:avLst/>
-          </a:prstGeom>
-          <a:noFill/>
-          <a:ln/>
-        </p:spPr>
-        <p:txBody>
-          <a:bodyPr wrap="square" lIns="0" tIns="0" rIns="0" bIns="0" rtlCol="0" anchor="ctr"/>
-          <a:lstStyle/>
-          <a:p>
-            <a:pPr algn="ctr" indent="0" marL="0">
-              <a:buNone/>
-            </a:pPr>
-            <a:r>
-              <a:rPr lang="en-US" sz="1100" b="1" dirty="0">
-                <a:solidFill>
-                  <a:srgbClr val="959595"/>
-                </a:solidFill>
-                <a:latin typeface="Pretendard" pitchFamily="34" charset="0"/>
-                <a:ea typeface="Pretendard" pitchFamily="34" charset="-122"/>
-                <a:cs typeface="Pretendard" pitchFamily="34" charset="-120"/>
-              </a:rPr>
-              <a:t>[ 영상 04 ]</a:t>
-            </a:r>
-            <a:endParaRPr lang="en-US" sz="1100" dirty="0"/>
-          </a:p>
-        </p:txBody>
-      </p:sp>
-      <p:sp>
-        <p:nvSpPr>
-          <p:cNvPr id="13" name="Shape 11"/>
-          <p:cNvSpPr/>
-          <p:nvPr/>
-        </p:nvSpPr>
-        <p:spPr>
-          <a:xfrm>
-            <a:off x="658368" y="4617720"/>
+      </p:pic>
+      <p:sp>
+        <p:nvSpPr>
+          <p:cNvPr id="12" name="Text 6"/>
+          <p:cNvSpPr/>
+          <p:nvPr/>
+        </p:nvSpPr>
+        <p:spPr>
+          <a:xfrm>
+            <a:off x="8992895" y="3596121"/>
+            <a:ext cx="2540432" cy="256032"/>
+          </a:xfrm>
+          <a:prstGeom prst="rect">
+            <a:avLst/>
+          </a:prstGeom>
+          <a:noFill/>
+          <a:ln/>
+        </p:spPr>
+        <p:txBody>
+          <a:bodyPr wrap="square" lIns="0" tIns="0" rIns="0" bIns="0" rtlCol="0" anchor="t"/>
+          <a:lstStyle/>
+          <a:p>
+            <a:pPr indent="0" marL="0">
+              <a:lnSpc>
+                <a:spcPts val="1100"/>
+              </a:lnSpc>
+              <a:buNone/>
+            </a:pPr>
+            <a:r>
+              <a:rPr lang="en-US" sz="850" dirty="0">
+                <a:solidFill>
+                  <a:srgbClr val="707070"/>
+                </a:solidFill>
+                <a:latin typeface="Pretendard" pitchFamily="34" charset="0"/>
+                <a:ea typeface="Pretendard" pitchFamily="34" charset="-122"/>
+                <a:cs typeface="Pretendard" pitchFamily="34" charset="-120"/>
+              </a:rPr>
+              <a:t>휘카페 ‘정수기에서 커피가 나와’편</a:t>
+            </a:r>
+            <a:endParaRPr lang="en-US" sz="850" dirty="0"/>
+          </a:p>
+        </p:txBody>
+      </p:sp>
+      <p:sp>
+        <p:nvSpPr>
+          <p:cNvPr id="13" name="Shape 7"/>
+          <p:cNvSpPr/>
+          <p:nvPr/>
+        </p:nvSpPr>
+        <p:spPr>
+          <a:xfrm>
+            <a:off x="658368" y="4263633"/>
             <a:ext cx="10874959" cy="914400"/>
           </a:xfrm>
           <a:prstGeom prst="roundRect">
@@ -27780,23 +27581,23 @@
       </p:sp>
       <p:sp>
         <p:nvSpPr>
-          <p:cNvPr id="14" name="Text 12"/>
-          <p:cNvSpPr/>
-          <p:nvPr/>
-        </p:nvSpPr>
-        <p:spPr>
-          <a:xfrm>
-            <a:off x="886968" y="4764024"/>
-            <a:ext cx="10417759" cy="658368"/>
-          </a:xfrm>
-          <a:prstGeom prst="rect">
-            <a:avLst/>
-          </a:prstGeom>
-          <a:noFill/>
-          <a:ln/>
-        </p:spPr>
-        <p:txBody>
-          <a:bodyPr wrap="square" lIns="0" tIns="0" rIns="0" bIns="0" rtlCol="0" anchor="ctr"/>
+          <p:cNvPr id="14" name="Text 8"/>
+          <p:cNvSpPr/>
+          <p:nvPr/>
+        </p:nvSpPr>
+        <p:spPr>
+          <a:xfrm>
+            <a:off x="932688" y="4446513"/>
+            <a:ext cx="10326319" cy="566928"/>
+          </a:xfrm>
+          <a:prstGeom prst="rect">
+            <a:avLst/>
+          </a:prstGeom>
+          <a:noFill/>
+          <a:ln/>
+        </p:spPr>
+        <p:txBody>
+          <a:bodyPr wrap="square" lIns="0" tIns="0" rIns="0" bIns="0" rtlCol="0" anchor="t"/>
           <a:lstStyle/>
           <a:p>
             <a:pPr indent="0" marL="0">
@@ -27806,7 +27607,7 @@
               <a:buNone/>
             </a:pPr>
             <a:r>
-              <a:rPr lang="en-US" sz="1300" dirty="0">
+              <a:rPr lang="en-US" sz="1250" dirty="0">
                 <a:solidFill>
                   <a:srgbClr val="191919"/>
                 </a:solidFill>
@@ -27816,13 +27617,52 @@
               </a:rPr>
               <a:t>청호나이스는 숏폼과 AI 콘텐츠를 적극적으로 만들고 있다. 문제는 형식이 아니라 축적이다. 콘텐츠마다 말이 달라, 2030이 제품을 선택해야 할 이유가 하나의 브랜드 인상으로 남지 않는다.</a:t>
             </a:r>
-            <a:endParaRPr lang="en-US" sz="1300" dirty="0"/>
-          </a:p>
-        </p:txBody>
-      </p:sp>
-      <p:sp>
-        <p:nvSpPr>
-          <p:cNvPr id="15" name="Text 13"/>
+            <a:endParaRPr lang="en-US" sz="1250" dirty="0"/>
+          </a:p>
+        </p:txBody>
+      </p:sp>
+      <p:sp>
+        <p:nvSpPr>
+          <p:cNvPr id="15" name="Text 9"/>
+          <p:cNvSpPr/>
+          <p:nvPr/>
+        </p:nvSpPr>
+        <p:spPr>
+          <a:xfrm>
+            <a:off x="658368" y="5324337"/>
+            <a:ext cx="10874959" cy="219456"/>
+          </a:xfrm>
+          <a:prstGeom prst="rect">
+            <a:avLst/>
+          </a:prstGeom>
+          <a:noFill/>
+          <a:ln/>
+        </p:spPr>
+        <p:txBody>
+          <a:bodyPr wrap="square" lIns="0" tIns="0" rIns="0" bIns="0" rtlCol="0" anchor="t"/>
+          <a:lstStyle/>
+          <a:p>
+            <a:pPr indent="0" marL="0">
+              <a:buNone/>
+            </a:pPr>
+            <a:r>
+              <a:rPr lang="en-US" sz="800" dirty="0">
+                <a:solidFill>
+                  <a:srgbClr val="959595"/>
+                </a:solidFill>
+                <a:latin typeface="Pretendard" pitchFamily="34" charset="0"/>
+                <a:ea typeface="Pretendard" pitchFamily="34" charset="-122"/>
+                <a:cs typeface="Pretendard" pitchFamily="34" charset="-120"/>
+              </a:rPr>
+              <a:t>출처: 청호나이스 공식 유튜브.</a:t>
+            </a:r>
+            <a:endParaRPr lang="en-US" sz="800" dirty="0"/>
+          </a:p>
+        </p:txBody>
+      </p:sp>
+      <p:sp>
+        <p:nvSpPr>
+          <p:cNvPr id="16" name="Text 10"/>
           <p:cNvSpPr/>
           <p:nvPr/>
         </p:nvSpPr>
@@ -27861,7 +27701,7 @@
       </p:sp>
       <p:sp>
         <p:nvSpPr>
-          <p:cNvPr id="16" name="Text 14"/>
+          <p:cNvPr id="17" name="Text 11"/>
           <p:cNvSpPr/>
           <p:nvPr/>
         </p:nvSpPr>

--- a/청호나이스-브랜드전략-제안.pptx
+++ b/청호나이스-브랜드전략-제안.pptx
@@ -3733,11 +3733,8 @@
                 <a:ea typeface="Pretendard" pitchFamily="34" charset="-122"/>
                 <a:cs typeface="Pretendard" pitchFamily="34" charset="-120"/>
               </a:rPr>
-              <a:t>우리가 볼 사람은 ‘2030’이 아니라,</a:t>
-            </a:r>
-            <a:endParaRPr lang="en-US" sz="1700" dirty="0"/>
-          </a:p>
-          <a:p>
+              <a:t>우리의 타깃은 </a:t>
+            </a:r>
             <a:pPr indent="0" marL="0">
               <a:lnSpc>
                 <a:spcPts val="2300"/>
@@ -3753,7 +3750,7 @@
                 <a:ea typeface="Pretendard" pitchFamily="34" charset="-122"/>
                 <a:cs typeface="Pretendard" pitchFamily="34" charset="-120"/>
               </a:rPr>
-              <a:t>반복 소비가 큰 독립 생활자</a:t>
+              <a:t>반복 소비가 큰 독립 ‘2030’</a:t>
             </a:r>
             <a:pPr indent="0" marL="0">
               <a:lnSpc>
@@ -3770,7 +3767,7 @@
                 <a:ea typeface="Pretendard" pitchFamily="34" charset="-122"/>
                 <a:cs typeface="Pretendard" pitchFamily="34" charset="-120"/>
               </a:rPr>
-              <a:t>다.</a:t>
+              <a:t> 생활자</a:t>
             </a:r>
             <a:endParaRPr lang="en-US" sz="1700" dirty="0"/>
           </a:p>
@@ -4438,7 +4435,7 @@
                 <a:ea typeface="Pretendard" pitchFamily="34" charset="-122"/>
                 <a:cs typeface="Pretendard" pitchFamily="34" charset="-120"/>
               </a:rPr>
-              <a:t>생산성 · 2030</a:t>
+              <a:t>독립 루틴러 · 2030</a:t>
             </a:r>
             <a:endParaRPr lang="en-US" sz="2000" dirty="0"/>
           </a:p>
@@ -4893,7 +4890,7 @@
         <p:spPr>
           <a:xfrm>
             <a:off x="658368" y="1024128"/>
-            <a:ext cx="10874959" cy="822960"/>
+            <a:ext cx="10874959" cy="731520"/>
           </a:xfrm>
           <a:prstGeom prst="rect">
             <a:avLst/>
@@ -4907,12 +4904,12 @@
           <a:p>
             <a:pPr indent="0" marL="0">
               <a:lnSpc>
-                <a:spcPts val="3000"/>
+                <a:spcPts val="3328"/>
               </a:lnSpc>
               <a:buNone/>
             </a:pPr>
             <a:r>
-              <a:rPr lang="en-US" sz="2300" b="1" dirty="0">
+              <a:rPr lang="en-US" sz="2600" b="1" dirty="0">
                 <a:solidFill>
                   <a:srgbClr val="191919"/>
                 </a:solidFill>
@@ -4920,19 +4917,16 @@
                 <a:ea typeface="Pretendard" pitchFamily="34" charset="-122"/>
                 <a:cs typeface="Pretendard" pitchFamily="34" charset="-120"/>
               </a:rPr>
-              <a:t>커피를 마시는 데보다,</a:t>
-            </a:r>
-            <a:endParaRPr lang="en-US" sz="2300" dirty="0"/>
-          </a:p>
-          <a:p>
+              <a:t>마실 때마다 </a:t>
+            </a:r>
             <a:pPr indent="0" marL="0">
               <a:lnSpc>
-                <a:spcPts val="3000"/>
+                <a:spcPts val="3328"/>
               </a:lnSpc>
               <a:buNone/>
             </a:pPr>
             <a:r>
-              <a:rPr lang="en-US" sz="2300" b="1" dirty="0">
+              <a:rPr lang="en-US" sz="2600" b="1" dirty="0">
                 <a:solidFill>
                   <a:srgbClr val="0057FF"/>
                 </a:solidFill>
@@ -4940,16 +4934,16 @@
                 <a:ea typeface="Pretendard" pitchFamily="34" charset="-122"/>
                 <a:cs typeface="Pretendard" pitchFamily="34" charset="-120"/>
               </a:rPr>
-              <a:t>준비하는 데</a:t>
+              <a:t>고민하지 않아도</a:t>
             </a:r>
             <a:pPr indent="0" marL="0">
               <a:lnSpc>
-                <a:spcPts val="3000"/>
+                <a:spcPts val="3328"/>
               </a:lnSpc>
               <a:buNone/>
             </a:pPr>
             <a:r>
-              <a:rPr lang="en-US" sz="2300" b="1" dirty="0">
+              <a:rPr lang="en-US" sz="2600" b="1" dirty="0">
                 <a:solidFill>
                   <a:srgbClr val="191919"/>
                 </a:solidFill>
@@ -4957,30 +4951,224 @@
                 <a:ea typeface="Pretendard" pitchFamily="34" charset="-122"/>
                 <a:cs typeface="Pretendard" pitchFamily="34" charset="-120"/>
               </a:rPr>
-              <a:t> 더 많은 행동을 쓴다.</a:t>
-            </a:r>
-            <a:endParaRPr lang="en-US" sz="2300" dirty="0"/>
-          </a:p>
-        </p:txBody>
-      </p:sp>
-      <p:sp>
-        <p:nvSpPr>
-          <p:cNvPr id="5" name="Shape 3"/>
-          <p:cNvSpPr/>
-          <p:nvPr/>
-        </p:nvSpPr>
-        <p:spPr>
-          <a:xfrm>
-            <a:off x="658368" y="2514600"/>
-            <a:ext cx="10874959" cy="0"/>
-          </a:xfrm>
-          <a:prstGeom prst="line">
-            <a:avLst/>
-          </a:prstGeom>
-          <a:noFill/>
-          <a:ln w="25400">
+              <a:t> 된다는 것</a:t>
+            </a:r>
+            <a:endParaRPr lang="en-US" sz="2600" dirty="0"/>
+          </a:p>
+        </p:txBody>
+      </p:sp>
+      <p:pic>
+        <p:nvPicPr>
+          <p:cNvPr id="5" name="Image 0" descr="/home/user/CHAI-AI/assets/img/peng-home.jpg">    </p:cNvPr>
+          <p:cNvPicPr>
+            <a:picLocks noChangeAspect="1"/>
+          </p:cNvPicPr>
+          <p:nvPr/>
+        </p:nvPicPr>
+        <p:blipFill>
+          <a:blip r:embed="rId1"/>
+          <a:srcRect l="0" r="0" t="0" b="0"/>
+          <a:stretch/>
+        </p:blipFill>
+        <p:spPr>
+          <a:xfrm>
+            <a:off x="658368" y="2011680"/>
+            <a:ext cx="3337560" cy="2194560"/>
+          </a:xfrm>
+          <a:prstGeom prst="rect">
+            <a:avLst/>
+          </a:prstGeom>
+          <a:effectLst>
+            <a:outerShdw sx="100000" sy="100000" kx="0" ky="0" algn="bl" rotWithShape="0" blurRad="177800" dist="50800" dir="5400000">
+              <a:srgbClr val="191919">
+                <a:alpha val="22000"/>
+              </a:srgbClr>
+            </a:outerShdw>
+          </a:effectLst>
+        </p:spPr>
+      </p:pic>
+      <p:sp>
+        <p:nvSpPr>
+          <p:cNvPr id="6" name="Text 3"/>
+          <p:cNvSpPr/>
+          <p:nvPr/>
+        </p:nvSpPr>
+        <p:spPr>
+          <a:xfrm>
+            <a:off x="658368" y="4315968"/>
+            <a:ext cx="3337560" cy="548640"/>
+          </a:xfrm>
+          <a:prstGeom prst="rect">
+            <a:avLst/>
+          </a:prstGeom>
+          <a:noFill/>
+          <a:ln/>
+        </p:spPr>
+        <p:txBody>
+          <a:bodyPr wrap="square" lIns="0" tIns="0" rIns="0" bIns="0" rtlCol="0" anchor="t"/>
+          <a:lstStyle/>
+          <a:p>
+            <a:pPr indent="0" marL="0">
+              <a:lnSpc>
+                <a:spcPts val="1400"/>
+              </a:lnSpc>
+              <a:buNone/>
+            </a:pPr>
+            <a:r>
+              <a:rPr lang="en-US" sz="1050" dirty="0">
+                <a:solidFill>
+                  <a:srgbClr val="3C3C3C"/>
+                </a:solidFill>
+                <a:latin typeface="Pretendard" pitchFamily="34" charset="0"/>
+                <a:ea typeface="Pretendard" pitchFamily="34" charset="-122"/>
+                <a:cs typeface="Pretendard" pitchFamily="34" charset="-120"/>
+              </a:rPr>
+              <a:t>물과 커피는 하루에 여러 번 필요하다. 문제는 마시는 순간이 아니라 </a:t>
+            </a:r>
+            <a:pPr indent="0" marL="0">
+              <a:lnSpc>
+                <a:spcPts val="1400"/>
+              </a:lnSpc>
+              <a:buNone/>
+            </a:pPr>
+            <a:r>
+              <a:rPr lang="en-US" sz="1050" b="1" dirty="0">
+                <a:solidFill>
+                  <a:srgbClr val="191919"/>
+                </a:solidFill>
+                <a:latin typeface="Pretendard" pitchFamily="34" charset="0"/>
+                <a:ea typeface="Pretendard" pitchFamily="34" charset="-122"/>
+                <a:cs typeface="Pretendard" pitchFamily="34" charset="-120"/>
+              </a:rPr>
+              <a:t>그때마다 다시 정해야 하는 일</a:t>
+            </a:r>
+            <a:pPr indent="0" marL="0">
+              <a:lnSpc>
+                <a:spcPts val="1400"/>
+              </a:lnSpc>
+              <a:buNone/>
+            </a:pPr>
+            <a:r>
+              <a:rPr lang="en-US" sz="1050" dirty="0">
+                <a:solidFill>
+                  <a:srgbClr val="3C3C3C"/>
+                </a:solidFill>
+                <a:latin typeface="Pretendard" pitchFamily="34" charset="0"/>
+                <a:ea typeface="Pretendard" pitchFamily="34" charset="-122"/>
+                <a:cs typeface="Pretendard" pitchFamily="34" charset="-120"/>
+              </a:rPr>
+              <a:t>이다.</a:t>
+            </a:r>
+            <a:endParaRPr lang="en-US" sz="1050" dirty="0"/>
+          </a:p>
+        </p:txBody>
+      </p:sp>
+      <p:sp>
+        <p:nvSpPr>
+          <p:cNvPr id="7" name="Shape 4"/>
+          <p:cNvSpPr/>
+          <p:nvPr/>
+        </p:nvSpPr>
+        <p:spPr>
+          <a:xfrm>
+            <a:off x="4544568" y="1874520"/>
+            <a:ext cx="4333031" cy="658368"/>
+          </a:xfrm>
+          <a:prstGeom prst="roundRect">
+            <a:avLst>
+              <a:gd name="adj" fmla="val 19444"/>
+            </a:avLst>
+          </a:prstGeom>
+          <a:solidFill>
+            <a:srgbClr val="0057FF"/>
+          </a:solidFill>
+          <a:ln/>
+        </p:spPr>
+      </p:sp>
+      <p:sp>
+        <p:nvSpPr>
+          <p:cNvPr id="8" name="Text 5"/>
+          <p:cNvSpPr/>
+          <p:nvPr/>
+        </p:nvSpPr>
+        <p:spPr>
+          <a:xfrm>
+            <a:off x="4745736" y="1874520"/>
+            <a:ext cx="3930695" cy="658368"/>
+          </a:xfrm>
+          <a:prstGeom prst="rect">
+            <a:avLst/>
+          </a:prstGeom>
+          <a:noFill/>
+          <a:ln/>
+        </p:spPr>
+        <p:txBody>
+          <a:bodyPr wrap="square" lIns="0" tIns="0" rIns="0" bIns="0" rtlCol="0" anchor="ctr"/>
+          <a:lstStyle/>
+          <a:p>
+            <a:pPr indent="0" marL="0">
+              <a:lnSpc>
+                <a:spcPts val="1500"/>
+              </a:lnSpc>
+              <a:buNone/>
+            </a:pPr>
+            <a:r>
+              <a:rPr lang="en-US" sz="1150" b="1" dirty="0">
+                <a:solidFill>
+                  <a:srgbClr val="FFFFFF"/>
+                </a:solidFill>
+                <a:latin typeface="Pretendard" pitchFamily="34" charset="0"/>
+                <a:ea typeface="Pretendard" pitchFamily="34" charset="-122"/>
+                <a:cs typeface="Pretendard" pitchFamily="34" charset="-120"/>
+              </a:rPr>
+              <a:t>우리의 일상에서</a:t>
+            </a:r>
+            <a:endParaRPr lang="en-US" sz="1150" dirty="0"/>
+          </a:p>
+          <a:p>
+            <a:pPr indent="0" marL="0">
+              <a:lnSpc>
+                <a:spcPts val="1500"/>
+              </a:lnSpc>
+              <a:buNone/>
+            </a:pPr>
+            <a:r>
+              <a:rPr lang="en-US" sz="1150" b="1" dirty="0">
+                <a:solidFill>
+                  <a:srgbClr val="FFFFFF"/>
+                </a:solidFill>
+                <a:latin typeface="Pretendard" pitchFamily="34" charset="0"/>
+                <a:ea typeface="Pretendard" pitchFamily="34" charset="-122"/>
+                <a:cs typeface="Pretendard" pitchFamily="34" charset="-120"/>
+              </a:rPr>
+              <a:t>물과 커피를 필요로 하는 순간은?</a:t>
+            </a:r>
+            <a:endParaRPr lang="en-US" sz="1150" dirty="0"/>
+          </a:p>
+        </p:txBody>
+      </p:sp>
+      <p:sp>
+        <p:nvSpPr>
+          <p:cNvPr id="9" name="Shape 6"/>
+          <p:cNvSpPr/>
+          <p:nvPr/>
+        </p:nvSpPr>
+        <p:spPr>
+          <a:xfrm>
+            <a:off x="5802545" y="2770632"/>
+            <a:ext cx="5730783" cy="658368"/>
+          </a:xfrm>
+          <a:prstGeom prst="roundRect">
+            <a:avLst>
+              <a:gd name="adj" fmla="val 19444"/>
+            </a:avLst>
+          </a:prstGeom>
+          <a:solidFill>
+            <a:srgbClr val="F5F5F7"/>
+          </a:solidFill>
+          <a:ln w="12700">
             <a:solidFill>
-              <a:srgbClr val="0057FF"/>
+              <a:srgbClr val="E8E8E8"/>
             </a:solidFill>
             <a:prstDash val="solid"/>
           </a:ln>
@@ -4988,69 +5176,33 @@
       </p:sp>
       <p:sp>
         <p:nvSpPr>
-          <p:cNvPr id="6" name="Text 4"/>
-          <p:cNvSpPr/>
-          <p:nvPr/>
-        </p:nvSpPr>
-        <p:spPr>
-          <a:xfrm>
-            <a:off x="658368" y="2642616"/>
-            <a:ext cx="1812493" cy="201168"/>
-          </a:xfrm>
-          <a:prstGeom prst="rect">
-            <a:avLst/>
-          </a:prstGeom>
-          <a:noFill/>
-          <a:ln/>
-        </p:spPr>
-        <p:txBody>
-          <a:bodyPr wrap="square" lIns="0" tIns="0" rIns="0" bIns="0" rtlCol="0" anchor="t"/>
-          <a:lstStyle/>
-          <a:p>
-            <a:pPr algn="ctr" indent="0" marL="0">
-              <a:buNone/>
-            </a:pPr>
-            <a:r>
-              <a:rPr lang="en-US" sz="950" b="1" dirty="0">
-                <a:solidFill>
-                  <a:srgbClr val="959595"/>
-                </a:solidFill>
-                <a:latin typeface="Pretendard" pitchFamily="34" charset="0"/>
-                <a:ea typeface="Pretendard" pitchFamily="34" charset="-122"/>
-                <a:cs typeface="Pretendard" pitchFamily="34" charset="-120"/>
-              </a:rPr>
-              <a:t>기상</a:t>
-            </a:r>
-            <a:endParaRPr lang="en-US" sz="950" dirty="0"/>
-          </a:p>
-        </p:txBody>
-      </p:sp>
-      <p:sp>
-        <p:nvSpPr>
-          <p:cNvPr id="7" name="Text 5"/>
-          <p:cNvSpPr/>
-          <p:nvPr/>
-        </p:nvSpPr>
-        <p:spPr>
-          <a:xfrm>
-            <a:off x="658368" y="2843784"/>
-            <a:ext cx="1812493" cy="329184"/>
-          </a:xfrm>
-          <a:prstGeom prst="rect">
-            <a:avLst/>
-          </a:prstGeom>
-          <a:noFill/>
-          <a:ln/>
-        </p:spPr>
-        <p:txBody>
-          <a:bodyPr wrap="square" lIns="0" tIns="0" rIns="0" bIns="0" rtlCol="0" anchor="t"/>
-          <a:lstStyle/>
-          <a:p>
-            <a:pPr algn="ctr" indent="0" marL="0">
-              <a:buNone/>
-            </a:pPr>
-            <a:r>
-              <a:rPr lang="en-US" sz="1200" b="1" dirty="0">
+          <p:cNvPr id="10" name="Text 7"/>
+          <p:cNvSpPr/>
+          <p:nvPr/>
+        </p:nvSpPr>
+        <p:spPr>
+          <a:xfrm>
+            <a:off x="6003713" y="2770632"/>
+            <a:ext cx="5328447" cy="658368"/>
+          </a:xfrm>
+          <a:prstGeom prst="rect">
+            <a:avLst/>
+          </a:prstGeom>
+          <a:noFill/>
+          <a:ln/>
+        </p:spPr>
+        <p:txBody>
+          <a:bodyPr wrap="square" lIns="0" tIns="0" rIns="0" bIns="0" rtlCol="0" anchor="ctr"/>
+          <a:lstStyle/>
+          <a:p>
+            <a:pPr indent="0" marL="0">
+              <a:lnSpc>
+                <a:spcPts val="1500"/>
+              </a:lnSpc>
+              <a:buNone/>
+            </a:pPr>
+            <a:r>
+              <a:rPr lang="en-US" sz="1150" dirty="0">
                 <a:solidFill>
                   <a:srgbClr val="191919"/>
                 </a:solidFill>
@@ -5058,867 +5210,133 @@
                 <a:ea typeface="Pretendard" pitchFamily="34" charset="-122"/>
                 <a:cs typeface="Pretendard" pitchFamily="34" charset="-120"/>
               </a:rPr>
-              <a:t>물·영양제</a:t>
-            </a:r>
-            <a:endParaRPr lang="en-US" sz="1200" dirty="0"/>
-          </a:p>
-        </p:txBody>
-      </p:sp>
-      <p:sp>
-        <p:nvSpPr>
-          <p:cNvPr id="8" name="Shape 6"/>
-          <p:cNvSpPr/>
-          <p:nvPr/>
-        </p:nvSpPr>
-        <p:spPr>
-          <a:xfrm>
-            <a:off x="1491463" y="3227832"/>
-            <a:ext cx="91440" cy="91440"/>
-          </a:xfrm>
-          <a:prstGeom prst="ellipse">
-            <a:avLst/>
-          </a:prstGeom>
-          <a:solidFill>
-            <a:srgbClr val="E5484D"/>
-          </a:solidFill>
-          <a:ln/>
-        </p:spPr>
-      </p:sp>
-      <p:sp>
-        <p:nvSpPr>
-          <p:cNvPr id="9" name="Text 7"/>
-          <p:cNvSpPr/>
-          <p:nvPr/>
-        </p:nvSpPr>
-        <p:spPr>
-          <a:xfrm>
-            <a:off x="2470861" y="2642616"/>
-            <a:ext cx="1812493" cy="201168"/>
-          </a:xfrm>
-          <a:prstGeom prst="rect">
-            <a:avLst/>
-          </a:prstGeom>
-          <a:noFill/>
-          <a:ln/>
-        </p:spPr>
-        <p:txBody>
-          <a:bodyPr wrap="square" lIns="0" tIns="0" rIns="0" bIns="0" rtlCol="0" anchor="t"/>
-          <a:lstStyle/>
-          <a:p>
-            <a:pPr algn="ctr" indent="0" marL="0">
-              <a:buNone/>
-            </a:pPr>
-            <a:r>
-              <a:rPr lang="en-US" sz="950" b="1" dirty="0">
-                <a:solidFill>
-                  <a:srgbClr val="959595"/>
-                </a:solidFill>
-                <a:latin typeface="Pretendard" pitchFamily="34" charset="0"/>
-                <a:ea typeface="Pretendard" pitchFamily="34" charset="-122"/>
-                <a:cs typeface="Pretendard" pitchFamily="34" charset="-120"/>
-              </a:rPr>
-              <a:t>출근길</a:t>
-            </a:r>
-            <a:endParaRPr lang="en-US" sz="950" dirty="0"/>
-          </a:p>
-        </p:txBody>
-      </p:sp>
-      <p:sp>
-        <p:nvSpPr>
-          <p:cNvPr id="10" name="Text 8"/>
-          <p:cNvSpPr/>
-          <p:nvPr/>
-        </p:nvSpPr>
-        <p:spPr>
-          <a:xfrm>
-            <a:off x="2470861" y="2843784"/>
-            <a:ext cx="1812493" cy="329184"/>
-          </a:xfrm>
-          <a:prstGeom prst="rect">
-            <a:avLst/>
-          </a:prstGeom>
-          <a:noFill/>
-          <a:ln/>
-        </p:spPr>
-        <p:txBody>
-          <a:bodyPr wrap="square" lIns="0" tIns="0" rIns="0" bIns="0" rtlCol="0" anchor="t"/>
-          <a:lstStyle/>
-          <a:p>
-            <a:pPr algn="ctr" indent="0" marL="0">
-              <a:buNone/>
-            </a:pPr>
-            <a:r>
-              <a:rPr lang="en-US" sz="1200" b="1" dirty="0">
-                <a:solidFill>
-                  <a:srgbClr val="191919"/>
-                </a:solidFill>
-                <a:latin typeface="Pretendard" pitchFamily="34" charset="0"/>
-                <a:ea typeface="Pretendard" pitchFamily="34" charset="-122"/>
-                <a:cs typeface="Pretendard" pitchFamily="34" charset="-120"/>
-              </a:rPr>
-              <a:t>테이크아웃 커피</a:t>
-            </a:r>
-            <a:endParaRPr lang="en-US" sz="1200" dirty="0"/>
-          </a:p>
-        </p:txBody>
-      </p:sp>
-      <p:sp>
-        <p:nvSpPr>
-          <p:cNvPr id="11" name="Shape 9"/>
-          <p:cNvSpPr/>
-          <p:nvPr/>
-        </p:nvSpPr>
-        <p:spPr>
-          <a:xfrm>
-            <a:off x="3303956" y="3227832"/>
-            <a:ext cx="91440" cy="91440"/>
-          </a:xfrm>
-          <a:prstGeom prst="ellipse">
-            <a:avLst/>
-          </a:prstGeom>
-          <a:solidFill>
-            <a:srgbClr val="E5484D"/>
-          </a:solidFill>
-          <a:ln/>
-        </p:spPr>
-      </p:sp>
-      <p:sp>
-        <p:nvSpPr>
-          <p:cNvPr id="12" name="Text 10"/>
-          <p:cNvSpPr/>
-          <p:nvPr/>
-        </p:nvSpPr>
-        <p:spPr>
-          <a:xfrm>
-            <a:off x="4283354" y="2642616"/>
-            <a:ext cx="1812493" cy="201168"/>
-          </a:xfrm>
-          <a:prstGeom prst="rect">
-            <a:avLst/>
-          </a:prstGeom>
-          <a:noFill/>
-          <a:ln/>
-        </p:spPr>
-        <p:txBody>
-          <a:bodyPr wrap="square" lIns="0" tIns="0" rIns="0" bIns="0" rtlCol="0" anchor="t"/>
-          <a:lstStyle/>
-          <a:p>
-            <a:pPr algn="ctr" indent="0" marL="0">
-              <a:buNone/>
-            </a:pPr>
-            <a:r>
-              <a:rPr lang="en-US" sz="950" b="1" dirty="0">
-                <a:solidFill>
-                  <a:srgbClr val="959595"/>
-                </a:solidFill>
-                <a:latin typeface="Pretendard" pitchFamily="34" charset="0"/>
-                <a:ea typeface="Pretendard" pitchFamily="34" charset="-122"/>
-                <a:cs typeface="Pretendard" pitchFamily="34" charset="-120"/>
-              </a:rPr>
-              <a:t>오전</a:t>
-            </a:r>
-            <a:endParaRPr lang="en-US" sz="950" dirty="0"/>
-          </a:p>
-        </p:txBody>
-      </p:sp>
-      <p:sp>
-        <p:nvSpPr>
-          <p:cNvPr id="13" name="Text 11"/>
-          <p:cNvSpPr/>
-          <p:nvPr/>
-        </p:nvSpPr>
-        <p:spPr>
-          <a:xfrm>
-            <a:off x="4283354" y="2843784"/>
-            <a:ext cx="1812493" cy="329184"/>
-          </a:xfrm>
-          <a:prstGeom prst="rect">
-            <a:avLst/>
-          </a:prstGeom>
-          <a:noFill/>
-          <a:ln/>
-        </p:spPr>
-        <p:txBody>
-          <a:bodyPr wrap="square" lIns="0" tIns="0" rIns="0" bIns="0" rtlCol="0" anchor="t"/>
-          <a:lstStyle/>
-          <a:p>
-            <a:pPr algn="ctr" indent="0" marL="0">
-              <a:buNone/>
-            </a:pPr>
-            <a:r>
-              <a:rPr lang="en-US" sz="1200" b="1" dirty="0">
-                <a:solidFill>
-                  <a:srgbClr val="191919"/>
-                </a:solidFill>
-                <a:latin typeface="Pretendard" pitchFamily="34" charset="0"/>
-                <a:ea typeface="Pretendard" pitchFamily="34" charset="-122"/>
-                <a:cs typeface="Pretendard" pitchFamily="34" charset="-120"/>
-              </a:rPr>
-              <a:t>업무 중 물</a:t>
-            </a:r>
-            <a:endParaRPr lang="en-US" sz="1200" dirty="0"/>
-          </a:p>
-        </p:txBody>
-      </p:sp>
-      <p:sp>
-        <p:nvSpPr>
-          <p:cNvPr id="14" name="Text 12"/>
-          <p:cNvSpPr/>
-          <p:nvPr/>
-        </p:nvSpPr>
-        <p:spPr>
-          <a:xfrm>
-            <a:off x="6095848" y="2642616"/>
-            <a:ext cx="1812493" cy="201168"/>
-          </a:xfrm>
-          <a:prstGeom prst="rect">
-            <a:avLst/>
-          </a:prstGeom>
-          <a:noFill/>
-          <a:ln/>
-        </p:spPr>
-        <p:txBody>
-          <a:bodyPr wrap="square" lIns="0" tIns="0" rIns="0" bIns="0" rtlCol="0" anchor="t"/>
-          <a:lstStyle/>
-          <a:p>
-            <a:pPr algn="ctr" indent="0" marL="0">
-              <a:buNone/>
-            </a:pPr>
-            <a:r>
-              <a:rPr lang="en-US" sz="950" b="1" dirty="0">
-                <a:solidFill>
-                  <a:srgbClr val="959595"/>
-                </a:solidFill>
-                <a:latin typeface="Pretendard" pitchFamily="34" charset="0"/>
-                <a:ea typeface="Pretendard" pitchFamily="34" charset="-122"/>
-                <a:cs typeface="Pretendard" pitchFamily="34" charset="-120"/>
-              </a:rPr>
-              <a:t>오후</a:t>
-            </a:r>
-            <a:endParaRPr lang="en-US" sz="950" dirty="0"/>
-          </a:p>
-        </p:txBody>
-      </p:sp>
-      <p:sp>
-        <p:nvSpPr>
-          <p:cNvPr id="15" name="Text 13"/>
-          <p:cNvSpPr/>
-          <p:nvPr/>
-        </p:nvSpPr>
-        <p:spPr>
-          <a:xfrm>
-            <a:off x="6095848" y="2843784"/>
-            <a:ext cx="1812493" cy="329184"/>
-          </a:xfrm>
-          <a:prstGeom prst="rect">
-            <a:avLst/>
-          </a:prstGeom>
-          <a:noFill/>
-          <a:ln/>
-        </p:spPr>
-        <p:txBody>
-          <a:bodyPr wrap="square" lIns="0" tIns="0" rIns="0" bIns="0" rtlCol="0" anchor="t"/>
-          <a:lstStyle/>
-          <a:p>
-            <a:pPr algn="ctr" indent="0" marL="0">
-              <a:buNone/>
-            </a:pPr>
-            <a:r>
-              <a:rPr lang="en-US" sz="1200" b="1" dirty="0">
-                <a:solidFill>
-                  <a:srgbClr val="191919"/>
-                </a:solidFill>
-                <a:latin typeface="Pretendard" pitchFamily="34" charset="0"/>
-                <a:ea typeface="Pretendard" pitchFamily="34" charset="-122"/>
-                <a:cs typeface="Pretendard" pitchFamily="34" charset="-120"/>
-              </a:rPr>
-              <a:t>아이스커피</a:t>
-            </a:r>
-            <a:endParaRPr lang="en-US" sz="1200" dirty="0"/>
-          </a:p>
-        </p:txBody>
-      </p:sp>
-      <p:sp>
-        <p:nvSpPr>
-          <p:cNvPr id="16" name="Shape 14"/>
-          <p:cNvSpPr/>
-          <p:nvPr/>
-        </p:nvSpPr>
-        <p:spPr>
-          <a:xfrm>
-            <a:off x="6855790" y="3227832"/>
-            <a:ext cx="91440" cy="91440"/>
-          </a:xfrm>
-          <a:prstGeom prst="ellipse">
-            <a:avLst/>
-          </a:prstGeom>
-          <a:solidFill>
-            <a:srgbClr val="E5484D"/>
-          </a:solidFill>
-          <a:ln/>
-        </p:spPr>
-      </p:sp>
-      <p:sp>
-        <p:nvSpPr>
-          <p:cNvPr id="17" name="Shape 15"/>
-          <p:cNvSpPr/>
-          <p:nvPr/>
-        </p:nvSpPr>
-        <p:spPr>
-          <a:xfrm>
-            <a:off x="7002094" y="3227832"/>
-            <a:ext cx="91440" cy="91440"/>
-          </a:xfrm>
-          <a:prstGeom prst="ellipse">
-            <a:avLst/>
-          </a:prstGeom>
-          <a:solidFill>
-            <a:srgbClr val="E5484D"/>
-          </a:solidFill>
-          <a:ln/>
-        </p:spPr>
-      </p:sp>
-      <p:sp>
-        <p:nvSpPr>
-          <p:cNvPr id="18" name="Text 16"/>
-          <p:cNvSpPr/>
-          <p:nvPr/>
-        </p:nvSpPr>
-        <p:spPr>
-          <a:xfrm>
-            <a:off x="7908341" y="2642616"/>
-            <a:ext cx="1812493" cy="201168"/>
-          </a:xfrm>
-          <a:prstGeom prst="rect">
-            <a:avLst/>
-          </a:prstGeom>
-          <a:noFill/>
-          <a:ln/>
-        </p:spPr>
-        <p:txBody>
-          <a:bodyPr wrap="square" lIns="0" tIns="0" rIns="0" bIns="0" rtlCol="0" anchor="t"/>
-          <a:lstStyle/>
-          <a:p>
-            <a:pPr algn="ctr" indent="0" marL="0">
-              <a:buNone/>
-            </a:pPr>
-            <a:r>
-              <a:rPr lang="en-US" sz="950" b="1" dirty="0">
-                <a:solidFill>
-                  <a:srgbClr val="959595"/>
-                </a:solidFill>
-                <a:latin typeface="Pretendard" pitchFamily="34" charset="0"/>
-                <a:ea typeface="Pretendard" pitchFamily="34" charset="-122"/>
-                <a:cs typeface="Pretendard" pitchFamily="34" charset="-120"/>
-              </a:rPr>
-              <a:t>저녁</a:t>
-            </a:r>
-            <a:endParaRPr lang="en-US" sz="950" dirty="0"/>
-          </a:p>
-        </p:txBody>
-      </p:sp>
-      <p:sp>
-        <p:nvSpPr>
-          <p:cNvPr id="19" name="Text 17"/>
-          <p:cNvSpPr/>
-          <p:nvPr/>
-        </p:nvSpPr>
-        <p:spPr>
-          <a:xfrm>
-            <a:off x="7908341" y="2843784"/>
-            <a:ext cx="1812493" cy="329184"/>
-          </a:xfrm>
-          <a:prstGeom prst="rect">
-            <a:avLst/>
-          </a:prstGeom>
-          <a:noFill/>
-          <a:ln/>
-        </p:spPr>
-        <p:txBody>
-          <a:bodyPr wrap="square" lIns="0" tIns="0" rIns="0" bIns="0" rtlCol="0" anchor="t"/>
-          <a:lstStyle/>
-          <a:p>
-            <a:pPr algn="ctr" indent="0" marL="0">
-              <a:buNone/>
-            </a:pPr>
-            <a:r>
-              <a:rPr lang="en-US" sz="1200" b="1" dirty="0">
-                <a:solidFill>
-                  <a:srgbClr val="191919"/>
-                </a:solidFill>
-                <a:latin typeface="Pretendard" pitchFamily="34" charset="0"/>
-                <a:ea typeface="Pretendard" pitchFamily="34" charset="-122"/>
-                <a:cs typeface="Pretendard" pitchFamily="34" charset="-120"/>
-              </a:rPr>
-              <a:t>운동 후 냉수</a:t>
-            </a:r>
-            <a:endParaRPr lang="en-US" sz="1200" dirty="0"/>
-          </a:p>
-        </p:txBody>
-      </p:sp>
-      <p:sp>
-        <p:nvSpPr>
-          <p:cNvPr id="20" name="Shape 18"/>
-          <p:cNvSpPr/>
-          <p:nvPr/>
-        </p:nvSpPr>
-        <p:spPr>
-          <a:xfrm>
-            <a:off x="8741435" y="3227832"/>
-            <a:ext cx="91440" cy="91440"/>
-          </a:xfrm>
-          <a:prstGeom prst="ellipse">
-            <a:avLst/>
-          </a:prstGeom>
-          <a:solidFill>
-            <a:srgbClr val="E5484D"/>
-          </a:solidFill>
-          <a:ln/>
-        </p:spPr>
-      </p:sp>
-      <p:sp>
-        <p:nvSpPr>
-          <p:cNvPr id="21" name="Text 19"/>
-          <p:cNvSpPr/>
-          <p:nvPr/>
-        </p:nvSpPr>
-        <p:spPr>
-          <a:xfrm>
-            <a:off x="9720834" y="2642616"/>
-            <a:ext cx="1812493" cy="201168"/>
-          </a:xfrm>
-          <a:prstGeom prst="rect">
-            <a:avLst/>
-          </a:prstGeom>
-          <a:noFill/>
-          <a:ln/>
-        </p:spPr>
-        <p:txBody>
-          <a:bodyPr wrap="square" lIns="0" tIns="0" rIns="0" bIns="0" rtlCol="0" anchor="t"/>
-          <a:lstStyle/>
-          <a:p>
-            <a:pPr algn="ctr" indent="0" marL="0">
-              <a:buNone/>
-            </a:pPr>
-            <a:r>
-              <a:rPr lang="en-US" sz="950" b="1" dirty="0">
-                <a:solidFill>
-                  <a:srgbClr val="959595"/>
-                </a:solidFill>
-                <a:latin typeface="Pretendard" pitchFamily="34" charset="0"/>
-                <a:ea typeface="Pretendard" pitchFamily="34" charset="-122"/>
-                <a:cs typeface="Pretendard" pitchFamily="34" charset="-120"/>
-              </a:rPr>
-              <a:t>주말</a:t>
-            </a:r>
-            <a:endParaRPr lang="en-US" sz="950" dirty="0"/>
-          </a:p>
-        </p:txBody>
-      </p:sp>
-      <p:sp>
-        <p:nvSpPr>
-          <p:cNvPr id="22" name="Text 20"/>
-          <p:cNvSpPr/>
-          <p:nvPr/>
-        </p:nvSpPr>
-        <p:spPr>
-          <a:xfrm>
-            <a:off x="9720834" y="2843784"/>
-            <a:ext cx="1812493" cy="329184"/>
-          </a:xfrm>
-          <a:prstGeom prst="rect">
-            <a:avLst/>
-          </a:prstGeom>
-          <a:noFill/>
-          <a:ln/>
-        </p:spPr>
-        <p:txBody>
-          <a:bodyPr wrap="square" lIns="0" tIns="0" rIns="0" bIns="0" rtlCol="0" anchor="t"/>
-          <a:lstStyle/>
-          <a:p>
-            <a:pPr algn="ctr" indent="0" marL="0">
-              <a:buNone/>
-            </a:pPr>
-            <a:r>
-              <a:rPr lang="en-US" sz="1200" b="1" dirty="0">
-                <a:solidFill>
-                  <a:srgbClr val="191919"/>
-                </a:solidFill>
-                <a:latin typeface="Pretendard" pitchFamily="34" charset="0"/>
-                <a:ea typeface="Pretendard" pitchFamily="34" charset="-122"/>
-                <a:cs typeface="Pretendard" pitchFamily="34" charset="-120"/>
-              </a:rPr>
-              <a:t>생수 주문·재활용</a:t>
-            </a:r>
-            <a:endParaRPr lang="en-US" sz="1200" dirty="0"/>
-          </a:p>
-        </p:txBody>
-      </p:sp>
-      <p:sp>
-        <p:nvSpPr>
-          <p:cNvPr id="23" name="Shape 21"/>
-          <p:cNvSpPr/>
-          <p:nvPr/>
-        </p:nvSpPr>
-        <p:spPr>
-          <a:xfrm>
-            <a:off x="10480777" y="3227832"/>
-            <a:ext cx="91440" cy="91440"/>
-          </a:xfrm>
-          <a:prstGeom prst="ellipse">
-            <a:avLst/>
-          </a:prstGeom>
-          <a:solidFill>
-            <a:srgbClr val="E5484D"/>
-          </a:solidFill>
-          <a:ln/>
-        </p:spPr>
-      </p:sp>
-      <p:sp>
-        <p:nvSpPr>
-          <p:cNvPr id="24" name="Shape 22"/>
-          <p:cNvSpPr/>
-          <p:nvPr/>
-        </p:nvSpPr>
-        <p:spPr>
-          <a:xfrm>
-            <a:off x="10627081" y="3227832"/>
-            <a:ext cx="91440" cy="91440"/>
-          </a:xfrm>
-          <a:prstGeom prst="ellipse">
-            <a:avLst/>
-          </a:prstGeom>
-          <a:solidFill>
-            <a:srgbClr val="E5484D"/>
-          </a:solidFill>
-          <a:ln/>
-        </p:spPr>
-      </p:sp>
-      <p:sp>
-        <p:nvSpPr>
-          <p:cNvPr id="25" name="Text 23"/>
-          <p:cNvSpPr/>
-          <p:nvPr/>
-        </p:nvSpPr>
-        <p:spPr>
-          <a:xfrm>
-            <a:off x="658368" y="4069080"/>
-            <a:ext cx="3657600" cy="237744"/>
-          </a:xfrm>
-          <a:prstGeom prst="rect">
-            <a:avLst/>
-          </a:prstGeom>
-          <a:noFill/>
-          <a:ln/>
-        </p:spPr>
-        <p:txBody>
-          <a:bodyPr wrap="square" lIns="0" tIns="0" rIns="0" bIns="0" rtlCol="0" anchor="t"/>
-          <a:lstStyle/>
-          <a:p>
-            <a:pPr indent="0" marL="0">
-              <a:buNone/>
-            </a:pPr>
-            <a:r>
-              <a:rPr lang="en-US" sz="1200" b="1" dirty="0">
-                <a:solidFill>
-                  <a:srgbClr val="191919"/>
-                </a:solidFill>
-                <a:latin typeface="Pretendard" pitchFamily="34" charset="0"/>
-                <a:ea typeface="Pretendard" pitchFamily="34" charset="-122"/>
-                <a:cs typeface="Pretendard" pitchFamily="34" charset="-120"/>
-              </a:rPr>
-              <a:t>준비 행동에서 반복되는 마찰</a:t>
-            </a:r>
-            <a:endParaRPr lang="en-US" sz="1200" dirty="0"/>
-          </a:p>
-        </p:txBody>
-      </p:sp>
-      <p:sp>
-        <p:nvSpPr>
-          <p:cNvPr id="26" name="Shape 24"/>
-          <p:cNvSpPr/>
-          <p:nvPr/>
-        </p:nvSpPr>
-        <p:spPr>
-          <a:xfrm>
-            <a:off x="3264408" y="4123944"/>
-            <a:ext cx="91440" cy="91440"/>
-          </a:xfrm>
-          <a:prstGeom prst="ellipse">
-            <a:avLst/>
-          </a:prstGeom>
-          <a:solidFill>
-            <a:srgbClr val="E5484D"/>
-          </a:solidFill>
-          <a:ln/>
-        </p:spPr>
-      </p:sp>
-      <p:sp>
-        <p:nvSpPr>
-          <p:cNvPr id="27" name="Text 25"/>
-          <p:cNvSpPr/>
-          <p:nvPr/>
-        </p:nvSpPr>
-        <p:spPr>
-          <a:xfrm>
-            <a:off x="658368" y="4453128"/>
-            <a:ext cx="3108960" cy="274320"/>
-          </a:xfrm>
-          <a:prstGeom prst="rect">
-            <a:avLst/>
-          </a:prstGeom>
-          <a:noFill/>
-          <a:ln/>
-        </p:spPr>
-        <p:txBody>
-          <a:bodyPr wrap="square" lIns="0" tIns="0" rIns="0" bIns="0" rtlCol="0" anchor="t"/>
-          <a:lstStyle/>
-          <a:p>
-            <a:pPr indent="0" marL="0">
-              <a:buNone/>
-            </a:pPr>
-            <a:r>
-              <a:rPr lang="en-US" sz="1300" dirty="0">
-                <a:solidFill>
-                  <a:srgbClr val="3C3C3C"/>
-                </a:solidFill>
-                <a:latin typeface="Pretendard" pitchFamily="34" charset="0"/>
-                <a:ea typeface="Pretendard" pitchFamily="34" charset="-122"/>
-                <a:cs typeface="Pretendard" pitchFamily="34" charset="-120"/>
-              </a:rPr>
-              <a:t>· 생수 주문·운반·보관</a:t>
-            </a:r>
-            <a:endParaRPr lang="en-US" sz="1300" dirty="0"/>
-          </a:p>
-        </p:txBody>
-      </p:sp>
-      <p:sp>
-        <p:nvSpPr>
-          <p:cNvPr id="28" name="Text 26"/>
-          <p:cNvSpPr/>
-          <p:nvPr/>
-        </p:nvSpPr>
-        <p:spPr>
-          <a:xfrm>
-            <a:off x="3767328" y="4453128"/>
-            <a:ext cx="3108960" cy="274320"/>
-          </a:xfrm>
-          <a:prstGeom prst="rect">
-            <a:avLst/>
-          </a:prstGeom>
-          <a:noFill/>
-          <a:ln/>
-        </p:spPr>
-        <p:txBody>
-          <a:bodyPr wrap="square" lIns="0" tIns="0" rIns="0" bIns="0" rtlCol="0" anchor="t"/>
-          <a:lstStyle/>
-          <a:p>
-            <a:pPr indent="0" marL="0">
-              <a:buNone/>
-            </a:pPr>
-            <a:r>
-              <a:rPr lang="en-US" sz="1300" dirty="0">
-                <a:solidFill>
-                  <a:srgbClr val="3C3C3C"/>
-                </a:solidFill>
-                <a:latin typeface="Pretendard" pitchFamily="34" charset="0"/>
-                <a:ea typeface="Pretendard" pitchFamily="34" charset="-122"/>
-                <a:cs typeface="Pretendard" pitchFamily="34" charset="-120"/>
-              </a:rPr>
-              <a:t>· 카페 방문</a:t>
-            </a:r>
-            <a:endParaRPr lang="en-US" sz="1300" dirty="0"/>
-          </a:p>
-        </p:txBody>
-      </p:sp>
-      <p:sp>
-        <p:nvSpPr>
-          <p:cNvPr id="29" name="Text 27"/>
-          <p:cNvSpPr/>
-          <p:nvPr/>
-        </p:nvSpPr>
-        <p:spPr>
-          <a:xfrm>
-            <a:off x="658368" y="4764024"/>
-            <a:ext cx="3108960" cy="274320"/>
-          </a:xfrm>
-          <a:prstGeom prst="rect">
-            <a:avLst/>
-          </a:prstGeom>
-          <a:noFill/>
-          <a:ln/>
-        </p:spPr>
-        <p:txBody>
-          <a:bodyPr wrap="square" lIns="0" tIns="0" rIns="0" bIns="0" rtlCol="0" anchor="t"/>
-          <a:lstStyle/>
-          <a:p>
-            <a:pPr indent="0" marL="0">
-              <a:buNone/>
-            </a:pPr>
-            <a:r>
-              <a:rPr lang="en-US" sz="1300" dirty="0">
-                <a:solidFill>
-                  <a:srgbClr val="3C3C3C"/>
-                </a:solidFill>
-                <a:latin typeface="Pretendard" pitchFamily="34" charset="0"/>
-                <a:ea typeface="Pretendard" pitchFamily="34" charset="-122"/>
-                <a:cs typeface="Pretendard" pitchFamily="34" charset="-120"/>
-              </a:rPr>
-              <a:t>· 얼음 트레이 관리</a:t>
-            </a:r>
-            <a:endParaRPr lang="en-US" sz="1300" dirty="0"/>
-          </a:p>
-        </p:txBody>
-      </p:sp>
-      <p:sp>
-        <p:nvSpPr>
-          <p:cNvPr id="30" name="Text 28"/>
-          <p:cNvSpPr/>
-          <p:nvPr/>
-        </p:nvSpPr>
-        <p:spPr>
-          <a:xfrm>
-            <a:off x="3767328" y="4764024"/>
-            <a:ext cx="3108960" cy="274320"/>
-          </a:xfrm>
-          <a:prstGeom prst="rect">
-            <a:avLst/>
-          </a:prstGeom>
-          <a:noFill/>
-          <a:ln/>
-        </p:spPr>
-        <p:txBody>
-          <a:bodyPr wrap="square" lIns="0" tIns="0" rIns="0" bIns="0" rtlCol="0" anchor="t"/>
-          <a:lstStyle/>
-          <a:p>
-            <a:pPr indent="0" marL="0">
-              <a:buNone/>
-            </a:pPr>
-            <a:r>
-              <a:rPr lang="en-US" sz="1300" dirty="0">
-                <a:solidFill>
-                  <a:srgbClr val="3C3C3C"/>
-                </a:solidFill>
-                <a:latin typeface="Pretendard" pitchFamily="34" charset="0"/>
-                <a:ea typeface="Pretendard" pitchFamily="34" charset="-122"/>
-                <a:cs typeface="Pretendard" pitchFamily="34" charset="-120"/>
-              </a:rPr>
-              <a:t>· 캡슐·머신 세척</a:t>
-            </a:r>
-            <a:endParaRPr lang="en-US" sz="1300" dirty="0"/>
-          </a:p>
-        </p:txBody>
-      </p:sp>
-      <p:sp>
-        <p:nvSpPr>
-          <p:cNvPr id="31" name="Text 29"/>
-          <p:cNvSpPr/>
-          <p:nvPr/>
-        </p:nvSpPr>
-        <p:spPr>
-          <a:xfrm>
-            <a:off x="658368" y="5074920"/>
-            <a:ext cx="3108960" cy="274320"/>
-          </a:xfrm>
-          <a:prstGeom prst="rect">
-            <a:avLst/>
-          </a:prstGeom>
-          <a:noFill/>
-          <a:ln/>
-        </p:spPr>
-        <p:txBody>
-          <a:bodyPr wrap="square" lIns="0" tIns="0" rIns="0" bIns="0" rtlCol="0" anchor="t"/>
-          <a:lstStyle/>
-          <a:p>
-            <a:pPr indent="0" marL="0">
-              <a:buNone/>
-            </a:pPr>
-            <a:r>
-              <a:rPr lang="en-US" sz="1300" dirty="0">
-                <a:solidFill>
-                  <a:srgbClr val="3C3C3C"/>
-                </a:solidFill>
-                <a:latin typeface="Pretendard" pitchFamily="34" charset="0"/>
-                <a:ea typeface="Pretendard" pitchFamily="34" charset="-122"/>
-                <a:cs typeface="Pretendard" pitchFamily="34" charset="-120"/>
-              </a:rPr>
-              <a:t>· 필터·위생 걱정</a:t>
-            </a:r>
-            <a:endParaRPr lang="en-US" sz="1300" dirty="0"/>
-          </a:p>
-        </p:txBody>
-      </p:sp>
-      <p:sp>
-        <p:nvSpPr>
-          <p:cNvPr id="32" name="Text 30"/>
-          <p:cNvSpPr/>
-          <p:nvPr/>
-        </p:nvSpPr>
-        <p:spPr>
-          <a:xfrm>
-            <a:off x="3767328" y="5074920"/>
-            <a:ext cx="3108960" cy="274320"/>
-          </a:xfrm>
-          <a:prstGeom prst="rect">
-            <a:avLst/>
-          </a:prstGeom>
-          <a:noFill/>
-          <a:ln/>
-        </p:spPr>
-        <p:txBody>
-          <a:bodyPr wrap="square" lIns="0" tIns="0" rIns="0" bIns="0" rtlCol="0" anchor="t"/>
-          <a:lstStyle/>
-          <a:p>
-            <a:pPr indent="0" marL="0">
-              <a:buNone/>
-            </a:pPr>
-            <a:r>
-              <a:rPr lang="en-US" sz="1300" dirty="0">
-                <a:solidFill>
-                  <a:srgbClr val="3C3C3C"/>
-                </a:solidFill>
-                <a:latin typeface="Pretendard" pitchFamily="34" charset="0"/>
-                <a:ea typeface="Pretendard" pitchFamily="34" charset="-122"/>
-                <a:cs typeface="Pretendard" pitchFamily="34" charset="-120"/>
-              </a:rPr>
-              <a:t>· 여러 기기의 공간 점유</a:t>
-            </a:r>
-            <a:endParaRPr lang="en-US" sz="1300" dirty="0"/>
-          </a:p>
-        </p:txBody>
-      </p:sp>
-      <p:sp>
-        <p:nvSpPr>
-          <p:cNvPr id="33" name="Shape 31"/>
-          <p:cNvSpPr/>
-          <p:nvPr/>
-        </p:nvSpPr>
-        <p:spPr>
-          <a:xfrm>
-            <a:off x="7059168" y="4069080"/>
-            <a:ext cx="4474159" cy="1325880"/>
+              <a:t>아침엔 물 한 잔, 출근길엔 테이크아웃 커피, 오후엔 아이스커피, 운동 후엔 냉수까지. 하루에도 여러 번 마주쳐요.</a:t>
+            </a:r>
+            <a:endParaRPr lang="en-US" sz="1150" dirty="0"/>
+          </a:p>
+        </p:txBody>
+      </p:sp>
+      <p:sp>
+        <p:nvSpPr>
+          <p:cNvPr id="11" name="Shape 8"/>
+          <p:cNvSpPr/>
+          <p:nvPr/>
+        </p:nvSpPr>
+        <p:spPr>
+          <a:xfrm>
+            <a:off x="4544568" y="3666744"/>
+            <a:ext cx="4333031" cy="658368"/>
           </a:xfrm>
           <a:prstGeom prst="roundRect">
             <a:avLst>
-              <a:gd name="adj" fmla="val 6207"/>
+              <a:gd name="adj" fmla="val 19444"/>
+            </a:avLst>
+          </a:prstGeom>
+          <a:solidFill>
+            <a:srgbClr val="0057FF"/>
+          </a:solidFill>
+          <a:ln/>
+        </p:spPr>
+      </p:sp>
+      <p:sp>
+        <p:nvSpPr>
+          <p:cNvPr id="12" name="Text 9"/>
+          <p:cNvSpPr/>
+          <p:nvPr/>
+        </p:nvSpPr>
+        <p:spPr>
+          <a:xfrm>
+            <a:off x="4745736" y="3666744"/>
+            <a:ext cx="3930695" cy="658368"/>
+          </a:xfrm>
+          <a:prstGeom prst="rect">
+            <a:avLst/>
+          </a:prstGeom>
+          <a:noFill/>
+          <a:ln/>
+        </p:spPr>
+        <p:txBody>
+          <a:bodyPr wrap="square" lIns="0" tIns="0" rIns="0" bIns="0" rtlCol="0" anchor="ctr"/>
+          <a:lstStyle/>
+          <a:p>
+            <a:pPr indent="0" marL="0">
+              <a:lnSpc>
+                <a:spcPts val="1500"/>
+              </a:lnSpc>
+              <a:buNone/>
+            </a:pPr>
+            <a:r>
+              <a:rPr lang="en-US" sz="1150" b="1" dirty="0">
+                <a:solidFill>
+                  <a:srgbClr val="FFFFFF"/>
+                </a:solidFill>
+                <a:latin typeface="Pretendard" pitchFamily="34" charset="0"/>
+                <a:ea typeface="Pretendard" pitchFamily="34" charset="-122"/>
+                <a:cs typeface="Pretendard" pitchFamily="34" charset="-120"/>
+              </a:rPr>
+              <a:t>근데 이런 걸 다 챙기는 게,</a:t>
+            </a:r>
+            <a:endParaRPr lang="en-US" sz="1150" dirty="0"/>
+          </a:p>
+          <a:p>
+            <a:pPr indent="0" marL="0">
+              <a:lnSpc>
+                <a:spcPts val="1500"/>
+              </a:lnSpc>
+              <a:buNone/>
+            </a:pPr>
+            <a:r>
+              <a:rPr lang="en-US" sz="1150" b="1" dirty="0">
+                <a:solidFill>
+                  <a:srgbClr val="FFFFFF"/>
+                </a:solidFill>
+                <a:latin typeface="Pretendard" pitchFamily="34" charset="0"/>
+                <a:ea typeface="Pretendard" pitchFamily="34" charset="-122"/>
+                <a:cs typeface="Pretendard" pitchFamily="34" charset="-120"/>
+              </a:rPr>
+              <a:t>매번 가능할까요?</a:t>
+            </a:r>
+            <a:endParaRPr lang="en-US" sz="1150" dirty="0"/>
+          </a:p>
+        </p:txBody>
+      </p:sp>
+      <p:sp>
+        <p:nvSpPr>
+          <p:cNvPr id="13" name="Shape 10"/>
+          <p:cNvSpPr/>
+          <p:nvPr/>
+        </p:nvSpPr>
+        <p:spPr>
+          <a:xfrm>
+            <a:off x="5802545" y="4562856"/>
+            <a:ext cx="5730783" cy="658368"/>
+          </a:xfrm>
+          <a:prstGeom prst="roundRect">
+            <a:avLst>
+              <a:gd name="adj" fmla="val 19444"/>
             </a:avLst>
           </a:prstGeom>
           <a:solidFill>
             <a:srgbClr val="F5F5F7"/>
           </a:solidFill>
-          <a:ln/>
-        </p:spPr>
-      </p:sp>
-      <p:sp>
-        <p:nvSpPr>
-          <p:cNvPr id="34" name="Text 32"/>
-          <p:cNvSpPr/>
-          <p:nvPr/>
-        </p:nvSpPr>
-        <p:spPr>
-          <a:xfrm>
-            <a:off x="7287768" y="4251960"/>
-            <a:ext cx="4016959" cy="960120"/>
+          <a:ln w="12700">
+            <a:solidFill>
+              <a:srgbClr val="E8E8E8"/>
+            </a:solidFill>
+            <a:prstDash val="solid"/>
+          </a:ln>
+        </p:spPr>
+      </p:sp>
+      <p:sp>
+        <p:nvSpPr>
+          <p:cNvPr id="14" name="Text 11"/>
+          <p:cNvSpPr/>
+          <p:nvPr/>
+        </p:nvSpPr>
+        <p:spPr>
+          <a:xfrm>
+            <a:off x="6003713" y="4562856"/>
+            <a:ext cx="5328447" cy="658368"/>
           </a:xfrm>
           <a:prstGeom prst="rect">
             <a:avLst/>
@@ -5932,12 +5350,12 @@
           <a:p>
             <a:pPr indent="0" marL="0">
               <a:lnSpc>
-                <a:spcPts val="2000"/>
+                <a:spcPts val="1500"/>
               </a:lnSpc>
               <a:buNone/>
             </a:pPr>
             <a:r>
-              <a:rPr lang="en-US" sz="1500" b="1" dirty="0">
+              <a:rPr lang="en-US" sz="1150" dirty="0">
                 <a:solidFill>
                   <a:srgbClr val="191919"/>
                 </a:solidFill>
@@ -5945,22 +5363,22 @@
                 <a:ea typeface="Pretendard" pitchFamily="34" charset="-122"/>
                 <a:cs typeface="Pretendard" pitchFamily="34" charset="-120"/>
               </a:rPr>
-              <a:t>“집에서 마시려고 머신은 샀는데, 얼음 없으면 결국 편의점에 가요.”</a:t>
-            </a:r>
-            <a:endParaRPr lang="en-US" sz="1500" dirty="0"/>
-          </a:p>
-        </p:txBody>
-      </p:sp>
-      <p:sp>
-        <p:nvSpPr>
-          <p:cNvPr id="35" name="Text 33"/>
-          <p:cNvSpPr/>
-          <p:nvPr/>
-        </p:nvSpPr>
-        <p:spPr>
-          <a:xfrm>
-            <a:off x="658368" y="6291072"/>
-            <a:ext cx="10874959" cy="219456"/>
+              <a:t>하긴 하는데, 번거로울 땐 그냥 편의점에 가게 돼요. 생수를 사거나, 얼음을 사거나 하는거죠.</a:t>
+            </a:r>
+            <a:endParaRPr lang="en-US" sz="1150" dirty="0"/>
+          </a:p>
+        </p:txBody>
+      </p:sp>
+      <p:sp>
+        <p:nvSpPr>
+          <p:cNvPr id="15" name="Text 12"/>
+          <p:cNvSpPr/>
+          <p:nvPr/>
+        </p:nvSpPr>
+        <p:spPr>
+          <a:xfrm>
+            <a:off x="658368" y="5961888"/>
+            <a:ext cx="6400800" cy="219456"/>
           </a:xfrm>
           <a:prstGeom prst="rect">
             <a:avLst/>
@@ -5984,7 +5402,7 @@
                 <a:ea typeface="Pretendard" pitchFamily="34" charset="-122"/>
                 <a:cs typeface="Pretendard" pitchFamily="34" charset="-120"/>
               </a:rPr>
-              <a:t>인터뷰 종료 후 팀 문장을 실제 응답자 발화로 교체. 마찰 지점 개수는 관찰 기록 반영.</a:t>
+              <a:t>인터뷰 발화를 옮긴 것으로, 실제 응답으로 교체 예정.</a:t>
             </a:r>
             <a:endParaRPr lang="en-US" sz="800" dirty="0"/>
           </a:p>
@@ -5992,7 +5410,46 @@
       </p:sp>
       <p:sp>
         <p:nvSpPr>
-          <p:cNvPr id="36" name="Text 34"/>
+          <p:cNvPr id="16" name="Text 13"/>
+          <p:cNvSpPr/>
+          <p:nvPr/>
+        </p:nvSpPr>
+        <p:spPr>
+          <a:xfrm>
+            <a:off x="7327087" y="5961888"/>
+            <a:ext cx="4206240" cy="219456"/>
+          </a:xfrm>
+          <a:prstGeom prst="rect">
+            <a:avLst/>
+          </a:prstGeom>
+          <a:noFill/>
+          <a:ln/>
+        </p:spPr>
+        <p:txBody>
+          <a:bodyPr wrap="square" lIns="0" tIns="0" rIns="0" bIns="0" rtlCol="0" anchor="t"/>
+          <a:lstStyle/>
+          <a:p>
+            <a:pPr algn="r" indent="0" marL="0">
+              <a:buNone/>
+            </a:pPr>
+            <a:r>
+              <a:rPr lang="en-US" sz="950" b="1" dirty="0">
+                <a:solidFill>
+                  <a:srgbClr val="0057FF"/>
+                </a:solidFill>
+                <a:latin typeface="Pretendard" pitchFamily="34" charset="0"/>
+                <a:ea typeface="Pretendard" pitchFamily="34" charset="-122"/>
+                <a:cs typeface="Pretendard" pitchFamily="34" charset="-120"/>
+              </a:rPr>
+              <a:t>→ 이 반복이 쌓이면 매달 나가는 비용과 시간이 된다.</a:t>
+            </a:r>
+            <a:endParaRPr lang="en-US" sz="950" dirty="0"/>
+          </a:p>
+        </p:txBody>
+      </p:sp>
+      <p:sp>
+        <p:nvSpPr>
+          <p:cNvPr id="17" name="Text 14"/>
           <p:cNvSpPr/>
           <p:nvPr/>
         </p:nvSpPr>
@@ -6031,7 +5488,7 @@
       </p:sp>
       <p:sp>
         <p:nvSpPr>
-          <p:cNvPr id="37" name="Text 35"/>
+          <p:cNvPr id="18" name="Text 15"/>
           <p:cNvSpPr/>
           <p:nvPr/>
         </p:nvSpPr>
@@ -15183,12 +14640,12 @@
         </p:nvSpPr>
         <p:spPr>
           <a:xfrm>
-            <a:off x="658368" y="2194560"/>
-            <a:ext cx="5186020" cy="2926080"/>
+            <a:off x="658368" y="2121408"/>
+            <a:ext cx="5186020" cy="3063240"/>
           </a:xfrm>
           <a:prstGeom prst="roundRect">
             <a:avLst>
-              <a:gd name="adj" fmla="val 2813"/>
+              <a:gd name="adj" fmla="val 2687"/>
             </a:avLst>
           </a:prstGeom>
           <a:solidFill>
@@ -15210,7 +14667,7 @@
         </p:nvSpPr>
         <p:spPr>
           <a:xfrm>
-            <a:off x="914400" y="2377440"/>
+            <a:off x="914400" y="2304288"/>
             <a:ext cx="4673956" cy="237744"/>
           </a:xfrm>
           <a:prstGeom prst="rect">
@@ -15241,88 +14698,45 @@
           </a:p>
         </p:txBody>
       </p:sp>
-      <p:sp>
-        <p:nvSpPr>
-          <p:cNvPr id="7" name="Shape 5"/>
-          <p:cNvSpPr/>
-          <p:nvPr/>
-        </p:nvSpPr>
-        <p:spPr>
-          <a:xfrm>
-            <a:off x="914400" y="2697480"/>
-            <a:ext cx="4673956" cy="1234440"/>
-          </a:xfrm>
-          <a:prstGeom prst="roundRect">
-            <a:avLst>
-              <a:gd name="adj" fmla="val 6667"/>
-            </a:avLst>
-          </a:prstGeom>
-          <a:solidFill>
-            <a:srgbClr val="ECEEF2"/>
-          </a:solidFill>
-          <a:ln w="12700">
-            <a:solidFill>
-              <a:srgbClr val="E8E8E8"/>
-            </a:solidFill>
-            <a:prstDash val="solid"/>
-          </a:ln>
+      <p:pic>
+        <p:nvPicPr>
+          <p:cNvPr id="7" name="Image 0" descr="/home/user/CHAI-AI/assets/img/peng-then.jpg">    </p:cNvPr>
+          <p:cNvPicPr>
+            <a:picLocks noChangeAspect="1"/>
+          </p:cNvPicPr>
+          <p:nvPr/>
+        </p:nvPicPr>
+        <p:blipFill>
+          <a:blip r:embed="rId1"/>
+          <a:srcRect l="0" r="0" t="0" b="0"/>
+          <a:stretch/>
+        </p:blipFill>
+        <p:spPr>
+          <a:xfrm>
+            <a:off x="914400" y="2624328"/>
+            <a:ext cx="4673956" cy="1371600"/>
+          </a:xfrm>
+          <a:prstGeom prst="rect">
+            <a:avLst/>
+          </a:prstGeom>
           <a:effectLst>
-            <a:outerShdw sx="100000" sy="100000" kx="0" ky="0" algn="bl" rotWithShape="0" blurRad="203200" dist="63500" dir="5400000">
+            <a:outerShdw sx="100000" sy="100000" kx="0" ky="0" algn="bl" rotWithShape="0" blurRad="177800" dist="50800" dir="5400000">
               <a:srgbClr val="191919">
-                <a:alpha val="24000"/>
+                <a:alpha val="22000"/>
               </a:srgbClr>
             </a:outerShdw>
           </a:effectLst>
         </p:spPr>
-      </p:sp>
-      <p:sp>
-        <p:nvSpPr>
-          <p:cNvPr id="8" name="Text 6"/>
-          <p:cNvSpPr/>
-          <p:nvPr/>
-        </p:nvSpPr>
-        <p:spPr>
-          <a:xfrm>
-            <a:off x="969264" y="2752344"/>
-            <a:ext cx="4564228" cy="1124712"/>
-          </a:xfrm>
-          <a:prstGeom prst="rect">
-            <a:avLst/>
-          </a:prstGeom>
-          <a:noFill/>
-          <a:ln/>
-        </p:spPr>
-        <p:txBody>
-          <a:bodyPr wrap="square" lIns="0" tIns="0" rIns="0" bIns="0" rtlCol="0" anchor="ctr"/>
-          <a:lstStyle/>
-          <a:p>
-            <a:pPr algn="ctr" indent="0" marL="0">
-              <a:buNone/>
-            </a:pPr>
-            <a:r>
-              <a:rPr lang="en-US" sz="950" b="1" dirty="0">
-                <a:solidFill>
-                  <a:srgbClr val="959595"/>
-                </a:solidFill>
-                <a:latin typeface="Pretendard" pitchFamily="34" charset="0"/>
-                <a:ea typeface="Pretendard" pitchFamily="34" charset="-122"/>
-                <a:cs typeface="Pretendard" pitchFamily="34" charset="-120"/>
-              </a:rPr>
-              <a:t>[ 과거 펭귄 광고 스틸 ]</a:t>
-            </a:r>
-            <a:endParaRPr lang="en-US" sz="950" dirty="0"/>
-          </a:p>
-        </p:txBody>
-      </p:sp>
-      <p:sp>
-        <p:nvSpPr>
-          <p:cNvPr id="9" name="Shape 7"/>
-          <p:cNvSpPr/>
-          <p:nvPr/>
-        </p:nvSpPr>
-        <p:spPr>
-          <a:xfrm>
-            <a:off x="932688" y="4178808"/>
+      </p:pic>
+      <p:sp>
+        <p:nvSpPr>
+          <p:cNvPr id="8" name="Shape 5"/>
+          <p:cNvSpPr/>
+          <p:nvPr/>
+        </p:nvSpPr>
+        <p:spPr>
+          <a:xfrm>
+            <a:off x="932688" y="4251960"/>
             <a:ext cx="50292" cy="50292"/>
           </a:xfrm>
           <a:prstGeom prst="ellipse">
@@ -15336,13 +14750,13 @@
       </p:sp>
       <p:sp>
         <p:nvSpPr>
-          <p:cNvPr id="10" name="Text 8"/>
-          <p:cNvSpPr/>
-          <p:nvPr/>
-        </p:nvSpPr>
-        <p:spPr>
-          <a:xfrm>
-            <a:off x="1088136" y="4096512"/>
+          <p:cNvPr id="9" name="Text 6"/>
+          <p:cNvSpPr/>
+          <p:nvPr/>
+        </p:nvSpPr>
+        <p:spPr>
+          <a:xfrm>
+            <a:off x="1088136" y="4169664"/>
             <a:ext cx="4481932" cy="292608"/>
           </a:xfrm>
           <a:prstGeom prst="rect">
@@ -15378,13 +14792,13 @@
       </p:sp>
       <p:sp>
         <p:nvSpPr>
-          <p:cNvPr id="11" name="Shape 9"/>
-          <p:cNvSpPr/>
-          <p:nvPr/>
-        </p:nvSpPr>
-        <p:spPr>
-          <a:xfrm>
-            <a:off x="932688" y="4507992"/>
+          <p:cNvPr id="10" name="Shape 7"/>
+          <p:cNvSpPr/>
+          <p:nvPr/>
+        </p:nvSpPr>
+        <p:spPr>
+          <a:xfrm>
+            <a:off x="932688" y="4562856"/>
             <a:ext cx="50292" cy="50292"/>
           </a:xfrm>
           <a:prstGeom prst="ellipse">
@@ -15398,13 +14812,13 @@
       </p:sp>
       <p:sp>
         <p:nvSpPr>
-          <p:cNvPr id="12" name="Text 10"/>
-          <p:cNvSpPr/>
-          <p:nvPr/>
-        </p:nvSpPr>
-        <p:spPr>
-          <a:xfrm>
-            <a:off x="1088136" y="4425696"/>
+          <p:cNvPr id="11" name="Text 8"/>
+          <p:cNvSpPr/>
+          <p:nvPr/>
+        </p:nvSpPr>
+        <p:spPr>
+          <a:xfrm>
+            <a:off x="1088136" y="4480560"/>
             <a:ext cx="4481932" cy="292608"/>
           </a:xfrm>
           <a:prstGeom prst="rect">
@@ -15440,13 +14854,13 @@
       </p:sp>
       <p:sp>
         <p:nvSpPr>
-          <p:cNvPr id="13" name="Shape 11"/>
-          <p:cNvSpPr/>
-          <p:nvPr/>
-        </p:nvSpPr>
-        <p:spPr>
-          <a:xfrm>
-            <a:off x="932688" y="4837176"/>
+          <p:cNvPr id="12" name="Shape 9"/>
+          <p:cNvSpPr/>
+          <p:nvPr/>
+        </p:nvSpPr>
+        <p:spPr>
+          <a:xfrm>
+            <a:off x="932688" y="4873752"/>
             <a:ext cx="50292" cy="50292"/>
           </a:xfrm>
           <a:prstGeom prst="ellipse">
@@ -15460,13 +14874,13 @@
       </p:sp>
       <p:sp>
         <p:nvSpPr>
-          <p:cNvPr id="14" name="Text 12"/>
-          <p:cNvSpPr/>
-          <p:nvPr/>
-        </p:nvSpPr>
-        <p:spPr>
-          <a:xfrm>
-            <a:off x="1088136" y="4754880"/>
+          <p:cNvPr id="13" name="Text 10"/>
+          <p:cNvSpPr/>
+          <p:nvPr/>
+        </p:nvSpPr>
+        <p:spPr>
+          <a:xfrm>
+            <a:off x="1088136" y="4791456"/>
             <a:ext cx="4481932" cy="292608"/>
           </a:xfrm>
           <a:prstGeom prst="rect">
@@ -15502,13 +14916,13 @@
       </p:sp>
       <p:sp>
         <p:nvSpPr>
-          <p:cNvPr id="15" name="Text 13"/>
-          <p:cNvSpPr/>
-          <p:nvPr/>
-        </p:nvSpPr>
-        <p:spPr>
-          <a:xfrm>
-            <a:off x="5844388" y="3429000"/>
+          <p:cNvPr id="14" name="Text 11"/>
+          <p:cNvSpPr/>
+          <p:nvPr/>
+        </p:nvSpPr>
+        <p:spPr>
+          <a:xfrm>
+            <a:off x="5844388" y="3424428"/>
             <a:ext cx="502920" cy="457200"/>
           </a:xfrm>
           <a:prstGeom prst="rect">
@@ -15541,18 +14955,18 @@
       </p:sp>
       <p:sp>
         <p:nvSpPr>
-          <p:cNvPr id="16" name="Shape 14"/>
-          <p:cNvSpPr/>
-          <p:nvPr/>
-        </p:nvSpPr>
-        <p:spPr>
-          <a:xfrm>
-            <a:off x="6347308" y="2194560"/>
-            <a:ext cx="5186020" cy="2926080"/>
+          <p:cNvPr id="15" name="Shape 12"/>
+          <p:cNvSpPr/>
+          <p:nvPr/>
+        </p:nvSpPr>
+        <p:spPr>
+          <a:xfrm>
+            <a:off x="6347308" y="2121408"/>
+            <a:ext cx="5186020" cy="3063240"/>
           </a:xfrm>
           <a:prstGeom prst="roundRect">
             <a:avLst>
-              <a:gd name="adj" fmla="val 2813"/>
+              <a:gd name="adj" fmla="val 2687"/>
             </a:avLst>
           </a:prstGeom>
           <a:solidFill>
@@ -15563,13 +14977,13 @@
       </p:sp>
       <p:sp>
         <p:nvSpPr>
-          <p:cNvPr id="17" name="Text 15"/>
-          <p:cNvSpPr/>
-          <p:nvPr/>
-        </p:nvSpPr>
-        <p:spPr>
-          <a:xfrm>
-            <a:off x="6603340" y="2377440"/>
+          <p:cNvPr id="16" name="Text 13"/>
+          <p:cNvSpPr/>
+          <p:nvPr/>
+        </p:nvSpPr>
+        <p:spPr>
+          <a:xfrm>
+            <a:off x="6603340" y="2304288"/>
             <a:ext cx="4673956" cy="237744"/>
           </a:xfrm>
           <a:prstGeom prst="rect">
@@ -15600,88 +15014,45 @@
           </a:p>
         </p:txBody>
       </p:sp>
-      <p:sp>
-        <p:nvSpPr>
-          <p:cNvPr id="18" name="Shape 16"/>
-          <p:cNvSpPr/>
-          <p:nvPr/>
-        </p:nvSpPr>
-        <p:spPr>
-          <a:xfrm>
-            <a:off x="6603340" y="2697480"/>
-            <a:ext cx="4673956" cy="1234440"/>
-          </a:xfrm>
-          <a:prstGeom prst="roundRect">
-            <a:avLst>
-              <a:gd name="adj" fmla="val 6667"/>
-            </a:avLst>
-          </a:prstGeom>
-          <a:solidFill>
-            <a:srgbClr val="26262B"/>
-          </a:solidFill>
-          <a:ln w="12700">
-            <a:solidFill>
-              <a:srgbClr val="303036"/>
-            </a:solidFill>
-            <a:prstDash val="solid"/>
-          </a:ln>
+      <p:pic>
+        <p:nvPicPr>
+          <p:cNvPr id="17" name="Image 1" descr="/home/user/CHAI-AI/assets/img/peng-now.jpg">    </p:cNvPr>
+          <p:cNvPicPr>
+            <a:picLocks noChangeAspect="1"/>
+          </p:cNvPicPr>
+          <p:nvPr/>
+        </p:nvPicPr>
+        <p:blipFill>
+          <a:blip r:embed="rId2"/>
+          <a:srcRect l="0" r="0" t="0" b="0"/>
+          <a:stretch/>
+        </p:blipFill>
+        <p:spPr>
+          <a:xfrm>
+            <a:off x="6603340" y="2624328"/>
+            <a:ext cx="4673956" cy="1371600"/>
+          </a:xfrm>
+          <a:prstGeom prst="rect">
+            <a:avLst/>
+          </a:prstGeom>
           <a:effectLst>
-            <a:outerShdw sx="100000" sy="100000" kx="0" ky="0" algn="bl" rotWithShape="0" blurRad="203200" dist="63500" dir="5400000">
+            <a:outerShdw sx="100000" sy="100000" kx="0" ky="0" algn="bl" rotWithShape="0" blurRad="177800" dist="50800" dir="5400000">
               <a:srgbClr val="191919">
-                <a:alpha val="24000"/>
+                <a:alpha val="22000"/>
               </a:srgbClr>
             </a:outerShdw>
           </a:effectLst>
         </p:spPr>
-      </p:sp>
-      <p:sp>
-        <p:nvSpPr>
-          <p:cNvPr id="19" name="Text 17"/>
-          <p:cNvSpPr/>
-          <p:nvPr/>
-        </p:nvSpPr>
-        <p:spPr>
-          <a:xfrm>
-            <a:off x="6658204" y="2752344"/>
-            <a:ext cx="4564228" cy="1124712"/>
-          </a:xfrm>
-          <a:prstGeom prst="rect">
-            <a:avLst/>
-          </a:prstGeom>
-          <a:noFill/>
-          <a:ln/>
-        </p:spPr>
-        <p:txBody>
-          <a:bodyPr wrap="square" lIns="0" tIns="0" rIns="0" bIns="0" rtlCol="0" anchor="ctr"/>
-          <a:lstStyle/>
-          <a:p>
-            <a:pPr algn="ctr" indent="0" marL="0">
-              <a:buNone/>
-            </a:pPr>
-            <a:r>
-              <a:rPr lang="en-US" sz="950" b="1" dirty="0">
-                <a:solidFill>
-                  <a:srgbClr val="6C6D74"/>
-                </a:solidFill>
-                <a:latin typeface="Pretendard" pitchFamily="34" charset="0"/>
-                <a:ea typeface="Pretendard" pitchFamily="34" charset="-122"/>
-                <a:cs typeface="Pretendard" pitchFamily="34" charset="-120"/>
-              </a:rPr>
-              <a:t>[ 현대화 펭귄 시안 ]</a:t>
-            </a:r>
-            <a:endParaRPr lang="en-US" sz="950" dirty="0"/>
-          </a:p>
-        </p:txBody>
-      </p:sp>
-      <p:sp>
-        <p:nvSpPr>
-          <p:cNvPr id="20" name="Shape 18"/>
-          <p:cNvSpPr/>
-          <p:nvPr/>
-        </p:nvSpPr>
-        <p:spPr>
-          <a:xfrm>
-            <a:off x="6621628" y="4178808"/>
+      </p:pic>
+      <p:sp>
+        <p:nvSpPr>
+          <p:cNvPr id="18" name="Shape 14"/>
+          <p:cNvSpPr/>
+          <p:nvPr/>
+        </p:nvSpPr>
+        <p:spPr>
+          <a:xfrm>
+            <a:off x="6621628" y="4251960"/>
             <a:ext cx="50292" cy="50292"/>
           </a:xfrm>
           <a:prstGeom prst="ellipse">
@@ -15695,13 +15066,13 @@
       </p:sp>
       <p:sp>
         <p:nvSpPr>
-          <p:cNvPr id="21" name="Text 19"/>
-          <p:cNvSpPr/>
-          <p:nvPr/>
-        </p:nvSpPr>
-        <p:spPr>
-          <a:xfrm>
-            <a:off x="6777076" y="4096512"/>
+          <p:cNvPr id="19" name="Text 15"/>
+          <p:cNvSpPr/>
+          <p:nvPr/>
+        </p:nvSpPr>
+        <p:spPr>
+          <a:xfrm>
+            <a:off x="6777076" y="4169664"/>
             <a:ext cx="4481932" cy="292608"/>
           </a:xfrm>
           <a:prstGeom prst="rect">
@@ -15737,13 +15108,13 @@
       </p:sp>
       <p:sp>
         <p:nvSpPr>
-          <p:cNvPr id="22" name="Shape 20"/>
-          <p:cNvSpPr/>
-          <p:nvPr/>
-        </p:nvSpPr>
-        <p:spPr>
-          <a:xfrm>
-            <a:off x="6621628" y="4507992"/>
+          <p:cNvPr id="20" name="Shape 16"/>
+          <p:cNvSpPr/>
+          <p:nvPr/>
+        </p:nvSpPr>
+        <p:spPr>
+          <a:xfrm>
+            <a:off x="6621628" y="4562856"/>
             <a:ext cx="50292" cy="50292"/>
           </a:xfrm>
           <a:prstGeom prst="ellipse">
@@ -15757,13 +15128,13 @@
       </p:sp>
       <p:sp>
         <p:nvSpPr>
-          <p:cNvPr id="23" name="Text 21"/>
-          <p:cNvSpPr/>
-          <p:nvPr/>
-        </p:nvSpPr>
-        <p:spPr>
-          <a:xfrm>
-            <a:off x="6777076" y="4425696"/>
+          <p:cNvPr id="21" name="Text 17"/>
+          <p:cNvSpPr/>
+          <p:nvPr/>
+        </p:nvSpPr>
+        <p:spPr>
+          <a:xfrm>
+            <a:off x="6777076" y="4480560"/>
             <a:ext cx="4481932" cy="292608"/>
           </a:xfrm>
           <a:prstGeom prst="rect">
@@ -15799,13 +15170,13 @@
       </p:sp>
       <p:sp>
         <p:nvSpPr>
-          <p:cNvPr id="24" name="Shape 22"/>
-          <p:cNvSpPr/>
-          <p:nvPr/>
-        </p:nvSpPr>
-        <p:spPr>
-          <a:xfrm>
-            <a:off x="6621628" y="4837176"/>
+          <p:cNvPr id="22" name="Shape 18"/>
+          <p:cNvSpPr/>
+          <p:nvPr/>
+        </p:nvSpPr>
+        <p:spPr>
+          <a:xfrm>
+            <a:off x="6621628" y="4873752"/>
             <a:ext cx="50292" cy="50292"/>
           </a:xfrm>
           <a:prstGeom prst="ellipse">
@@ -15819,13 +15190,13 @@
       </p:sp>
       <p:sp>
         <p:nvSpPr>
-          <p:cNvPr id="25" name="Text 23"/>
-          <p:cNvSpPr/>
-          <p:nvPr/>
-        </p:nvSpPr>
-        <p:spPr>
-          <a:xfrm>
-            <a:off x="6777076" y="4754880"/>
+          <p:cNvPr id="23" name="Text 19"/>
+          <p:cNvSpPr/>
+          <p:nvPr/>
+        </p:nvSpPr>
+        <p:spPr>
+          <a:xfrm>
+            <a:off x="6777076" y="4791456"/>
             <a:ext cx="4481932" cy="292608"/>
           </a:xfrm>
           <a:prstGeom prst="rect">
@@ -15861,13 +15232,13 @@
       </p:sp>
       <p:sp>
         <p:nvSpPr>
-          <p:cNvPr id="26" name="Shape 24"/>
-          <p:cNvSpPr/>
-          <p:nvPr/>
-        </p:nvSpPr>
-        <p:spPr>
-          <a:xfrm>
-            <a:off x="658368" y="5340096"/>
+          <p:cNvPr id="24" name="Shape 20"/>
+          <p:cNvSpPr/>
+          <p:nvPr/>
+        </p:nvSpPr>
+        <p:spPr>
+          <a:xfrm>
+            <a:off x="658368" y="5404104"/>
             <a:ext cx="10874959" cy="731520"/>
           </a:xfrm>
           <a:prstGeom prst="roundRect">
@@ -15888,13 +15259,13 @@
       </p:sp>
       <p:sp>
         <p:nvSpPr>
-          <p:cNvPr id="27" name="Text 25"/>
-          <p:cNvSpPr/>
-          <p:nvPr/>
-        </p:nvSpPr>
-        <p:spPr>
-          <a:xfrm>
-            <a:off x="0" y="5440680"/>
+          <p:cNvPr id="25" name="Text 21"/>
+          <p:cNvSpPr/>
+          <p:nvPr/>
+        </p:nvSpPr>
+        <p:spPr>
+          <a:xfrm>
+            <a:off x="0" y="5504688"/>
             <a:ext cx="12191695" cy="201168"/>
           </a:xfrm>
           <a:prstGeom prst="rect">
@@ -15927,13 +15298,13 @@
       </p:sp>
       <p:sp>
         <p:nvSpPr>
-          <p:cNvPr id="28" name="Text 26"/>
-          <p:cNvSpPr/>
-          <p:nvPr/>
-        </p:nvSpPr>
-        <p:spPr>
-          <a:xfrm>
-            <a:off x="0" y="5650992"/>
+          <p:cNvPr id="26" name="Text 22"/>
+          <p:cNvSpPr/>
+          <p:nvPr/>
+        </p:nvSpPr>
+        <p:spPr>
+          <a:xfrm>
+            <a:off x="0" y="5715000"/>
             <a:ext cx="12191695" cy="347472"/>
           </a:xfrm>
           <a:prstGeom prst="rect">
@@ -15966,13 +15337,13 @@
       </p:sp>
       <p:sp>
         <p:nvSpPr>
-          <p:cNvPr id="29" name="Text 27"/>
-          <p:cNvSpPr/>
-          <p:nvPr/>
-        </p:nvSpPr>
-        <p:spPr>
-          <a:xfrm>
-            <a:off x="658368" y="6181344"/>
+          <p:cNvPr id="27" name="Text 23"/>
+          <p:cNvSpPr/>
+          <p:nvPr/>
+        </p:nvSpPr>
+        <p:spPr>
+          <a:xfrm>
+            <a:off x="658368" y="6245352"/>
             <a:ext cx="10874959" cy="219456"/>
           </a:xfrm>
           <a:prstGeom prst="rect">
@@ -16005,7 +15376,7 @@
       </p:sp>
       <p:sp>
         <p:nvSpPr>
-          <p:cNvPr id="30" name="Text 28"/>
+          <p:cNvPr id="28" name="Text 24"/>
           <p:cNvSpPr/>
           <p:nvPr/>
         </p:nvSpPr>
@@ -16044,7 +15415,7 @@
       </p:sp>
       <p:sp>
         <p:nvSpPr>
-          <p:cNvPr id="31" name="Text 29"/>
+          <p:cNvPr id="29" name="Text 25"/>
           <p:cNvSpPr/>
           <p:nvPr/>
         </p:nvSpPr>
@@ -16276,27 +15647,27 @@
         </p:nvSpPr>
         <p:spPr>
           <a:xfrm>
-            <a:off x="658368" y="2148840"/>
-            <a:ext cx="10874959" cy="457200"/>
-          </a:xfrm>
-          <a:prstGeom prst="rect">
-            <a:avLst/>
-          </a:prstGeom>
-          <a:noFill/>
-          <a:ln/>
-        </p:spPr>
-        <p:txBody>
-          <a:bodyPr wrap="square" lIns="0" tIns="0" rIns="0" bIns="0" rtlCol="0" anchor="t"/>
-          <a:lstStyle/>
-          <a:p>
-            <a:pPr indent="0" marL="0">
+            <a:off x="1938528" y="2011680"/>
+            <a:ext cx="8314639" cy="640080"/>
+          </a:xfrm>
+          <a:prstGeom prst="rect">
+            <a:avLst/>
+          </a:prstGeom>
+          <a:noFill/>
+          <a:ln/>
+        </p:spPr>
+        <p:txBody>
+          <a:bodyPr wrap="square" lIns="0" tIns="0" rIns="0" bIns="0" rtlCol="0" anchor="t"/>
+          <a:lstStyle/>
+          <a:p>
+            <a:pPr algn="ctr" indent="0" marL="0">
               <a:lnSpc>
                 <a:spcPts val="1900"/>
               </a:lnSpc>
               <a:buNone/>
             </a:pPr>
             <a:r>
-              <a:rPr lang="en-US" sz="1350" dirty="0">
+              <a:rPr lang="en-US" sz="1250" dirty="0">
                 <a:solidFill>
                   <a:srgbClr val="3C3C3C"/>
                 </a:solidFill>
@@ -16304,9 +15675,44 @@
                 <a:ea typeface="Pretendard" pitchFamily="34" charset="-122"/>
                 <a:cs typeface="Pretendard" pitchFamily="34" charset="-120"/>
               </a:rPr>
-              <a:t>2030은 생애가치가 높다. 한번 선택하면 오래 이어지기 때문에, 첫 구매를 잡으려면 이들이 관심 있어 하는 제품으로 청호나이스에 진입시켜야 한다.</a:t>
-            </a:r>
-            <a:endParaRPr lang="en-US" sz="1350" dirty="0"/>
+              <a:t>현재 에스프레카페는 공식적으로 36개월과 60개월 의무사용기간을 운영하는 중이다.
+</a:t>
+            </a:r>
+            <a:pPr algn="ctr" indent="0" marL="0">
+              <a:lnSpc>
+                <a:spcPts val="1900"/>
+              </a:lnSpc>
+              <a:buNone/>
+            </a:pPr>
+            <a:r>
+              <a:rPr lang="en-US" sz="1250" b="1" dirty="0">
+                <a:solidFill>
+                  <a:srgbClr val="191919"/>
+                </a:solidFill>
+                <a:latin typeface="Pretendard" pitchFamily="34" charset="0"/>
+                <a:ea typeface="Pretendard" pitchFamily="34" charset="-122"/>
+                <a:cs typeface="Pretendard" pitchFamily="34" charset="-120"/>
+              </a:rPr>
+              <a:t>즉 구매 빈도가 낮고 사용 기간이 긴 제품</a:t>
+            </a:r>
+            <a:pPr algn="ctr" indent="0" marL="0">
+              <a:lnSpc>
+                <a:spcPts val="1900"/>
+              </a:lnSpc>
+              <a:buNone/>
+            </a:pPr>
+            <a:r>
+              <a:rPr lang="en-US" sz="1250" dirty="0">
+                <a:solidFill>
+                  <a:srgbClr val="3C3C3C"/>
+                </a:solidFill>
+                <a:latin typeface="Pretendard" pitchFamily="34" charset="0"/>
+                <a:ea typeface="Pretendard" pitchFamily="34" charset="-122"/>
+                <a:cs typeface="Pretendard" pitchFamily="34" charset="-120"/>
+              </a:rPr>
+              <a:t>이므로, 2030의 첫 렌탈 시점에 후보군으로 진입하는 것 자체가 중요하다.</a:t>
+            </a:r>
+            <a:endParaRPr lang="en-US" sz="1250" dirty="0"/>
           </a:p>
         </p:txBody>
       </p:sp>
@@ -16554,7 +15960,7 @@
                 <a:ea typeface="Pretendard" pitchFamily="34" charset="-122"/>
                 <a:cs typeface="Pretendard" pitchFamily="34" charset="-120"/>
               </a:rPr>
-              <a:t>우리가 만들어야 할 전환</a:t>
+              <a:t>2030 브랜드 커뮤니케이션 단계별 전략 제안</a:t>
             </a:r>
             <a:endParaRPr lang="en-US" sz="1200" dirty="0"/>
           </a:p>
@@ -24889,7 +24295,7 @@
                 <a:ea typeface="Pretendard" pitchFamily="34" charset="-122"/>
                 <a:cs typeface="Pretendard" pitchFamily="34" charset="-120"/>
               </a:rPr>
-              <a:t>전략 요약</a:t>
+              <a:t>전략 수립 과정</a:t>
             </a:r>
             <a:endParaRPr lang="en-US" sz="1250" dirty="0"/>
           </a:p>
@@ -24904,7 +24310,7 @@
         <p:spPr>
           <a:xfrm>
             <a:off x="658368" y="1024128"/>
-            <a:ext cx="10874959" cy="868680"/>
+            <a:ext cx="10874959" cy="960120"/>
           </a:xfrm>
           <a:prstGeom prst="rect">
             <a:avLst/>
@@ -24918,12 +24324,12 @@
           <a:p>
             <a:pPr indent="0" marL="0">
               <a:lnSpc>
-                <a:spcPts val="3000"/>
+                <a:spcPts val="3200"/>
               </a:lnSpc>
               <a:buNone/>
             </a:pPr>
             <a:r>
-              <a:rPr lang="en-US" sz="2300" b="1" dirty="0">
+              <a:rPr lang="en-US" sz="2400" b="1" dirty="0">
                 <a:solidFill>
                   <a:srgbClr val="191919"/>
                 </a:solidFill>
@@ -24931,19 +24337,36 @@
                 <a:ea typeface="Pretendard" pitchFamily="34" charset="-122"/>
                 <a:cs typeface="Pretendard" pitchFamily="34" charset="-120"/>
               </a:rPr>
-              <a:t>번거로운 준비 과정을 없애는</a:t>
-            </a:r>
-            <a:endParaRPr lang="en-US" sz="2300" dirty="0"/>
+              <a:t>‘지피지기 백전불태 (知彼知己 百戰不殆)’</a:t>
+            </a:r>
+            <a:endParaRPr lang="en-US" sz="2400" dirty="0"/>
           </a:p>
           <a:p>
             <a:pPr indent="0" marL="0">
               <a:lnSpc>
-                <a:spcPts val="3000"/>
+                <a:spcPts val="3200"/>
               </a:lnSpc>
               <a:buNone/>
             </a:pPr>
             <a:r>
-              <a:rPr lang="en-US" sz="2300" b="1" dirty="0">
+              <a:rPr lang="en-US" sz="2400" b="1" dirty="0">
+                <a:solidFill>
+                  <a:srgbClr val="191919"/>
+                </a:solidFill>
+                <a:latin typeface="Pretendard" pitchFamily="34" charset="0"/>
+                <a:ea typeface="Pretendard" pitchFamily="34" charset="-122"/>
+                <a:cs typeface="Pretendard" pitchFamily="34" charset="-120"/>
+              </a:rPr>
+              <a:t>브랜드 상황 진단 및 </a:t>
+            </a:r>
+            <a:pPr indent="0" marL="0">
+              <a:lnSpc>
+                <a:spcPts val="3200"/>
+              </a:lnSpc>
+              <a:buNone/>
+            </a:pPr>
+            <a:r>
+              <a:rPr lang="en-US" sz="2400" b="1" dirty="0">
                 <a:solidFill>
                   <a:srgbClr val="0057FF"/>
                 </a:solidFill>
@@ -24951,16 +24374,16 @@
                 <a:ea typeface="Pretendard" pitchFamily="34" charset="-122"/>
                 <a:cs typeface="Pretendard" pitchFamily="34" charset="-120"/>
               </a:rPr>
-              <a:t>‘매니저 펭귄’</a:t>
+              <a:t>커뮤니케이션 전략</a:t>
             </a:r>
             <a:pPr indent="0" marL="0">
               <a:lnSpc>
-                <a:spcPts val="3000"/>
+                <a:spcPts val="3200"/>
               </a:lnSpc>
               <a:buNone/>
             </a:pPr>
             <a:r>
-              <a:rPr lang="en-US" sz="2300" b="1" dirty="0">
+              <a:rPr lang="en-US" sz="2400" b="1" dirty="0">
                 <a:solidFill>
                   <a:srgbClr val="191919"/>
                 </a:solidFill>
@@ -24968,9 +24391,9 @@
                 <a:ea typeface="Pretendard" pitchFamily="34" charset="-122"/>
                 <a:cs typeface="Pretendard" pitchFamily="34" charset="-120"/>
               </a:rPr>
-              <a:t> 캐릭터 브랜딩 전략.</a:t>
-            </a:r>
-            <a:endParaRPr lang="en-US" sz="2300" dirty="0"/>
+              <a:t> 제시</a:t>
+            </a:r>
+            <a:endParaRPr lang="en-US" sz="2400" dirty="0"/>
           </a:p>
         </p:txBody>
       </p:sp>
@@ -24982,12 +24405,12 @@
         </p:nvSpPr>
         <p:spPr>
           <a:xfrm>
-            <a:off x="658368" y="2240280"/>
-            <a:ext cx="5254600" cy="2331720"/>
+            <a:off x="658368" y="2331720"/>
+            <a:ext cx="5208880" cy="2286000"/>
           </a:xfrm>
           <a:prstGeom prst="roundRect">
             <a:avLst>
-              <a:gd name="adj" fmla="val 3529"/>
+              <a:gd name="adj" fmla="val 3600"/>
             </a:avLst>
           </a:prstGeom>
           <a:solidFill>
@@ -25009,24 +24432,24 @@
         </p:nvSpPr>
         <p:spPr>
           <a:xfrm>
-            <a:off x="914400" y="2459736"/>
-            <a:ext cx="4797400" cy="274320"/>
-          </a:xfrm>
-          <a:prstGeom prst="rect">
-            <a:avLst/>
-          </a:prstGeom>
-          <a:noFill/>
-          <a:ln/>
-        </p:spPr>
-        <p:txBody>
-          <a:bodyPr wrap="square" lIns="0" tIns="0" rIns="0" bIns="0" rtlCol="0" anchor="t"/>
-          <a:lstStyle/>
-          <a:p>
-            <a:pPr indent="0" marL="0">
-              <a:buNone/>
-            </a:pPr>
-            <a:r>
-              <a:rPr lang="en-US" sz="1200" b="1" dirty="0">
+            <a:off x="932688" y="2569464"/>
+            <a:ext cx="4660240" cy="237744"/>
+          </a:xfrm>
+          <a:prstGeom prst="rect">
+            <a:avLst/>
+          </a:prstGeom>
+          <a:noFill/>
+          <a:ln/>
+        </p:spPr>
+        <p:txBody>
+          <a:bodyPr wrap="square" lIns="0" tIns="0" rIns="0" bIns="0" rtlCol="0" anchor="t"/>
+          <a:lstStyle/>
+          <a:p>
+            <a:pPr indent="0" marL="0">
+              <a:buNone/>
+            </a:pPr>
+            <a:r>
+              <a:rPr lang="en-US" sz="1150" b="1" dirty="0">
                 <a:solidFill>
                   <a:srgbClr val="0057FF"/>
                 </a:solidFill>
@@ -25034,9 +24457,9 @@
                 <a:ea typeface="Pretendard" pitchFamily="34" charset="-122"/>
                 <a:cs typeface="Pretendard" pitchFamily="34" charset="-120"/>
               </a:rPr>
-              <a:t>A · 준비의 문제</a:t>
-            </a:r>
-            <a:endParaRPr lang="en-US" sz="1200" dirty="0"/>
+              <a:t>1 · 현재 브랜드 상황 진단</a:t>
+            </a:r>
+            <a:endParaRPr lang="en-US" sz="1150" dirty="0"/>
           </a:p>
         </p:txBody>
       </p:sp>
@@ -25048,8 +24471,8 @@
         </p:nvSpPr>
         <p:spPr>
           <a:xfrm>
-            <a:off x="932688" y="2907792"/>
-            <a:ext cx="64008" cy="64008"/>
+            <a:off x="950976" y="3072384"/>
+            <a:ext cx="50292" cy="50292"/>
           </a:xfrm>
           <a:prstGeom prst="ellipse">
             <a:avLst/>
@@ -25068,8 +24491,8 @@
         </p:nvSpPr>
         <p:spPr>
           <a:xfrm>
-            <a:off x="1115568" y="2816352"/>
-            <a:ext cx="4541368" cy="548640"/>
+            <a:off x="1106424" y="2990088"/>
+            <a:ext cx="4468216" cy="292608"/>
           </a:xfrm>
           <a:prstGeom prst="rect">
             <a:avLst/>
@@ -25083,12 +24506,12 @@
           <a:p>
             <a:pPr indent="0" marL="0">
               <a:lnSpc>
-                <a:spcPts val="1700"/>
+                <a:spcPts val="1350"/>
               </a:lnSpc>
               <a:buNone/>
             </a:pPr>
             <a:r>
-              <a:rPr lang="en-US" sz="1300" dirty="0">
+              <a:rPr lang="en-US" sz="1200" dirty="0">
                 <a:solidFill>
                   <a:srgbClr val="3C3C3C"/>
                 </a:solidFill>
@@ -25096,9 +24519,9 @@
                 <a:ea typeface="Pretendard" pitchFamily="34" charset="-122"/>
                 <a:cs typeface="Pretendard" pitchFamily="34" charset="-120"/>
               </a:rPr>
-              <a:t>물과 커피에 반복 지출하는 독립 2030 — 생수를 사고 아이스커피를 매일 마시는 1~2인 가구.</a:t>
-            </a:r>
-            <a:endParaRPr lang="en-US" sz="1300" dirty="0"/>
+              <a:t>정수기 브랜드의 카피와 동향 분석</a:t>
+            </a:r>
+            <a:endParaRPr lang="en-US" sz="1200" dirty="0"/>
           </a:p>
         </p:txBody>
       </p:sp>
@@ -25110,8 +24533,8 @@
         </p:nvSpPr>
         <p:spPr>
           <a:xfrm>
-            <a:off x="932688" y="3474720"/>
-            <a:ext cx="64008" cy="64008"/>
+            <a:off x="950976" y="3493008"/>
+            <a:ext cx="50292" cy="50292"/>
           </a:xfrm>
           <a:prstGeom prst="ellipse">
             <a:avLst/>
@@ -25130,8 +24553,8 @@
         </p:nvSpPr>
         <p:spPr>
           <a:xfrm>
-            <a:off x="1115568" y="3383280"/>
-            <a:ext cx="4541368" cy="548640"/>
+            <a:off x="1106424" y="3410712"/>
+            <a:ext cx="4468216" cy="292608"/>
           </a:xfrm>
           <a:prstGeom prst="rect">
             <a:avLst/>
@@ -25145,12 +24568,12 @@
           <a:p>
             <a:pPr indent="0" marL="0">
               <a:lnSpc>
-                <a:spcPts val="1700"/>
+                <a:spcPts val="1350"/>
               </a:lnSpc>
               <a:buNone/>
             </a:pPr>
             <a:r>
-              <a:rPr lang="en-US" sz="1300" dirty="0">
+              <a:rPr lang="en-US" sz="1200" dirty="0">
                 <a:solidFill>
                   <a:srgbClr val="3C3C3C"/>
                 </a:solidFill>
@@ -25158,9 +24581,9 @@
                 <a:ea typeface="Pretendard" pitchFamily="34" charset="-122"/>
                 <a:cs typeface="Pretendard" pitchFamily="34" charset="-120"/>
               </a:rPr>
-              <a:t>물, 얼음, 커피를 각각 사서 만들어야 하는 번거로운 준비 루틴.</a:t>
-            </a:r>
-            <a:endParaRPr lang="en-US" sz="1300" dirty="0"/>
+              <a:t>청호나이스 커뮤니케이션의 현 주소</a:t>
+            </a:r>
+            <a:endParaRPr lang="en-US" sz="1200" dirty="0"/>
           </a:p>
         </p:txBody>
       </p:sp>
@@ -25172,8 +24595,8 @@
         </p:nvSpPr>
         <p:spPr>
           <a:xfrm>
-            <a:off x="932688" y="4041648"/>
-            <a:ext cx="64008" cy="64008"/>
+            <a:off x="950976" y="3913632"/>
+            <a:ext cx="50292" cy="50292"/>
           </a:xfrm>
           <a:prstGeom prst="ellipse">
             <a:avLst/>
@@ -25192,8 +24615,8 @@
         </p:nvSpPr>
         <p:spPr>
           <a:xfrm>
-            <a:off x="1115568" y="3950208"/>
-            <a:ext cx="4541368" cy="548640"/>
+            <a:off x="1106424" y="3831336"/>
+            <a:ext cx="4468216" cy="292608"/>
           </a:xfrm>
           <a:prstGeom prst="rect">
             <a:avLst/>
@@ -25207,12 +24630,12 @@
           <a:p>
             <a:pPr indent="0" marL="0">
               <a:lnSpc>
-                <a:spcPts val="1700"/>
+                <a:spcPts val="1350"/>
               </a:lnSpc>
               <a:buNone/>
             </a:pPr>
             <a:r>
-              <a:rPr lang="en-US" sz="1300" dirty="0">
+              <a:rPr lang="en-US" sz="1200" dirty="0">
                 <a:solidFill>
                   <a:srgbClr val="3C3C3C"/>
                 </a:solidFill>
@@ -25220,9 +24643,9 @@
                 <a:ea typeface="Pretendard" pitchFamily="34" charset="-122"/>
                 <a:cs typeface="Pretendard" pitchFamily="34" charset="-120"/>
               </a:rPr>
-              <a:t>정수·얼음·커피를 통합한 에스프레카페 — 세 가지 준비를 한 기기로 끝낸다.</a:t>
-            </a:r>
-            <a:endParaRPr lang="en-US" sz="1300" dirty="0"/>
+              <a:t>청호나이스의 기존 자산 분석</a:t>
+            </a:r>
+            <a:endParaRPr lang="en-US" sz="1200" dirty="0"/>
           </a:p>
         </p:txBody>
       </p:sp>
@@ -25234,12 +24657,12 @@
         </p:nvSpPr>
         <p:spPr>
           <a:xfrm>
-            <a:off x="6278728" y="2240280"/>
-            <a:ext cx="5254600" cy="2331720"/>
+            <a:off x="6324448" y="2331720"/>
+            <a:ext cx="5208880" cy="2286000"/>
           </a:xfrm>
           <a:prstGeom prst="roundRect">
             <a:avLst>
-              <a:gd name="adj" fmla="val 3529"/>
+              <a:gd name="adj" fmla="val 3600"/>
             </a:avLst>
           </a:prstGeom>
           <a:solidFill>
@@ -25261,24 +24684,24 @@
         </p:nvSpPr>
         <p:spPr>
           <a:xfrm>
-            <a:off x="6534760" y="2459736"/>
-            <a:ext cx="4797400" cy="274320"/>
-          </a:xfrm>
-          <a:prstGeom prst="rect">
-            <a:avLst/>
-          </a:prstGeom>
-          <a:noFill/>
-          <a:ln/>
-        </p:spPr>
-        <p:txBody>
-          <a:bodyPr wrap="square" lIns="0" tIns="0" rIns="0" bIns="0" rtlCol="0" anchor="t"/>
-          <a:lstStyle/>
-          <a:p>
-            <a:pPr indent="0" marL="0">
-              <a:buNone/>
-            </a:pPr>
-            <a:r>
-              <a:rPr lang="en-US" sz="1200" b="1" dirty="0">
+            <a:off x="6598768" y="2569464"/>
+            <a:ext cx="4660240" cy="237744"/>
+          </a:xfrm>
+          <a:prstGeom prst="rect">
+            <a:avLst/>
+          </a:prstGeom>
+          <a:noFill/>
+          <a:ln/>
+        </p:spPr>
+        <p:txBody>
+          <a:bodyPr wrap="square" lIns="0" tIns="0" rIns="0" bIns="0" rtlCol="0" anchor="t"/>
+          <a:lstStyle/>
+          <a:p>
+            <a:pPr indent="0" marL="0">
+              <a:buNone/>
+            </a:pPr>
+            <a:r>
+              <a:rPr lang="en-US" sz="1150" b="1" dirty="0">
                 <a:solidFill>
                   <a:srgbClr val="0057FF"/>
                 </a:solidFill>
@@ -25286,9 +24709,9 @@
                 <a:ea typeface="Pretendard" pitchFamily="34" charset="-122"/>
                 <a:cs typeface="Pretendard" pitchFamily="34" charset="-120"/>
               </a:rPr>
-              <a:t>B · 아아 준비를 없애는 매니저, 펭귄</a:t>
-            </a:r>
-            <a:endParaRPr lang="en-US" sz="1200" dirty="0"/>
+              <a:t>2 · 커뮤니케이션 전략 제시</a:t>
+            </a:r>
+            <a:endParaRPr lang="en-US" sz="1150" dirty="0"/>
           </a:p>
         </p:txBody>
       </p:sp>
@@ -25300,8 +24723,8 @@
         </p:nvSpPr>
         <p:spPr>
           <a:xfrm>
-            <a:off x="6553048" y="2907792"/>
-            <a:ext cx="64008" cy="64008"/>
+            <a:off x="6617056" y="3072384"/>
+            <a:ext cx="50292" cy="50292"/>
           </a:xfrm>
           <a:prstGeom prst="ellipse">
             <a:avLst/>
@@ -25320,8 +24743,8 @@
         </p:nvSpPr>
         <p:spPr>
           <a:xfrm>
-            <a:off x="6735928" y="2816352"/>
-            <a:ext cx="4541368" cy="548640"/>
+            <a:off x="6772504" y="2990088"/>
+            <a:ext cx="4468216" cy="658368"/>
           </a:xfrm>
           <a:prstGeom prst="rect">
             <a:avLst/>
@@ -25335,12 +24758,12 @@
           <a:p>
             <a:pPr indent="0" marL="0">
               <a:lnSpc>
-                <a:spcPts val="1700"/>
+                <a:spcPts val="1600"/>
               </a:lnSpc>
               <a:buNone/>
             </a:pPr>
             <a:r>
-              <a:rPr lang="en-US" sz="1300" dirty="0">
+              <a:rPr lang="en-US" sz="1200" dirty="0">
                 <a:solidFill>
                   <a:srgbClr val="3C3C3C"/>
                 </a:solidFill>
@@ -25348,9 +24771,27 @@
                 <a:ea typeface="Pretendard" pitchFamily="34" charset="-122"/>
                 <a:cs typeface="Pretendard" pitchFamily="34" charset="-120"/>
               </a:rPr>
-              <a:t>펭귄 캐릭터 중심의 광고·SNS·팝업스토어.</a:t>
-            </a:r>
-            <a:endParaRPr lang="en-US" sz="1300" dirty="0"/>
+              <a:t>타깃 설정과 포지셔닝 제안
+</a:t>
+            </a:r>
+            <a:pPr indent="0" marL="0">
+              <a:lnSpc>
+                <a:spcPts val="1600"/>
+              </a:lnSpc>
+              <a:buNone/>
+            </a:pPr>
+            <a:r>
+              <a:rPr lang="en-US" sz="1200" b="1" dirty="0">
+                <a:solidFill>
+                  <a:srgbClr val="191919"/>
+                </a:solidFill>
+                <a:latin typeface="Pretendard" pitchFamily="34" charset="0"/>
+                <a:ea typeface="Pretendard" pitchFamily="34" charset="-122"/>
+                <a:cs typeface="Pretendard" pitchFamily="34" charset="-120"/>
+              </a:rPr>
+              <a:t>→ 독립생활 중인 2030에게 청호 얼음정수기와 함께하는 차별적인 홈카페 경험 제공</a:t>
+            </a:r>
+            <a:endParaRPr lang="en-US" sz="1200" dirty="0"/>
           </a:p>
         </p:txBody>
       </p:sp>
@@ -25362,8 +24803,8 @@
         </p:nvSpPr>
         <p:spPr>
           <a:xfrm>
-            <a:off x="6553048" y="3474720"/>
-            <a:ext cx="64008" cy="64008"/>
+            <a:off x="6617056" y="3803904"/>
+            <a:ext cx="50292" cy="50292"/>
           </a:xfrm>
           <a:prstGeom prst="ellipse">
             <a:avLst/>
@@ -25382,8 +24823,8 @@
         </p:nvSpPr>
         <p:spPr>
           <a:xfrm>
-            <a:off x="6735928" y="3383280"/>
-            <a:ext cx="4541368" cy="548640"/>
+            <a:off x="6772504" y="3721608"/>
+            <a:ext cx="4468216" cy="292608"/>
           </a:xfrm>
           <a:prstGeom prst="rect">
             <a:avLst/>
@@ -25397,12 +24838,12 @@
           <a:p>
             <a:pPr indent="0" marL="0">
               <a:lnSpc>
-                <a:spcPts val="1700"/>
+                <a:spcPts val="1350"/>
               </a:lnSpc>
               <a:buNone/>
             </a:pPr>
             <a:r>
-              <a:rPr lang="en-US" sz="1300" dirty="0">
+              <a:rPr lang="en-US" sz="1200" dirty="0">
                 <a:solidFill>
                   <a:srgbClr val="3C3C3C"/>
                 </a:solidFill>
@@ -25410,9 +24851,9 @@
                 <a:ea typeface="Pretendard" pitchFamily="34" charset="-122"/>
                 <a:cs typeface="Pretendard" pitchFamily="34" charset="-120"/>
               </a:rPr>
-              <a:t>매번 다른 콘텐츠가 하나의 캐릭터 서사로 쌓인다.</a:t>
-            </a:r>
-            <a:endParaRPr lang="en-US" sz="1300" dirty="0"/>
+              <a:t>온라인 커뮤니케이션 : 청호나이스의 펭귄 마스코트 캐릭터 전략</a:t>
+            </a:r>
+            <a:endParaRPr lang="en-US" sz="1200" dirty="0"/>
           </a:p>
         </p:txBody>
       </p:sp>
@@ -25424,8 +24865,8 @@
         </p:nvSpPr>
         <p:spPr>
           <a:xfrm>
-            <a:off x="6553048" y="4041648"/>
-            <a:ext cx="64008" cy="64008"/>
+            <a:off x="6617056" y="4224528"/>
+            <a:ext cx="50292" cy="50292"/>
           </a:xfrm>
           <a:prstGeom prst="ellipse">
             <a:avLst/>
@@ -25444,8 +24885,8 @@
         </p:nvSpPr>
         <p:spPr>
           <a:xfrm>
-            <a:off x="6735928" y="3950208"/>
-            <a:ext cx="4541368" cy="548640"/>
+            <a:off x="6772504" y="4142232"/>
+            <a:ext cx="4468216" cy="292608"/>
           </a:xfrm>
           <a:prstGeom prst="rect">
             <a:avLst/>
@@ -25459,12 +24900,12 @@
           <a:p>
             <a:pPr indent="0" marL="0">
               <a:lnSpc>
-                <a:spcPts val="1700"/>
+                <a:spcPts val="1350"/>
               </a:lnSpc>
               <a:buNone/>
             </a:pPr>
             <a:r>
-              <a:rPr lang="en-US" sz="1300" dirty="0">
+              <a:rPr lang="en-US" sz="1200" dirty="0">
                 <a:solidFill>
                   <a:srgbClr val="3C3C3C"/>
                 </a:solidFill>
@@ -25472,115 +24913,81 @@
                 <a:ea typeface="Pretendard" pitchFamily="34" charset="-122"/>
                 <a:cs typeface="Pretendard" pitchFamily="34" charset="-120"/>
               </a:rPr>
-              <a:t>과거 청호나이스가 만든 캐릭터 자산을 다시 활용한다.</a:t>
-            </a:r>
-            <a:endParaRPr lang="en-US" sz="1300" dirty="0"/>
-          </a:p>
-        </p:txBody>
-      </p:sp>
-      <p:sp>
-        <p:nvSpPr>
-          <p:cNvPr id="21" name="Text 19"/>
-          <p:cNvSpPr/>
-          <p:nvPr/>
-        </p:nvSpPr>
-        <p:spPr>
-          <a:xfrm>
-            <a:off x="0" y="4626864"/>
-            <a:ext cx="12191695" cy="274320"/>
-          </a:xfrm>
-          <a:prstGeom prst="rect">
-            <a:avLst/>
-          </a:prstGeom>
-          <a:noFill/>
-          <a:ln/>
-        </p:spPr>
-        <p:txBody>
-          <a:bodyPr wrap="square" lIns="0" tIns="0" rIns="0" bIns="0" rtlCol="0" anchor="t"/>
-          <a:lstStyle/>
-          <a:p>
-            <a:pPr algn="ctr" indent="0" marL="0">
-              <a:buNone/>
-            </a:pPr>
-            <a:r>
-              <a:rPr lang="en-US" sz="2000" dirty="0">
-                <a:solidFill>
-                  <a:srgbClr val="0057FF"/>
-                </a:solidFill>
-                <a:latin typeface="Pretendard" pitchFamily="34" charset="0"/>
-                <a:ea typeface="Pretendard" pitchFamily="34" charset="-122"/>
-                <a:cs typeface="Pretendard" pitchFamily="34" charset="-120"/>
-              </a:rPr>
-              <a:t>↓</a:t>
-            </a:r>
-            <a:endParaRPr lang="en-US" sz="2000" dirty="0"/>
-          </a:p>
-        </p:txBody>
-      </p:sp>
-      <p:sp>
-        <p:nvSpPr>
-          <p:cNvPr id="22" name="Shape 20"/>
-          <p:cNvSpPr/>
-          <p:nvPr/>
-        </p:nvSpPr>
-        <p:spPr>
-          <a:xfrm>
-            <a:off x="3261208" y="4956048"/>
-            <a:ext cx="5669280" cy="548640"/>
+              <a:t>오프라인 커뮤니케이션 캠페인 : 캐릭터 + 팝업스토어 아이디어 제안</a:t>
+            </a:r>
+            <a:endParaRPr lang="en-US" sz="1200" dirty="0"/>
+          </a:p>
+        </p:txBody>
+      </p:sp>
+      <p:sp>
+        <p:nvSpPr>
+          <p:cNvPr id="21" name="Shape 19"/>
+          <p:cNvSpPr/>
+          <p:nvPr/>
+        </p:nvSpPr>
+        <p:spPr>
+          <a:xfrm>
+            <a:off x="658368" y="5029200"/>
+            <a:ext cx="10874959" cy="749808"/>
           </a:xfrm>
           <a:prstGeom prst="roundRect">
             <a:avLst>
-              <a:gd name="adj" fmla="val 16667"/>
+              <a:gd name="adj" fmla="val 10976"/>
             </a:avLst>
           </a:prstGeom>
           <a:solidFill>
             <a:srgbClr val="0057FF"/>
           </a:solidFill>
-          <a:ln/>
-        </p:spPr>
+          <a:ln w="12700">
+            <a:solidFill>
+              <a:srgbClr val="0057FF"/>
+            </a:solidFill>
+            <a:prstDash val="solid"/>
+          </a:ln>
+        </p:spPr>
+      </p:sp>
+      <p:sp>
+        <p:nvSpPr>
+          <p:cNvPr id="22" name="Text 20"/>
+          <p:cNvSpPr/>
+          <p:nvPr/>
+        </p:nvSpPr>
+        <p:spPr>
+          <a:xfrm>
+            <a:off x="932688" y="5029200"/>
+            <a:ext cx="10326319" cy="749808"/>
+          </a:xfrm>
+          <a:prstGeom prst="rect">
+            <a:avLst/>
+          </a:prstGeom>
+          <a:noFill/>
+          <a:ln/>
+        </p:spPr>
+        <p:txBody>
+          <a:bodyPr wrap="square" lIns="0" tIns="0" rIns="0" bIns="0" rtlCol="0" anchor="ctr"/>
+          <a:lstStyle/>
+          <a:p>
+            <a:pPr algn="ctr" indent="0" marL="0">
+              <a:buNone/>
+            </a:pPr>
+            <a:r>
+              <a:rPr lang="en-US" sz="1400" b="1" dirty="0">
+                <a:solidFill>
+                  <a:srgbClr val="FFFFFF"/>
+                </a:solidFill>
+                <a:latin typeface="Pretendard" pitchFamily="34" charset="0"/>
+                <a:ea typeface="Pretendard" pitchFamily="34" charset="-122"/>
+                <a:cs typeface="Pretendard" pitchFamily="34" charset="-120"/>
+              </a:rPr>
+              <a:t>목표 : 경쟁사의 전략과 청호나이스만의 자산을 살펴본 뒤, 2030에게 차별점을 어필할 수 있는 커뮤니케이션 전략을 수립</a:t>
+            </a:r>
+            <a:endParaRPr lang="en-US" sz="1400" dirty="0"/>
+          </a:p>
+        </p:txBody>
       </p:sp>
       <p:sp>
         <p:nvSpPr>
           <p:cNvPr id="23" name="Text 21"/>
-          <p:cNvSpPr/>
-          <p:nvPr/>
-        </p:nvSpPr>
-        <p:spPr>
-          <a:xfrm>
-            <a:off x="3261208" y="4956048"/>
-            <a:ext cx="5669280" cy="548640"/>
-          </a:xfrm>
-          <a:prstGeom prst="rect">
-            <a:avLst/>
-          </a:prstGeom>
-          <a:noFill/>
-          <a:ln/>
-        </p:spPr>
-        <p:txBody>
-          <a:bodyPr wrap="square" lIns="0" tIns="0" rIns="0" bIns="0" rtlCol="0" anchor="ctr"/>
-          <a:lstStyle/>
-          <a:p>
-            <a:pPr algn="ctr" indent="0" marL="0">
-              <a:buNone/>
-            </a:pPr>
-            <a:r>
-              <a:rPr lang="en-US" sz="1700" b="1" dirty="0">
-                <a:solidFill>
-                  <a:srgbClr val="FFFFFF"/>
-                </a:solidFill>
-                <a:latin typeface="Pretendard" pitchFamily="34" charset="0"/>
-                <a:ea typeface="Pretendard" pitchFamily="34" charset="-122"/>
-                <a:cs typeface="Pretendard" pitchFamily="34" charset="-120"/>
-              </a:rPr>
-              <a:t>정수기 렌탈 브랜드의 적합도와 구매 유도 확대</a:t>
-            </a:r>
-            <a:endParaRPr lang="en-US" sz="1700" dirty="0"/>
-          </a:p>
-        </p:txBody>
-      </p:sp>
-      <p:sp>
-        <p:nvSpPr>
-          <p:cNvPr id="24" name="Text 22"/>
           <p:cNvSpPr/>
           <p:nvPr/>
         </p:nvSpPr>
@@ -25619,7 +25026,7 @@
       </p:sp>
       <p:sp>
         <p:nvSpPr>
-          <p:cNvPr id="25" name="Text 23"/>
+          <p:cNvPr id="24" name="Text 22"/>
           <p:cNvSpPr/>
           <p:nvPr/>
         </p:nvSpPr>
@@ -26014,7 +25421,7 @@
                 <a:ea typeface="Pretendard" pitchFamily="34" charset="-122"/>
                 <a:cs typeface="Pretendard" pitchFamily="34" charset="-120"/>
               </a:rPr>
-              <a:t>얼음정수기 광고는 다르지만,</a:t>
+              <a:t>각 브랜드마다 광고를 다르게 하지만,</a:t>
             </a:r>
             <a:endParaRPr lang="en-US" sz="2300" dirty="0"/>
           </a:p>
@@ -26034,7 +25441,7 @@
                 <a:ea typeface="Pretendard" pitchFamily="34" charset="-122"/>
                 <a:cs typeface="Pretendard" pitchFamily="34" charset="-120"/>
               </a:rPr>
-              <a:t>기억에는 </a:t>
+              <a:t>소비자의 기억에는 </a:t>
             </a:r>
             <a:pPr indent="0" marL="0">
               <a:lnSpc>
@@ -26107,7 +25514,7 @@
                 <a:ea typeface="Pretendard" pitchFamily="34" charset="-122"/>
                 <a:cs typeface="Pretendard" pitchFamily="34" charset="-120"/>
               </a:rPr>
-              <a:t>코OO</a:t>
+              <a:t>브랜드A</a:t>
             </a:r>
             <a:endParaRPr lang="en-US" sz="1400" dirty="0"/>
           </a:p>
@@ -26210,7 +25617,7 @@
                 <a:ea typeface="Pretendard" pitchFamily="34" charset="-122"/>
                 <a:cs typeface="Pretendard" pitchFamily="34" charset="-120"/>
               </a:rPr>
-              <a:t>SKOO</a:t>
+              <a:t>브랜드B</a:t>
             </a:r>
             <a:endParaRPr lang="en-US" sz="1400" dirty="0"/>
           </a:p>
@@ -26313,7 +25720,7 @@
                 <a:ea typeface="Pretendard" pitchFamily="34" charset="-122"/>
                 <a:cs typeface="Pretendard" pitchFamily="34" charset="-120"/>
               </a:rPr>
-              <a:t>쿠OO</a:t>
+              <a:t>브랜드C</a:t>
             </a:r>
             <a:endParaRPr lang="en-US" sz="1400" dirty="0"/>
           </a:p>
@@ -26416,7 +25823,7 @@
                 <a:ea typeface="Pretendard" pitchFamily="34" charset="-122"/>
                 <a:cs typeface="Pretendard" pitchFamily="34" charset="-120"/>
               </a:rPr>
-              <a:t>LGOO</a:t>
+              <a:t>브랜드D</a:t>
             </a:r>
             <a:endParaRPr lang="en-US" sz="1400" dirty="0"/>
           </a:p>
@@ -27229,7 +26636,7 @@
                 <a:ea typeface="Pretendard" pitchFamily="34" charset="-122"/>
                 <a:cs typeface="Pretendard" pitchFamily="34" charset="-120"/>
               </a:rPr>
-              <a:t>각기 다른 </a:t>
+              <a:t>현재 청호나이스 </a:t>
             </a:r>
             <a:pPr indent="0" marL="0">
               <a:lnSpc>
@@ -27246,24 +26653,7 @@
                 <a:ea typeface="Pretendard" pitchFamily="34" charset="-122"/>
                 <a:cs typeface="Pretendard" pitchFamily="34" charset="-120"/>
               </a:rPr>
-              <a:t>콘텐츠의 방향</a:t>
-            </a:r>
-            <a:pPr indent="0" marL="0">
-              <a:lnSpc>
-                <a:spcPts val="3328"/>
-              </a:lnSpc>
-              <a:buNone/>
-            </a:pPr>
-            <a:r>
-              <a:rPr lang="en-US" sz="2600" b="1" dirty="0">
-                <a:solidFill>
-                  <a:srgbClr val="191919"/>
-                </a:solidFill>
-                <a:latin typeface="Pretendard" pitchFamily="34" charset="0"/>
-                <a:ea typeface="Pretendard" pitchFamily="34" charset="-122"/>
-                <a:cs typeface="Pretendard" pitchFamily="34" charset="-120"/>
-              </a:rPr>
-              <a:t>.</a:t>
+              <a:t>콘텐츠 방향</a:t>
             </a:r>
             <a:endParaRPr lang="en-US" sz="2600" dirty="0"/>
           </a:p>
@@ -27271,7 +26661,7 @@
       </p:sp>
       <p:pic>
         <p:nvPicPr>
-          <p:cNvPr id="5" name="Image 0" descr="/home/user/CHAI-AI/assets/img/cho-coolcool.jpg">    </p:cNvPr>
+          <p:cNvPr id="5" name="Image 0" descr="/home/user/CHAI-AI/assets/img/ad-coolcool.jpg">    </p:cNvPr>
           <p:cNvPicPr>
             <a:picLocks noChangeAspect="1"/>
           </p:cNvPicPr>
@@ -27284,8 +26674,8 @@
         </p:blipFill>
         <p:spPr>
           <a:xfrm>
-            <a:off x="658368" y="2057400"/>
-            <a:ext cx="2540432" cy="1428993"/>
+            <a:off x="658368" y="1920240"/>
+            <a:ext cx="3442106" cy="1936185"/>
           </a:xfrm>
           <a:prstGeom prst="rect">
             <a:avLst/>
@@ -27307,8 +26697,8 @@
         </p:nvSpPr>
         <p:spPr>
           <a:xfrm>
-            <a:off x="658368" y="3596121"/>
-            <a:ext cx="2540432" cy="256032"/>
+            <a:off x="658368" y="3947865"/>
+            <a:ext cx="3442106" cy="310896"/>
           </a:xfrm>
           <a:prstGeom prst="rect">
             <a:avLst/>
@@ -27335,7 +26725,7 @@
                 <a:ea typeface="Pretendard" pitchFamily="34" charset="-122"/>
                 <a:cs typeface="Pretendard" pitchFamily="34" charset="-120"/>
               </a:rPr>
-              <a:t>The M 얼음정수기 ‘시원시원’편</a:t>
+              <a:t>청호나이스┃The M 얼음정수기 ‘시원시원’편 광고 30s</a:t>
             </a:r>
             <a:endParaRPr lang="en-US" sz="850" dirty="0"/>
           </a:p>
@@ -27343,7 +26733,7 @@
       </p:sp>
       <p:pic>
         <p:nvPicPr>
-          <p:cNvPr id="7" name="Image 1" descr="/home/user/CHAI-AI/assets/img/cho-icetree.jpg">    </p:cNvPr>
+          <p:cNvPr id="7" name="Image 1" descr="/home/user/CHAI-AI/assets/img/ad-lovelytree.jpg">    </p:cNvPr>
           <p:cNvPicPr>
             <a:picLocks noChangeAspect="1"/>
           </p:cNvPicPr>
@@ -27356,8 +26746,8 @@
         </p:blipFill>
         <p:spPr>
           <a:xfrm>
-            <a:off x="3436544" y="2057400"/>
-            <a:ext cx="2540432" cy="1428993"/>
+            <a:off x="4374794" y="1920240"/>
+            <a:ext cx="3442106" cy="1936185"/>
           </a:xfrm>
           <a:prstGeom prst="rect">
             <a:avLst/>
@@ -27379,8 +26769,8 @@
         </p:nvSpPr>
         <p:spPr>
           <a:xfrm>
-            <a:off x="3436544" y="3596121"/>
-            <a:ext cx="2540432" cy="256032"/>
+            <a:off x="4374794" y="3947865"/>
+            <a:ext cx="3442106" cy="310896"/>
           </a:xfrm>
           <a:prstGeom prst="rect">
             <a:avLst/>
@@ -27407,7 +26797,7 @@
                 <a:ea typeface="Pretendard" pitchFamily="34" charset="-122"/>
                 <a:cs typeface="Pretendard" pitchFamily="34" charset="-120"/>
               </a:rPr>
-              <a:t>뉴 아이스트리 ‘얼음나무’편</a:t>
+              <a:t>청호나이스┃뉴 러블리트리 ‘러블리한 일상의 시작(캐릭터 ver.)’편 CF</a:t>
             </a:r>
             <a:endParaRPr lang="en-US" sz="850" dirty="0"/>
           </a:p>
@@ -27415,7 +26805,7 @@
       </p:sp>
       <p:pic>
         <p:nvPicPr>
-          <p:cNvPr id="9" name="Image 2" descr="/home/user/CHAI-AI/assets/img/cho-lovelytree.jpg">    </p:cNvPr>
+          <p:cNvPr id="9" name="Image 2" descr="/home/user/CHAI-AI/assets/img/ad-seongeutda.jpg">    </p:cNvPr>
           <p:cNvPicPr>
             <a:picLocks noChangeAspect="1"/>
           </p:cNvPicPr>
@@ -27428,8 +26818,8 @@
         </p:blipFill>
         <p:spPr>
           <a:xfrm>
-            <a:off x="6214720" y="2057400"/>
-            <a:ext cx="2540432" cy="1428993"/>
+            <a:off x="8091221" y="1920240"/>
+            <a:ext cx="3442106" cy="1936185"/>
           </a:xfrm>
           <a:prstGeom prst="rect">
             <a:avLst/>
@@ -27451,8 +26841,8 @@
         </p:nvSpPr>
         <p:spPr>
           <a:xfrm>
-            <a:off x="6214720" y="3596121"/>
-            <a:ext cx="2540432" cy="256032"/>
+            <a:off x="8091221" y="3947865"/>
+            <a:ext cx="3442106" cy="310896"/>
           </a:xfrm>
           <a:prstGeom prst="rect">
             <a:avLst/>
@@ -27479,7 +26869,7 @@
                 <a:ea typeface="Pretendard" pitchFamily="34" charset="-122"/>
                 <a:cs typeface="Pretendard" pitchFamily="34" charset="-120"/>
               </a:rPr>
-              <a:t>뉴 러블리트리 브랜드필름</a:t>
+              <a:t>청호나이스┃The M 얼음정수기 ‘선긋다’편 광고 30s</a:t>
             </a:r>
             <a:endParaRPr lang="en-US" sz="850" dirty="0"/>
           </a:p>
@@ -27487,7 +26877,7 @@
       </p:sp>
       <p:pic>
         <p:nvPicPr>
-          <p:cNvPr id="11" name="Image 3" descr="/home/user/CHAI-AI/assets/img/cho-whicafe.jpg">    </p:cNvPr>
+          <p:cNvPr id="11" name="Image 3" descr="/home/user/CHAI-AI/assets/img/ad-blackedition.jpg">    </p:cNvPr>
           <p:cNvPicPr>
             <a:picLocks noChangeAspect="1"/>
           </p:cNvPicPr>
@@ -27500,8 +26890,8 @@
         </p:blipFill>
         <p:spPr>
           <a:xfrm>
-            <a:off x="8992895" y="2057400"/>
-            <a:ext cx="2540432" cy="1428993"/>
+            <a:off x="658368" y="4478217"/>
+            <a:ext cx="3442106" cy="1936185"/>
           </a:xfrm>
           <a:prstGeom prst="rect">
             <a:avLst/>
@@ -27523,8 +26913,8 @@
         </p:nvSpPr>
         <p:spPr>
           <a:xfrm>
-            <a:off x="8992895" y="3596121"/>
-            <a:ext cx="2540432" cy="256032"/>
+            <a:off x="658368" y="6505842"/>
+            <a:ext cx="3442106" cy="310896"/>
           </a:xfrm>
           <a:prstGeom prst="rect">
             <a:avLst/>
@@ -27551,44 +26941,52 @@
                 <a:ea typeface="Pretendard" pitchFamily="34" charset="-122"/>
                 <a:cs typeface="Pretendard" pitchFamily="34" charset="-120"/>
               </a:rPr>
-              <a:t>휘카페 ‘정수기에서 커피가 나와’편</a:t>
+              <a:t>청호나이스┃‘에스프레카페 블랙 에디션’ AI 활용 콘텐츠</a:t>
             </a:r>
             <a:endParaRPr lang="en-US" sz="850" dirty="0"/>
           </a:p>
         </p:txBody>
       </p:sp>
-      <p:sp>
-        <p:nvSpPr>
-          <p:cNvPr id="13" name="Shape 7"/>
-          <p:cNvSpPr/>
-          <p:nvPr/>
-        </p:nvSpPr>
-        <p:spPr>
-          <a:xfrm>
-            <a:off x="658368" y="4263633"/>
-            <a:ext cx="10874959" cy="914400"/>
-          </a:xfrm>
-          <a:prstGeom prst="roundRect">
-            <a:avLst>
-              <a:gd name="adj" fmla="val 9000"/>
-            </a:avLst>
-          </a:prstGeom>
-          <a:solidFill>
-            <a:srgbClr val="F5F5F7"/>
-          </a:solidFill>
-          <a:ln/>
-        </p:spPr>
-      </p:sp>
-      <p:sp>
-        <p:nvSpPr>
-          <p:cNvPr id="14" name="Text 8"/>
-          <p:cNvSpPr/>
-          <p:nvPr/>
-        </p:nvSpPr>
-        <p:spPr>
-          <a:xfrm>
-            <a:off x="932688" y="4446513"/>
-            <a:ext cx="10326319" cy="566928"/>
+      <p:pic>
+        <p:nvPicPr>
+          <p:cNvPr id="13" name="Image 4" descr="/home/user/CHAI-AI/assets/img/ad-yeouido.jpg">    </p:cNvPr>
+          <p:cNvPicPr>
+            <a:picLocks noChangeAspect="1"/>
+          </p:cNvPicPr>
+          <p:nvPr/>
+        </p:nvPicPr>
+        <p:blipFill>
+          <a:blip r:embed="rId5"/>
+          <a:srcRect l="0" r="0" t="0" b="0"/>
+          <a:stretch/>
+        </p:blipFill>
+        <p:spPr>
+          <a:xfrm>
+            <a:off x="4374794" y="4478217"/>
+            <a:ext cx="3442106" cy="1936185"/>
+          </a:xfrm>
+          <a:prstGeom prst="rect">
+            <a:avLst/>
+          </a:prstGeom>
+          <a:effectLst>
+            <a:outerShdw sx="100000" sy="100000" kx="0" ky="0" algn="bl" rotWithShape="0" blurRad="177800" dist="50800" dir="5400000">
+              <a:srgbClr val="191919">
+                <a:alpha val="22000"/>
+              </a:srgbClr>
+            </a:outerShdw>
+          </a:effectLst>
+        </p:spPr>
+      </p:pic>
+      <p:sp>
+        <p:nvSpPr>
+          <p:cNvPr id="14" name="Text 7"/>
+          <p:cNvSpPr/>
+          <p:nvPr/>
+        </p:nvSpPr>
+        <p:spPr>
+          <a:xfrm>
+            <a:off x="4374794" y="6505842"/>
+            <a:ext cx="3442106" cy="310896"/>
           </a:xfrm>
           <a:prstGeom prst="rect">
             <a:avLst/>
@@ -27602,34 +27000,106 @@
           <a:p>
             <a:pPr indent="0" marL="0">
               <a:lnSpc>
-                <a:spcPts val="1800"/>
+                <a:spcPts val="1100"/>
               </a:lnSpc>
               <a:buNone/>
             </a:pPr>
             <a:r>
-              <a:rPr lang="en-US" sz="1250" dirty="0">
-                <a:solidFill>
-                  <a:srgbClr val="191919"/>
-                </a:solidFill>
-                <a:latin typeface="Pretendard" pitchFamily="34" charset="0"/>
-                <a:ea typeface="Pretendard" pitchFamily="34" charset="-122"/>
-                <a:cs typeface="Pretendard" pitchFamily="34" charset="-120"/>
-              </a:rPr>
-              <a:t>청호나이스는 숏폼과 AI 콘텐츠를 적극적으로 만들고 있다. 문제는 형식이 아니라 축적이다. 콘텐츠마다 말이 달라, 2030이 제품을 선택해야 할 이유가 하나의 브랜드 인상으로 남지 않는다.</a:t>
-            </a:r>
-            <a:endParaRPr lang="en-US" sz="1250" dirty="0"/>
-          </a:p>
-        </p:txBody>
-      </p:sp>
-      <p:sp>
-        <p:nvSpPr>
-          <p:cNvPr id="15" name="Text 9"/>
-          <p:cNvSpPr/>
-          <p:nvPr/>
-        </p:nvSpPr>
-        <p:spPr>
-          <a:xfrm>
-            <a:off x="658368" y="5324337"/>
+              <a:rPr lang="en-US" sz="850" dirty="0">
+                <a:solidFill>
+                  <a:srgbClr val="707070"/>
+                </a:solidFill>
+                <a:latin typeface="Pretendard" pitchFamily="34" charset="0"/>
+                <a:ea typeface="Pretendard" pitchFamily="34" charset="-122"/>
+                <a:cs typeface="Pretendard" pitchFamily="34" charset="-120"/>
+              </a:rPr>
+              <a:t>청호나이스┃The M 여의도 상륙 작전 (숏폼)</a:t>
+            </a:r>
+            <a:endParaRPr lang="en-US" sz="850" dirty="0"/>
+          </a:p>
+        </p:txBody>
+      </p:sp>
+      <p:pic>
+        <p:nvPicPr>
+          <p:cNvPr id="15" name="Image 5" descr="/home/user/CHAI-AI/assets/img/ad-summer.jpg">    </p:cNvPr>
+          <p:cNvPicPr>
+            <a:picLocks noChangeAspect="1"/>
+          </p:cNvPicPr>
+          <p:nvPr/>
+        </p:nvPicPr>
+        <p:blipFill>
+          <a:blip r:embed="rId6"/>
+          <a:srcRect l="0" r="0" t="0" b="0"/>
+          <a:stretch/>
+        </p:blipFill>
+        <p:spPr>
+          <a:xfrm>
+            <a:off x="8091221" y="4478217"/>
+            <a:ext cx="3442106" cy="1936185"/>
+          </a:xfrm>
+          <a:prstGeom prst="rect">
+            <a:avLst/>
+          </a:prstGeom>
+          <a:effectLst>
+            <a:outerShdw sx="100000" sy="100000" kx="0" ky="0" algn="bl" rotWithShape="0" blurRad="177800" dist="50800" dir="5400000">
+              <a:srgbClr val="191919">
+                <a:alpha val="22000"/>
+              </a:srgbClr>
+            </a:outerShdw>
+          </a:effectLst>
+        </p:spPr>
+      </p:pic>
+      <p:sp>
+        <p:nvSpPr>
+          <p:cNvPr id="16" name="Text 8"/>
+          <p:cNvSpPr/>
+          <p:nvPr/>
+        </p:nvSpPr>
+        <p:spPr>
+          <a:xfrm>
+            <a:off x="8091221" y="6505842"/>
+            <a:ext cx="3442106" cy="310896"/>
+          </a:xfrm>
+          <a:prstGeom prst="rect">
+            <a:avLst/>
+          </a:prstGeom>
+          <a:noFill/>
+          <a:ln/>
+        </p:spPr>
+        <p:txBody>
+          <a:bodyPr wrap="square" lIns="0" tIns="0" rIns="0" bIns="0" rtlCol="0" anchor="t"/>
+          <a:lstStyle/>
+          <a:p>
+            <a:pPr indent="0" marL="0">
+              <a:lnSpc>
+                <a:spcPts val="1100"/>
+              </a:lnSpc>
+              <a:buNone/>
+            </a:pPr>
+            <a:r>
+              <a:rPr lang="en-US" sz="850" dirty="0">
+                <a:solidFill>
+                  <a:srgbClr val="707070"/>
+                </a:solidFill>
+                <a:latin typeface="Pretendard" pitchFamily="34" charset="0"/>
+                <a:ea typeface="Pretendard" pitchFamily="34" charset="-122"/>
+                <a:cs typeface="Pretendard" pitchFamily="34" charset="-120"/>
+              </a:rPr>
+              <a:t>찾았다 무더운 여름 시원하게 보내는 방법 (숏폼)</a:t>
+            </a:r>
+            <a:endParaRPr lang="en-US" sz="850" dirty="0"/>
+          </a:p>
+        </p:txBody>
+      </p:sp>
+      <p:sp>
+        <p:nvSpPr>
+          <p:cNvPr id="17" name="Text 9"/>
+          <p:cNvSpPr/>
+          <p:nvPr/>
+        </p:nvSpPr>
+        <p:spPr>
+          <a:xfrm>
+            <a:off x="658368" y="6053328"/>
             <a:ext cx="10874959" cy="219456"/>
           </a:xfrm>
           <a:prstGeom prst="rect">
@@ -27642,7 +27112,7 @@
           <a:bodyPr wrap="square" lIns="0" tIns="0" rIns="0" bIns="0" rtlCol="0" anchor="t"/>
           <a:lstStyle/>
           <a:p>
-            <a:pPr indent="0" marL="0">
+            <a:pPr algn="r" indent="0" marL="0">
               <a:buNone/>
             </a:pPr>
             <a:r>
@@ -27654,7 +27124,7 @@
                 <a:ea typeface="Pretendard" pitchFamily="34" charset="-122"/>
                 <a:cs typeface="Pretendard" pitchFamily="34" charset="-120"/>
               </a:rPr>
-              <a:t>출처: 청호나이스 공식 유튜브.</a:t>
+              <a:t>출처: 청호나이스 공식 유튜브</a:t>
             </a:r>
             <a:endParaRPr lang="en-US" sz="800" dirty="0"/>
           </a:p>
@@ -27662,7 +27132,7 @@
       </p:sp>
       <p:sp>
         <p:nvSpPr>
-          <p:cNvPr id="16" name="Text 10"/>
+          <p:cNvPr id="18" name="Text 10"/>
           <p:cNvSpPr/>
           <p:nvPr/>
         </p:nvSpPr>
@@ -27701,7 +27171,7 @@
       </p:sp>
       <p:sp>
         <p:nvSpPr>
-          <p:cNvPr id="17" name="Text 11"/>
+          <p:cNvPr id="19" name="Text 11"/>
           <p:cNvSpPr/>
           <p:nvPr/>
         </p:nvSpPr>
@@ -27770,117 +27240,159 @@
           <a:chExt cx="0" cy="0"/>
         </a:xfrm>
       </p:grpSpPr>
-      <p:sp>
-        <p:nvSpPr>
-          <p:cNvPr id="2" name="Shape 0"/>
-          <p:cNvSpPr/>
-          <p:nvPr/>
-        </p:nvSpPr>
-        <p:spPr>
-          <a:xfrm>
-            <a:off x="658368" y="1828800"/>
-            <a:ext cx="2526716" cy="2377440"/>
-          </a:xfrm>
-          <a:prstGeom prst="roundRect">
-            <a:avLst>
-              <a:gd name="adj" fmla="val 3462"/>
-            </a:avLst>
-          </a:prstGeom>
-          <a:solidFill>
-            <a:srgbClr val="E7E7EA"/>
-          </a:solidFill>
-          <a:ln w="12700">
-            <a:solidFill>
-              <a:srgbClr val="DEDEE1"/>
-            </a:solidFill>
-            <a:prstDash val="solid"/>
-          </a:ln>
-        </p:spPr>
-      </p:sp>
-      <p:sp>
-        <p:nvSpPr>
-          <p:cNvPr id="3" name="Shape 1"/>
-          <p:cNvSpPr/>
-          <p:nvPr/>
-        </p:nvSpPr>
-        <p:spPr>
-          <a:xfrm>
-            <a:off x="3441116" y="1828800"/>
-            <a:ext cx="2526716" cy="2377440"/>
-          </a:xfrm>
-          <a:prstGeom prst="roundRect">
-            <a:avLst>
-              <a:gd name="adj" fmla="val 3462"/>
-            </a:avLst>
-          </a:prstGeom>
-          <a:solidFill>
-            <a:srgbClr val="E7E7EA"/>
-          </a:solidFill>
-          <a:ln w="12700">
-            <a:solidFill>
-              <a:srgbClr val="DEDEE1"/>
-            </a:solidFill>
-            <a:prstDash val="solid"/>
-          </a:ln>
-        </p:spPr>
-      </p:sp>
-      <p:sp>
-        <p:nvSpPr>
-          <p:cNvPr id="4" name="Shape 2"/>
-          <p:cNvSpPr/>
-          <p:nvPr/>
-        </p:nvSpPr>
-        <p:spPr>
-          <a:xfrm>
-            <a:off x="6223864" y="1828800"/>
-            <a:ext cx="2526716" cy="2377440"/>
-          </a:xfrm>
-          <a:prstGeom prst="roundRect">
-            <a:avLst>
-              <a:gd name="adj" fmla="val 3462"/>
-            </a:avLst>
-          </a:prstGeom>
-          <a:solidFill>
-            <a:srgbClr val="E7E7EA"/>
-          </a:solidFill>
-          <a:ln w="12700">
-            <a:solidFill>
-              <a:srgbClr val="DEDEE1"/>
-            </a:solidFill>
-            <a:prstDash val="solid"/>
-          </a:ln>
-        </p:spPr>
-      </p:sp>
-      <p:sp>
-        <p:nvSpPr>
-          <p:cNvPr id="5" name="Shape 3"/>
-          <p:cNvSpPr/>
-          <p:nvPr/>
-        </p:nvSpPr>
-        <p:spPr>
-          <a:xfrm>
-            <a:off x="9006611" y="1828800"/>
-            <a:ext cx="2526716" cy="2377440"/>
-          </a:xfrm>
-          <a:prstGeom prst="roundRect">
-            <a:avLst>
-              <a:gd name="adj" fmla="val 3462"/>
-            </a:avLst>
-          </a:prstGeom>
-          <a:solidFill>
-            <a:srgbClr val="E7E7EA"/>
-          </a:solidFill>
-          <a:ln w="12700">
-            <a:solidFill>
-              <a:srgbClr val="DEDEE1"/>
-            </a:solidFill>
-            <a:prstDash val="solid"/>
-          </a:ln>
-        </p:spPr>
-      </p:sp>
-      <p:sp>
-        <p:nvSpPr>
-          <p:cNvPr id="6" name="Shape 4"/>
+      <p:pic>
+        <p:nvPicPr>
+          <p:cNvPr id="2" name="Image 0" descr="/home/user/CHAI-AI/assets/img/ad-coolcool.jpg">    </p:cNvPr>
+          <p:cNvPicPr>
+            <a:picLocks noChangeAspect="1"/>
+          </p:cNvPicPr>
+          <p:nvPr/>
+        </p:nvPicPr>
+        <p:blipFill>
+          <a:blip r:embed="rId1">
+            <a:alphaModFix amt="28000"/>
+          </a:blip>
+          <a:srcRect l="0" r="0" t="0" b="0"/>
+          <a:stretch/>
+        </p:blipFill>
+        <p:spPr>
+          <a:xfrm>
+            <a:off x="658368" y="1600200"/>
+            <a:ext cx="3442106" cy="1936185"/>
+          </a:xfrm>
+          <a:prstGeom prst="rect">
+            <a:avLst/>
+          </a:prstGeom>
+        </p:spPr>
+      </p:pic>
+      <p:pic>
+        <p:nvPicPr>
+          <p:cNvPr id="3" name="Image 1" descr="/home/user/CHAI-AI/assets/img/ad-lovelytree.jpg">    </p:cNvPr>
+          <p:cNvPicPr>
+            <a:picLocks noChangeAspect="1"/>
+          </p:cNvPicPr>
+          <p:nvPr/>
+        </p:nvPicPr>
+        <p:blipFill>
+          <a:blip r:embed="rId2">
+            <a:alphaModFix amt="28000"/>
+          </a:blip>
+          <a:srcRect l="0" r="0" t="0" b="0"/>
+          <a:stretch/>
+        </p:blipFill>
+        <p:spPr>
+          <a:xfrm>
+            <a:off x="4374794" y="1600200"/>
+            <a:ext cx="3442106" cy="1936185"/>
+          </a:xfrm>
+          <a:prstGeom prst="rect">
+            <a:avLst/>
+          </a:prstGeom>
+        </p:spPr>
+      </p:pic>
+      <p:pic>
+        <p:nvPicPr>
+          <p:cNvPr id="4" name="Image 2" descr="/home/user/CHAI-AI/assets/img/ad-seongeutda.jpg">    </p:cNvPr>
+          <p:cNvPicPr>
+            <a:picLocks noChangeAspect="1"/>
+          </p:cNvPicPr>
+          <p:nvPr/>
+        </p:nvPicPr>
+        <p:blipFill>
+          <a:blip r:embed="rId3">
+            <a:alphaModFix amt="28000"/>
+          </a:blip>
+          <a:srcRect l="0" r="0" t="0" b="0"/>
+          <a:stretch/>
+        </p:blipFill>
+        <p:spPr>
+          <a:xfrm>
+            <a:off x="8091221" y="1600200"/>
+            <a:ext cx="3442106" cy="1936185"/>
+          </a:xfrm>
+          <a:prstGeom prst="rect">
+            <a:avLst/>
+          </a:prstGeom>
+        </p:spPr>
+      </p:pic>
+      <p:pic>
+        <p:nvPicPr>
+          <p:cNvPr id="5" name="Image 3" descr="/home/user/CHAI-AI/assets/img/ad-blackedition.jpg">    </p:cNvPr>
+          <p:cNvPicPr>
+            <a:picLocks noChangeAspect="1"/>
+          </p:cNvPicPr>
+          <p:nvPr/>
+        </p:nvPicPr>
+        <p:blipFill>
+          <a:blip r:embed="rId4">
+            <a:alphaModFix amt="28000"/>
+          </a:blip>
+          <a:srcRect l="0" r="0" t="0" b="0"/>
+          <a:stretch/>
+        </p:blipFill>
+        <p:spPr>
+          <a:xfrm>
+            <a:off x="658368" y="3856425"/>
+            <a:ext cx="3442106" cy="1936185"/>
+          </a:xfrm>
+          <a:prstGeom prst="rect">
+            <a:avLst/>
+          </a:prstGeom>
+        </p:spPr>
+      </p:pic>
+      <p:pic>
+        <p:nvPicPr>
+          <p:cNvPr id="6" name="Image 4" descr="/home/user/CHAI-AI/assets/img/ad-yeouido.jpg">    </p:cNvPr>
+          <p:cNvPicPr>
+            <a:picLocks noChangeAspect="1"/>
+          </p:cNvPicPr>
+          <p:nvPr/>
+        </p:nvPicPr>
+        <p:blipFill>
+          <a:blip r:embed="rId5">
+            <a:alphaModFix amt="28000"/>
+          </a:blip>
+          <a:srcRect l="0" r="0" t="0" b="0"/>
+          <a:stretch/>
+        </p:blipFill>
+        <p:spPr>
+          <a:xfrm>
+            <a:off x="4374794" y="3856425"/>
+            <a:ext cx="3442106" cy="1936185"/>
+          </a:xfrm>
+          <a:prstGeom prst="rect">
+            <a:avLst/>
+          </a:prstGeom>
+        </p:spPr>
+      </p:pic>
+      <p:pic>
+        <p:nvPicPr>
+          <p:cNvPr id="7" name="Image 5" descr="/home/user/CHAI-AI/assets/img/ad-summer.jpg">    </p:cNvPr>
+          <p:cNvPicPr>
+            <a:picLocks noChangeAspect="1"/>
+          </p:cNvPicPr>
+          <p:nvPr/>
+        </p:nvPicPr>
+        <p:blipFill>
+          <a:blip r:embed="rId6">
+            <a:alphaModFix amt="28000"/>
+          </a:blip>
+          <a:srcRect l="0" r="0" t="0" b="0"/>
+          <a:stretch/>
+        </p:blipFill>
+        <p:spPr>
+          <a:xfrm>
+            <a:off x="8091221" y="3856425"/>
+            <a:ext cx="3442106" cy="1936185"/>
+          </a:xfrm>
+          <a:prstGeom prst="rect">
+            <a:avLst/>
+          </a:prstGeom>
+        </p:spPr>
+      </p:pic>
+      <p:sp>
+        <p:nvSpPr>
+          <p:cNvPr id="8" name="Shape 0"/>
           <p:cNvSpPr/>
           <p:nvPr/>
         </p:nvSpPr>
@@ -27894,7 +27406,7 @@
           </a:prstGeom>
           <a:solidFill>
             <a:srgbClr val="F5F5F7">
-              <a:alpha val="74000"/>
+              <a:alpha val="78000"/>
             </a:srgbClr>
           </a:solidFill>
           <a:ln/>
@@ -27902,7 +27414,7 @@
       </p:sp>
       <p:sp>
         <p:nvSpPr>
-          <p:cNvPr id="7" name="Text 5"/>
+          <p:cNvPr id="9" name="Text 1"/>
           <p:cNvSpPr/>
           <p:nvPr/>
         </p:nvSpPr>
@@ -27941,7 +27453,7 @@
       </p:sp>
       <p:sp>
         <p:nvSpPr>
-          <p:cNvPr id="8" name="Text 6"/>
+          <p:cNvPr id="10" name="Text 2"/>
           <p:cNvSpPr/>
           <p:nvPr/>
         </p:nvSpPr>
@@ -28118,7 +27630,7 @@
         <p:spPr>
           <a:xfrm>
             <a:off x="658368" y="1024128"/>
-            <a:ext cx="10874959" cy="822960"/>
+            <a:ext cx="10874959" cy="731520"/>
           </a:xfrm>
           <a:prstGeom prst="rect">
             <a:avLst/>
@@ -28132,12 +27644,12 @@
           <a:p>
             <a:pPr indent="0" marL="0">
               <a:lnSpc>
-                <a:spcPts val="3000"/>
+                <a:spcPts val="3328"/>
               </a:lnSpc>
               <a:buNone/>
             </a:pPr>
             <a:r>
-              <a:rPr lang="en-US" sz="2300" b="1" dirty="0">
+              <a:rPr lang="en-US" sz="2600" b="1" dirty="0">
                 <a:solidFill>
                   <a:srgbClr val="191919"/>
                 </a:solidFill>
@@ -28145,19 +27657,33 @@
                 <a:ea typeface="Pretendard" pitchFamily="34" charset="-122"/>
                 <a:cs typeface="Pretendard" pitchFamily="34" charset="-120"/>
               </a:rPr>
-              <a:t>새로 만들기 전에,</a:t>
-            </a:r>
-            <a:endParaRPr lang="en-US" sz="2300" dirty="0"/>
-          </a:p>
-          <a:p>
+              <a:t>기존 자산을 </a:t>
+            </a:r>
             <a:pPr indent="0" marL="0">
               <a:lnSpc>
-                <a:spcPts val="3000"/>
+                <a:spcPts val="3328"/>
               </a:lnSpc>
               <a:buNone/>
             </a:pPr>
             <a:r>
-              <a:rPr lang="en-US" sz="2300" b="1" dirty="0">
+              <a:rPr lang="en-US" sz="2600" b="1" dirty="0">
+                <a:solidFill>
+                  <a:srgbClr val="0057FF"/>
+                </a:solidFill>
+                <a:latin typeface="Pretendard" pitchFamily="34" charset="0"/>
+                <a:ea typeface="Pretendard" pitchFamily="34" charset="-122"/>
+                <a:cs typeface="Pretendard" pitchFamily="34" charset="-120"/>
+              </a:rPr>
+              <a:t>브랜드 전략</a:t>
+            </a:r>
+            <a:pPr indent="0" marL="0">
+              <a:lnSpc>
+                <a:spcPts val="3328"/>
+              </a:lnSpc>
+              <a:buNone/>
+            </a:pPr>
+            <a:r>
+              <a:rPr lang="en-US" sz="2600" b="1" dirty="0">
                 <a:solidFill>
                   <a:srgbClr val="191919"/>
                 </a:solidFill>
@@ -28165,16 +27691,359 @@
                 <a:ea typeface="Pretendard" pitchFamily="34" charset="-122"/>
                 <a:cs typeface="Pretendard" pitchFamily="34" charset="-120"/>
               </a:rPr>
-              <a:t>이미 가진 것을 </a:t>
-            </a:r>
-            <a:pPr indent="0" marL="0">
+              <a:t>으로</a:t>
+            </a:r>
+            <a:endParaRPr lang="en-US" sz="2600" dirty="0"/>
+          </a:p>
+        </p:txBody>
+      </p:sp>
+      <p:pic>
+        <p:nvPicPr>
+          <p:cNvPr id="5" name="Image 0" descr="/home/user/CHAI-AI/assets/img/peng-then.jpg">    </p:cNvPr>
+          <p:cNvPicPr>
+            <a:picLocks noChangeAspect="1"/>
+          </p:cNvPicPr>
+          <p:nvPr/>
+        </p:nvPicPr>
+        <p:blipFill>
+          <a:blip r:embed="rId1"/>
+          <a:srcRect l="0" r="0" t="0" b="0"/>
+          <a:stretch/>
+        </p:blipFill>
+        <p:spPr>
+          <a:xfrm>
+            <a:off x="658368" y="2011680"/>
+            <a:ext cx="1999427" cy="1499570"/>
+          </a:xfrm>
+          <a:prstGeom prst="rect">
+            <a:avLst/>
+          </a:prstGeom>
+          <a:effectLst>
+            <a:outerShdw sx="100000" sy="100000" kx="0" ky="0" algn="bl" rotWithShape="0" blurRad="177800" dist="50800" dir="5400000">
+              <a:srgbClr val="191919">
+                <a:alpha val="22000"/>
+              </a:srgbClr>
+            </a:outerShdw>
+          </a:effectLst>
+        </p:spPr>
+      </p:pic>
+      <p:sp>
+        <p:nvSpPr>
+          <p:cNvPr id="6" name="Text 3"/>
+          <p:cNvSpPr/>
+          <p:nvPr/>
+        </p:nvSpPr>
+        <p:spPr>
+          <a:xfrm>
+            <a:off x="658368" y="3602690"/>
+            <a:ext cx="1999427" cy="274320"/>
+          </a:xfrm>
+          <a:prstGeom prst="rect">
+            <a:avLst/>
+          </a:prstGeom>
+          <a:noFill/>
+          <a:ln/>
+        </p:spPr>
+        <p:txBody>
+          <a:bodyPr wrap="square" lIns="0" tIns="0" rIns="0" bIns="0" rtlCol="0" anchor="t"/>
+          <a:lstStyle/>
+          <a:p>
+            <a:pPr algn="ctr" indent="0" marL="0">
               <a:lnSpc>
-                <a:spcPts val="3000"/>
+                <a:spcPts val="1100"/>
               </a:lnSpc>
               <a:buNone/>
             </a:pPr>
             <a:r>
-              <a:rPr lang="en-US" sz="2300" b="1" dirty="0">
+              <a:rPr lang="en-US" sz="850" dirty="0">
+                <a:solidFill>
+                  <a:srgbClr val="707070"/>
+                </a:solidFill>
+                <a:latin typeface="Pretendard" pitchFamily="34" charset="0"/>
+                <a:ea typeface="Pretendard" pitchFamily="34" charset="-122"/>
+                <a:cs typeface="Pretendard" pitchFamily="34" charset="-120"/>
+              </a:rPr>
+              <a:t>과거 펭귄 광고 캐릭터</a:t>
+            </a:r>
+            <a:endParaRPr lang="en-US" sz="850" dirty="0"/>
+          </a:p>
+        </p:txBody>
+      </p:sp>
+      <p:pic>
+        <p:nvPicPr>
+          <p:cNvPr id="7" name="Image 1" descr="/home/user/CHAI-AI/assets/img/asset-mini.jpg">    </p:cNvPr>
+          <p:cNvPicPr>
+            <a:picLocks noChangeAspect="1"/>
+          </p:cNvPicPr>
+          <p:nvPr/>
+        </p:nvPicPr>
+        <p:blipFill>
+          <a:blip r:embed="rId2"/>
+          <a:srcRect l="0" r="0" t="0" b="0"/>
+          <a:stretch/>
+        </p:blipFill>
+        <p:spPr>
+          <a:xfrm>
+            <a:off x="2877251" y="2011680"/>
+            <a:ext cx="1999427" cy="1499570"/>
+          </a:xfrm>
+          <a:prstGeom prst="rect">
+            <a:avLst/>
+          </a:prstGeom>
+          <a:effectLst>
+            <a:outerShdw sx="100000" sy="100000" kx="0" ky="0" algn="bl" rotWithShape="0" blurRad="177800" dist="50800" dir="5400000">
+              <a:srgbClr val="191919">
+                <a:alpha val="22000"/>
+              </a:srgbClr>
+            </a:outerShdw>
+          </a:effectLst>
+        </p:spPr>
+      </p:pic>
+      <p:sp>
+        <p:nvSpPr>
+          <p:cNvPr id="8" name="Text 4"/>
+          <p:cNvSpPr/>
+          <p:nvPr/>
+        </p:nvSpPr>
+        <p:spPr>
+          <a:xfrm>
+            <a:off x="2877251" y="3602690"/>
+            <a:ext cx="1999427" cy="274320"/>
+          </a:xfrm>
+          <a:prstGeom prst="rect">
+            <a:avLst/>
+          </a:prstGeom>
+          <a:noFill/>
+          <a:ln/>
+        </p:spPr>
+        <p:txBody>
+          <a:bodyPr wrap="square" lIns="0" tIns="0" rIns="0" bIns="0" rtlCol="0" anchor="t"/>
+          <a:lstStyle/>
+          <a:p>
+            <a:pPr algn="ctr" indent="0" marL="0">
+              <a:lnSpc>
+                <a:spcPts val="1100"/>
+              </a:lnSpc>
+              <a:buNone/>
+            </a:pPr>
+            <a:r>
+              <a:rPr lang="en-US" sz="850" dirty="0">
+                <a:solidFill>
+                  <a:srgbClr val="707070"/>
+                </a:solidFill>
+                <a:latin typeface="Pretendard" pitchFamily="34" charset="0"/>
+                <a:ea typeface="Pretendard" pitchFamily="34" charset="-122"/>
+                <a:cs typeface="Pretendard" pitchFamily="34" charset="-120"/>
+              </a:rPr>
+              <a:t>얼음정수기의 기술과 역사</a:t>
+            </a:r>
+            <a:endParaRPr lang="en-US" sz="850" dirty="0"/>
+          </a:p>
+        </p:txBody>
+      </p:sp>
+      <p:pic>
+        <p:nvPicPr>
+          <p:cNvPr id="9" name="Image 2" descr="/home/user/CHAI-AI/assets/img/asset-espre-new.jpg">    </p:cNvPr>
+          <p:cNvPicPr>
+            <a:picLocks noChangeAspect="1"/>
+          </p:cNvPicPr>
+          <p:nvPr/>
+        </p:nvPicPr>
+        <p:blipFill>
+          <a:blip r:embed="rId3"/>
+          <a:srcRect l="0" r="0" t="0" b="0"/>
+          <a:stretch/>
+        </p:blipFill>
+        <p:spPr>
+          <a:xfrm>
+            <a:off x="5096134" y="2011680"/>
+            <a:ext cx="1999427" cy="1499570"/>
+          </a:xfrm>
+          <a:prstGeom prst="rect">
+            <a:avLst/>
+          </a:prstGeom>
+          <a:effectLst>
+            <a:outerShdw sx="100000" sy="100000" kx="0" ky="0" algn="bl" rotWithShape="0" blurRad="177800" dist="50800" dir="5400000">
+              <a:srgbClr val="191919">
+                <a:alpha val="22000"/>
+              </a:srgbClr>
+            </a:outerShdw>
+          </a:effectLst>
+        </p:spPr>
+      </p:pic>
+      <p:sp>
+        <p:nvSpPr>
+          <p:cNvPr id="10" name="Text 5"/>
+          <p:cNvSpPr/>
+          <p:nvPr/>
+        </p:nvSpPr>
+        <p:spPr>
+          <a:xfrm>
+            <a:off x="5096134" y="3602690"/>
+            <a:ext cx="1999427" cy="274320"/>
+          </a:xfrm>
+          <a:prstGeom prst="rect">
+            <a:avLst/>
+          </a:prstGeom>
+          <a:noFill/>
+          <a:ln/>
+        </p:spPr>
+        <p:txBody>
+          <a:bodyPr wrap="square" lIns="0" tIns="0" rIns="0" bIns="0" rtlCol="0" anchor="t"/>
+          <a:lstStyle/>
+          <a:p>
+            <a:pPr algn="ctr" indent="0" marL="0">
+              <a:lnSpc>
+                <a:spcPts val="1100"/>
+              </a:lnSpc>
+              <a:buNone/>
+            </a:pPr>
+            <a:r>
+              <a:rPr lang="en-US" sz="850" dirty="0">
+                <a:solidFill>
+                  <a:srgbClr val="707070"/>
+                </a:solidFill>
+                <a:latin typeface="Pretendard" pitchFamily="34" charset="0"/>
+                <a:ea typeface="Pretendard" pitchFamily="34" charset="-122"/>
+                <a:cs typeface="Pretendard" pitchFamily="34" charset="-120"/>
+              </a:rPr>
+              <a:t>국내 최초 커피 얼음정수기</a:t>
+            </a:r>
+            <a:endParaRPr lang="en-US" sz="850" dirty="0"/>
+          </a:p>
+        </p:txBody>
+      </p:sp>
+      <p:pic>
+        <p:nvPicPr>
+          <p:cNvPr id="11" name="Image 3" descr="/home/user/CHAI-AI/assets/img/asset-whicafe.jpg">    </p:cNvPr>
+          <p:cNvPicPr>
+            <a:picLocks noChangeAspect="1"/>
+          </p:cNvPicPr>
+          <p:nvPr/>
+        </p:nvPicPr>
+        <p:blipFill>
+          <a:blip r:embed="rId4"/>
+          <a:srcRect l="0" r="0" t="0" b="0"/>
+          <a:stretch/>
+        </p:blipFill>
+        <p:spPr>
+          <a:xfrm>
+            <a:off x="7315017" y="2011680"/>
+            <a:ext cx="1999427" cy="1499570"/>
+          </a:xfrm>
+          <a:prstGeom prst="rect">
+            <a:avLst/>
+          </a:prstGeom>
+          <a:effectLst>
+            <a:outerShdw sx="100000" sy="100000" kx="0" ky="0" algn="bl" rotWithShape="0" blurRad="177800" dist="50800" dir="5400000">
+              <a:srgbClr val="191919">
+                <a:alpha val="22000"/>
+              </a:srgbClr>
+            </a:outerShdw>
+          </a:effectLst>
+        </p:spPr>
+      </p:pic>
+      <p:sp>
+        <p:nvSpPr>
+          <p:cNvPr id="12" name="Text 6"/>
+          <p:cNvSpPr/>
+          <p:nvPr/>
+        </p:nvSpPr>
+        <p:spPr>
+          <a:xfrm>
+            <a:off x="7315017" y="3602690"/>
+            <a:ext cx="1999427" cy="274320"/>
+          </a:xfrm>
+          <a:prstGeom prst="rect">
+            <a:avLst/>
+          </a:prstGeom>
+          <a:noFill/>
+          <a:ln/>
+        </p:spPr>
+        <p:txBody>
+          <a:bodyPr wrap="square" lIns="0" tIns="0" rIns="0" bIns="0" rtlCol="0" anchor="t"/>
+          <a:lstStyle/>
+          <a:p>
+            <a:pPr algn="ctr" indent="0" marL="0">
+              <a:lnSpc>
+                <a:spcPts val="1100"/>
+              </a:lnSpc>
+              <a:buNone/>
+            </a:pPr>
+            <a:r>
+              <a:rPr lang="en-US" sz="850" dirty="0">
+                <a:solidFill>
+                  <a:srgbClr val="707070"/>
+                </a:solidFill>
+                <a:latin typeface="Pretendard" pitchFamily="34" charset="0"/>
+                <a:ea typeface="Pretendard" pitchFamily="34" charset="-122"/>
+                <a:cs typeface="Pretendard" pitchFamily="34" charset="-120"/>
+              </a:rPr>
+              <a:t>디지털 콘텐츠·휘카페 멤버십</a:t>
+            </a:r>
+            <a:endParaRPr lang="en-US" sz="850" dirty="0"/>
+          </a:p>
+        </p:txBody>
+      </p:sp>
+      <p:pic>
+        <p:nvPicPr>
+          <p:cNvPr id="13" name="Image 4" descr="/home/user/CHAI-AI/assets/img/peng-now.jpg">    </p:cNvPr>
+          <p:cNvPicPr>
+            <a:picLocks noChangeAspect="1"/>
+          </p:cNvPicPr>
+          <p:nvPr/>
+        </p:nvPicPr>
+        <p:blipFill>
+          <a:blip r:embed="rId5"/>
+          <a:srcRect l="0" r="0" t="0" b="0"/>
+          <a:stretch/>
+        </p:blipFill>
+        <p:spPr>
+          <a:xfrm>
+            <a:off x="9533900" y="2011680"/>
+            <a:ext cx="1999427" cy="1499570"/>
+          </a:xfrm>
+          <a:prstGeom prst="rect">
+            <a:avLst/>
+          </a:prstGeom>
+          <a:effectLst>
+            <a:outerShdw sx="100000" sy="100000" kx="0" ky="0" algn="bl" rotWithShape="0" blurRad="177800" dist="50800" dir="5400000">
+              <a:srgbClr val="191919">
+                <a:alpha val="22000"/>
+              </a:srgbClr>
+            </a:outerShdw>
+          </a:effectLst>
+        </p:spPr>
+      </p:pic>
+      <p:sp>
+        <p:nvSpPr>
+          <p:cNvPr id="14" name="Text 7"/>
+          <p:cNvSpPr/>
+          <p:nvPr/>
+        </p:nvSpPr>
+        <p:spPr>
+          <a:xfrm>
+            <a:off x="9533900" y="3602690"/>
+            <a:ext cx="1999427" cy="274320"/>
+          </a:xfrm>
+          <a:prstGeom prst="rect">
+            <a:avLst/>
+          </a:prstGeom>
+          <a:noFill/>
+          <a:ln/>
+        </p:spPr>
+        <p:txBody>
+          <a:bodyPr wrap="square" lIns="0" tIns="0" rIns="0" bIns="0" rtlCol="0" anchor="t"/>
+          <a:lstStyle/>
+          <a:p>
+            <a:pPr algn="ctr" indent="0" marL="0">
+              <a:lnSpc>
+                <a:spcPts val="1100"/>
+              </a:lnSpc>
+              <a:buNone/>
+            </a:pPr>
+            <a:r>
+              <a:rPr lang="en-US" sz="850" b="1" dirty="0">
                 <a:solidFill>
                   <a:srgbClr val="0057FF"/>
                 </a:solidFill>
@@ -28182,38 +28051,21 @@
                 <a:ea typeface="Pretendard" pitchFamily="34" charset="-122"/>
                 <a:cs typeface="Pretendard" pitchFamily="34" charset="-120"/>
               </a:rPr>
-              <a:t>다시 묶을</a:t>
-            </a:r>
-            <a:pPr indent="0" marL="0">
-              <a:lnSpc>
-                <a:spcPts val="3000"/>
-              </a:lnSpc>
-              <a:buNone/>
-            </a:pPr>
-            <a:r>
-              <a:rPr lang="en-US" sz="2300" b="1" dirty="0">
-                <a:solidFill>
-                  <a:srgbClr val="191919"/>
-                </a:solidFill>
-                <a:latin typeface="Pretendard" pitchFamily="34" charset="0"/>
-                <a:ea typeface="Pretendard" pitchFamily="34" charset="-122"/>
-                <a:cs typeface="Pretendard" pitchFamily="34" charset="-120"/>
-              </a:rPr>
-              <a:t> 수 있다.</a:t>
-            </a:r>
-            <a:endParaRPr lang="en-US" sz="2300" dirty="0"/>
-          </a:p>
-        </p:txBody>
-      </p:sp>
-      <p:sp>
-        <p:nvSpPr>
-          <p:cNvPr id="5" name="Shape 3"/>
-          <p:cNvSpPr/>
-          <p:nvPr/>
-        </p:nvSpPr>
-        <p:spPr>
-          <a:xfrm>
-            <a:off x="658368" y="2788920"/>
+              <a:t>새로운 마스코트 캐릭터</a:t>
+            </a:r>
+            <a:endParaRPr lang="en-US" sz="850" dirty="0"/>
+          </a:p>
+        </p:txBody>
+      </p:sp>
+      <p:sp>
+        <p:nvSpPr>
+          <p:cNvPr id="15" name="Shape 8"/>
+          <p:cNvSpPr/>
+          <p:nvPr/>
+        </p:nvSpPr>
+        <p:spPr>
+          <a:xfrm>
+            <a:off x="658368" y="4352498"/>
             <a:ext cx="10874959" cy="0"/>
           </a:xfrm>
           <a:prstGeom prst="line">
@@ -28230,14 +28082,14 @@
       </p:sp>
       <p:sp>
         <p:nvSpPr>
-          <p:cNvPr id="6" name="Text 4"/>
-          <p:cNvSpPr/>
-          <p:nvPr/>
-        </p:nvSpPr>
-        <p:spPr>
-          <a:xfrm>
-            <a:off x="658368" y="2404872"/>
-            <a:ext cx="2174992" cy="237744"/>
+          <p:cNvPr id="16" name="Text 9"/>
+          <p:cNvSpPr/>
+          <p:nvPr/>
+        </p:nvSpPr>
+        <p:spPr>
+          <a:xfrm>
+            <a:off x="658368" y="4078178"/>
+            <a:ext cx="1999427" cy="237744"/>
           </a:xfrm>
           <a:prstGeom prst="rect">
             <a:avLst/>
@@ -28253,7 +28105,7 @@
               <a:buNone/>
             </a:pPr>
             <a:r>
-              <a:rPr lang="en-US" sz="1200" b="1" dirty="0">
+              <a:rPr lang="en-US" sz="1050" b="1" dirty="0">
                 <a:solidFill>
                   <a:srgbClr val="0057FF"/>
                 </a:solidFill>
@@ -28263,20 +28115,20 @@
               </a:rPr>
               <a:t>과거</a:t>
             </a:r>
-            <a:endParaRPr lang="en-US" sz="1200" dirty="0"/>
-          </a:p>
-        </p:txBody>
-      </p:sp>
-      <p:sp>
-        <p:nvSpPr>
-          <p:cNvPr id="7" name="Shape 5"/>
-          <p:cNvSpPr/>
-          <p:nvPr/>
-        </p:nvSpPr>
-        <p:spPr>
-          <a:xfrm>
-            <a:off x="1695572" y="2738628"/>
-            <a:ext cx="100584" cy="100584"/>
+            <a:endParaRPr lang="en-US" sz="1050" dirty="0"/>
+          </a:p>
+        </p:txBody>
+      </p:sp>
+      <p:sp>
+        <p:nvSpPr>
+          <p:cNvPr id="17" name="Shape 10"/>
+          <p:cNvSpPr/>
+          <p:nvPr/>
+        </p:nvSpPr>
+        <p:spPr>
+          <a:xfrm>
+            <a:off x="1603218" y="4297634"/>
+            <a:ext cx="109728" cy="109728"/>
           </a:xfrm>
           <a:prstGeom prst="ellipse">
             <a:avLst/>
@@ -28284,7 +28136,7 @@
           <a:solidFill>
             <a:srgbClr val="0057FF"/>
           </a:solidFill>
-          <a:ln w="25400">
+          <a:ln w="19050">
             <a:solidFill>
               <a:srgbClr val="FFFFFF"/>
             </a:solidFill>
@@ -28294,14 +28146,14 @@
       </p:sp>
       <p:sp>
         <p:nvSpPr>
-          <p:cNvPr id="8" name="Text 6"/>
-          <p:cNvSpPr/>
-          <p:nvPr/>
-        </p:nvSpPr>
-        <p:spPr>
-          <a:xfrm>
-            <a:off x="749808" y="2935224"/>
-            <a:ext cx="1992112" cy="566928"/>
+          <p:cNvPr id="18" name="Text 11"/>
+          <p:cNvSpPr/>
+          <p:nvPr/>
+        </p:nvSpPr>
+        <p:spPr>
+          <a:xfrm>
+            <a:off x="2877251" y="4078178"/>
+            <a:ext cx="1999427" cy="237744"/>
           </a:xfrm>
           <a:prstGeom prst="rect">
             <a:avLst/>
@@ -28314,72 +28166,10 @@
           <a:lstStyle/>
           <a:p>
             <a:pPr algn="ctr" indent="0" marL="0">
-              <a:lnSpc>
-                <a:spcPts val="1400"/>
-              </a:lnSpc>
-              <a:buNone/>
-            </a:pPr>
-            <a:r>
-              <a:rPr lang="en-US" sz="1100" dirty="0">
-                <a:solidFill>
-                  <a:srgbClr val="3C3C3C"/>
-                </a:solidFill>
-                <a:latin typeface="Pretendard" pitchFamily="34" charset="0"/>
-                <a:ea typeface="Pretendard" pitchFamily="34" charset="-122"/>
-                <a:cs typeface="Pretendard" pitchFamily="34" charset="-120"/>
-              </a:rPr>
-              <a:t>얼음정수기를 알린</a:t>
-            </a:r>
-            <a:endParaRPr lang="en-US" sz="1100" dirty="0"/>
-          </a:p>
-          <a:p>
-            <a:pPr algn="ctr" indent="0" marL="0">
-              <a:lnSpc>
-                <a:spcPts val="1400"/>
-              </a:lnSpc>
-              <a:buNone/>
-            </a:pPr>
-            <a:r>
-              <a:rPr lang="en-US" sz="1100" dirty="0">
-                <a:solidFill>
-                  <a:srgbClr val="3C3C3C"/>
-                </a:solidFill>
-                <a:latin typeface="Pretendard" pitchFamily="34" charset="0"/>
-                <a:ea typeface="Pretendard" pitchFamily="34" charset="-122"/>
-                <a:cs typeface="Pretendard" pitchFamily="34" charset="-120"/>
-              </a:rPr>
-              <a:t>펭귄 광고</a:t>
-            </a:r>
-            <a:endParaRPr lang="en-US" sz="1100" dirty="0"/>
-          </a:p>
-        </p:txBody>
-      </p:sp>
-      <p:sp>
-        <p:nvSpPr>
-          <p:cNvPr id="9" name="Text 7"/>
-          <p:cNvSpPr/>
-          <p:nvPr/>
-        </p:nvSpPr>
-        <p:spPr>
-          <a:xfrm>
-            <a:off x="2833360" y="2404872"/>
-            <a:ext cx="2174992" cy="237744"/>
-          </a:xfrm>
-          <a:prstGeom prst="rect">
-            <a:avLst/>
-          </a:prstGeom>
-          <a:noFill/>
-          <a:ln/>
-        </p:spPr>
-        <p:txBody>
-          <a:bodyPr wrap="square" lIns="0" tIns="0" rIns="0" bIns="0" rtlCol="0" anchor="t"/>
-          <a:lstStyle/>
-          <a:p>
-            <a:pPr algn="ctr" indent="0" marL="0">
-              <a:buNone/>
-            </a:pPr>
-            <a:r>
-              <a:rPr lang="en-US" sz="1200" b="1" dirty="0">
+              <a:buNone/>
+            </a:pPr>
+            <a:r>
+              <a:rPr lang="en-US" sz="1050" b="1" dirty="0">
                 <a:solidFill>
                   <a:srgbClr val="0057FF"/>
                 </a:solidFill>
@@ -28389,20 +28179,20 @@
               </a:rPr>
               <a:t>얼음정수기</a:t>
             </a:r>
-            <a:endParaRPr lang="en-US" sz="1200" dirty="0"/>
-          </a:p>
-        </p:txBody>
-      </p:sp>
-      <p:sp>
-        <p:nvSpPr>
-          <p:cNvPr id="10" name="Shape 8"/>
-          <p:cNvSpPr/>
-          <p:nvPr/>
-        </p:nvSpPr>
-        <p:spPr>
-          <a:xfrm>
-            <a:off x="3870564" y="2738628"/>
-            <a:ext cx="100584" cy="100584"/>
+            <a:endParaRPr lang="en-US" sz="1050" dirty="0"/>
+          </a:p>
+        </p:txBody>
+      </p:sp>
+      <p:sp>
+        <p:nvSpPr>
+          <p:cNvPr id="19" name="Shape 12"/>
+          <p:cNvSpPr/>
+          <p:nvPr/>
+        </p:nvSpPr>
+        <p:spPr>
+          <a:xfrm>
+            <a:off x="3822101" y="4297634"/>
+            <a:ext cx="109728" cy="109728"/>
           </a:xfrm>
           <a:prstGeom prst="ellipse">
             <a:avLst/>
@@ -28410,7 +28200,7 @@
           <a:solidFill>
             <a:srgbClr val="0057FF"/>
           </a:solidFill>
-          <a:ln w="25400">
+          <a:ln w="19050">
             <a:solidFill>
               <a:srgbClr val="FFFFFF"/>
             </a:solidFill>
@@ -28420,14 +28210,14 @@
       </p:sp>
       <p:sp>
         <p:nvSpPr>
-          <p:cNvPr id="11" name="Text 9"/>
-          <p:cNvSpPr/>
-          <p:nvPr/>
-        </p:nvSpPr>
-        <p:spPr>
-          <a:xfrm>
-            <a:off x="2924800" y="2935224"/>
-            <a:ext cx="1992112" cy="566928"/>
+          <p:cNvPr id="20" name="Text 13"/>
+          <p:cNvSpPr/>
+          <p:nvPr/>
+        </p:nvSpPr>
+        <p:spPr>
+          <a:xfrm>
+            <a:off x="5096134" y="4078178"/>
+            <a:ext cx="1999427" cy="237744"/>
           </a:xfrm>
           <a:prstGeom prst="rect">
             <a:avLst/>
@@ -28440,72 +28230,10 @@
           <a:lstStyle/>
           <a:p>
             <a:pPr algn="ctr" indent="0" marL="0">
-              <a:lnSpc>
-                <a:spcPts val="1400"/>
-              </a:lnSpc>
-              <a:buNone/>
-            </a:pPr>
-            <a:r>
-              <a:rPr lang="en-US" sz="1100" dirty="0">
-                <a:solidFill>
-                  <a:srgbClr val="3C3C3C"/>
-                </a:solidFill>
-                <a:latin typeface="Pretendard" pitchFamily="34" charset="0"/>
-                <a:ea typeface="Pretendard" pitchFamily="34" charset="-122"/>
-                <a:cs typeface="Pretendard" pitchFamily="34" charset="-120"/>
-              </a:rPr>
-              <a:t>얼음정수기</a:t>
-            </a:r>
-            <a:endParaRPr lang="en-US" sz="1100" dirty="0"/>
-          </a:p>
-          <a:p>
-            <a:pPr algn="ctr" indent="0" marL="0">
-              <a:lnSpc>
-                <a:spcPts val="1400"/>
-              </a:lnSpc>
-              <a:buNone/>
-            </a:pPr>
-            <a:r>
-              <a:rPr lang="en-US" sz="1100" dirty="0">
-                <a:solidFill>
-                  <a:srgbClr val="3C3C3C"/>
-                </a:solidFill>
-                <a:latin typeface="Pretendard" pitchFamily="34" charset="0"/>
-                <a:ea typeface="Pretendard" pitchFamily="34" charset="-122"/>
-                <a:cs typeface="Pretendard" pitchFamily="34" charset="-120"/>
-              </a:rPr>
-              <a:t>기술과 역사</a:t>
-            </a:r>
-            <a:endParaRPr lang="en-US" sz="1100" dirty="0"/>
-          </a:p>
-        </p:txBody>
-      </p:sp>
-      <p:sp>
-        <p:nvSpPr>
-          <p:cNvPr id="12" name="Text 10"/>
-          <p:cNvSpPr/>
-          <p:nvPr/>
-        </p:nvSpPr>
-        <p:spPr>
-          <a:xfrm>
-            <a:off x="5008352" y="2404872"/>
-            <a:ext cx="2174992" cy="237744"/>
-          </a:xfrm>
-          <a:prstGeom prst="rect">
-            <a:avLst/>
-          </a:prstGeom>
-          <a:noFill/>
-          <a:ln/>
-        </p:spPr>
-        <p:txBody>
-          <a:bodyPr wrap="square" lIns="0" tIns="0" rIns="0" bIns="0" rtlCol="0" anchor="t"/>
-          <a:lstStyle/>
-          <a:p>
-            <a:pPr algn="ctr" indent="0" marL="0">
-              <a:buNone/>
-            </a:pPr>
-            <a:r>
-              <a:rPr lang="en-US" sz="1200" b="1" dirty="0">
+              <a:buNone/>
+            </a:pPr>
+            <a:r>
+              <a:rPr lang="en-US" sz="1050" b="1" dirty="0">
                 <a:solidFill>
                   <a:srgbClr val="0057FF"/>
                 </a:solidFill>
@@ -28513,22 +28241,22 @@
                 <a:ea typeface="Pretendard" pitchFamily="34" charset="-122"/>
                 <a:cs typeface="Pretendard" pitchFamily="34" charset="-120"/>
               </a:rPr>
-              <a:t>커피얼음</a:t>
-            </a:r>
-            <a:endParaRPr lang="en-US" sz="1200" dirty="0"/>
-          </a:p>
-        </p:txBody>
-      </p:sp>
-      <p:sp>
-        <p:nvSpPr>
-          <p:cNvPr id="13" name="Shape 11"/>
-          <p:cNvSpPr/>
-          <p:nvPr/>
-        </p:nvSpPr>
-        <p:spPr>
-          <a:xfrm>
-            <a:off x="6045556" y="2738628"/>
-            <a:ext cx="100584" cy="100584"/>
+              <a:t>커피 얼음정수기</a:t>
+            </a:r>
+            <a:endParaRPr lang="en-US" sz="1050" dirty="0"/>
+          </a:p>
+        </p:txBody>
+      </p:sp>
+      <p:sp>
+        <p:nvSpPr>
+          <p:cNvPr id="21" name="Shape 14"/>
+          <p:cNvSpPr/>
+          <p:nvPr/>
+        </p:nvSpPr>
+        <p:spPr>
+          <a:xfrm>
+            <a:off x="6040984" y="4297634"/>
+            <a:ext cx="109728" cy="109728"/>
           </a:xfrm>
           <a:prstGeom prst="ellipse">
             <a:avLst/>
@@ -28536,7 +28264,7 @@
           <a:solidFill>
             <a:srgbClr val="0057FF"/>
           </a:solidFill>
-          <a:ln w="25400">
+          <a:ln w="19050">
             <a:solidFill>
               <a:srgbClr val="FFFFFF"/>
             </a:solidFill>
@@ -28546,14 +28274,14 @@
       </p:sp>
       <p:sp>
         <p:nvSpPr>
-          <p:cNvPr id="14" name="Text 12"/>
-          <p:cNvSpPr/>
-          <p:nvPr/>
-        </p:nvSpPr>
-        <p:spPr>
-          <a:xfrm>
-            <a:off x="5099792" y="2935224"/>
-            <a:ext cx="1992112" cy="566928"/>
+          <p:cNvPr id="22" name="Text 15"/>
+          <p:cNvSpPr/>
+          <p:nvPr/>
+        </p:nvSpPr>
+        <p:spPr>
+          <a:xfrm>
+            <a:off x="7315017" y="4078178"/>
+            <a:ext cx="1999427" cy="237744"/>
           </a:xfrm>
           <a:prstGeom prst="rect">
             <a:avLst/>
@@ -28566,72 +28294,10 @@
           <a:lstStyle/>
           <a:p>
             <a:pPr algn="ctr" indent="0" marL="0">
-              <a:lnSpc>
-                <a:spcPts val="1400"/>
-              </a:lnSpc>
-              <a:buNone/>
-            </a:pPr>
-            <a:r>
-              <a:rPr lang="en-US" sz="1100" dirty="0">
-                <a:solidFill>
-                  <a:srgbClr val="3C3C3C"/>
-                </a:solidFill>
-                <a:latin typeface="Pretendard" pitchFamily="34" charset="0"/>
-                <a:ea typeface="Pretendard" pitchFamily="34" charset="-122"/>
-                <a:cs typeface="Pretendard" pitchFamily="34" charset="-120"/>
-              </a:rPr>
-              <a:t>커피얼음정수기</a:t>
-            </a:r>
-            <a:endParaRPr lang="en-US" sz="1100" dirty="0"/>
-          </a:p>
-          <a:p>
-            <a:pPr algn="ctr" indent="0" marL="0">
-              <a:lnSpc>
-                <a:spcPts val="1400"/>
-              </a:lnSpc>
-              <a:buNone/>
-            </a:pPr>
-            <a:r>
-              <a:rPr lang="en-US" sz="1100" dirty="0">
-                <a:solidFill>
-                  <a:srgbClr val="3C3C3C"/>
-                </a:solidFill>
-                <a:latin typeface="Pretendard" pitchFamily="34" charset="0"/>
-                <a:ea typeface="Pretendard" pitchFamily="34" charset="-122"/>
-                <a:cs typeface="Pretendard" pitchFamily="34" charset="-120"/>
-              </a:rPr>
-              <a:t>경험</a:t>
-            </a:r>
-            <a:endParaRPr lang="en-US" sz="1100" dirty="0"/>
-          </a:p>
-        </p:txBody>
-      </p:sp>
-      <p:sp>
-        <p:nvSpPr>
-          <p:cNvPr id="15" name="Text 13"/>
-          <p:cNvSpPr/>
-          <p:nvPr/>
-        </p:nvSpPr>
-        <p:spPr>
-          <a:xfrm>
-            <a:off x="7183344" y="2404872"/>
-            <a:ext cx="2174992" cy="237744"/>
-          </a:xfrm>
-          <a:prstGeom prst="rect">
-            <a:avLst/>
-          </a:prstGeom>
-          <a:noFill/>
-          <a:ln/>
-        </p:spPr>
-        <p:txBody>
-          <a:bodyPr wrap="square" lIns="0" tIns="0" rIns="0" bIns="0" rtlCol="0" anchor="t"/>
-          <a:lstStyle/>
-          <a:p>
-            <a:pPr algn="ctr" indent="0" marL="0">
-              <a:buNone/>
-            </a:pPr>
-            <a:r>
-              <a:rPr lang="en-US" sz="1200" b="1" dirty="0">
+              <a:buNone/>
+            </a:pPr>
+            <a:r>
+              <a:rPr lang="en-US" sz="1050" b="1" dirty="0">
                 <a:solidFill>
                   <a:srgbClr val="0057FF"/>
                 </a:solidFill>
@@ -28641,20 +28307,20 @@
               </a:rPr>
               <a:t>디지털</a:t>
             </a:r>
-            <a:endParaRPr lang="en-US" sz="1200" dirty="0"/>
-          </a:p>
-        </p:txBody>
-      </p:sp>
-      <p:sp>
-        <p:nvSpPr>
-          <p:cNvPr id="16" name="Shape 14"/>
-          <p:cNvSpPr/>
-          <p:nvPr/>
-        </p:nvSpPr>
-        <p:spPr>
-          <a:xfrm>
-            <a:off x="8220547" y="2738628"/>
-            <a:ext cx="100584" cy="100584"/>
+            <a:endParaRPr lang="en-US" sz="1050" dirty="0"/>
+          </a:p>
+        </p:txBody>
+      </p:sp>
+      <p:sp>
+        <p:nvSpPr>
+          <p:cNvPr id="23" name="Shape 16"/>
+          <p:cNvSpPr/>
+          <p:nvPr/>
+        </p:nvSpPr>
+        <p:spPr>
+          <a:xfrm>
+            <a:off x="8259867" y="4297634"/>
+            <a:ext cx="109728" cy="109728"/>
           </a:xfrm>
           <a:prstGeom prst="ellipse">
             <a:avLst/>
@@ -28662,7 +28328,7 @@
           <a:solidFill>
             <a:srgbClr val="0057FF"/>
           </a:solidFill>
-          <a:ln w="25400">
+          <a:ln w="19050">
             <a:solidFill>
               <a:srgbClr val="FFFFFF"/>
             </a:solidFill>
@@ -28672,14 +28338,14 @@
       </p:sp>
       <p:sp>
         <p:nvSpPr>
-          <p:cNvPr id="17" name="Text 15"/>
-          <p:cNvSpPr/>
-          <p:nvPr/>
-        </p:nvSpPr>
-        <p:spPr>
-          <a:xfrm>
-            <a:off x="7274784" y="2935224"/>
-            <a:ext cx="1992112" cy="566928"/>
+          <p:cNvPr id="24" name="Text 17"/>
+          <p:cNvSpPr/>
+          <p:nvPr/>
+        </p:nvSpPr>
+        <p:spPr>
+          <a:xfrm>
+            <a:off x="9533900" y="4078178"/>
+            <a:ext cx="1999427" cy="237744"/>
           </a:xfrm>
           <a:prstGeom prst="rect">
             <a:avLst/>
@@ -28692,72 +28358,10 @@
           <a:lstStyle/>
           <a:p>
             <a:pPr algn="ctr" indent="0" marL="0">
-              <a:lnSpc>
-                <a:spcPts val="1400"/>
-              </a:lnSpc>
-              <a:buNone/>
-            </a:pPr>
-            <a:r>
-              <a:rPr lang="en-US" sz="1100" dirty="0">
-                <a:solidFill>
-                  <a:srgbClr val="3C3C3C"/>
-                </a:solidFill>
-                <a:latin typeface="Pretendard" pitchFamily="34" charset="0"/>
-                <a:ea typeface="Pretendard" pitchFamily="34" charset="-122"/>
-                <a:cs typeface="Pretendard" pitchFamily="34" charset="-120"/>
-              </a:rPr>
-              <a:t>디지털 콘텐츠·</a:t>
-            </a:r>
-            <a:endParaRPr lang="en-US" sz="1100" dirty="0"/>
-          </a:p>
-          <a:p>
-            <a:pPr algn="ctr" indent="0" marL="0">
-              <a:lnSpc>
-                <a:spcPts val="1400"/>
-              </a:lnSpc>
-              <a:buNone/>
-            </a:pPr>
-            <a:r>
-              <a:rPr lang="en-US" sz="1100" dirty="0">
-                <a:solidFill>
-                  <a:srgbClr val="3C3C3C"/>
-                </a:solidFill>
-                <a:latin typeface="Pretendard" pitchFamily="34" charset="0"/>
-                <a:ea typeface="Pretendard" pitchFamily="34" charset="-122"/>
-                <a:cs typeface="Pretendard" pitchFamily="34" charset="-120"/>
-              </a:rPr>
-              <a:t>휘카페 멤버십</a:t>
-            </a:r>
-            <a:endParaRPr lang="en-US" sz="1100" dirty="0"/>
-          </a:p>
-        </p:txBody>
-      </p:sp>
-      <p:sp>
-        <p:nvSpPr>
-          <p:cNvPr id="18" name="Text 16"/>
-          <p:cNvSpPr/>
-          <p:nvPr/>
-        </p:nvSpPr>
-        <p:spPr>
-          <a:xfrm>
-            <a:off x="9358335" y="2404872"/>
-            <a:ext cx="2174992" cy="237744"/>
-          </a:xfrm>
-          <a:prstGeom prst="rect">
-            <a:avLst/>
-          </a:prstGeom>
-          <a:noFill/>
-          <a:ln/>
-        </p:spPr>
-        <p:txBody>
-          <a:bodyPr wrap="square" lIns="0" tIns="0" rIns="0" bIns="0" rtlCol="0" anchor="t"/>
-          <a:lstStyle/>
-          <a:p>
-            <a:pPr algn="ctr" indent="0" marL="0">
-              <a:buNone/>
-            </a:pPr>
-            <a:r>
-              <a:rPr lang="en-US" sz="1200" b="1" dirty="0">
+              <a:buNone/>
+            </a:pPr>
+            <a:r>
+              <a:rPr lang="en-US" sz="1050" b="1" dirty="0">
                 <a:solidFill>
                   <a:srgbClr val="0057FF"/>
                 </a:solidFill>
@@ -28767,20 +28371,20 @@
               </a:rPr>
               <a:t>다음</a:t>
             </a:r>
-            <a:endParaRPr lang="en-US" sz="1200" dirty="0"/>
-          </a:p>
-        </p:txBody>
-      </p:sp>
-      <p:sp>
-        <p:nvSpPr>
-          <p:cNvPr id="19" name="Shape 17"/>
-          <p:cNvSpPr/>
-          <p:nvPr/>
-        </p:nvSpPr>
-        <p:spPr>
-          <a:xfrm>
-            <a:off x="10395539" y="2738628"/>
-            <a:ext cx="100584" cy="100584"/>
+            <a:endParaRPr lang="en-US" sz="1050" dirty="0"/>
+          </a:p>
+        </p:txBody>
+      </p:sp>
+      <p:sp>
+        <p:nvSpPr>
+          <p:cNvPr id="25" name="Shape 18"/>
+          <p:cNvSpPr/>
+          <p:nvPr/>
+        </p:nvSpPr>
+        <p:spPr>
+          <a:xfrm>
+            <a:off x="10478750" y="4297634"/>
+            <a:ext cx="109728" cy="109728"/>
           </a:xfrm>
           <a:prstGeom prst="ellipse">
             <a:avLst/>
@@ -28788,7 +28392,7 @@
           <a:solidFill>
             <a:srgbClr val="1E9BE6"/>
           </a:solidFill>
-          <a:ln w="25400">
+          <a:ln w="19050">
             <a:solidFill>
               <a:srgbClr val="FFFFFF"/>
             </a:solidFill>
@@ -28798,321 +28402,30 @@
       </p:sp>
       <p:sp>
         <p:nvSpPr>
-          <p:cNvPr id="20" name="Text 18"/>
-          <p:cNvSpPr/>
-          <p:nvPr/>
-        </p:nvSpPr>
-        <p:spPr>
-          <a:xfrm>
-            <a:off x="9449775" y="2935224"/>
-            <a:ext cx="1992112" cy="566928"/>
-          </a:xfrm>
-          <a:prstGeom prst="rect">
-            <a:avLst/>
-          </a:prstGeom>
-          <a:noFill/>
-          <a:ln/>
-        </p:spPr>
-        <p:txBody>
-          <a:bodyPr wrap="square" lIns="0" tIns="0" rIns="0" bIns="0" rtlCol="0" anchor="t"/>
-          <a:lstStyle/>
-          <a:p>
-            <a:pPr algn="ctr" indent="0" marL="0">
-              <a:lnSpc>
-                <a:spcPts val="1400"/>
-              </a:lnSpc>
-              <a:buNone/>
-            </a:pPr>
-            <a:r>
-              <a:rPr lang="en-US" sz="1100" dirty="0">
-                <a:solidFill>
-                  <a:srgbClr val="3C3C3C"/>
-                </a:solidFill>
-                <a:latin typeface="Pretendard" pitchFamily="34" charset="0"/>
-                <a:ea typeface="Pretendard" pitchFamily="34" charset="-122"/>
-                <a:cs typeface="Pretendard" pitchFamily="34" charset="-120"/>
-              </a:rPr>
-              <a:t>새로운</a:t>
-            </a:r>
-            <a:endParaRPr lang="en-US" sz="1100" dirty="0"/>
-          </a:p>
-          <a:p>
-            <a:pPr algn="ctr" indent="0" marL="0">
-              <a:lnSpc>
-                <a:spcPts val="1400"/>
-              </a:lnSpc>
-              <a:buNone/>
-            </a:pPr>
-            <a:r>
-              <a:rPr lang="en-US" sz="1100" dirty="0">
-                <a:solidFill>
-                  <a:srgbClr val="3C3C3C"/>
-                </a:solidFill>
-                <a:latin typeface="Pretendard" pitchFamily="34" charset="0"/>
-                <a:ea typeface="Pretendard" pitchFamily="34" charset="-122"/>
-                <a:cs typeface="Pretendard" pitchFamily="34" charset="-120"/>
-              </a:rPr>
-              <a:t>마스코트 시스템</a:t>
-            </a:r>
-            <a:endParaRPr lang="en-US" sz="1100" dirty="0"/>
-          </a:p>
-        </p:txBody>
-      </p:sp>
-      <p:sp>
-        <p:nvSpPr>
-          <p:cNvPr id="21" name="Text 19"/>
-          <p:cNvSpPr/>
-          <p:nvPr/>
-        </p:nvSpPr>
-        <p:spPr>
-          <a:xfrm>
-            <a:off x="658368" y="4160520"/>
-            <a:ext cx="4572000" cy="256032"/>
-          </a:xfrm>
-          <a:prstGeom prst="rect">
-            <a:avLst/>
-          </a:prstGeom>
-          <a:noFill/>
-          <a:ln/>
-        </p:spPr>
-        <p:txBody>
-          <a:bodyPr wrap="square" lIns="0" tIns="0" rIns="0" bIns="0" rtlCol="0" anchor="t"/>
-          <a:lstStyle/>
-          <a:p>
-            <a:pPr indent="0" marL="0">
-              <a:buNone/>
-            </a:pPr>
-            <a:r>
-              <a:rPr lang="en-US" sz="1200" b="1" dirty="0">
-                <a:solidFill>
-                  <a:srgbClr val="191919"/>
-                </a:solidFill>
-                <a:latin typeface="Pretendard" pitchFamily="34" charset="0"/>
-                <a:ea typeface="Pretendard" pitchFamily="34" charset="-122"/>
-                <a:cs typeface="Pretendard" pitchFamily="34" charset="-120"/>
-              </a:rPr>
-              <a:t>청호나이스가 이미 가진 자산</a:t>
-            </a:r>
-            <a:endParaRPr lang="en-US" sz="1200" dirty="0"/>
-          </a:p>
-        </p:txBody>
-      </p:sp>
-      <p:sp>
-        <p:nvSpPr>
-          <p:cNvPr id="22" name="Text 20"/>
-          <p:cNvSpPr/>
-          <p:nvPr/>
-        </p:nvSpPr>
-        <p:spPr>
-          <a:xfrm>
-            <a:off x="658368" y="4526280"/>
-            <a:ext cx="3017520" cy="274320"/>
-          </a:xfrm>
-          <a:prstGeom prst="rect">
-            <a:avLst/>
-          </a:prstGeom>
-          <a:noFill/>
-          <a:ln/>
-        </p:spPr>
-        <p:txBody>
-          <a:bodyPr wrap="square" lIns="0" tIns="0" rIns="0" bIns="0" rtlCol="0" anchor="t"/>
-          <a:lstStyle/>
-          <a:p>
-            <a:pPr indent="0" marL="0">
-              <a:buNone/>
-            </a:pPr>
-            <a:r>
-              <a:rPr lang="en-US" sz="1400" dirty="0">
-                <a:solidFill>
-                  <a:srgbClr val="3C3C3C"/>
-                </a:solidFill>
-                <a:latin typeface="Pretendard" pitchFamily="34" charset="0"/>
-                <a:ea typeface="Pretendard" pitchFamily="34" charset="-122"/>
-                <a:cs typeface="Pretendard" pitchFamily="34" charset="-120"/>
-              </a:rPr>
-              <a:t>· 정수·얼음·커피 올인원 제품</a:t>
-            </a:r>
-            <a:endParaRPr lang="en-US" sz="1400" dirty="0"/>
-          </a:p>
-        </p:txBody>
-      </p:sp>
-      <p:sp>
-        <p:nvSpPr>
-          <p:cNvPr id="23" name="Text 21"/>
-          <p:cNvSpPr/>
-          <p:nvPr/>
-        </p:nvSpPr>
-        <p:spPr>
-          <a:xfrm>
-            <a:off x="3675888" y="4526280"/>
-            <a:ext cx="3017520" cy="274320"/>
-          </a:xfrm>
-          <a:prstGeom prst="rect">
-            <a:avLst/>
-          </a:prstGeom>
-          <a:noFill/>
-          <a:ln/>
-        </p:spPr>
-        <p:txBody>
-          <a:bodyPr wrap="square" lIns="0" tIns="0" rIns="0" bIns="0" rtlCol="0" anchor="t"/>
-          <a:lstStyle/>
-          <a:p>
-            <a:pPr indent="0" marL="0">
-              <a:buNone/>
-            </a:pPr>
-            <a:r>
-              <a:rPr lang="en-US" sz="1400" dirty="0">
-                <a:solidFill>
-                  <a:srgbClr val="3C3C3C"/>
-                </a:solidFill>
-                <a:latin typeface="Pretendard" pitchFamily="34" charset="0"/>
-                <a:ea typeface="Pretendard" pitchFamily="34" charset="-122"/>
-                <a:cs typeface="Pretendard" pitchFamily="34" charset="-120"/>
-              </a:rPr>
-              <a:t>· 자동 세척과 위생 관리</a:t>
-            </a:r>
-            <a:endParaRPr lang="en-US" sz="1400" dirty="0"/>
-          </a:p>
-        </p:txBody>
-      </p:sp>
-      <p:sp>
-        <p:nvSpPr>
-          <p:cNvPr id="24" name="Text 22"/>
-          <p:cNvSpPr/>
-          <p:nvPr/>
-        </p:nvSpPr>
-        <p:spPr>
-          <a:xfrm>
-            <a:off x="658368" y="4855464"/>
-            <a:ext cx="3017520" cy="274320"/>
-          </a:xfrm>
-          <a:prstGeom prst="rect">
-            <a:avLst/>
-          </a:prstGeom>
-          <a:noFill/>
-          <a:ln/>
-        </p:spPr>
-        <p:txBody>
-          <a:bodyPr wrap="square" lIns="0" tIns="0" rIns="0" bIns="0" rtlCol="0" anchor="t"/>
-          <a:lstStyle/>
-          <a:p>
-            <a:pPr indent="0" marL="0">
-              <a:buNone/>
-            </a:pPr>
-            <a:r>
-              <a:rPr lang="en-US" sz="1400" dirty="0">
-                <a:solidFill>
-                  <a:srgbClr val="3C3C3C"/>
-                </a:solidFill>
-                <a:latin typeface="Pretendard" pitchFamily="34" charset="0"/>
-                <a:ea typeface="Pretendard" pitchFamily="34" charset="-122"/>
-                <a:cs typeface="Pretendard" pitchFamily="34" charset="-120"/>
-              </a:rPr>
-              <a:t>· 과거 펭귄 광고 캐릭터</a:t>
-            </a:r>
-            <a:endParaRPr lang="en-US" sz="1400" dirty="0"/>
-          </a:p>
-        </p:txBody>
-      </p:sp>
-      <p:sp>
-        <p:nvSpPr>
-          <p:cNvPr id="25" name="Text 23"/>
-          <p:cNvSpPr/>
-          <p:nvPr/>
-        </p:nvSpPr>
-        <p:spPr>
-          <a:xfrm>
-            <a:off x="3675888" y="4855464"/>
-            <a:ext cx="3017520" cy="274320"/>
-          </a:xfrm>
-          <a:prstGeom prst="rect">
-            <a:avLst/>
-          </a:prstGeom>
-          <a:noFill/>
-          <a:ln/>
-        </p:spPr>
-        <p:txBody>
-          <a:bodyPr wrap="square" lIns="0" tIns="0" rIns="0" bIns="0" rtlCol="0" anchor="t"/>
-          <a:lstStyle/>
-          <a:p>
-            <a:pPr indent="0" marL="0">
-              <a:buNone/>
-            </a:pPr>
-            <a:r>
-              <a:rPr lang="en-US" sz="1400" dirty="0">
-                <a:solidFill>
-                  <a:srgbClr val="3C3C3C"/>
-                </a:solidFill>
-                <a:latin typeface="Pretendard" pitchFamily="34" charset="0"/>
-                <a:ea typeface="Pretendard" pitchFamily="34" charset="-122"/>
-                <a:cs typeface="Pretendard" pitchFamily="34" charset="-120"/>
-              </a:rPr>
-              <a:t>· 휘카페·캡슐·멤버십 접점</a:t>
-            </a:r>
-            <a:endParaRPr lang="en-US" sz="1400" dirty="0"/>
-          </a:p>
-        </p:txBody>
-      </p:sp>
-      <p:sp>
-        <p:nvSpPr>
-          <p:cNvPr id="26" name="Shape 24"/>
-          <p:cNvSpPr/>
-          <p:nvPr/>
-        </p:nvSpPr>
-        <p:spPr>
-          <a:xfrm>
-            <a:off x="7601407" y="4160520"/>
-            <a:ext cx="1828800" cy="1234440"/>
-          </a:xfrm>
-          <a:prstGeom prst="roundRect">
-            <a:avLst>
-              <a:gd name="adj" fmla="val 6667"/>
-            </a:avLst>
-          </a:prstGeom>
-          <a:solidFill>
-            <a:srgbClr val="ECEEF2"/>
-          </a:solidFill>
-          <a:ln w="12700">
-            <a:solidFill>
-              <a:srgbClr val="E8E8E8"/>
-            </a:solidFill>
-            <a:prstDash val="solid"/>
-          </a:ln>
-          <a:effectLst>
-            <a:outerShdw sx="100000" sy="100000" kx="0" ky="0" algn="bl" rotWithShape="0" blurRad="203200" dist="63500" dir="5400000">
-              <a:srgbClr val="191919">
-                <a:alpha val="24000"/>
-              </a:srgbClr>
-            </a:outerShdw>
-          </a:effectLst>
-        </p:spPr>
-      </p:sp>
-      <p:sp>
-        <p:nvSpPr>
-          <p:cNvPr id="27" name="Text 25"/>
-          <p:cNvSpPr/>
-          <p:nvPr/>
-        </p:nvSpPr>
-        <p:spPr>
-          <a:xfrm>
-            <a:off x="7656271" y="4215384"/>
-            <a:ext cx="1719072" cy="1124712"/>
-          </a:xfrm>
-          <a:prstGeom prst="rect">
-            <a:avLst/>
-          </a:prstGeom>
-          <a:noFill/>
-          <a:ln/>
-        </p:spPr>
-        <p:txBody>
-          <a:bodyPr wrap="square" lIns="0" tIns="0" rIns="0" bIns="0" rtlCol="0" anchor="ctr"/>
-          <a:lstStyle/>
-          <a:p>
-            <a:pPr algn="ctr" indent="0" marL="0">
-              <a:buNone/>
-            </a:pPr>
-            <a:r>
-              <a:rPr lang="en-US" sz="1100" b="1" dirty="0">
+          <p:cNvPr id="26" name="Text 19"/>
+          <p:cNvSpPr/>
+          <p:nvPr/>
+        </p:nvSpPr>
+        <p:spPr>
+          <a:xfrm>
+            <a:off x="658368" y="5943600"/>
+            <a:ext cx="6400800" cy="219456"/>
+          </a:xfrm>
+          <a:prstGeom prst="rect">
+            <a:avLst/>
+          </a:prstGeom>
+          <a:noFill/>
+          <a:ln/>
+        </p:spPr>
+        <p:txBody>
+          <a:bodyPr wrap="square" lIns="0" tIns="0" rIns="0" bIns="0" rtlCol="0" anchor="t"/>
+          <a:lstStyle/>
+          <a:p>
+            <a:pPr indent="0" marL="0">
+              <a:buNone/>
+            </a:pPr>
+            <a:r>
+              <a:rPr lang="en-US" sz="800" dirty="0">
                 <a:solidFill>
                   <a:srgbClr val="959595"/>
                 </a:solidFill>
@@ -29120,119 +28433,7 @@
                 <a:ea typeface="Pretendard" pitchFamily="34" charset="-122"/>
                 <a:cs typeface="Pretendard" pitchFamily="34" charset="-120"/>
               </a:rPr>
-              <a:t>[ 펭귄 캐릭터 ]</a:t>
-            </a:r>
-            <a:endParaRPr lang="en-US" sz="1100" dirty="0"/>
-          </a:p>
-        </p:txBody>
-      </p:sp>
-      <p:sp>
-        <p:nvSpPr>
-          <p:cNvPr id="28" name="Shape 26"/>
-          <p:cNvSpPr/>
-          <p:nvPr/>
-        </p:nvSpPr>
-        <p:spPr>
-          <a:xfrm>
-            <a:off x="9613087" y="4160520"/>
-            <a:ext cx="1920240" cy="1234440"/>
-          </a:xfrm>
-          <a:prstGeom prst="roundRect">
-            <a:avLst>
-              <a:gd name="adj" fmla="val 6667"/>
-            </a:avLst>
-          </a:prstGeom>
-          <a:solidFill>
-            <a:srgbClr val="ECEEF2"/>
-          </a:solidFill>
-          <a:ln w="12700">
-            <a:solidFill>
-              <a:srgbClr val="E8E8E8"/>
-            </a:solidFill>
-            <a:prstDash val="solid"/>
-          </a:ln>
-          <a:effectLst>
-            <a:outerShdw sx="100000" sy="100000" kx="0" ky="0" algn="bl" rotWithShape="0" blurRad="203200" dist="63500" dir="5400000">
-              <a:srgbClr val="191919">
-                <a:alpha val="24000"/>
-              </a:srgbClr>
-            </a:outerShdw>
-          </a:effectLst>
-        </p:spPr>
-      </p:sp>
-      <p:sp>
-        <p:nvSpPr>
-          <p:cNvPr id="29" name="Text 27"/>
-          <p:cNvSpPr/>
-          <p:nvPr/>
-        </p:nvSpPr>
-        <p:spPr>
-          <a:xfrm>
-            <a:off x="9667951" y="4215384"/>
-            <a:ext cx="1810512" cy="1124712"/>
-          </a:xfrm>
-          <a:prstGeom prst="rect">
-            <a:avLst/>
-          </a:prstGeom>
-          <a:noFill/>
-          <a:ln/>
-        </p:spPr>
-        <p:txBody>
-          <a:bodyPr wrap="square" lIns="0" tIns="0" rIns="0" bIns="0" rtlCol="0" anchor="ctr"/>
-          <a:lstStyle/>
-          <a:p>
-            <a:pPr algn="ctr" indent="0" marL="0">
-              <a:buNone/>
-            </a:pPr>
-            <a:r>
-              <a:rPr lang="en-US" sz="1100" b="1" dirty="0">
-                <a:solidFill>
-                  <a:srgbClr val="959595"/>
-                </a:solidFill>
-                <a:latin typeface="Pretendard" pitchFamily="34" charset="0"/>
-                <a:ea typeface="Pretendard" pitchFamily="34" charset="-122"/>
-                <a:cs typeface="Pretendard" pitchFamily="34" charset="-120"/>
-              </a:rPr>
-              <a:t>[ 에스프레카페 제품 ]</a:t>
-            </a:r>
-            <a:endParaRPr lang="en-US" sz="1100" dirty="0"/>
-          </a:p>
-        </p:txBody>
-      </p:sp>
-      <p:sp>
-        <p:nvSpPr>
-          <p:cNvPr id="30" name="Text 28"/>
-          <p:cNvSpPr/>
-          <p:nvPr/>
-        </p:nvSpPr>
-        <p:spPr>
-          <a:xfrm>
-            <a:off x="658368" y="6291072"/>
-            <a:ext cx="10874959" cy="219456"/>
-          </a:xfrm>
-          <a:prstGeom prst="rect">
-            <a:avLst/>
-          </a:prstGeom>
-          <a:noFill/>
-          <a:ln/>
-        </p:spPr>
-        <p:txBody>
-          <a:bodyPr wrap="square" lIns="0" tIns="0" rIns="0" bIns="0" rtlCol="0" anchor="t"/>
-          <a:lstStyle/>
-          <a:p>
-            <a:pPr indent="0" marL="0">
-              <a:buNone/>
-            </a:pPr>
-            <a:r>
-              <a:rPr lang="en-US" sz="800" dirty="0">
-                <a:solidFill>
-                  <a:srgbClr val="959595"/>
-                </a:solidFill>
-                <a:latin typeface="Pretendard" pitchFamily="34" charset="0"/>
-                <a:ea typeface="Pretendard" pitchFamily="34" charset="-122"/>
-                <a:cs typeface="Pretendard" pitchFamily="34" charset="-120"/>
-              </a:rPr>
-              <a:t>‘세계 최초’·판매량·렌탈료 표현은 최종 제출 전 공식 자료와 날짜로 재확인.</a:t>
+              <a:t>‘세계 최초’·판매량 표현은 최종 제출 전 공식 자료로 재확인.</a:t>
             </a:r>
             <a:endParaRPr lang="en-US" sz="800" dirty="0"/>
           </a:p>
@@ -29240,7 +28441,46 @@
       </p:sp>
       <p:sp>
         <p:nvSpPr>
-          <p:cNvPr id="31" name="Text 29"/>
+          <p:cNvPr id="27" name="Text 20"/>
+          <p:cNvSpPr/>
+          <p:nvPr/>
+        </p:nvSpPr>
+        <p:spPr>
+          <a:xfrm>
+            <a:off x="7327087" y="5943600"/>
+            <a:ext cx="4206240" cy="219456"/>
+          </a:xfrm>
+          <a:prstGeom prst="rect">
+            <a:avLst/>
+          </a:prstGeom>
+          <a:noFill/>
+          <a:ln/>
+        </p:spPr>
+        <p:txBody>
+          <a:bodyPr wrap="square" lIns="0" tIns="0" rIns="0" bIns="0" rtlCol="0" anchor="t"/>
+          <a:lstStyle/>
+          <a:p>
+            <a:pPr algn="r" indent="0" marL="0">
+              <a:buNone/>
+            </a:pPr>
+            <a:r>
+              <a:rPr lang="en-US" sz="950" b="1" dirty="0">
+                <a:solidFill>
+                  <a:srgbClr val="0057FF"/>
+                </a:solidFill>
+                <a:latin typeface="Pretendard" pitchFamily="34" charset="0"/>
+                <a:ea typeface="Pretendard" pitchFamily="34" charset="-122"/>
+                <a:cs typeface="Pretendard" pitchFamily="34" charset="-120"/>
+              </a:rPr>
+              <a:t>→ 새로 만들 것이 아니라, 이미 있는 것을 다시 묶는다.</a:t>
+            </a:r>
+            <a:endParaRPr lang="en-US" sz="950" dirty="0"/>
+          </a:p>
+        </p:txBody>
+      </p:sp>
+      <p:sp>
+        <p:nvSpPr>
+          <p:cNvPr id="28" name="Text 21"/>
           <p:cNvSpPr/>
           <p:nvPr/>
         </p:nvSpPr>
@@ -29279,7 +28519,7 @@
       </p:sp>
       <p:sp>
         <p:nvSpPr>
-          <p:cNvPr id="32" name="Text 30"/>
+          <p:cNvPr id="29" name="Text 22"/>
           <p:cNvSpPr/>
           <p:nvPr/>
         </p:nvSpPr>

--- a/청호나이스-브랜드전략-제안.pptx
+++ b/청호나이스-브랜드전략-제안.pptx
@@ -8909,12 +8909,12 @@
           <a:p>
             <a:pPr indent="0" marL="0">
               <a:lnSpc>
-                <a:spcPts val="3000"/>
+                <a:spcPts val="3328"/>
               </a:lnSpc>
               <a:buNone/>
             </a:pPr>
             <a:r>
-              <a:rPr lang="en-US" sz="2300" b="1" dirty="0">
+              <a:rPr lang="en-US" sz="2600" b="1" dirty="0">
                 <a:solidFill>
                   <a:srgbClr val="191919"/>
                 </a:solidFill>
@@ -8922,19 +8922,33 @@
                 <a:ea typeface="Pretendard" pitchFamily="34" charset="-122"/>
                 <a:cs typeface="Pretendard" pitchFamily="34" charset="-120"/>
               </a:rPr>
-              <a:t>캐릭터가 왜 통하는지는</a:t>
-            </a:r>
-            <a:endParaRPr lang="en-US" sz="2300" dirty="0"/>
-          </a:p>
-          <a:p>
+              <a:t>캐릭터가 왜 통하는지는 이미 </a:t>
+            </a:r>
             <a:pPr indent="0" marL="0">
               <a:lnSpc>
-                <a:spcPts val="3000"/>
+                <a:spcPts val="3328"/>
               </a:lnSpc>
               <a:buNone/>
             </a:pPr>
             <a:r>
-              <a:rPr lang="en-US" sz="2300" b="1" dirty="0">
+              <a:rPr lang="en-US" sz="2600" b="1" dirty="0">
+                <a:solidFill>
+                  <a:srgbClr val="0057FF"/>
+                </a:solidFill>
+                <a:latin typeface="Pretendard" pitchFamily="34" charset="0"/>
+                <a:ea typeface="Pretendard" pitchFamily="34" charset="-122"/>
+                <a:cs typeface="Pretendard" pitchFamily="34" charset="-120"/>
+              </a:rPr>
+              <a:t>연구되어 있다</a:t>
+            </a:r>
+            <a:pPr indent="0" marL="0">
+              <a:lnSpc>
+                <a:spcPts val="3328"/>
+              </a:lnSpc>
+              <a:buNone/>
+            </a:pPr>
+            <a:r>
+              <a:rPr lang="en-US" sz="2600" b="1" dirty="0">
                 <a:solidFill>
                   <a:srgbClr val="191919"/>
                 </a:solidFill>
@@ -8942,33 +8956,38 @@
                 <a:ea typeface="Pretendard" pitchFamily="34" charset="-122"/>
                 <a:cs typeface="Pretendard" pitchFamily="34" charset="-120"/>
               </a:rPr>
-              <a:t>이미 </a:t>
-            </a:r>
-            <a:pPr indent="0" marL="0">
-              <a:lnSpc>
-                <a:spcPts val="3000"/>
-              </a:lnSpc>
-              <a:buNone/>
-            </a:pPr>
-            <a:r>
-              <a:rPr lang="en-US" sz="2300" b="1" dirty="0">
-                <a:solidFill>
-                  <a:srgbClr val="0057FF"/>
-                </a:solidFill>
-                <a:latin typeface="Pretendard" pitchFamily="34" charset="0"/>
-                <a:ea typeface="Pretendard" pitchFamily="34" charset="-122"/>
-                <a:cs typeface="Pretendard" pitchFamily="34" charset="-120"/>
-              </a:rPr>
-              <a:t>연구되어 있다</a:t>
-            </a:r>
-            <a:pPr indent="0" marL="0">
-              <a:lnSpc>
-                <a:spcPts val="3000"/>
-              </a:lnSpc>
-              <a:buNone/>
-            </a:pPr>
-            <a:r>
-              <a:rPr lang="en-US" sz="2300" b="1" dirty="0">
+              <a:t>.</a:t>
+            </a:r>
+            <a:endParaRPr lang="en-US" sz="2600" dirty="0"/>
+          </a:p>
+        </p:txBody>
+      </p:sp>
+      <p:sp>
+        <p:nvSpPr>
+          <p:cNvPr id="5" name="Text 3"/>
+          <p:cNvSpPr/>
+          <p:nvPr/>
+        </p:nvSpPr>
+        <p:spPr>
+          <a:xfrm>
+            <a:off x="658368" y="2103120"/>
+            <a:ext cx="4069080" cy="219456"/>
+          </a:xfrm>
+          <a:prstGeom prst="rect">
+            <a:avLst/>
+          </a:prstGeom>
+          <a:noFill/>
+          <a:ln/>
+        </p:spPr>
+        <p:txBody>
+          <a:bodyPr wrap="square" lIns="0" tIns="0" rIns="0" bIns="0" rtlCol="0" anchor="t"/>
+          <a:lstStyle/>
+          <a:p>
+            <a:pPr indent="0" marL="0">
+              <a:buNone/>
+            </a:pPr>
+            <a:r>
+              <a:rPr lang="en-US" sz="1050" b="1" dirty="0">
                 <a:solidFill>
                   <a:srgbClr val="191919"/>
                 </a:solidFill>
@@ -8976,45 +8995,6 @@
                 <a:ea typeface="Pretendard" pitchFamily="34" charset="-122"/>
                 <a:cs typeface="Pretendard" pitchFamily="34" charset="-120"/>
               </a:rPr>
-              <a:t>.</a:t>
-            </a:r>
-            <a:endParaRPr lang="en-US" sz="2300" dirty="0"/>
-          </a:p>
-        </p:txBody>
-      </p:sp>
-      <p:sp>
-        <p:nvSpPr>
-          <p:cNvPr id="5" name="Text 3"/>
-          <p:cNvSpPr/>
-          <p:nvPr/>
-        </p:nvSpPr>
-        <p:spPr>
-          <a:xfrm>
-            <a:off x="658368" y="2084832"/>
-            <a:ext cx="4069080" cy="219456"/>
-          </a:xfrm>
-          <a:prstGeom prst="rect">
-            <a:avLst/>
-          </a:prstGeom>
-          <a:noFill/>
-          <a:ln/>
-        </p:spPr>
-        <p:txBody>
-          <a:bodyPr wrap="square" lIns="0" tIns="0" rIns="0" bIns="0" rtlCol="0" anchor="t"/>
-          <a:lstStyle/>
-          <a:p>
-            <a:pPr indent="0" marL="0">
-              <a:buNone/>
-            </a:pPr>
-            <a:r>
-              <a:rPr lang="en-US" sz="1050" b="1" dirty="0">
-                <a:solidFill>
-                  <a:srgbClr val="191919"/>
-                </a:solidFill>
-                <a:latin typeface="Pretendard" pitchFamily="34" charset="0"/>
-                <a:ea typeface="Pretendard" pitchFamily="34" charset="-122"/>
-                <a:cs typeface="Pretendard" pitchFamily="34" charset="-120"/>
-              </a:rPr>
               <a:t>왜 작동하는가 · 학술 근거</a:t>
             </a:r>
             <a:endParaRPr lang="en-US" sz="1050" dirty="0"/>
@@ -9029,12 +9009,12 @@
         </p:nvSpPr>
         <p:spPr>
           <a:xfrm>
-            <a:off x="658368" y="2377440"/>
-            <a:ext cx="4069080" cy="896112"/>
+            <a:off x="658368" y="2359152"/>
+            <a:ext cx="4069080" cy="822960"/>
           </a:xfrm>
           <a:prstGeom prst="roundRect">
             <a:avLst>
-              <a:gd name="adj" fmla="val 9184"/>
+              <a:gd name="adj" fmla="val 10000"/>
             </a:avLst>
           </a:prstGeom>
           <a:solidFill>
@@ -9051,7 +9031,7 @@
         </p:nvSpPr>
         <p:spPr>
           <a:xfrm>
-            <a:off x="841248" y="2487168"/>
+            <a:off x="841248" y="2468880"/>
             <a:ext cx="3703320" cy="201168"/>
           </a:xfrm>
           <a:prstGeom prst="rect">
@@ -9090,7 +9070,7 @@
         </p:nvSpPr>
         <p:spPr>
           <a:xfrm>
-            <a:off x="841248" y="2706624"/>
+            <a:off x="841248" y="2688336"/>
             <a:ext cx="3703320" cy="365760"/>
           </a:xfrm>
           <a:prstGeom prst="rect">
@@ -9166,7 +9146,7 @@
         </p:nvSpPr>
         <p:spPr>
           <a:xfrm>
-            <a:off x="841248" y="3072384"/>
+            <a:off x="841248" y="2999232"/>
             <a:ext cx="3703320" cy="164592"/>
           </a:xfrm>
           <a:prstGeom prst="rect">
@@ -9205,12 +9185,12 @@
         </p:nvSpPr>
         <p:spPr>
           <a:xfrm>
-            <a:off x="658368" y="3346704"/>
-            <a:ext cx="4069080" cy="896112"/>
+            <a:off x="658368" y="3255264"/>
+            <a:ext cx="4069080" cy="822960"/>
           </a:xfrm>
           <a:prstGeom prst="roundRect">
             <a:avLst>
-              <a:gd name="adj" fmla="val 9184"/>
+              <a:gd name="adj" fmla="val 10000"/>
             </a:avLst>
           </a:prstGeom>
           <a:solidFill>
@@ -9227,7 +9207,7 @@
         </p:nvSpPr>
         <p:spPr>
           <a:xfrm>
-            <a:off x="841248" y="3456432"/>
+            <a:off x="841248" y="3364992"/>
             <a:ext cx="3703320" cy="201168"/>
           </a:xfrm>
           <a:prstGeom prst="rect">
@@ -9266,7 +9246,7 @@
         </p:nvSpPr>
         <p:spPr>
           <a:xfrm>
-            <a:off x="841248" y="3675888"/>
+            <a:off x="841248" y="3584448"/>
             <a:ext cx="3703320" cy="365760"/>
           </a:xfrm>
           <a:prstGeom prst="rect">
@@ -9342,7 +9322,7 @@
         </p:nvSpPr>
         <p:spPr>
           <a:xfrm>
-            <a:off x="841248" y="4041648"/>
+            <a:off x="841248" y="3895344"/>
             <a:ext cx="3703320" cy="164592"/>
           </a:xfrm>
           <a:prstGeom prst="rect">
@@ -9381,12 +9361,12 @@
         </p:nvSpPr>
         <p:spPr>
           <a:xfrm>
-            <a:off x="658368" y="4315968"/>
-            <a:ext cx="4069080" cy="896112"/>
+            <a:off x="658368" y="4151376"/>
+            <a:ext cx="4069080" cy="822960"/>
           </a:xfrm>
           <a:prstGeom prst="roundRect">
             <a:avLst>
-              <a:gd name="adj" fmla="val 9184"/>
+              <a:gd name="adj" fmla="val 10000"/>
             </a:avLst>
           </a:prstGeom>
           <a:solidFill>
@@ -9403,7 +9383,7 @@
         </p:nvSpPr>
         <p:spPr>
           <a:xfrm>
-            <a:off x="841248" y="4425696"/>
+            <a:off x="841248" y="4261104"/>
             <a:ext cx="3703320" cy="201168"/>
           </a:xfrm>
           <a:prstGeom prst="rect">
@@ -9442,7 +9422,7 @@
         </p:nvSpPr>
         <p:spPr>
           <a:xfrm>
-            <a:off x="841248" y="4645152"/>
+            <a:off x="841248" y="4480560"/>
             <a:ext cx="3703320" cy="365760"/>
           </a:xfrm>
           <a:prstGeom prst="rect">
@@ -9518,7 +9498,7 @@
         </p:nvSpPr>
         <p:spPr>
           <a:xfrm>
-            <a:off x="841248" y="5010912"/>
+            <a:off x="841248" y="4791456"/>
             <a:ext cx="3703320" cy="164592"/>
           </a:xfrm>
           <a:prstGeom prst="rect">
@@ -9557,7 +9537,7 @@
         </p:nvSpPr>
         <p:spPr>
           <a:xfrm>
-            <a:off x="5230368" y="2084832"/>
+            <a:off x="5230368" y="2103120"/>
             <a:ext cx="6302959" cy="219456"/>
           </a:xfrm>
           <a:prstGeom prst="rect">
@@ -9596,12 +9576,12 @@
         </p:nvSpPr>
         <p:spPr>
           <a:xfrm>
-            <a:off x="5230368" y="2377440"/>
-            <a:ext cx="6302959" cy="749808"/>
+            <a:off x="5230368" y="2359152"/>
+            <a:ext cx="6302959" cy="713232"/>
           </a:xfrm>
           <a:prstGeom prst="roundRect">
             <a:avLst>
-              <a:gd name="adj" fmla="val 10976"/>
+              <a:gd name="adj" fmla="val 11538"/>
             </a:avLst>
           </a:prstGeom>
           <a:solidFill>
@@ -9618,7 +9598,7 @@
         </p:nvSpPr>
         <p:spPr>
           <a:xfrm>
-            <a:off x="5413248" y="2487168"/>
+            <a:off x="5413248" y="2450592"/>
             <a:ext cx="5937199" cy="548640"/>
           </a:xfrm>
           <a:prstGeom prst="rect">
@@ -9762,7 +9742,7 @@
         </p:nvSpPr>
         <p:spPr>
           <a:xfrm>
-            <a:off x="5230368" y="3310128"/>
+            <a:off x="5230368" y="3163824"/>
             <a:ext cx="1389888" cy="310896"/>
           </a:xfrm>
           <a:prstGeom prst="rect">
@@ -9804,7 +9784,7 @@
         </p:nvSpPr>
         <p:spPr>
           <a:xfrm>
-            <a:off x="6729984" y="3346704"/>
+            <a:off x="6729984" y="3200400"/>
             <a:ext cx="4327855" cy="237744"/>
           </a:xfrm>
           <a:prstGeom prst="roundRect">
@@ -9826,7 +9806,7 @@
         </p:nvSpPr>
         <p:spPr>
           <a:xfrm>
-            <a:off x="6729984" y="3346704"/>
+            <a:off x="6729984" y="3200400"/>
             <a:ext cx="1589824" cy="237744"/>
           </a:xfrm>
           <a:prstGeom prst="roundRect">
@@ -9848,7 +9828,7 @@
         </p:nvSpPr>
         <p:spPr>
           <a:xfrm>
-            <a:off x="11112703" y="3346704"/>
+            <a:off x="11112703" y="3200400"/>
             <a:ext cx="365760" cy="237744"/>
           </a:xfrm>
           <a:prstGeom prst="rect">
@@ -9887,7 +9867,7 @@
         </p:nvSpPr>
         <p:spPr>
           <a:xfrm>
-            <a:off x="5230368" y="3675888"/>
+            <a:off x="5230368" y="3511296"/>
             <a:ext cx="1389888" cy="310896"/>
           </a:xfrm>
           <a:prstGeom prst="rect">
@@ -9929,7 +9909,7 @@
         </p:nvSpPr>
         <p:spPr>
           <a:xfrm>
-            <a:off x="6729984" y="3712464"/>
+            <a:off x="6729984" y="3547872"/>
             <a:ext cx="4327855" cy="237744"/>
           </a:xfrm>
           <a:prstGeom prst="roundRect">
@@ -9951,7 +9931,7 @@
         </p:nvSpPr>
         <p:spPr>
           <a:xfrm>
-            <a:off x="6729984" y="3712464"/>
+            <a:off x="6729984" y="3547872"/>
             <a:ext cx="1589824" cy="237744"/>
           </a:xfrm>
           <a:prstGeom prst="roundRect">
@@ -9973,7 +9953,7 @@
         </p:nvSpPr>
         <p:spPr>
           <a:xfrm>
-            <a:off x="11112703" y="3712464"/>
+            <a:off x="11112703" y="3547872"/>
             <a:ext cx="365760" cy="237744"/>
           </a:xfrm>
           <a:prstGeom prst="rect">
@@ -10012,7 +9992,7 @@
         </p:nvSpPr>
         <p:spPr>
           <a:xfrm>
-            <a:off x="5230368" y="4041648"/>
+            <a:off x="5230368" y="3858768"/>
             <a:ext cx="1389888" cy="310896"/>
           </a:xfrm>
           <a:prstGeom prst="rect">
@@ -10074,7 +10054,7 @@
         </p:nvSpPr>
         <p:spPr>
           <a:xfrm>
-            <a:off x="6729984" y="4078224"/>
+            <a:off x="6729984" y="3895344"/>
             <a:ext cx="4327855" cy="237744"/>
           </a:xfrm>
           <a:prstGeom prst="roundRect">
@@ -10096,7 +10076,7 @@
         </p:nvSpPr>
         <p:spPr>
           <a:xfrm>
-            <a:off x="6729984" y="4078224"/>
+            <a:off x="6729984" y="3895344"/>
             <a:ext cx="2384737" cy="237744"/>
           </a:xfrm>
           <a:prstGeom prst="roundRect">
@@ -10118,7 +10098,7 @@
         </p:nvSpPr>
         <p:spPr>
           <a:xfrm>
-            <a:off x="11112703" y="4078224"/>
+            <a:off x="11112703" y="3895344"/>
             <a:ext cx="365760" cy="237744"/>
           </a:xfrm>
           <a:prstGeom prst="rect">
@@ -10157,7 +10137,7 @@
         </p:nvSpPr>
         <p:spPr>
           <a:xfrm>
-            <a:off x="6729984" y="4398264"/>
+            <a:off x="6729984" y="4197096"/>
             <a:ext cx="658368" cy="182880"/>
           </a:xfrm>
           <a:prstGeom prst="rect">
@@ -10196,7 +10176,7 @@
         </p:nvSpPr>
         <p:spPr>
           <a:xfrm>
-            <a:off x="7612866" y="4398264"/>
+            <a:off x="7612866" y="4197096"/>
             <a:ext cx="658368" cy="182880"/>
           </a:xfrm>
           <a:prstGeom prst="rect">
@@ -10235,7 +10215,7 @@
         </p:nvSpPr>
         <p:spPr>
           <a:xfrm>
-            <a:off x="8495749" y="4398264"/>
+            <a:off x="8495749" y="4197096"/>
             <a:ext cx="658368" cy="182880"/>
           </a:xfrm>
           <a:prstGeom prst="rect">
@@ -10274,7 +10254,7 @@
         </p:nvSpPr>
         <p:spPr>
           <a:xfrm>
-            <a:off x="9378631" y="4398264"/>
+            <a:off x="9378631" y="4197096"/>
             <a:ext cx="658368" cy="182880"/>
           </a:xfrm>
           <a:prstGeom prst="rect">
@@ -10313,7 +10293,7 @@
         </p:nvSpPr>
         <p:spPr>
           <a:xfrm>
-            <a:off x="10754889" y="4398264"/>
+            <a:off x="10754889" y="4197096"/>
             <a:ext cx="658368" cy="182880"/>
           </a:xfrm>
           <a:prstGeom prst="rect">
@@ -10346,18 +10326,264 @@
       </p:sp>
       <p:sp>
         <p:nvSpPr>
-          <p:cNvPr id="38" name="Shape 36"/>
-          <p:cNvSpPr/>
-          <p:nvPr/>
-        </p:nvSpPr>
-        <p:spPr>
-          <a:xfrm>
-            <a:off x="658368" y="5230368"/>
-            <a:ext cx="10874959" cy="713232"/>
+          <p:cNvPr id="38" name="Text 36"/>
+          <p:cNvSpPr/>
+          <p:nvPr/>
+        </p:nvSpPr>
+        <p:spPr>
+          <a:xfrm>
+            <a:off x="5230368" y="4425696"/>
+            <a:ext cx="6302959" cy="201168"/>
+          </a:xfrm>
+          <a:prstGeom prst="rect">
+            <a:avLst/>
+          </a:prstGeom>
+          <a:noFill/>
+          <a:ln/>
+        </p:spPr>
+        <p:txBody>
+          <a:bodyPr wrap="square" lIns="0" tIns="0" rIns="0" bIns="0" rtlCol="0" anchor="t"/>
+          <a:lstStyle/>
+          <a:p>
+            <a:pPr indent="0" marL="0">
+              <a:buNone/>
+            </a:pPr>
+            <a:r>
+              <a:rPr lang="en-US" sz="950" b="1" dirty="0">
+                <a:solidFill>
+                  <a:srgbClr val="191919"/>
+                </a:solidFill>
+                <a:latin typeface="Pretendard" pitchFamily="34" charset="0"/>
+                <a:ea typeface="Pretendard" pitchFamily="34" charset="-122"/>
+                <a:cs typeface="Pretendard" pitchFamily="34" charset="-120"/>
+              </a:rPr>
+              <a:t>수십 년째 같은 캐릭터를 쓰는 브랜드들</a:t>
+            </a:r>
+            <a:endParaRPr lang="en-US" sz="950" dirty="0"/>
+          </a:p>
+        </p:txBody>
+      </p:sp>
+      <p:pic>
+        <p:nvPicPr>
+          <p:cNvPr id="39" name="Image 0" descr="/home/user/CHAI-AI/assets/img/mascot-michelin.jpg">    </p:cNvPr>
+          <p:cNvPicPr>
+            <a:picLocks noChangeAspect="1"/>
+          </p:cNvPicPr>
+          <p:nvPr/>
+        </p:nvPicPr>
+        <p:blipFill>
+          <a:blip r:embed="rId1"/>
+          <a:srcRect l="0" r="0" t="0" b="0"/>
+          <a:stretch/>
+        </p:blipFill>
+        <p:spPr>
+          <a:xfrm>
+            <a:off x="5230368" y="4663440"/>
+            <a:ext cx="1991258" cy="512064"/>
+          </a:xfrm>
+          <a:prstGeom prst="rect">
+            <a:avLst/>
+          </a:prstGeom>
+          <a:effectLst>
+            <a:outerShdw sx="100000" sy="100000" kx="0" ky="0" algn="bl" rotWithShape="0" blurRad="177800" dist="50800" dir="5400000">
+              <a:srgbClr val="191919">
+                <a:alpha val="22000"/>
+              </a:srgbClr>
+            </a:outerShdw>
+          </a:effectLst>
+        </p:spPr>
+      </p:pic>
+      <p:sp>
+        <p:nvSpPr>
+          <p:cNvPr id="40" name="Text 37"/>
+          <p:cNvSpPr/>
+          <p:nvPr/>
+        </p:nvSpPr>
+        <p:spPr>
+          <a:xfrm>
+            <a:off x="5230368" y="5212080"/>
+            <a:ext cx="1991258" cy="182880"/>
+          </a:xfrm>
+          <a:prstGeom prst="rect">
+            <a:avLst/>
+          </a:prstGeom>
+          <a:noFill/>
+          <a:ln/>
+        </p:spPr>
+        <p:txBody>
+          <a:bodyPr wrap="square" lIns="0" tIns="0" rIns="0" bIns="0" rtlCol="0" anchor="t"/>
+          <a:lstStyle/>
+          <a:p>
+            <a:pPr algn="ctr" indent="0" marL="0">
+              <a:buNone/>
+            </a:pPr>
+            <a:r>
+              <a:rPr lang="en-US" sz="700" dirty="0">
+                <a:solidFill>
+                  <a:srgbClr val="707070"/>
+                </a:solidFill>
+                <a:latin typeface="Pretendard" pitchFamily="34" charset="0"/>
+                <a:ea typeface="Pretendard" pitchFamily="34" charset="-122"/>
+                <a:cs typeface="Pretendard" pitchFamily="34" charset="-120"/>
+              </a:rPr>
+              <a:t>미쉐린 비벤덤 1898~</a:t>
+            </a:r>
+            <a:endParaRPr lang="en-US" sz="700" dirty="0"/>
+          </a:p>
+        </p:txBody>
+      </p:sp>
+      <p:pic>
+        <p:nvPicPr>
+          <p:cNvPr id="41" name="Image 1" descr="/home/user/CHAI-AI/assets/img/mascot-ronald.jpg">    </p:cNvPr>
+          <p:cNvPicPr>
+            <a:picLocks noChangeAspect="1"/>
+          </p:cNvPicPr>
+          <p:nvPr/>
+        </p:nvPicPr>
+        <p:blipFill>
+          <a:blip r:embed="rId2"/>
+          <a:srcRect l="0" r="0" t="0" b="0"/>
+          <a:stretch/>
+        </p:blipFill>
+        <p:spPr>
+          <a:xfrm>
+            <a:off x="7386218" y="4663440"/>
+            <a:ext cx="1991258" cy="512064"/>
+          </a:xfrm>
+          <a:prstGeom prst="rect">
+            <a:avLst/>
+          </a:prstGeom>
+          <a:effectLst>
+            <a:outerShdw sx="100000" sy="100000" kx="0" ky="0" algn="bl" rotWithShape="0" blurRad="177800" dist="50800" dir="5400000">
+              <a:srgbClr val="191919">
+                <a:alpha val="22000"/>
+              </a:srgbClr>
+            </a:outerShdw>
+          </a:effectLst>
+        </p:spPr>
+      </p:pic>
+      <p:sp>
+        <p:nvSpPr>
+          <p:cNvPr id="42" name="Text 38"/>
+          <p:cNvSpPr/>
+          <p:nvPr/>
+        </p:nvSpPr>
+        <p:spPr>
+          <a:xfrm>
+            <a:off x="7386218" y="5212080"/>
+            <a:ext cx="1991258" cy="182880"/>
+          </a:xfrm>
+          <a:prstGeom prst="rect">
+            <a:avLst/>
+          </a:prstGeom>
+          <a:noFill/>
+          <a:ln/>
+        </p:spPr>
+        <p:txBody>
+          <a:bodyPr wrap="square" lIns="0" tIns="0" rIns="0" bIns="0" rtlCol="0" anchor="t"/>
+          <a:lstStyle/>
+          <a:p>
+            <a:pPr algn="ctr" indent="0" marL="0">
+              <a:buNone/>
+            </a:pPr>
+            <a:r>
+              <a:rPr lang="en-US" sz="700" dirty="0">
+                <a:solidFill>
+                  <a:srgbClr val="707070"/>
+                </a:solidFill>
+                <a:latin typeface="Pretendard" pitchFamily="34" charset="0"/>
+                <a:ea typeface="Pretendard" pitchFamily="34" charset="-122"/>
+                <a:cs typeface="Pretendard" pitchFamily="34" charset="-120"/>
+              </a:rPr>
+              <a:t>맥도날드 로날드 1963~</a:t>
+            </a:r>
+            <a:endParaRPr lang="en-US" sz="700" dirty="0"/>
+          </a:p>
+        </p:txBody>
+      </p:sp>
+      <p:pic>
+        <p:nvPicPr>
+          <p:cNvPr id="43" name="Image 2" descr="/home/user/CHAI-AI/assets/img/mascot-doughboy.jpg">    </p:cNvPr>
+          <p:cNvPicPr>
+            <a:picLocks noChangeAspect="1"/>
+          </p:cNvPicPr>
+          <p:nvPr/>
+        </p:nvPicPr>
+        <p:blipFill>
+          <a:blip r:embed="rId3"/>
+          <a:srcRect l="0" r="0" t="0" b="0"/>
+          <a:stretch/>
+        </p:blipFill>
+        <p:spPr>
+          <a:xfrm>
+            <a:off x="9542069" y="4663440"/>
+            <a:ext cx="1991258" cy="512064"/>
+          </a:xfrm>
+          <a:prstGeom prst="rect">
+            <a:avLst/>
+          </a:prstGeom>
+          <a:effectLst>
+            <a:outerShdw sx="100000" sy="100000" kx="0" ky="0" algn="bl" rotWithShape="0" blurRad="177800" dist="50800" dir="5400000">
+              <a:srgbClr val="191919">
+                <a:alpha val="22000"/>
+              </a:srgbClr>
+            </a:outerShdw>
+          </a:effectLst>
+        </p:spPr>
+      </p:pic>
+      <p:sp>
+        <p:nvSpPr>
+          <p:cNvPr id="44" name="Text 39"/>
+          <p:cNvSpPr/>
+          <p:nvPr/>
+        </p:nvSpPr>
+        <p:spPr>
+          <a:xfrm>
+            <a:off x="9542069" y="5212080"/>
+            <a:ext cx="1991258" cy="182880"/>
+          </a:xfrm>
+          <a:prstGeom prst="rect">
+            <a:avLst/>
+          </a:prstGeom>
+          <a:noFill/>
+          <a:ln/>
+        </p:spPr>
+        <p:txBody>
+          <a:bodyPr wrap="square" lIns="0" tIns="0" rIns="0" bIns="0" rtlCol="0" anchor="t"/>
+          <a:lstStyle/>
+          <a:p>
+            <a:pPr algn="ctr" indent="0" marL="0">
+              <a:buNone/>
+            </a:pPr>
+            <a:r>
+              <a:rPr lang="en-US" sz="700" dirty="0">
+                <a:solidFill>
+                  <a:srgbClr val="707070"/>
+                </a:solidFill>
+                <a:latin typeface="Pretendard" pitchFamily="34" charset="0"/>
+                <a:ea typeface="Pretendard" pitchFamily="34" charset="-122"/>
+                <a:cs typeface="Pretendard" pitchFamily="34" charset="-120"/>
+              </a:rPr>
+              <a:t>필즈베리 도우보이 1965~</a:t>
+            </a:r>
+            <a:endParaRPr lang="en-US" sz="700" dirty="0"/>
+          </a:p>
+        </p:txBody>
+      </p:sp>
+      <p:sp>
+        <p:nvSpPr>
+          <p:cNvPr id="45" name="Shape 40"/>
+          <p:cNvSpPr/>
+          <p:nvPr/>
+        </p:nvSpPr>
+        <p:spPr>
+          <a:xfrm>
+            <a:off x="658368" y="5468112"/>
+            <a:ext cx="10874959" cy="658368"/>
           </a:xfrm>
           <a:prstGeom prst="roundRect">
             <a:avLst>
-              <a:gd name="adj" fmla="val 11538"/>
+              <a:gd name="adj" fmla="val 12500"/>
             </a:avLst>
           </a:prstGeom>
           <a:solidFill>
@@ -10373,13 +10599,13 @@
       </p:sp>
       <p:sp>
         <p:nvSpPr>
-          <p:cNvPr id="39" name="Text 37"/>
-          <p:cNvSpPr/>
-          <p:nvPr/>
-        </p:nvSpPr>
-        <p:spPr>
-          <a:xfrm>
-            <a:off x="658368" y="5330952"/>
+          <p:cNvPr id="46" name="Text 41"/>
+          <p:cNvSpPr/>
+          <p:nvPr/>
+        </p:nvSpPr>
+        <p:spPr>
+          <a:xfrm>
+            <a:off x="658368" y="5550408"/>
             <a:ext cx="10874959" cy="274320"/>
           </a:xfrm>
           <a:prstGeom prst="rect">
@@ -10396,7 +10622,7 @@
               <a:buNone/>
             </a:pPr>
             <a:r>
-              <a:rPr lang="en-US" sz="1500" b="1" dirty="0">
+              <a:rPr lang="en-US" sz="1450" b="1" dirty="0">
                 <a:solidFill>
                   <a:srgbClr val="FFFFFF"/>
                 </a:solidFill>
@@ -10406,19 +10632,19 @@
               </a:rPr>
               <a:t>이론에서도, 실제 광고 성적에서도 같은 쪽을 가리킨다.</a:t>
             </a:r>
-            <a:endParaRPr lang="en-US" sz="1500" dirty="0"/>
-          </a:p>
-        </p:txBody>
-      </p:sp>
-      <p:sp>
-        <p:nvSpPr>
-          <p:cNvPr id="40" name="Text 38"/>
-          <p:cNvSpPr/>
-          <p:nvPr/>
-        </p:nvSpPr>
-        <p:spPr>
-          <a:xfrm>
-            <a:off x="658368" y="5623560"/>
+            <a:endParaRPr lang="en-US" sz="1450" dirty="0"/>
+          </a:p>
+        </p:txBody>
+      </p:sp>
+      <p:sp>
+        <p:nvSpPr>
+          <p:cNvPr id="47" name="Text 42"/>
+          <p:cNvSpPr/>
+          <p:nvPr/>
+        </p:nvSpPr>
+        <p:spPr>
+          <a:xfrm>
+            <a:off x="658368" y="5833872"/>
             <a:ext cx="10874959" cy="219456"/>
           </a:xfrm>
           <a:prstGeom prst="rect">
@@ -10435,7 +10661,7 @@
               <a:buNone/>
             </a:pPr>
             <a:r>
-              <a:rPr lang="en-US" sz="1000" dirty="0">
+              <a:rPr lang="en-US" sz="950" dirty="0">
                 <a:solidFill>
                   <a:srgbClr val="DCE6FF"/>
                 </a:solidFill>
@@ -10445,19 +10671,19 @@
               </a:rPr>
               <a:t>연예인의 주목은 빌려 쓰는 것이고, 캐릭터는 브랜드에 남는다. 정수기 광고에는 아직 그런 캐릭터가 없다.</a:t>
             </a:r>
-            <a:endParaRPr lang="en-US" sz="1000" dirty="0"/>
-          </a:p>
-        </p:txBody>
-      </p:sp>
-      <p:sp>
-        <p:nvSpPr>
-          <p:cNvPr id="41" name="Text 39"/>
-          <p:cNvSpPr/>
-          <p:nvPr/>
-        </p:nvSpPr>
-        <p:spPr>
-          <a:xfrm>
-            <a:off x="658368" y="6035040"/>
+            <a:endParaRPr lang="en-US" sz="950" dirty="0"/>
+          </a:p>
+        </p:txBody>
+      </p:sp>
+      <p:sp>
+        <p:nvSpPr>
+          <p:cNvPr id="48" name="Text 43"/>
+          <p:cNvSpPr/>
+          <p:nvPr/>
+        </p:nvSpPr>
+        <p:spPr>
+          <a:xfrm>
+            <a:off x="658368" y="6236208"/>
             <a:ext cx="7680960" cy="219456"/>
           </a:xfrm>
           <a:prstGeom prst="rect">
@@ -10490,13 +10716,13 @@
       </p:sp>
       <p:sp>
         <p:nvSpPr>
-          <p:cNvPr id="42" name="Text 40"/>
-          <p:cNvSpPr/>
-          <p:nvPr/>
-        </p:nvSpPr>
-        <p:spPr>
-          <a:xfrm>
-            <a:off x="7875727" y="6035040"/>
+          <p:cNvPr id="49" name="Text 44"/>
+          <p:cNvSpPr/>
+          <p:nvPr/>
+        </p:nvSpPr>
+        <p:spPr>
+          <a:xfrm>
+            <a:off x="7875727" y="6217920"/>
             <a:ext cx="3657600" cy="219456"/>
           </a:xfrm>
           <a:prstGeom prst="rect">
@@ -10513,7 +10739,7 @@
               <a:buNone/>
             </a:pPr>
             <a:r>
-              <a:rPr lang="en-US" sz="950" b="1" dirty="0">
+              <a:rPr lang="en-US" sz="900" b="1" dirty="0">
                 <a:solidFill>
                   <a:srgbClr val="0057FF"/>
                 </a:solidFill>
@@ -10523,13 +10749,13 @@
               </a:rPr>
               <a:t>→ 그런데 우리는 캐릭터를 새로 만들 필요가 없다.</a:t>
             </a:r>
-            <a:endParaRPr lang="en-US" sz="950" dirty="0"/>
-          </a:p>
-        </p:txBody>
-      </p:sp>
-      <p:sp>
-        <p:nvSpPr>
-          <p:cNvPr id="43" name="Text 41"/>
+            <a:endParaRPr lang="en-US" sz="900" dirty="0"/>
+          </a:p>
+        </p:txBody>
+      </p:sp>
+      <p:sp>
+        <p:nvSpPr>
+          <p:cNvPr id="50" name="Text 45"/>
           <p:cNvSpPr/>
           <p:nvPr/>
         </p:nvSpPr>
@@ -10568,7 +10794,7 @@
       </p:sp>
       <p:sp>
         <p:nvSpPr>
-          <p:cNvPr id="44" name="Text 42"/>
+          <p:cNvPr id="51" name="Text 46"/>
           <p:cNvSpPr/>
           <p:nvPr/>
         </p:nvSpPr>
@@ -12689,12 +12915,12 @@
         </p:nvSpPr>
         <p:spPr>
           <a:xfrm>
-            <a:off x="658368" y="1810512"/>
-            <a:ext cx="5300320" cy="1783080"/>
+            <a:off x="658368" y="1920240"/>
+            <a:ext cx="2540432" cy="3063240"/>
           </a:xfrm>
           <a:prstGeom prst="roundRect">
             <a:avLst>
-              <a:gd name="adj" fmla="val 4615"/>
+              <a:gd name="adj" fmla="val 3239"/>
             </a:avLst>
           </a:prstGeom>
           <a:solidFill>
@@ -12708,32 +12934,62 @@
           </a:ln>
         </p:spPr>
       </p:sp>
-      <p:sp>
-        <p:nvSpPr>
-          <p:cNvPr id="6" name="Text 4"/>
-          <p:cNvSpPr/>
-          <p:nvPr/>
-        </p:nvSpPr>
-        <p:spPr>
-          <a:xfrm>
-            <a:off x="877824" y="1984248"/>
-            <a:ext cx="384048" cy="237744"/>
-          </a:xfrm>
-          <a:prstGeom prst="rect">
-            <a:avLst/>
-          </a:prstGeom>
-          <a:noFill/>
-          <a:ln/>
-        </p:spPr>
-        <p:txBody>
-          <a:bodyPr wrap="square" lIns="0" tIns="0" rIns="0" bIns="0" rtlCol="0" anchor="t"/>
-          <a:lstStyle/>
-          <a:p>
-            <a:pPr indent="0" marL="0">
-              <a:buNone/>
-            </a:pPr>
-            <a:r>
-              <a:rPr lang="en-US" sz="1100" b="1" dirty="0">
+      <p:pic>
+        <p:nvPicPr>
+          <p:cNvPr id="6" name="Image 0" descr="/home/user/CHAI-AI/assets/img/peng-then.jpg">    </p:cNvPr>
+          <p:cNvPicPr>
+            <a:picLocks noChangeAspect="1"/>
+          </p:cNvPicPr>
+          <p:nvPr/>
+        </p:nvPicPr>
+        <p:blipFill>
+          <a:blip r:embed="rId1"/>
+          <a:srcRect l="0" r="0" t="0" b="0"/>
+          <a:stretch/>
+        </p:blipFill>
+        <p:spPr>
+          <a:xfrm>
+            <a:off x="658368" y="1920240"/>
+            <a:ext cx="2540432" cy="1170432"/>
+          </a:xfrm>
+          <a:prstGeom prst="rect">
+            <a:avLst/>
+          </a:prstGeom>
+          <a:effectLst>
+            <a:outerShdw sx="100000" sy="100000" kx="0" ky="0" algn="bl" rotWithShape="0" blurRad="177800" dist="50800" dir="5400000">
+              <a:srgbClr val="191919">
+                <a:alpha val="22000"/>
+              </a:srgbClr>
+            </a:outerShdw>
+          </a:effectLst>
+        </p:spPr>
+      </p:pic>
+      <p:sp>
+        <p:nvSpPr>
+          <p:cNvPr id="7" name="Text 4"/>
+          <p:cNvSpPr/>
+          <p:nvPr/>
+        </p:nvSpPr>
+        <p:spPr>
+          <a:xfrm>
+            <a:off x="841248" y="3236976"/>
+            <a:ext cx="310896" cy="219456"/>
+          </a:xfrm>
+          <a:prstGeom prst="rect">
+            <a:avLst/>
+          </a:prstGeom>
+          <a:noFill/>
+          <a:ln/>
+        </p:spPr>
+        <p:txBody>
+          <a:bodyPr wrap="square" lIns="0" tIns="0" rIns="0" bIns="0" rtlCol="0" anchor="t"/>
+          <a:lstStyle/>
+          <a:p>
+            <a:pPr indent="0" marL="0">
+              <a:buNone/>
+            </a:pPr>
+            <a:r>
+              <a:rPr lang="en-US" sz="1050" b="1" dirty="0">
                 <a:solidFill>
                   <a:srgbClr val="0057FF"/>
                 </a:solidFill>
@@ -12743,36 +12999,36 @@
               </a:rPr>
               <a:t>01</a:t>
             </a:r>
-            <a:endParaRPr lang="en-US" sz="1100" dirty="0"/>
-          </a:p>
-        </p:txBody>
-      </p:sp>
-      <p:sp>
-        <p:nvSpPr>
-          <p:cNvPr id="7" name="Text 5"/>
-          <p:cNvSpPr/>
-          <p:nvPr/>
-        </p:nvSpPr>
-        <p:spPr>
-          <a:xfrm>
-            <a:off x="1261872" y="1965960"/>
-            <a:ext cx="4477360" cy="274320"/>
-          </a:xfrm>
-          <a:prstGeom prst="rect">
-            <a:avLst/>
-          </a:prstGeom>
-          <a:noFill/>
-          <a:ln/>
-        </p:spPr>
-        <p:txBody>
-          <a:bodyPr wrap="square" lIns="0" tIns="0" rIns="0" bIns="0" rtlCol="0" anchor="t"/>
-          <a:lstStyle/>
-          <a:p>
-            <a:pPr indent="0" marL="0">
-              <a:buNone/>
-            </a:pPr>
-            <a:r>
-              <a:rPr lang="en-US" sz="1300" b="1" dirty="0">
+            <a:endParaRPr lang="en-US" sz="1050" dirty="0"/>
+          </a:p>
+        </p:txBody>
+      </p:sp>
+      <p:sp>
+        <p:nvSpPr>
+          <p:cNvPr id="8" name="Text 5"/>
+          <p:cNvSpPr/>
+          <p:nvPr/>
+        </p:nvSpPr>
+        <p:spPr>
+          <a:xfrm>
+            <a:off x="1170432" y="3218688"/>
+            <a:ext cx="1845488" cy="237744"/>
+          </a:xfrm>
+          <a:prstGeom prst="rect">
+            <a:avLst/>
+          </a:prstGeom>
+          <a:noFill/>
+          <a:ln/>
+        </p:spPr>
+        <p:txBody>
+          <a:bodyPr wrap="square" lIns="0" tIns="0" rIns="0" bIns="0" rtlCol="0" anchor="t"/>
+          <a:lstStyle/>
+          <a:p>
+            <a:pPr indent="0" marL="0">
+              <a:buNone/>
+            </a:pPr>
+            <a:r>
+              <a:rPr lang="en-US" sz="1150" b="1" dirty="0">
                 <a:solidFill>
                   <a:srgbClr val="191919"/>
                 </a:solidFill>
@@ -12780,26 +13036,110 @@
                 <a:ea typeface="Pretendard" pitchFamily="34" charset="-122"/>
                 <a:cs typeface="Pretendard" pitchFamily="34" charset="-120"/>
               </a:rPr>
-              <a:t>이미 가지고 있는 자산이다</a:t>
-            </a:r>
-            <a:endParaRPr lang="en-US" sz="1300" dirty="0"/>
-          </a:p>
-        </p:txBody>
-      </p:sp>
-      <p:sp>
-        <p:nvSpPr>
-          <p:cNvPr id="8" name="Shape 6"/>
-          <p:cNvSpPr/>
-          <p:nvPr/>
-        </p:nvSpPr>
-        <p:spPr>
-          <a:xfrm>
-            <a:off x="6233008" y="1810512"/>
-            <a:ext cx="5300320" cy="1783080"/>
+              <a:t>이미 가진 자산</a:t>
+            </a:r>
+            <a:endParaRPr lang="en-US" sz="1150" dirty="0"/>
+          </a:p>
+        </p:txBody>
+      </p:sp>
+      <p:sp>
+        <p:nvSpPr>
+          <p:cNvPr id="9" name="Text 6"/>
+          <p:cNvSpPr/>
+          <p:nvPr/>
+        </p:nvSpPr>
+        <p:spPr>
+          <a:xfrm>
+            <a:off x="841248" y="3511296"/>
+            <a:ext cx="2174672" cy="512064"/>
+          </a:xfrm>
+          <a:prstGeom prst="rect">
+            <a:avLst/>
+          </a:prstGeom>
+          <a:noFill/>
+          <a:ln/>
+        </p:spPr>
+        <p:txBody>
+          <a:bodyPr wrap="square" lIns="0" tIns="0" rIns="0" bIns="0" rtlCol="0" anchor="t"/>
+          <a:lstStyle/>
+          <a:p>
+            <a:pPr indent="0" marL="0">
+              <a:lnSpc>
+                <a:spcPts val="1200"/>
+              </a:lnSpc>
+              <a:buNone/>
+            </a:pPr>
+            <a:r>
+              <a:rPr lang="en-US" sz="900" dirty="0">
+                <a:solidFill>
+                  <a:srgbClr val="3C3C3C"/>
+                </a:solidFill>
+                <a:latin typeface="Pretendard" pitchFamily="34" charset="0"/>
+                <a:ea typeface="Pretendard" pitchFamily="34" charset="-122"/>
+                <a:cs typeface="Pretendard" pitchFamily="34" charset="-120"/>
+              </a:rPr>
+              <a:t>새로 만들거나 빌리는 것보다, 청호나이스의 얼음정수기 역사와 연결할 수 있다.</a:t>
+            </a:r>
+            <a:endParaRPr lang="en-US" sz="900" dirty="0"/>
+          </a:p>
+        </p:txBody>
+      </p:sp>
+      <p:sp>
+        <p:nvSpPr>
+          <p:cNvPr id="10" name="Text 7"/>
+          <p:cNvSpPr/>
+          <p:nvPr/>
+        </p:nvSpPr>
+        <p:spPr>
+          <a:xfrm>
+            <a:off x="841248" y="4023360"/>
+            <a:ext cx="2174672" cy="457200"/>
+          </a:xfrm>
+          <a:prstGeom prst="rect">
+            <a:avLst/>
+          </a:prstGeom>
+          <a:noFill/>
+          <a:ln/>
+        </p:spPr>
+        <p:txBody>
+          <a:bodyPr wrap="square" lIns="0" tIns="0" rIns="0" bIns="0" rtlCol="0" anchor="t"/>
+          <a:lstStyle/>
+          <a:p>
+            <a:pPr indent="0" marL="0">
+              <a:lnSpc>
+                <a:spcPts val="1100"/>
+              </a:lnSpc>
+              <a:buNone/>
+            </a:pPr>
+            <a:r>
+              <a:rPr lang="en-US" sz="800" dirty="0">
+                <a:solidFill>
+                  <a:srgbClr val="707070"/>
+                </a:solidFill>
+                <a:latin typeface="Pretendard" pitchFamily="34" charset="0"/>
+                <a:ea typeface="Pretendard" pitchFamily="34" charset="-122"/>
+                <a:cs typeface="Pretendard" pitchFamily="34" charset="-120"/>
+              </a:rPr>
+              <a:t>인지도는 조사 전이므로 ‘보유한 과거 광고 자산 후보’로 말한다.</a:t>
+            </a:r>
+            <a:endParaRPr lang="en-US" sz="800" dirty="0"/>
+          </a:p>
+        </p:txBody>
+      </p:sp>
+      <p:sp>
+        <p:nvSpPr>
+          <p:cNvPr id="11" name="Shape 8"/>
+          <p:cNvSpPr/>
+          <p:nvPr/>
+        </p:nvSpPr>
+        <p:spPr>
+          <a:xfrm>
+            <a:off x="3436544" y="1920240"/>
+            <a:ext cx="2540432" cy="3063240"/>
           </a:xfrm>
           <a:prstGeom prst="roundRect">
             <a:avLst>
-              <a:gd name="adj" fmla="val 4615"/>
+              <a:gd name="adj" fmla="val 3239"/>
             </a:avLst>
           </a:prstGeom>
           <a:solidFill>
@@ -12813,32 +13153,62 @@
           </a:ln>
         </p:spPr>
       </p:sp>
-      <p:sp>
-        <p:nvSpPr>
-          <p:cNvPr id="9" name="Text 7"/>
-          <p:cNvSpPr/>
-          <p:nvPr/>
-        </p:nvSpPr>
-        <p:spPr>
-          <a:xfrm>
-            <a:off x="6452464" y="1984248"/>
-            <a:ext cx="384048" cy="237744"/>
-          </a:xfrm>
-          <a:prstGeom prst="rect">
-            <a:avLst/>
-          </a:prstGeom>
-          <a:noFill/>
-          <a:ln/>
-        </p:spPr>
-        <p:txBody>
-          <a:bodyPr wrap="square" lIns="0" tIns="0" rIns="0" bIns="0" rtlCol="0" anchor="t"/>
-          <a:lstStyle/>
-          <a:p>
-            <a:pPr indent="0" marL="0">
-              <a:buNone/>
-            </a:pPr>
-            <a:r>
-              <a:rPr lang="en-US" sz="1100" b="1" dirty="0">
+      <p:pic>
+        <p:nvPicPr>
+          <p:cNvPr id="12" name="Image 1" descr="/home/user/CHAI-AI/assets/img/asset-mini.jpg">    </p:cNvPr>
+          <p:cNvPicPr>
+            <a:picLocks noChangeAspect="1"/>
+          </p:cNvPicPr>
+          <p:nvPr/>
+        </p:nvPicPr>
+        <p:blipFill>
+          <a:blip r:embed="rId2"/>
+          <a:srcRect l="0" r="0" t="0" b="0"/>
+          <a:stretch/>
+        </p:blipFill>
+        <p:spPr>
+          <a:xfrm>
+            <a:off x="3436544" y="1920240"/>
+            <a:ext cx="2540432" cy="1170432"/>
+          </a:xfrm>
+          <a:prstGeom prst="rect">
+            <a:avLst/>
+          </a:prstGeom>
+          <a:effectLst>
+            <a:outerShdw sx="100000" sy="100000" kx="0" ky="0" algn="bl" rotWithShape="0" blurRad="177800" dist="50800" dir="5400000">
+              <a:srgbClr val="191919">
+                <a:alpha val="22000"/>
+              </a:srgbClr>
+            </a:outerShdw>
+          </a:effectLst>
+        </p:spPr>
+      </p:pic>
+      <p:sp>
+        <p:nvSpPr>
+          <p:cNvPr id="13" name="Text 9"/>
+          <p:cNvSpPr/>
+          <p:nvPr/>
+        </p:nvSpPr>
+        <p:spPr>
+          <a:xfrm>
+            <a:off x="3619424" y="3236976"/>
+            <a:ext cx="310896" cy="219456"/>
+          </a:xfrm>
+          <a:prstGeom prst="rect">
+            <a:avLst/>
+          </a:prstGeom>
+          <a:noFill/>
+          <a:ln/>
+        </p:spPr>
+        <p:txBody>
+          <a:bodyPr wrap="square" lIns="0" tIns="0" rIns="0" bIns="0" rtlCol="0" anchor="t"/>
+          <a:lstStyle/>
+          <a:p>
+            <a:pPr indent="0" marL="0">
+              <a:buNone/>
+            </a:pPr>
+            <a:r>
+              <a:rPr lang="en-US" sz="1050" b="1" dirty="0">
                 <a:solidFill>
                   <a:srgbClr val="0057FF"/>
                 </a:solidFill>
@@ -12848,36 +13218,36 @@
               </a:rPr>
               <a:t>02</a:t>
             </a:r>
-            <a:endParaRPr lang="en-US" sz="1100" dirty="0"/>
-          </a:p>
-        </p:txBody>
-      </p:sp>
-      <p:sp>
-        <p:nvSpPr>
-          <p:cNvPr id="10" name="Text 8"/>
-          <p:cNvSpPr/>
-          <p:nvPr/>
-        </p:nvSpPr>
-        <p:spPr>
-          <a:xfrm>
-            <a:off x="6836512" y="1965960"/>
-            <a:ext cx="4477360" cy="274320"/>
-          </a:xfrm>
-          <a:prstGeom prst="rect">
-            <a:avLst/>
-          </a:prstGeom>
-          <a:noFill/>
-          <a:ln/>
-        </p:spPr>
-        <p:txBody>
-          <a:bodyPr wrap="square" lIns="0" tIns="0" rIns="0" bIns="0" rtlCol="0" anchor="t"/>
-          <a:lstStyle/>
-          <a:p>
-            <a:pPr indent="0" marL="0">
-              <a:buNone/>
-            </a:pPr>
-            <a:r>
-              <a:rPr lang="en-US" sz="1300" b="1" dirty="0">
+            <a:endParaRPr lang="en-US" sz="1050" dirty="0"/>
+          </a:p>
+        </p:txBody>
+      </p:sp>
+      <p:sp>
+        <p:nvSpPr>
+          <p:cNvPr id="14" name="Text 10"/>
+          <p:cNvSpPr/>
+          <p:nvPr/>
+        </p:nvSpPr>
+        <p:spPr>
+          <a:xfrm>
+            <a:off x="3948608" y="3218688"/>
+            <a:ext cx="1845488" cy="237744"/>
+          </a:xfrm>
+          <a:prstGeom prst="rect">
+            <a:avLst/>
+          </a:prstGeom>
+          <a:noFill/>
+          <a:ln/>
+        </p:spPr>
+        <p:txBody>
+          <a:bodyPr wrap="square" lIns="0" tIns="0" rIns="0" bIns="0" rtlCol="0" anchor="t"/>
+          <a:lstStyle/>
+          <a:p>
+            <a:pPr indent="0" marL="0">
+              <a:buNone/>
+            </a:pPr>
+            <a:r>
+              <a:rPr lang="en-US" sz="1150" b="1" dirty="0">
                 <a:solidFill>
                   <a:srgbClr val="191919"/>
                 </a:solidFill>
@@ -12885,26 +13255,68 @@
                 <a:ea typeface="Pretendard" pitchFamily="34" charset="-122"/>
                 <a:cs typeface="Pretendard" pitchFamily="34" charset="-120"/>
               </a:rPr>
-              <a:t>제품 기능과 의미가 맞는다</a:t>
-            </a:r>
-            <a:endParaRPr lang="en-US" sz="1300" dirty="0"/>
-          </a:p>
-        </p:txBody>
-      </p:sp>
-      <p:sp>
-        <p:nvSpPr>
-          <p:cNvPr id="11" name="Shape 9"/>
-          <p:cNvSpPr/>
-          <p:nvPr/>
-        </p:nvSpPr>
-        <p:spPr>
-          <a:xfrm>
-            <a:off x="658368" y="3776472"/>
-            <a:ext cx="5300320" cy="1783080"/>
+              <a:t>제품과 의미가 맞는다</a:t>
+            </a:r>
+            <a:endParaRPr lang="en-US" sz="1150" dirty="0"/>
+          </a:p>
+        </p:txBody>
+      </p:sp>
+      <p:sp>
+        <p:nvSpPr>
+          <p:cNvPr id="15" name="Text 11"/>
+          <p:cNvSpPr/>
+          <p:nvPr/>
+        </p:nvSpPr>
+        <p:spPr>
+          <a:xfrm>
+            <a:off x="3619424" y="3511296"/>
+            <a:ext cx="2174672" cy="512064"/>
+          </a:xfrm>
+          <a:prstGeom prst="rect">
+            <a:avLst/>
+          </a:prstGeom>
+          <a:noFill/>
+          <a:ln/>
+        </p:spPr>
+        <p:txBody>
+          <a:bodyPr wrap="square" lIns="0" tIns="0" rIns="0" bIns="0" rtlCol="0" anchor="t"/>
+          <a:lstStyle/>
+          <a:p>
+            <a:pPr indent="0" marL="0">
+              <a:lnSpc>
+                <a:spcPts val="1200"/>
+              </a:lnSpc>
+              <a:buNone/>
+            </a:pPr>
+            <a:r>
+              <a:rPr lang="en-US" sz="900" dirty="0">
+                <a:solidFill>
+                  <a:srgbClr val="3C3C3C"/>
+                </a:solidFill>
+                <a:latin typeface="Pretendard" pitchFamily="34" charset="0"/>
+                <a:ea typeface="Pretendard" pitchFamily="34" charset="-122"/>
+                <a:cs typeface="Pretendard" pitchFamily="34" charset="-120"/>
+              </a:rPr>
+              <a:t>펭귄은 설명 없이도 떠올리게 한다.</a:t>
+            </a:r>
+            <a:endParaRPr lang="en-US" sz="900" dirty="0"/>
+          </a:p>
+        </p:txBody>
+      </p:sp>
+      <p:sp>
+        <p:nvSpPr>
+          <p:cNvPr id="16" name="Shape 12"/>
+          <p:cNvSpPr/>
+          <p:nvPr/>
+        </p:nvSpPr>
+        <p:spPr>
+          <a:xfrm>
+            <a:off x="3619424" y="4023360"/>
+            <a:ext cx="429768" cy="201168"/>
           </a:xfrm>
           <a:prstGeom prst="roundRect">
             <a:avLst>
-              <a:gd name="adj" fmla="val 4615"/>
+              <a:gd name="adj" fmla="val 50000"/>
             </a:avLst>
           </a:prstGeom>
           <a:solidFill>
@@ -12920,96 +13332,57 @@
       </p:sp>
       <p:sp>
         <p:nvSpPr>
-          <p:cNvPr id="12" name="Text 10"/>
-          <p:cNvSpPr/>
-          <p:nvPr/>
-        </p:nvSpPr>
-        <p:spPr>
-          <a:xfrm>
-            <a:off x="877824" y="3950208"/>
-            <a:ext cx="384048" cy="237744"/>
-          </a:xfrm>
-          <a:prstGeom prst="rect">
-            <a:avLst/>
-          </a:prstGeom>
-          <a:noFill/>
-          <a:ln/>
-        </p:spPr>
-        <p:txBody>
-          <a:bodyPr wrap="square" lIns="0" tIns="0" rIns="0" bIns="0" rtlCol="0" anchor="t"/>
-          <a:lstStyle/>
-          <a:p>
-            <a:pPr indent="0" marL="0">
-              <a:buNone/>
-            </a:pPr>
-            <a:r>
-              <a:rPr lang="en-US" sz="1100" b="1" dirty="0">
-                <a:solidFill>
-                  <a:srgbClr val="0057FF"/>
-                </a:solidFill>
-                <a:latin typeface="Pretendard" pitchFamily="34" charset="0"/>
-                <a:ea typeface="Pretendard" pitchFamily="34" charset="-122"/>
-                <a:cs typeface="Pretendard" pitchFamily="34" charset="-120"/>
-              </a:rPr>
-              <a:t>03</a:t>
-            </a:r>
-            <a:endParaRPr lang="en-US" sz="1100" dirty="0"/>
-          </a:p>
-        </p:txBody>
-      </p:sp>
-      <p:sp>
-        <p:nvSpPr>
-          <p:cNvPr id="13" name="Text 11"/>
-          <p:cNvSpPr/>
-          <p:nvPr/>
-        </p:nvSpPr>
-        <p:spPr>
-          <a:xfrm>
-            <a:off x="1261872" y="3931920"/>
-            <a:ext cx="4477360" cy="274320"/>
-          </a:xfrm>
-          <a:prstGeom prst="rect">
-            <a:avLst/>
-          </a:prstGeom>
-          <a:noFill/>
-          <a:ln/>
-        </p:spPr>
-        <p:txBody>
-          <a:bodyPr wrap="square" lIns="0" tIns="0" rIns="0" bIns="0" rtlCol="0" anchor="t"/>
-          <a:lstStyle/>
-          <a:p>
-            <a:pPr indent="0" marL="0">
-              <a:buNone/>
-            </a:pPr>
-            <a:r>
-              <a:rPr lang="en-US" sz="1300" b="1" dirty="0">
-                <a:solidFill>
-                  <a:srgbClr val="191919"/>
-                </a:solidFill>
-                <a:latin typeface="Pretendard" pitchFamily="34" charset="0"/>
-                <a:ea typeface="Pretendard" pitchFamily="34" charset="-122"/>
-                <a:cs typeface="Pretendard" pitchFamily="34" charset="-120"/>
-              </a:rPr>
-              <a:t>복합 기능을 하나의 역할로 번역한다</a:t>
-            </a:r>
-            <a:endParaRPr lang="en-US" sz="1300" dirty="0"/>
-          </a:p>
-        </p:txBody>
-      </p:sp>
-      <p:sp>
-        <p:nvSpPr>
-          <p:cNvPr id="14" name="Shape 12"/>
-          <p:cNvSpPr/>
-          <p:nvPr/>
-        </p:nvSpPr>
-        <p:spPr>
-          <a:xfrm>
-            <a:off x="6233008" y="3776472"/>
-            <a:ext cx="5300320" cy="1783080"/>
+          <p:cNvPr id="17" name="Text 13"/>
+          <p:cNvSpPr/>
+          <p:nvPr/>
+        </p:nvSpPr>
+        <p:spPr>
+          <a:xfrm>
+            <a:off x="3619424" y="4023360"/>
+            <a:ext cx="429768" cy="201168"/>
+          </a:xfrm>
+          <a:prstGeom prst="rect">
+            <a:avLst/>
+          </a:prstGeom>
+          <a:noFill/>
+          <a:ln/>
+        </p:spPr>
+        <p:txBody>
+          <a:bodyPr wrap="square" lIns="0" tIns="0" rIns="0" bIns="0" rtlCol="0" anchor="ctr"/>
+          <a:lstStyle/>
+          <a:p>
+            <a:pPr algn="ctr" indent="0" marL="0">
+              <a:buNone/>
+            </a:pPr>
+            <a:r>
+              <a:rPr lang="en-US" sz="800" dirty="0">
+                <a:solidFill>
+                  <a:srgbClr val="707070"/>
+                </a:solidFill>
+                <a:latin typeface="Pretendard" pitchFamily="34" charset="0"/>
+                <a:ea typeface="Pretendard" pitchFamily="34" charset="-122"/>
+                <a:cs typeface="Pretendard" pitchFamily="34" charset="-120"/>
+              </a:rPr>
+              <a:t>얼음</a:t>
+            </a:r>
+            <a:endParaRPr lang="en-US" sz="800" dirty="0"/>
+          </a:p>
+        </p:txBody>
+      </p:sp>
+      <p:sp>
+        <p:nvSpPr>
+          <p:cNvPr id="18" name="Shape 14"/>
+          <p:cNvSpPr/>
+          <p:nvPr/>
+        </p:nvSpPr>
+        <p:spPr>
+          <a:xfrm>
+            <a:off x="4122344" y="4023360"/>
+            <a:ext cx="525780" cy="201168"/>
           </a:xfrm>
           <a:prstGeom prst="roundRect">
             <a:avLst>
-              <a:gd name="adj" fmla="val 4615"/>
+              <a:gd name="adj" fmla="val 50000"/>
             </a:avLst>
           </a:prstGeom>
           <a:solidFill>
@@ -13025,153 +13398,30 @@
       </p:sp>
       <p:sp>
         <p:nvSpPr>
-          <p:cNvPr id="15" name="Text 13"/>
-          <p:cNvSpPr/>
-          <p:nvPr/>
-        </p:nvSpPr>
-        <p:spPr>
-          <a:xfrm>
-            <a:off x="6452464" y="3950208"/>
-            <a:ext cx="384048" cy="237744"/>
-          </a:xfrm>
-          <a:prstGeom prst="rect">
-            <a:avLst/>
-          </a:prstGeom>
-          <a:noFill/>
-          <a:ln/>
-        </p:spPr>
-        <p:txBody>
-          <a:bodyPr wrap="square" lIns="0" tIns="0" rIns="0" bIns="0" rtlCol="0" anchor="t"/>
-          <a:lstStyle/>
-          <a:p>
-            <a:pPr indent="0" marL="0">
-              <a:buNone/>
-            </a:pPr>
-            <a:r>
-              <a:rPr lang="en-US" sz="1100" b="1" dirty="0">
-                <a:solidFill>
-                  <a:srgbClr val="0057FF"/>
-                </a:solidFill>
-                <a:latin typeface="Pretendard" pitchFamily="34" charset="0"/>
-                <a:ea typeface="Pretendard" pitchFamily="34" charset="-122"/>
-                <a:cs typeface="Pretendard" pitchFamily="34" charset="-120"/>
-              </a:rPr>
-              <a:t>04</a:t>
-            </a:r>
-            <a:endParaRPr lang="en-US" sz="1100" dirty="0"/>
-          </a:p>
-        </p:txBody>
-      </p:sp>
-      <p:sp>
-        <p:nvSpPr>
-          <p:cNvPr id="16" name="Text 14"/>
-          <p:cNvSpPr/>
-          <p:nvPr/>
-        </p:nvSpPr>
-        <p:spPr>
-          <a:xfrm>
-            <a:off x="6836512" y="3931920"/>
-            <a:ext cx="4477360" cy="274320"/>
-          </a:xfrm>
-          <a:prstGeom prst="rect">
-            <a:avLst/>
-          </a:prstGeom>
-          <a:noFill/>
-          <a:ln/>
-        </p:spPr>
-        <p:txBody>
-          <a:bodyPr wrap="square" lIns="0" tIns="0" rIns="0" bIns="0" rtlCol="0" anchor="t"/>
-          <a:lstStyle/>
-          <a:p>
-            <a:pPr indent="0" marL="0">
-              <a:buNone/>
-            </a:pPr>
-            <a:r>
-              <a:rPr lang="en-US" sz="1300" b="1" dirty="0">
-                <a:solidFill>
-                  <a:srgbClr val="191919"/>
-                </a:solidFill>
-                <a:latin typeface="Pretendard" pitchFamily="34" charset="0"/>
-                <a:ea typeface="Pretendard" pitchFamily="34" charset="-122"/>
-                <a:cs typeface="Pretendard" pitchFamily="34" charset="-120"/>
-              </a:rPr>
-              <a:t>광고 이후에도 계속 쓸 수 있다</a:t>
-            </a:r>
-            <a:endParaRPr lang="en-US" sz="1300" dirty="0"/>
-          </a:p>
-        </p:txBody>
-      </p:sp>
-      <p:sp>
-        <p:nvSpPr>
-          <p:cNvPr id="17" name="Text 15"/>
-          <p:cNvSpPr/>
-          <p:nvPr/>
-        </p:nvSpPr>
-        <p:spPr>
-          <a:xfrm>
-            <a:off x="877824" y="2340864"/>
-            <a:ext cx="4861408" cy="457200"/>
-          </a:xfrm>
-          <a:prstGeom prst="rect">
-            <a:avLst/>
-          </a:prstGeom>
-          <a:noFill/>
-          <a:ln/>
-        </p:spPr>
-        <p:txBody>
-          <a:bodyPr wrap="square" lIns="0" tIns="0" rIns="0" bIns="0" rtlCol="0" anchor="t"/>
-          <a:lstStyle/>
-          <a:p>
-            <a:pPr indent="0" marL="0">
-              <a:lnSpc>
-                <a:spcPts val="1400"/>
-              </a:lnSpc>
-              <a:buNone/>
-            </a:pPr>
-            <a:r>
-              <a:rPr lang="en-US" sz="1050" dirty="0">
-                <a:solidFill>
-                  <a:srgbClr val="3C3C3C"/>
-                </a:solidFill>
-                <a:latin typeface="Pretendard" pitchFamily="34" charset="0"/>
-                <a:ea typeface="Pretendard" pitchFamily="34" charset="-122"/>
-                <a:cs typeface="Pretendard" pitchFamily="34" charset="-120"/>
-              </a:rPr>
-              <a:t>외부 캐릭터를 빌리거나 새로 만드는 것보다, 청호나이스의 얼음정수기 역사와 연결할 수 있다.</a:t>
-            </a:r>
-            <a:endParaRPr lang="en-US" sz="1050" dirty="0"/>
-          </a:p>
-        </p:txBody>
-      </p:sp>
-      <p:sp>
-        <p:nvSpPr>
-          <p:cNvPr id="18" name="Text 16"/>
-          <p:cNvSpPr/>
-          <p:nvPr/>
-        </p:nvSpPr>
-        <p:spPr>
-          <a:xfrm>
-            <a:off x="877824" y="2834640"/>
-            <a:ext cx="4861408" cy="621792"/>
-          </a:xfrm>
-          <a:prstGeom prst="rect">
-            <a:avLst/>
-          </a:prstGeom>
-          <a:noFill/>
-          <a:ln/>
-        </p:spPr>
-        <p:txBody>
-          <a:bodyPr wrap="square" lIns="0" tIns="0" rIns="0" bIns="0" rtlCol="0" anchor="t"/>
-          <a:lstStyle/>
-          <a:p>
-            <a:pPr indent="0" marL="0">
-              <a:lnSpc>
-                <a:spcPts val="1300"/>
-              </a:lnSpc>
-              <a:buNone/>
-            </a:pPr>
-            <a:r>
-              <a:rPr lang="en-US" sz="950" dirty="0">
+          <p:cNvPr id="19" name="Text 15"/>
+          <p:cNvSpPr/>
+          <p:nvPr/>
+        </p:nvSpPr>
+        <p:spPr>
+          <a:xfrm>
+            <a:off x="4122344" y="4023360"/>
+            <a:ext cx="525780" cy="201168"/>
+          </a:xfrm>
+          <a:prstGeom prst="rect">
+            <a:avLst/>
+          </a:prstGeom>
+          <a:noFill/>
+          <a:ln/>
+        </p:spPr>
+        <p:txBody>
+          <a:bodyPr wrap="square" lIns="0" tIns="0" rIns="0" bIns="0" rtlCol="0" anchor="ctr"/>
+          <a:lstStyle/>
+          <a:p>
+            <a:pPr algn="ctr" indent="0" marL="0">
+              <a:buNone/>
+            </a:pPr>
+            <a:r>
+              <a:rPr lang="en-US" sz="800" dirty="0">
                 <a:solidFill>
                   <a:srgbClr val="707070"/>
                 </a:solidFill>
@@ -13179,95 +13429,22 @@
                 <a:ea typeface="Pretendard" pitchFamily="34" charset="-122"/>
                 <a:cs typeface="Pretendard" pitchFamily="34" charset="-120"/>
               </a:rPr>
-              <a:t>다만 인지도는 조사 전이므로 “2030이 모두 기억하는 캐릭터”가 아니라 </a:t>
-            </a:r>
-            <a:pPr indent="0" marL="0">
-              <a:lnSpc>
-                <a:spcPts val="1300"/>
-              </a:lnSpc>
-              <a:buNone/>
-            </a:pPr>
-            <a:r>
-              <a:rPr lang="en-US" sz="950" b="1" dirty="0">
-                <a:solidFill>
-                  <a:srgbClr val="191919"/>
-                </a:solidFill>
-                <a:latin typeface="Pretendard" pitchFamily="34" charset="0"/>
-                <a:ea typeface="Pretendard" pitchFamily="34" charset="-122"/>
-                <a:cs typeface="Pretendard" pitchFamily="34" charset="-120"/>
-              </a:rPr>
-              <a:t>“청호나이스가 보유한 과거 광고 자산 후보”</a:t>
-            </a:r>
-            <a:pPr indent="0" marL="0">
-              <a:lnSpc>
-                <a:spcPts val="1300"/>
-              </a:lnSpc>
-              <a:buNone/>
-            </a:pPr>
-            <a:r>
-              <a:rPr lang="en-US" sz="950" dirty="0">
-                <a:solidFill>
-                  <a:srgbClr val="707070"/>
-                </a:solidFill>
-                <a:latin typeface="Pretendard" pitchFamily="34" charset="0"/>
-                <a:ea typeface="Pretendard" pitchFamily="34" charset="-122"/>
-                <a:cs typeface="Pretendard" pitchFamily="34" charset="-120"/>
-              </a:rPr>
-              <a:t>로 말한다.</a:t>
-            </a:r>
-            <a:endParaRPr lang="en-US" sz="950" dirty="0"/>
-          </a:p>
-        </p:txBody>
-      </p:sp>
-      <p:sp>
-        <p:nvSpPr>
-          <p:cNvPr id="19" name="Text 17"/>
-          <p:cNvSpPr/>
-          <p:nvPr/>
-        </p:nvSpPr>
-        <p:spPr>
-          <a:xfrm>
-            <a:off x="6452464" y="2340864"/>
-            <a:ext cx="4861408" cy="256032"/>
-          </a:xfrm>
-          <a:prstGeom prst="rect">
-            <a:avLst/>
-          </a:prstGeom>
-          <a:noFill/>
-          <a:ln/>
-        </p:spPr>
-        <p:txBody>
-          <a:bodyPr wrap="square" lIns="0" tIns="0" rIns="0" bIns="0" rtlCol="0" anchor="t"/>
-          <a:lstStyle/>
-          <a:p>
-            <a:pPr indent="0" marL="0">
-              <a:buNone/>
-            </a:pPr>
-            <a:r>
-              <a:rPr lang="en-US" sz="1050" dirty="0">
-                <a:solidFill>
-                  <a:srgbClr val="3C3C3C"/>
-                </a:solidFill>
-                <a:latin typeface="Pretendard" pitchFamily="34" charset="0"/>
-                <a:ea typeface="Pretendard" pitchFamily="34" charset="-122"/>
-                <a:cs typeface="Pretendard" pitchFamily="34" charset="-120"/>
-              </a:rPr>
-              <a:t>펭귄은 설명 없이도 떠올리게 한다.</a:t>
-            </a:r>
-            <a:endParaRPr lang="en-US" sz="1050" dirty="0"/>
-          </a:p>
-        </p:txBody>
-      </p:sp>
-      <p:sp>
-        <p:nvSpPr>
-          <p:cNvPr id="20" name="Shape 18"/>
-          <p:cNvSpPr/>
-          <p:nvPr/>
-        </p:nvSpPr>
-        <p:spPr>
-          <a:xfrm>
-            <a:off x="6452464" y="2651760"/>
-            <a:ext cx="466344" cy="246888"/>
+              <a:t>차가움</a:t>
+            </a:r>
+            <a:endParaRPr lang="en-US" sz="800" dirty="0"/>
+          </a:p>
+        </p:txBody>
+      </p:sp>
+      <p:sp>
+        <p:nvSpPr>
+          <p:cNvPr id="20" name="Shape 16"/>
+          <p:cNvSpPr/>
+          <p:nvPr/>
+        </p:nvSpPr>
+        <p:spPr>
+          <a:xfrm>
+            <a:off x="4721276" y="4023360"/>
+            <a:ext cx="525780" cy="201168"/>
           </a:xfrm>
           <a:prstGeom prst="roundRect">
             <a:avLst>
@@ -13287,14 +13464,14 @@
       </p:sp>
       <p:sp>
         <p:nvSpPr>
-          <p:cNvPr id="21" name="Text 19"/>
-          <p:cNvSpPr/>
-          <p:nvPr/>
-        </p:nvSpPr>
-        <p:spPr>
-          <a:xfrm>
-            <a:off x="6452464" y="2651760"/>
-            <a:ext cx="466344" cy="246888"/>
+          <p:cNvPr id="21" name="Text 17"/>
+          <p:cNvSpPr/>
+          <p:nvPr/>
+        </p:nvSpPr>
+        <p:spPr>
+          <a:xfrm>
+            <a:off x="4721276" y="4023360"/>
+            <a:ext cx="525780" cy="201168"/>
           </a:xfrm>
           <a:prstGeom prst="rect">
             <a:avLst/>
@@ -13310,7 +13487,7 @@
               <a:buNone/>
             </a:pPr>
             <a:r>
-              <a:rPr lang="en-US" sz="950" dirty="0">
+              <a:rPr lang="en-US" sz="800" dirty="0">
                 <a:solidFill>
                   <a:srgbClr val="707070"/>
                 </a:solidFill>
@@ -13318,22 +13495,22 @@
                 <a:ea typeface="Pretendard" pitchFamily="34" charset="-122"/>
                 <a:cs typeface="Pretendard" pitchFamily="34" charset="-120"/>
               </a:rPr>
-              <a:t>얼음</a:t>
-            </a:r>
-            <a:endParaRPr lang="en-US" sz="950" dirty="0"/>
-          </a:p>
-        </p:txBody>
-      </p:sp>
-      <p:sp>
-        <p:nvSpPr>
-          <p:cNvPr id="22" name="Shape 20"/>
-          <p:cNvSpPr/>
-          <p:nvPr/>
-        </p:nvSpPr>
-        <p:spPr>
-          <a:xfrm>
-            <a:off x="6991960" y="2651760"/>
-            <a:ext cx="580644" cy="246888"/>
+              <a:t>시원함</a:t>
+            </a:r>
+            <a:endParaRPr lang="en-US" sz="800" dirty="0"/>
+          </a:p>
+        </p:txBody>
+      </p:sp>
+      <p:sp>
+        <p:nvSpPr>
+          <p:cNvPr id="22" name="Shape 18"/>
+          <p:cNvSpPr/>
+          <p:nvPr/>
+        </p:nvSpPr>
+        <p:spPr>
+          <a:xfrm>
+            <a:off x="3619424" y="4288536"/>
+            <a:ext cx="525780" cy="201168"/>
           </a:xfrm>
           <a:prstGeom prst="roundRect">
             <a:avLst>
@@ -13353,14 +13530,14 @@
       </p:sp>
       <p:sp>
         <p:nvSpPr>
-          <p:cNvPr id="23" name="Text 21"/>
-          <p:cNvSpPr/>
-          <p:nvPr/>
-        </p:nvSpPr>
-        <p:spPr>
-          <a:xfrm>
-            <a:off x="6991960" y="2651760"/>
-            <a:ext cx="580644" cy="246888"/>
+          <p:cNvPr id="23" name="Text 19"/>
+          <p:cNvSpPr/>
+          <p:nvPr/>
+        </p:nvSpPr>
+        <p:spPr>
+          <a:xfrm>
+            <a:off x="3619424" y="4288536"/>
+            <a:ext cx="525780" cy="201168"/>
           </a:xfrm>
           <a:prstGeom prst="rect">
             <a:avLst/>
@@ -13376,7 +13553,7 @@
               <a:buNone/>
             </a:pPr>
             <a:r>
-              <a:rPr lang="en-US" sz="950" dirty="0">
+              <a:rPr lang="en-US" sz="800" dirty="0">
                 <a:solidFill>
                   <a:srgbClr val="707070"/>
                 </a:solidFill>
@@ -13384,26 +13561,26 @@
                 <a:ea typeface="Pretendard" pitchFamily="34" charset="-122"/>
                 <a:cs typeface="Pretendard" pitchFamily="34" charset="-120"/>
               </a:rPr>
-              <a:t>차가움</a:t>
-            </a:r>
-            <a:endParaRPr lang="en-US" sz="950" dirty="0"/>
-          </a:p>
-        </p:txBody>
-      </p:sp>
-      <p:sp>
-        <p:nvSpPr>
-          <p:cNvPr id="24" name="Shape 22"/>
-          <p:cNvSpPr/>
-          <p:nvPr/>
-        </p:nvSpPr>
-        <p:spPr>
-          <a:xfrm>
-            <a:off x="7645756" y="2651760"/>
-            <a:ext cx="580644" cy="246888"/>
+              <a:t>깨끗함</a:t>
+            </a:r>
+            <a:endParaRPr lang="en-US" sz="800" dirty="0"/>
+          </a:p>
+        </p:txBody>
+      </p:sp>
+      <p:sp>
+        <p:nvSpPr>
+          <p:cNvPr id="24" name="Shape 20"/>
+          <p:cNvSpPr/>
+          <p:nvPr/>
+        </p:nvSpPr>
+        <p:spPr>
+          <a:xfrm>
+            <a:off x="6214720" y="1920240"/>
+            <a:ext cx="2540432" cy="3063240"/>
           </a:xfrm>
           <a:prstGeom prst="roundRect">
             <a:avLst>
-              <a:gd name="adj" fmla="val 50000"/>
+              <a:gd name="adj" fmla="val 3239"/>
             </a:avLst>
           </a:prstGeom>
           <a:solidFill>
@@ -13417,59 +13594,254 @@
           </a:ln>
         </p:spPr>
       </p:sp>
-      <p:sp>
-        <p:nvSpPr>
-          <p:cNvPr id="25" name="Text 23"/>
-          <p:cNvSpPr/>
-          <p:nvPr/>
-        </p:nvSpPr>
-        <p:spPr>
-          <a:xfrm>
-            <a:off x="7645756" y="2651760"/>
-            <a:ext cx="580644" cy="246888"/>
-          </a:xfrm>
-          <a:prstGeom prst="rect">
-            <a:avLst/>
-          </a:prstGeom>
-          <a:noFill/>
-          <a:ln/>
-        </p:spPr>
-        <p:txBody>
-          <a:bodyPr wrap="square" lIns="0" tIns="0" rIns="0" bIns="0" rtlCol="0" anchor="ctr"/>
-          <a:lstStyle/>
-          <a:p>
-            <a:pPr algn="ctr" indent="0" marL="0">
-              <a:buNone/>
-            </a:pPr>
-            <a:r>
-              <a:rPr lang="en-US" sz="950" dirty="0">
-                <a:solidFill>
-                  <a:srgbClr val="707070"/>
-                </a:solidFill>
-                <a:latin typeface="Pretendard" pitchFamily="34" charset="0"/>
-                <a:ea typeface="Pretendard" pitchFamily="34" charset="-122"/>
-                <a:cs typeface="Pretendard" pitchFamily="34" charset="-120"/>
-              </a:rPr>
-              <a:t>시원함</a:t>
-            </a:r>
-            <a:endParaRPr lang="en-US" sz="950" dirty="0"/>
-          </a:p>
-        </p:txBody>
-      </p:sp>
-      <p:sp>
-        <p:nvSpPr>
-          <p:cNvPr id="26" name="Shape 24"/>
-          <p:cNvSpPr/>
-          <p:nvPr/>
-        </p:nvSpPr>
-        <p:spPr>
-          <a:xfrm>
-            <a:off x="8299552" y="2651760"/>
-            <a:ext cx="580644" cy="246888"/>
+      <p:pic>
+        <p:nvPicPr>
+          <p:cNvPr id="25" name="Image 2" descr="/home/user/CHAI-AI/assets/img/peng-now.jpg">    </p:cNvPr>
+          <p:cNvPicPr>
+            <a:picLocks noChangeAspect="1"/>
+          </p:cNvPicPr>
+          <p:nvPr/>
+        </p:nvPicPr>
+        <p:blipFill>
+          <a:blip r:embed="rId3"/>
+          <a:srcRect l="0" r="0" t="0" b="0"/>
+          <a:stretch/>
+        </p:blipFill>
+        <p:spPr>
+          <a:xfrm>
+            <a:off x="6214720" y="1920240"/>
+            <a:ext cx="2540432" cy="1170432"/>
+          </a:xfrm>
+          <a:prstGeom prst="rect">
+            <a:avLst/>
+          </a:prstGeom>
+          <a:effectLst>
+            <a:outerShdw sx="100000" sy="100000" kx="0" ky="0" algn="bl" rotWithShape="0" blurRad="177800" dist="50800" dir="5400000">
+              <a:srgbClr val="191919">
+                <a:alpha val="22000"/>
+              </a:srgbClr>
+            </a:outerShdw>
+          </a:effectLst>
+        </p:spPr>
+      </p:pic>
+      <p:sp>
+        <p:nvSpPr>
+          <p:cNvPr id="26" name="Text 21"/>
+          <p:cNvSpPr/>
+          <p:nvPr/>
+        </p:nvSpPr>
+        <p:spPr>
+          <a:xfrm>
+            <a:off x="6397600" y="3236976"/>
+            <a:ext cx="310896" cy="219456"/>
+          </a:xfrm>
+          <a:prstGeom prst="rect">
+            <a:avLst/>
+          </a:prstGeom>
+          <a:noFill/>
+          <a:ln/>
+        </p:spPr>
+        <p:txBody>
+          <a:bodyPr wrap="square" lIns="0" tIns="0" rIns="0" bIns="0" rtlCol="0" anchor="t"/>
+          <a:lstStyle/>
+          <a:p>
+            <a:pPr indent="0" marL="0">
+              <a:buNone/>
+            </a:pPr>
+            <a:r>
+              <a:rPr lang="en-US" sz="1050" b="1" dirty="0">
+                <a:solidFill>
+                  <a:srgbClr val="0057FF"/>
+                </a:solidFill>
+                <a:latin typeface="Pretendard" pitchFamily="34" charset="0"/>
+                <a:ea typeface="Pretendard" pitchFamily="34" charset="-122"/>
+                <a:cs typeface="Pretendard" pitchFamily="34" charset="-120"/>
+              </a:rPr>
+              <a:t>03</a:t>
+            </a:r>
+            <a:endParaRPr lang="en-US" sz="1050" dirty="0"/>
+          </a:p>
+        </p:txBody>
+      </p:sp>
+      <p:sp>
+        <p:nvSpPr>
+          <p:cNvPr id="27" name="Text 22"/>
+          <p:cNvSpPr/>
+          <p:nvPr/>
+        </p:nvSpPr>
+        <p:spPr>
+          <a:xfrm>
+            <a:off x="6726784" y="3218688"/>
+            <a:ext cx="1845488" cy="237744"/>
+          </a:xfrm>
+          <a:prstGeom prst="rect">
+            <a:avLst/>
+          </a:prstGeom>
+          <a:noFill/>
+          <a:ln/>
+        </p:spPr>
+        <p:txBody>
+          <a:bodyPr wrap="square" lIns="0" tIns="0" rIns="0" bIns="0" rtlCol="0" anchor="t"/>
+          <a:lstStyle/>
+          <a:p>
+            <a:pPr indent="0" marL="0">
+              <a:buNone/>
+            </a:pPr>
+            <a:r>
+              <a:rPr lang="en-US" sz="1150" b="1" dirty="0">
+                <a:solidFill>
+                  <a:srgbClr val="191919"/>
+                </a:solidFill>
+                <a:latin typeface="Pretendard" pitchFamily="34" charset="0"/>
+                <a:ea typeface="Pretendard" pitchFamily="34" charset="-122"/>
+                <a:cs typeface="Pretendard" pitchFamily="34" charset="-120"/>
+              </a:rPr>
+              <a:t>역할 하나로 압축</a:t>
+            </a:r>
+            <a:endParaRPr lang="en-US" sz="1150" dirty="0"/>
+          </a:p>
+        </p:txBody>
+      </p:sp>
+      <p:sp>
+        <p:nvSpPr>
+          <p:cNvPr id="28" name="Text 23"/>
+          <p:cNvSpPr/>
+          <p:nvPr/>
+        </p:nvSpPr>
+        <p:spPr>
+          <a:xfrm>
+            <a:off x="6397600" y="3511296"/>
+            <a:ext cx="2174672" cy="512064"/>
+          </a:xfrm>
+          <a:prstGeom prst="rect">
+            <a:avLst/>
+          </a:prstGeom>
+          <a:noFill/>
+          <a:ln/>
+        </p:spPr>
+        <p:txBody>
+          <a:bodyPr wrap="square" lIns="0" tIns="0" rIns="0" bIns="0" rtlCol="0" anchor="t"/>
+          <a:lstStyle/>
+          <a:p>
+            <a:pPr indent="0" marL="0">
+              <a:lnSpc>
+                <a:spcPts val="1200"/>
+              </a:lnSpc>
+              <a:buNone/>
+            </a:pPr>
+            <a:r>
+              <a:rPr lang="en-US" sz="900" dirty="0">
+                <a:solidFill>
+                  <a:srgbClr val="3C3C3C"/>
+                </a:solidFill>
+                <a:latin typeface="Pretendard" pitchFamily="34" charset="0"/>
+                <a:ea typeface="Pretendard" pitchFamily="34" charset="-122"/>
+                <a:cs typeface="Pretendard" pitchFamily="34" charset="-120"/>
+              </a:rPr>
+              <a:t>정수·얼음·커피·세척·관리를 따로 설명하면 복잡하다.</a:t>
+            </a:r>
+            <a:endParaRPr lang="en-US" sz="900" dirty="0"/>
+          </a:p>
+        </p:txBody>
+      </p:sp>
+      <p:sp>
+        <p:nvSpPr>
+          <p:cNvPr id="29" name="Shape 24"/>
+          <p:cNvSpPr/>
+          <p:nvPr/>
+        </p:nvSpPr>
+        <p:spPr>
+          <a:xfrm>
+            <a:off x="6397600" y="4023360"/>
+            <a:ext cx="2174672" cy="457200"/>
           </a:xfrm>
           <a:prstGeom prst="roundRect">
             <a:avLst>
-              <a:gd name="adj" fmla="val 50000"/>
+              <a:gd name="adj" fmla="val 12000"/>
+            </a:avLst>
+          </a:prstGeom>
+          <a:solidFill>
+            <a:srgbClr val="EAF1FF"/>
+          </a:solidFill>
+          <a:ln/>
+        </p:spPr>
+      </p:sp>
+      <p:sp>
+        <p:nvSpPr>
+          <p:cNvPr id="30" name="Text 25"/>
+          <p:cNvSpPr/>
+          <p:nvPr/>
+        </p:nvSpPr>
+        <p:spPr>
+          <a:xfrm>
+            <a:off x="6470752" y="4023360"/>
+            <a:ext cx="2028368" cy="457200"/>
+          </a:xfrm>
+          <a:prstGeom prst="rect">
+            <a:avLst/>
+          </a:prstGeom>
+          <a:noFill/>
+          <a:ln/>
+        </p:spPr>
+        <p:txBody>
+          <a:bodyPr wrap="square" lIns="0" tIns="0" rIns="0" bIns="0" rtlCol="0" anchor="ctr"/>
+          <a:lstStyle/>
+          <a:p>
+            <a:pPr indent="0" marL="0">
+              <a:lnSpc>
+                <a:spcPts val="1150"/>
+              </a:lnSpc>
+              <a:buNone/>
+            </a:pPr>
+            <a:r>
+              <a:rPr lang="en-US" sz="900" b="1" dirty="0">
+                <a:solidFill>
+                  <a:srgbClr val="191919"/>
+                </a:solidFill>
+                <a:latin typeface="Pretendard" pitchFamily="34" charset="0"/>
+                <a:ea typeface="Pretendard" pitchFamily="34" charset="-122"/>
+                <a:cs typeface="Pretendard" pitchFamily="34" charset="-120"/>
+              </a:rPr>
+              <a:t>말보다 행동이 빠른,</a:t>
+            </a:r>
+            <a:endParaRPr lang="en-US" sz="900" dirty="0"/>
+          </a:p>
+          <a:p>
+            <a:pPr indent="0" marL="0">
+              <a:lnSpc>
+                <a:spcPts val="1150"/>
+              </a:lnSpc>
+              <a:buNone/>
+            </a:pPr>
+            <a:r>
+              <a:rPr lang="en-US" sz="900" b="1" dirty="0">
+                <a:solidFill>
+                  <a:srgbClr val="191919"/>
+                </a:solidFill>
+                <a:latin typeface="Pretendard" pitchFamily="34" charset="0"/>
+                <a:ea typeface="Pretendard" pitchFamily="34" charset="-122"/>
+                <a:cs typeface="Pretendard" pitchFamily="34" charset="-120"/>
+              </a:rPr>
+              <a:t>우리 집 준비 매니저</a:t>
+            </a:r>
+            <a:endParaRPr lang="en-US" sz="900" dirty="0"/>
+          </a:p>
+        </p:txBody>
+      </p:sp>
+      <p:sp>
+        <p:nvSpPr>
+          <p:cNvPr id="31" name="Shape 26"/>
+          <p:cNvSpPr/>
+          <p:nvPr/>
+        </p:nvSpPr>
+        <p:spPr>
+          <a:xfrm>
+            <a:off x="8992895" y="1920240"/>
+            <a:ext cx="2540432" cy="3063240"/>
+          </a:xfrm>
+          <a:prstGeom prst="roundRect">
+            <a:avLst>
+              <a:gd name="adj" fmla="val 3239"/>
             </a:avLst>
           </a:prstGeom>
           <a:solidFill>
@@ -13483,55 +13855,124 @@
           </a:ln>
         </p:spPr>
       </p:sp>
-      <p:sp>
-        <p:nvSpPr>
-          <p:cNvPr id="27" name="Text 25"/>
-          <p:cNvSpPr/>
-          <p:nvPr/>
-        </p:nvSpPr>
-        <p:spPr>
-          <a:xfrm>
-            <a:off x="8299552" y="2651760"/>
-            <a:ext cx="580644" cy="246888"/>
-          </a:xfrm>
-          <a:prstGeom prst="rect">
-            <a:avLst/>
-          </a:prstGeom>
-          <a:noFill/>
-          <a:ln/>
-        </p:spPr>
-        <p:txBody>
-          <a:bodyPr wrap="square" lIns="0" tIns="0" rIns="0" bIns="0" rtlCol="0" anchor="ctr"/>
-          <a:lstStyle/>
-          <a:p>
-            <a:pPr algn="ctr" indent="0" marL="0">
-              <a:buNone/>
-            </a:pPr>
-            <a:r>
-              <a:rPr lang="en-US" sz="950" dirty="0">
-                <a:solidFill>
-                  <a:srgbClr val="707070"/>
-                </a:solidFill>
-                <a:latin typeface="Pretendard" pitchFamily="34" charset="0"/>
-                <a:ea typeface="Pretendard" pitchFamily="34" charset="-122"/>
-                <a:cs typeface="Pretendard" pitchFamily="34" charset="-120"/>
-              </a:rPr>
-              <a:t>깨끗함</a:t>
-            </a:r>
-            <a:endParaRPr lang="en-US" sz="950" dirty="0"/>
-          </a:p>
-        </p:txBody>
-      </p:sp>
-      <p:sp>
-        <p:nvSpPr>
-          <p:cNvPr id="28" name="Text 26"/>
-          <p:cNvSpPr/>
-          <p:nvPr/>
-        </p:nvSpPr>
-        <p:spPr>
-          <a:xfrm>
-            <a:off x="6452464" y="3035808"/>
-            <a:ext cx="4861408" cy="457200"/>
+      <p:pic>
+        <p:nvPicPr>
+          <p:cNvPr id="32" name="Image 3" descr="/home/user/CHAI-AI/assets/img/peng-home.jpg">    </p:cNvPr>
+          <p:cNvPicPr>
+            <a:picLocks noChangeAspect="1"/>
+          </p:cNvPicPr>
+          <p:nvPr/>
+        </p:nvPicPr>
+        <p:blipFill>
+          <a:blip r:embed="rId4"/>
+          <a:srcRect l="0" r="0" t="0" b="0"/>
+          <a:stretch/>
+        </p:blipFill>
+        <p:spPr>
+          <a:xfrm>
+            <a:off x="8992895" y="1920240"/>
+            <a:ext cx="2540432" cy="1170432"/>
+          </a:xfrm>
+          <a:prstGeom prst="rect">
+            <a:avLst/>
+          </a:prstGeom>
+          <a:effectLst>
+            <a:outerShdw sx="100000" sy="100000" kx="0" ky="0" algn="bl" rotWithShape="0" blurRad="177800" dist="50800" dir="5400000">
+              <a:srgbClr val="191919">
+                <a:alpha val="22000"/>
+              </a:srgbClr>
+            </a:outerShdw>
+          </a:effectLst>
+        </p:spPr>
+      </p:pic>
+      <p:sp>
+        <p:nvSpPr>
+          <p:cNvPr id="33" name="Text 27"/>
+          <p:cNvSpPr/>
+          <p:nvPr/>
+        </p:nvSpPr>
+        <p:spPr>
+          <a:xfrm>
+            <a:off x="9175775" y="3236976"/>
+            <a:ext cx="310896" cy="219456"/>
+          </a:xfrm>
+          <a:prstGeom prst="rect">
+            <a:avLst/>
+          </a:prstGeom>
+          <a:noFill/>
+          <a:ln/>
+        </p:spPr>
+        <p:txBody>
+          <a:bodyPr wrap="square" lIns="0" tIns="0" rIns="0" bIns="0" rtlCol="0" anchor="t"/>
+          <a:lstStyle/>
+          <a:p>
+            <a:pPr indent="0" marL="0">
+              <a:buNone/>
+            </a:pPr>
+            <a:r>
+              <a:rPr lang="en-US" sz="1050" b="1" dirty="0">
+                <a:solidFill>
+                  <a:srgbClr val="0057FF"/>
+                </a:solidFill>
+                <a:latin typeface="Pretendard" pitchFamily="34" charset="0"/>
+                <a:ea typeface="Pretendard" pitchFamily="34" charset="-122"/>
+                <a:cs typeface="Pretendard" pitchFamily="34" charset="-120"/>
+              </a:rPr>
+              <a:t>04</a:t>
+            </a:r>
+            <a:endParaRPr lang="en-US" sz="1050" dirty="0"/>
+          </a:p>
+        </p:txBody>
+      </p:sp>
+      <p:sp>
+        <p:nvSpPr>
+          <p:cNvPr id="34" name="Text 28"/>
+          <p:cNvSpPr/>
+          <p:nvPr/>
+        </p:nvSpPr>
+        <p:spPr>
+          <a:xfrm>
+            <a:off x="9504959" y="3218688"/>
+            <a:ext cx="1845488" cy="237744"/>
+          </a:xfrm>
+          <a:prstGeom prst="rect">
+            <a:avLst/>
+          </a:prstGeom>
+          <a:noFill/>
+          <a:ln/>
+        </p:spPr>
+        <p:txBody>
+          <a:bodyPr wrap="square" lIns="0" tIns="0" rIns="0" bIns="0" rtlCol="0" anchor="t"/>
+          <a:lstStyle/>
+          <a:p>
+            <a:pPr indent="0" marL="0">
+              <a:buNone/>
+            </a:pPr>
+            <a:r>
+              <a:rPr lang="en-US" sz="1150" b="1" dirty="0">
+                <a:solidFill>
+                  <a:srgbClr val="191919"/>
+                </a:solidFill>
+                <a:latin typeface="Pretendard" pitchFamily="34" charset="0"/>
+                <a:ea typeface="Pretendard" pitchFamily="34" charset="-122"/>
+                <a:cs typeface="Pretendard" pitchFamily="34" charset="-120"/>
+              </a:rPr>
+              <a:t>광고 뒤에도 계속</a:t>
+            </a:r>
+            <a:endParaRPr lang="en-US" sz="1150" dirty="0"/>
+          </a:p>
+        </p:txBody>
+      </p:sp>
+      <p:sp>
+        <p:nvSpPr>
+          <p:cNvPr id="35" name="Text 29"/>
+          <p:cNvSpPr/>
+          <p:nvPr/>
+        </p:nvSpPr>
+        <p:spPr>
+          <a:xfrm>
+            <a:off x="9175775" y="3511296"/>
+            <a:ext cx="2174672" cy="512064"/>
           </a:xfrm>
           <a:prstGeom prst="rect">
             <a:avLst/>
@@ -13545,54 +13986,12 @@
           <a:p>
             <a:pPr indent="0" marL="0">
               <a:lnSpc>
-                <a:spcPts val="1300"/>
+                <a:spcPts val="1200"/>
               </a:lnSpc>
               <a:buNone/>
             </a:pPr>
             <a:r>
-              <a:rPr lang="en-US" sz="950" dirty="0">
-                <a:solidFill>
-                  <a:srgbClr val="707070"/>
-                </a:solidFill>
-                <a:latin typeface="Pretendard" pitchFamily="34" charset="0"/>
-                <a:ea typeface="Pretendard" pitchFamily="34" charset="-122"/>
-                <a:cs typeface="Pretendard" pitchFamily="34" charset="-120"/>
-              </a:rPr>
-              <a:t>아무 캐릭터를 가져온 것이 아니라, 얼음정수기의 핵심 기능과 자연스럽게 연결되는 캐릭터다.</a:t>
-            </a:r>
-            <a:endParaRPr lang="en-US" sz="950" dirty="0"/>
-          </a:p>
-        </p:txBody>
-      </p:sp>
-      <p:sp>
-        <p:nvSpPr>
-          <p:cNvPr id="29" name="Text 27"/>
-          <p:cNvSpPr/>
-          <p:nvPr/>
-        </p:nvSpPr>
-        <p:spPr>
-          <a:xfrm>
-            <a:off x="877824" y="4306824"/>
-            <a:ext cx="4861408" cy="420624"/>
-          </a:xfrm>
-          <a:prstGeom prst="rect">
-            <a:avLst/>
-          </a:prstGeom>
-          <a:noFill/>
-          <a:ln/>
-        </p:spPr>
-        <p:txBody>
-          <a:bodyPr wrap="square" lIns="0" tIns="0" rIns="0" bIns="0" rtlCol="0" anchor="t"/>
-          <a:lstStyle/>
-          <a:p>
-            <a:pPr indent="0" marL="0">
-              <a:lnSpc>
-                <a:spcPts val="1400"/>
-              </a:lnSpc>
-              <a:buNone/>
-            </a:pPr>
-            <a:r>
-              <a:rPr lang="en-US" sz="1050" dirty="0">
+              <a:rPr lang="en-US" sz="900" dirty="0">
                 <a:solidFill>
                   <a:srgbClr val="3C3C3C"/>
                 </a:solidFill>
@@ -13600,161 +13999,22 @@
                 <a:ea typeface="Pretendard" pitchFamily="34" charset="-122"/>
                 <a:cs typeface="Pretendard" pitchFamily="34" charset="-120"/>
               </a:rPr>
-              <a:t>정수·얼음·커피·세척·관리를 기능별로 설명하면 복잡하다. 펭귄의 역할 하나로 압축한다.</a:t>
-            </a:r>
-            <a:endParaRPr lang="en-US" sz="1050" dirty="0"/>
-          </a:p>
-        </p:txBody>
-      </p:sp>
-      <p:sp>
-        <p:nvSpPr>
-          <p:cNvPr id="30" name="Shape 28"/>
-          <p:cNvSpPr/>
-          <p:nvPr/>
-        </p:nvSpPr>
-        <p:spPr>
-          <a:xfrm>
-            <a:off x="877824" y="4745736"/>
-            <a:ext cx="4861408" cy="329184"/>
-          </a:xfrm>
-          <a:prstGeom prst="roundRect">
-            <a:avLst>
-              <a:gd name="adj" fmla="val 16667"/>
-            </a:avLst>
-          </a:prstGeom>
-          <a:solidFill>
-            <a:srgbClr val="EAF1FF"/>
-          </a:solidFill>
-          <a:ln/>
-        </p:spPr>
-      </p:sp>
-      <p:sp>
-        <p:nvSpPr>
-          <p:cNvPr id="31" name="Text 29"/>
-          <p:cNvSpPr/>
-          <p:nvPr/>
-        </p:nvSpPr>
-        <p:spPr>
-          <a:xfrm>
-            <a:off x="877824" y="4745736"/>
-            <a:ext cx="4861408" cy="329184"/>
-          </a:xfrm>
-          <a:prstGeom prst="rect">
-            <a:avLst/>
-          </a:prstGeom>
-          <a:noFill/>
-          <a:ln/>
-        </p:spPr>
-        <p:txBody>
-          <a:bodyPr wrap="square" lIns="0" tIns="0" rIns="0" bIns="0" rtlCol="0" anchor="ctr"/>
-          <a:lstStyle/>
-          <a:p>
-            <a:pPr algn="ctr" indent="0" marL="0">
-              <a:buNone/>
-            </a:pPr>
-            <a:r>
-              <a:rPr lang="en-US" sz="1100" b="1" dirty="0">
-                <a:solidFill>
-                  <a:srgbClr val="191919"/>
-                </a:solidFill>
-                <a:latin typeface="Pretendard" pitchFamily="34" charset="0"/>
-                <a:ea typeface="Pretendard" pitchFamily="34" charset="-122"/>
-                <a:cs typeface="Pretendard" pitchFamily="34" charset="-120"/>
-              </a:rPr>
-              <a:t>말보다 행동이 빠른, 우리 집 준비 매니저</a:t>
-            </a:r>
-            <a:endParaRPr lang="en-US" sz="1100" dirty="0"/>
-          </a:p>
-        </p:txBody>
-      </p:sp>
-      <p:sp>
-        <p:nvSpPr>
-          <p:cNvPr id="32" name="Text 30"/>
-          <p:cNvSpPr/>
-          <p:nvPr/>
-        </p:nvSpPr>
-        <p:spPr>
-          <a:xfrm>
-            <a:off x="877824" y="5129784"/>
-            <a:ext cx="4861408" cy="310896"/>
-          </a:xfrm>
-          <a:prstGeom prst="rect">
-            <a:avLst/>
-          </a:prstGeom>
-          <a:noFill/>
-          <a:ln/>
-        </p:spPr>
-        <p:txBody>
-          <a:bodyPr wrap="square" lIns="0" tIns="0" rIns="0" bIns="0" rtlCol="0" anchor="t"/>
-          <a:lstStyle/>
-          <a:p>
-            <a:pPr indent="0" marL="0">
-              <a:buNone/>
-            </a:pPr>
-            <a:r>
-              <a:rPr lang="en-US" sz="950" dirty="0">
-                <a:solidFill>
-                  <a:srgbClr val="707070"/>
-                </a:solidFill>
-                <a:latin typeface="Pretendard" pitchFamily="34" charset="0"/>
-                <a:ea typeface="Pretendard" pitchFamily="34" charset="-122"/>
-                <a:cs typeface="Pretendard" pitchFamily="34" charset="-120"/>
-              </a:rPr>
-              <a:t>제품과 별개인 장식이 아니라, 에스프레카페의 올인원 기능을 의인화한 존재다.</a:t>
-            </a:r>
-            <a:endParaRPr lang="en-US" sz="950" dirty="0"/>
-          </a:p>
-        </p:txBody>
-      </p:sp>
-      <p:sp>
-        <p:nvSpPr>
-          <p:cNvPr id="33" name="Text 31"/>
-          <p:cNvSpPr/>
-          <p:nvPr/>
-        </p:nvSpPr>
-        <p:spPr>
-          <a:xfrm>
-            <a:off x="6452464" y="4306824"/>
-            <a:ext cx="4861408" cy="274320"/>
-          </a:xfrm>
-          <a:prstGeom prst="rect">
-            <a:avLst/>
-          </a:prstGeom>
-          <a:noFill/>
-          <a:ln/>
-        </p:spPr>
-        <p:txBody>
-          <a:bodyPr wrap="square" lIns="0" tIns="0" rIns="0" bIns="0" rtlCol="0" anchor="t"/>
-          <a:lstStyle/>
-          <a:p>
-            <a:pPr indent="0" marL="0">
-              <a:buNone/>
-            </a:pPr>
-            <a:r>
-              <a:rPr lang="en-US" sz="1050" dirty="0">
-                <a:solidFill>
-                  <a:srgbClr val="3C3C3C"/>
-                </a:solidFill>
-                <a:latin typeface="Pretendard" pitchFamily="34" charset="0"/>
-                <a:ea typeface="Pretendard" pitchFamily="34" charset="-122"/>
-                <a:cs typeface="Pretendard" pitchFamily="34" charset="-120"/>
-              </a:rPr>
-              <a:t>연예인은 한 캠페인의 주목도를 만들지만, 마스코트는 여러 채널에 축적된다.</a:t>
-            </a:r>
-            <a:endParaRPr lang="en-US" sz="1050" dirty="0"/>
-          </a:p>
-        </p:txBody>
-      </p:sp>
-      <p:sp>
-        <p:nvSpPr>
-          <p:cNvPr id="34" name="Shape 32"/>
-          <p:cNvSpPr/>
-          <p:nvPr/>
-        </p:nvSpPr>
-        <p:spPr>
-          <a:xfrm>
-            <a:off x="6452464" y="4654296"/>
-            <a:ext cx="809244" cy="246888"/>
+              <a:t>연예인은 한 캠페인의 주목을 만들고, 마스코트는 채널마다 쌓인다.</a:t>
+            </a:r>
+            <a:endParaRPr lang="en-US" sz="900" dirty="0"/>
+          </a:p>
+        </p:txBody>
+      </p:sp>
+      <p:sp>
+        <p:nvSpPr>
+          <p:cNvPr id="36" name="Shape 30"/>
+          <p:cNvSpPr/>
+          <p:nvPr/>
+        </p:nvSpPr>
+        <p:spPr>
+          <a:xfrm>
+            <a:off x="9175775" y="4023360"/>
+            <a:ext cx="429768" cy="201168"/>
           </a:xfrm>
           <a:prstGeom prst="roundRect">
             <a:avLst>
@@ -13774,14 +14034,14 @@
       </p:sp>
       <p:sp>
         <p:nvSpPr>
-          <p:cNvPr id="35" name="Text 33"/>
-          <p:cNvSpPr/>
-          <p:nvPr/>
-        </p:nvSpPr>
-        <p:spPr>
-          <a:xfrm>
-            <a:off x="6452464" y="4654296"/>
-            <a:ext cx="809244" cy="246888"/>
+          <p:cNvPr id="37" name="Text 31"/>
+          <p:cNvSpPr/>
+          <p:nvPr/>
+        </p:nvSpPr>
+        <p:spPr>
+          <a:xfrm>
+            <a:off x="9175775" y="4023360"/>
+            <a:ext cx="429768" cy="201168"/>
           </a:xfrm>
           <a:prstGeom prst="rect">
             <a:avLst/>
@@ -13797,7 +14057,7 @@
               <a:buNone/>
             </a:pPr>
             <a:r>
-              <a:rPr lang="en-US" sz="950" dirty="0">
+              <a:rPr lang="en-US" sz="800" dirty="0">
                 <a:solidFill>
                   <a:srgbClr val="707070"/>
                 </a:solidFill>
@@ -13805,22 +14065,22 @@
                 <a:ea typeface="Pretendard" pitchFamily="34" charset="-122"/>
                 <a:cs typeface="Pretendard" pitchFamily="34" charset="-120"/>
               </a:rPr>
-              <a:t>영상 광고</a:t>
-            </a:r>
-            <a:endParaRPr lang="en-US" sz="950" dirty="0"/>
-          </a:p>
-        </p:txBody>
-      </p:sp>
-      <p:sp>
-        <p:nvSpPr>
-          <p:cNvPr id="36" name="Shape 34"/>
-          <p:cNvSpPr/>
-          <p:nvPr/>
-        </p:nvSpPr>
-        <p:spPr>
-          <a:xfrm>
-            <a:off x="7334860" y="4654296"/>
-            <a:ext cx="923544" cy="246888"/>
+              <a:t>숏폼</a:t>
+            </a:r>
+            <a:endParaRPr lang="en-US" sz="800" dirty="0"/>
+          </a:p>
+        </p:txBody>
+      </p:sp>
+      <p:sp>
+        <p:nvSpPr>
+          <p:cNvPr id="38" name="Shape 32"/>
+          <p:cNvSpPr/>
+          <p:nvPr/>
+        </p:nvSpPr>
+        <p:spPr>
+          <a:xfrm>
+            <a:off x="9678695" y="4023360"/>
+            <a:ext cx="525780" cy="201168"/>
           </a:xfrm>
           <a:prstGeom prst="roundRect">
             <a:avLst>
@@ -13840,14 +14100,14 @@
       </p:sp>
       <p:sp>
         <p:nvSpPr>
-          <p:cNvPr id="37" name="Text 35"/>
-          <p:cNvSpPr/>
-          <p:nvPr/>
-        </p:nvSpPr>
-        <p:spPr>
-          <a:xfrm>
-            <a:off x="7334860" y="4654296"/>
-            <a:ext cx="923544" cy="246888"/>
+          <p:cNvPr id="39" name="Text 33"/>
+          <p:cNvSpPr/>
+          <p:nvPr/>
+        </p:nvSpPr>
+        <p:spPr>
+          <a:xfrm>
+            <a:off x="9678695" y="4023360"/>
+            <a:ext cx="525780" cy="201168"/>
           </a:xfrm>
           <a:prstGeom prst="rect">
             <a:avLst/>
@@ -13863,7 +14123,7 @@
               <a:buNone/>
             </a:pPr>
             <a:r>
-              <a:rPr lang="en-US" sz="950" dirty="0">
+              <a:rPr lang="en-US" sz="800" dirty="0">
                 <a:solidFill>
                   <a:srgbClr val="707070"/>
                 </a:solidFill>
@@ -13871,22 +14131,22 @@
                 <a:ea typeface="Pretendard" pitchFamily="34" charset="-122"/>
                 <a:cs typeface="Pretendard" pitchFamily="34" charset="-120"/>
               </a:rPr>
-              <a:t>SNS 숏폼</a:t>
-            </a:r>
-            <a:endParaRPr lang="en-US" sz="950" dirty="0"/>
-          </a:p>
-        </p:txBody>
-      </p:sp>
-      <p:sp>
-        <p:nvSpPr>
-          <p:cNvPr id="38" name="Shape 36"/>
-          <p:cNvSpPr/>
-          <p:nvPr/>
-        </p:nvSpPr>
-        <p:spPr>
-          <a:xfrm>
-            <a:off x="8331556" y="4654296"/>
-            <a:ext cx="923544" cy="246888"/>
+              <a:t>계산기</a:t>
+            </a:r>
+            <a:endParaRPr lang="en-US" sz="800" dirty="0"/>
+          </a:p>
+        </p:txBody>
+      </p:sp>
+      <p:sp>
+        <p:nvSpPr>
+          <p:cNvPr id="40" name="Shape 34"/>
+          <p:cNvSpPr/>
+          <p:nvPr/>
+        </p:nvSpPr>
+        <p:spPr>
+          <a:xfrm>
+            <a:off x="10277627" y="4023360"/>
+            <a:ext cx="429768" cy="201168"/>
           </a:xfrm>
           <a:prstGeom prst="roundRect">
             <a:avLst>
@@ -13906,14 +14166,14 @@
       </p:sp>
       <p:sp>
         <p:nvSpPr>
-          <p:cNvPr id="39" name="Text 37"/>
-          <p:cNvSpPr/>
-          <p:nvPr/>
-        </p:nvSpPr>
-        <p:spPr>
-          <a:xfrm>
-            <a:off x="8331556" y="4654296"/>
-            <a:ext cx="923544" cy="246888"/>
+          <p:cNvPr id="41" name="Text 35"/>
+          <p:cNvSpPr/>
+          <p:nvPr/>
+        </p:nvSpPr>
+        <p:spPr>
+          <a:xfrm>
+            <a:off x="10277627" y="4023360"/>
+            <a:ext cx="429768" cy="201168"/>
           </a:xfrm>
           <a:prstGeom prst="rect">
             <a:avLst/>
@@ -13929,7 +14189,7 @@
               <a:buNone/>
             </a:pPr>
             <a:r>
-              <a:rPr lang="en-US" sz="950" dirty="0">
+              <a:rPr lang="en-US" sz="800" dirty="0">
                 <a:solidFill>
                   <a:srgbClr val="707070"/>
                 </a:solidFill>
@@ -13937,22 +14197,22 @@
                 <a:ea typeface="Pretendard" pitchFamily="34" charset="-122"/>
                 <a:cs typeface="Pretendard" pitchFamily="34" charset="-120"/>
               </a:rPr>
-              <a:t>비용 계산기</a:t>
-            </a:r>
-            <a:endParaRPr lang="en-US" sz="950" dirty="0"/>
-          </a:p>
-        </p:txBody>
-      </p:sp>
-      <p:sp>
-        <p:nvSpPr>
-          <p:cNvPr id="40" name="Shape 38"/>
-          <p:cNvSpPr/>
-          <p:nvPr/>
-        </p:nvSpPr>
-        <p:spPr>
-          <a:xfrm>
-            <a:off x="9328252" y="4654296"/>
-            <a:ext cx="809244" cy="246888"/>
+              <a:t>팝업</a:t>
+            </a:r>
+            <a:endParaRPr lang="en-US" sz="800" dirty="0"/>
+          </a:p>
+        </p:txBody>
+      </p:sp>
+      <p:sp>
+        <p:nvSpPr>
+          <p:cNvPr id="42" name="Shape 36"/>
+          <p:cNvSpPr/>
+          <p:nvPr/>
+        </p:nvSpPr>
+        <p:spPr>
+          <a:xfrm>
+            <a:off x="9175775" y="4288536"/>
+            <a:ext cx="717804" cy="201168"/>
           </a:xfrm>
           <a:prstGeom prst="roundRect">
             <a:avLst>
@@ -13972,14 +14232,14 @@
       </p:sp>
       <p:sp>
         <p:nvSpPr>
-          <p:cNvPr id="41" name="Text 39"/>
-          <p:cNvSpPr/>
-          <p:nvPr/>
-        </p:nvSpPr>
-        <p:spPr>
-          <a:xfrm>
-            <a:off x="9328252" y="4654296"/>
-            <a:ext cx="809244" cy="246888"/>
+          <p:cNvPr id="43" name="Text 37"/>
+          <p:cNvSpPr/>
+          <p:nvPr/>
+        </p:nvSpPr>
+        <p:spPr>
+          <a:xfrm>
+            <a:off x="9175775" y="4288536"/>
+            <a:ext cx="717804" cy="201168"/>
           </a:xfrm>
           <a:prstGeom prst="rect">
             <a:avLst/>
@@ -13995,7 +14255,7 @@
               <a:buNone/>
             </a:pPr>
             <a:r>
-              <a:rPr lang="en-US" sz="950" dirty="0">
+              <a:rPr lang="en-US" sz="800" dirty="0">
                 <a:solidFill>
                   <a:srgbClr val="707070"/>
                 </a:solidFill>
@@ -14003,22 +14263,22 @@
                 <a:ea typeface="Pretendard" pitchFamily="34" charset="-122"/>
                 <a:cs typeface="Pretendard" pitchFamily="34" charset="-120"/>
               </a:rPr>
-              <a:t>팝업 안내</a:t>
-            </a:r>
-            <a:endParaRPr lang="en-US" sz="950" dirty="0"/>
-          </a:p>
-        </p:txBody>
-      </p:sp>
-      <p:sp>
-        <p:nvSpPr>
-          <p:cNvPr id="42" name="Shape 40"/>
-          <p:cNvSpPr/>
-          <p:nvPr/>
-        </p:nvSpPr>
-        <p:spPr>
-          <a:xfrm>
-            <a:off x="10210648" y="4654296"/>
-            <a:ext cx="923544" cy="246888"/>
+              <a:t>관리 알림</a:t>
+            </a:r>
+            <a:endParaRPr lang="en-US" sz="800" dirty="0"/>
+          </a:p>
+        </p:txBody>
+      </p:sp>
+      <p:sp>
+        <p:nvSpPr>
+          <p:cNvPr id="44" name="Shape 38"/>
+          <p:cNvSpPr/>
+          <p:nvPr/>
+        </p:nvSpPr>
+        <p:spPr>
+          <a:xfrm>
+            <a:off x="9966731" y="4288536"/>
+            <a:ext cx="525780" cy="201168"/>
           </a:xfrm>
           <a:prstGeom prst="roundRect">
             <a:avLst>
@@ -14038,14 +14298,14 @@
       </p:sp>
       <p:sp>
         <p:nvSpPr>
-          <p:cNvPr id="43" name="Text 41"/>
-          <p:cNvSpPr/>
-          <p:nvPr/>
-        </p:nvSpPr>
-        <p:spPr>
-          <a:xfrm>
-            <a:off x="10210648" y="4654296"/>
-            <a:ext cx="923544" cy="246888"/>
+          <p:cNvPr id="45" name="Text 39"/>
+          <p:cNvSpPr/>
+          <p:nvPr/>
+        </p:nvSpPr>
+        <p:spPr>
+          <a:xfrm>
+            <a:off x="9966731" y="4288536"/>
+            <a:ext cx="525780" cy="201168"/>
           </a:xfrm>
           <a:prstGeom prst="rect">
             <a:avLst/>
@@ -14061,7 +14321,7 @@
               <a:buNone/>
             </a:pPr>
             <a:r>
-              <a:rPr lang="en-US" sz="950" dirty="0">
+              <a:rPr lang="en-US" sz="800" dirty="0">
                 <a:solidFill>
                   <a:srgbClr val="707070"/>
                 </a:solidFill>
@@ -14069,22 +14329,22 @@
                 <a:ea typeface="Pretendard" pitchFamily="34" charset="-122"/>
                 <a:cs typeface="Pretendard" pitchFamily="34" charset="-120"/>
               </a:rPr>
-              <a:t>사용 가이드</a:t>
-            </a:r>
-            <a:endParaRPr lang="en-US" sz="950" dirty="0"/>
-          </a:p>
-        </p:txBody>
-      </p:sp>
-      <p:sp>
-        <p:nvSpPr>
-          <p:cNvPr id="44" name="Shape 42"/>
-          <p:cNvSpPr/>
-          <p:nvPr/>
-        </p:nvSpPr>
-        <p:spPr>
-          <a:xfrm>
-            <a:off x="6452464" y="4965192"/>
-            <a:ext cx="809244" cy="246888"/>
+              <a:t>CRM</a:t>
+            </a:r>
+            <a:endParaRPr lang="en-US" sz="800" dirty="0"/>
+          </a:p>
+        </p:txBody>
+      </p:sp>
+      <p:sp>
+        <p:nvSpPr>
+          <p:cNvPr id="46" name="Shape 40"/>
+          <p:cNvSpPr/>
+          <p:nvPr/>
+        </p:nvSpPr>
+        <p:spPr>
+          <a:xfrm>
+            <a:off x="10565663" y="4288536"/>
+            <a:ext cx="429768" cy="201168"/>
           </a:xfrm>
           <a:prstGeom prst="roundRect">
             <a:avLst>
@@ -14104,14 +14364,14 @@
       </p:sp>
       <p:sp>
         <p:nvSpPr>
-          <p:cNvPr id="45" name="Text 43"/>
-          <p:cNvSpPr/>
-          <p:nvPr/>
-        </p:nvSpPr>
-        <p:spPr>
-          <a:xfrm>
-            <a:off x="6452464" y="4965192"/>
-            <a:ext cx="809244" cy="246888"/>
+          <p:cNvPr id="47" name="Text 41"/>
+          <p:cNvSpPr/>
+          <p:nvPr/>
+        </p:nvSpPr>
+        <p:spPr>
+          <a:xfrm>
+            <a:off x="10565663" y="4288536"/>
+            <a:ext cx="429768" cy="201168"/>
           </a:xfrm>
           <a:prstGeom prst="rect">
             <a:avLst/>
@@ -14127,7 +14387,7 @@
               <a:buNone/>
             </a:pPr>
             <a:r>
-              <a:rPr lang="en-US" sz="950" dirty="0">
+              <a:rPr lang="en-US" sz="800" dirty="0">
                 <a:solidFill>
                   <a:srgbClr val="707070"/>
                 </a:solidFill>
@@ -14135,153 +14395,21 @@
                 <a:ea typeface="Pretendard" pitchFamily="34" charset="-122"/>
                 <a:cs typeface="Pretendard" pitchFamily="34" charset="-120"/>
               </a:rPr>
-              <a:t>관리 알림</a:t>
-            </a:r>
-            <a:endParaRPr lang="en-US" sz="950" dirty="0"/>
-          </a:p>
-        </p:txBody>
-      </p:sp>
-      <p:sp>
-        <p:nvSpPr>
-          <p:cNvPr id="46" name="Shape 44"/>
-          <p:cNvSpPr/>
-          <p:nvPr/>
-        </p:nvSpPr>
-        <p:spPr>
-          <a:xfrm>
-            <a:off x="7334860" y="4965192"/>
-            <a:ext cx="580644" cy="246888"/>
-          </a:xfrm>
-          <a:prstGeom prst="roundRect">
-            <a:avLst>
-              <a:gd name="adj" fmla="val 50000"/>
-            </a:avLst>
-          </a:prstGeom>
-          <a:solidFill>
-            <a:srgbClr val="FFFFFF"/>
-          </a:solidFill>
-          <a:ln w="12700">
-            <a:solidFill>
-              <a:srgbClr val="E8E8E8"/>
-            </a:solidFill>
-            <a:prstDash val="solid"/>
-          </a:ln>
-        </p:spPr>
-      </p:sp>
-      <p:sp>
-        <p:nvSpPr>
-          <p:cNvPr id="47" name="Text 45"/>
-          <p:cNvSpPr/>
-          <p:nvPr/>
-        </p:nvSpPr>
-        <p:spPr>
-          <a:xfrm>
-            <a:off x="7334860" y="4965192"/>
-            <a:ext cx="580644" cy="246888"/>
-          </a:xfrm>
-          <a:prstGeom prst="rect">
-            <a:avLst/>
-          </a:prstGeom>
-          <a:noFill/>
-          <a:ln/>
-        </p:spPr>
-        <p:txBody>
-          <a:bodyPr wrap="square" lIns="0" tIns="0" rIns="0" bIns="0" rtlCol="0" anchor="ctr"/>
-          <a:lstStyle/>
-          <a:p>
-            <a:pPr algn="ctr" indent="0" marL="0">
-              <a:buNone/>
-            </a:pPr>
-            <a:r>
-              <a:rPr lang="en-US" sz="950" dirty="0">
-                <a:solidFill>
-                  <a:srgbClr val="707070"/>
-                </a:solidFill>
-                <a:latin typeface="Pretendard" pitchFamily="34" charset="0"/>
-                <a:ea typeface="Pretendard" pitchFamily="34" charset="-122"/>
-                <a:cs typeface="Pretendard" pitchFamily="34" charset="-120"/>
-              </a:rPr>
-              <a:t>CRM</a:t>
-            </a:r>
-            <a:endParaRPr lang="en-US" sz="950" dirty="0"/>
-          </a:p>
-        </p:txBody>
-      </p:sp>
-      <p:sp>
-        <p:nvSpPr>
-          <p:cNvPr id="48" name="Shape 46"/>
-          <p:cNvSpPr/>
-          <p:nvPr/>
-        </p:nvSpPr>
-        <p:spPr>
-          <a:xfrm>
-            <a:off x="7988656" y="4965192"/>
-            <a:ext cx="466344" cy="246888"/>
-          </a:xfrm>
-          <a:prstGeom prst="roundRect">
-            <a:avLst>
-              <a:gd name="adj" fmla="val 50000"/>
-            </a:avLst>
-          </a:prstGeom>
-          <a:solidFill>
-            <a:srgbClr val="FFFFFF"/>
-          </a:solidFill>
-          <a:ln w="12700">
-            <a:solidFill>
-              <a:srgbClr val="E8E8E8"/>
-            </a:solidFill>
-            <a:prstDash val="solid"/>
-          </a:ln>
-        </p:spPr>
-      </p:sp>
-      <p:sp>
-        <p:nvSpPr>
-          <p:cNvPr id="49" name="Text 47"/>
-          <p:cNvSpPr/>
-          <p:nvPr/>
-        </p:nvSpPr>
-        <p:spPr>
-          <a:xfrm>
-            <a:off x="7988656" y="4965192"/>
-            <a:ext cx="466344" cy="246888"/>
-          </a:xfrm>
-          <a:prstGeom prst="rect">
-            <a:avLst/>
-          </a:prstGeom>
-          <a:noFill/>
-          <a:ln/>
-        </p:spPr>
-        <p:txBody>
-          <a:bodyPr wrap="square" lIns="0" tIns="0" rIns="0" bIns="0" rtlCol="0" anchor="ctr"/>
-          <a:lstStyle/>
-          <a:p>
-            <a:pPr algn="ctr" indent="0" marL="0">
-              <a:buNone/>
-            </a:pPr>
-            <a:r>
-              <a:rPr lang="en-US" sz="950" dirty="0">
-                <a:solidFill>
-                  <a:srgbClr val="707070"/>
-                </a:solidFill>
-                <a:latin typeface="Pretendard" pitchFamily="34" charset="0"/>
-                <a:ea typeface="Pretendard" pitchFamily="34" charset="-122"/>
-                <a:cs typeface="Pretendard" pitchFamily="34" charset="-120"/>
-              </a:rPr>
               <a:t>굿즈</a:t>
             </a:r>
-            <a:endParaRPr lang="en-US" sz="950" dirty="0"/>
-          </a:p>
-        </p:txBody>
-      </p:sp>
-      <p:sp>
-        <p:nvSpPr>
-          <p:cNvPr id="50" name="Shape 48"/>
-          <p:cNvSpPr/>
-          <p:nvPr/>
-        </p:nvSpPr>
-        <p:spPr>
-          <a:xfrm>
-            <a:off x="658368" y="5742432"/>
+            <a:endParaRPr lang="en-US" sz="800" dirty="0"/>
+          </a:p>
+        </p:txBody>
+      </p:sp>
+      <p:sp>
+        <p:nvSpPr>
+          <p:cNvPr id="48" name="Shape 42"/>
+          <p:cNvSpPr/>
+          <p:nvPr/>
+        </p:nvSpPr>
+        <p:spPr>
+          <a:xfrm>
+            <a:off x="658368" y="5202936"/>
             <a:ext cx="10874959" cy="548640"/>
           </a:xfrm>
           <a:prstGeom prst="roundRect">
@@ -14302,13 +14430,13 @@
       </p:sp>
       <p:sp>
         <p:nvSpPr>
-          <p:cNvPr id="51" name="Text 49"/>
-          <p:cNvSpPr/>
-          <p:nvPr/>
-        </p:nvSpPr>
-        <p:spPr>
-          <a:xfrm>
-            <a:off x="658368" y="5742432"/>
+          <p:cNvPr id="49" name="Text 43"/>
+          <p:cNvSpPr/>
+          <p:nvPr/>
+        </p:nvSpPr>
+        <p:spPr>
+          <a:xfrm>
+            <a:off x="658368" y="5202936"/>
             <a:ext cx="10874959" cy="548640"/>
           </a:xfrm>
           <a:prstGeom prst="rect">
@@ -14325,7 +14453,7 @@
               <a:buNone/>
             </a:pPr>
             <a:r>
-              <a:rPr lang="en-US" sz="1500" b="1" dirty="0">
+              <a:rPr lang="en-US" sz="1450" b="1" dirty="0">
                 <a:solidFill>
                   <a:srgbClr val="191919"/>
                 </a:solidFill>
@@ -14339,7 +14467,7 @@
               <a:buNone/>
             </a:pPr>
             <a:r>
-              <a:rPr lang="en-US" sz="1500" b="1" dirty="0">
+              <a:rPr lang="en-US" sz="1450" b="1" dirty="0">
                 <a:solidFill>
                   <a:srgbClr val="0057FF"/>
                 </a:solidFill>
@@ -14353,7 +14481,7 @@
               <a:buNone/>
             </a:pPr>
             <a:r>
-              <a:rPr lang="en-US" sz="1500" b="1" dirty="0">
+              <a:rPr lang="en-US" sz="1450" b="1" dirty="0">
                 <a:solidFill>
                   <a:srgbClr val="191919"/>
                 </a:solidFill>
@@ -14363,13 +14491,52 @@
               </a:rPr>
               <a:t>이다.</a:t>
             </a:r>
-            <a:endParaRPr lang="en-US" sz="1500" dirty="0"/>
-          </a:p>
-        </p:txBody>
-      </p:sp>
-      <p:sp>
-        <p:nvSpPr>
-          <p:cNvPr id="52" name="Text 50"/>
+            <a:endParaRPr lang="en-US" sz="1450" dirty="0"/>
+          </a:p>
+        </p:txBody>
+      </p:sp>
+      <p:sp>
+        <p:nvSpPr>
+          <p:cNvPr id="50" name="Text 44"/>
+          <p:cNvSpPr/>
+          <p:nvPr/>
+        </p:nvSpPr>
+        <p:spPr>
+          <a:xfrm>
+            <a:off x="7327087" y="5861304"/>
+            <a:ext cx="4206240" cy="219456"/>
+          </a:xfrm>
+          <a:prstGeom prst="rect">
+            <a:avLst/>
+          </a:prstGeom>
+          <a:noFill/>
+          <a:ln/>
+        </p:spPr>
+        <p:txBody>
+          <a:bodyPr wrap="square" lIns="0" tIns="0" rIns="0" bIns="0" rtlCol="0" anchor="t"/>
+          <a:lstStyle/>
+          <a:p>
+            <a:pPr algn="r" indent="0" marL="0">
+              <a:buNone/>
+            </a:pPr>
+            <a:r>
+              <a:rPr lang="en-US" sz="950" b="1" dirty="0">
+                <a:solidFill>
+                  <a:srgbClr val="0057FF"/>
+                </a:solidFill>
+                <a:latin typeface="Pretendard" pitchFamily="34" charset="0"/>
+                <a:ea typeface="Pretendard" pitchFamily="34" charset="-122"/>
+                <a:cs typeface="Pretendard" pitchFamily="34" charset="-120"/>
+              </a:rPr>
+              <a:t>→ 그 펭귄을 그때 모습 그대로 쓸 수는 없다.</a:t>
+            </a:r>
+            <a:endParaRPr lang="en-US" sz="950" dirty="0"/>
+          </a:p>
+        </p:txBody>
+      </p:sp>
+      <p:sp>
+        <p:nvSpPr>
+          <p:cNvPr id="51" name="Text 45"/>
           <p:cNvSpPr/>
           <p:nvPr/>
         </p:nvSpPr>
@@ -14408,7 +14575,7 @@
       </p:sp>
       <p:sp>
         <p:nvSpPr>
-          <p:cNvPr id="53" name="Text 51"/>
+          <p:cNvPr id="52" name="Text 46"/>
           <p:cNvSpPr/>
           <p:nvPr/>
         </p:nvSpPr>

--- a/청호나이스-브랜드전략-제안.pptx
+++ b/청호나이스-브랜드전략-제안.pptx
@@ -16791,8 +16791,8 @@
         </p:nvSpPr>
         <p:spPr>
           <a:xfrm>
-            <a:off x="658368" y="1024128"/>
-            <a:ext cx="10874959" cy="822960"/>
+            <a:off x="658368" y="1005840"/>
+            <a:ext cx="10874959" cy="502920"/>
           </a:xfrm>
           <a:prstGeom prst="rect">
             <a:avLst/>
@@ -16806,12 +16806,12 @@
           <a:p>
             <a:pPr indent="0" marL="0">
               <a:lnSpc>
-                <a:spcPts val="3000"/>
+                <a:spcPts val="3072"/>
               </a:lnSpc>
               <a:buNone/>
             </a:pPr>
             <a:r>
-              <a:rPr lang="en-US" sz="2300" b="1" dirty="0">
+              <a:rPr lang="en-US" sz="2400" b="1" dirty="0">
                 <a:solidFill>
                   <a:srgbClr val="191919"/>
                 </a:solidFill>
@@ -16819,19 +16819,33 @@
                 <a:ea typeface="Pretendard" pitchFamily="34" charset="-122"/>
                 <a:cs typeface="Pretendard" pitchFamily="34" charset="-120"/>
               </a:rPr>
-              <a:t>기억되는가보다 중요한 건,</a:t>
-            </a:r>
-            <a:endParaRPr lang="en-US" sz="2300" dirty="0"/>
-          </a:p>
-          <a:p>
+              <a:t>펭귄의 현재 가치를 검증해, </a:t>
+            </a:r>
             <a:pPr indent="0" marL="0">
               <a:lnSpc>
-                <a:spcPts val="3000"/>
+                <a:spcPts val="3072"/>
               </a:lnSpc>
               <a:buNone/>
             </a:pPr>
             <a:r>
-              <a:rPr lang="en-US" sz="2300" b="1" dirty="0">
+              <a:rPr lang="en-US" sz="2400" b="1" dirty="0">
+                <a:solidFill>
+                  <a:srgbClr val="0057FF"/>
+                </a:solidFill>
+                <a:latin typeface="Pretendard" pitchFamily="34" charset="0"/>
+                <a:ea typeface="Pretendard" pitchFamily="34" charset="-122"/>
+                <a:cs typeface="Pretendard" pitchFamily="34" charset="-120"/>
+              </a:rPr>
+              <a:t>활용 수준</a:t>
+            </a:r>
+            <a:pPr indent="0" marL="0">
+              <a:lnSpc>
+                <a:spcPts val="3072"/>
+              </a:lnSpc>
+              <a:buNone/>
+            </a:pPr>
+            <a:r>
+              <a:rPr lang="en-US" sz="2400" b="1" dirty="0">
                 <a:solidFill>
                   <a:srgbClr val="191919"/>
                 </a:solidFill>
@@ -16839,72 +16853,80 @@
                 <a:ea typeface="Pretendard" pitchFamily="34" charset="-122"/>
                 <a:cs typeface="Pretendard" pitchFamily="34" charset="-120"/>
               </a:rPr>
-              <a:t>지금도 </a:t>
-            </a:r>
+              <a:t>을 결정한다</a:t>
+            </a:r>
+            <a:endParaRPr lang="en-US" sz="2400" dirty="0"/>
+          </a:p>
+        </p:txBody>
+      </p:sp>
+      <p:sp>
+        <p:nvSpPr>
+          <p:cNvPr id="5" name="Text 3"/>
+          <p:cNvSpPr/>
+          <p:nvPr/>
+        </p:nvSpPr>
+        <p:spPr>
+          <a:xfrm>
+            <a:off x="658368" y="1700784"/>
+            <a:ext cx="10874959" cy="237744"/>
+          </a:xfrm>
+          <a:prstGeom prst="rect">
+            <a:avLst/>
+          </a:prstGeom>
+          <a:noFill/>
+          <a:ln/>
+        </p:spPr>
+        <p:txBody>
+          <a:bodyPr wrap="square" lIns="0" tIns="0" rIns="0" bIns="0" rtlCol="0" anchor="t"/>
+          <a:lstStyle/>
+          <a:p>
+            <a:pPr indent="0" marL="0">
+              <a:buNone/>
+            </a:pPr>
+            <a:r>
+              <a:rPr lang="en-US" sz="1150" dirty="0">
+                <a:solidFill>
+                  <a:srgbClr val="707070"/>
+                </a:solidFill>
+                <a:latin typeface="Pretendard" pitchFamily="34" charset="0"/>
+                <a:ea typeface="Pretendard" pitchFamily="34" charset="-122"/>
+                <a:cs typeface="Pretendard" pitchFamily="34" charset="-120"/>
+              </a:rPr>
+              <a:t>과거의 기억보다 중요한 것은, 지금의 청호나이스를 더 잘 기억시키는가이다.</a:t>
+            </a:r>
+            <a:endParaRPr lang="en-US" sz="1150" dirty="0"/>
+          </a:p>
+        </p:txBody>
+      </p:sp>
+      <p:sp>
+        <p:nvSpPr>
+          <p:cNvPr id="6" name="Text 4"/>
+          <p:cNvSpPr/>
+          <p:nvPr/>
+        </p:nvSpPr>
+        <p:spPr>
+          <a:xfrm>
+            <a:off x="658368" y="2103120"/>
+            <a:ext cx="3401568" cy="548640"/>
+          </a:xfrm>
+          <a:prstGeom prst="rect">
+            <a:avLst/>
+          </a:prstGeom>
+          <a:noFill/>
+          <a:ln/>
+        </p:spPr>
+        <p:txBody>
+          <a:bodyPr wrap="square" lIns="0" tIns="0" rIns="0" bIns="0" rtlCol="0" anchor="t"/>
+          <a:lstStyle/>
+          <a:p>
             <a:pPr indent="0" marL="0">
               <a:lnSpc>
-                <a:spcPts val="3000"/>
+                <a:spcPts val="1400"/>
               </a:lnSpc>
               <a:buNone/>
             </a:pPr>
             <a:r>
-              <a:rPr lang="en-US" sz="2300" b="1" dirty="0">
-                <a:solidFill>
-                  <a:srgbClr val="0057FF"/>
-                </a:solidFill>
-                <a:latin typeface="Pretendard" pitchFamily="34" charset="0"/>
-                <a:ea typeface="Pretendard" pitchFamily="34" charset="-122"/>
-                <a:cs typeface="Pretendard" pitchFamily="34" charset="-120"/>
-              </a:rPr>
-              <a:t>청호나이스답게</a:t>
-            </a:r>
-            <a:pPr indent="0" marL="0">
-              <a:lnSpc>
-                <a:spcPts val="3000"/>
-              </a:lnSpc>
-              <a:buNone/>
-            </a:pPr>
-            <a:r>
-              <a:rPr lang="en-US" sz="2300" b="1" dirty="0">
-                <a:solidFill>
-                  <a:srgbClr val="191919"/>
-                </a:solidFill>
-                <a:latin typeface="Pretendard" pitchFamily="34" charset="0"/>
-                <a:ea typeface="Pretendard" pitchFamily="34" charset="-122"/>
-                <a:cs typeface="Pretendard" pitchFamily="34" charset="-120"/>
-              </a:rPr>
-              <a:t> 작동하는가.</a:t>
-            </a:r>
-            <a:endParaRPr lang="en-US" sz="2300" dirty="0"/>
-          </a:p>
-        </p:txBody>
-      </p:sp>
-      <p:sp>
-        <p:nvSpPr>
-          <p:cNvPr id="5" name="Text 3"/>
-          <p:cNvSpPr/>
-          <p:nvPr/>
-        </p:nvSpPr>
-        <p:spPr>
-          <a:xfrm>
-            <a:off x="658368" y="2148840"/>
-            <a:ext cx="10874959" cy="274320"/>
-          </a:xfrm>
-          <a:prstGeom prst="rect">
-            <a:avLst/>
-          </a:prstGeom>
-          <a:noFill/>
-          <a:ln/>
-        </p:spPr>
-        <p:txBody>
-          <a:bodyPr wrap="square" lIns="0" tIns="0" rIns="0" bIns="0" rtlCol="0" anchor="t"/>
-          <a:lstStyle/>
-          <a:p>
-            <a:pPr indent="0" marL="0">
-              <a:buNone/>
-            </a:pPr>
-            <a:r>
-              <a:rPr lang="en-US" sz="1200" dirty="0">
+              <a:rPr lang="en-US" sz="1050" dirty="0">
                 <a:solidFill>
                   <a:srgbClr val="3C3C3C"/>
                 </a:solidFill>
@@ -16912,30 +16934,760 @@
                 <a:ea typeface="Pretendard" pitchFamily="34" charset="-122"/>
                 <a:cs typeface="Pretendard" pitchFamily="34" charset="-120"/>
               </a:rPr>
-              <a:t>펭귄을 쓰는 근거는 ‘기억’이 아니라 ‘적합’이다. 그래서 조사 결과가 어느 쪽이든 실행은 멈추지 않는다.</a:t>
-            </a:r>
-            <a:endParaRPr lang="en-US" sz="1200" dirty="0"/>
-          </a:p>
-        </p:txBody>
-      </p:sp>
-      <p:sp>
-        <p:nvSpPr>
-          <p:cNvPr id="6" name="Shape 4"/>
-          <p:cNvSpPr/>
-          <p:nvPr/>
-        </p:nvSpPr>
-        <p:spPr>
-          <a:xfrm>
-            <a:off x="658368" y="2542032"/>
-            <a:ext cx="10874959" cy="777240"/>
+              <a:t>펭귄을 되살린다는 결론을 먼저 정하지 않는다. 과거 광고의 기억과 현재의 브랜드 효과를 검증한 뒤, 캠페인에서의 역할을 결정한다.</a:t>
+            </a:r>
+            <a:endParaRPr lang="en-US" sz="1050" dirty="0"/>
+          </a:p>
+        </p:txBody>
+      </p:sp>
+      <p:sp>
+        <p:nvSpPr>
+          <p:cNvPr id="7" name="Shape 5"/>
+          <p:cNvSpPr/>
+          <p:nvPr/>
+        </p:nvSpPr>
+        <p:spPr>
+          <a:xfrm>
+            <a:off x="658368" y="2651760"/>
+            <a:ext cx="548640" cy="256032"/>
           </a:xfrm>
           <a:prstGeom prst="roundRect">
             <a:avLst>
-              <a:gd name="adj" fmla="val 10588"/>
+              <a:gd name="adj" fmla="val 50000"/>
             </a:avLst>
           </a:prstGeom>
           <a:solidFill>
-            <a:srgbClr val="FFFFFF"/>
+            <a:srgbClr val="1E9BE6"/>
+          </a:solidFill>
+          <a:ln/>
+        </p:spPr>
+      </p:sp>
+      <p:sp>
+        <p:nvSpPr>
+          <p:cNvPr id="8" name="Text 6"/>
+          <p:cNvSpPr/>
+          <p:nvPr/>
+        </p:nvSpPr>
+        <p:spPr>
+          <a:xfrm>
+            <a:off x="658368" y="2651760"/>
+            <a:ext cx="548640" cy="256032"/>
+          </a:xfrm>
+          <a:prstGeom prst="rect">
+            <a:avLst/>
+          </a:prstGeom>
+          <a:noFill/>
+          <a:ln/>
+        </p:spPr>
+        <p:txBody>
+          <a:bodyPr wrap="square" lIns="0" tIns="0" rIns="0" bIns="0" rtlCol="0" anchor="ctr"/>
+          <a:lstStyle/>
+          <a:p>
+            <a:pPr algn="ctr" indent="0" marL="0">
+              <a:buNone/>
+            </a:pPr>
+            <a:r>
+              <a:rPr lang="en-US" sz="1000" b="1" dirty="0">
+                <a:solidFill>
+                  <a:srgbClr val="FFFFFF"/>
+                </a:solidFill>
+                <a:latin typeface="Pretendard" pitchFamily="34" charset="0"/>
+                <a:ea typeface="Pretendard" pitchFamily="34" charset="-122"/>
+                <a:cs typeface="Pretendard" pitchFamily="34" charset="-120"/>
+              </a:rPr>
+              <a:t>기억</a:t>
+            </a:r>
+            <a:endParaRPr lang="en-US" sz="1000" dirty="0"/>
+          </a:p>
+        </p:txBody>
+      </p:sp>
+      <p:sp>
+        <p:nvSpPr>
+          <p:cNvPr id="9" name="Text 7"/>
+          <p:cNvSpPr/>
+          <p:nvPr/>
+        </p:nvSpPr>
+        <p:spPr>
+          <a:xfrm>
+            <a:off x="1316736" y="2633472"/>
+            <a:ext cx="2743200" cy="292608"/>
+          </a:xfrm>
+          <a:prstGeom prst="rect">
+            <a:avLst/>
+          </a:prstGeom>
+          <a:noFill/>
+          <a:ln/>
+        </p:spPr>
+        <p:txBody>
+          <a:bodyPr wrap="square" lIns="0" tIns="0" rIns="0" bIns="0" rtlCol="0" anchor="ctr"/>
+          <a:lstStyle/>
+          <a:p>
+            <a:pPr indent="0" marL="0">
+              <a:lnSpc>
+                <a:spcPts val="1200"/>
+              </a:lnSpc>
+              <a:buNone/>
+            </a:pPr>
+            <a:r>
+              <a:rPr lang="en-US" sz="950" dirty="0">
+                <a:solidFill>
+                  <a:srgbClr val="3C3C3C"/>
+                </a:solidFill>
+                <a:latin typeface="Pretendard" pitchFamily="34" charset="0"/>
+                <a:ea typeface="Pretendard" pitchFamily="34" charset="-122"/>
+                <a:cs typeface="Pretendard" pitchFamily="34" charset="-120"/>
+              </a:rPr>
+              <a:t>과거 광고를 알고 있는가</a:t>
+            </a:r>
+            <a:endParaRPr lang="en-US" sz="950" dirty="0"/>
+          </a:p>
+        </p:txBody>
+      </p:sp>
+      <p:sp>
+        <p:nvSpPr>
+          <p:cNvPr id="10" name="Text 8"/>
+          <p:cNvSpPr/>
+          <p:nvPr/>
+        </p:nvSpPr>
+        <p:spPr>
+          <a:xfrm>
+            <a:off x="822960" y="2907792"/>
+            <a:ext cx="228600" cy="182880"/>
+          </a:xfrm>
+          <a:prstGeom prst="rect">
+            <a:avLst/>
+          </a:prstGeom>
+          <a:noFill/>
+          <a:ln/>
+        </p:spPr>
+        <p:txBody>
+          <a:bodyPr wrap="square" lIns="0" tIns="0" rIns="0" bIns="0" rtlCol="0" anchor="t"/>
+          <a:lstStyle/>
+          <a:p>
+            <a:pPr algn="ctr" indent="0" marL="0">
+              <a:buNone/>
+            </a:pPr>
+            <a:r>
+              <a:rPr lang="en-US" sz="1000" dirty="0">
+                <a:solidFill>
+                  <a:srgbClr val="0057FF"/>
+                </a:solidFill>
+                <a:latin typeface="Pretendard" pitchFamily="34" charset="0"/>
+                <a:ea typeface="Pretendard" pitchFamily="34" charset="-122"/>
+                <a:cs typeface="Pretendard" pitchFamily="34" charset="-120"/>
+              </a:rPr>
+              <a:t>↓</a:t>
+            </a:r>
+            <a:endParaRPr lang="en-US" sz="1000" dirty="0"/>
+          </a:p>
+        </p:txBody>
+      </p:sp>
+      <p:sp>
+        <p:nvSpPr>
+          <p:cNvPr id="11" name="Shape 9"/>
+          <p:cNvSpPr/>
+          <p:nvPr/>
+        </p:nvSpPr>
+        <p:spPr>
+          <a:xfrm>
+            <a:off x="658368" y="3090672"/>
+            <a:ext cx="548640" cy="256032"/>
+          </a:xfrm>
+          <a:prstGeom prst="roundRect">
+            <a:avLst>
+              <a:gd name="adj" fmla="val 50000"/>
+            </a:avLst>
+          </a:prstGeom>
+          <a:solidFill>
+            <a:srgbClr val="1E9BE6"/>
+          </a:solidFill>
+          <a:ln/>
+        </p:spPr>
+      </p:sp>
+      <p:sp>
+        <p:nvSpPr>
+          <p:cNvPr id="12" name="Text 10"/>
+          <p:cNvSpPr/>
+          <p:nvPr/>
+        </p:nvSpPr>
+        <p:spPr>
+          <a:xfrm>
+            <a:off x="658368" y="3090672"/>
+            <a:ext cx="548640" cy="256032"/>
+          </a:xfrm>
+          <a:prstGeom prst="rect">
+            <a:avLst/>
+          </a:prstGeom>
+          <a:noFill/>
+          <a:ln/>
+        </p:spPr>
+        <p:txBody>
+          <a:bodyPr wrap="square" lIns="0" tIns="0" rIns="0" bIns="0" rtlCol="0" anchor="ctr"/>
+          <a:lstStyle/>
+          <a:p>
+            <a:pPr algn="ctr" indent="0" marL="0">
+              <a:buNone/>
+            </a:pPr>
+            <a:r>
+              <a:rPr lang="en-US" sz="1000" b="1" dirty="0">
+                <a:solidFill>
+                  <a:srgbClr val="FFFFFF"/>
+                </a:solidFill>
+                <a:latin typeface="Pretendard" pitchFamily="34" charset="0"/>
+                <a:ea typeface="Pretendard" pitchFamily="34" charset="-122"/>
+                <a:cs typeface="Pretendard" pitchFamily="34" charset="-120"/>
+              </a:rPr>
+              <a:t>적합</a:t>
+            </a:r>
+            <a:endParaRPr lang="en-US" sz="1000" dirty="0"/>
+          </a:p>
+        </p:txBody>
+      </p:sp>
+      <p:sp>
+        <p:nvSpPr>
+          <p:cNvPr id="13" name="Text 11"/>
+          <p:cNvSpPr/>
+          <p:nvPr/>
+        </p:nvSpPr>
+        <p:spPr>
+          <a:xfrm>
+            <a:off x="1316736" y="3072384"/>
+            <a:ext cx="2743200" cy="292608"/>
+          </a:xfrm>
+          <a:prstGeom prst="rect">
+            <a:avLst/>
+          </a:prstGeom>
+          <a:noFill/>
+          <a:ln/>
+        </p:spPr>
+        <p:txBody>
+          <a:bodyPr wrap="square" lIns="0" tIns="0" rIns="0" bIns="0" rtlCol="0" anchor="ctr"/>
+          <a:lstStyle/>
+          <a:p>
+            <a:pPr indent="0" marL="0">
+              <a:lnSpc>
+                <a:spcPts val="1200"/>
+              </a:lnSpc>
+              <a:buNone/>
+            </a:pPr>
+            <a:r>
+              <a:rPr lang="en-US" sz="950" dirty="0">
+                <a:solidFill>
+                  <a:srgbClr val="3C3C3C"/>
+                </a:solidFill>
+                <a:latin typeface="Pretendard" pitchFamily="34" charset="0"/>
+                <a:ea typeface="Pretendard" pitchFamily="34" charset="-122"/>
+                <a:cs typeface="Pretendard" pitchFamily="34" charset="-120"/>
+              </a:rPr>
+              <a:t>지금의 청호나이스·얼음정수기와 어울리는가</a:t>
+            </a:r>
+            <a:endParaRPr lang="en-US" sz="950" dirty="0"/>
+          </a:p>
+        </p:txBody>
+      </p:sp>
+      <p:sp>
+        <p:nvSpPr>
+          <p:cNvPr id="14" name="Text 12"/>
+          <p:cNvSpPr/>
+          <p:nvPr/>
+        </p:nvSpPr>
+        <p:spPr>
+          <a:xfrm>
+            <a:off x="822960" y="3346704"/>
+            <a:ext cx="228600" cy="182880"/>
+          </a:xfrm>
+          <a:prstGeom prst="rect">
+            <a:avLst/>
+          </a:prstGeom>
+          <a:noFill/>
+          <a:ln/>
+        </p:spPr>
+        <p:txBody>
+          <a:bodyPr wrap="square" lIns="0" tIns="0" rIns="0" bIns="0" rtlCol="0" anchor="t"/>
+          <a:lstStyle/>
+          <a:p>
+            <a:pPr algn="ctr" indent="0" marL="0">
+              <a:buNone/>
+            </a:pPr>
+            <a:r>
+              <a:rPr lang="en-US" sz="1000" dirty="0">
+                <a:solidFill>
+                  <a:srgbClr val="0057FF"/>
+                </a:solidFill>
+                <a:latin typeface="Pretendard" pitchFamily="34" charset="0"/>
+                <a:ea typeface="Pretendard" pitchFamily="34" charset="-122"/>
+                <a:cs typeface="Pretendard" pitchFamily="34" charset="-120"/>
+              </a:rPr>
+              <a:t>↓</a:t>
+            </a:r>
+            <a:endParaRPr lang="en-US" sz="1000" dirty="0"/>
+          </a:p>
+        </p:txBody>
+      </p:sp>
+      <p:sp>
+        <p:nvSpPr>
+          <p:cNvPr id="15" name="Shape 13"/>
+          <p:cNvSpPr/>
+          <p:nvPr/>
+        </p:nvSpPr>
+        <p:spPr>
+          <a:xfrm>
+            <a:off x="658368" y="3529584"/>
+            <a:ext cx="548640" cy="256032"/>
+          </a:xfrm>
+          <a:prstGeom prst="roundRect">
+            <a:avLst>
+              <a:gd name="adj" fmla="val 50000"/>
+            </a:avLst>
+          </a:prstGeom>
+          <a:solidFill>
+            <a:srgbClr val="0057FF"/>
+          </a:solidFill>
+          <a:ln/>
+        </p:spPr>
+      </p:sp>
+      <p:sp>
+        <p:nvSpPr>
+          <p:cNvPr id="16" name="Text 14"/>
+          <p:cNvSpPr/>
+          <p:nvPr/>
+        </p:nvSpPr>
+        <p:spPr>
+          <a:xfrm>
+            <a:off x="658368" y="3529584"/>
+            <a:ext cx="548640" cy="256032"/>
+          </a:xfrm>
+          <a:prstGeom prst="rect">
+            <a:avLst/>
+          </a:prstGeom>
+          <a:noFill/>
+          <a:ln/>
+        </p:spPr>
+        <p:txBody>
+          <a:bodyPr wrap="square" lIns="0" tIns="0" rIns="0" bIns="0" rtlCol="0" anchor="ctr"/>
+          <a:lstStyle/>
+          <a:p>
+            <a:pPr algn="ctr" indent="0" marL="0">
+              <a:buNone/>
+            </a:pPr>
+            <a:r>
+              <a:rPr lang="en-US" sz="1000" b="1" dirty="0">
+                <a:solidFill>
+                  <a:srgbClr val="FFFFFF"/>
+                </a:solidFill>
+                <a:latin typeface="Pretendard" pitchFamily="34" charset="0"/>
+                <a:ea typeface="Pretendard" pitchFamily="34" charset="-122"/>
+                <a:cs typeface="Pretendard" pitchFamily="34" charset="-120"/>
+              </a:rPr>
+              <a:t>효과</a:t>
+            </a:r>
+            <a:endParaRPr lang="en-US" sz="1000" dirty="0"/>
+          </a:p>
+        </p:txBody>
+      </p:sp>
+      <p:sp>
+        <p:nvSpPr>
+          <p:cNvPr id="17" name="Text 15"/>
+          <p:cNvSpPr/>
+          <p:nvPr/>
+        </p:nvSpPr>
+        <p:spPr>
+          <a:xfrm>
+            <a:off x="1316736" y="3511296"/>
+            <a:ext cx="2743200" cy="292608"/>
+          </a:xfrm>
+          <a:prstGeom prst="rect">
+            <a:avLst/>
+          </a:prstGeom>
+          <a:noFill/>
+          <a:ln/>
+        </p:spPr>
+        <p:txBody>
+          <a:bodyPr wrap="square" lIns="0" tIns="0" rIns="0" bIns="0" rtlCol="0" anchor="ctr"/>
+          <a:lstStyle/>
+          <a:p>
+            <a:pPr indent="0" marL="0">
+              <a:lnSpc>
+                <a:spcPts val="1200"/>
+              </a:lnSpc>
+              <a:buNone/>
+            </a:pPr>
+            <a:r>
+              <a:rPr lang="en-US" sz="950" dirty="0">
+                <a:solidFill>
+                  <a:srgbClr val="3C3C3C"/>
+                </a:solidFill>
+                <a:latin typeface="Pretendard" pitchFamily="34" charset="0"/>
+                <a:ea typeface="Pretendard" pitchFamily="34" charset="-122"/>
+                <a:cs typeface="Pretendard" pitchFamily="34" charset="-120"/>
+              </a:rPr>
+              <a:t>제품 관심과 브랜드 기억을 실제로 높이는가</a:t>
+            </a:r>
+            <a:endParaRPr lang="en-US" sz="950" dirty="0"/>
+          </a:p>
+        </p:txBody>
+      </p:sp>
+      <p:sp>
+        <p:nvSpPr>
+          <p:cNvPr id="18" name="Shape 16"/>
+          <p:cNvSpPr/>
+          <p:nvPr/>
+        </p:nvSpPr>
+        <p:spPr>
+          <a:xfrm>
+            <a:off x="658368" y="4005072"/>
+            <a:ext cx="3401568" cy="1371600"/>
+          </a:xfrm>
+          <a:prstGeom prst="roundRect">
+            <a:avLst>
+              <a:gd name="adj" fmla="val 6000"/>
+            </a:avLst>
+          </a:prstGeom>
+          <a:solidFill>
+            <a:srgbClr val="F5F5F7"/>
+          </a:solidFill>
+          <a:ln/>
+        </p:spPr>
+      </p:sp>
+      <p:sp>
+        <p:nvSpPr>
+          <p:cNvPr id="19" name="Text 17"/>
+          <p:cNvSpPr/>
+          <p:nvPr/>
+        </p:nvSpPr>
+        <p:spPr>
+          <a:xfrm>
+            <a:off x="859536" y="4133088"/>
+            <a:ext cx="2999232" cy="201168"/>
+          </a:xfrm>
+          <a:prstGeom prst="rect">
+            <a:avLst/>
+          </a:prstGeom>
+          <a:noFill/>
+          <a:ln/>
+        </p:spPr>
+        <p:txBody>
+          <a:bodyPr wrap="square" lIns="0" tIns="0" rIns="0" bIns="0" rtlCol="0" anchor="t"/>
+          <a:lstStyle/>
+          <a:p>
+            <a:pPr indent="0" marL="0">
+              <a:buNone/>
+            </a:pPr>
+            <a:r>
+              <a:rPr lang="en-US" sz="950" b="1" dirty="0">
+                <a:solidFill>
+                  <a:srgbClr val="707070"/>
+                </a:solidFill>
+                <a:latin typeface="Pretendard" pitchFamily="34" charset="0"/>
+                <a:ea typeface="Pretendard" pitchFamily="34" charset="-122"/>
+                <a:cs typeface="Pretendard" pitchFamily="34" charset="-120"/>
+              </a:rPr>
+              <a:t>검증 방식</a:t>
+            </a:r>
+            <a:endParaRPr lang="en-US" sz="950" dirty="0"/>
+          </a:p>
+        </p:txBody>
+      </p:sp>
+      <p:sp>
+        <p:nvSpPr>
+          <p:cNvPr id="20" name="Text 18"/>
+          <p:cNvSpPr/>
+          <p:nvPr/>
+        </p:nvSpPr>
+        <p:spPr>
+          <a:xfrm>
+            <a:off x="859536" y="4352544"/>
+            <a:ext cx="2999232" cy="182880"/>
+          </a:xfrm>
+          <a:prstGeom prst="rect">
+            <a:avLst/>
+          </a:prstGeom>
+          <a:noFill/>
+          <a:ln/>
+        </p:spPr>
+        <p:txBody>
+          <a:bodyPr wrap="square" lIns="0" tIns="0" rIns="0" bIns="0" rtlCol="0" anchor="t"/>
+          <a:lstStyle/>
+          <a:p>
+            <a:pPr indent="0" marL="0">
+              <a:buNone/>
+            </a:pPr>
+            <a:r>
+              <a:rPr lang="en-US" sz="950" b="1" dirty="0">
+                <a:solidFill>
+                  <a:srgbClr val="191919"/>
+                </a:solidFill>
+                <a:latin typeface="Pretendard" pitchFamily="34" charset="0"/>
+                <a:ea typeface="Pretendard" pitchFamily="34" charset="-122"/>
+                <a:cs typeface="Pretendard" pitchFamily="34" charset="-120"/>
+              </a:rPr>
+              <a:t>비보조·보조 인지 조사</a:t>
+            </a:r>
+            <a:endParaRPr lang="en-US" sz="950" dirty="0"/>
+          </a:p>
+        </p:txBody>
+      </p:sp>
+      <p:sp>
+        <p:nvSpPr>
+          <p:cNvPr id="21" name="Text 19"/>
+          <p:cNvSpPr/>
+          <p:nvPr/>
+        </p:nvSpPr>
+        <p:spPr>
+          <a:xfrm>
+            <a:off x="859536" y="4517136"/>
+            <a:ext cx="2999232" cy="219456"/>
+          </a:xfrm>
+          <a:prstGeom prst="rect">
+            <a:avLst/>
+          </a:prstGeom>
+          <a:noFill/>
+          <a:ln/>
+        </p:spPr>
+        <p:txBody>
+          <a:bodyPr wrap="square" lIns="0" tIns="0" rIns="0" bIns="0" rtlCol="0" anchor="t"/>
+          <a:lstStyle/>
+          <a:p>
+            <a:pPr indent="0" marL="0">
+              <a:lnSpc>
+                <a:spcPts val="1000"/>
+              </a:lnSpc>
+              <a:buNone/>
+            </a:pPr>
+            <a:r>
+              <a:rPr lang="en-US" sz="800" dirty="0">
+                <a:solidFill>
+                  <a:srgbClr val="707070"/>
+                </a:solidFill>
+                <a:latin typeface="Pretendard" pitchFamily="34" charset="0"/>
+                <a:ea typeface="Pretendard" pitchFamily="34" charset="-122"/>
+                <a:cs typeface="Pretendard" pitchFamily="34" charset="-120"/>
+              </a:rPr>
+              <a:t>과거 광고 기억, 청호나이스 연결률</a:t>
+            </a:r>
+            <a:endParaRPr lang="en-US" sz="800" dirty="0"/>
+          </a:p>
+        </p:txBody>
+      </p:sp>
+      <p:sp>
+        <p:nvSpPr>
+          <p:cNvPr id="22" name="Text 20"/>
+          <p:cNvSpPr/>
+          <p:nvPr/>
+        </p:nvSpPr>
+        <p:spPr>
+          <a:xfrm>
+            <a:off x="859536" y="4681728"/>
+            <a:ext cx="2999232" cy="182880"/>
+          </a:xfrm>
+          <a:prstGeom prst="rect">
+            <a:avLst/>
+          </a:prstGeom>
+          <a:noFill/>
+          <a:ln/>
+        </p:spPr>
+        <p:txBody>
+          <a:bodyPr wrap="square" lIns="0" tIns="0" rIns="0" bIns="0" rtlCol="0" anchor="t"/>
+          <a:lstStyle/>
+          <a:p>
+            <a:pPr indent="0" marL="0">
+              <a:buNone/>
+            </a:pPr>
+            <a:r>
+              <a:rPr lang="en-US" sz="950" b="1" dirty="0">
+                <a:solidFill>
+                  <a:srgbClr val="191919"/>
+                </a:solidFill>
+                <a:latin typeface="Pretendard" pitchFamily="34" charset="0"/>
+                <a:ea typeface="Pretendard" pitchFamily="34" charset="-122"/>
+                <a:cs typeface="Pretendard" pitchFamily="34" charset="-120"/>
+              </a:rPr>
+              <a:t>A/B/C 콘셉트 테스트</a:t>
+            </a:r>
+            <a:endParaRPr lang="en-US" sz="950" dirty="0"/>
+          </a:p>
+        </p:txBody>
+      </p:sp>
+      <p:sp>
+        <p:nvSpPr>
+          <p:cNvPr id="23" name="Text 21"/>
+          <p:cNvSpPr/>
+          <p:nvPr/>
+        </p:nvSpPr>
+        <p:spPr>
+          <a:xfrm>
+            <a:off x="859536" y="4846320"/>
+            <a:ext cx="2999232" cy="219456"/>
+          </a:xfrm>
+          <a:prstGeom prst="rect">
+            <a:avLst/>
+          </a:prstGeom>
+          <a:noFill/>
+          <a:ln/>
+        </p:spPr>
+        <p:txBody>
+          <a:bodyPr wrap="square" lIns="0" tIns="0" rIns="0" bIns="0" rtlCol="0" anchor="t"/>
+          <a:lstStyle/>
+          <a:p>
+            <a:pPr indent="0" marL="0">
+              <a:lnSpc>
+                <a:spcPts val="1000"/>
+              </a:lnSpc>
+              <a:buNone/>
+            </a:pPr>
+            <a:r>
+              <a:rPr lang="en-US" sz="800" dirty="0">
+                <a:solidFill>
+                  <a:srgbClr val="707070"/>
+                </a:solidFill>
+                <a:latin typeface="Pretendard" pitchFamily="34" charset="0"/>
+                <a:ea typeface="Pretendard" pitchFamily="34" charset="-122"/>
+                <a:cs typeface="Pretendard" pitchFamily="34" charset="-120"/>
+              </a:rPr>
+              <a:t>과거 원형 / 현대화 펭귄 / 캐릭터 없는 제품형</a:t>
+            </a:r>
+            <a:endParaRPr lang="en-US" sz="800" dirty="0"/>
+          </a:p>
+        </p:txBody>
+      </p:sp>
+      <p:sp>
+        <p:nvSpPr>
+          <p:cNvPr id="24" name="Text 22"/>
+          <p:cNvSpPr/>
+          <p:nvPr/>
+        </p:nvSpPr>
+        <p:spPr>
+          <a:xfrm>
+            <a:off x="859536" y="5010912"/>
+            <a:ext cx="2999232" cy="182880"/>
+          </a:xfrm>
+          <a:prstGeom prst="rect">
+            <a:avLst/>
+          </a:prstGeom>
+          <a:noFill/>
+          <a:ln/>
+        </p:spPr>
+        <p:txBody>
+          <a:bodyPr wrap="square" lIns="0" tIns="0" rIns="0" bIns="0" rtlCol="0" anchor="t"/>
+          <a:lstStyle/>
+          <a:p>
+            <a:pPr indent="0" marL="0">
+              <a:buNone/>
+            </a:pPr>
+            <a:r>
+              <a:rPr lang="en-US" sz="950" b="1" dirty="0">
+                <a:solidFill>
+                  <a:srgbClr val="191919"/>
+                </a:solidFill>
+                <a:latin typeface="Pretendard" pitchFamily="34" charset="0"/>
+                <a:ea typeface="Pretendard" pitchFamily="34" charset="-122"/>
+                <a:cs typeface="Pretendard" pitchFamily="34" charset="-120"/>
+              </a:rPr>
+              <a:t>노출 전후 효과 비교</a:t>
+            </a:r>
+            <a:endParaRPr lang="en-US" sz="950" dirty="0"/>
+          </a:p>
+        </p:txBody>
+      </p:sp>
+      <p:sp>
+        <p:nvSpPr>
+          <p:cNvPr id="25" name="Text 23"/>
+          <p:cNvSpPr/>
+          <p:nvPr/>
+        </p:nvSpPr>
+        <p:spPr>
+          <a:xfrm>
+            <a:off x="859536" y="5175504"/>
+            <a:ext cx="2999232" cy="219456"/>
+          </a:xfrm>
+          <a:prstGeom prst="rect">
+            <a:avLst/>
+          </a:prstGeom>
+          <a:noFill/>
+          <a:ln/>
+        </p:spPr>
+        <p:txBody>
+          <a:bodyPr wrap="square" lIns="0" tIns="0" rIns="0" bIns="0" rtlCol="0" anchor="t"/>
+          <a:lstStyle/>
+          <a:p>
+            <a:pPr indent="0" marL="0">
+              <a:lnSpc>
+                <a:spcPts val="1000"/>
+              </a:lnSpc>
+              <a:buNone/>
+            </a:pPr>
+            <a:r>
+              <a:rPr lang="en-US" sz="800" dirty="0">
+                <a:solidFill>
+                  <a:srgbClr val="707070"/>
+                </a:solidFill>
+                <a:latin typeface="Pretendard" pitchFamily="34" charset="0"/>
+                <a:ea typeface="Pretendard" pitchFamily="34" charset="-122"/>
+                <a:cs typeface="Pretendard" pitchFamily="34" charset="-120"/>
+              </a:rPr>
+              <a:t>브랜드 친근도, 제품 이해도, 제품 관심도, 렌탈 고려도</a:t>
+            </a:r>
+            <a:endParaRPr lang="en-US" sz="800" dirty="0"/>
+          </a:p>
+        </p:txBody>
+      </p:sp>
+      <p:sp>
+        <p:nvSpPr>
+          <p:cNvPr id="26" name="Text 24"/>
+          <p:cNvSpPr/>
+          <p:nvPr/>
+        </p:nvSpPr>
+        <p:spPr>
+          <a:xfrm rot="16200000">
+            <a:off x="3511296" y="3419856"/>
+            <a:ext cx="2194560" cy="237744"/>
+          </a:xfrm>
+          <a:prstGeom prst="rect">
+            <a:avLst/>
+          </a:prstGeom>
+          <a:noFill/>
+          <a:ln/>
+        </p:spPr>
+        <p:txBody>
+          <a:bodyPr wrap="square" lIns="0" tIns="0" rIns="0" bIns="0" rtlCol="0" anchor="ctr"/>
+          <a:lstStyle/>
+          <a:p>
+            <a:pPr algn="ctr" indent="0" marL="0">
+              <a:buNone/>
+            </a:pPr>
+            <a:r>
+              <a:rPr lang="en-US" sz="950" b="1" dirty="0">
+                <a:solidFill>
+                  <a:srgbClr val="707070"/>
+                </a:solidFill>
+                <a:latin typeface="Pretendard" pitchFamily="34" charset="0"/>
+                <a:ea typeface="Pretendard" pitchFamily="34" charset="-122"/>
+                <a:cs typeface="Pretendard" pitchFamily="34" charset="-120"/>
+              </a:rPr>
+              <a:t>현재 브랜드 효과 →</a:t>
+            </a:r>
+            <a:endParaRPr lang="en-US" sz="950" dirty="0"/>
+          </a:p>
+        </p:txBody>
+      </p:sp>
+      <p:sp>
+        <p:nvSpPr>
+          <p:cNvPr id="27" name="Shape 25"/>
+          <p:cNvSpPr/>
+          <p:nvPr/>
+        </p:nvSpPr>
+        <p:spPr>
+          <a:xfrm>
+            <a:off x="4791456" y="2084832"/>
+            <a:ext cx="3288640" cy="1371600"/>
+          </a:xfrm>
+          <a:prstGeom prst="roundRect">
+            <a:avLst>
+              <a:gd name="adj" fmla="val 4667"/>
+            </a:avLst>
+          </a:prstGeom>
+          <a:solidFill>
+            <a:srgbClr val="EAF1FF"/>
           </a:solidFill>
           <a:ln w="19050">
             <a:solidFill>
@@ -16947,30 +17699,30 @@
       </p:sp>
       <p:sp>
         <p:nvSpPr>
-          <p:cNvPr id="7" name="Text 5"/>
-          <p:cNvSpPr/>
-          <p:nvPr/>
-        </p:nvSpPr>
-        <p:spPr>
-          <a:xfrm>
-            <a:off x="658368" y="2660904"/>
-            <a:ext cx="10874959" cy="219456"/>
-          </a:xfrm>
-          <a:prstGeom prst="rect">
-            <a:avLst/>
-          </a:prstGeom>
-          <a:noFill/>
-          <a:ln/>
-        </p:spPr>
-        <p:txBody>
-          <a:bodyPr wrap="square" lIns="0" tIns="0" rIns="0" bIns="0" rtlCol="0" anchor="t"/>
-          <a:lstStyle/>
-          <a:p>
-            <a:pPr algn="ctr" indent="0" marL="0">
-              <a:buNone/>
-            </a:pPr>
-            <a:r>
-              <a:rPr lang="en-US" sz="1000" b="1" dirty="0">
+          <p:cNvPr id="28" name="Text 26"/>
+          <p:cNvSpPr/>
+          <p:nvPr/>
+        </p:nvSpPr>
+        <p:spPr>
+          <a:xfrm>
+            <a:off x="4974336" y="2212848"/>
+            <a:ext cx="2922880" cy="182880"/>
+          </a:xfrm>
+          <a:prstGeom prst="rect">
+            <a:avLst/>
+          </a:prstGeom>
+          <a:noFill/>
+          <a:ln/>
+        </p:spPr>
+        <p:txBody>
+          <a:bodyPr wrap="square" lIns="0" tIns="0" rIns="0" bIns="0" rtlCol="0" anchor="t"/>
+          <a:lstStyle/>
+          <a:p>
+            <a:pPr indent="0" marL="0">
+              <a:buNone/>
+            </a:pPr>
+            <a:r>
+              <a:rPr lang="en-US" sz="800" b="1" dirty="0">
                 <a:solidFill>
                   <a:srgbClr val="0057FF"/>
                 </a:solidFill>
@@ -16978,38 +17730,38 @@
                 <a:ea typeface="Pretendard" pitchFamily="34" charset="-122"/>
                 <a:cs typeface="Pretendard" pitchFamily="34" charset="-120"/>
               </a:rPr>
-              <a:t>사전 조사에서 확인할 것 · 1문항</a:t>
-            </a:r>
-            <a:endParaRPr lang="en-US" sz="1000" dirty="0"/>
-          </a:p>
-        </p:txBody>
-      </p:sp>
-      <p:sp>
-        <p:nvSpPr>
-          <p:cNvPr id="8" name="Text 6"/>
-          <p:cNvSpPr/>
-          <p:nvPr/>
-        </p:nvSpPr>
-        <p:spPr>
-          <a:xfrm>
-            <a:off x="658368" y="2889504"/>
-            <a:ext cx="10874959" cy="329184"/>
-          </a:xfrm>
-          <a:prstGeom prst="rect">
-            <a:avLst/>
-          </a:prstGeom>
-          <a:noFill/>
-          <a:ln/>
-        </p:spPr>
-        <p:txBody>
-          <a:bodyPr wrap="square" lIns="0" tIns="0" rIns="0" bIns="0" rtlCol="0" anchor="t"/>
-          <a:lstStyle/>
-          <a:p>
-            <a:pPr algn="ctr" indent="0" marL="0">
-              <a:buNone/>
-            </a:pPr>
-            <a:r>
-              <a:rPr lang="en-US" sz="1700" b="1" dirty="0">
+              <a:t>인지 낮음 · 효과 높음</a:t>
+            </a:r>
+            <a:endParaRPr lang="en-US" sz="800" dirty="0"/>
+          </a:p>
+        </p:txBody>
+      </p:sp>
+      <p:sp>
+        <p:nvSpPr>
+          <p:cNvPr id="29" name="Text 27"/>
+          <p:cNvSpPr/>
+          <p:nvPr/>
+        </p:nvSpPr>
+        <p:spPr>
+          <a:xfrm>
+            <a:off x="4974336" y="2414016"/>
+            <a:ext cx="2922880" cy="237744"/>
+          </a:xfrm>
+          <a:prstGeom prst="rect">
+            <a:avLst/>
+          </a:prstGeom>
+          <a:noFill/>
+          <a:ln/>
+        </p:spPr>
+        <p:txBody>
+          <a:bodyPr wrap="square" lIns="0" tIns="0" rIns="0" bIns="0" rtlCol="0" anchor="t"/>
+          <a:lstStyle/>
+          <a:p>
+            <a:pPr indent="0" marL="0">
+              <a:buNone/>
+            </a:pPr>
+            <a:r>
+              <a:rPr lang="en-US" sz="1250" b="1" dirty="0">
                 <a:solidFill>
                   <a:srgbClr val="191919"/>
                 </a:solidFill>
@@ -17017,65 +17769,210 @@
                 <a:ea typeface="Pretendard" pitchFamily="34" charset="-122"/>
                 <a:cs typeface="Pretendard" pitchFamily="34" charset="-120"/>
               </a:rPr>
-              <a:t>2030은 청호나이스의 과거 펭귄 광고를 기억하는가?</a:t>
-            </a:r>
-            <a:endParaRPr lang="en-US" sz="1700" dirty="0"/>
-          </a:p>
-        </p:txBody>
-      </p:sp>
-      <p:sp>
-        <p:nvSpPr>
-          <p:cNvPr id="9" name="Text 7"/>
-          <p:cNvSpPr/>
-          <p:nvPr/>
-        </p:nvSpPr>
-        <p:spPr>
-          <a:xfrm>
-            <a:off x="0" y="3401568"/>
-            <a:ext cx="12191695" cy="274320"/>
-          </a:xfrm>
-          <a:prstGeom prst="rect">
-            <a:avLst/>
-          </a:prstGeom>
-          <a:noFill/>
-          <a:ln/>
-        </p:spPr>
-        <p:txBody>
-          <a:bodyPr wrap="square" lIns="0" tIns="0" rIns="0" bIns="0" rtlCol="0" anchor="t"/>
-          <a:lstStyle/>
-          <a:p>
-            <a:pPr algn="ctr" indent="0" marL="0">
-              <a:buNone/>
-            </a:pPr>
-            <a:r>
-              <a:rPr lang="en-US" sz="1600" b="1" dirty="0">
-                <a:solidFill>
-                  <a:srgbClr val="0057FF"/>
-                </a:solidFill>
-                <a:latin typeface="Pretendard" pitchFamily="34" charset="0"/>
-                <a:ea typeface="Pretendard" pitchFamily="34" charset="-122"/>
-                <a:cs typeface="Pretendard" pitchFamily="34" charset="-120"/>
-              </a:rPr>
-              <a:t>↓</a:t>
-            </a:r>
-            <a:endParaRPr lang="en-US" sz="1600" dirty="0"/>
-          </a:p>
-        </p:txBody>
-      </p:sp>
-      <p:sp>
-        <p:nvSpPr>
-          <p:cNvPr id="10" name="Shape 8"/>
-          <p:cNvSpPr/>
-          <p:nvPr/>
-        </p:nvSpPr>
-        <p:spPr>
-          <a:xfrm>
-            <a:off x="658368" y="3767328"/>
-            <a:ext cx="5291176" cy="1371600"/>
+              <a:t>과거 자산 기반 신규 마스코트</a:t>
+            </a:r>
+            <a:endParaRPr lang="en-US" sz="1250" dirty="0"/>
+          </a:p>
+        </p:txBody>
+      </p:sp>
+      <p:sp>
+        <p:nvSpPr>
+          <p:cNvPr id="30" name="Text 28"/>
+          <p:cNvSpPr/>
+          <p:nvPr/>
+        </p:nvSpPr>
+        <p:spPr>
+          <a:xfrm>
+            <a:off x="4974336" y="2688336"/>
+            <a:ext cx="2922880" cy="566928"/>
+          </a:xfrm>
+          <a:prstGeom prst="rect">
+            <a:avLst/>
+          </a:prstGeom>
+          <a:noFill/>
+          <a:ln/>
+        </p:spPr>
+        <p:txBody>
+          <a:bodyPr wrap="square" lIns="0" tIns="0" rIns="0" bIns="0" rtlCol="0" anchor="t"/>
+          <a:lstStyle/>
+          <a:p>
+            <a:pPr indent="0" marL="0">
+              <a:lnSpc>
+                <a:spcPts val="1100"/>
+              </a:lnSpc>
+              <a:buNone/>
+            </a:pPr>
+            <a:r>
+              <a:rPr lang="en-US" sz="850" dirty="0">
+                <a:solidFill>
+                  <a:srgbClr val="3C3C3C"/>
+                </a:solidFill>
+                <a:latin typeface="Pretendard" pitchFamily="34" charset="0"/>
+                <a:ea typeface="Pretendard" pitchFamily="34" charset="-122"/>
+                <a:cs typeface="Pretendard" pitchFamily="34" charset="-120"/>
+              </a:rPr>
+              <a:t>추억 마케팅은 빼고, 얼음정수기 역사에서 출발한 새 캐릭터로 소개한다. 제품과 함께 반복 노출해 브랜드 연결을 만든다.</a:t>
+            </a:r>
+            <a:endParaRPr lang="en-US" sz="850" dirty="0"/>
+          </a:p>
+        </p:txBody>
+      </p:sp>
+      <p:sp>
+        <p:nvSpPr>
+          <p:cNvPr id="31" name="Shape 29"/>
+          <p:cNvSpPr/>
+          <p:nvPr/>
+        </p:nvSpPr>
+        <p:spPr>
+          <a:xfrm>
+            <a:off x="8244688" y="2084832"/>
+            <a:ext cx="3288640" cy="1371600"/>
           </a:xfrm>
           <a:prstGeom prst="roundRect">
             <a:avLst>
-              <a:gd name="adj" fmla="val 6000"/>
+              <a:gd name="adj" fmla="val 4667"/>
+            </a:avLst>
+          </a:prstGeom>
+          <a:solidFill>
+            <a:srgbClr val="0057FF"/>
+          </a:solidFill>
+          <a:ln/>
+        </p:spPr>
+      </p:sp>
+      <p:sp>
+        <p:nvSpPr>
+          <p:cNvPr id="32" name="Text 30"/>
+          <p:cNvSpPr/>
+          <p:nvPr/>
+        </p:nvSpPr>
+        <p:spPr>
+          <a:xfrm>
+            <a:off x="8427568" y="2212848"/>
+            <a:ext cx="2922880" cy="182880"/>
+          </a:xfrm>
+          <a:prstGeom prst="rect">
+            <a:avLst/>
+          </a:prstGeom>
+          <a:noFill/>
+          <a:ln/>
+        </p:spPr>
+        <p:txBody>
+          <a:bodyPr wrap="square" lIns="0" tIns="0" rIns="0" bIns="0" rtlCol="0" anchor="t"/>
+          <a:lstStyle/>
+          <a:p>
+            <a:pPr indent="0" marL="0">
+              <a:buNone/>
+            </a:pPr>
+            <a:r>
+              <a:rPr lang="en-US" sz="800" b="1" dirty="0">
+                <a:solidFill>
+                  <a:srgbClr val="CFE0FF"/>
+                </a:solidFill>
+                <a:latin typeface="Pretendard" pitchFamily="34" charset="0"/>
+                <a:ea typeface="Pretendard" pitchFamily="34" charset="-122"/>
+                <a:cs typeface="Pretendard" pitchFamily="34" charset="-120"/>
+              </a:rPr>
+              <a:t>인지 높음 · 효과 높음</a:t>
+            </a:r>
+            <a:endParaRPr lang="en-US" sz="800" dirty="0"/>
+          </a:p>
+        </p:txBody>
+      </p:sp>
+      <p:sp>
+        <p:nvSpPr>
+          <p:cNvPr id="33" name="Text 31"/>
+          <p:cNvSpPr/>
+          <p:nvPr/>
+        </p:nvSpPr>
+        <p:spPr>
+          <a:xfrm>
+            <a:off x="8427568" y="2414016"/>
+            <a:ext cx="2922880" cy="237744"/>
+          </a:xfrm>
+          <a:prstGeom prst="rect">
+            <a:avLst/>
+          </a:prstGeom>
+          <a:noFill/>
+          <a:ln/>
+        </p:spPr>
+        <p:txBody>
+          <a:bodyPr wrap="square" lIns="0" tIns="0" rIns="0" bIns="0" rtlCol="0" anchor="t"/>
+          <a:lstStyle/>
+          <a:p>
+            <a:pPr indent="0" marL="0">
+              <a:buNone/>
+            </a:pPr>
+            <a:r>
+              <a:rPr lang="en-US" sz="1250" b="1" dirty="0">
+                <a:solidFill>
+                  <a:srgbClr val="FFFFFF"/>
+                </a:solidFill>
+                <a:latin typeface="Pretendard" pitchFamily="34" charset="0"/>
+                <a:ea typeface="Pretendard" pitchFamily="34" charset="-122"/>
+                <a:cs typeface="Pretendard" pitchFamily="34" charset="-120"/>
+              </a:rPr>
+              <a:t>헤리티지 리바이벌</a:t>
+            </a:r>
+            <a:endParaRPr lang="en-US" sz="1250" dirty="0"/>
+          </a:p>
+        </p:txBody>
+      </p:sp>
+      <p:sp>
+        <p:nvSpPr>
+          <p:cNvPr id="34" name="Text 32"/>
+          <p:cNvSpPr/>
+          <p:nvPr/>
+        </p:nvSpPr>
+        <p:spPr>
+          <a:xfrm>
+            <a:off x="8427568" y="2688336"/>
+            <a:ext cx="2922880" cy="566928"/>
+          </a:xfrm>
+          <a:prstGeom prst="rect">
+            <a:avLst/>
+          </a:prstGeom>
+          <a:noFill/>
+          <a:ln/>
+        </p:spPr>
+        <p:txBody>
+          <a:bodyPr wrap="square" lIns="0" tIns="0" rIns="0" bIns="0" rtlCol="0" anchor="t"/>
+          <a:lstStyle/>
+          <a:p>
+            <a:pPr indent="0" marL="0">
+              <a:lnSpc>
+                <a:spcPts val="1100"/>
+              </a:lnSpc>
+              <a:buNone/>
+            </a:pPr>
+            <a:r>
+              <a:rPr lang="en-US" sz="850" dirty="0">
+                <a:solidFill>
+                  <a:srgbClr val="E3ECFF"/>
+                </a:solidFill>
+                <a:latin typeface="Pretendard" pitchFamily="34" charset="0"/>
+                <a:ea typeface="Pretendard" pitchFamily="34" charset="-122"/>
+                <a:cs typeface="Pretendard" pitchFamily="34" charset="-120"/>
+              </a:rPr>
+              <a:t>과거 광고를 오마주로 전면에 세운다. ‘그때 그 펭귄’ 메시지로 청호나이스 헤리티지를 적극 활용한다.</a:t>
+            </a:r>
+            <a:endParaRPr lang="en-US" sz="850" dirty="0"/>
+          </a:p>
+        </p:txBody>
+      </p:sp>
+      <p:sp>
+        <p:nvSpPr>
+          <p:cNvPr id="35" name="Shape 33"/>
+          <p:cNvSpPr/>
+          <p:nvPr/>
+        </p:nvSpPr>
+        <p:spPr>
+          <a:xfrm>
+            <a:off x="4791456" y="3621024"/>
+            <a:ext cx="3288640" cy="1371600"/>
+          </a:xfrm>
+          <a:prstGeom prst="roundRect">
+            <a:avLst>
+              <a:gd name="adj" fmla="val 4667"/>
             </a:avLst>
           </a:prstGeom>
           <a:solidFill>
@@ -17085,20 +17982,287 @@
             <a:solidFill>
               <a:srgbClr val="E8E8E8"/>
             </a:solidFill>
-            <a:prstDash val="solid"/>
+            <a:prstDash val="dash"/>
           </a:ln>
         </p:spPr>
       </p:sp>
       <p:sp>
         <p:nvSpPr>
-          <p:cNvPr id="11" name="Shape 9"/>
-          <p:cNvSpPr/>
-          <p:nvPr/>
-        </p:nvSpPr>
-        <p:spPr>
-          <a:xfrm>
-            <a:off x="877824" y="3950208"/>
-            <a:ext cx="1431036" cy="256032"/>
+          <p:cNvPr id="36" name="Text 34"/>
+          <p:cNvSpPr/>
+          <p:nvPr/>
+        </p:nvSpPr>
+        <p:spPr>
+          <a:xfrm>
+            <a:off x="4974336" y="3749040"/>
+            <a:ext cx="2922880" cy="182880"/>
+          </a:xfrm>
+          <a:prstGeom prst="rect">
+            <a:avLst/>
+          </a:prstGeom>
+          <a:noFill/>
+          <a:ln/>
+        </p:spPr>
+        <p:txBody>
+          <a:bodyPr wrap="square" lIns="0" tIns="0" rIns="0" bIns="0" rtlCol="0" anchor="t"/>
+          <a:lstStyle/>
+          <a:p>
+            <a:pPr indent="0" marL="0">
+              <a:buNone/>
+            </a:pPr>
+            <a:r>
+              <a:rPr lang="en-US" sz="800" b="1" dirty="0">
+                <a:solidFill>
+                  <a:srgbClr val="959595"/>
+                </a:solidFill>
+                <a:latin typeface="Pretendard" pitchFamily="34" charset="0"/>
+                <a:ea typeface="Pretendard" pitchFamily="34" charset="-122"/>
+                <a:cs typeface="Pretendard" pitchFamily="34" charset="-120"/>
+              </a:rPr>
+              <a:t>인지 낮음 · 효과 낮음</a:t>
+            </a:r>
+            <a:endParaRPr lang="en-US" sz="800" dirty="0"/>
+          </a:p>
+        </p:txBody>
+      </p:sp>
+      <p:sp>
+        <p:nvSpPr>
+          <p:cNvPr id="37" name="Text 35"/>
+          <p:cNvSpPr/>
+          <p:nvPr/>
+        </p:nvSpPr>
+        <p:spPr>
+          <a:xfrm>
+            <a:off x="4974336" y="3950208"/>
+            <a:ext cx="2922880" cy="237744"/>
+          </a:xfrm>
+          <a:prstGeom prst="rect">
+            <a:avLst/>
+          </a:prstGeom>
+          <a:noFill/>
+          <a:ln/>
+        </p:spPr>
+        <p:txBody>
+          <a:bodyPr wrap="square" lIns="0" tIns="0" rIns="0" bIns="0" rtlCol="0" anchor="t"/>
+          <a:lstStyle/>
+          <a:p>
+            <a:pPr indent="0" marL="0">
+              <a:buNone/>
+            </a:pPr>
+            <a:r>
+              <a:rPr lang="en-US" sz="1250" b="1" dirty="0">
+                <a:solidFill>
+                  <a:srgbClr val="707070"/>
+                </a:solidFill>
+                <a:latin typeface="Pretendard" pitchFamily="34" charset="0"/>
+                <a:ea typeface="Pretendard" pitchFamily="34" charset="-122"/>
+                <a:cs typeface="Pretendard" pitchFamily="34" charset="-120"/>
+              </a:rPr>
+              <a:t>메인 전략에서 제외</a:t>
+            </a:r>
+            <a:endParaRPr lang="en-US" sz="1250" dirty="0"/>
+          </a:p>
+        </p:txBody>
+      </p:sp>
+      <p:sp>
+        <p:nvSpPr>
+          <p:cNvPr id="38" name="Text 36"/>
+          <p:cNvSpPr/>
+          <p:nvPr/>
+        </p:nvSpPr>
+        <p:spPr>
+          <a:xfrm>
+            <a:off x="4974336" y="4224528"/>
+            <a:ext cx="2922880" cy="566928"/>
+          </a:xfrm>
+          <a:prstGeom prst="rect">
+            <a:avLst/>
+          </a:prstGeom>
+          <a:noFill/>
+          <a:ln/>
+        </p:spPr>
+        <p:txBody>
+          <a:bodyPr wrap="square" lIns="0" tIns="0" rIns="0" bIns="0" rtlCol="0" anchor="t"/>
+          <a:lstStyle/>
+          <a:p>
+            <a:pPr indent="0" marL="0">
+              <a:lnSpc>
+                <a:spcPts val="1100"/>
+              </a:lnSpc>
+              <a:buNone/>
+            </a:pPr>
+            <a:r>
+              <a:rPr lang="en-US" sz="850" dirty="0">
+                <a:solidFill>
+                  <a:srgbClr val="3C3C3C"/>
+                </a:solidFill>
+                <a:latin typeface="Pretendard" pitchFamily="34" charset="0"/>
+                <a:ea typeface="Pretendard" pitchFamily="34" charset="-122"/>
+                <a:cs typeface="Pretendard" pitchFamily="34" charset="-120"/>
+              </a:rPr>
+              <a:t>펭귄 중심 캠페인은 접고, 제품 편익 중심 커뮤니케이션으로 전환한다.</a:t>
+            </a:r>
+            <a:endParaRPr lang="en-US" sz="850" dirty="0"/>
+          </a:p>
+        </p:txBody>
+      </p:sp>
+      <p:sp>
+        <p:nvSpPr>
+          <p:cNvPr id="39" name="Shape 37"/>
+          <p:cNvSpPr/>
+          <p:nvPr/>
+        </p:nvSpPr>
+        <p:spPr>
+          <a:xfrm>
+            <a:off x="8244688" y="3621024"/>
+            <a:ext cx="3288640" cy="1371600"/>
+          </a:xfrm>
+          <a:prstGeom prst="roundRect">
+            <a:avLst>
+              <a:gd name="adj" fmla="val 4667"/>
+            </a:avLst>
+          </a:prstGeom>
+          <a:solidFill>
+            <a:srgbClr val="FFFFFF"/>
+          </a:solidFill>
+          <a:ln w="12700">
+            <a:solidFill>
+              <a:srgbClr val="E8E8E8"/>
+            </a:solidFill>
+            <a:prstDash val="dash"/>
+          </a:ln>
+        </p:spPr>
+      </p:sp>
+      <p:sp>
+        <p:nvSpPr>
+          <p:cNvPr id="40" name="Text 38"/>
+          <p:cNvSpPr/>
+          <p:nvPr/>
+        </p:nvSpPr>
+        <p:spPr>
+          <a:xfrm>
+            <a:off x="8427568" y="3749040"/>
+            <a:ext cx="2922880" cy="182880"/>
+          </a:xfrm>
+          <a:prstGeom prst="rect">
+            <a:avLst/>
+          </a:prstGeom>
+          <a:noFill/>
+          <a:ln/>
+        </p:spPr>
+        <p:txBody>
+          <a:bodyPr wrap="square" lIns="0" tIns="0" rIns="0" bIns="0" rtlCol="0" anchor="t"/>
+          <a:lstStyle/>
+          <a:p>
+            <a:pPr indent="0" marL="0">
+              <a:buNone/>
+            </a:pPr>
+            <a:r>
+              <a:rPr lang="en-US" sz="800" b="1" dirty="0">
+                <a:solidFill>
+                  <a:srgbClr val="959595"/>
+                </a:solidFill>
+                <a:latin typeface="Pretendard" pitchFamily="34" charset="0"/>
+                <a:ea typeface="Pretendard" pitchFamily="34" charset="-122"/>
+                <a:cs typeface="Pretendard" pitchFamily="34" charset="-120"/>
+              </a:rPr>
+              <a:t>인지 높음 · 효과 낮음</a:t>
+            </a:r>
+            <a:endParaRPr lang="en-US" sz="800" dirty="0"/>
+          </a:p>
+        </p:txBody>
+      </p:sp>
+      <p:sp>
+        <p:nvSpPr>
+          <p:cNvPr id="41" name="Text 39"/>
+          <p:cNvSpPr/>
+          <p:nvPr/>
+        </p:nvSpPr>
+        <p:spPr>
+          <a:xfrm>
+            <a:off x="8427568" y="3950208"/>
+            <a:ext cx="2922880" cy="237744"/>
+          </a:xfrm>
+          <a:prstGeom prst="rect">
+            <a:avLst/>
+          </a:prstGeom>
+          <a:noFill/>
+          <a:ln/>
+        </p:spPr>
+        <p:txBody>
+          <a:bodyPr wrap="square" lIns="0" tIns="0" rIns="0" bIns="0" rtlCol="0" anchor="t"/>
+          <a:lstStyle/>
+          <a:p>
+            <a:pPr indent="0" marL="0">
+              <a:buNone/>
+            </a:pPr>
+            <a:r>
+              <a:rPr lang="en-US" sz="1250" b="1" dirty="0">
+                <a:solidFill>
+                  <a:srgbClr val="707070"/>
+                </a:solidFill>
+                <a:latin typeface="Pretendard" pitchFamily="34" charset="0"/>
+                <a:ea typeface="Pretendard" pitchFamily="34" charset="-122"/>
+                <a:cs typeface="Pretendard" pitchFamily="34" charset="-120"/>
+              </a:rPr>
+              <a:t>광고 아카이브로 제한</a:t>
+            </a:r>
+            <a:endParaRPr lang="en-US" sz="1250" dirty="0"/>
+          </a:p>
+        </p:txBody>
+      </p:sp>
+      <p:sp>
+        <p:nvSpPr>
+          <p:cNvPr id="42" name="Text 40"/>
+          <p:cNvSpPr/>
+          <p:nvPr/>
+        </p:nvSpPr>
+        <p:spPr>
+          <a:xfrm>
+            <a:off x="8427568" y="4224528"/>
+            <a:ext cx="2922880" cy="566928"/>
+          </a:xfrm>
+          <a:prstGeom prst="rect">
+            <a:avLst/>
+          </a:prstGeom>
+          <a:noFill/>
+          <a:ln/>
+        </p:spPr>
+        <p:txBody>
+          <a:bodyPr wrap="square" lIns="0" tIns="0" rIns="0" bIns="0" rtlCol="0" anchor="t"/>
+          <a:lstStyle/>
+          <a:p>
+            <a:pPr indent="0" marL="0">
+              <a:lnSpc>
+                <a:spcPts val="1100"/>
+              </a:lnSpc>
+              <a:buNone/>
+            </a:pPr>
+            <a:r>
+              <a:rPr lang="en-US" sz="850" dirty="0">
+                <a:solidFill>
+                  <a:srgbClr val="3C3C3C"/>
+                </a:solidFill>
+                <a:latin typeface="Pretendard" pitchFamily="34" charset="0"/>
+                <a:ea typeface="Pretendard" pitchFamily="34" charset="-122"/>
+                <a:cs typeface="Pretendard" pitchFamily="34" charset="-120"/>
+              </a:rPr>
+              <a:t>브랜드 역사 콘텐츠, 팝업 아카이브 존, 오마주 영상의 짧은 장면에만 쓴다.</a:t>
+            </a:r>
+            <a:endParaRPr lang="en-US" sz="850" dirty="0"/>
+          </a:p>
+        </p:txBody>
+      </p:sp>
+      <p:sp>
+        <p:nvSpPr>
+          <p:cNvPr id="43" name="Shape 41"/>
+          <p:cNvSpPr/>
+          <p:nvPr/>
+        </p:nvSpPr>
+        <p:spPr>
+          <a:xfrm>
+            <a:off x="4974336" y="3127248"/>
+            <a:ext cx="1371600" cy="219456"/>
           </a:xfrm>
           <a:prstGeom prst="roundRect">
             <a:avLst>
@@ -17106,7 +18270,7 @@
             </a:avLst>
           </a:prstGeom>
           <a:solidFill>
-            <a:srgbClr val="EAF1FF"/>
+            <a:srgbClr val="FFFFFF"/>
           </a:solidFill>
           <a:ln w="12700">
             <a:solidFill>
@@ -17118,14 +18282,14 @@
       </p:sp>
       <p:sp>
         <p:nvSpPr>
-          <p:cNvPr id="12" name="Text 10"/>
-          <p:cNvSpPr/>
-          <p:nvPr/>
-        </p:nvSpPr>
-        <p:spPr>
-          <a:xfrm>
-            <a:off x="877824" y="3950208"/>
-            <a:ext cx="1431036" cy="256032"/>
+          <p:cNvPr id="44" name="Text 42"/>
+          <p:cNvSpPr/>
+          <p:nvPr/>
+        </p:nvSpPr>
+        <p:spPr>
+          <a:xfrm>
+            <a:off x="4974336" y="3127248"/>
+            <a:ext cx="1371600" cy="219456"/>
           </a:xfrm>
           <a:prstGeom prst="rect">
             <a:avLst/>
@@ -17141,15 +18305,54 @@
               <a:buNone/>
             </a:pPr>
             <a:r>
+              <a:rPr lang="en-US" sz="750" b="1" dirty="0">
+                <a:solidFill>
+                  <a:srgbClr val="0057FF"/>
+                </a:solidFill>
+                <a:latin typeface="Pretendard" pitchFamily="34" charset="0"/>
+                <a:ea typeface="Pretendard" pitchFamily="34" charset="-122"/>
+                <a:cs typeface="Pretendard" pitchFamily="34" charset="-120"/>
+              </a:rPr>
+              <a:t>가장 가능성이 높은 영역</a:t>
+            </a:r>
+            <a:endParaRPr lang="en-US" sz="750" dirty="0"/>
+          </a:p>
+        </p:txBody>
+      </p:sp>
+      <p:sp>
+        <p:nvSpPr>
+          <p:cNvPr id="45" name="Text 43"/>
+          <p:cNvSpPr/>
+          <p:nvPr/>
+        </p:nvSpPr>
+        <p:spPr>
+          <a:xfrm>
+            <a:off x="4791456" y="5102352"/>
+            <a:ext cx="6741871" cy="219456"/>
+          </a:xfrm>
+          <a:prstGeom prst="rect">
+            <a:avLst/>
+          </a:prstGeom>
+          <a:noFill/>
+          <a:ln/>
+        </p:spPr>
+        <p:txBody>
+          <a:bodyPr wrap="square" lIns="0" tIns="0" rIns="0" bIns="0" rtlCol="0" anchor="t"/>
+          <a:lstStyle/>
+          <a:p>
+            <a:pPr algn="ctr" indent="0" marL="0">
+              <a:buNone/>
+            </a:pPr>
+            <a:r>
               <a:rPr lang="en-US" sz="950" b="1" dirty="0">
                 <a:solidFill>
-                  <a:srgbClr val="0057FF"/>
-                </a:solidFill>
-                <a:latin typeface="Pretendard" pitchFamily="34" charset="0"/>
-                <a:ea typeface="Pretendard" pitchFamily="34" charset="-122"/>
-                <a:cs typeface="Pretendard" pitchFamily="34" charset="-120"/>
-              </a:rPr>
-              <a:t>결과 A · 기억한다</a:t>
+                  <a:srgbClr val="707070"/>
+                </a:solidFill>
+                <a:latin typeface="Pretendard" pitchFamily="34" charset="0"/>
+                <a:ea typeface="Pretendard" pitchFamily="34" charset="-122"/>
+                <a:cs typeface="Pretendard" pitchFamily="34" charset="-120"/>
+              </a:rPr>
+              <a:t>과거 광고 인지도 →</a:t>
             </a:r>
             <a:endParaRPr lang="en-US" sz="950" dirty="0"/>
           </a:p>
@@ -17157,149 +18360,36 @@
       </p:sp>
       <p:sp>
         <p:nvSpPr>
-          <p:cNvPr id="13" name="Text 11"/>
-          <p:cNvSpPr/>
-          <p:nvPr/>
-        </p:nvSpPr>
-        <p:spPr>
-          <a:xfrm>
-            <a:off x="877824" y="4297680"/>
-            <a:ext cx="4852264" cy="274320"/>
-          </a:xfrm>
-          <a:prstGeom prst="rect">
-            <a:avLst/>
-          </a:prstGeom>
-          <a:noFill/>
-          <a:ln/>
-        </p:spPr>
-        <p:txBody>
-          <a:bodyPr wrap="square" lIns="0" tIns="0" rIns="0" bIns="0" rtlCol="0" anchor="t"/>
-          <a:lstStyle/>
-          <a:p>
-            <a:pPr indent="0" marL="0">
-              <a:buNone/>
-            </a:pPr>
-            <a:r>
-              <a:rPr lang="en-US" sz="1400" b="1" dirty="0">
-                <a:solidFill>
-                  <a:srgbClr val="191919"/>
-                </a:solidFill>
-                <a:latin typeface="Pretendard" pitchFamily="34" charset="0"/>
-                <a:ea typeface="Pretendard" pitchFamily="34" charset="-122"/>
-                <a:cs typeface="Pretendard" pitchFamily="34" charset="-120"/>
-              </a:rPr>
-              <a:t>헤리티지 리바이벌</a:t>
-            </a:r>
-            <a:endParaRPr lang="en-US" sz="1400" dirty="0"/>
-          </a:p>
-        </p:txBody>
-      </p:sp>
-      <p:sp>
-        <p:nvSpPr>
-          <p:cNvPr id="14" name="Text 12"/>
-          <p:cNvSpPr/>
-          <p:nvPr/>
-        </p:nvSpPr>
-        <p:spPr>
-          <a:xfrm>
-            <a:off x="877824" y="4636008"/>
-            <a:ext cx="4852264" cy="438912"/>
-          </a:xfrm>
-          <a:prstGeom prst="rect">
-            <a:avLst/>
-          </a:prstGeom>
-          <a:noFill/>
-          <a:ln/>
-        </p:spPr>
-        <p:txBody>
-          <a:bodyPr wrap="square" lIns="0" tIns="0" rIns="0" bIns="0" rtlCol="0" anchor="t"/>
-          <a:lstStyle/>
-          <a:p>
-            <a:pPr indent="0" marL="0">
-              <a:lnSpc>
-                <a:spcPts val="1400"/>
-              </a:lnSpc>
-              <a:buNone/>
-            </a:pPr>
-            <a:r>
-              <a:rPr lang="en-US" sz="1050" dirty="0">
-                <a:solidFill>
-                  <a:srgbClr val="3C3C3C"/>
-                </a:solidFill>
-                <a:latin typeface="Pretendard" pitchFamily="34" charset="0"/>
-                <a:ea typeface="Pretendard" pitchFamily="34" charset="-122"/>
-                <a:cs typeface="Pretendard" pitchFamily="34" charset="-120"/>
-              </a:rPr>
-              <a:t>과거 광고를 오마주로 전면에 세운다. ‘그 펭귄이 돌아왔다’를 캠페인 진입 후크로 쓴다.</a:t>
-            </a:r>
-            <a:endParaRPr lang="en-US" sz="1050" dirty="0"/>
-          </a:p>
-        </p:txBody>
-      </p:sp>
-      <p:sp>
-        <p:nvSpPr>
-          <p:cNvPr id="15" name="Shape 13"/>
-          <p:cNvSpPr/>
-          <p:nvPr/>
-        </p:nvSpPr>
-        <p:spPr>
-          <a:xfrm>
-            <a:off x="6242152" y="3767328"/>
-            <a:ext cx="5291176" cy="1371600"/>
+          <p:cNvPr id="46" name="Shape 44"/>
+          <p:cNvSpPr/>
+          <p:nvPr/>
+        </p:nvSpPr>
+        <p:spPr>
+          <a:xfrm>
+            <a:off x="658368" y="5504688"/>
+            <a:ext cx="10874959" cy="658368"/>
           </a:xfrm>
           <a:prstGeom prst="roundRect">
             <a:avLst>
-              <a:gd name="adj" fmla="val 6000"/>
+              <a:gd name="adj" fmla="val 12500"/>
             </a:avLst>
           </a:prstGeom>
           <a:solidFill>
-            <a:srgbClr val="FFFFFF"/>
+            <a:srgbClr val="191919"/>
           </a:solidFill>
-          <a:ln w="12700">
-            <a:solidFill>
-              <a:srgbClr val="E8E8E8"/>
-            </a:solidFill>
-            <a:prstDash val="solid"/>
-          </a:ln>
-        </p:spPr>
-      </p:sp>
-      <p:sp>
-        <p:nvSpPr>
-          <p:cNvPr id="16" name="Shape 14"/>
-          <p:cNvSpPr/>
-          <p:nvPr/>
-        </p:nvSpPr>
-        <p:spPr>
-          <a:xfrm>
-            <a:off x="6461608" y="3950208"/>
-            <a:ext cx="1851660" cy="256032"/>
-          </a:xfrm>
-          <a:prstGeom prst="roundRect">
-            <a:avLst>
-              <a:gd name="adj" fmla="val 50000"/>
-            </a:avLst>
-          </a:prstGeom>
-          <a:solidFill>
-            <a:srgbClr val="F0F0F0"/>
-          </a:solidFill>
-          <a:ln w="12700">
-            <a:solidFill>
-              <a:srgbClr val="E8E8E8"/>
-            </a:solidFill>
-            <a:prstDash val="solid"/>
-          </a:ln>
-        </p:spPr>
-      </p:sp>
-      <p:sp>
-        <p:nvSpPr>
-          <p:cNvPr id="17" name="Text 15"/>
-          <p:cNvSpPr/>
-          <p:nvPr/>
-        </p:nvSpPr>
-        <p:spPr>
-          <a:xfrm>
-            <a:off x="6461608" y="3950208"/>
-            <a:ext cx="1851660" cy="256032"/>
+          <a:ln/>
+        </p:spPr>
+      </p:sp>
+      <p:sp>
+        <p:nvSpPr>
+          <p:cNvPr id="47" name="Text 45"/>
+          <p:cNvSpPr/>
+          <p:nvPr/>
+        </p:nvSpPr>
+        <p:spPr>
+          <a:xfrm>
+            <a:off x="950976" y="5504688"/>
+            <a:ext cx="5852160" cy="658368"/>
           </a:xfrm>
           <a:prstGeom prst="rect">
             <a:avLst/>
@@ -17311,161 +18401,11 @@
           <a:bodyPr wrap="square" lIns="0" tIns="0" rIns="0" bIns="0" rtlCol="0" anchor="ctr"/>
           <a:lstStyle/>
           <a:p>
-            <a:pPr algn="ctr" indent="0" marL="0">
-              <a:buNone/>
-            </a:pPr>
-            <a:r>
-              <a:rPr lang="en-US" sz="950" b="1" dirty="0">
-                <a:solidFill>
-                  <a:srgbClr val="707070"/>
-                </a:solidFill>
-                <a:latin typeface="Pretendard" pitchFamily="34" charset="0"/>
-                <a:ea typeface="Pretendard" pitchFamily="34" charset="-122"/>
-                <a:cs typeface="Pretendard" pitchFamily="34" charset="-120"/>
-              </a:rPr>
-              <a:t>결과 B · 기억하지 못한다</a:t>
-            </a:r>
-            <a:endParaRPr lang="en-US" sz="950" dirty="0"/>
-          </a:p>
-        </p:txBody>
-      </p:sp>
-      <p:sp>
-        <p:nvSpPr>
-          <p:cNvPr id="18" name="Text 16"/>
-          <p:cNvSpPr/>
-          <p:nvPr/>
-        </p:nvSpPr>
-        <p:spPr>
-          <a:xfrm>
-            <a:off x="6461608" y="4297680"/>
-            <a:ext cx="4852264" cy="274320"/>
-          </a:xfrm>
-          <a:prstGeom prst="rect">
-            <a:avLst/>
-          </a:prstGeom>
-          <a:noFill/>
-          <a:ln/>
-        </p:spPr>
-        <p:txBody>
-          <a:bodyPr wrap="square" lIns="0" tIns="0" rIns="0" bIns="0" rtlCol="0" anchor="t"/>
-          <a:lstStyle/>
-          <a:p>
-            <a:pPr indent="0" marL="0">
-              <a:buNone/>
-            </a:pPr>
-            <a:r>
-              <a:rPr lang="en-US" sz="1400" b="1" dirty="0">
-                <a:solidFill>
-                  <a:srgbClr val="191919"/>
-                </a:solidFill>
-                <a:latin typeface="Pretendard" pitchFamily="34" charset="0"/>
-                <a:ea typeface="Pretendard" pitchFamily="34" charset="-122"/>
-                <a:cs typeface="Pretendard" pitchFamily="34" charset="-120"/>
-              </a:rPr>
-              <a:t>과거 자산 기반 신규 마스코트</a:t>
-            </a:r>
-            <a:endParaRPr lang="en-US" sz="1400" dirty="0"/>
-          </a:p>
-        </p:txBody>
-      </p:sp>
-      <p:sp>
-        <p:nvSpPr>
-          <p:cNvPr id="19" name="Text 17"/>
-          <p:cNvSpPr/>
-          <p:nvPr/>
-        </p:nvSpPr>
-        <p:spPr>
-          <a:xfrm>
-            <a:off x="6461608" y="4636008"/>
-            <a:ext cx="4852264" cy="438912"/>
-          </a:xfrm>
-          <a:prstGeom prst="rect">
-            <a:avLst/>
-          </a:prstGeom>
-          <a:noFill/>
-          <a:ln/>
-        </p:spPr>
-        <p:txBody>
-          <a:bodyPr wrap="square" lIns="0" tIns="0" rIns="0" bIns="0" rtlCol="0" anchor="t"/>
-          <a:lstStyle/>
-          <a:p>
-            <a:pPr indent="0" marL="0">
-              <a:lnSpc>
-                <a:spcPts val="1400"/>
-              </a:lnSpc>
-              <a:buNone/>
-            </a:pPr>
-            <a:r>
-              <a:rPr lang="en-US" sz="1050" dirty="0">
-                <a:solidFill>
-                  <a:srgbClr val="3C3C3C"/>
-                </a:solidFill>
-                <a:latin typeface="Pretendard" pitchFamily="34" charset="0"/>
-                <a:ea typeface="Pretendard" pitchFamily="34" charset="-122"/>
-                <a:cs typeface="Pretendard" pitchFamily="34" charset="-120"/>
-              </a:rPr>
-              <a:t>헤리티지는 브랜드 스토리로만 남기고, 지금의 역할(준비 매니저)로 처음 소개한다.</a:t>
-            </a:r>
-            <a:endParaRPr lang="en-US" sz="1050" dirty="0"/>
-          </a:p>
-        </p:txBody>
-      </p:sp>
-      <p:sp>
-        <p:nvSpPr>
-          <p:cNvPr id="20" name="Shape 18"/>
-          <p:cNvSpPr/>
-          <p:nvPr/>
-        </p:nvSpPr>
-        <p:spPr>
-          <a:xfrm>
-            <a:off x="658368" y="5321808"/>
-            <a:ext cx="10874959" cy="749808"/>
-          </a:xfrm>
-          <a:prstGeom prst="roundRect">
-            <a:avLst>
-              <a:gd name="adj" fmla="val 10976"/>
-            </a:avLst>
-          </a:prstGeom>
-          <a:solidFill>
-            <a:srgbClr val="0057FF"/>
-          </a:solidFill>
-          <a:ln w="12700">
-            <a:solidFill>
-              <a:srgbClr val="0057FF"/>
-            </a:solidFill>
-            <a:prstDash val="solid"/>
-          </a:ln>
-        </p:spPr>
-      </p:sp>
-      <p:sp>
-        <p:nvSpPr>
-          <p:cNvPr id="21" name="Text 19"/>
-          <p:cNvSpPr/>
-          <p:nvPr/>
-        </p:nvSpPr>
-        <p:spPr>
-          <a:xfrm>
-            <a:off x="932688" y="5431536"/>
-            <a:ext cx="4206240" cy="548640"/>
-          </a:xfrm>
-          <a:prstGeom prst="rect">
-            <a:avLst/>
-          </a:prstGeom>
-          <a:noFill/>
-          <a:ln/>
-        </p:spPr>
-        <p:txBody>
-          <a:bodyPr wrap="square" lIns="0" tIns="0" rIns="0" bIns="0" rtlCol="0" anchor="t"/>
-          <a:lstStyle/>
-          <a:p>
-            <a:pPr indent="0" marL="0">
-              <a:lnSpc>
-                <a:spcPts val="1800"/>
-              </a:lnSpc>
-              <a:buNone/>
-            </a:pPr>
-            <a:r>
-              <a:rPr lang="en-US" sz="1400" b="1" dirty="0">
+            <a:pPr indent="0" marL="0">
+              <a:buNone/>
+            </a:pPr>
+            <a:r>
+              <a:rPr lang="en-US" sz="1350" b="1" dirty="0">
                 <a:solidFill>
                   <a:srgbClr val="FFFFFF"/>
                 </a:solidFill>
@@ -17473,69 +18413,46 @@
                 <a:ea typeface="Pretendard" pitchFamily="34" charset="-122"/>
                 <a:cs typeface="Pretendard" pitchFamily="34" charset="-120"/>
               </a:rPr>
-              <a:t>조사 결과는 표현 방식을 정할 뿐,</a:t>
-            </a:r>
-            <a:endParaRPr lang="en-US" sz="1400" dirty="0"/>
-          </a:p>
-          <a:p>
-            <a:pPr indent="0" marL="0">
-              <a:lnSpc>
-                <a:spcPts val="1800"/>
-              </a:lnSpc>
-              <a:buNone/>
-            </a:pPr>
-            <a:r>
-              <a:rPr lang="en-US" sz="1400" b="1" dirty="0">
-                <a:solidFill>
-                  <a:srgbClr val="FFFFFF"/>
-                </a:solidFill>
-                <a:latin typeface="Pretendard" pitchFamily="34" charset="0"/>
-                <a:ea typeface="Pretendard" pitchFamily="34" charset="-122"/>
-                <a:cs typeface="Pretendard" pitchFamily="34" charset="-120"/>
-              </a:rPr>
-              <a:t>전략의 방향을 바꾸지 않는다.</a:t>
-            </a:r>
-            <a:endParaRPr lang="en-US" sz="1400" dirty="0"/>
-          </a:p>
-        </p:txBody>
-      </p:sp>
-      <p:sp>
-        <p:nvSpPr>
-          <p:cNvPr id="22" name="Text 20"/>
-          <p:cNvSpPr/>
-          <p:nvPr/>
-        </p:nvSpPr>
-        <p:spPr>
-          <a:xfrm>
-            <a:off x="5413248" y="5541264"/>
-            <a:ext cx="5845759" cy="365760"/>
-          </a:xfrm>
-          <a:prstGeom prst="rect">
-            <a:avLst/>
-          </a:prstGeom>
-          <a:noFill/>
-          <a:ln/>
-        </p:spPr>
-        <p:txBody>
-          <a:bodyPr wrap="square" lIns="0" tIns="0" rIns="0" bIns="0" rtlCol="0" anchor="t"/>
+              <a:t>인지도가 낮아도 현재 효과가 높다면, 신규 마스코트로 활용한다.</a:t>
+            </a:r>
+            <a:endParaRPr lang="en-US" sz="1350" dirty="0"/>
+          </a:p>
+        </p:txBody>
+      </p:sp>
+      <p:sp>
+        <p:nvSpPr>
+          <p:cNvPr id="48" name="Text 46"/>
+          <p:cNvSpPr/>
+          <p:nvPr/>
+        </p:nvSpPr>
+        <p:spPr>
+          <a:xfrm>
+            <a:off x="6595567" y="5504688"/>
+            <a:ext cx="4645152" cy="658368"/>
+          </a:xfrm>
+          <a:prstGeom prst="rect">
+            <a:avLst/>
+          </a:prstGeom>
+          <a:noFill/>
+          <a:ln/>
+        </p:spPr>
+        <p:txBody>
+          <a:bodyPr wrap="square" lIns="0" tIns="0" rIns="0" bIns="0" rtlCol="0" anchor="ctr"/>
           <a:lstStyle/>
           <a:p>
             <a:pPr algn="r" indent="0" marL="0">
-              <a:lnSpc>
-                <a:spcPts val="1300"/>
-              </a:lnSpc>
               <a:buNone/>
             </a:pPr>
             <a:r>
               <a:rPr lang="en-US" sz="1000" dirty="0">
                 <a:solidFill>
-                  <a:srgbClr val="E3ECFF"/>
-                </a:solidFill>
-                <a:latin typeface="Pretendard" pitchFamily="34" charset="0"/>
-                <a:ea typeface="Pretendard" pitchFamily="34" charset="-122"/>
-                <a:cs typeface="Pretendard" pitchFamily="34" charset="-120"/>
-              </a:rPr>
-              <a:t>두 경우 모두 그대로 간다 — 펭귄의 역할 정의 · 캠페인 구조(발견 → 관계) · 제품 메시지(준비를 끝내주는 가전)</a:t>
+                  <a:srgbClr val="A6A7AC"/>
+                </a:solidFill>
+                <a:latin typeface="Pretendard" pitchFamily="34" charset="0"/>
+                <a:ea typeface="Pretendard" pitchFamily="34" charset="-122"/>
+                <a:cs typeface="Pretendard" pitchFamily="34" charset="-120"/>
+              </a:rPr>
+              <a:t>펭귄은 전제가 아니라, 검증을 통과해야 하는 브랜드 자산 후보다.</a:t>
             </a:r>
             <a:endParaRPr lang="en-US" sz="1000" dirty="0"/>
           </a:p>
@@ -17543,46 +18460,7 @@
       </p:sp>
       <p:sp>
         <p:nvSpPr>
-          <p:cNvPr id="23" name="Text 21"/>
-          <p:cNvSpPr/>
-          <p:nvPr/>
-        </p:nvSpPr>
-        <p:spPr>
-          <a:xfrm>
-            <a:off x="658368" y="6181344"/>
-            <a:ext cx="10874959" cy="219456"/>
-          </a:xfrm>
-          <a:prstGeom prst="rect">
-            <a:avLst/>
-          </a:prstGeom>
-          <a:noFill/>
-          <a:ln/>
-        </p:spPr>
-        <p:txBody>
-          <a:bodyPr wrap="square" lIns="0" tIns="0" rIns="0" bIns="0" rtlCol="0" anchor="t"/>
-          <a:lstStyle/>
-          <a:p>
-            <a:pPr indent="0" marL="0">
-              <a:buNone/>
-            </a:pPr>
-            <a:r>
-              <a:rPr lang="en-US" sz="800" dirty="0">
-                <a:solidFill>
-                  <a:srgbClr val="959595"/>
-                </a:solidFill>
-                <a:latin typeface="Pretendard" pitchFamily="34" charset="0"/>
-                <a:ea typeface="Pretendard" pitchFamily="34" charset="-122"/>
-                <a:cs typeface="Pretendard" pitchFamily="34" charset="-120"/>
-              </a:rPr>
-              <a:t>측정은 구별 자산(Distinctive Brand Assets)의 두 축 — 인지도와 고유성 — 을 따른다(Romaniuk, Ehrenberg-Bass). 지표: 비보조 펭귄 회상률 · 청호나이스 연결률 · 얼음정수기 연상 · 현대화 시안 선호 · 노출 전후 제품 관심 · 프리미엄 이미지 훼손 우려</a:t>
-            </a:r>
-            <a:endParaRPr lang="en-US" sz="800" dirty="0"/>
-          </a:p>
-        </p:txBody>
-      </p:sp>
-      <p:sp>
-        <p:nvSpPr>
-          <p:cNvPr id="24" name="Text 22"/>
+          <p:cNvPr id="49" name="Text 47"/>
           <p:cNvSpPr/>
           <p:nvPr/>
         </p:nvSpPr>
@@ -17621,7 +18499,7 @@
       </p:sp>
       <p:sp>
         <p:nvSpPr>
-          <p:cNvPr id="25" name="Text 23"/>
+          <p:cNvPr id="50" name="Text 48"/>
           <p:cNvSpPr/>
           <p:nvPr/>
         </p:nvSpPr>

--- a/청호나이스-브랜드전략-제안.pptx
+++ b/청호나이스-브랜드전략-제안.pptx
@@ -17638,35 +17638,35 @@
           <p:nvPr/>
         </p:nvSpPr>
         <p:spPr>
-          <a:xfrm rot="16200000">
-            <a:off x="3511296" y="3419856"/>
-            <a:ext cx="2194560" cy="237744"/>
-          </a:xfrm>
-          <a:prstGeom prst="rect">
-            <a:avLst/>
-          </a:prstGeom>
-          <a:noFill/>
-          <a:ln/>
-        </p:spPr>
-        <p:txBody>
-          <a:bodyPr wrap="square" lIns="0" tIns="0" rIns="0" bIns="0" rtlCol="0" anchor="ctr"/>
-          <a:lstStyle/>
-          <a:p>
-            <a:pPr algn="ctr" indent="0" marL="0">
-              <a:buNone/>
-            </a:pPr>
-            <a:r>
-              <a:rPr lang="en-US" sz="950" b="1" dirty="0">
-                <a:solidFill>
-                  <a:srgbClr val="707070"/>
-                </a:solidFill>
-                <a:latin typeface="Pretendard" pitchFamily="34" charset="0"/>
-                <a:ea typeface="Pretendard" pitchFamily="34" charset="-122"/>
-                <a:cs typeface="Pretendard" pitchFamily="34" charset="-120"/>
-              </a:rPr>
-              <a:t>현재 브랜드 효과 →</a:t>
-            </a:r>
-            <a:endParaRPr lang="en-US" sz="950" dirty="0"/>
+          <a:xfrm>
+            <a:off x="4517136" y="2084832"/>
+            <a:ext cx="7016191" cy="219456"/>
+          </a:xfrm>
+          <a:prstGeom prst="rect">
+            <a:avLst/>
+          </a:prstGeom>
+          <a:noFill/>
+          <a:ln/>
+        </p:spPr>
+        <p:txBody>
+          <a:bodyPr wrap="square" lIns="0" tIns="0" rIns="0" bIns="0" rtlCol="0" anchor="t"/>
+          <a:lstStyle/>
+          <a:p>
+            <a:pPr indent="0" marL="0">
+              <a:buNone/>
+            </a:pPr>
+            <a:r>
+              <a:rPr lang="en-US" sz="1050" b="1" dirty="0">
+                <a:solidFill>
+                  <a:srgbClr val="191919"/>
+                </a:solidFill>
+                <a:latin typeface="Pretendard" pitchFamily="34" charset="0"/>
+                <a:ea typeface="Pretendard" pitchFamily="34" charset="-122"/>
+                <a:cs typeface="Pretendard" pitchFamily="34" charset="-120"/>
+              </a:rPr>
+              <a:t>검증 결과에 따른 펭귄 활용 수준</a:t>
+            </a:r>
+            <a:endParaRPr lang="en-US" sz="1050" dirty="0"/>
           </a:p>
         </p:txBody>
       </p:sp>
@@ -17678,12 +17678,215 @@
         </p:nvSpPr>
         <p:spPr>
           <a:xfrm>
-            <a:off x="4791456" y="2084832"/>
-            <a:ext cx="3288640" cy="1371600"/>
+            <a:off x="4517136" y="2359152"/>
+            <a:ext cx="7016191" cy="694944"/>
           </a:xfrm>
           <a:prstGeom prst="roundRect">
             <a:avLst>
-              <a:gd name="adj" fmla="val 4667"/>
+              <a:gd name="adj" fmla="val 9211"/>
+            </a:avLst>
+          </a:prstGeom>
+          <a:solidFill>
+            <a:srgbClr val="0057FF"/>
+          </a:solidFill>
+          <a:ln/>
+        </p:spPr>
+      </p:sp>
+      <p:sp>
+        <p:nvSpPr>
+          <p:cNvPr id="28" name="Shape 26"/>
+          <p:cNvSpPr/>
+          <p:nvPr/>
+        </p:nvSpPr>
+        <p:spPr>
+          <a:xfrm>
+            <a:off x="4681728" y="2587752"/>
+            <a:ext cx="566928" cy="237744"/>
+          </a:xfrm>
+          <a:prstGeom prst="roundRect">
+            <a:avLst>
+              <a:gd name="adj" fmla="val 50000"/>
+            </a:avLst>
+          </a:prstGeom>
+          <a:solidFill>
+            <a:srgbClr val="FFFFFF"/>
+          </a:solidFill>
+          <a:ln/>
+        </p:spPr>
+      </p:sp>
+      <p:sp>
+        <p:nvSpPr>
+          <p:cNvPr id="29" name="Text 27"/>
+          <p:cNvSpPr/>
+          <p:nvPr/>
+        </p:nvSpPr>
+        <p:spPr>
+          <a:xfrm>
+            <a:off x="4681728" y="2587752"/>
+            <a:ext cx="566928" cy="237744"/>
+          </a:xfrm>
+          <a:prstGeom prst="rect">
+            <a:avLst/>
+          </a:prstGeom>
+          <a:noFill/>
+          <a:ln/>
+        </p:spPr>
+        <p:txBody>
+          <a:bodyPr wrap="square" lIns="0" tIns="0" rIns="0" bIns="0" rtlCol="0" anchor="ctr"/>
+          <a:lstStyle/>
+          <a:p>
+            <a:pPr algn="ctr" indent="0" marL="0">
+              <a:buNone/>
+            </a:pPr>
+            <a:r>
+              <a:rPr lang="en-US" sz="900" b="1" dirty="0">
+                <a:solidFill>
+                  <a:srgbClr val="0057FF"/>
+                </a:solidFill>
+                <a:latin typeface="Pretendard" pitchFamily="34" charset="0"/>
+                <a:ea typeface="Pretendard" pitchFamily="34" charset="-122"/>
+                <a:cs typeface="Pretendard" pitchFamily="34" charset="-120"/>
+              </a:rPr>
+              <a:t>적극</a:t>
+            </a:r>
+            <a:endParaRPr lang="en-US" sz="900" dirty="0"/>
+          </a:p>
+        </p:txBody>
+      </p:sp>
+      <p:sp>
+        <p:nvSpPr>
+          <p:cNvPr id="30" name="Text 28"/>
+          <p:cNvSpPr/>
+          <p:nvPr/>
+        </p:nvSpPr>
+        <p:spPr>
+          <a:xfrm>
+            <a:off x="5468112" y="2468880"/>
+            <a:ext cx="4775911" cy="237744"/>
+          </a:xfrm>
+          <a:prstGeom prst="rect">
+            <a:avLst/>
+          </a:prstGeom>
+          <a:noFill/>
+          <a:ln/>
+        </p:spPr>
+        <p:txBody>
+          <a:bodyPr wrap="square" lIns="0" tIns="0" rIns="0" bIns="0" rtlCol="0" anchor="t"/>
+          <a:lstStyle/>
+          <a:p>
+            <a:pPr indent="0" marL="0">
+              <a:buNone/>
+            </a:pPr>
+            <a:r>
+              <a:rPr lang="en-US" sz="1200" b="1" dirty="0">
+                <a:solidFill>
+                  <a:srgbClr val="FFFFFF"/>
+                </a:solidFill>
+                <a:latin typeface="Pretendard" pitchFamily="34" charset="0"/>
+                <a:ea typeface="Pretendard" pitchFamily="34" charset="-122"/>
+                <a:cs typeface="Pretendard" pitchFamily="34" charset="-120"/>
+              </a:rPr>
+              <a:t>헤리티지 리바이벌</a:t>
+            </a:r>
+            <a:endParaRPr lang="en-US" sz="1200" dirty="0"/>
+          </a:p>
+        </p:txBody>
+      </p:sp>
+      <p:sp>
+        <p:nvSpPr>
+          <p:cNvPr id="31" name="Text 29"/>
+          <p:cNvSpPr/>
+          <p:nvPr/>
+        </p:nvSpPr>
+        <p:spPr>
+          <a:xfrm>
+            <a:off x="5468112" y="2724912"/>
+            <a:ext cx="4775911" cy="256032"/>
+          </a:xfrm>
+          <a:prstGeom prst="rect">
+            <a:avLst/>
+          </a:prstGeom>
+          <a:noFill/>
+          <a:ln/>
+        </p:spPr>
+        <p:txBody>
+          <a:bodyPr wrap="square" lIns="0" tIns="0" rIns="0" bIns="0" rtlCol="0" anchor="t"/>
+          <a:lstStyle/>
+          <a:p>
+            <a:pPr indent="0" marL="0">
+              <a:lnSpc>
+                <a:spcPts val="1150"/>
+              </a:lnSpc>
+              <a:buNone/>
+            </a:pPr>
+            <a:r>
+              <a:rPr lang="en-US" sz="850" dirty="0">
+                <a:solidFill>
+                  <a:srgbClr val="E3ECFF"/>
+                </a:solidFill>
+                <a:latin typeface="Pretendard" pitchFamily="34" charset="0"/>
+                <a:ea typeface="Pretendard" pitchFamily="34" charset="-122"/>
+                <a:cs typeface="Pretendard" pitchFamily="34" charset="-120"/>
+              </a:rPr>
+              <a:t>과거 광고를 오마주로 전면에. ‘그때 그 펭귄’ 메시지로 헤리티지 활용.</a:t>
+            </a:r>
+            <a:endParaRPr lang="en-US" sz="850" dirty="0"/>
+          </a:p>
+        </p:txBody>
+      </p:sp>
+      <p:sp>
+        <p:nvSpPr>
+          <p:cNvPr id="32" name="Text 30"/>
+          <p:cNvSpPr/>
+          <p:nvPr/>
+        </p:nvSpPr>
+        <p:spPr>
+          <a:xfrm>
+            <a:off x="10390327" y="2596896"/>
+            <a:ext cx="960120" cy="219456"/>
+          </a:xfrm>
+          <a:prstGeom prst="rect">
+            <a:avLst/>
+          </a:prstGeom>
+          <a:noFill/>
+          <a:ln/>
+        </p:spPr>
+        <p:txBody>
+          <a:bodyPr wrap="square" lIns="0" tIns="0" rIns="0" bIns="0" rtlCol="0" anchor="ctr"/>
+          <a:lstStyle/>
+          <a:p>
+            <a:pPr algn="r" indent="0" marL="0">
+              <a:buNone/>
+            </a:pPr>
+            <a:r>
+              <a:rPr lang="en-US" sz="850" b="1" dirty="0">
+                <a:solidFill>
+                  <a:srgbClr val="CFE0FF"/>
+                </a:solidFill>
+                <a:latin typeface="Pretendard" pitchFamily="34" charset="0"/>
+                <a:ea typeface="Pretendard" pitchFamily="34" charset="-122"/>
+                <a:cs typeface="Pretendard" pitchFamily="34" charset="-120"/>
+              </a:rPr>
+              <a:t>기억 O · 효과 O</a:t>
+            </a:r>
+            <a:endParaRPr lang="en-US" sz="850" dirty="0"/>
+          </a:p>
+        </p:txBody>
+      </p:sp>
+      <p:sp>
+        <p:nvSpPr>
+          <p:cNvPr id="33" name="Shape 31"/>
+          <p:cNvSpPr/>
+          <p:nvPr/>
+        </p:nvSpPr>
+        <p:spPr>
+          <a:xfrm>
+            <a:off x="4517136" y="3145536"/>
+            <a:ext cx="7016191" cy="694944"/>
+          </a:xfrm>
+          <a:prstGeom prst="roundRect">
+            <a:avLst>
+              <a:gd name="adj" fmla="val 9211"/>
             </a:avLst>
           </a:prstGeom>
           <a:solidFill>
@@ -17699,138 +17902,18 @@
       </p:sp>
       <p:sp>
         <p:nvSpPr>
-          <p:cNvPr id="28" name="Text 26"/>
-          <p:cNvSpPr/>
-          <p:nvPr/>
-        </p:nvSpPr>
-        <p:spPr>
-          <a:xfrm>
-            <a:off x="4974336" y="2212848"/>
-            <a:ext cx="2922880" cy="182880"/>
-          </a:xfrm>
-          <a:prstGeom prst="rect">
-            <a:avLst/>
-          </a:prstGeom>
-          <a:noFill/>
-          <a:ln/>
-        </p:spPr>
-        <p:txBody>
-          <a:bodyPr wrap="square" lIns="0" tIns="0" rIns="0" bIns="0" rtlCol="0" anchor="t"/>
-          <a:lstStyle/>
-          <a:p>
-            <a:pPr indent="0" marL="0">
-              <a:buNone/>
-            </a:pPr>
-            <a:r>
-              <a:rPr lang="en-US" sz="800" b="1" dirty="0">
-                <a:solidFill>
-                  <a:srgbClr val="0057FF"/>
-                </a:solidFill>
-                <a:latin typeface="Pretendard" pitchFamily="34" charset="0"/>
-                <a:ea typeface="Pretendard" pitchFamily="34" charset="-122"/>
-                <a:cs typeface="Pretendard" pitchFamily="34" charset="-120"/>
-              </a:rPr>
-              <a:t>인지 낮음 · 효과 높음</a:t>
-            </a:r>
-            <a:endParaRPr lang="en-US" sz="800" dirty="0"/>
-          </a:p>
-        </p:txBody>
-      </p:sp>
-      <p:sp>
-        <p:nvSpPr>
-          <p:cNvPr id="29" name="Text 27"/>
-          <p:cNvSpPr/>
-          <p:nvPr/>
-        </p:nvSpPr>
-        <p:spPr>
-          <a:xfrm>
-            <a:off x="4974336" y="2414016"/>
-            <a:ext cx="2922880" cy="237744"/>
-          </a:xfrm>
-          <a:prstGeom prst="rect">
-            <a:avLst/>
-          </a:prstGeom>
-          <a:noFill/>
-          <a:ln/>
-        </p:spPr>
-        <p:txBody>
-          <a:bodyPr wrap="square" lIns="0" tIns="0" rIns="0" bIns="0" rtlCol="0" anchor="t"/>
-          <a:lstStyle/>
-          <a:p>
-            <a:pPr indent="0" marL="0">
-              <a:buNone/>
-            </a:pPr>
-            <a:r>
-              <a:rPr lang="en-US" sz="1250" b="1" dirty="0">
-                <a:solidFill>
-                  <a:srgbClr val="191919"/>
-                </a:solidFill>
-                <a:latin typeface="Pretendard" pitchFamily="34" charset="0"/>
-                <a:ea typeface="Pretendard" pitchFamily="34" charset="-122"/>
-                <a:cs typeface="Pretendard" pitchFamily="34" charset="-120"/>
-              </a:rPr>
-              <a:t>과거 자산 기반 신규 마스코트</a:t>
-            </a:r>
-            <a:endParaRPr lang="en-US" sz="1250" dirty="0"/>
-          </a:p>
-        </p:txBody>
-      </p:sp>
-      <p:sp>
-        <p:nvSpPr>
-          <p:cNvPr id="30" name="Text 28"/>
-          <p:cNvSpPr/>
-          <p:nvPr/>
-        </p:nvSpPr>
-        <p:spPr>
-          <a:xfrm>
-            <a:off x="4974336" y="2688336"/>
-            <a:ext cx="2922880" cy="566928"/>
-          </a:xfrm>
-          <a:prstGeom prst="rect">
-            <a:avLst/>
-          </a:prstGeom>
-          <a:noFill/>
-          <a:ln/>
-        </p:spPr>
-        <p:txBody>
-          <a:bodyPr wrap="square" lIns="0" tIns="0" rIns="0" bIns="0" rtlCol="0" anchor="t"/>
-          <a:lstStyle/>
-          <a:p>
-            <a:pPr indent="0" marL="0">
-              <a:lnSpc>
-                <a:spcPts val="1100"/>
-              </a:lnSpc>
-              <a:buNone/>
-            </a:pPr>
-            <a:r>
-              <a:rPr lang="en-US" sz="850" dirty="0">
-                <a:solidFill>
-                  <a:srgbClr val="3C3C3C"/>
-                </a:solidFill>
-                <a:latin typeface="Pretendard" pitchFamily="34" charset="0"/>
-                <a:ea typeface="Pretendard" pitchFamily="34" charset="-122"/>
-                <a:cs typeface="Pretendard" pitchFamily="34" charset="-120"/>
-              </a:rPr>
-              <a:t>추억 마케팅은 빼고, 얼음정수기 역사에서 출발한 새 캐릭터로 소개한다. 제품과 함께 반복 노출해 브랜드 연결을 만든다.</a:t>
-            </a:r>
-            <a:endParaRPr lang="en-US" sz="850" dirty="0"/>
-          </a:p>
-        </p:txBody>
-      </p:sp>
-      <p:sp>
-        <p:nvSpPr>
-          <p:cNvPr id="31" name="Shape 29"/>
-          <p:cNvSpPr/>
-          <p:nvPr/>
-        </p:nvSpPr>
-        <p:spPr>
-          <a:xfrm>
-            <a:off x="8244688" y="2084832"/>
-            <a:ext cx="3288640" cy="1371600"/>
+          <p:cNvPr id="34" name="Shape 32"/>
+          <p:cNvSpPr/>
+          <p:nvPr/>
+        </p:nvSpPr>
+        <p:spPr>
+          <a:xfrm>
+            <a:off x="4681728" y="3374136"/>
+            <a:ext cx="566928" cy="237744"/>
           </a:xfrm>
           <a:prstGeom prst="roundRect">
             <a:avLst>
-              <a:gd name="adj" fmla="val 4667"/>
+              <a:gd name="adj" fmla="val 50000"/>
             </a:avLst>
           </a:prstGeom>
           <a:solidFill>
@@ -17841,69 +17924,30 @@
       </p:sp>
       <p:sp>
         <p:nvSpPr>
-          <p:cNvPr id="32" name="Text 30"/>
-          <p:cNvSpPr/>
-          <p:nvPr/>
-        </p:nvSpPr>
-        <p:spPr>
-          <a:xfrm>
-            <a:off x="8427568" y="2212848"/>
-            <a:ext cx="2922880" cy="182880"/>
-          </a:xfrm>
-          <a:prstGeom prst="rect">
-            <a:avLst/>
-          </a:prstGeom>
-          <a:noFill/>
-          <a:ln/>
-        </p:spPr>
-        <p:txBody>
-          <a:bodyPr wrap="square" lIns="0" tIns="0" rIns="0" bIns="0" rtlCol="0" anchor="t"/>
-          <a:lstStyle/>
-          <a:p>
-            <a:pPr indent="0" marL="0">
-              <a:buNone/>
-            </a:pPr>
-            <a:r>
-              <a:rPr lang="en-US" sz="800" b="1" dirty="0">
-                <a:solidFill>
-                  <a:srgbClr val="CFE0FF"/>
-                </a:solidFill>
-                <a:latin typeface="Pretendard" pitchFamily="34" charset="0"/>
-                <a:ea typeface="Pretendard" pitchFamily="34" charset="-122"/>
-                <a:cs typeface="Pretendard" pitchFamily="34" charset="-120"/>
-              </a:rPr>
-              <a:t>인지 높음 · 효과 높음</a:t>
-            </a:r>
-            <a:endParaRPr lang="en-US" sz="800" dirty="0"/>
-          </a:p>
-        </p:txBody>
-      </p:sp>
-      <p:sp>
-        <p:nvSpPr>
-          <p:cNvPr id="33" name="Text 31"/>
-          <p:cNvSpPr/>
-          <p:nvPr/>
-        </p:nvSpPr>
-        <p:spPr>
-          <a:xfrm>
-            <a:off x="8427568" y="2414016"/>
-            <a:ext cx="2922880" cy="237744"/>
-          </a:xfrm>
-          <a:prstGeom prst="rect">
-            <a:avLst/>
-          </a:prstGeom>
-          <a:noFill/>
-          <a:ln/>
-        </p:spPr>
-        <p:txBody>
-          <a:bodyPr wrap="square" lIns="0" tIns="0" rIns="0" bIns="0" rtlCol="0" anchor="t"/>
-          <a:lstStyle/>
-          <a:p>
-            <a:pPr indent="0" marL="0">
-              <a:buNone/>
-            </a:pPr>
-            <a:r>
-              <a:rPr lang="en-US" sz="1250" b="1" dirty="0">
+          <p:cNvPr id="35" name="Text 33"/>
+          <p:cNvSpPr/>
+          <p:nvPr/>
+        </p:nvSpPr>
+        <p:spPr>
+          <a:xfrm>
+            <a:off x="4681728" y="3374136"/>
+            <a:ext cx="566928" cy="237744"/>
+          </a:xfrm>
+          <a:prstGeom prst="rect">
+            <a:avLst/>
+          </a:prstGeom>
+          <a:noFill/>
+          <a:ln/>
+        </p:spPr>
+        <p:txBody>
+          <a:bodyPr wrap="square" lIns="0" tIns="0" rIns="0" bIns="0" rtlCol="0" anchor="ctr"/>
+          <a:lstStyle/>
+          <a:p>
+            <a:pPr algn="ctr" indent="0" marL="0">
+              <a:buNone/>
+            </a:pPr>
+            <a:r>
+              <a:rPr lang="en-US" sz="900" b="1" dirty="0">
                 <a:solidFill>
                   <a:srgbClr val="FFFFFF"/>
                 </a:solidFill>
@@ -17911,68 +17955,212 @@
                 <a:ea typeface="Pretendard" pitchFamily="34" charset="-122"/>
                 <a:cs typeface="Pretendard" pitchFamily="34" charset="-120"/>
               </a:rPr>
-              <a:t>헤리티지 리바이벌</a:t>
-            </a:r>
-            <a:endParaRPr lang="en-US" sz="1250" dirty="0"/>
-          </a:p>
-        </p:txBody>
-      </p:sp>
-      <p:sp>
-        <p:nvSpPr>
-          <p:cNvPr id="34" name="Text 32"/>
-          <p:cNvSpPr/>
-          <p:nvPr/>
-        </p:nvSpPr>
-        <p:spPr>
-          <a:xfrm>
-            <a:off x="8427568" y="2688336"/>
-            <a:ext cx="2922880" cy="566928"/>
-          </a:xfrm>
-          <a:prstGeom prst="rect">
-            <a:avLst/>
-          </a:prstGeom>
-          <a:noFill/>
-          <a:ln/>
-        </p:spPr>
-        <p:txBody>
-          <a:bodyPr wrap="square" lIns="0" tIns="0" rIns="0" bIns="0" rtlCol="0" anchor="t"/>
-          <a:lstStyle/>
-          <a:p>
-            <a:pPr indent="0" marL="0">
-              <a:lnSpc>
-                <a:spcPts val="1100"/>
-              </a:lnSpc>
-              <a:buNone/>
-            </a:pPr>
-            <a:r>
-              <a:rPr lang="en-US" sz="850" dirty="0">
-                <a:solidFill>
-                  <a:srgbClr val="E3ECFF"/>
-                </a:solidFill>
-                <a:latin typeface="Pretendard" pitchFamily="34" charset="0"/>
-                <a:ea typeface="Pretendard" pitchFamily="34" charset="-122"/>
-                <a:cs typeface="Pretendard" pitchFamily="34" charset="-120"/>
-              </a:rPr>
-              <a:t>과거 광고를 오마주로 전면에 세운다. ‘그때 그 펭귄’ 메시지로 청호나이스 헤리티지를 적극 활용한다.</a:t>
-            </a:r>
-            <a:endParaRPr lang="en-US" sz="850" dirty="0"/>
-          </a:p>
-        </p:txBody>
-      </p:sp>
-      <p:sp>
-        <p:nvSpPr>
-          <p:cNvPr id="35" name="Shape 33"/>
-          <p:cNvSpPr/>
-          <p:nvPr/>
-        </p:nvSpPr>
-        <p:spPr>
-          <a:xfrm>
-            <a:off x="4791456" y="3621024"/>
-            <a:ext cx="3288640" cy="1371600"/>
+              <a:t>기본</a:t>
+            </a:r>
+            <a:endParaRPr lang="en-US" sz="900" dirty="0"/>
+          </a:p>
+        </p:txBody>
+      </p:sp>
+      <p:sp>
+        <p:nvSpPr>
+          <p:cNvPr id="36" name="Text 34"/>
+          <p:cNvSpPr/>
+          <p:nvPr/>
+        </p:nvSpPr>
+        <p:spPr>
+          <a:xfrm>
+            <a:off x="5468112" y="3255264"/>
+            <a:ext cx="4775911" cy="237744"/>
+          </a:xfrm>
+          <a:prstGeom prst="rect">
+            <a:avLst/>
+          </a:prstGeom>
+          <a:noFill/>
+          <a:ln/>
+        </p:spPr>
+        <p:txBody>
+          <a:bodyPr wrap="square" lIns="0" tIns="0" rIns="0" bIns="0" rtlCol="0" anchor="t"/>
+          <a:lstStyle/>
+          <a:p>
+            <a:pPr indent="0" marL="0">
+              <a:buNone/>
+            </a:pPr>
+            <a:r>
+              <a:rPr lang="en-US" sz="1200" b="1" dirty="0">
+                <a:solidFill>
+                  <a:srgbClr val="191919"/>
+                </a:solidFill>
+                <a:latin typeface="Pretendard" pitchFamily="34" charset="0"/>
+                <a:ea typeface="Pretendard" pitchFamily="34" charset="-122"/>
+                <a:cs typeface="Pretendard" pitchFamily="34" charset="-120"/>
+              </a:rPr>
+              <a:t>과거 자산 기반 신규 마스코트</a:t>
+            </a:r>
+            <a:endParaRPr lang="en-US" sz="1200" dirty="0"/>
+          </a:p>
+        </p:txBody>
+      </p:sp>
+      <p:sp>
+        <p:nvSpPr>
+          <p:cNvPr id="37" name="Shape 35"/>
+          <p:cNvSpPr/>
+          <p:nvPr/>
+        </p:nvSpPr>
+        <p:spPr>
+          <a:xfrm>
+            <a:off x="7516368" y="3282696"/>
+            <a:ext cx="475488" cy="182880"/>
           </a:xfrm>
           <a:prstGeom prst="roundRect">
             <a:avLst>
-              <a:gd name="adj" fmla="val 4667"/>
+              <a:gd name="adj" fmla="val 50000"/>
+            </a:avLst>
+          </a:prstGeom>
+          <a:solidFill>
+            <a:srgbClr val="FFFFFF"/>
+          </a:solidFill>
+          <a:ln w="12700">
+            <a:solidFill>
+              <a:srgbClr val="0057FF"/>
+            </a:solidFill>
+            <a:prstDash val="solid"/>
+          </a:ln>
+        </p:spPr>
+      </p:sp>
+      <p:sp>
+        <p:nvSpPr>
+          <p:cNvPr id="38" name="Text 36"/>
+          <p:cNvSpPr/>
+          <p:nvPr/>
+        </p:nvSpPr>
+        <p:spPr>
+          <a:xfrm>
+            <a:off x="7516368" y="3282696"/>
+            <a:ext cx="475488" cy="182880"/>
+          </a:xfrm>
+          <a:prstGeom prst="rect">
+            <a:avLst/>
+          </a:prstGeom>
+          <a:noFill/>
+          <a:ln/>
+        </p:spPr>
+        <p:txBody>
+          <a:bodyPr wrap="square" lIns="0" tIns="0" rIns="0" bIns="0" rtlCol="0" anchor="ctr"/>
+          <a:lstStyle/>
+          <a:p>
+            <a:pPr algn="ctr" indent="0" marL="0">
+              <a:buNone/>
+            </a:pPr>
+            <a:r>
+              <a:rPr lang="en-US" sz="750" b="1" dirty="0">
+                <a:solidFill>
+                  <a:srgbClr val="0057FF"/>
+                </a:solidFill>
+                <a:latin typeface="Pretendard" pitchFamily="34" charset="0"/>
+                <a:ea typeface="Pretendard" pitchFamily="34" charset="-122"/>
+                <a:cs typeface="Pretendard" pitchFamily="34" charset="-120"/>
+              </a:rPr>
+              <a:t>유력</a:t>
+            </a:r>
+            <a:endParaRPr lang="en-US" sz="750" dirty="0"/>
+          </a:p>
+        </p:txBody>
+      </p:sp>
+      <p:sp>
+        <p:nvSpPr>
+          <p:cNvPr id="39" name="Text 37"/>
+          <p:cNvSpPr/>
+          <p:nvPr/>
+        </p:nvSpPr>
+        <p:spPr>
+          <a:xfrm>
+            <a:off x="5468112" y="3511296"/>
+            <a:ext cx="4775911" cy="256032"/>
+          </a:xfrm>
+          <a:prstGeom prst="rect">
+            <a:avLst/>
+          </a:prstGeom>
+          <a:noFill/>
+          <a:ln/>
+        </p:spPr>
+        <p:txBody>
+          <a:bodyPr wrap="square" lIns="0" tIns="0" rIns="0" bIns="0" rtlCol="0" anchor="t"/>
+          <a:lstStyle/>
+          <a:p>
+            <a:pPr indent="0" marL="0">
+              <a:lnSpc>
+                <a:spcPts val="1150"/>
+              </a:lnSpc>
+              <a:buNone/>
+            </a:pPr>
+            <a:r>
+              <a:rPr lang="en-US" sz="850" dirty="0">
+                <a:solidFill>
+                  <a:srgbClr val="3C3C3C"/>
+                </a:solidFill>
+                <a:latin typeface="Pretendard" pitchFamily="34" charset="0"/>
+                <a:ea typeface="Pretendard" pitchFamily="34" charset="-122"/>
+                <a:cs typeface="Pretendard" pitchFamily="34" charset="-120"/>
+              </a:rPr>
+              <a:t>추억 대신 현재 효용으로 소개. 제품과 함께 반복 노출해 브랜드 연결을 만든다.</a:t>
+            </a:r>
+            <a:endParaRPr lang="en-US" sz="850" dirty="0"/>
+          </a:p>
+        </p:txBody>
+      </p:sp>
+      <p:sp>
+        <p:nvSpPr>
+          <p:cNvPr id="40" name="Text 38"/>
+          <p:cNvSpPr/>
+          <p:nvPr/>
+        </p:nvSpPr>
+        <p:spPr>
+          <a:xfrm>
+            <a:off x="10390327" y="3383280"/>
+            <a:ext cx="960120" cy="219456"/>
+          </a:xfrm>
+          <a:prstGeom prst="rect">
+            <a:avLst/>
+          </a:prstGeom>
+          <a:noFill/>
+          <a:ln/>
+        </p:spPr>
+        <p:txBody>
+          <a:bodyPr wrap="square" lIns="0" tIns="0" rIns="0" bIns="0" rtlCol="0" anchor="ctr"/>
+          <a:lstStyle/>
+          <a:p>
+            <a:pPr algn="r" indent="0" marL="0">
+              <a:buNone/>
+            </a:pPr>
+            <a:r>
+              <a:rPr lang="en-US" sz="850" b="1" dirty="0">
+                <a:solidFill>
+                  <a:srgbClr val="0057FF"/>
+                </a:solidFill>
+                <a:latin typeface="Pretendard" pitchFamily="34" charset="0"/>
+                <a:ea typeface="Pretendard" pitchFamily="34" charset="-122"/>
+                <a:cs typeface="Pretendard" pitchFamily="34" charset="-120"/>
+              </a:rPr>
+              <a:t>기억 X · 효과 O</a:t>
+            </a:r>
+            <a:endParaRPr lang="en-US" sz="850" dirty="0"/>
+          </a:p>
+        </p:txBody>
+      </p:sp>
+      <p:sp>
+        <p:nvSpPr>
+          <p:cNvPr id="41" name="Shape 39"/>
+          <p:cNvSpPr/>
+          <p:nvPr/>
+        </p:nvSpPr>
+        <p:spPr>
+          <a:xfrm>
+            <a:off x="4517136" y="3931920"/>
+            <a:ext cx="7016191" cy="694944"/>
+          </a:xfrm>
+          <a:prstGeom prst="roundRect">
+            <a:avLst>
+              <a:gd name="adj" fmla="val 9211"/>
             </a:avLst>
           </a:prstGeom>
           <a:solidFill>
@@ -17988,138 +18176,199 @@
       </p:sp>
       <p:sp>
         <p:nvSpPr>
-          <p:cNvPr id="36" name="Text 34"/>
-          <p:cNvSpPr/>
-          <p:nvPr/>
-        </p:nvSpPr>
-        <p:spPr>
-          <a:xfrm>
-            <a:off x="4974336" y="3749040"/>
-            <a:ext cx="2922880" cy="182880"/>
-          </a:xfrm>
-          <a:prstGeom prst="rect">
-            <a:avLst/>
-          </a:prstGeom>
-          <a:noFill/>
-          <a:ln/>
-        </p:spPr>
-        <p:txBody>
-          <a:bodyPr wrap="square" lIns="0" tIns="0" rIns="0" bIns="0" rtlCol="0" anchor="t"/>
-          <a:lstStyle/>
-          <a:p>
-            <a:pPr indent="0" marL="0">
-              <a:buNone/>
-            </a:pPr>
-            <a:r>
-              <a:rPr lang="en-US" sz="800" b="1" dirty="0">
-                <a:solidFill>
-                  <a:srgbClr val="959595"/>
-                </a:solidFill>
-                <a:latin typeface="Pretendard" pitchFamily="34" charset="0"/>
-                <a:ea typeface="Pretendard" pitchFamily="34" charset="-122"/>
-                <a:cs typeface="Pretendard" pitchFamily="34" charset="-120"/>
-              </a:rPr>
-              <a:t>인지 낮음 · 효과 낮음</a:t>
-            </a:r>
-            <a:endParaRPr lang="en-US" sz="800" dirty="0"/>
-          </a:p>
-        </p:txBody>
-      </p:sp>
-      <p:sp>
-        <p:nvSpPr>
-          <p:cNvPr id="37" name="Text 35"/>
-          <p:cNvSpPr/>
-          <p:nvPr/>
-        </p:nvSpPr>
-        <p:spPr>
-          <a:xfrm>
-            <a:off x="4974336" y="3950208"/>
-            <a:ext cx="2922880" cy="237744"/>
-          </a:xfrm>
-          <a:prstGeom prst="rect">
-            <a:avLst/>
-          </a:prstGeom>
-          <a:noFill/>
-          <a:ln/>
-        </p:spPr>
-        <p:txBody>
-          <a:bodyPr wrap="square" lIns="0" tIns="0" rIns="0" bIns="0" rtlCol="0" anchor="t"/>
-          <a:lstStyle/>
-          <a:p>
-            <a:pPr indent="0" marL="0">
-              <a:buNone/>
-            </a:pPr>
-            <a:r>
-              <a:rPr lang="en-US" sz="1250" b="1" dirty="0">
-                <a:solidFill>
-                  <a:srgbClr val="707070"/>
-                </a:solidFill>
-                <a:latin typeface="Pretendard" pitchFamily="34" charset="0"/>
-                <a:ea typeface="Pretendard" pitchFamily="34" charset="-122"/>
-                <a:cs typeface="Pretendard" pitchFamily="34" charset="-120"/>
-              </a:rPr>
-              <a:t>메인 전략에서 제외</a:t>
-            </a:r>
-            <a:endParaRPr lang="en-US" sz="1250" dirty="0"/>
-          </a:p>
-        </p:txBody>
-      </p:sp>
-      <p:sp>
-        <p:nvSpPr>
-          <p:cNvPr id="38" name="Text 36"/>
-          <p:cNvSpPr/>
-          <p:nvPr/>
-        </p:nvSpPr>
-        <p:spPr>
-          <a:xfrm>
-            <a:off x="4974336" y="4224528"/>
-            <a:ext cx="2922880" cy="566928"/>
-          </a:xfrm>
-          <a:prstGeom prst="rect">
-            <a:avLst/>
-          </a:prstGeom>
-          <a:noFill/>
-          <a:ln/>
-        </p:spPr>
-        <p:txBody>
-          <a:bodyPr wrap="square" lIns="0" tIns="0" rIns="0" bIns="0" rtlCol="0" anchor="t"/>
-          <a:lstStyle/>
-          <a:p>
-            <a:pPr indent="0" marL="0">
-              <a:lnSpc>
-                <a:spcPts val="1100"/>
-              </a:lnSpc>
-              <a:buNone/>
-            </a:pPr>
-            <a:r>
-              <a:rPr lang="en-US" sz="850" dirty="0">
-                <a:solidFill>
-                  <a:srgbClr val="3C3C3C"/>
-                </a:solidFill>
-                <a:latin typeface="Pretendard" pitchFamily="34" charset="0"/>
-                <a:ea typeface="Pretendard" pitchFamily="34" charset="-122"/>
-                <a:cs typeface="Pretendard" pitchFamily="34" charset="-120"/>
-              </a:rPr>
-              <a:t>펭귄 중심 캠페인은 접고, 제품 편익 중심 커뮤니케이션으로 전환한다.</a:t>
-            </a:r>
-            <a:endParaRPr lang="en-US" sz="850" dirty="0"/>
-          </a:p>
-        </p:txBody>
-      </p:sp>
-      <p:sp>
-        <p:nvSpPr>
-          <p:cNvPr id="39" name="Shape 37"/>
-          <p:cNvSpPr/>
-          <p:nvPr/>
-        </p:nvSpPr>
-        <p:spPr>
-          <a:xfrm>
-            <a:off x="8244688" y="3621024"/>
-            <a:ext cx="3288640" cy="1371600"/>
+          <p:cNvPr id="42" name="Shape 40"/>
+          <p:cNvSpPr/>
+          <p:nvPr/>
+        </p:nvSpPr>
+        <p:spPr>
+          <a:xfrm>
+            <a:off x="4681728" y="4160520"/>
+            <a:ext cx="566928" cy="237744"/>
           </a:xfrm>
           <a:prstGeom prst="roundRect">
             <a:avLst>
-              <a:gd name="adj" fmla="val 4667"/>
+              <a:gd name="adj" fmla="val 50000"/>
+            </a:avLst>
+          </a:prstGeom>
+          <a:solidFill>
+            <a:srgbClr val="F0F0F0"/>
+          </a:solidFill>
+          <a:ln/>
+        </p:spPr>
+      </p:sp>
+      <p:sp>
+        <p:nvSpPr>
+          <p:cNvPr id="43" name="Text 41"/>
+          <p:cNvSpPr/>
+          <p:nvPr/>
+        </p:nvSpPr>
+        <p:spPr>
+          <a:xfrm>
+            <a:off x="4681728" y="4160520"/>
+            <a:ext cx="566928" cy="237744"/>
+          </a:xfrm>
+          <a:prstGeom prst="rect">
+            <a:avLst/>
+          </a:prstGeom>
+          <a:noFill/>
+          <a:ln/>
+        </p:spPr>
+        <p:txBody>
+          <a:bodyPr wrap="square" lIns="0" tIns="0" rIns="0" bIns="0" rtlCol="0" anchor="ctr"/>
+          <a:lstStyle/>
+          <a:p>
+            <a:pPr algn="ctr" indent="0" marL="0">
+              <a:buNone/>
+            </a:pPr>
+            <a:r>
+              <a:rPr lang="en-US" sz="900" b="1" dirty="0">
+                <a:solidFill>
+                  <a:srgbClr val="707070"/>
+                </a:solidFill>
+                <a:latin typeface="Pretendard" pitchFamily="34" charset="0"/>
+                <a:ea typeface="Pretendard" pitchFamily="34" charset="-122"/>
+                <a:cs typeface="Pretendard" pitchFamily="34" charset="-120"/>
+              </a:rPr>
+              <a:t>제한</a:t>
+            </a:r>
+            <a:endParaRPr lang="en-US" sz="900" dirty="0"/>
+          </a:p>
+        </p:txBody>
+      </p:sp>
+      <p:sp>
+        <p:nvSpPr>
+          <p:cNvPr id="44" name="Text 42"/>
+          <p:cNvSpPr/>
+          <p:nvPr/>
+        </p:nvSpPr>
+        <p:spPr>
+          <a:xfrm>
+            <a:off x="5468112" y="4041648"/>
+            <a:ext cx="4775911" cy="237744"/>
+          </a:xfrm>
+          <a:prstGeom prst="rect">
+            <a:avLst/>
+          </a:prstGeom>
+          <a:noFill/>
+          <a:ln/>
+        </p:spPr>
+        <p:txBody>
+          <a:bodyPr wrap="square" lIns="0" tIns="0" rIns="0" bIns="0" rtlCol="0" anchor="t"/>
+          <a:lstStyle/>
+          <a:p>
+            <a:pPr indent="0" marL="0">
+              <a:buNone/>
+            </a:pPr>
+            <a:r>
+              <a:rPr lang="en-US" sz="1200" b="1" dirty="0">
+                <a:solidFill>
+                  <a:srgbClr val="707070"/>
+                </a:solidFill>
+                <a:latin typeface="Pretendard" pitchFamily="34" charset="0"/>
+                <a:ea typeface="Pretendard" pitchFamily="34" charset="-122"/>
+                <a:cs typeface="Pretendard" pitchFamily="34" charset="-120"/>
+              </a:rPr>
+              <a:t>광고 아카이브로 제한</a:t>
+            </a:r>
+            <a:endParaRPr lang="en-US" sz="1200" dirty="0"/>
+          </a:p>
+        </p:txBody>
+      </p:sp>
+      <p:sp>
+        <p:nvSpPr>
+          <p:cNvPr id="45" name="Text 43"/>
+          <p:cNvSpPr/>
+          <p:nvPr/>
+        </p:nvSpPr>
+        <p:spPr>
+          <a:xfrm>
+            <a:off x="5468112" y="4297680"/>
+            <a:ext cx="4775911" cy="256032"/>
+          </a:xfrm>
+          <a:prstGeom prst="rect">
+            <a:avLst/>
+          </a:prstGeom>
+          <a:noFill/>
+          <a:ln/>
+        </p:spPr>
+        <p:txBody>
+          <a:bodyPr wrap="square" lIns="0" tIns="0" rIns="0" bIns="0" rtlCol="0" anchor="t"/>
+          <a:lstStyle/>
+          <a:p>
+            <a:pPr indent="0" marL="0">
+              <a:lnSpc>
+                <a:spcPts val="1150"/>
+              </a:lnSpc>
+              <a:buNone/>
+            </a:pPr>
+            <a:r>
+              <a:rPr lang="en-US" sz="850" dirty="0">
+                <a:solidFill>
+                  <a:srgbClr val="3C3C3C"/>
+                </a:solidFill>
+                <a:latin typeface="Pretendard" pitchFamily="34" charset="0"/>
+                <a:ea typeface="Pretendard" pitchFamily="34" charset="-122"/>
+                <a:cs typeface="Pretendard" pitchFamily="34" charset="-120"/>
+              </a:rPr>
+              <a:t>브랜드 역사 콘텐츠와 팝업 아카이브 존에만 쓴다.</a:t>
+            </a:r>
+            <a:endParaRPr lang="en-US" sz="850" dirty="0"/>
+          </a:p>
+        </p:txBody>
+      </p:sp>
+      <p:sp>
+        <p:nvSpPr>
+          <p:cNvPr id="46" name="Text 44"/>
+          <p:cNvSpPr/>
+          <p:nvPr/>
+        </p:nvSpPr>
+        <p:spPr>
+          <a:xfrm>
+            <a:off x="10390327" y="4169664"/>
+            <a:ext cx="960120" cy="219456"/>
+          </a:xfrm>
+          <a:prstGeom prst="rect">
+            <a:avLst/>
+          </a:prstGeom>
+          <a:noFill/>
+          <a:ln/>
+        </p:spPr>
+        <p:txBody>
+          <a:bodyPr wrap="square" lIns="0" tIns="0" rIns="0" bIns="0" rtlCol="0" anchor="ctr"/>
+          <a:lstStyle/>
+          <a:p>
+            <a:pPr algn="r" indent="0" marL="0">
+              <a:buNone/>
+            </a:pPr>
+            <a:r>
+              <a:rPr lang="en-US" sz="850" b="1" dirty="0">
+                <a:solidFill>
+                  <a:srgbClr val="959595"/>
+                </a:solidFill>
+                <a:latin typeface="Pretendard" pitchFamily="34" charset="0"/>
+                <a:ea typeface="Pretendard" pitchFamily="34" charset="-122"/>
+                <a:cs typeface="Pretendard" pitchFamily="34" charset="-120"/>
+              </a:rPr>
+              <a:t>기억 O · 효과 X</a:t>
+            </a:r>
+            <a:endParaRPr lang="en-US" sz="850" dirty="0"/>
+          </a:p>
+        </p:txBody>
+      </p:sp>
+      <p:sp>
+        <p:nvSpPr>
+          <p:cNvPr id="47" name="Shape 45"/>
+          <p:cNvSpPr/>
+          <p:nvPr/>
+        </p:nvSpPr>
+        <p:spPr>
+          <a:xfrm>
+            <a:off x="4517136" y="4718304"/>
+            <a:ext cx="7016191" cy="694944"/>
+          </a:xfrm>
+          <a:prstGeom prst="roundRect">
+            <a:avLst>
+              <a:gd name="adj" fmla="val 9211"/>
             </a:avLst>
           </a:prstGeom>
           <a:solidFill>
@@ -18135,134 +18384,14 @@
       </p:sp>
       <p:sp>
         <p:nvSpPr>
-          <p:cNvPr id="40" name="Text 38"/>
-          <p:cNvSpPr/>
-          <p:nvPr/>
-        </p:nvSpPr>
-        <p:spPr>
-          <a:xfrm>
-            <a:off x="8427568" y="3749040"/>
-            <a:ext cx="2922880" cy="182880"/>
-          </a:xfrm>
-          <a:prstGeom prst="rect">
-            <a:avLst/>
-          </a:prstGeom>
-          <a:noFill/>
-          <a:ln/>
-        </p:spPr>
-        <p:txBody>
-          <a:bodyPr wrap="square" lIns="0" tIns="0" rIns="0" bIns="0" rtlCol="0" anchor="t"/>
-          <a:lstStyle/>
-          <a:p>
-            <a:pPr indent="0" marL="0">
-              <a:buNone/>
-            </a:pPr>
-            <a:r>
-              <a:rPr lang="en-US" sz="800" b="1" dirty="0">
-                <a:solidFill>
-                  <a:srgbClr val="959595"/>
-                </a:solidFill>
-                <a:latin typeface="Pretendard" pitchFamily="34" charset="0"/>
-                <a:ea typeface="Pretendard" pitchFamily="34" charset="-122"/>
-                <a:cs typeface="Pretendard" pitchFamily="34" charset="-120"/>
-              </a:rPr>
-              <a:t>인지 높음 · 효과 낮음</a:t>
-            </a:r>
-            <a:endParaRPr lang="en-US" sz="800" dirty="0"/>
-          </a:p>
-        </p:txBody>
-      </p:sp>
-      <p:sp>
-        <p:nvSpPr>
-          <p:cNvPr id="41" name="Text 39"/>
-          <p:cNvSpPr/>
-          <p:nvPr/>
-        </p:nvSpPr>
-        <p:spPr>
-          <a:xfrm>
-            <a:off x="8427568" y="3950208"/>
-            <a:ext cx="2922880" cy="237744"/>
-          </a:xfrm>
-          <a:prstGeom prst="rect">
-            <a:avLst/>
-          </a:prstGeom>
-          <a:noFill/>
-          <a:ln/>
-        </p:spPr>
-        <p:txBody>
-          <a:bodyPr wrap="square" lIns="0" tIns="0" rIns="0" bIns="0" rtlCol="0" anchor="t"/>
-          <a:lstStyle/>
-          <a:p>
-            <a:pPr indent="0" marL="0">
-              <a:buNone/>
-            </a:pPr>
-            <a:r>
-              <a:rPr lang="en-US" sz="1250" b="1" dirty="0">
-                <a:solidFill>
-                  <a:srgbClr val="707070"/>
-                </a:solidFill>
-                <a:latin typeface="Pretendard" pitchFamily="34" charset="0"/>
-                <a:ea typeface="Pretendard" pitchFamily="34" charset="-122"/>
-                <a:cs typeface="Pretendard" pitchFamily="34" charset="-120"/>
-              </a:rPr>
-              <a:t>광고 아카이브로 제한</a:t>
-            </a:r>
-            <a:endParaRPr lang="en-US" sz="1250" dirty="0"/>
-          </a:p>
-        </p:txBody>
-      </p:sp>
-      <p:sp>
-        <p:nvSpPr>
-          <p:cNvPr id="42" name="Text 40"/>
-          <p:cNvSpPr/>
-          <p:nvPr/>
-        </p:nvSpPr>
-        <p:spPr>
-          <a:xfrm>
-            <a:off x="8427568" y="4224528"/>
-            <a:ext cx="2922880" cy="566928"/>
-          </a:xfrm>
-          <a:prstGeom prst="rect">
-            <a:avLst/>
-          </a:prstGeom>
-          <a:noFill/>
-          <a:ln/>
-        </p:spPr>
-        <p:txBody>
-          <a:bodyPr wrap="square" lIns="0" tIns="0" rIns="0" bIns="0" rtlCol="0" anchor="t"/>
-          <a:lstStyle/>
-          <a:p>
-            <a:pPr indent="0" marL="0">
-              <a:lnSpc>
-                <a:spcPts val="1100"/>
-              </a:lnSpc>
-              <a:buNone/>
-            </a:pPr>
-            <a:r>
-              <a:rPr lang="en-US" sz="850" dirty="0">
-                <a:solidFill>
-                  <a:srgbClr val="3C3C3C"/>
-                </a:solidFill>
-                <a:latin typeface="Pretendard" pitchFamily="34" charset="0"/>
-                <a:ea typeface="Pretendard" pitchFamily="34" charset="-122"/>
-                <a:cs typeface="Pretendard" pitchFamily="34" charset="-120"/>
-              </a:rPr>
-              <a:t>브랜드 역사 콘텐츠, 팝업 아카이브 존, 오마주 영상의 짧은 장면에만 쓴다.</a:t>
-            </a:r>
-            <a:endParaRPr lang="en-US" sz="850" dirty="0"/>
-          </a:p>
-        </p:txBody>
-      </p:sp>
-      <p:sp>
-        <p:nvSpPr>
-          <p:cNvPr id="43" name="Shape 41"/>
-          <p:cNvSpPr/>
-          <p:nvPr/>
-        </p:nvSpPr>
-        <p:spPr>
-          <a:xfrm>
-            <a:off x="4974336" y="3127248"/>
-            <a:ext cx="1371600" cy="219456"/>
+          <p:cNvPr id="48" name="Shape 46"/>
+          <p:cNvSpPr/>
+          <p:nvPr/>
+        </p:nvSpPr>
+        <p:spPr>
+          <a:xfrm>
+            <a:off x="4681728" y="4946904"/>
+            <a:ext cx="566928" cy="237744"/>
           </a:xfrm>
           <a:prstGeom prst="roundRect">
             <a:avLst>
@@ -18270,26 +18399,21 @@
             </a:avLst>
           </a:prstGeom>
           <a:solidFill>
-            <a:srgbClr val="FFFFFF"/>
+            <a:srgbClr val="F0F0F0"/>
           </a:solidFill>
-          <a:ln w="12700">
-            <a:solidFill>
-              <a:srgbClr val="0057FF"/>
-            </a:solidFill>
-            <a:prstDash val="solid"/>
-          </a:ln>
-        </p:spPr>
-      </p:sp>
-      <p:sp>
-        <p:nvSpPr>
-          <p:cNvPr id="44" name="Text 42"/>
-          <p:cNvSpPr/>
-          <p:nvPr/>
-        </p:nvSpPr>
-        <p:spPr>
-          <a:xfrm>
-            <a:off x="4974336" y="3127248"/>
-            <a:ext cx="1371600" cy="219456"/>
+          <a:ln/>
+        </p:spPr>
+      </p:sp>
+      <p:sp>
+        <p:nvSpPr>
+          <p:cNvPr id="49" name="Text 47"/>
+          <p:cNvSpPr/>
+          <p:nvPr/>
+        </p:nvSpPr>
+        <p:spPr>
+          <a:xfrm>
+            <a:off x="4681728" y="4946904"/>
+            <a:ext cx="566928" cy="237744"/>
           </a:xfrm>
           <a:prstGeom prst="rect">
             <a:avLst/>
@@ -18305,46 +18429,7 @@
               <a:buNone/>
             </a:pPr>
             <a:r>
-              <a:rPr lang="en-US" sz="750" b="1" dirty="0">
-                <a:solidFill>
-                  <a:srgbClr val="0057FF"/>
-                </a:solidFill>
-                <a:latin typeface="Pretendard" pitchFamily="34" charset="0"/>
-                <a:ea typeface="Pretendard" pitchFamily="34" charset="-122"/>
-                <a:cs typeface="Pretendard" pitchFamily="34" charset="-120"/>
-              </a:rPr>
-              <a:t>가장 가능성이 높은 영역</a:t>
-            </a:r>
-            <a:endParaRPr lang="en-US" sz="750" dirty="0"/>
-          </a:p>
-        </p:txBody>
-      </p:sp>
-      <p:sp>
-        <p:nvSpPr>
-          <p:cNvPr id="45" name="Text 43"/>
-          <p:cNvSpPr/>
-          <p:nvPr/>
-        </p:nvSpPr>
-        <p:spPr>
-          <a:xfrm>
-            <a:off x="4791456" y="5102352"/>
-            <a:ext cx="6741871" cy="219456"/>
-          </a:xfrm>
-          <a:prstGeom prst="rect">
-            <a:avLst/>
-          </a:prstGeom>
-          <a:noFill/>
-          <a:ln/>
-        </p:spPr>
-        <p:txBody>
-          <a:bodyPr wrap="square" lIns="0" tIns="0" rIns="0" bIns="0" rtlCol="0" anchor="t"/>
-          <a:lstStyle/>
-          <a:p>
-            <a:pPr algn="ctr" indent="0" marL="0">
-              <a:buNone/>
-            </a:pPr>
-            <a:r>
-              <a:rPr lang="en-US" sz="950" b="1" dirty="0">
+              <a:rPr lang="en-US" sz="900" b="1" dirty="0">
                 <a:solidFill>
                   <a:srgbClr val="707070"/>
                 </a:solidFill>
@@ -18352,15 +18437,135 @@
                 <a:ea typeface="Pretendard" pitchFamily="34" charset="-122"/>
                 <a:cs typeface="Pretendard" pitchFamily="34" charset="-120"/>
               </a:rPr>
-              <a:t>과거 광고 인지도 →</a:t>
-            </a:r>
-            <a:endParaRPr lang="en-US" sz="950" dirty="0"/>
-          </a:p>
-        </p:txBody>
-      </p:sp>
-      <p:sp>
-        <p:nvSpPr>
-          <p:cNvPr id="46" name="Shape 44"/>
+              <a:t>중단</a:t>
+            </a:r>
+            <a:endParaRPr lang="en-US" sz="900" dirty="0"/>
+          </a:p>
+        </p:txBody>
+      </p:sp>
+      <p:sp>
+        <p:nvSpPr>
+          <p:cNvPr id="50" name="Text 48"/>
+          <p:cNvSpPr/>
+          <p:nvPr/>
+        </p:nvSpPr>
+        <p:spPr>
+          <a:xfrm>
+            <a:off x="5468112" y="4828032"/>
+            <a:ext cx="4775911" cy="237744"/>
+          </a:xfrm>
+          <a:prstGeom prst="rect">
+            <a:avLst/>
+          </a:prstGeom>
+          <a:noFill/>
+          <a:ln/>
+        </p:spPr>
+        <p:txBody>
+          <a:bodyPr wrap="square" lIns="0" tIns="0" rIns="0" bIns="0" rtlCol="0" anchor="t"/>
+          <a:lstStyle/>
+          <a:p>
+            <a:pPr indent="0" marL="0">
+              <a:buNone/>
+            </a:pPr>
+            <a:r>
+              <a:rPr lang="en-US" sz="1200" b="1" dirty="0">
+                <a:solidFill>
+                  <a:srgbClr val="707070"/>
+                </a:solidFill>
+                <a:latin typeface="Pretendard" pitchFamily="34" charset="0"/>
+                <a:ea typeface="Pretendard" pitchFamily="34" charset="-122"/>
+                <a:cs typeface="Pretendard" pitchFamily="34" charset="-120"/>
+              </a:rPr>
+              <a:t>메인 전략에서 제외</a:t>
+            </a:r>
+            <a:endParaRPr lang="en-US" sz="1200" dirty="0"/>
+          </a:p>
+        </p:txBody>
+      </p:sp>
+      <p:sp>
+        <p:nvSpPr>
+          <p:cNvPr id="51" name="Text 49"/>
+          <p:cNvSpPr/>
+          <p:nvPr/>
+        </p:nvSpPr>
+        <p:spPr>
+          <a:xfrm>
+            <a:off x="5468112" y="5084064"/>
+            <a:ext cx="4775911" cy="256032"/>
+          </a:xfrm>
+          <a:prstGeom prst="rect">
+            <a:avLst/>
+          </a:prstGeom>
+          <a:noFill/>
+          <a:ln/>
+        </p:spPr>
+        <p:txBody>
+          <a:bodyPr wrap="square" lIns="0" tIns="0" rIns="0" bIns="0" rtlCol="0" anchor="t"/>
+          <a:lstStyle/>
+          <a:p>
+            <a:pPr indent="0" marL="0">
+              <a:lnSpc>
+                <a:spcPts val="1150"/>
+              </a:lnSpc>
+              <a:buNone/>
+            </a:pPr>
+            <a:r>
+              <a:rPr lang="en-US" sz="850" dirty="0">
+                <a:solidFill>
+                  <a:srgbClr val="3C3C3C"/>
+                </a:solidFill>
+                <a:latin typeface="Pretendard" pitchFamily="34" charset="0"/>
+                <a:ea typeface="Pretendard" pitchFamily="34" charset="-122"/>
+                <a:cs typeface="Pretendard" pitchFamily="34" charset="-120"/>
+              </a:rPr>
+              <a:t>펭귄 중심 캠페인은 접고 제품 편익 중심으로 전환한다.</a:t>
+            </a:r>
+            <a:endParaRPr lang="en-US" sz="850" dirty="0"/>
+          </a:p>
+        </p:txBody>
+      </p:sp>
+      <p:sp>
+        <p:nvSpPr>
+          <p:cNvPr id="52" name="Text 50"/>
+          <p:cNvSpPr/>
+          <p:nvPr/>
+        </p:nvSpPr>
+        <p:spPr>
+          <a:xfrm>
+            <a:off x="10390327" y="4956048"/>
+            <a:ext cx="960120" cy="219456"/>
+          </a:xfrm>
+          <a:prstGeom prst="rect">
+            <a:avLst/>
+          </a:prstGeom>
+          <a:noFill/>
+          <a:ln/>
+        </p:spPr>
+        <p:txBody>
+          <a:bodyPr wrap="square" lIns="0" tIns="0" rIns="0" bIns="0" rtlCol="0" anchor="ctr"/>
+          <a:lstStyle/>
+          <a:p>
+            <a:pPr algn="r" indent="0" marL="0">
+              <a:buNone/>
+            </a:pPr>
+            <a:r>
+              <a:rPr lang="en-US" sz="850" b="1" dirty="0">
+                <a:solidFill>
+                  <a:srgbClr val="959595"/>
+                </a:solidFill>
+                <a:latin typeface="Pretendard" pitchFamily="34" charset="0"/>
+                <a:ea typeface="Pretendard" pitchFamily="34" charset="-122"/>
+                <a:cs typeface="Pretendard" pitchFamily="34" charset="-120"/>
+              </a:rPr>
+              <a:t>기억 X · 효과 X</a:t>
+            </a:r>
+            <a:endParaRPr lang="en-US" sz="850" dirty="0"/>
+          </a:p>
+        </p:txBody>
+      </p:sp>
+      <p:sp>
+        <p:nvSpPr>
+          <p:cNvPr id="53" name="Shape 51"/>
           <p:cNvSpPr/>
           <p:nvPr/>
         </p:nvSpPr>
@@ -18382,7 +18587,7 @@
       </p:sp>
       <p:sp>
         <p:nvSpPr>
-          <p:cNvPr id="47" name="Text 45"/>
+          <p:cNvPr id="54" name="Text 52"/>
           <p:cNvSpPr/>
           <p:nvPr/>
         </p:nvSpPr>
@@ -18421,7 +18626,7 @@
       </p:sp>
       <p:sp>
         <p:nvSpPr>
-          <p:cNvPr id="48" name="Text 46"/>
+          <p:cNvPr id="55" name="Text 53"/>
           <p:cNvSpPr/>
           <p:nvPr/>
         </p:nvSpPr>
@@ -18460,7 +18665,7 @@
       </p:sp>
       <p:sp>
         <p:nvSpPr>
-          <p:cNvPr id="49" name="Text 47"/>
+          <p:cNvPr id="56" name="Text 54"/>
           <p:cNvSpPr/>
           <p:nvPr/>
         </p:nvSpPr>
@@ -18499,7 +18704,7 @@
       </p:sp>
       <p:sp>
         <p:nvSpPr>
-          <p:cNvPr id="50" name="Text 48"/>
+          <p:cNvPr id="57" name="Text 55"/>
           <p:cNvSpPr/>
           <p:nvPr/>
         </p:nvSpPr>

--- a/청호나이스-브랜드전략-제안.pptx
+++ b/청호나이스-브랜드전략-제안.pptx
@@ -16791,8 +16791,8 @@
         </p:nvSpPr>
         <p:spPr>
           <a:xfrm>
-            <a:off x="658368" y="1005840"/>
-            <a:ext cx="10874959" cy="502920"/>
+            <a:off x="658368" y="987552"/>
+            <a:ext cx="10874959" cy="457200"/>
           </a:xfrm>
           <a:prstGeom prst="rect">
             <a:avLst/>
@@ -16806,12 +16806,12 @@
           <a:p>
             <a:pPr indent="0" marL="0">
               <a:lnSpc>
-                <a:spcPts val="3072"/>
+                <a:spcPts val="2944"/>
               </a:lnSpc>
               <a:buNone/>
             </a:pPr>
             <a:r>
-              <a:rPr lang="en-US" sz="2400" b="1" dirty="0">
+              <a:rPr lang="en-US" sz="2300" b="1" dirty="0">
                 <a:solidFill>
                   <a:srgbClr val="191919"/>
                 </a:solidFill>
@@ -16823,12 +16823,12 @@
             </a:r>
             <a:pPr indent="0" marL="0">
               <a:lnSpc>
-                <a:spcPts val="3072"/>
+                <a:spcPts val="2944"/>
               </a:lnSpc>
               <a:buNone/>
             </a:pPr>
             <a:r>
-              <a:rPr lang="en-US" sz="2400" b="1" dirty="0">
+              <a:rPr lang="en-US" sz="2300" b="1" dirty="0">
                 <a:solidFill>
                   <a:srgbClr val="0057FF"/>
                 </a:solidFill>
@@ -16840,12 +16840,12 @@
             </a:r>
             <a:pPr indent="0" marL="0">
               <a:lnSpc>
-                <a:spcPts val="3072"/>
+                <a:spcPts val="2944"/>
               </a:lnSpc>
               <a:buNone/>
             </a:pPr>
             <a:r>
-              <a:rPr lang="en-US" sz="2400" b="1" dirty="0">
+              <a:rPr lang="en-US" sz="2300" b="1" dirty="0">
                 <a:solidFill>
                   <a:srgbClr val="191919"/>
                 </a:solidFill>
@@ -16855,7 +16855,7 @@
               </a:rPr>
               <a:t>을 결정한다</a:t>
             </a:r>
-            <a:endParaRPr lang="en-US" sz="2400" dirty="0"/>
+            <a:endParaRPr lang="en-US" sz="2300" dirty="0"/>
           </a:p>
         </p:txBody>
       </p:sp>
@@ -16867,24 +16867,24 @@
         </p:nvSpPr>
         <p:spPr>
           <a:xfrm>
-            <a:off x="658368" y="1700784"/>
-            <a:ext cx="10874959" cy="237744"/>
-          </a:xfrm>
-          <a:prstGeom prst="rect">
-            <a:avLst/>
-          </a:prstGeom>
-          <a:noFill/>
-          <a:ln/>
-        </p:spPr>
-        <p:txBody>
-          <a:bodyPr wrap="square" lIns="0" tIns="0" rIns="0" bIns="0" rtlCol="0" anchor="t"/>
-          <a:lstStyle/>
-          <a:p>
-            <a:pPr indent="0" marL="0">
-              <a:buNone/>
-            </a:pPr>
-            <a:r>
-              <a:rPr lang="en-US" sz="1150" dirty="0">
+            <a:off x="658368" y="1645920"/>
+            <a:ext cx="10874959" cy="219456"/>
+          </a:xfrm>
+          <a:prstGeom prst="rect">
+            <a:avLst/>
+          </a:prstGeom>
+          <a:noFill/>
+          <a:ln/>
+        </p:spPr>
+        <p:txBody>
+          <a:bodyPr wrap="square" lIns="0" tIns="0" rIns="0" bIns="0" rtlCol="0" anchor="t"/>
+          <a:lstStyle/>
+          <a:p>
+            <a:pPr indent="0" marL="0">
+              <a:buNone/>
+            </a:pPr>
+            <a:r>
+              <a:rPr lang="en-US" sz="1050" dirty="0">
                 <a:solidFill>
                   <a:srgbClr val="707070"/>
                 </a:solidFill>
@@ -16894,47 +16894,105 @@
               </a:rPr>
               <a:t>과거의 기억보다 중요한 것은, 지금의 청호나이스를 더 잘 기억시키는가이다.</a:t>
             </a:r>
-            <a:endParaRPr lang="en-US" sz="1150" dirty="0"/>
-          </a:p>
-        </p:txBody>
-      </p:sp>
-      <p:sp>
-        <p:nvSpPr>
-          <p:cNvPr id="6" name="Text 4"/>
-          <p:cNvSpPr/>
-          <p:nvPr/>
-        </p:nvSpPr>
-        <p:spPr>
-          <a:xfrm>
-            <a:off x="658368" y="2103120"/>
-            <a:ext cx="3401568" cy="548640"/>
-          </a:xfrm>
-          <a:prstGeom prst="rect">
-            <a:avLst/>
-          </a:prstGeom>
-          <a:noFill/>
-          <a:ln/>
-        </p:spPr>
-        <p:txBody>
-          <a:bodyPr wrap="square" lIns="0" tIns="0" rIns="0" bIns="0" rtlCol="0" anchor="t"/>
-          <a:lstStyle/>
-          <a:p>
-            <a:pPr indent="0" marL="0">
-              <a:lnSpc>
-                <a:spcPts val="1400"/>
-              </a:lnSpc>
+            <a:endParaRPr lang="en-US" sz="1050" dirty="0"/>
+          </a:p>
+        </p:txBody>
+      </p:sp>
+      <p:sp>
+        <p:nvSpPr>
+          <p:cNvPr id="6" name="Shape 4"/>
+          <p:cNvSpPr/>
+          <p:nvPr/>
+        </p:nvSpPr>
+        <p:spPr>
+          <a:xfrm>
+            <a:off x="658368" y="1975104"/>
+            <a:ext cx="5355184" cy="365760"/>
+          </a:xfrm>
+          <a:prstGeom prst="roundRect">
+            <a:avLst>
+              <a:gd name="adj" fmla="val 22500"/>
+            </a:avLst>
+          </a:prstGeom>
+          <a:solidFill>
+            <a:srgbClr val="F5F5F7"/>
+          </a:solidFill>
+          <a:ln/>
+        </p:spPr>
+      </p:sp>
+      <p:sp>
+        <p:nvSpPr>
+          <p:cNvPr id="7" name="Text 5"/>
+          <p:cNvSpPr/>
+          <p:nvPr/>
+        </p:nvSpPr>
+        <p:spPr>
+          <a:xfrm>
+            <a:off x="859536" y="1975104"/>
+            <a:ext cx="822960" cy="365760"/>
+          </a:xfrm>
+          <a:prstGeom prst="rect">
+            <a:avLst/>
+          </a:prstGeom>
+          <a:noFill/>
+          <a:ln/>
+        </p:spPr>
+        <p:txBody>
+          <a:bodyPr wrap="square" lIns="0" tIns="0" rIns="0" bIns="0" rtlCol="0" anchor="ctr"/>
+          <a:lstStyle/>
+          <a:p>
+            <a:pPr indent="0" marL="0">
+              <a:buNone/>
+            </a:pPr>
+            <a:r>
+              <a:rPr lang="en-US" sz="850" b="1" dirty="0">
+                <a:solidFill>
+                  <a:srgbClr val="0057FF"/>
+                </a:solidFill>
+                <a:latin typeface="Pretendard" pitchFamily="34" charset="0"/>
+                <a:ea typeface="Pretendard" pitchFamily="34" charset="-122"/>
+                <a:cs typeface="Pretendard" pitchFamily="34" charset="-120"/>
+              </a:rPr>
+              <a:t>축 1 · 기억</a:t>
+            </a:r>
+            <a:endParaRPr lang="en-US" sz="850" dirty="0"/>
+          </a:p>
+        </p:txBody>
+      </p:sp>
+      <p:sp>
+        <p:nvSpPr>
+          <p:cNvPr id="8" name="Text 6"/>
+          <p:cNvSpPr/>
+          <p:nvPr/>
+        </p:nvSpPr>
+        <p:spPr>
+          <a:xfrm>
+            <a:off x="1709928" y="1975104"/>
+            <a:ext cx="4120744" cy="365760"/>
+          </a:xfrm>
+          <a:prstGeom prst="rect">
+            <a:avLst/>
+          </a:prstGeom>
+          <a:noFill/>
+          <a:ln/>
+        </p:spPr>
+        <p:txBody>
+          <a:bodyPr wrap="square" lIns="0" tIns="0" rIns="0" bIns="0" rtlCol="0" anchor="ctr"/>
+          <a:lstStyle/>
+          <a:p>
+            <a:pPr indent="0" marL="0">
               <a:buNone/>
             </a:pPr>
             <a:r>
               <a:rPr lang="en-US" sz="1050" dirty="0">
                 <a:solidFill>
-                  <a:srgbClr val="3C3C3C"/>
-                </a:solidFill>
-                <a:latin typeface="Pretendard" pitchFamily="34" charset="0"/>
-                <a:ea typeface="Pretendard" pitchFamily="34" charset="-122"/>
-                <a:cs typeface="Pretendard" pitchFamily="34" charset="-120"/>
-              </a:rPr>
-              <a:t>펭귄을 되살린다는 결론을 먼저 정하지 않는다. 과거 광고의 기억과 현재의 브랜드 효과를 검증한 뒤, 캠페인에서의 역할을 결정한다.</a:t>
+                  <a:srgbClr val="191919"/>
+                </a:solidFill>
+                <a:latin typeface="Pretendard" pitchFamily="34" charset="0"/>
+                <a:ea typeface="Pretendard" pitchFamily="34" charset="-122"/>
+                <a:cs typeface="Pretendard" pitchFamily="34" charset="-120"/>
+              </a:rPr>
+              <a:t>과거 광고가 지금도 기억되는가</a:t>
             </a:r>
             <a:endParaRPr lang="en-US" sz="1050" dirty="0"/>
           </a:p>
@@ -16942,14 +17000,185 @@
       </p:sp>
       <p:sp>
         <p:nvSpPr>
-          <p:cNvPr id="7" name="Shape 5"/>
-          <p:cNvSpPr/>
-          <p:nvPr/>
-        </p:nvSpPr>
-        <p:spPr>
-          <a:xfrm>
-            <a:off x="658368" y="2651760"/>
-            <a:ext cx="548640" cy="256032"/>
+          <p:cNvPr id="9" name="Shape 7"/>
+          <p:cNvSpPr/>
+          <p:nvPr/>
+        </p:nvSpPr>
+        <p:spPr>
+          <a:xfrm>
+            <a:off x="6178144" y="1975104"/>
+            <a:ext cx="5355184" cy="365760"/>
+          </a:xfrm>
+          <a:prstGeom prst="roundRect">
+            <a:avLst>
+              <a:gd name="adj" fmla="val 22500"/>
+            </a:avLst>
+          </a:prstGeom>
+          <a:solidFill>
+            <a:srgbClr val="EAF1FF"/>
+          </a:solidFill>
+          <a:ln w="12700">
+            <a:solidFill>
+              <a:srgbClr val="0057FF"/>
+            </a:solidFill>
+            <a:prstDash val="solid"/>
+          </a:ln>
+        </p:spPr>
+      </p:sp>
+      <p:sp>
+        <p:nvSpPr>
+          <p:cNvPr id="10" name="Text 8"/>
+          <p:cNvSpPr/>
+          <p:nvPr/>
+        </p:nvSpPr>
+        <p:spPr>
+          <a:xfrm>
+            <a:off x="6379312" y="1975104"/>
+            <a:ext cx="822960" cy="365760"/>
+          </a:xfrm>
+          <a:prstGeom prst="rect">
+            <a:avLst/>
+          </a:prstGeom>
+          <a:noFill/>
+          <a:ln/>
+        </p:spPr>
+        <p:txBody>
+          <a:bodyPr wrap="square" lIns="0" tIns="0" rIns="0" bIns="0" rtlCol="0" anchor="ctr"/>
+          <a:lstStyle/>
+          <a:p>
+            <a:pPr indent="0" marL="0">
+              <a:buNone/>
+            </a:pPr>
+            <a:r>
+              <a:rPr lang="en-US" sz="850" b="1" dirty="0">
+                <a:solidFill>
+                  <a:srgbClr val="0057FF"/>
+                </a:solidFill>
+                <a:latin typeface="Pretendard" pitchFamily="34" charset="0"/>
+                <a:ea typeface="Pretendard" pitchFamily="34" charset="-122"/>
+                <a:cs typeface="Pretendard" pitchFamily="34" charset="-120"/>
+              </a:rPr>
+              <a:t>축 2 · 효과</a:t>
+            </a:r>
+            <a:endParaRPr lang="en-US" sz="850" dirty="0"/>
+          </a:p>
+        </p:txBody>
+      </p:sp>
+      <p:sp>
+        <p:nvSpPr>
+          <p:cNvPr id="11" name="Text 9"/>
+          <p:cNvSpPr/>
+          <p:nvPr/>
+        </p:nvSpPr>
+        <p:spPr>
+          <a:xfrm>
+            <a:off x="7229704" y="1975104"/>
+            <a:ext cx="4120744" cy="365760"/>
+          </a:xfrm>
+          <a:prstGeom prst="rect">
+            <a:avLst/>
+          </a:prstGeom>
+          <a:noFill/>
+          <a:ln/>
+        </p:spPr>
+        <p:txBody>
+          <a:bodyPr wrap="square" lIns="0" tIns="0" rIns="0" bIns="0" rtlCol="0" anchor="ctr"/>
+          <a:lstStyle/>
+          <a:p>
+            <a:pPr indent="0" marL="0">
+              <a:buNone/>
+            </a:pPr>
+            <a:r>
+              <a:rPr lang="en-US" sz="1050" dirty="0">
+                <a:solidFill>
+                  <a:srgbClr val="191919"/>
+                </a:solidFill>
+                <a:latin typeface="Pretendard" pitchFamily="34" charset="0"/>
+                <a:ea typeface="Pretendard" pitchFamily="34" charset="-122"/>
+                <a:cs typeface="Pretendard" pitchFamily="34" charset="-120"/>
+              </a:rPr>
+              <a:t>현대화된 펭귄이 캐릭터 없는 안보다 나은가</a:t>
+            </a:r>
+            <a:endParaRPr lang="en-US" sz="1050" dirty="0"/>
+          </a:p>
+        </p:txBody>
+      </p:sp>
+      <p:sp>
+        <p:nvSpPr>
+          <p:cNvPr id="12" name="Shape 10"/>
+          <p:cNvSpPr/>
+          <p:nvPr/>
+        </p:nvSpPr>
+        <p:spPr>
+          <a:xfrm>
+            <a:off x="658368" y="2487168"/>
+            <a:ext cx="2554148" cy="2395728"/>
+          </a:xfrm>
+          <a:prstGeom prst="roundRect">
+            <a:avLst>
+              <a:gd name="adj" fmla="val 3435"/>
+            </a:avLst>
+          </a:prstGeom>
+          <a:solidFill>
+            <a:srgbClr val="FFFFFF"/>
+          </a:solidFill>
+          <a:ln w="12700">
+            <a:solidFill>
+              <a:srgbClr val="E8E8E8"/>
+            </a:solidFill>
+            <a:prstDash val="solid"/>
+          </a:ln>
+        </p:spPr>
+      </p:sp>
+      <p:sp>
+        <p:nvSpPr>
+          <p:cNvPr id="13" name="Text 11"/>
+          <p:cNvSpPr/>
+          <p:nvPr/>
+        </p:nvSpPr>
+        <p:spPr>
+          <a:xfrm>
+            <a:off x="841248" y="2633472"/>
+            <a:ext cx="2188388" cy="219456"/>
+          </a:xfrm>
+          <a:prstGeom prst="rect">
+            <a:avLst/>
+          </a:prstGeom>
+          <a:noFill/>
+          <a:ln/>
+        </p:spPr>
+        <p:txBody>
+          <a:bodyPr wrap="square" lIns="0" tIns="0" rIns="0" bIns="0" rtlCol="0" anchor="t"/>
+          <a:lstStyle/>
+          <a:p>
+            <a:pPr indent="0" marL="0">
+              <a:buNone/>
+            </a:pPr>
+            <a:r>
+              <a:rPr lang="en-US" sz="1050" b="1" dirty="0">
+                <a:solidFill>
+                  <a:srgbClr val="0057FF"/>
+                </a:solidFill>
+                <a:latin typeface="Pretendard" pitchFamily="34" charset="0"/>
+                <a:ea typeface="Pretendard" pitchFamily="34" charset="-122"/>
+                <a:cs typeface="Pretendard" pitchFamily="34" charset="-120"/>
+              </a:rPr>
+              <a:t>01 심층 인터뷰</a:t>
+            </a:r>
+            <a:endParaRPr lang="en-US" sz="1050" dirty="0"/>
+          </a:p>
+        </p:txBody>
+      </p:sp>
+      <p:sp>
+        <p:nvSpPr>
+          <p:cNvPr id="14" name="Shape 12"/>
+          <p:cNvSpPr/>
+          <p:nvPr/>
+        </p:nvSpPr>
+        <p:spPr>
+          <a:xfrm>
+            <a:off x="841248" y="2889504"/>
+            <a:ext cx="918972" cy="201168"/>
           </a:xfrm>
           <a:prstGeom prst="roundRect">
             <a:avLst>
@@ -16957,21 +17186,26 @@
             </a:avLst>
           </a:prstGeom>
           <a:solidFill>
-            <a:srgbClr val="1E9BE6"/>
+            <a:srgbClr val="F0F0F0"/>
           </a:solidFill>
-          <a:ln/>
-        </p:spPr>
-      </p:sp>
-      <p:sp>
-        <p:nvSpPr>
-          <p:cNvPr id="8" name="Text 6"/>
-          <p:cNvSpPr/>
-          <p:nvPr/>
-        </p:nvSpPr>
-        <p:spPr>
-          <a:xfrm>
-            <a:off x="658368" y="2651760"/>
-            <a:ext cx="548640" cy="256032"/>
+          <a:ln w="12700">
+            <a:solidFill>
+              <a:srgbClr val="E8E8E8"/>
+            </a:solidFill>
+            <a:prstDash val="solid"/>
+          </a:ln>
+        </p:spPr>
+      </p:sp>
+      <p:sp>
+        <p:nvSpPr>
+          <p:cNvPr id="15" name="Text 13"/>
+          <p:cNvSpPr/>
+          <p:nvPr/>
+        </p:nvSpPr>
+        <p:spPr>
+          <a:xfrm>
+            <a:off x="841248" y="2889504"/>
+            <a:ext cx="918972" cy="201168"/>
           </a:xfrm>
           <a:prstGeom prst="rect">
             <a:avLst/>
@@ -16987,15 +17221,57 @@
               <a:buNone/>
             </a:pPr>
             <a:r>
+              <a:rPr lang="en-US" sz="750" b="1" dirty="0">
+                <a:solidFill>
+                  <a:srgbClr val="707070"/>
+                </a:solidFill>
+                <a:latin typeface="Pretendard" pitchFamily="34" charset="0"/>
+                <a:ea typeface="Pretendard" pitchFamily="34" charset="-122"/>
+                <a:cs typeface="Pretendard" pitchFamily="34" charset="-120"/>
+              </a:rPr>
+              <a:t>IDI 8~12명</a:t>
+            </a:r>
+            <a:endParaRPr lang="en-US" sz="750" dirty="0"/>
+          </a:p>
+        </p:txBody>
+      </p:sp>
+      <p:sp>
+        <p:nvSpPr>
+          <p:cNvPr id="16" name="Text 14"/>
+          <p:cNvSpPr/>
+          <p:nvPr/>
+        </p:nvSpPr>
+        <p:spPr>
+          <a:xfrm>
+            <a:off x="841248" y="3163824"/>
+            <a:ext cx="2188388" cy="329184"/>
+          </a:xfrm>
+          <a:prstGeom prst="rect">
+            <a:avLst/>
+          </a:prstGeom>
+          <a:noFill/>
+          <a:ln/>
+        </p:spPr>
+        <p:txBody>
+          <a:bodyPr wrap="square" lIns="0" tIns="0" rIns="0" bIns="0" rtlCol="0" anchor="t"/>
+          <a:lstStyle/>
+          <a:p>
+            <a:pPr indent="0" marL="0">
+              <a:lnSpc>
+                <a:spcPts val="1300"/>
+              </a:lnSpc>
+              <a:buNone/>
+            </a:pPr>
+            <a:r>
               <a:rPr lang="en-US" sz="1000" b="1" dirty="0">
                 <a:solidFill>
-                  <a:srgbClr val="FFFFFF"/>
-                </a:solidFill>
-                <a:latin typeface="Pretendard" pitchFamily="34" charset="0"/>
-                <a:ea typeface="Pretendard" pitchFamily="34" charset="-122"/>
-                <a:cs typeface="Pretendard" pitchFamily="34" charset="-120"/>
-              </a:rPr>
-              <a:t>기억</a:t>
+                  <a:srgbClr val="191919"/>
+                </a:solidFill>
+                <a:latin typeface="Pretendard" pitchFamily="34" charset="0"/>
+                <a:ea typeface="Pretendard" pitchFamily="34" charset="-122"/>
+                <a:cs typeface="Pretendard" pitchFamily="34" charset="-120"/>
+              </a:rPr>
+              <a:t>펭귄에 대한 답이 아니라, 판단 기준을 찾는다</a:t>
             </a:r>
             <a:endParaRPr lang="en-US" sz="1000" dirty="0"/>
           </a:p>
@@ -17003,33 +17279,33 @@
       </p:sp>
       <p:sp>
         <p:nvSpPr>
-          <p:cNvPr id="9" name="Text 7"/>
-          <p:cNvSpPr/>
-          <p:nvPr/>
-        </p:nvSpPr>
-        <p:spPr>
-          <a:xfrm>
-            <a:off x="1316736" y="2633472"/>
-            <a:ext cx="2743200" cy="292608"/>
-          </a:xfrm>
-          <a:prstGeom prst="rect">
-            <a:avLst/>
-          </a:prstGeom>
-          <a:noFill/>
-          <a:ln/>
-        </p:spPr>
-        <p:txBody>
-          <a:bodyPr wrap="square" lIns="0" tIns="0" rIns="0" bIns="0" rtlCol="0" anchor="ctr"/>
+          <p:cNvPr id="17" name="Text 15"/>
+          <p:cNvSpPr/>
+          <p:nvPr/>
+        </p:nvSpPr>
+        <p:spPr>
+          <a:xfrm>
+            <a:off x="841248" y="3547872"/>
+            <a:ext cx="2188388" cy="402336"/>
+          </a:xfrm>
+          <a:prstGeom prst="rect">
+            <a:avLst/>
+          </a:prstGeom>
+          <a:noFill/>
+          <a:ln/>
+        </p:spPr>
+        <p:txBody>
+          <a:bodyPr wrap="square" lIns="0" tIns="0" rIns="0" bIns="0" rtlCol="0" anchor="t"/>
           <a:lstStyle/>
           <a:p>
             <a:pPr indent="0" marL="0">
               <a:lnSpc>
-                <a:spcPts val="1200"/>
+                <a:spcPts val="1100"/>
               </a:lnSpc>
               <a:buNone/>
             </a:pPr>
             <a:r>
-              <a:rPr lang="en-US" sz="950" dirty="0">
+              <a:rPr lang="en-US" sz="850" dirty="0">
                 <a:solidFill>
                   <a:srgbClr val="3C3C3C"/>
                 </a:solidFill>
@@ -17037,38 +17313,149 @@
                 <a:ea typeface="Pretendard" pitchFamily="34" charset="-122"/>
                 <a:cs typeface="Pretendard" pitchFamily="34" charset="-120"/>
               </a:rPr>
-              <a:t>과거 광고를 알고 있는가</a:t>
-            </a:r>
-            <a:endParaRPr lang="en-US" sz="950" dirty="0"/>
-          </a:p>
-        </p:txBody>
-      </p:sp>
-      <p:sp>
-        <p:nvSpPr>
-          <p:cNvPr id="10" name="Text 8"/>
-          <p:cNvSpPr/>
-          <p:nvPr/>
-        </p:nvSpPr>
-        <p:spPr>
-          <a:xfrm>
-            <a:off x="822960" y="2907792"/>
-            <a:ext cx="228600" cy="182880"/>
-          </a:xfrm>
-          <a:prstGeom prst="rect">
-            <a:avLst/>
-          </a:prstGeom>
-          <a:noFill/>
-          <a:ln/>
-        </p:spPr>
-        <p:txBody>
-          <a:bodyPr wrap="square" lIns="0" tIns="0" rIns="0" bIns="0" rtlCol="0" anchor="t"/>
-          <a:lstStyle/>
-          <a:p>
-            <a:pPr algn="ctr" indent="0" marL="0">
-              <a:buNone/>
-            </a:pPr>
-            <a:r>
-              <a:rPr lang="en-US" sz="1000" dirty="0">
+              <a:t>27~34세 1~2인 가구 · 아이스커피 주 3~4회 이상 · 정수기 사용/비사용 혼합</a:t>
+            </a:r>
+            <a:endParaRPr lang="en-US" sz="850" dirty="0"/>
+          </a:p>
+        </p:txBody>
+      </p:sp>
+      <p:sp>
+        <p:nvSpPr>
+          <p:cNvPr id="18" name="Text 16"/>
+          <p:cNvSpPr/>
+          <p:nvPr/>
+        </p:nvSpPr>
+        <p:spPr>
+          <a:xfrm>
+            <a:off x="841248" y="4005072"/>
+            <a:ext cx="2188388" cy="402336"/>
+          </a:xfrm>
+          <a:prstGeom prst="rect">
+            <a:avLst/>
+          </a:prstGeom>
+          <a:noFill/>
+          <a:ln/>
+        </p:spPr>
+        <p:txBody>
+          <a:bodyPr wrap="square" lIns="0" tIns="0" rIns="0" bIns="0" rtlCol="0" anchor="t"/>
+          <a:lstStyle/>
+          <a:p>
+            <a:pPr indent="0" marL="0">
+              <a:lnSpc>
+                <a:spcPts val="1100"/>
+              </a:lnSpc>
+              <a:buNone/>
+            </a:pPr>
+            <a:r>
+              <a:rPr lang="en-US" sz="850" b="1" dirty="0">
+                <a:solidFill>
+                  <a:srgbClr val="191919"/>
+                </a:solidFill>
+                <a:latin typeface="Pretendard" pitchFamily="34" charset="0"/>
+                <a:ea typeface="Pretendard" pitchFamily="34" charset="-122"/>
+                <a:cs typeface="Pretendard" pitchFamily="34" charset="-120"/>
+              </a:rPr>
+              <a:t>노출 순서  생활 행동 → 제품 → 브랜드 → 과거 광고 → 현대화 펭귄</a:t>
+            </a:r>
+            <a:endParaRPr lang="en-US" sz="850" dirty="0"/>
+          </a:p>
+        </p:txBody>
+      </p:sp>
+      <p:sp>
+        <p:nvSpPr>
+          <p:cNvPr id="19" name="Text 17"/>
+          <p:cNvSpPr/>
+          <p:nvPr/>
+        </p:nvSpPr>
+        <p:spPr>
+          <a:xfrm>
+            <a:off x="841248" y="4480560"/>
+            <a:ext cx="2188388" cy="310896"/>
+          </a:xfrm>
+          <a:prstGeom prst="rect">
+            <a:avLst/>
+          </a:prstGeom>
+          <a:noFill/>
+          <a:ln/>
+        </p:spPr>
+        <p:txBody>
+          <a:bodyPr wrap="square" lIns="0" tIns="0" rIns="0" bIns="0" rtlCol="0" anchor="t"/>
+          <a:lstStyle/>
+          <a:p>
+            <a:pPr indent="0" marL="0">
+              <a:lnSpc>
+                <a:spcPts val="1000"/>
+              </a:lnSpc>
+              <a:buNone/>
+            </a:pPr>
+            <a:r>
+              <a:rPr lang="en-US" sz="750" dirty="0">
+                <a:solidFill>
+                  <a:srgbClr val="959595"/>
+                </a:solidFill>
+                <a:latin typeface="Pretendard" pitchFamily="34" charset="0"/>
+                <a:ea typeface="Pretendard" pitchFamily="34" charset="-122"/>
+                <a:cs typeface="Pretendard" pitchFamily="34" charset="-120"/>
+              </a:rPr>
+              <a:t>먼저 펭귄을 보여주면 우호적으로 편향된다</a:t>
+            </a:r>
+            <a:endParaRPr lang="en-US" sz="750" dirty="0"/>
+          </a:p>
+        </p:txBody>
+      </p:sp>
+      <p:sp>
+        <p:nvSpPr>
+          <p:cNvPr id="20" name="Shape 18"/>
+          <p:cNvSpPr/>
+          <p:nvPr/>
+        </p:nvSpPr>
+        <p:spPr>
+          <a:xfrm>
+            <a:off x="3431972" y="2487168"/>
+            <a:ext cx="2554148" cy="2395728"/>
+          </a:xfrm>
+          <a:prstGeom prst="roundRect">
+            <a:avLst>
+              <a:gd name="adj" fmla="val 3435"/>
+            </a:avLst>
+          </a:prstGeom>
+          <a:solidFill>
+            <a:srgbClr val="FFFFFF"/>
+          </a:solidFill>
+          <a:ln w="12700">
+            <a:solidFill>
+              <a:srgbClr val="E8E8E8"/>
+            </a:solidFill>
+            <a:prstDash val="solid"/>
+          </a:ln>
+        </p:spPr>
+      </p:sp>
+      <p:sp>
+        <p:nvSpPr>
+          <p:cNvPr id="21" name="Text 19"/>
+          <p:cNvSpPr/>
+          <p:nvPr/>
+        </p:nvSpPr>
+        <p:spPr>
+          <a:xfrm>
+            <a:off x="3614852" y="2633472"/>
+            <a:ext cx="2188388" cy="219456"/>
+          </a:xfrm>
+          <a:prstGeom prst="rect">
+            <a:avLst/>
+          </a:prstGeom>
+          <a:noFill/>
+          <a:ln/>
+        </p:spPr>
+        <p:txBody>
+          <a:bodyPr wrap="square" lIns="0" tIns="0" rIns="0" bIns="0" rtlCol="0" anchor="t"/>
+          <a:lstStyle/>
+          <a:p>
+            <a:pPr indent="0" marL="0">
+              <a:buNone/>
+            </a:pPr>
+            <a:r>
+              <a:rPr lang="en-US" sz="1050" b="1" dirty="0">
                 <a:solidFill>
                   <a:srgbClr val="0057FF"/>
                 </a:solidFill>
@@ -17076,22 +17463,22 @@
                 <a:ea typeface="Pretendard" pitchFamily="34" charset="-122"/>
                 <a:cs typeface="Pretendard" pitchFamily="34" charset="-120"/>
               </a:rPr>
-              <a:t>↓</a:t>
-            </a:r>
-            <a:endParaRPr lang="en-US" sz="1000" dirty="0"/>
-          </a:p>
-        </p:txBody>
-      </p:sp>
-      <p:sp>
-        <p:nvSpPr>
-          <p:cNvPr id="11" name="Shape 9"/>
-          <p:cNvSpPr/>
-          <p:nvPr/>
-        </p:nvSpPr>
-        <p:spPr>
-          <a:xfrm>
-            <a:off x="658368" y="3090672"/>
-            <a:ext cx="548640" cy="256032"/>
+              <a:t>02 인지도 조사</a:t>
+            </a:r>
+            <a:endParaRPr lang="en-US" sz="1050" dirty="0"/>
+          </a:p>
+        </p:txBody>
+      </p:sp>
+      <p:sp>
+        <p:nvSpPr>
+          <p:cNvPr id="22" name="Shape 20"/>
+          <p:cNvSpPr/>
+          <p:nvPr/>
+        </p:nvSpPr>
+        <p:spPr>
+          <a:xfrm>
+            <a:off x="3614852" y="2889504"/>
+            <a:ext cx="1463040" cy="201168"/>
           </a:xfrm>
           <a:prstGeom prst="roundRect">
             <a:avLst>
@@ -17099,21 +17486,26 @@
             </a:avLst>
           </a:prstGeom>
           <a:solidFill>
-            <a:srgbClr val="1E9BE6"/>
+            <a:srgbClr val="F0F0F0"/>
           </a:solidFill>
-          <a:ln/>
-        </p:spPr>
-      </p:sp>
-      <p:sp>
-        <p:nvSpPr>
-          <p:cNvPr id="12" name="Text 10"/>
-          <p:cNvSpPr/>
-          <p:nvPr/>
-        </p:nvSpPr>
-        <p:spPr>
-          <a:xfrm>
-            <a:off x="658368" y="3090672"/>
-            <a:ext cx="548640" cy="256032"/>
+          <a:ln w="12700">
+            <a:solidFill>
+              <a:srgbClr val="E8E8E8"/>
+            </a:solidFill>
+            <a:prstDash val="solid"/>
+          </a:ln>
+        </p:spPr>
+      </p:sp>
+      <p:sp>
+        <p:nvSpPr>
+          <p:cNvPr id="23" name="Text 21"/>
+          <p:cNvSpPr/>
+          <p:nvPr/>
+        </p:nvSpPr>
+        <p:spPr>
+          <a:xfrm>
+            <a:off x="3614852" y="2889504"/>
+            <a:ext cx="1463040" cy="201168"/>
           </a:xfrm>
           <a:prstGeom prst="rect">
             <a:avLst/>
@@ -17129,15 +17521,57 @@
               <a:buNone/>
             </a:pPr>
             <a:r>
+              <a:rPr lang="en-US" sz="750" b="1" dirty="0">
+                <a:solidFill>
+                  <a:srgbClr val="707070"/>
+                </a:solidFill>
+                <a:latin typeface="Pretendard" pitchFamily="34" charset="0"/>
+                <a:ea typeface="Pretendard" pitchFamily="34" charset="-122"/>
+                <a:cs typeface="Pretendard" pitchFamily="34" charset="-120"/>
+              </a:rPr>
+              <a:t>온라인 설문 N=150~200</a:t>
+            </a:r>
+            <a:endParaRPr lang="en-US" sz="750" dirty="0"/>
+          </a:p>
+        </p:txBody>
+      </p:sp>
+      <p:sp>
+        <p:nvSpPr>
+          <p:cNvPr id="24" name="Text 22"/>
+          <p:cNvSpPr/>
+          <p:nvPr/>
+        </p:nvSpPr>
+        <p:spPr>
+          <a:xfrm>
+            <a:off x="3614852" y="3163824"/>
+            <a:ext cx="2188388" cy="329184"/>
+          </a:xfrm>
+          <a:prstGeom prst="rect">
+            <a:avLst/>
+          </a:prstGeom>
+          <a:noFill/>
+          <a:ln/>
+        </p:spPr>
+        <p:txBody>
+          <a:bodyPr wrap="square" lIns="0" tIns="0" rIns="0" bIns="0" rtlCol="0" anchor="t"/>
+          <a:lstStyle/>
+          <a:p>
+            <a:pPr indent="0" marL="0">
+              <a:lnSpc>
+                <a:spcPts val="1300"/>
+              </a:lnSpc>
+              <a:buNone/>
+            </a:pPr>
+            <a:r>
               <a:rPr lang="en-US" sz="1000" b="1" dirty="0">
                 <a:solidFill>
-                  <a:srgbClr val="FFFFFF"/>
-                </a:solidFill>
-                <a:latin typeface="Pretendard" pitchFamily="34" charset="0"/>
-                <a:ea typeface="Pretendard" pitchFamily="34" charset="-122"/>
-                <a:cs typeface="Pretendard" pitchFamily="34" charset="-120"/>
-              </a:rPr>
-              <a:t>적합</a:t>
+                  <a:srgbClr val="191919"/>
+                </a:solidFill>
+                <a:latin typeface="Pretendard" pitchFamily="34" charset="0"/>
+                <a:ea typeface="Pretendard" pitchFamily="34" charset="-122"/>
+                <a:cs typeface="Pretendard" pitchFamily="34" charset="-120"/>
+              </a:rPr>
+              <a:t>과거 광고가 기억되는지 숫자로 본다</a:t>
             </a:r>
             <a:endParaRPr lang="en-US" sz="1000" dirty="0"/>
           </a:p>
@@ -17145,33 +17579,33 @@
       </p:sp>
       <p:sp>
         <p:nvSpPr>
-          <p:cNvPr id="13" name="Text 11"/>
-          <p:cNvSpPr/>
-          <p:nvPr/>
-        </p:nvSpPr>
-        <p:spPr>
-          <a:xfrm>
-            <a:off x="1316736" y="3072384"/>
-            <a:ext cx="2743200" cy="292608"/>
-          </a:xfrm>
-          <a:prstGeom prst="rect">
-            <a:avLst/>
-          </a:prstGeom>
-          <a:noFill/>
-          <a:ln/>
-        </p:spPr>
-        <p:txBody>
-          <a:bodyPr wrap="square" lIns="0" tIns="0" rIns="0" bIns="0" rtlCol="0" anchor="ctr"/>
+          <p:cNvPr id="25" name="Text 23"/>
+          <p:cNvSpPr/>
+          <p:nvPr/>
+        </p:nvSpPr>
+        <p:spPr>
+          <a:xfrm>
+            <a:off x="3614852" y="3547872"/>
+            <a:ext cx="2188388" cy="402336"/>
+          </a:xfrm>
+          <a:prstGeom prst="rect">
+            <a:avLst/>
+          </a:prstGeom>
+          <a:noFill/>
+          <a:ln/>
+        </p:spPr>
+        <p:txBody>
+          <a:bodyPr wrap="square" lIns="0" tIns="0" rIns="0" bIns="0" rtlCol="0" anchor="t"/>
           <a:lstStyle/>
           <a:p>
             <a:pPr indent="0" marL="0">
               <a:lnSpc>
-                <a:spcPts val="1200"/>
+                <a:spcPts val="1100"/>
               </a:lnSpc>
               <a:buNone/>
             </a:pPr>
             <a:r>
-              <a:rPr lang="en-US" sz="950" dirty="0">
+              <a:rPr lang="en-US" sz="850" dirty="0">
                 <a:solidFill>
                   <a:srgbClr val="3C3C3C"/>
                 </a:solidFill>
@@ -17179,38 +17613,149 @@
                 <a:ea typeface="Pretendard" pitchFamily="34" charset="-122"/>
                 <a:cs typeface="Pretendard" pitchFamily="34" charset="-120"/>
               </a:rPr>
-              <a:t>지금의 청호나이스·얼음정수기와 어울리는가</a:t>
-            </a:r>
-            <a:endParaRPr lang="en-US" sz="950" dirty="0"/>
-          </a:p>
-        </p:txBody>
-      </p:sp>
-      <p:sp>
-        <p:nvSpPr>
-          <p:cNvPr id="14" name="Text 12"/>
-          <p:cNvSpPr/>
-          <p:nvPr/>
-        </p:nvSpPr>
-        <p:spPr>
-          <a:xfrm>
-            <a:off x="822960" y="3346704"/>
-            <a:ext cx="228600" cy="182880"/>
-          </a:xfrm>
-          <a:prstGeom prst="rect">
-            <a:avLst/>
-          </a:prstGeom>
-          <a:noFill/>
-          <a:ln/>
-        </p:spPr>
-        <p:txBody>
-          <a:bodyPr wrap="square" lIns="0" tIns="0" rIns="0" bIns="0" rtlCol="0" anchor="t"/>
-          <a:lstStyle/>
-          <a:p>
-            <a:pPr algn="ctr" indent="0" marL="0">
-              <a:buNone/>
-            </a:pPr>
-            <a:r>
-              <a:rPr lang="en-US" sz="1000" dirty="0">
+              <a:t>비보조 회상 → 광고 보조 인지 → 청호나이스 정확 연결</a:t>
+            </a:r>
+            <a:endParaRPr lang="en-US" sz="850" dirty="0"/>
+          </a:p>
+        </p:txBody>
+      </p:sp>
+      <p:sp>
+        <p:nvSpPr>
+          <p:cNvPr id="26" name="Text 24"/>
+          <p:cNvSpPr/>
+          <p:nvPr/>
+        </p:nvSpPr>
+        <p:spPr>
+          <a:xfrm>
+            <a:off x="3614852" y="4005072"/>
+            <a:ext cx="2188388" cy="402336"/>
+          </a:xfrm>
+          <a:prstGeom prst="rect">
+            <a:avLst/>
+          </a:prstGeom>
+          <a:noFill/>
+          <a:ln/>
+        </p:spPr>
+        <p:txBody>
+          <a:bodyPr wrap="square" lIns="0" tIns="0" rIns="0" bIns="0" rtlCol="0" anchor="t"/>
+          <a:lstStyle/>
+          <a:p>
+            <a:pPr indent="0" marL="0">
+              <a:lnSpc>
+                <a:spcPts val="1100"/>
+              </a:lnSpc>
+              <a:buNone/>
+            </a:pPr>
+            <a:r>
+              <a:rPr lang="en-US" sz="850" b="1" dirty="0">
+                <a:solidFill>
+                  <a:srgbClr val="191919"/>
+                </a:solidFill>
+                <a:latin typeface="Pretendard" pitchFamily="34" charset="0"/>
+                <a:ea typeface="Pretendard" pitchFamily="34" charset="-122"/>
+                <a:cs typeface="Pretendard" pitchFamily="34" charset="-120"/>
+              </a:rPr>
+              <a:t>‘본 적 있다’와 ‘브랜드를 맞혔다’를 분리해 집계</a:t>
+            </a:r>
+            <a:endParaRPr lang="en-US" sz="850" dirty="0"/>
+          </a:p>
+        </p:txBody>
+      </p:sp>
+      <p:sp>
+        <p:nvSpPr>
+          <p:cNvPr id="27" name="Text 25"/>
+          <p:cNvSpPr/>
+          <p:nvPr/>
+        </p:nvSpPr>
+        <p:spPr>
+          <a:xfrm>
+            <a:off x="3614852" y="4480560"/>
+            <a:ext cx="2188388" cy="310896"/>
+          </a:xfrm>
+          <a:prstGeom prst="rect">
+            <a:avLst/>
+          </a:prstGeom>
+          <a:noFill/>
+          <a:ln/>
+        </p:spPr>
+        <p:txBody>
+          <a:bodyPr wrap="square" lIns="0" tIns="0" rIns="0" bIns="0" rtlCol="0" anchor="t"/>
+          <a:lstStyle/>
+          <a:p>
+            <a:pPr indent="0" marL="0">
+              <a:lnSpc>
+                <a:spcPts val="1000"/>
+              </a:lnSpc>
+              <a:buNone/>
+            </a:pPr>
+            <a:r>
+              <a:rPr lang="en-US" sz="750" dirty="0">
+                <a:solidFill>
+                  <a:srgbClr val="959595"/>
+                </a:solidFill>
+                <a:latin typeface="Pretendard" pitchFamily="34" charset="0"/>
+                <a:ea typeface="Pretendard" pitchFamily="34" charset="-122"/>
+                <a:cs typeface="Pretendard" pitchFamily="34" charset="-120"/>
+              </a:rPr>
+              <a:t>광고만 기억하고 브랜드를 모르면 자산으로 보기 어렵다</a:t>
+            </a:r>
+            <a:endParaRPr lang="en-US" sz="750" dirty="0"/>
+          </a:p>
+        </p:txBody>
+      </p:sp>
+      <p:sp>
+        <p:nvSpPr>
+          <p:cNvPr id="28" name="Shape 26"/>
+          <p:cNvSpPr/>
+          <p:nvPr/>
+        </p:nvSpPr>
+        <p:spPr>
+          <a:xfrm>
+            <a:off x="6205576" y="2487168"/>
+            <a:ext cx="2554148" cy="2395728"/>
+          </a:xfrm>
+          <a:prstGeom prst="roundRect">
+            <a:avLst>
+              <a:gd name="adj" fmla="val 3435"/>
+            </a:avLst>
+          </a:prstGeom>
+          <a:solidFill>
+            <a:srgbClr val="FFFFFF"/>
+          </a:solidFill>
+          <a:ln w="19050">
+            <a:solidFill>
+              <a:srgbClr val="0057FF"/>
+            </a:solidFill>
+            <a:prstDash val="solid"/>
+          </a:ln>
+        </p:spPr>
+      </p:sp>
+      <p:sp>
+        <p:nvSpPr>
+          <p:cNvPr id="29" name="Text 27"/>
+          <p:cNvSpPr/>
+          <p:nvPr/>
+        </p:nvSpPr>
+        <p:spPr>
+          <a:xfrm>
+            <a:off x="6388456" y="2633472"/>
+            <a:ext cx="2188388" cy="219456"/>
+          </a:xfrm>
+          <a:prstGeom prst="rect">
+            <a:avLst/>
+          </a:prstGeom>
+          <a:noFill/>
+          <a:ln/>
+        </p:spPr>
+        <p:txBody>
+          <a:bodyPr wrap="square" lIns="0" tIns="0" rIns="0" bIns="0" rtlCol="0" anchor="t"/>
+          <a:lstStyle/>
+          <a:p>
+            <a:pPr indent="0" marL="0">
+              <a:buNone/>
+            </a:pPr>
+            <a:r>
+              <a:rPr lang="en-US" sz="1050" b="1" dirty="0">
                 <a:solidFill>
                   <a:srgbClr val="0057FF"/>
                 </a:solidFill>
@@ -17218,22 +17763,22 @@
                 <a:ea typeface="Pretendard" pitchFamily="34" charset="-122"/>
                 <a:cs typeface="Pretendard" pitchFamily="34" charset="-120"/>
               </a:rPr>
-              <a:t>↓</a:t>
-            </a:r>
-            <a:endParaRPr lang="en-US" sz="1000" dirty="0"/>
-          </a:p>
-        </p:txBody>
-      </p:sp>
-      <p:sp>
-        <p:nvSpPr>
-          <p:cNvPr id="15" name="Shape 13"/>
-          <p:cNvSpPr/>
-          <p:nvPr/>
-        </p:nvSpPr>
-        <p:spPr>
-          <a:xfrm>
-            <a:off x="658368" y="3529584"/>
-            <a:ext cx="548640" cy="256032"/>
+              <a:t>03 콘셉트 실험</a:t>
+            </a:r>
+            <a:endParaRPr lang="en-US" sz="1050" dirty="0"/>
+          </a:p>
+        </p:txBody>
+      </p:sp>
+      <p:sp>
+        <p:nvSpPr>
+          <p:cNvPr id="30" name="Shape 28"/>
+          <p:cNvSpPr/>
+          <p:nvPr/>
+        </p:nvSpPr>
+        <p:spPr>
+          <a:xfrm>
+            <a:off x="6388456" y="2889504"/>
+            <a:ext cx="918972" cy="201168"/>
           </a:xfrm>
           <a:prstGeom prst="roundRect">
             <a:avLst>
@@ -17241,21 +17786,26 @@
             </a:avLst>
           </a:prstGeom>
           <a:solidFill>
-            <a:srgbClr val="0057FF"/>
+            <a:srgbClr val="EAF1FF"/>
           </a:solidFill>
-          <a:ln/>
-        </p:spPr>
-      </p:sp>
-      <p:sp>
-        <p:nvSpPr>
-          <p:cNvPr id="16" name="Text 14"/>
-          <p:cNvSpPr/>
-          <p:nvPr/>
-        </p:nvSpPr>
-        <p:spPr>
-          <a:xfrm>
-            <a:off x="658368" y="3529584"/>
-            <a:ext cx="548640" cy="256032"/>
+          <a:ln w="12700">
+            <a:solidFill>
+              <a:srgbClr val="0057FF"/>
+            </a:solidFill>
+            <a:prstDash val="solid"/>
+          </a:ln>
+        </p:spPr>
+      </p:sp>
+      <p:sp>
+        <p:nvSpPr>
+          <p:cNvPr id="31" name="Text 29"/>
+          <p:cNvSpPr/>
+          <p:nvPr/>
+        </p:nvSpPr>
+        <p:spPr>
+          <a:xfrm>
+            <a:off x="6388456" y="2889504"/>
+            <a:ext cx="918972" cy="201168"/>
           </a:xfrm>
           <a:prstGeom prst="rect">
             <a:avLst/>
@@ -17271,15 +17821,57 @@
               <a:buNone/>
             </a:pPr>
             <a:r>
+              <a:rPr lang="en-US" sz="750" b="1" dirty="0">
+                <a:solidFill>
+                  <a:srgbClr val="0057FF"/>
+                </a:solidFill>
+                <a:latin typeface="Pretendard" pitchFamily="34" charset="0"/>
+                <a:ea typeface="Pretendard" pitchFamily="34" charset="-122"/>
+                <a:cs typeface="Pretendard" pitchFamily="34" charset="-120"/>
+              </a:rPr>
+              <a:t>무작위 A/B/C</a:t>
+            </a:r>
+            <a:endParaRPr lang="en-US" sz="750" dirty="0"/>
+          </a:p>
+        </p:txBody>
+      </p:sp>
+      <p:sp>
+        <p:nvSpPr>
+          <p:cNvPr id="32" name="Text 30"/>
+          <p:cNvSpPr/>
+          <p:nvPr/>
+        </p:nvSpPr>
+        <p:spPr>
+          <a:xfrm>
+            <a:off x="6388456" y="3163824"/>
+            <a:ext cx="2188388" cy="329184"/>
+          </a:xfrm>
+          <a:prstGeom prst="rect">
+            <a:avLst/>
+          </a:prstGeom>
+          <a:noFill/>
+          <a:ln/>
+        </p:spPr>
+        <p:txBody>
+          <a:bodyPr wrap="square" lIns="0" tIns="0" rIns="0" bIns="0" rtlCol="0" anchor="t"/>
+          <a:lstStyle/>
+          <a:p>
+            <a:pPr indent="0" marL="0">
+              <a:lnSpc>
+                <a:spcPts val="1300"/>
+              </a:lnSpc>
+              <a:buNone/>
+            </a:pPr>
+            <a:r>
               <a:rPr lang="en-US" sz="1000" b="1" dirty="0">
                 <a:solidFill>
-                  <a:srgbClr val="FFFFFF"/>
-                </a:solidFill>
-                <a:latin typeface="Pretendard" pitchFamily="34" charset="0"/>
-                <a:ea typeface="Pretendard" pitchFamily="34" charset="-122"/>
-                <a:cs typeface="Pretendard" pitchFamily="34" charset="-120"/>
-              </a:rPr>
-              <a:t>효과</a:t>
+                  <a:srgbClr val="191919"/>
+                </a:solidFill>
+                <a:latin typeface="Pretendard" pitchFamily="34" charset="0"/>
+                <a:ea typeface="Pretendard" pitchFamily="34" charset="-122"/>
+                <a:cs typeface="Pretendard" pitchFamily="34" charset="-120"/>
+              </a:rPr>
+              <a:t>현대화 펭귄이 실제로 더 나은가</a:t>
             </a:r>
             <a:endParaRPr lang="en-US" sz="1000" dirty="0"/>
           </a:p>
@@ -17287,33 +17879,33 @@
       </p:sp>
       <p:sp>
         <p:nvSpPr>
-          <p:cNvPr id="17" name="Text 15"/>
-          <p:cNvSpPr/>
-          <p:nvPr/>
-        </p:nvSpPr>
-        <p:spPr>
-          <a:xfrm>
-            <a:off x="1316736" y="3511296"/>
-            <a:ext cx="2743200" cy="292608"/>
-          </a:xfrm>
-          <a:prstGeom prst="rect">
-            <a:avLst/>
-          </a:prstGeom>
-          <a:noFill/>
-          <a:ln/>
-        </p:spPr>
-        <p:txBody>
-          <a:bodyPr wrap="square" lIns="0" tIns="0" rIns="0" bIns="0" rtlCol="0" anchor="ctr"/>
+          <p:cNvPr id="33" name="Text 31"/>
+          <p:cNvSpPr/>
+          <p:nvPr/>
+        </p:nvSpPr>
+        <p:spPr>
+          <a:xfrm>
+            <a:off x="6388456" y="3547872"/>
+            <a:ext cx="2188388" cy="402336"/>
+          </a:xfrm>
+          <a:prstGeom prst="rect">
+            <a:avLst/>
+          </a:prstGeom>
+          <a:noFill/>
+          <a:ln/>
+        </p:spPr>
+        <p:txBody>
+          <a:bodyPr wrap="square" lIns="0" tIns="0" rIns="0" bIns="0" rtlCol="0" anchor="t"/>
           <a:lstStyle/>
           <a:p>
             <a:pPr indent="0" marL="0">
               <a:lnSpc>
-                <a:spcPts val="1200"/>
+                <a:spcPts val="1100"/>
               </a:lnSpc>
               <a:buNone/>
             </a:pPr>
             <a:r>
-              <a:rPr lang="en-US" sz="950" dirty="0">
+              <a:rPr lang="en-US" sz="850" dirty="0">
                 <a:solidFill>
                   <a:srgbClr val="3C3C3C"/>
                 </a:solidFill>
@@ -17321,99 +17913,41 @@
                 <a:ea typeface="Pretendard" pitchFamily="34" charset="-122"/>
                 <a:cs typeface="Pretendard" pitchFamily="34" charset="-120"/>
               </a:rPr>
-              <a:t>제품 관심과 브랜드 기억을 실제로 높이는가</a:t>
-            </a:r>
-            <a:endParaRPr lang="en-US" sz="950" dirty="0"/>
-          </a:p>
-        </p:txBody>
-      </p:sp>
-      <p:sp>
-        <p:nvSpPr>
-          <p:cNvPr id="18" name="Shape 16"/>
-          <p:cNvSpPr/>
-          <p:nvPr/>
-        </p:nvSpPr>
-        <p:spPr>
-          <a:xfrm>
-            <a:off x="658368" y="4005072"/>
-            <a:ext cx="3401568" cy="1371600"/>
-          </a:xfrm>
-          <a:prstGeom prst="roundRect">
-            <a:avLst>
-              <a:gd name="adj" fmla="val 6000"/>
-            </a:avLst>
-          </a:prstGeom>
-          <a:solidFill>
-            <a:srgbClr val="F5F5F7"/>
-          </a:solidFill>
-          <a:ln/>
-        </p:spPr>
-      </p:sp>
-      <p:sp>
-        <p:nvSpPr>
-          <p:cNvPr id="19" name="Text 17"/>
-          <p:cNvSpPr/>
-          <p:nvPr/>
-        </p:nvSpPr>
-        <p:spPr>
-          <a:xfrm>
-            <a:off x="859536" y="4133088"/>
-            <a:ext cx="2999232" cy="201168"/>
-          </a:xfrm>
-          <a:prstGeom prst="rect">
-            <a:avLst/>
-          </a:prstGeom>
-          <a:noFill/>
-          <a:ln/>
-        </p:spPr>
-        <p:txBody>
-          <a:bodyPr wrap="square" lIns="0" tIns="0" rIns="0" bIns="0" rtlCol="0" anchor="t"/>
-          <a:lstStyle/>
-          <a:p>
-            <a:pPr indent="0" marL="0">
-              <a:buNone/>
-            </a:pPr>
-            <a:r>
-              <a:rPr lang="en-US" sz="950" b="1" dirty="0">
-                <a:solidFill>
-                  <a:srgbClr val="707070"/>
-                </a:solidFill>
-                <a:latin typeface="Pretendard" pitchFamily="34" charset="0"/>
-                <a:ea typeface="Pretendard" pitchFamily="34" charset="-122"/>
-                <a:cs typeface="Pretendard" pitchFamily="34" charset="-120"/>
-              </a:rPr>
-              <a:t>검증 방식</a:t>
-            </a:r>
-            <a:endParaRPr lang="en-US" sz="950" dirty="0"/>
-          </a:p>
-        </p:txBody>
-      </p:sp>
-      <p:sp>
-        <p:nvSpPr>
-          <p:cNvPr id="20" name="Text 18"/>
-          <p:cNvSpPr/>
-          <p:nvPr/>
-        </p:nvSpPr>
-        <p:spPr>
-          <a:xfrm>
-            <a:off x="859536" y="4352544"/>
-            <a:ext cx="2999232" cy="182880"/>
-          </a:xfrm>
-          <a:prstGeom prst="rect">
-            <a:avLst/>
-          </a:prstGeom>
-          <a:noFill/>
-          <a:ln/>
-        </p:spPr>
-        <p:txBody>
-          <a:bodyPr wrap="square" lIns="0" tIns="0" rIns="0" bIns="0" rtlCol="0" anchor="t"/>
-          <a:lstStyle/>
-          <a:p>
-            <a:pPr indent="0" marL="0">
-              <a:buNone/>
-            </a:pPr>
-            <a:r>
-              <a:rPr lang="en-US" sz="950" b="1" dirty="0">
+              <a:t>A 과거 원형 · B 현대화 펭귄 · C 캐릭터 없음</a:t>
+            </a:r>
+            <a:endParaRPr lang="en-US" sz="850" dirty="0"/>
+          </a:p>
+        </p:txBody>
+      </p:sp>
+      <p:sp>
+        <p:nvSpPr>
+          <p:cNvPr id="34" name="Text 32"/>
+          <p:cNvSpPr/>
+          <p:nvPr/>
+        </p:nvSpPr>
+        <p:spPr>
+          <a:xfrm>
+            <a:off x="6388456" y="4005072"/>
+            <a:ext cx="2188388" cy="402336"/>
+          </a:xfrm>
+          <a:prstGeom prst="rect">
+            <a:avLst/>
+          </a:prstGeom>
+          <a:noFill/>
+          <a:ln/>
+        </p:spPr>
+        <p:txBody>
+          <a:bodyPr wrap="square" lIns="0" tIns="0" rIns="0" bIns="0" rtlCol="0" anchor="t"/>
+          <a:lstStyle/>
+          <a:p>
+            <a:pPr indent="0" marL="0">
+              <a:lnSpc>
+                <a:spcPts val="1100"/>
+              </a:lnSpc>
+              <a:buNone/>
+            </a:pPr>
+            <a:r>
+              <a:rPr lang="en-US" sz="850" b="1" dirty="0">
                 <a:solidFill>
                   <a:srgbClr val="191919"/>
                 </a:solidFill>
@@ -17421,22 +17955,22 @@
                 <a:ea typeface="Pretendard" pitchFamily="34" charset="-122"/>
                 <a:cs typeface="Pretendard" pitchFamily="34" charset="-120"/>
               </a:rPr>
-              <a:t>비보조·보조 인지 조사</a:t>
-            </a:r>
-            <a:endParaRPr lang="en-US" sz="950" dirty="0"/>
-          </a:p>
-        </p:txBody>
-      </p:sp>
-      <p:sp>
-        <p:nvSpPr>
-          <p:cNvPr id="21" name="Text 19"/>
-          <p:cNvSpPr/>
-          <p:nvPr/>
-        </p:nvSpPr>
-        <p:spPr>
-          <a:xfrm>
-            <a:off x="859536" y="4517136"/>
-            <a:ext cx="2999232" cy="219456"/>
+              <a:t>1인 1안만 무작위 노출, B와 C의 차이를 본다</a:t>
+            </a:r>
+            <a:endParaRPr lang="en-US" sz="850" dirty="0"/>
+          </a:p>
+        </p:txBody>
+      </p:sp>
+      <p:sp>
+        <p:nvSpPr>
+          <p:cNvPr id="35" name="Text 33"/>
+          <p:cNvSpPr/>
+          <p:nvPr/>
+        </p:nvSpPr>
+        <p:spPr>
+          <a:xfrm>
+            <a:off x="6388456" y="4480560"/>
+            <a:ext cx="2188388" cy="310896"/>
           </a:xfrm>
           <a:prstGeom prst="rect">
             <a:avLst/>
@@ -17455,253 +17989,96 @@
               <a:buNone/>
             </a:pPr>
             <a:r>
-              <a:rPr lang="en-US" sz="800" dirty="0">
-                <a:solidFill>
-                  <a:srgbClr val="707070"/>
-                </a:solidFill>
-                <a:latin typeface="Pretendard" pitchFamily="34" charset="0"/>
-                <a:ea typeface="Pretendard" pitchFamily="34" charset="-122"/>
-                <a:cs typeface="Pretendard" pitchFamily="34" charset="-120"/>
-              </a:rPr>
-              <a:t>과거 광고 기억, 청호나이스 연결률</a:t>
-            </a:r>
-            <a:endParaRPr lang="en-US" sz="800" dirty="0"/>
-          </a:p>
-        </p:txBody>
-      </p:sp>
-      <p:sp>
-        <p:nvSpPr>
-          <p:cNvPr id="22" name="Text 20"/>
-          <p:cNvSpPr/>
-          <p:nvPr/>
-        </p:nvSpPr>
-        <p:spPr>
-          <a:xfrm>
-            <a:off x="859536" y="4681728"/>
-            <a:ext cx="2999232" cy="182880"/>
-          </a:xfrm>
-          <a:prstGeom prst="rect">
-            <a:avLst/>
-          </a:prstGeom>
-          <a:noFill/>
-          <a:ln/>
-        </p:spPr>
-        <p:txBody>
-          <a:bodyPr wrap="square" lIns="0" tIns="0" rIns="0" bIns="0" rtlCol="0" anchor="t"/>
-          <a:lstStyle/>
-          <a:p>
-            <a:pPr indent="0" marL="0">
-              <a:buNone/>
-            </a:pPr>
-            <a:r>
-              <a:rPr lang="en-US" sz="950" b="1" dirty="0">
-                <a:solidFill>
-                  <a:srgbClr val="191919"/>
-                </a:solidFill>
-                <a:latin typeface="Pretendard" pitchFamily="34" charset="0"/>
-                <a:ea typeface="Pretendard" pitchFamily="34" charset="-122"/>
-                <a:cs typeface="Pretendard" pitchFamily="34" charset="-120"/>
-              </a:rPr>
-              <a:t>A/B/C 콘셉트 테스트</a:t>
-            </a:r>
-            <a:endParaRPr lang="en-US" sz="950" dirty="0"/>
-          </a:p>
-        </p:txBody>
-      </p:sp>
-      <p:sp>
-        <p:nvSpPr>
-          <p:cNvPr id="23" name="Text 21"/>
-          <p:cNvSpPr/>
-          <p:nvPr/>
-        </p:nvSpPr>
-        <p:spPr>
-          <a:xfrm>
-            <a:off x="859536" y="4846320"/>
-            <a:ext cx="2999232" cy="219456"/>
-          </a:xfrm>
-          <a:prstGeom prst="rect">
-            <a:avLst/>
-          </a:prstGeom>
-          <a:noFill/>
-          <a:ln/>
-        </p:spPr>
-        <p:txBody>
-          <a:bodyPr wrap="square" lIns="0" tIns="0" rIns="0" bIns="0" rtlCol="0" anchor="t"/>
-          <a:lstStyle/>
-          <a:p>
-            <a:pPr indent="0" marL="0">
-              <a:lnSpc>
-                <a:spcPts val="1000"/>
-              </a:lnSpc>
-              <a:buNone/>
-            </a:pPr>
-            <a:r>
-              <a:rPr lang="en-US" sz="800" dirty="0">
-                <a:solidFill>
-                  <a:srgbClr val="707070"/>
-                </a:solidFill>
-                <a:latin typeface="Pretendard" pitchFamily="34" charset="0"/>
-                <a:ea typeface="Pretendard" pitchFamily="34" charset="-122"/>
-                <a:cs typeface="Pretendard" pitchFamily="34" charset="-120"/>
-              </a:rPr>
-              <a:t>과거 원형 / 현대화 펭귄 / 캐릭터 없는 제품형</a:t>
-            </a:r>
-            <a:endParaRPr lang="en-US" sz="800" dirty="0"/>
-          </a:p>
-        </p:txBody>
-      </p:sp>
-      <p:sp>
-        <p:nvSpPr>
-          <p:cNvPr id="24" name="Text 22"/>
-          <p:cNvSpPr/>
-          <p:nvPr/>
-        </p:nvSpPr>
-        <p:spPr>
-          <a:xfrm>
-            <a:off x="859536" y="5010912"/>
-            <a:ext cx="2999232" cy="182880"/>
-          </a:xfrm>
-          <a:prstGeom prst="rect">
-            <a:avLst/>
-          </a:prstGeom>
-          <a:noFill/>
-          <a:ln/>
-        </p:spPr>
-        <p:txBody>
-          <a:bodyPr wrap="square" lIns="0" tIns="0" rIns="0" bIns="0" rtlCol="0" anchor="t"/>
-          <a:lstStyle/>
-          <a:p>
-            <a:pPr indent="0" marL="0">
-              <a:buNone/>
-            </a:pPr>
-            <a:r>
-              <a:rPr lang="en-US" sz="950" b="1" dirty="0">
-                <a:solidFill>
-                  <a:srgbClr val="191919"/>
-                </a:solidFill>
-                <a:latin typeface="Pretendard" pitchFamily="34" charset="0"/>
-                <a:ea typeface="Pretendard" pitchFamily="34" charset="-122"/>
-                <a:cs typeface="Pretendard" pitchFamily="34" charset="-120"/>
-              </a:rPr>
-              <a:t>노출 전후 효과 비교</a:t>
-            </a:r>
-            <a:endParaRPr lang="en-US" sz="950" dirty="0"/>
-          </a:p>
-        </p:txBody>
-      </p:sp>
-      <p:sp>
-        <p:nvSpPr>
-          <p:cNvPr id="25" name="Text 23"/>
-          <p:cNvSpPr/>
-          <p:nvPr/>
-        </p:nvSpPr>
-        <p:spPr>
-          <a:xfrm>
-            <a:off x="859536" y="5175504"/>
-            <a:ext cx="2999232" cy="219456"/>
-          </a:xfrm>
-          <a:prstGeom prst="rect">
-            <a:avLst/>
-          </a:prstGeom>
-          <a:noFill/>
-          <a:ln/>
-        </p:spPr>
-        <p:txBody>
-          <a:bodyPr wrap="square" lIns="0" tIns="0" rIns="0" bIns="0" rtlCol="0" anchor="t"/>
-          <a:lstStyle/>
-          <a:p>
-            <a:pPr indent="0" marL="0">
-              <a:lnSpc>
-                <a:spcPts val="1000"/>
-              </a:lnSpc>
-              <a:buNone/>
-            </a:pPr>
-            <a:r>
-              <a:rPr lang="en-US" sz="800" dirty="0">
-                <a:solidFill>
-                  <a:srgbClr val="707070"/>
-                </a:solidFill>
-                <a:latin typeface="Pretendard" pitchFamily="34" charset="0"/>
-                <a:ea typeface="Pretendard" pitchFamily="34" charset="-122"/>
-                <a:cs typeface="Pretendard" pitchFamily="34" charset="-120"/>
-              </a:rPr>
-              <a:t>브랜드 친근도, 제품 이해도, 제품 관심도, 렌탈 고려도</a:t>
-            </a:r>
-            <a:endParaRPr lang="en-US" sz="800" dirty="0"/>
-          </a:p>
-        </p:txBody>
-      </p:sp>
-      <p:sp>
-        <p:nvSpPr>
-          <p:cNvPr id="26" name="Text 24"/>
-          <p:cNvSpPr/>
-          <p:nvPr/>
-        </p:nvSpPr>
-        <p:spPr>
-          <a:xfrm>
-            <a:off x="4517136" y="2084832"/>
-            <a:ext cx="7016191" cy="219456"/>
-          </a:xfrm>
-          <a:prstGeom prst="rect">
-            <a:avLst/>
-          </a:prstGeom>
-          <a:noFill/>
-          <a:ln/>
-        </p:spPr>
-        <p:txBody>
-          <a:bodyPr wrap="square" lIns="0" tIns="0" rIns="0" bIns="0" rtlCol="0" anchor="t"/>
-          <a:lstStyle/>
-          <a:p>
-            <a:pPr indent="0" marL="0">
-              <a:buNone/>
-            </a:pPr>
-            <a:r>
-              <a:rPr lang="en-US" sz="1050" b="1" dirty="0">
-                <a:solidFill>
-                  <a:srgbClr val="191919"/>
-                </a:solidFill>
-                <a:latin typeface="Pretendard" pitchFamily="34" charset="0"/>
-                <a:ea typeface="Pretendard" pitchFamily="34" charset="-122"/>
-                <a:cs typeface="Pretendard" pitchFamily="34" charset="-120"/>
-              </a:rPr>
-              <a:t>검증 결과에 따른 펭귄 활용 수준</a:t>
-            </a:r>
-            <a:endParaRPr lang="en-US" sz="1050" dirty="0"/>
-          </a:p>
-        </p:txBody>
-      </p:sp>
-      <p:sp>
-        <p:nvSpPr>
-          <p:cNvPr id="27" name="Shape 25"/>
-          <p:cNvSpPr/>
-          <p:nvPr/>
-        </p:nvSpPr>
-        <p:spPr>
-          <a:xfrm>
-            <a:off x="4517136" y="2359152"/>
-            <a:ext cx="7016191" cy="694944"/>
+              <a:rPr lang="en-US" sz="750" dirty="0">
+                <a:solidFill>
+                  <a:srgbClr val="959595"/>
+                </a:solidFill>
+                <a:latin typeface="Pretendard" pitchFamily="34" charset="0"/>
+                <a:ea typeface="Pretendard" pitchFamily="34" charset="-122"/>
+                <a:cs typeface="Pretendard" pitchFamily="34" charset="-120"/>
+              </a:rPr>
+              <a:t>나란히 보여주면 취향 투표가 된다</a:t>
+            </a:r>
+            <a:endParaRPr lang="en-US" sz="750" dirty="0"/>
+          </a:p>
+        </p:txBody>
+      </p:sp>
+      <p:sp>
+        <p:nvSpPr>
+          <p:cNvPr id="36" name="Shape 34"/>
+          <p:cNvSpPr/>
+          <p:nvPr/>
+        </p:nvSpPr>
+        <p:spPr>
+          <a:xfrm>
+            <a:off x="8979179" y="2487168"/>
+            <a:ext cx="2554148" cy="2395728"/>
           </a:xfrm>
           <a:prstGeom prst="roundRect">
             <a:avLst>
-              <a:gd name="adj" fmla="val 9211"/>
+              <a:gd name="adj" fmla="val 3435"/>
             </a:avLst>
           </a:prstGeom>
           <a:solidFill>
-            <a:srgbClr val="0057FF"/>
+            <a:srgbClr val="FFFFFF"/>
           </a:solidFill>
-          <a:ln/>
-        </p:spPr>
-      </p:sp>
-      <p:sp>
-        <p:nvSpPr>
-          <p:cNvPr id="28" name="Shape 26"/>
-          <p:cNvSpPr/>
-          <p:nvPr/>
-        </p:nvSpPr>
-        <p:spPr>
-          <a:xfrm>
-            <a:off x="4681728" y="2587752"/>
-            <a:ext cx="566928" cy="237744"/>
+          <a:ln w="12700">
+            <a:solidFill>
+              <a:srgbClr val="E8E8E8"/>
+            </a:solidFill>
+            <a:prstDash val="solid"/>
+          </a:ln>
+        </p:spPr>
+      </p:sp>
+      <p:sp>
+        <p:nvSpPr>
+          <p:cNvPr id="37" name="Text 35"/>
+          <p:cNvSpPr/>
+          <p:nvPr/>
+        </p:nvSpPr>
+        <p:spPr>
+          <a:xfrm>
+            <a:off x="9162059" y="2633472"/>
+            <a:ext cx="2188388" cy="219456"/>
+          </a:xfrm>
+          <a:prstGeom prst="rect">
+            <a:avLst/>
+          </a:prstGeom>
+          <a:noFill/>
+          <a:ln/>
+        </p:spPr>
+        <p:txBody>
+          <a:bodyPr wrap="square" lIns="0" tIns="0" rIns="0" bIns="0" rtlCol="0" anchor="t"/>
+          <a:lstStyle/>
+          <a:p>
+            <a:pPr indent="0" marL="0">
+              <a:buNone/>
+            </a:pPr>
+            <a:r>
+              <a:rPr lang="en-US" sz="1050" b="1" dirty="0">
+                <a:solidFill>
+                  <a:srgbClr val="0057FF"/>
+                </a:solidFill>
+                <a:latin typeface="Pretendard" pitchFamily="34" charset="0"/>
+                <a:ea typeface="Pretendard" pitchFamily="34" charset="-122"/>
+                <a:cs typeface="Pretendard" pitchFamily="34" charset="-120"/>
+              </a:rPr>
+              <a:t>04 효과 검증</a:t>
+            </a:r>
+            <a:endParaRPr lang="en-US" sz="1050" dirty="0"/>
+          </a:p>
+        </p:txBody>
+      </p:sp>
+      <p:sp>
+        <p:nvSpPr>
+          <p:cNvPr id="38" name="Shape 36"/>
+          <p:cNvSpPr/>
+          <p:nvPr/>
+        </p:nvSpPr>
+        <p:spPr>
+          <a:xfrm>
+            <a:off x="9162059" y="2889504"/>
+            <a:ext cx="1307592" cy="201168"/>
           </a:xfrm>
           <a:prstGeom prst="roundRect">
             <a:avLst>
@@ -17709,21 +18086,26 @@
             </a:avLst>
           </a:prstGeom>
           <a:solidFill>
-            <a:srgbClr val="FFFFFF"/>
+            <a:srgbClr val="F0F0F0"/>
           </a:solidFill>
-          <a:ln/>
-        </p:spPr>
-      </p:sp>
-      <p:sp>
-        <p:nvSpPr>
-          <p:cNvPr id="29" name="Text 27"/>
-          <p:cNvSpPr/>
-          <p:nvPr/>
-        </p:nvSpPr>
-        <p:spPr>
-          <a:xfrm>
-            <a:off x="4681728" y="2587752"/>
-            <a:ext cx="566928" cy="237744"/>
+          <a:ln w="12700">
+            <a:solidFill>
+              <a:srgbClr val="E8E8E8"/>
+            </a:solidFill>
+            <a:prstDash val="solid"/>
+          </a:ln>
+        </p:spPr>
+      </p:sp>
+      <p:sp>
+        <p:nvSpPr>
+          <p:cNvPr id="39" name="Text 37"/>
+          <p:cNvSpPr/>
+          <p:nvPr/>
+        </p:nvSpPr>
+        <p:spPr>
+          <a:xfrm>
+            <a:off x="9162059" y="2889504"/>
+            <a:ext cx="1307592" cy="201168"/>
           </a:xfrm>
           <a:prstGeom prst="rect">
             <a:avLst/>
@@ -17739,69 +18121,30 @@
               <a:buNone/>
             </a:pPr>
             <a:r>
-              <a:rPr lang="en-US" sz="900" b="1" dirty="0">
-                <a:solidFill>
-                  <a:srgbClr val="0057FF"/>
-                </a:solidFill>
-                <a:latin typeface="Pretendard" pitchFamily="34" charset="0"/>
-                <a:ea typeface="Pretendard" pitchFamily="34" charset="-122"/>
-                <a:cs typeface="Pretendard" pitchFamily="34" charset="-120"/>
-              </a:rPr>
-              <a:t>적극</a:t>
-            </a:r>
-            <a:endParaRPr lang="en-US" sz="900" dirty="0"/>
-          </a:p>
-        </p:txBody>
-      </p:sp>
-      <p:sp>
-        <p:nvSpPr>
-          <p:cNvPr id="30" name="Text 28"/>
-          <p:cNvSpPr/>
-          <p:nvPr/>
-        </p:nvSpPr>
-        <p:spPr>
-          <a:xfrm>
-            <a:off x="5468112" y="2468880"/>
-            <a:ext cx="4775911" cy="237744"/>
-          </a:xfrm>
-          <a:prstGeom prst="rect">
-            <a:avLst/>
-          </a:prstGeom>
-          <a:noFill/>
-          <a:ln/>
-        </p:spPr>
-        <p:txBody>
-          <a:bodyPr wrap="square" lIns="0" tIns="0" rIns="0" bIns="0" rtlCol="0" anchor="t"/>
-          <a:lstStyle/>
-          <a:p>
-            <a:pPr indent="0" marL="0">
-              <a:buNone/>
-            </a:pPr>
-            <a:r>
-              <a:rPr lang="en-US" sz="1200" b="1" dirty="0">
-                <a:solidFill>
-                  <a:srgbClr val="FFFFFF"/>
-                </a:solidFill>
-                <a:latin typeface="Pretendard" pitchFamily="34" charset="0"/>
-                <a:ea typeface="Pretendard" pitchFamily="34" charset="-122"/>
-                <a:cs typeface="Pretendard" pitchFamily="34" charset="-120"/>
-              </a:rPr>
-              <a:t>헤리티지 리바이벌</a:t>
-            </a:r>
-            <a:endParaRPr lang="en-US" sz="1200" dirty="0"/>
-          </a:p>
-        </p:txBody>
-      </p:sp>
-      <p:sp>
-        <p:nvSpPr>
-          <p:cNvPr id="31" name="Text 29"/>
-          <p:cNvSpPr/>
-          <p:nvPr/>
-        </p:nvSpPr>
-        <p:spPr>
-          <a:xfrm>
-            <a:off x="5468112" y="2724912"/>
-            <a:ext cx="4775911" cy="256032"/>
+              <a:rPr lang="en-US" sz="750" b="1" dirty="0">
+                <a:solidFill>
+                  <a:srgbClr val="707070"/>
+                </a:solidFill>
+                <a:latin typeface="Pretendard" pitchFamily="34" charset="0"/>
+                <a:ea typeface="Pretendard" pitchFamily="34" charset="-122"/>
+                <a:cs typeface="Pretendard" pitchFamily="34" charset="-120"/>
+              </a:rPr>
+              <a:t>지연 회상 · 캠페인 전후</a:t>
+            </a:r>
+            <a:endParaRPr lang="en-US" sz="750" dirty="0"/>
+          </a:p>
+        </p:txBody>
+      </p:sp>
+      <p:sp>
+        <p:nvSpPr>
+          <p:cNvPr id="40" name="Text 38"/>
+          <p:cNvSpPr/>
+          <p:nvPr/>
+        </p:nvSpPr>
+        <p:spPr>
+          <a:xfrm>
+            <a:off x="9162059" y="3163824"/>
+            <a:ext cx="2188388" cy="329184"/>
           </a:xfrm>
           <a:prstGeom prst="rect">
             <a:avLst/>
@@ -17815,20 +18158,62 @@
           <a:p>
             <a:pPr indent="0" marL="0">
               <a:lnSpc>
-                <a:spcPts val="1150"/>
+                <a:spcPts val="1300"/>
               </a:lnSpc>
               <a:buNone/>
             </a:pPr>
             <a:r>
+              <a:rPr lang="en-US" sz="1000" b="1" dirty="0">
+                <a:solidFill>
+                  <a:srgbClr val="191919"/>
+                </a:solidFill>
+                <a:latin typeface="Pretendard" pitchFamily="34" charset="0"/>
+                <a:ea typeface="Pretendard" pitchFamily="34" charset="-122"/>
+                <a:cs typeface="Pretendard" pitchFamily="34" charset="-120"/>
+              </a:rPr>
+              <a:t>기억이 브랜드와 제품까지 갔는가</a:t>
+            </a:r>
+            <a:endParaRPr lang="en-US" sz="1000" dirty="0"/>
+          </a:p>
+        </p:txBody>
+      </p:sp>
+      <p:sp>
+        <p:nvSpPr>
+          <p:cNvPr id="41" name="Text 39"/>
+          <p:cNvSpPr/>
+          <p:nvPr/>
+        </p:nvSpPr>
+        <p:spPr>
+          <a:xfrm>
+            <a:off x="9162059" y="3547872"/>
+            <a:ext cx="2188388" cy="402336"/>
+          </a:xfrm>
+          <a:prstGeom prst="rect">
+            <a:avLst/>
+          </a:prstGeom>
+          <a:noFill/>
+          <a:ln/>
+        </p:spPr>
+        <p:txBody>
+          <a:bodyPr wrap="square" lIns="0" tIns="0" rIns="0" bIns="0" rtlCol="0" anchor="t"/>
+          <a:lstStyle/>
+          <a:p>
+            <a:pPr indent="0" marL="0">
+              <a:lnSpc>
+                <a:spcPts val="1100"/>
+              </a:lnSpc>
+              <a:buNone/>
+            </a:pPr>
+            <a:r>
               <a:rPr lang="en-US" sz="850" dirty="0">
                 <a:solidFill>
-                  <a:srgbClr val="E3ECFF"/>
-                </a:solidFill>
-                <a:latin typeface="Pretendard" pitchFamily="34" charset="0"/>
-                <a:ea typeface="Pretendard" pitchFamily="34" charset="-122"/>
-                <a:cs typeface="Pretendard" pitchFamily="34" charset="-120"/>
-              </a:rPr>
-              <a:t>과거 광고를 오마주로 전면에. ‘그때 그 펭귄’ 메시지로 헤리티지 활용.</a:t>
+                  <a:srgbClr val="3C3C3C"/>
+                </a:solidFill>
+                <a:latin typeface="Pretendard" pitchFamily="34" charset="0"/>
+                <a:ea typeface="Pretendard" pitchFamily="34" charset="-122"/>
+                <a:cs typeface="Pretendard" pitchFamily="34" charset="-120"/>
+              </a:rPr>
+              <a:t>브랜드 기억 · 제품 이해 · 관심 · 렌탈 고려 · 프리미엄 이미지</a:t>
             </a:r>
             <a:endParaRPr lang="en-US" sz="850" dirty="0"/>
           </a:p>
@@ -17836,38 +18221,41 @@
       </p:sp>
       <p:sp>
         <p:nvSpPr>
-          <p:cNvPr id="32" name="Text 30"/>
-          <p:cNvSpPr/>
-          <p:nvPr/>
-        </p:nvSpPr>
-        <p:spPr>
-          <a:xfrm>
-            <a:off x="10390327" y="2596896"/>
-            <a:ext cx="960120" cy="219456"/>
-          </a:xfrm>
-          <a:prstGeom prst="rect">
-            <a:avLst/>
-          </a:prstGeom>
-          <a:noFill/>
-          <a:ln/>
-        </p:spPr>
-        <p:txBody>
-          <a:bodyPr wrap="square" lIns="0" tIns="0" rIns="0" bIns="0" rtlCol="0" anchor="ctr"/>
-          <a:lstStyle/>
-          <a:p>
-            <a:pPr algn="r" indent="0" marL="0">
+          <p:cNvPr id="42" name="Text 40"/>
+          <p:cNvSpPr/>
+          <p:nvPr/>
+        </p:nvSpPr>
+        <p:spPr>
+          <a:xfrm>
+            <a:off x="9162059" y="4005072"/>
+            <a:ext cx="2188388" cy="402336"/>
+          </a:xfrm>
+          <a:prstGeom prst="rect">
+            <a:avLst/>
+          </a:prstGeom>
+          <a:noFill/>
+          <a:ln/>
+        </p:spPr>
+        <p:txBody>
+          <a:bodyPr wrap="square" lIns="0" tIns="0" rIns="0" bIns="0" rtlCol="0" anchor="t"/>
+          <a:lstStyle/>
+          <a:p>
+            <a:pPr indent="0" marL="0">
+              <a:lnSpc>
+                <a:spcPts val="1100"/>
+              </a:lnSpc>
               <a:buNone/>
             </a:pPr>
             <a:r>
               <a:rPr lang="en-US" sz="850" b="1" dirty="0">
                 <a:solidFill>
-                  <a:srgbClr val="CFE0FF"/>
-                </a:solidFill>
-                <a:latin typeface="Pretendard" pitchFamily="34" charset="0"/>
-                <a:ea typeface="Pretendard" pitchFamily="34" charset="-122"/>
-                <a:cs typeface="Pretendard" pitchFamily="34" charset="-120"/>
-              </a:rPr>
-              <a:t>기억 O · 효과 O</a:t>
+                  <a:srgbClr val="191919"/>
+                </a:solidFill>
+                <a:latin typeface="Pretendard" pitchFamily="34" charset="0"/>
+                <a:ea typeface="Pretendard" pitchFamily="34" charset="-122"/>
+                <a:cs typeface="Pretendard" pitchFamily="34" charset="-120"/>
+              </a:rPr>
+              <a:t>질문 4~5개 뒤에 브랜드를 되묻는다</a:t>
             </a:r>
             <a:endParaRPr lang="en-US" sz="850" dirty="0"/>
           </a:p>
@@ -17875,18 +18263,174 @@
       </p:sp>
       <p:sp>
         <p:nvSpPr>
-          <p:cNvPr id="33" name="Shape 31"/>
-          <p:cNvSpPr/>
-          <p:nvPr/>
-        </p:nvSpPr>
-        <p:spPr>
-          <a:xfrm>
-            <a:off x="4517136" y="3145536"/>
-            <a:ext cx="7016191" cy="694944"/>
+          <p:cNvPr id="43" name="Text 41"/>
+          <p:cNvSpPr/>
+          <p:nvPr/>
+        </p:nvSpPr>
+        <p:spPr>
+          <a:xfrm>
+            <a:off x="9162059" y="4480560"/>
+            <a:ext cx="2188388" cy="310896"/>
+          </a:xfrm>
+          <a:prstGeom prst="rect">
+            <a:avLst/>
+          </a:prstGeom>
+          <a:noFill/>
+          <a:ln/>
+        </p:spPr>
+        <p:txBody>
+          <a:bodyPr wrap="square" lIns="0" tIns="0" rIns="0" bIns="0" rtlCol="0" anchor="t"/>
+          <a:lstStyle/>
+          <a:p>
+            <a:pPr indent="0" marL="0">
+              <a:lnSpc>
+                <a:spcPts val="1000"/>
+              </a:lnSpc>
+              <a:buNone/>
+            </a:pPr>
+            <a:r>
+              <a:rPr lang="en-US" sz="750" dirty="0">
+                <a:solidFill>
+                  <a:srgbClr val="959595"/>
+                </a:solidFill>
+                <a:latin typeface="Pretendard" pitchFamily="34" charset="0"/>
+                <a:ea typeface="Pretendard" pitchFamily="34" charset="-122"/>
+                <a:cs typeface="Pretendard" pitchFamily="34" charset="-120"/>
+              </a:rPr>
+              <a:t>펭귄만 남고 제품이 남지 않는 비율을 본다</a:t>
+            </a:r>
+            <a:endParaRPr lang="en-US" sz="750" dirty="0"/>
+          </a:p>
+        </p:txBody>
+      </p:sp>
+      <p:sp>
+        <p:nvSpPr>
+          <p:cNvPr id="44" name="Text 42"/>
+          <p:cNvSpPr/>
+          <p:nvPr/>
+        </p:nvSpPr>
+        <p:spPr>
+          <a:xfrm>
+            <a:off x="658368" y="5102352"/>
+            <a:ext cx="1371600" cy="237744"/>
+          </a:xfrm>
+          <a:prstGeom prst="rect">
+            <a:avLst/>
+          </a:prstGeom>
+          <a:noFill/>
+          <a:ln/>
+        </p:spPr>
+        <p:txBody>
+          <a:bodyPr wrap="square" lIns="0" tIns="0" rIns="0" bIns="0" rtlCol="0" anchor="t"/>
+          <a:lstStyle/>
+          <a:p>
+            <a:pPr indent="0" marL="0">
+              <a:buNone/>
+            </a:pPr>
+            <a:r>
+              <a:rPr lang="en-US" sz="850" b="1" dirty="0">
+                <a:solidFill>
+                  <a:srgbClr val="707070"/>
+                </a:solidFill>
+                <a:latin typeface="Pretendard" pitchFamily="34" charset="0"/>
+                <a:ea typeface="Pretendard" pitchFamily="34" charset="-122"/>
+                <a:cs typeface="Pretendard" pitchFamily="34" charset="-120"/>
+              </a:rPr>
+              <a:t>결과에 따른 활용 수준</a:t>
+            </a:r>
+            <a:endParaRPr lang="en-US" sz="850" dirty="0"/>
+          </a:p>
+        </p:txBody>
+      </p:sp>
+      <p:sp>
+        <p:nvSpPr>
+          <p:cNvPr id="45" name="Shape 43"/>
+          <p:cNvSpPr/>
+          <p:nvPr/>
+        </p:nvSpPr>
+        <p:spPr>
+          <a:xfrm>
+            <a:off x="2121408" y="5065776"/>
+            <a:ext cx="2263826" cy="310896"/>
           </a:xfrm>
           <a:prstGeom prst="roundRect">
             <a:avLst>
-              <a:gd name="adj" fmla="val 9211"/>
+              <a:gd name="adj" fmla="val 20588"/>
+            </a:avLst>
+          </a:prstGeom>
+          <a:solidFill>
+            <a:srgbClr val="0057FF"/>
+          </a:solidFill>
+          <a:ln/>
+        </p:spPr>
+      </p:sp>
+      <p:sp>
+        <p:nvSpPr>
+          <p:cNvPr id="46" name="Text 44"/>
+          <p:cNvSpPr/>
+          <p:nvPr/>
+        </p:nvSpPr>
+        <p:spPr>
+          <a:xfrm>
+            <a:off x="2267712" y="5065776"/>
+            <a:ext cx="1971218" cy="310896"/>
+          </a:xfrm>
+          <a:prstGeom prst="rect">
+            <a:avLst/>
+          </a:prstGeom>
+          <a:noFill/>
+          <a:ln/>
+        </p:spPr>
+        <p:txBody>
+          <a:bodyPr wrap="square" lIns="0" tIns="0" rIns="0" bIns="0" rtlCol="0" anchor="ctr"/>
+          <a:lstStyle/>
+          <a:p>
+            <a:pPr indent="0" marL="0">
+              <a:buNone/>
+            </a:pPr>
+            <a:r>
+              <a:rPr lang="en-US" sz="800" b="1" dirty="0">
+                <a:solidFill>
+                  <a:srgbClr val="CFE0FF"/>
+                </a:solidFill>
+                <a:latin typeface="Pretendard" pitchFamily="34" charset="0"/>
+                <a:ea typeface="Pretendard" pitchFamily="34" charset="-122"/>
+                <a:cs typeface="Pretendard" pitchFamily="34" charset="-120"/>
+              </a:rPr>
+              <a:t>적극  </a:t>
+            </a:r>
+            <a:pPr indent="0" marL="0">
+              <a:buNone/>
+            </a:pPr>
+            <a:r>
+              <a:rPr lang="en-US" sz="1000" b="1" dirty="0">
+                <a:solidFill>
+                  <a:srgbClr val="FFFFFF"/>
+                </a:solidFill>
+                <a:latin typeface="Pretendard" pitchFamily="34" charset="0"/>
+                <a:ea typeface="Pretendard" pitchFamily="34" charset="-122"/>
+                <a:cs typeface="Pretendard" pitchFamily="34" charset="-120"/>
+              </a:rPr>
+              <a:t>헤리티지 리바이벌</a:t>
+            </a:r>
+            <a:endParaRPr lang="en-US" sz="800" dirty="0"/>
+          </a:p>
+        </p:txBody>
+      </p:sp>
+      <p:sp>
+        <p:nvSpPr>
+          <p:cNvPr id="47" name="Shape 45"/>
+          <p:cNvSpPr/>
+          <p:nvPr/>
+        </p:nvSpPr>
+        <p:spPr>
+          <a:xfrm>
+            <a:off x="4504106" y="5065776"/>
+            <a:ext cx="2263826" cy="310896"/>
+          </a:xfrm>
+          <a:prstGeom prst="roundRect">
+            <a:avLst>
+              <a:gd name="adj" fmla="val 20588"/>
             </a:avLst>
           </a:prstGeom>
           <a:solidFill>
@@ -17902,265 +18446,71 @@
       </p:sp>
       <p:sp>
         <p:nvSpPr>
-          <p:cNvPr id="34" name="Shape 32"/>
-          <p:cNvSpPr/>
-          <p:nvPr/>
-        </p:nvSpPr>
-        <p:spPr>
-          <a:xfrm>
-            <a:off x="4681728" y="3374136"/>
-            <a:ext cx="566928" cy="237744"/>
+          <p:cNvPr id="48" name="Text 46"/>
+          <p:cNvSpPr/>
+          <p:nvPr/>
+        </p:nvSpPr>
+        <p:spPr>
+          <a:xfrm>
+            <a:off x="4650410" y="5065776"/>
+            <a:ext cx="1971218" cy="310896"/>
+          </a:xfrm>
+          <a:prstGeom prst="rect">
+            <a:avLst/>
+          </a:prstGeom>
+          <a:noFill/>
+          <a:ln/>
+        </p:spPr>
+        <p:txBody>
+          <a:bodyPr wrap="square" lIns="0" tIns="0" rIns="0" bIns="0" rtlCol="0" anchor="ctr"/>
+          <a:lstStyle/>
+          <a:p>
+            <a:pPr indent="0" marL="0">
+              <a:buNone/>
+            </a:pPr>
+            <a:r>
+              <a:rPr lang="en-US" sz="800" b="1" dirty="0">
+                <a:solidFill>
+                  <a:srgbClr val="0057FF"/>
+                </a:solidFill>
+                <a:latin typeface="Pretendard" pitchFamily="34" charset="0"/>
+                <a:ea typeface="Pretendard" pitchFamily="34" charset="-122"/>
+                <a:cs typeface="Pretendard" pitchFamily="34" charset="-120"/>
+              </a:rPr>
+              <a:t>기본  </a:t>
+            </a:r>
+            <a:pPr indent="0" marL="0">
+              <a:buNone/>
+            </a:pPr>
+            <a:r>
+              <a:rPr lang="en-US" sz="1000" b="1" dirty="0">
+                <a:solidFill>
+                  <a:srgbClr val="191919"/>
+                </a:solidFill>
+                <a:latin typeface="Pretendard" pitchFamily="34" charset="0"/>
+                <a:ea typeface="Pretendard" pitchFamily="34" charset="-122"/>
+                <a:cs typeface="Pretendard" pitchFamily="34" charset="-120"/>
+              </a:rPr>
+              <a:t>신규 마스코트</a:t>
+            </a:r>
+            <a:endParaRPr lang="en-US" sz="800" dirty="0"/>
+          </a:p>
+        </p:txBody>
+      </p:sp>
+      <p:sp>
+        <p:nvSpPr>
+          <p:cNvPr id="49" name="Shape 47"/>
+          <p:cNvSpPr/>
+          <p:nvPr/>
+        </p:nvSpPr>
+        <p:spPr>
+          <a:xfrm>
+            <a:off x="6886804" y="5065776"/>
+            <a:ext cx="2263826" cy="310896"/>
           </a:xfrm>
           <a:prstGeom prst="roundRect">
             <a:avLst>
-              <a:gd name="adj" fmla="val 50000"/>
-            </a:avLst>
-          </a:prstGeom>
-          <a:solidFill>
-            <a:srgbClr val="0057FF"/>
-          </a:solidFill>
-          <a:ln/>
-        </p:spPr>
-      </p:sp>
-      <p:sp>
-        <p:nvSpPr>
-          <p:cNvPr id="35" name="Text 33"/>
-          <p:cNvSpPr/>
-          <p:nvPr/>
-        </p:nvSpPr>
-        <p:spPr>
-          <a:xfrm>
-            <a:off x="4681728" y="3374136"/>
-            <a:ext cx="566928" cy="237744"/>
-          </a:xfrm>
-          <a:prstGeom prst="rect">
-            <a:avLst/>
-          </a:prstGeom>
-          <a:noFill/>
-          <a:ln/>
-        </p:spPr>
-        <p:txBody>
-          <a:bodyPr wrap="square" lIns="0" tIns="0" rIns="0" bIns="0" rtlCol="0" anchor="ctr"/>
-          <a:lstStyle/>
-          <a:p>
-            <a:pPr algn="ctr" indent="0" marL="0">
-              <a:buNone/>
-            </a:pPr>
-            <a:r>
-              <a:rPr lang="en-US" sz="900" b="1" dirty="0">
-                <a:solidFill>
-                  <a:srgbClr val="FFFFFF"/>
-                </a:solidFill>
-                <a:latin typeface="Pretendard" pitchFamily="34" charset="0"/>
-                <a:ea typeface="Pretendard" pitchFamily="34" charset="-122"/>
-                <a:cs typeface="Pretendard" pitchFamily="34" charset="-120"/>
-              </a:rPr>
-              <a:t>기본</a:t>
-            </a:r>
-            <a:endParaRPr lang="en-US" sz="900" dirty="0"/>
-          </a:p>
-        </p:txBody>
-      </p:sp>
-      <p:sp>
-        <p:nvSpPr>
-          <p:cNvPr id="36" name="Text 34"/>
-          <p:cNvSpPr/>
-          <p:nvPr/>
-        </p:nvSpPr>
-        <p:spPr>
-          <a:xfrm>
-            <a:off x="5468112" y="3255264"/>
-            <a:ext cx="4775911" cy="237744"/>
-          </a:xfrm>
-          <a:prstGeom prst="rect">
-            <a:avLst/>
-          </a:prstGeom>
-          <a:noFill/>
-          <a:ln/>
-        </p:spPr>
-        <p:txBody>
-          <a:bodyPr wrap="square" lIns="0" tIns="0" rIns="0" bIns="0" rtlCol="0" anchor="t"/>
-          <a:lstStyle/>
-          <a:p>
-            <a:pPr indent="0" marL="0">
-              <a:buNone/>
-            </a:pPr>
-            <a:r>
-              <a:rPr lang="en-US" sz="1200" b="1" dirty="0">
-                <a:solidFill>
-                  <a:srgbClr val="191919"/>
-                </a:solidFill>
-                <a:latin typeface="Pretendard" pitchFamily="34" charset="0"/>
-                <a:ea typeface="Pretendard" pitchFamily="34" charset="-122"/>
-                <a:cs typeface="Pretendard" pitchFamily="34" charset="-120"/>
-              </a:rPr>
-              <a:t>과거 자산 기반 신규 마스코트</a:t>
-            </a:r>
-            <a:endParaRPr lang="en-US" sz="1200" dirty="0"/>
-          </a:p>
-        </p:txBody>
-      </p:sp>
-      <p:sp>
-        <p:nvSpPr>
-          <p:cNvPr id="37" name="Shape 35"/>
-          <p:cNvSpPr/>
-          <p:nvPr/>
-        </p:nvSpPr>
-        <p:spPr>
-          <a:xfrm>
-            <a:off x="7516368" y="3282696"/>
-            <a:ext cx="475488" cy="182880"/>
-          </a:xfrm>
-          <a:prstGeom prst="roundRect">
-            <a:avLst>
-              <a:gd name="adj" fmla="val 50000"/>
-            </a:avLst>
-          </a:prstGeom>
-          <a:solidFill>
-            <a:srgbClr val="FFFFFF"/>
-          </a:solidFill>
-          <a:ln w="12700">
-            <a:solidFill>
-              <a:srgbClr val="0057FF"/>
-            </a:solidFill>
-            <a:prstDash val="solid"/>
-          </a:ln>
-        </p:spPr>
-      </p:sp>
-      <p:sp>
-        <p:nvSpPr>
-          <p:cNvPr id="38" name="Text 36"/>
-          <p:cNvSpPr/>
-          <p:nvPr/>
-        </p:nvSpPr>
-        <p:spPr>
-          <a:xfrm>
-            <a:off x="7516368" y="3282696"/>
-            <a:ext cx="475488" cy="182880"/>
-          </a:xfrm>
-          <a:prstGeom prst="rect">
-            <a:avLst/>
-          </a:prstGeom>
-          <a:noFill/>
-          <a:ln/>
-        </p:spPr>
-        <p:txBody>
-          <a:bodyPr wrap="square" lIns="0" tIns="0" rIns="0" bIns="0" rtlCol="0" anchor="ctr"/>
-          <a:lstStyle/>
-          <a:p>
-            <a:pPr algn="ctr" indent="0" marL="0">
-              <a:buNone/>
-            </a:pPr>
-            <a:r>
-              <a:rPr lang="en-US" sz="750" b="1" dirty="0">
-                <a:solidFill>
-                  <a:srgbClr val="0057FF"/>
-                </a:solidFill>
-                <a:latin typeface="Pretendard" pitchFamily="34" charset="0"/>
-                <a:ea typeface="Pretendard" pitchFamily="34" charset="-122"/>
-                <a:cs typeface="Pretendard" pitchFamily="34" charset="-120"/>
-              </a:rPr>
-              <a:t>유력</a:t>
-            </a:r>
-            <a:endParaRPr lang="en-US" sz="750" dirty="0"/>
-          </a:p>
-        </p:txBody>
-      </p:sp>
-      <p:sp>
-        <p:nvSpPr>
-          <p:cNvPr id="39" name="Text 37"/>
-          <p:cNvSpPr/>
-          <p:nvPr/>
-        </p:nvSpPr>
-        <p:spPr>
-          <a:xfrm>
-            <a:off x="5468112" y="3511296"/>
-            <a:ext cx="4775911" cy="256032"/>
-          </a:xfrm>
-          <a:prstGeom prst="rect">
-            <a:avLst/>
-          </a:prstGeom>
-          <a:noFill/>
-          <a:ln/>
-        </p:spPr>
-        <p:txBody>
-          <a:bodyPr wrap="square" lIns="0" tIns="0" rIns="0" bIns="0" rtlCol="0" anchor="t"/>
-          <a:lstStyle/>
-          <a:p>
-            <a:pPr indent="0" marL="0">
-              <a:lnSpc>
-                <a:spcPts val="1150"/>
-              </a:lnSpc>
-              <a:buNone/>
-            </a:pPr>
-            <a:r>
-              <a:rPr lang="en-US" sz="850" dirty="0">
-                <a:solidFill>
-                  <a:srgbClr val="3C3C3C"/>
-                </a:solidFill>
-                <a:latin typeface="Pretendard" pitchFamily="34" charset="0"/>
-                <a:ea typeface="Pretendard" pitchFamily="34" charset="-122"/>
-                <a:cs typeface="Pretendard" pitchFamily="34" charset="-120"/>
-              </a:rPr>
-              <a:t>추억 대신 현재 효용으로 소개. 제품과 함께 반복 노출해 브랜드 연결을 만든다.</a:t>
-            </a:r>
-            <a:endParaRPr lang="en-US" sz="850" dirty="0"/>
-          </a:p>
-        </p:txBody>
-      </p:sp>
-      <p:sp>
-        <p:nvSpPr>
-          <p:cNvPr id="40" name="Text 38"/>
-          <p:cNvSpPr/>
-          <p:nvPr/>
-        </p:nvSpPr>
-        <p:spPr>
-          <a:xfrm>
-            <a:off x="10390327" y="3383280"/>
-            <a:ext cx="960120" cy="219456"/>
-          </a:xfrm>
-          <a:prstGeom prst="rect">
-            <a:avLst/>
-          </a:prstGeom>
-          <a:noFill/>
-          <a:ln/>
-        </p:spPr>
-        <p:txBody>
-          <a:bodyPr wrap="square" lIns="0" tIns="0" rIns="0" bIns="0" rtlCol="0" anchor="ctr"/>
-          <a:lstStyle/>
-          <a:p>
-            <a:pPr algn="r" indent="0" marL="0">
-              <a:buNone/>
-            </a:pPr>
-            <a:r>
-              <a:rPr lang="en-US" sz="850" b="1" dirty="0">
-                <a:solidFill>
-                  <a:srgbClr val="0057FF"/>
-                </a:solidFill>
-                <a:latin typeface="Pretendard" pitchFamily="34" charset="0"/>
-                <a:ea typeface="Pretendard" pitchFamily="34" charset="-122"/>
-                <a:cs typeface="Pretendard" pitchFamily="34" charset="-120"/>
-              </a:rPr>
-              <a:t>기억 X · 효과 O</a:t>
-            </a:r>
-            <a:endParaRPr lang="en-US" sz="850" dirty="0"/>
-          </a:p>
-        </p:txBody>
-      </p:sp>
-      <p:sp>
-        <p:nvSpPr>
-          <p:cNvPr id="41" name="Shape 39"/>
-          <p:cNvSpPr/>
-          <p:nvPr/>
-        </p:nvSpPr>
-        <p:spPr>
-          <a:xfrm>
-            <a:off x="4517136" y="3931920"/>
-            <a:ext cx="7016191" cy="694944"/>
-          </a:xfrm>
-          <a:prstGeom prst="roundRect">
-            <a:avLst>
-              <a:gd name="adj" fmla="val 9211"/>
+              <a:gd name="adj" fmla="val 20588"/>
             </a:avLst>
           </a:prstGeom>
           <a:solidFill>
@@ -18176,199 +18526,71 @@
       </p:sp>
       <p:sp>
         <p:nvSpPr>
-          <p:cNvPr id="42" name="Shape 40"/>
-          <p:cNvSpPr/>
-          <p:nvPr/>
-        </p:nvSpPr>
-        <p:spPr>
-          <a:xfrm>
-            <a:off x="4681728" y="4160520"/>
-            <a:ext cx="566928" cy="237744"/>
+          <p:cNvPr id="50" name="Text 48"/>
+          <p:cNvSpPr/>
+          <p:nvPr/>
+        </p:nvSpPr>
+        <p:spPr>
+          <a:xfrm>
+            <a:off x="7033108" y="5065776"/>
+            <a:ext cx="1971218" cy="310896"/>
+          </a:xfrm>
+          <a:prstGeom prst="rect">
+            <a:avLst/>
+          </a:prstGeom>
+          <a:noFill/>
+          <a:ln/>
+        </p:spPr>
+        <p:txBody>
+          <a:bodyPr wrap="square" lIns="0" tIns="0" rIns="0" bIns="0" rtlCol="0" anchor="ctr"/>
+          <a:lstStyle/>
+          <a:p>
+            <a:pPr indent="0" marL="0">
+              <a:buNone/>
+            </a:pPr>
+            <a:r>
+              <a:rPr lang="en-US" sz="800" b="1" dirty="0">
+                <a:solidFill>
+                  <a:srgbClr val="959595"/>
+                </a:solidFill>
+                <a:latin typeface="Pretendard" pitchFamily="34" charset="0"/>
+                <a:ea typeface="Pretendard" pitchFamily="34" charset="-122"/>
+                <a:cs typeface="Pretendard" pitchFamily="34" charset="-120"/>
+              </a:rPr>
+              <a:t>제한  </a:t>
+            </a:r>
+            <a:pPr indent="0" marL="0">
+              <a:buNone/>
+            </a:pPr>
+            <a:r>
+              <a:rPr lang="en-US" sz="1000" b="1" dirty="0">
+                <a:solidFill>
+                  <a:srgbClr val="707070"/>
+                </a:solidFill>
+                <a:latin typeface="Pretendard" pitchFamily="34" charset="0"/>
+                <a:ea typeface="Pretendard" pitchFamily="34" charset="-122"/>
+                <a:cs typeface="Pretendard" pitchFamily="34" charset="-120"/>
+              </a:rPr>
+              <a:t>광고 아카이브</a:t>
+            </a:r>
+            <a:endParaRPr lang="en-US" sz="800" dirty="0"/>
+          </a:p>
+        </p:txBody>
+      </p:sp>
+      <p:sp>
+        <p:nvSpPr>
+          <p:cNvPr id="51" name="Shape 49"/>
+          <p:cNvSpPr/>
+          <p:nvPr/>
+        </p:nvSpPr>
+        <p:spPr>
+          <a:xfrm>
+            <a:off x="9269501" y="5065776"/>
+            <a:ext cx="2263826" cy="310896"/>
           </a:xfrm>
           <a:prstGeom prst="roundRect">
             <a:avLst>
-              <a:gd name="adj" fmla="val 50000"/>
-            </a:avLst>
-          </a:prstGeom>
-          <a:solidFill>
-            <a:srgbClr val="F0F0F0"/>
-          </a:solidFill>
-          <a:ln/>
-        </p:spPr>
-      </p:sp>
-      <p:sp>
-        <p:nvSpPr>
-          <p:cNvPr id="43" name="Text 41"/>
-          <p:cNvSpPr/>
-          <p:nvPr/>
-        </p:nvSpPr>
-        <p:spPr>
-          <a:xfrm>
-            <a:off x="4681728" y="4160520"/>
-            <a:ext cx="566928" cy="237744"/>
-          </a:xfrm>
-          <a:prstGeom prst="rect">
-            <a:avLst/>
-          </a:prstGeom>
-          <a:noFill/>
-          <a:ln/>
-        </p:spPr>
-        <p:txBody>
-          <a:bodyPr wrap="square" lIns="0" tIns="0" rIns="0" bIns="0" rtlCol="0" anchor="ctr"/>
-          <a:lstStyle/>
-          <a:p>
-            <a:pPr algn="ctr" indent="0" marL="0">
-              <a:buNone/>
-            </a:pPr>
-            <a:r>
-              <a:rPr lang="en-US" sz="900" b="1" dirty="0">
-                <a:solidFill>
-                  <a:srgbClr val="707070"/>
-                </a:solidFill>
-                <a:latin typeface="Pretendard" pitchFamily="34" charset="0"/>
-                <a:ea typeface="Pretendard" pitchFamily="34" charset="-122"/>
-                <a:cs typeface="Pretendard" pitchFamily="34" charset="-120"/>
-              </a:rPr>
-              <a:t>제한</a:t>
-            </a:r>
-            <a:endParaRPr lang="en-US" sz="900" dirty="0"/>
-          </a:p>
-        </p:txBody>
-      </p:sp>
-      <p:sp>
-        <p:nvSpPr>
-          <p:cNvPr id="44" name="Text 42"/>
-          <p:cNvSpPr/>
-          <p:nvPr/>
-        </p:nvSpPr>
-        <p:spPr>
-          <a:xfrm>
-            <a:off x="5468112" y="4041648"/>
-            <a:ext cx="4775911" cy="237744"/>
-          </a:xfrm>
-          <a:prstGeom prst="rect">
-            <a:avLst/>
-          </a:prstGeom>
-          <a:noFill/>
-          <a:ln/>
-        </p:spPr>
-        <p:txBody>
-          <a:bodyPr wrap="square" lIns="0" tIns="0" rIns="0" bIns="0" rtlCol="0" anchor="t"/>
-          <a:lstStyle/>
-          <a:p>
-            <a:pPr indent="0" marL="0">
-              <a:buNone/>
-            </a:pPr>
-            <a:r>
-              <a:rPr lang="en-US" sz="1200" b="1" dirty="0">
-                <a:solidFill>
-                  <a:srgbClr val="707070"/>
-                </a:solidFill>
-                <a:latin typeface="Pretendard" pitchFamily="34" charset="0"/>
-                <a:ea typeface="Pretendard" pitchFamily="34" charset="-122"/>
-                <a:cs typeface="Pretendard" pitchFamily="34" charset="-120"/>
-              </a:rPr>
-              <a:t>광고 아카이브로 제한</a:t>
-            </a:r>
-            <a:endParaRPr lang="en-US" sz="1200" dirty="0"/>
-          </a:p>
-        </p:txBody>
-      </p:sp>
-      <p:sp>
-        <p:nvSpPr>
-          <p:cNvPr id="45" name="Text 43"/>
-          <p:cNvSpPr/>
-          <p:nvPr/>
-        </p:nvSpPr>
-        <p:spPr>
-          <a:xfrm>
-            <a:off x="5468112" y="4297680"/>
-            <a:ext cx="4775911" cy="256032"/>
-          </a:xfrm>
-          <a:prstGeom prst="rect">
-            <a:avLst/>
-          </a:prstGeom>
-          <a:noFill/>
-          <a:ln/>
-        </p:spPr>
-        <p:txBody>
-          <a:bodyPr wrap="square" lIns="0" tIns="0" rIns="0" bIns="0" rtlCol="0" anchor="t"/>
-          <a:lstStyle/>
-          <a:p>
-            <a:pPr indent="0" marL="0">
-              <a:lnSpc>
-                <a:spcPts val="1150"/>
-              </a:lnSpc>
-              <a:buNone/>
-            </a:pPr>
-            <a:r>
-              <a:rPr lang="en-US" sz="850" dirty="0">
-                <a:solidFill>
-                  <a:srgbClr val="3C3C3C"/>
-                </a:solidFill>
-                <a:latin typeface="Pretendard" pitchFamily="34" charset="0"/>
-                <a:ea typeface="Pretendard" pitchFamily="34" charset="-122"/>
-                <a:cs typeface="Pretendard" pitchFamily="34" charset="-120"/>
-              </a:rPr>
-              <a:t>브랜드 역사 콘텐츠와 팝업 아카이브 존에만 쓴다.</a:t>
-            </a:r>
-            <a:endParaRPr lang="en-US" sz="850" dirty="0"/>
-          </a:p>
-        </p:txBody>
-      </p:sp>
-      <p:sp>
-        <p:nvSpPr>
-          <p:cNvPr id="46" name="Text 44"/>
-          <p:cNvSpPr/>
-          <p:nvPr/>
-        </p:nvSpPr>
-        <p:spPr>
-          <a:xfrm>
-            <a:off x="10390327" y="4169664"/>
-            <a:ext cx="960120" cy="219456"/>
-          </a:xfrm>
-          <a:prstGeom prst="rect">
-            <a:avLst/>
-          </a:prstGeom>
-          <a:noFill/>
-          <a:ln/>
-        </p:spPr>
-        <p:txBody>
-          <a:bodyPr wrap="square" lIns="0" tIns="0" rIns="0" bIns="0" rtlCol="0" anchor="ctr"/>
-          <a:lstStyle/>
-          <a:p>
-            <a:pPr algn="r" indent="0" marL="0">
-              <a:buNone/>
-            </a:pPr>
-            <a:r>
-              <a:rPr lang="en-US" sz="850" b="1" dirty="0">
-                <a:solidFill>
-                  <a:srgbClr val="959595"/>
-                </a:solidFill>
-                <a:latin typeface="Pretendard" pitchFamily="34" charset="0"/>
-                <a:ea typeface="Pretendard" pitchFamily="34" charset="-122"/>
-                <a:cs typeface="Pretendard" pitchFamily="34" charset="-120"/>
-              </a:rPr>
-              <a:t>기억 O · 효과 X</a:t>
-            </a:r>
-            <a:endParaRPr lang="en-US" sz="850" dirty="0"/>
-          </a:p>
-        </p:txBody>
-      </p:sp>
-      <p:sp>
-        <p:nvSpPr>
-          <p:cNvPr id="47" name="Shape 45"/>
-          <p:cNvSpPr/>
-          <p:nvPr/>
-        </p:nvSpPr>
-        <p:spPr>
-          <a:xfrm>
-            <a:off x="4517136" y="4718304"/>
-            <a:ext cx="7016191" cy="694944"/>
-          </a:xfrm>
-          <a:prstGeom prst="roundRect">
-            <a:avLst>
-              <a:gd name="adj" fmla="val 9211"/>
+              <a:gd name="adj" fmla="val 20588"/>
             </a:avLst>
           </a:prstGeom>
           <a:solidFill>
@@ -18384,199 +18606,71 @@
       </p:sp>
       <p:sp>
         <p:nvSpPr>
-          <p:cNvPr id="48" name="Shape 46"/>
-          <p:cNvSpPr/>
-          <p:nvPr/>
-        </p:nvSpPr>
-        <p:spPr>
-          <a:xfrm>
-            <a:off x="4681728" y="4946904"/>
-            <a:ext cx="566928" cy="237744"/>
+          <p:cNvPr id="52" name="Text 50"/>
+          <p:cNvSpPr/>
+          <p:nvPr/>
+        </p:nvSpPr>
+        <p:spPr>
+          <a:xfrm>
+            <a:off x="9415805" y="5065776"/>
+            <a:ext cx="1971218" cy="310896"/>
+          </a:xfrm>
+          <a:prstGeom prst="rect">
+            <a:avLst/>
+          </a:prstGeom>
+          <a:noFill/>
+          <a:ln/>
+        </p:spPr>
+        <p:txBody>
+          <a:bodyPr wrap="square" lIns="0" tIns="0" rIns="0" bIns="0" rtlCol="0" anchor="ctr"/>
+          <a:lstStyle/>
+          <a:p>
+            <a:pPr indent="0" marL="0">
+              <a:buNone/>
+            </a:pPr>
+            <a:r>
+              <a:rPr lang="en-US" sz="800" b="1" dirty="0">
+                <a:solidFill>
+                  <a:srgbClr val="959595"/>
+                </a:solidFill>
+                <a:latin typeface="Pretendard" pitchFamily="34" charset="0"/>
+                <a:ea typeface="Pretendard" pitchFamily="34" charset="-122"/>
+                <a:cs typeface="Pretendard" pitchFamily="34" charset="-120"/>
+              </a:rPr>
+              <a:t>중단  </a:t>
+            </a:r>
+            <a:pPr indent="0" marL="0">
+              <a:buNone/>
+            </a:pPr>
+            <a:r>
+              <a:rPr lang="en-US" sz="1000" b="1" dirty="0">
+                <a:solidFill>
+                  <a:srgbClr val="707070"/>
+                </a:solidFill>
+                <a:latin typeface="Pretendard" pitchFamily="34" charset="0"/>
+                <a:ea typeface="Pretendard" pitchFamily="34" charset="-122"/>
+                <a:cs typeface="Pretendard" pitchFamily="34" charset="-120"/>
+              </a:rPr>
+              <a:t>전략에서 제외</a:t>
+            </a:r>
+            <a:endParaRPr lang="en-US" sz="800" dirty="0"/>
+          </a:p>
+        </p:txBody>
+      </p:sp>
+      <p:sp>
+        <p:nvSpPr>
+          <p:cNvPr id="53" name="Shape 51"/>
+          <p:cNvSpPr/>
+          <p:nvPr/>
+        </p:nvSpPr>
+        <p:spPr>
+          <a:xfrm>
+            <a:off x="658368" y="5705856"/>
+            <a:ext cx="10874959" cy="457200"/>
           </a:xfrm>
           <a:prstGeom prst="roundRect">
             <a:avLst>
-              <a:gd name="adj" fmla="val 50000"/>
-            </a:avLst>
-          </a:prstGeom>
-          <a:solidFill>
-            <a:srgbClr val="F0F0F0"/>
-          </a:solidFill>
-          <a:ln/>
-        </p:spPr>
-      </p:sp>
-      <p:sp>
-        <p:nvSpPr>
-          <p:cNvPr id="49" name="Text 47"/>
-          <p:cNvSpPr/>
-          <p:nvPr/>
-        </p:nvSpPr>
-        <p:spPr>
-          <a:xfrm>
-            <a:off x="4681728" y="4946904"/>
-            <a:ext cx="566928" cy="237744"/>
-          </a:xfrm>
-          <a:prstGeom prst="rect">
-            <a:avLst/>
-          </a:prstGeom>
-          <a:noFill/>
-          <a:ln/>
-        </p:spPr>
-        <p:txBody>
-          <a:bodyPr wrap="square" lIns="0" tIns="0" rIns="0" bIns="0" rtlCol="0" anchor="ctr"/>
-          <a:lstStyle/>
-          <a:p>
-            <a:pPr algn="ctr" indent="0" marL="0">
-              <a:buNone/>
-            </a:pPr>
-            <a:r>
-              <a:rPr lang="en-US" sz="900" b="1" dirty="0">
-                <a:solidFill>
-                  <a:srgbClr val="707070"/>
-                </a:solidFill>
-                <a:latin typeface="Pretendard" pitchFamily="34" charset="0"/>
-                <a:ea typeface="Pretendard" pitchFamily="34" charset="-122"/>
-                <a:cs typeface="Pretendard" pitchFamily="34" charset="-120"/>
-              </a:rPr>
-              <a:t>중단</a:t>
-            </a:r>
-            <a:endParaRPr lang="en-US" sz="900" dirty="0"/>
-          </a:p>
-        </p:txBody>
-      </p:sp>
-      <p:sp>
-        <p:nvSpPr>
-          <p:cNvPr id="50" name="Text 48"/>
-          <p:cNvSpPr/>
-          <p:nvPr/>
-        </p:nvSpPr>
-        <p:spPr>
-          <a:xfrm>
-            <a:off x="5468112" y="4828032"/>
-            <a:ext cx="4775911" cy="237744"/>
-          </a:xfrm>
-          <a:prstGeom prst="rect">
-            <a:avLst/>
-          </a:prstGeom>
-          <a:noFill/>
-          <a:ln/>
-        </p:spPr>
-        <p:txBody>
-          <a:bodyPr wrap="square" lIns="0" tIns="0" rIns="0" bIns="0" rtlCol="0" anchor="t"/>
-          <a:lstStyle/>
-          <a:p>
-            <a:pPr indent="0" marL="0">
-              <a:buNone/>
-            </a:pPr>
-            <a:r>
-              <a:rPr lang="en-US" sz="1200" b="1" dirty="0">
-                <a:solidFill>
-                  <a:srgbClr val="707070"/>
-                </a:solidFill>
-                <a:latin typeface="Pretendard" pitchFamily="34" charset="0"/>
-                <a:ea typeface="Pretendard" pitchFamily="34" charset="-122"/>
-                <a:cs typeface="Pretendard" pitchFamily="34" charset="-120"/>
-              </a:rPr>
-              <a:t>메인 전략에서 제외</a:t>
-            </a:r>
-            <a:endParaRPr lang="en-US" sz="1200" dirty="0"/>
-          </a:p>
-        </p:txBody>
-      </p:sp>
-      <p:sp>
-        <p:nvSpPr>
-          <p:cNvPr id="51" name="Text 49"/>
-          <p:cNvSpPr/>
-          <p:nvPr/>
-        </p:nvSpPr>
-        <p:spPr>
-          <a:xfrm>
-            <a:off x="5468112" y="5084064"/>
-            <a:ext cx="4775911" cy="256032"/>
-          </a:xfrm>
-          <a:prstGeom prst="rect">
-            <a:avLst/>
-          </a:prstGeom>
-          <a:noFill/>
-          <a:ln/>
-        </p:spPr>
-        <p:txBody>
-          <a:bodyPr wrap="square" lIns="0" tIns="0" rIns="0" bIns="0" rtlCol="0" anchor="t"/>
-          <a:lstStyle/>
-          <a:p>
-            <a:pPr indent="0" marL="0">
-              <a:lnSpc>
-                <a:spcPts val="1150"/>
-              </a:lnSpc>
-              <a:buNone/>
-            </a:pPr>
-            <a:r>
-              <a:rPr lang="en-US" sz="850" dirty="0">
-                <a:solidFill>
-                  <a:srgbClr val="3C3C3C"/>
-                </a:solidFill>
-                <a:latin typeface="Pretendard" pitchFamily="34" charset="0"/>
-                <a:ea typeface="Pretendard" pitchFamily="34" charset="-122"/>
-                <a:cs typeface="Pretendard" pitchFamily="34" charset="-120"/>
-              </a:rPr>
-              <a:t>펭귄 중심 캠페인은 접고 제품 편익 중심으로 전환한다.</a:t>
-            </a:r>
-            <a:endParaRPr lang="en-US" sz="850" dirty="0"/>
-          </a:p>
-        </p:txBody>
-      </p:sp>
-      <p:sp>
-        <p:nvSpPr>
-          <p:cNvPr id="52" name="Text 50"/>
-          <p:cNvSpPr/>
-          <p:nvPr/>
-        </p:nvSpPr>
-        <p:spPr>
-          <a:xfrm>
-            <a:off x="10390327" y="4956048"/>
-            <a:ext cx="960120" cy="219456"/>
-          </a:xfrm>
-          <a:prstGeom prst="rect">
-            <a:avLst/>
-          </a:prstGeom>
-          <a:noFill/>
-          <a:ln/>
-        </p:spPr>
-        <p:txBody>
-          <a:bodyPr wrap="square" lIns="0" tIns="0" rIns="0" bIns="0" rtlCol="0" anchor="ctr"/>
-          <a:lstStyle/>
-          <a:p>
-            <a:pPr algn="r" indent="0" marL="0">
-              <a:buNone/>
-            </a:pPr>
-            <a:r>
-              <a:rPr lang="en-US" sz="850" b="1" dirty="0">
-                <a:solidFill>
-                  <a:srgbClr val="959595"/>
-                </a:solidFill>
-                <a:latin typeface="Pretendard" pitchFamily="34" charset="0"/>
-                <a:ea typeface="Pretendard" pitchFamily="34" charset="-122"/>
-                <a:cs typeface="Pretendard" pitchFamily="34" charset="-120"/>
-              </a:rPr>
-              <a:t>기억 X · 효과 X</a:t>
-            </a:r>
-            <a:endParaRPr lang="en-US" sz="850" dirty="0"/>
-          </a:p>
-        </p:txBody>
-      </p:sp>
-      <p:sp>
-        <p:nvSpPr>
-          <p:cNvPr id="53" name="Shape 51"/>
-          <p:cNvSpPr/>
-          <p:nvPr/>
-        </p:nvSpPr>
-        <p:spPr>
-          <a:xfrm>
-            <a:off x="658368" y="5504688"/>
-            <a:ext cx="10874959" cy="658368"/>
-          </a:xfrm>
-          <a:prstGeom prst="roundRect">
-            <a:avLst>
-              <a:gd name="adj" fmla="val 12500"/>
+              <a:gd name="adj" fmla="val 18000"/>
             </a:avLst>
           </a:prstGeom>
           <a:solidFill>
@@ -18593,8 +18687,8 @@
         </p:nvSpPr>
         <p:spPr>
           <a:xfrm>
-            <a:off x="950976" y="5504688"/>
-            <a:ext cx="5852160" cy="658368"/>
+            <a:off x="658368" y="5705856"/>
+            <a:ext cx="10874959" cy="457200"/>
           </a:xfrm>
           <a:prstGeom prst="rect">
             <a:avLst/>
@@ -18606,11 +18700,11 @@
           <a:bodyPr wrap="square" lIns="0" tIns="0" rIns="0" bIns="0" rtlCol="0" anchor="ctr"/>
           <a:lstStyle/>
           <a:p>
-            <a:pPr indent="0" marL="0">
-              <a:buNone/>
-            </a:pPr>
-            <a:r>
-              <a:rPr lang="en-US" sz="1350" b="1" dirty="0">
+            <a:pPr algn="ctr" indent="0" marL="0">
+              <a:buNone/>
+            </a:pPr>
+            <a:r>
+              <a:rPr lang="en-US" sz="1200" b="1" dirty="0">
                 <a:solidFill>
                   <a:srgbClr val="FFFFFF"/>
                 </a:solidFill>
@@ -18618,54 +18712,43 @@
                 <a:ea typeface="Pretendard" pitchFamily="34" charset="-122"/>
                 <a:cs typeface="Pretendard" pitchFamily="34" charset="-120"/>
               </a:rPr>
-              <a:t>인지도가 낮아도 현재 효과가 높다면, 신규 마스코트로 활용한다.</a:t>
-            </a:r>
-            <a:endParaRPr lang="en-US" sz="1350" dirty="0"/>
+              <a:t>펭귄의 인지도를 묻는 데서 끝나지 않고, 현대화된 펭귄이 </a:t>
+            </a:r>
+            <a:pPr algn="ctr" indent="0" marL="0">
+              <a:buNone/>
+            </a:pPr>
+            <a:r>
+              <a:rPr lang="en-US" sz="1200" b="1" dirty="0">
+                <a:solidFill>
+                  <a:srgbClr val="2997FF"/>
+                </a:solidFill>
+                <a:latin typeface="Pretendard" pitchFamily="34" charset="0"/>
+                <a:ea typeface="Pretendard" pitchFamily="34" charset="-122"/>
+                <a:cs typeface="Pretendard" pitchFamily="34" charset="-120"/>
+              </a:rPr>
+              <a:t>캐릭터 없는 커뮤니케이션보다 더 나은 브랜드·제품 효과</a:t>
+            </a:r>
+            <a:pPr algn="ctr" indent="0" marL="0">
+              <a:buNone/>
+            </a:pPr>
+            <a:r>
+              <a:rPr lang="en-US" sz="1200" b="1" dirty="0">
+                <a:solidFill>
+                  <a:srgbClr val="FFFFFF"/>
+                </a:solidFill>
+                <a:latin typeface="Pretendard" pitchFamily="34" charset="0"/>
+                <a:ea typeface="Pretendard" pitchFamily="34" charset="-122"/>
+                <a:cs typeface="Pretendard" pitchFamily="34" charset="-120"/>
+              </a:rPr>
+              <a:t>를 만드는지 검증한다.</a:t>
+            </a:r>
+            <a:endParaRPr lang="en-US" sz="1200" dirty="0"/>
           </a:p>
         </p:txBody>
       </p:sp>
       <p:sp>
         <p:nvSpPr>
           <p:cNvPr id="55" name="Text 53"/>
-          <p:cNvSpPr/>
-          <p:nvPr/>
-        </p:nvSpPr>
-        <p:spPr>
-          <a:xfrm>
-            <a:off x="6595567" y="5504688"/>
-            <a:ext cx="4645152" cy="658368"/>
-          </a:xfrm>
-          <a:prstGeom prst="rect">
-            <a:avLst/>
-          </a:prstGeom>
-          <a:noFill/>
-          <a:ln/>
-        </p:spPr>
-        <p:txBody>
-          <a:bodyPr wrap="square" lIns="0" tIns="0" rIns="0" bIns="0" rtlCol="0" anchor="ctr"/>
-          <a:lstStyle/>
-          <a:p>
-            <a:pPr algn="r" indent="0" marL="0">
-              <a:buNone/>
-            </a:pPr>
-            <a:r>
-              <a:rPr lang="en-US" sz="1000" dirty="0">
-                <a:solidFill>
-                  <a:srgbClr val="A6A7AC"/>
-                </a:solidFill>
-                <a:latin typeface="Pretendard" pitchFamily="34" charset="0"/>
-                <a:ea typeface="Pretendard" pitchFamily="34" charset="-122"/>
-                <a:cs typeface="Pretendard" pitchFamily="34" charset="-120"/>
-              </a:rPr>
-              <a:t>펭귄은 전제가 아니라, 검증을 통과해야 하는 브랜드 자산 후보다.</a:t>
-            </a:r>
-            <a:endParaRPr lang="en-US" sz="1000" dirty="0"/>
-          </a:p>
-        </p:txBody>
-      </p:sp>
-      <p:sp>
-        <p:nvSpPr>
-          <p:cNvPr id="56" name="Text 54"/>
           <p:cNvSpPr/>
           <p:nvPr/>
         </p:nvSpPr>
@@ -18704,7 +18787,7 @@
       </p:sp>
       <p:sp>
         <p:nvSpPr>
-          <p:cNvPr id="57" name="Text 55"/>
+          <p:cNvPr id="56" name="Text 54"/>
           <p:cNvSpPr/>
           <p:nvPr/>
         </p:nvSpPr>

--- a/청호나이스-브랜드전략-제안.pptx
+++ b/청호나이스-브랜드전략-제안.pptx
@@ -3890,12 +3890,12 @@
         </p:nvSpPr>
         <p:spPr>
           <a:xfrm>
-            <a:off x="658368" y="2286000"/>
-            <a:ext cx="5254600" cy="3200400"/>
+            <a:off x="658368" y="2212848"/>
+            <a:ext cx="5254600" cy="2670048"/>
           </a:xfrm>
           <a:prstGeom prst="roundRect">
             <a:avLst>
-              <a:gd name="adj" fmla="val 2571"/>
+              <a:gd name="adj" fmla="val 3082"/>
             </a:avLst>
           </a:prstGeom>
           <a:solidFill>
@@ -3917,7 +3917,7 @@
         </p:nvSpPr>
         <p:spPr>
           <a:xfrm>
-            <a:off x="932688" y="2505456"/>
+            <a:off x="932688" y="2414016"/>
             <a:ext cx="4705960" cy="219456"/>
           </a:xfrm>
           <a:prstGeom prst="rect">
@@ -3934,7 +3934,7 @@
               <a:buNone/>
             </a:pPr>
             <a:r>
-              <a:rPr lang="en-US" sz="1050" b="1" dirty="0">
+              <a:rPr lang="en-US" sz="1000" b="1" dirty="0">
                 <a:solidFill>
                   <a:srgbClr val="0057FF"/>
                 </a:solidFill>
@@ -3942,9 +3942,9 @@
                 <a:ea typeface="Pretendard" pitchFamily="34" charset="-122"/>
                 <a:cs typeface="Pretendard" pitchFamily="34" charset="-120"/>
               </a:rPr>
-              <a:t>얼마나 마시나</a:t>
-            </a:r>
-            <a:endParaRPr lang="en-US" sz="1050" dirty="0"/>
+              <a:t>얼마나 마시나 · 국내</a:t>
+            </a:r>
+            <a:endParaRPr lang="en-US" sz="1000" dirty="0"/>
           </a:p>
         </p:txBody>
       </p:sp>
@@ -3956,24 +3956,24 @@
         </p:nvSpPr>
         <p:spPr>
           <a:xfrm>
-            <a:off x="932688" y="2779776"/>
-            <a:ext cx="1371600" cy="548640"/>
-          </a:xfrm>
-          <a:prstGeom prst="rect">
-            <a:avLst/>
-          </a:prstGeom>
-          <a:noFill/>
-          <a:ln/>
-        </p:spPr>
-        <p:txBody>
-          <a:bodyPr wrap="square" lIns="0" tIns="0" rIns="0" bIns="0" rtlCol="0" anchor="t"/>
-          <a:lstStyle/>
-          <a:p>
-            <a:pPr indent="0" marL="0">
-              <a:buNone/>
-            </a:pPr>
-            <a:r>
-              <a:rPr lang="en-US" sz="3800" b="1" dirty="0">
+            <a:off x="932688" y="2670048"/>
+            <a:ext cx="1325880" cy="530352"/>
+          </a:xfrm>
+          <a:prstGeom prst="rect">
+            <a:avLst/>
+          </a:prstGeom>
+          <a:noFill/>
+          <a:ln/>
+        </p:spPr>
+        <p:txBody>
+          <a:bodyPr wrap="square" lIns="0" tIns="0" rIns="0" bIns="0" rtlCol="0" anchor="t"/>
+          <a:lstStyle/>
+          <a:p>
+            <a:pPr indent="0" marL="0">
+              <a:buNone/>
+            </a:pPr>
+            <a:r>
+              <a:rPr lang="en-US" sz="3600" b="1" dirty="0">
                 <a:solidFill>
                   <a:srgbClr val="191919"/>
                 </a:solidFill>
@@ -3983,7 +3983,7 @@
               </a:rPr>
               <a:t>405</a:t>
             </a:r>
-            <a:endParaRPr lang="en-US" sz="3800" dirty="0"/>
+            <a:endParaRPr lang="en-US" sz="3600" dirty="0"/>
           </a:p>
         </p:txBody>
       </p:sp>
@@ -3995,8 +3995,8 @@
         </p:nvSpPr>
         <p:spPr>
           <a:xfrm>
-            <a:off x="2121408" y="2852928"/>
-            <a:ext cx="3517240" cy="457200"/>
+            <a:off x="2075688" y="2743200"/>
+            <a:ext cx="3562960" cy="457200"/>
           </a:xfrm>
           <a:prstGeom prst="rect">
             <a:avLst/>
@@ -4010,12 +4010,12 @@
           <a:p>
             <a:pPr indent="0" marL="0">
               <a:lnSpc>
-                <a:spcPts val="1400"/>
+                <a:spcPts val="1350"/>
               </a:lnSpc>
               <a:buNone/>
             </a:pPr>
             <a:r>
-              <a:rPr lang="en-US" sz="1050" dirty="0">
+              <a:rPr lang="en-US" sz="1000" dirty="0">
                 <a:solidFill>
                   <a:srgbClr val="3C3C3C"/>
                 </a:solidFill>
@@ -4023,17 +4023,17 @@
                 <a:ea typeface="Pretendard" pitchFamily="34" charset="-122"/>
                 <a:cs typeface="Pretendard" pitchFamily="34" charset="-120"/>
               </a:rPr>
-              <a:t>잔 · 한국 1인당 연간 커피 소비량
+              <a:t>잔 · 1인당 연간 커피 소비량
 </a:t>
             </a:r>
             <a:pPr indent="0" marL="0">
               <a:lnSpc>
-                <a:spcPts val="1400"/>
+                <a:spcPts val="1350"/>
               </a:lnSpc>
               <a:buNone/>
             </a:pPr>
             <a:r>
-              <a:rPr lang="en-US" sz="1050" dirty="0">
+              <a:rPr lang="en-US" sz="1000" dirty="0">
                 <a:solidFill>
                   <a:srgbClr val="959595"/>
                 </a:solidFill>
@@ -4041,9 +4041,9 @@
                 <a:ea typeface="Pretendard" pitchFamily="34" charset="-122"/>
                 <a:cs typeface="Pretendard" pitchFamily="34" charset="-120"/>
               </a:rPr>
-              <a:t>2023년 · 세계 2위</a:t>
-            </a:r>
-            <a:endParaRPr lang="en-US" sz="1050" dirty="0"/>
+              <a:t>2023년 · 프랑스에 이은 세계 2위</a:t>
+            </a:r>
+            <a:endParaRPr lang="en-US" sz="1000" dirty="0"/>
           </a:p>
         </p:txBody>
       </p:sp>
@@ -4055,8 +4055,8 @@
         </p:nvSpPr>
         <p:spPr>
           <a:xfrm>
-            <a:off x="932688" y="3511296"/>
-            <a:ext cx="640080" cy="219456"/>
+            <a:off x="932688" y="3310128"/>
+            <a:ext cx="603504" cy="201168"/>
           </a:xfrm>
           <a:prstGeom prst="rect">
             <a:avLst/>
@@ -4072,7 +4072,7 @@
               <a:buNone/>
             </a:pPr>
             <a:r>
-              <a:rPr lang="en-US" sz="950" b="1" dirty="0">
+              <a:rPr lang="en-US" sz="900" b="1" dirty="0">
                 <a:solidFill>
                   <a:srgbClr val="191919"/>
                 </a:solidFill>
@@ -4082,7 +4082,7 @@
               </a:rPr>
               <a:t>한국</a:t>
             </a:r>
-            <a:endParaRPr lang="en-US" sz="950" dirty="0"/>
+            <a:endParaRPr lang="en-US" sz="900" dirty="0"/>
           </a:p>
         </p:txBody>
       </p:sp>
@@ -4094,12 +4094,12 @@
         </p:nvSpPr>
         <p:spPr>
           <a:xfrm>
-            <a:off x="1572768" y="3538728"/>
-            <a:ext cx="3517240" cy="173736"/>
+            <a:off x="1554480" y="3337560"/>
+            <a:ext cx="3553816" cy="155448"/>
           </a:xfrm>
           <a:prstGeom prst="roundRect">
             <a:avLst>
-              <a:gd name="adj" fmla="val 21053"/>
+              <a:gd name="adj" fmla="val 23529"/>
             </a:avLst>
           </a:prstGeom>
           <a:solidFill>
@@ -4116,12 +4116,12 @@
         </p:nvSpPr>
         <p:spPr>
           <a:xfrm>
-            <a:off x="1572768" y="3538728"/>
-            <a:ext cx="2585171" cy="173736"/>
+            <a:off x="1554480" y="3337560"/>
+            <a:ext cx="2612054" cy="155448"/>
           </a:xfrm>
           <a:prstGeom prst="roundRect">
             <a:avLst>
-              <a:gd name="adj" fmla="val 21053"/>
+              <a:gd name="adj" fmla="val 23529"/>
             </a:avLst>
           </a:prstGeom>
           <a:solidFill>
@@ -4138,8 +4138,8 @@
         </p:nvSpPr>
         <p:spPr>
           <a:xfrm>
-            <a:off x="5144872" y="3511296"/>
-            <a:ext cx="457200" cy="219456"/>
+            <a:off x="5154016" y="3310128"/>
+            <a:ext cx="411480" cy="201168"/>
           </a:xfrm>
           <a:prstGeom prst="rect">
             <a:avLst/>
@@ -4155,7 +4155,7 @@
               <a:buNone/>
             </a:pPr>
             <a:r>
-              <a:rPr lang="en-US" sz="1000" b="1" dirty="0">
+              <a:rPr lang="en-US" sz="950" b="1" dirty="0">
                 <a:solidFill>
                   <a:srgbClr val="0057FF"/>
                 </a:solidFill>
@@ -4165,7 +4165,7 @@
               </a:rPr>
               <a:t>405</a:t>
             </a:r>
-            <a:endParaRPr lang="en-US" sz="1000" dirty="0"/>
+            <a:endParaRPr lang="en-US" sz="950" dirty="0"/>
           </a:p>
         </p:txBody>
       </p:sp>
@@ -4177,8 +4177,8 @@
         </p:nvSpPr>
         <p:spPr>
           <a:xfrm>
-            <a:off x="932688" y="3840480"/>
-            <a:ext cx="640080" cy="219456"/>
+            <a:off x="932688" y="3602736"/>
+            <a:ext cx="603504" cy="201168"/>
           </a:xfrm>
           <a:prstGeom prst="rect">
             <a:avLst/>
@@ -4194,7 +4194,7 @@
               <a:buNone/>
             </a:pPr>
             <a:r>
-              <a:rPr lang="en-US" sz="950" dirty="0">
+              <a:rPr lang="en-US" sz="900" dirty="0">
                 <a:solidFill>
                   <a:srgbClr val="707070"/>
                 </a:solidFill>
@@ -4204,7 +4204,7 @@
               </a:rPr>
               <a:t>세계 평균</a:t>
             </a:r>
-            <a:endParaRPr lang="en-US" sz="950" dirty="0"/>
+            <a:endParaRPr lang="en-US" sz="900" dirty="0"/>
           </a:p>
         </p:txBody>
       </p:sp>
@@ -4216,12 +4216,12 @@
         </p:nvSpPr>
         <p:spPr>
           <a:xfrm>
-            <a:off x="1572768" y="3867912"/>
-            <a:ext cx="3517240" cy="173736"/>
+            <a:off x="1554480" y="3630168"/>
+            <a:ext cx="3553816" cy="155448"/>
           </a:xfrm>
           <a:prstGeom prst="roundRect">
             <a:avLst>
-              <a:gd name="adj" fmla="val 21053"/>
+              <a:gd name="adj" fmla="val 23529"/>
             </a:avLst>
           </a:prstGeom>
           <a:solidFill>
@@ -4238,12 +4238,12 @@
         </p:nvSpPr>
         <p:spPr>
           <a:xfrm>
-            <a:off x="1572768" y="3867912"/>
-            <a:ext cx="970758" cy="173736"/>
+            <a:off x="1554480" y="3630168"/>
+            <a:ext cx="980853" cy="155448"/>
           </a:xfrm>
           <a:prstGeom prst="roundRect">
             <a:avLst>
-              <a:gd name="adj" fmla="val 21053"/>
+              <a:gd name="adj" fmla="val 23529"/>
             </a:avLst>
           </a:prstGeom>
           <a:solidFill>
@@ -4260,8 +4260,8 @@
         </p:nvSpPr>
         <p:spPr>
           <a:xfrm>
-            <a:off x="5144872" y="3840480"/>
-            <a:ext cx="457200" cy="219456"/>
+            <a:off x="5154016" y="3602736"/>
+            <a:ext cx="411480" cy="201168"/>
           </a:xfrm>
           <a:prstGeom prst="rect">
             <a:avLst/>
@@ -4277,7 +4277,7 @@
               <a:buNone/>
             </a:pPr>
             <a:r>
-              <a:rPr lang="en-US" sz="1000" b="1" dirty="0">
+              <a:rPr lang="en-US" sz="950" b="1" dirty="0">
                 <a:solidFill>
                   <a:srgbClr val="707070"/>
                 </a:solidFill>
@@ -4287,7 +4287,7 @@
               </a:rPr>
               <a:t>152</a:t>
             </a:r>
-            <a:endParaRPr lang="en-US" sz="1000" dirty="0"/>
+            <a:endParaRPr lang="en-US" sz="950" dirty="0"/>
           </a:p>
         </p:txBody>
       </p:sp>
@@ -4299,8 +4299,8 @@
         </p:nvSpPr>
         <p:spPr>
           <a:xfrm>
-            <a:off x="932688" y="4297680"/>
-            <a:ext cx="4705960" cy="457200"/>
+            <a:off x="932688" y="3968496"/>
+            <a:ext cx="4705960" cy="402336"/>
           </a:xfrm>
           <a:prstGeom prst="rect">
             <a:avLst/>
@@ -4314,12 +4314,12 @@
           <a:p>
             <a:pPr indent="0" marL="0">
               <a:lnSpc>
-                <a:spcPts val="1300"/>
+                <a:spcPts val="1250"/>
               </a:lnSpc>
               <a:buNone/>
             </a:pPr>
             <a:r>
-              <a:rPr lang="en-US" sz="1000" dirty="0">
+              <a:rPr lang="en-US" sz="950" dirty="0">
                 <a:solidFill>
                   <a:srgbClr val="3C3C3C"/>
                 </a:solidFill>
@@ -4331,12 +4331,12 @@
             </a:r>
             <a:pPr indent="0" marL="0">
               <a:lnSpc>
-                <a:spcPts val="1300"/>
+                <a:spcPts val="1250"/>
               </a:lnSpc>
               <a:buNone/>
             </a:pPr>
             <a:r>
-              <a:rPr lang="en-US" sz="1000" b="1" dirty="0">
+              <a:rPr lang="en-US" sz="950" b="1" dirty="0">
                 <a:solidFill>
                   <a:srgbClr val="191919"/>
                 </a:solidFill>
@@ -4344,16 +4344,16 @@
                 <a:ea typeface="Pretendard" pitchFamily="34" charset="-122"/>
                 <a:cs typeface="Pretendard" pitchFamily="34" charset="-120"/>
               </a:rPr>
-              <a:t>연평균 2.8%씩 늘어</a:t>
+              <a:t>연평균 2.8%씩</a:t>
             </a:r>
             <a:pPr indent="0" marL="0">
               <a:lnSpc>
-                <a:spcPts val="1300"/>
+                <a:spcPts val="1250"/>
               </a:lnSpc>
               <a:buNone/>
             </a:pPr>
             <a:r>
-              <a:rPr lang="en-US" sz="1000" dirty="0">
+              <a:rPr lang="en-US" sz="950" dirty="0">
                 <a:solidFill>
                   <a:srgbClr val="3C3C3C"/>
                 </a:solidFill>
@@ -4361,9 +4361,9 @@
                 <a:ea typeface="Pretendard" pitchFamily="34" charset="-122"/>
                 <a:cs typeface="Pretendard" pitchFamily="34" charset="-120"/>
               </a:rPr>
-              <a:t> 2023년 405잔. 세계 평균의 2.7배다.</a:t>
-            </a:r>
-            <a:endParaRPr lang="en-US" sz="1000" dirty="0"/>
+              <a:t> 늘었다. 세계 평균의 2.7배를 마신다.</a:t>
+            </a:r>
+            <a:endParaRPr lang="en-US" sz="950" dirty="0"/>
           </a:p>
         </p:txBody>
       </p:sp>
@@ -4375,8 +4375,8 @@
         </p:nvSpPr>
         <p:spPr>
           <a:xfrm>
-            <a:off x="932688" y="5120640"/>
-            <a:ext cx="4705960" cy="201168"/>
+            <a:off x="932688" y="4572000"/>
+            <a:ext cx="4705960" cy="182880"/>
           </a:xfrm>
           <a:prstGeom prst="rect">
             <a:avLst/>
@@ -4414,12 +4414,12 @@
         </p:nvSpPr>
         <p:spPr>
           <a:xfrm>
-            <a:off x="6278728" y="2286000"/>
-            <a:ext cx="5254600" cy="3200400"/>
+            <a:off x="6278728" y="2212848"/>
+            <a:ext cx="5254600" cy="2670048"/>
           </a:xfrm>
           <a:prstGeom prst="roundRect">
             <a:avLst>
-              <a:gd name="adj" fmla="val 2571"/>
+              <a:gd name="adj" fmla="val 3082"/>
             </a:avLst>
           </a:prstGeom>
           <a:solidFill>
@@ -4441,7 +4441,7 @@
         </p:nvSpPr>
         <p:spPr>
           <a:xfrm>
-            <a:off x="6553048" y="2505456"/>
+            <a:off x="6553048" y="2414016"/>
             <a:ext cx="4705960" cy="219456"/>
           </a:xfrm>
           <a:prstGeom prst="rect">
@@ -4458,7 +4458,7 @@
               <a:buNone/>
             </a:pPr>
             <a:r>
-              <a:rPr lang="en-US" sz="1050" b="1" dirty="0">
+              <a:rPr lang="en-US" sz="1000" b="1" dirty="0">
                 <a:solidFill>
                   <a:srgbClr val="0057FF"/>
                 </a:solidFill>
@@ -4466,9 +4466,9 @@
                 <a:ea typeface="Pretendard" pitchFamily="34" charset="-122"/>
                 <a:cs typeface="Pretendard" pitchFamily="34" charset="-120"/>
               </a:rPr>
-              <a:t>어디서 마시나</a:t>
-            </a:r>
-            <a:endParaRPr lang="en-US" sz="1050" dirty="0"/>
+              <a:t>집에서 내려 마시는 쪽으로 · 국내</a:t>
+            </a:r>
+            <a:endParaRPr lang="en-US" sz="1000" dirty="0"/>
           </a:p>
         </p:txBody>
       </p:sp>
@@ -4480,24 +4480,161 @@
         </p:nvSpPr>
         <p:spPr>
           <a:xfrm>
-            <a:off x="6553048" y="2798064"/>
-            <a:ext cx="2352980" cy="502920"/>
-          </a:xfrm>
-          <a:prstGeom prst="rect">
-            <a:avLst/>
-          </a:prstGeom>
-          <a:noFill/>
-          <a:ln/>
-        </p:spPr>
-        <p:txBody>
-          <a:bodyPr wrap="square" lIns="0" tIns="0" rIns="0" bIns="0" rtlCol="0" anchor="t"/>
-          <a:lstStyle/>
-          <a:p>
-            <a:pPr indent="0" marL="0">
-              <a:buNone/>
-            </a:pPr>
-            <a:r>
-              <a:rPr lang="en-US" sz="3200" b="1" dirty="0">
+            <a:off x="6553048" y="2670048"/>
+            <a:ext cx="4705960" cy="237744"/>
+          </a:xfrm>
+          <a:prstGeom prst="rect">
+            <a:avLst/>
+          </a:prstGeom>
+          <a:noFill/>
+          <a:ln/>
+        </p:spPr>
+        <p:txBody>
+          <a:bodyPr wrap="square" lIns="0" tIns="0" rIns="0" bIns="0" rtlCol="0" anchor="t"/>
+          <a:lstStyle/>
+          <a:p>
+            <a:pPr indent="0" marL="0">
+              <a:buNone/>
+            </a:pPr>
+            <a:r>
+              <a:rPr lang="en-US" sz="950" dirty="0">
+                <a:solidFill>
+                  <a:srgbClr val="3C3C3C"/>
+                </a:solidFill>
+                <a:latin typeface="Pretendard" pitchFamily="34" charset="0"/>
+                <a:ea typeface="Pretendard" pitchFamily="34" charset="-122"/>
+                <a:cs typeface="Pretendard" pitchFamily="34" charset="-120"/>
+              </a:rPr>
+              <a:t>가정용 커피머신 보유율은 홈카페 확산을 보는 대표 지표다.</a:t>
+            </a:r>
+            <a:endParaRPr lang="en-US" sz="950" dirty="0"/>
+          </a:p>
+        </p:txBody>
+      </p:sp>
+      <p:sp>
+        <p:nvSpPr>
+          <p:cNvPr id="22" name="Text 20"/>
+          <p:cNvSpPr/>
+          <p:nvPr/>
+        </p:nvSpPr>
+        <p:spPr>
+          <a:xfrm>
+            <a:off x="6553048" y="3200400"/>
+            <a:ext cx="1446733" cy="219456"/>
+          </a:xfrm>
+          <a:prstGeom prst="rect">
+            <a:avLst/>
+          </a:prstGeom>
+          <a:noFill/>
+          <a:ln/>
+        </p:spPr>
+        <p:txBody>
+          <a:bodyPr wrap="square" lIns="0" tIns="0" rIns="0" bIns="0" rtlCol="0" anchor="t"/>
+          <a:lstStyle/>
+          <a:p>
+            <a:pPr algn="ctr" indent="0" marL="0">
+              <a:buNone/>
+            </a:pPr>
+            <a:r>
+              <a:rPr lang="en-US" sz="1000" b="1" dirty="0">
+                <a:solidFill>
+                  <a:srgbClr val="707070"/>
+                </a:solidFill>
+                <a:latin typeface="Pretendard" pitchFamily="34" charset="0"/>
+                <a:ea typeface="Pretendard" pitchFamily="34" charset="-122"/>
+                <a:cs typeface="Pretendard" pitchFamily="34" charset="-120"/>
+              </a:rPr>
+              <a:t>35%</a:t>
+            </a:r>
+            <a:endParaRPr lang="en-US" sz="1000" dirty="0"/>
+          </a:p>
+        </p:txBody>
+      </p:sp>
+      <p:sp>
+        <p:nvSpPr>
+          <p:cNvPr id="23" name="Shape 21"/>
+          <p:cNvSpPr/>
+          <p:nvPr/>
+        </p:nvSpPr>
+        <p:spPr>
+          <a:xfrm>
+            <a:off x="6553048" y="3438144"/>
+            <a:ext cx="1446733" cy="475488"/>
+          </a:xfrm>
+          <a:prstGeom prst="rect">
+            <a:avLst/>
+          </a:prstGeom>
+          <a:solidFill>
+            <a:srgbClr val="C9CBD0"/>
+          </a:solidFill>
+          <a:ln/>
+        </p:spPr>
+      </p:sp>
+      <p:sp>
+        <p:nvSpPr>
+          <p:cNvPr id="24" name="Text 22"/>
+          <p:cNvSpPr/>
+          <p:nvPr/>
+        </p:nvSpPr>
+        <p:spPr>
+          <a:xfrm>
+            <a:off x="6553048" y="3959352"/>
+            <a:ext cx="1446733" cy="201168"/>
+          </a:xfrm>
+          <a:prstGeom prst="rect">
+            <a:avLst/>
+          </a:prstGeom>
+          <a:noFill/>
+          <a:ln/>
+        </p:spPr>
+        <p:txBody>
+          <a:bodyPr wrap="square" lIns="0" tIns="0" rIns="0" bIns="0" rtlCol="0" anchor="t"/>
+          <a:lstStyle/>
+          <a:p>
+            <a:pPr algn="ctr" indent="0" marL="0">
+              <a:buNone/>
+            </a:pPr>
+            <a:r>
+              <a:rPr lang="en-US" sz="900" dirty="0">
+                <a:solidFill>
+                  <a:srgbClr val="707070"/>
+                </a:solidFill>
+                <a:latin typeface="Pretendard" pitchFamily="34" charset="0"/>
+                <a:ea typeface="Pretendard" pitchFamily="34" charset="-122"/>
+                <a:cs typeface="Pretendard" pitchFamily="34" charset="-120"/>
+              </a:rPr>
+              <a:t>2020년</a:t>
+            </a:r>
+            <a:endParaRPr lang="en-US" sz="900" dirty="0"/>
+          </a:p>
+        </p:txBody>
+      </p:sp>
+      <p:sp>
+        <p:nvSpPr>
+          <p:cNvPr id="25" name="Text 23"/>
+          <p:cNvSpPr/>
+          <p:nvPr/>
+        </p:nvSpPr>
+        <p:spPr>
+          <a:xfrm>
+            <a:off x="8182661" y="3072384"/>
+            <a:ext cx="1446733" cy="219456"/>
+          </a:xfrm>
+          <a:prstGeom prst="rect">
+            <a:avLst/>
+          </a:prstGeom>
+          <a:noFill/>
+          <a:ln/>
+        </p:spPr>
+        <p:txBody>
+          <a:bodyPr wrap="square" lIns="0" tIns="0" rIns="0" bIns="0" rtlCol="0" anchor="t"/>
+          <a:lstStyle/>
+          <a:p>
+            <a:pPr algn="ctr" indent="0" marL="0">
+              <a:buNone/>
+            </a:pPr>
+            <a:r>
+              <a:rPr lang="en-US" sz="1200" b="1" dirty="0">
                 <a:solidFill>
                   <a:srgbClr val="0057FF"/>
                 </a:solidFill>
@@ -4505,41 +4642,58 @@
                 <a:ea typeface="Pretendard" pitchFamily="34" charset="-122"/>
                 <a:cs typeface="Pretendard" pitchFamily="34" charset="-120"/>
               </a:rPr>
-              <a:t>70%</a:t>
-            </a:r>
-            <a:endParaRPr lang="en-US" sz="3200" dirty="0"/>
-          </a:p>
-        </p:txBody>
-      </p:sp>
-      <p:sp>
-        <p:nvSpPr>
-          <p:cNvPr id="22" name="Text 20"/>
-          <p:cNvSpPr/>
-          <p:nvPr/>
-        </p:nvSpPr>
-        <p:spPr>
-          <a:xfrm>
-            <a:off x="6553048" y="3328416"/>
-            <a:ext cx="2170100" cy="365760"/>
-          </a:xfrm>
-          <a:prstGeom prst="rect">
-            <a:avLst/>
-          </a:prstGeom>
-          <a:noFill/>
-          <a:ln/>
-        </p:spPr>
-        <p:txBody>
-          <a:bodyPr wrap="square" lIns="0" tIns="0" rIns="0" bIns="0" rtlCol="0" anchor="t"/>
-          <a:lstStyle/>
-          <a:p>
-            <a:pPr indent="0" marL="0">
-              <a:lnSpc>
-                <a:spcPts val="1300"/>
-              </a:lnSpc>
-              <a:buNone/>
-            </a:pPr>
-            <a:r>
-              <a:rPr lang="en-US" sz="1000" dirty="0">
+              <a:t>42%</a:t>
+            </a:r>
+            <a:endParaRPr lang="en-US" sz="1200" dirty="0"/>
+          </a:p>
+        </p:txBody>
+      </p:sp>
+      <p:sp>
+        <p:nvSpPr>
+          <p:cNvPr id="26" name="Shape 24"/>
+          <p:cNvSpPr/>
+          <p:nvPr/>
+        </p:nvSpPr>
+        <p:spPr>
+          <a:xfrm>
+            <a:off x="8182661" y="3310128"/>
+            <a:ext cx="1446733" cy="603504"/>
+          </a:xfrm>
+          <a:prstGeom prst="rect">
+            <a:avLst/>
+          </a:prstGeom>
+          <a:solidFill>
+            <a:srgbClr val="0057FF"/>
+          </a:solidFill>
+          <a:ln/>
+        </p:spPr>
+      </p:sp>
+      <p:sp>
+        <p:nvSpPr>
+          <p:cNvPr id="27" name="Text 25"/>
+          <p:cNvSpPr/>
+          <p:nvPr/>
+        </p:nvSpPr>
+        <p:spPr>
+          <a:xfrm>
+            <a:off x="8182661" y="3959352"/>
+            <a:ext cx="1446733" cy="201168"/>
+          </a:xfrm>
+          <a:prstGeom prst="rect">
+            <a:avLst/>
+          </a:prstGeom>
+          <a:noFill/>
+          <a:ln/>
+        </p:spPr>
+        <p:txBody>
+          <a:bodyPr wrap="square" lIns="0" tIns="0" rIns="0" bIns="0" rtlCol="0" anchor="t"/>
+          <a:lstStyle/>
+          <a:p>
+            <a:pPr algn="ctr" indent="0" marL="0">
+              <a:buNone/>
+            </a:pPr>
+            <a:r>
+              <a:rPr lang="en-US" sz="900" b="1" dirty="0">
                 <a:solidFill>
                   <a:srgbClr val="191919"/>
                 </a:solidFill>
@@ -4547,7 +4701,46 @@
                 <a:ea typeface="Pretendard" pitchFamily="34" charset="-122"/>
                 <a:cs typeface="Pretendard" pitchFamily="34" charset="-120"/>
               </a:rPr>
-              <a:t>매일 집에서 커피를 내린다</a:t>
+              <a:t>2024년</a:t>
+            </a:r>
+            <a:endParaRPr lang="en-US" sz="900" dirty="0"/>
+          </a:p>
+        </p:txBody>
+      </p:sp>
+      <p:sp>
+        <p:nvSpPr>
+          <p:cNvPr id="28" name="Text 26"/>
+          <p:cNvSpPr/>
+          <p:nvPr/>
+        </p:nvSpPr>
+        <p:spPr>
+          <a:xfrm>
+            <a:off x="9812274" y="2944368"/>
+            <a:ext cx="1446733" cy="219456"/>
+          </a:xfrm>
+          <a:prstGeom prst="rect">
+            <a:avLst/>
+          </a:prstGeom>
+          <a:noFill/>
+          <a:ln/>
+        </p:spPr>
+        <p:txBody>
+          <a:bodyPr wrap="square" lIns="0" tIns="0" rIns="0" bIns="0" rtlCol="0" anchor="t"/>
+          <a:lstStyle/>
+          <a:p>
+            <a:pPr algn="ctr" indent="0" marL="0">
+              <a:buNone/>
+            </a:pPr>
+            <a:r>
+              <a:rPr lang="en-US" sz="1000" b="1" dirty="0">
+                <a:solidFill>
+                  <a:srgbClr val="1E9BE6"/>
+                </a:solidFill>
+                <a:latin typeface="Pretendard" pitchFamily="34" charset="0"/>
+                <a:ea typeface="Pretendard" pitchFamily="34" charset="-122"/>
+                <a:cs typeface="Pretendard" pitchFamily="34" charset="-120"/>
+              </a:rPr>
+              <a:t>50%</a:t>
             </a:r>
             <a:endParaRPr lang="en-US" sz="1000" dirty="0"/>
           </a:p>
@@ -4555,72 +4748,103 @@
       </p:sp>
       <p:sp>
         <p:nvSpPr>
-          <p:cNvPr id="23" name="Text 21"/>
-          <p:cNvSpPr/>
-          <p:nvPr/>
-        </p:nvSpPr>
-        <p:spPr>
-          <a:xfrm>
-            <a:off x="8906027" y="2798064"/>
-            <a:ext cx="2352980" cy="502920"/>
-          </a:xfrm>
-          <a:prstGeom prst="rect">
-            <a:avLst/>
-          </a:prstGeom>
-          <a:noFill/>
-          <a:ln/>
-        </p:spPr>
-        <p:txBody>
-          <a:bodyPr wrap="square" lIns="0" tIns="0" rIns="0" bIns="0" rtlCol="0" anchor="t"/>
-          <a:lstStyle/>
-          <a:p>
-            <a:pPr indent="0" marL="0">
-              <a:buNone/>
-            </a:pPr>
-            <a:r>
-              <a:rPr lang="en-US" sz="3200" b="1" dirty="0">
-                <a:solidFill>
-                  <a:srgbClr val="0057FF"/>
-                </a:solidFill>
-                <a:latin typeface="Pretendard" pitchFamily="34" charset="0"/>
-                <a:ea typeface="Pretendard" pitchFamily="34" charset="-122"/>
-                <a:cs typeface="Pretendard" pitchFamily="34" charset="-120"/>
-              </a:rPr>
-              <a:t>55%</a:t>
-            </a:r>
-            <a:endParaRPr lang="en-US" sz="3200" dirty="0"/>
-          </a:p>
-        </p:txBody>
-      </p:sp>
-      <p:sp>
-        <p:nvSpPr>
-          <p:cNvPr id="24" name="Text 22"/>
-          <p:cNvSpPr/>
-          <p:nvPr/>
-        </p:nvSpPr>
-        <p:spPr>
-          <a:xfrm>
-            <a:off x="8906027" y="3328416"/>
-            <a:ext cx="2170100" cy="365760"/>
-          </a:xfrm>
-          <a:prstGeom prst="rect">
-            <a:avLst/>
-          </a:prstGeom>
-          <a:noFill/>
-          <a:ln/>
-        </p:spPr>
-        <p:txBody>
-          <a:bodyPr wrap="square" lIns="0" tIns="0" rIns="0" bIns="0" rtlCol="0" anchor="t"/>
-          <a:lstStyle/>
-          <a:p>
-            <a:pPr indent="0" marL="0">
-              <a:lnSpc>
-                <a:spcPts val="1300"/>
-              </a:lnSpc>
-              <a:buNone/>
-            </a:pPr>
-            <a:r>
-              <a:rPr lang="en-US" sz="1000" dirty="0">
+          <p:cNvPr id="29" name="Shape 27"/>
+          <p:cNvSpPr/>
+          <p:nvPr/>
+        </p:nvSpPr>
+        <p:spPr>
+          <a:xfrm>
+            <a:off x="9812274" y="3182112"/>
+            <a:ext cx="1446733" cy="731520"/>
+          </a:xfrm>
+          <a:prstGeom prst="rect">
+            <a:avLst/>
+          </a:prstGeom>
+          <a:solidFill>
+            <a:srgbClr val="A9CCEC"/>
+          </a:solidFill>
+          <a:ln/>
+        </p:spPr>
+      </p:sp>
+      <p:sp>
+        <p:nvSpPr>
+          <p:cNvPr id="30" name="Text 28"/>
+          <p:cNvSpPr/>
+          <p:nvPr/>
+        </p:nvSpPr>
+        <p:spPr>
+          <a:xfrm>
+            <a:off x="9812274" y="3959352"/>
+            <a:ext cx="1446733" cy="201168"/>
+          </a:xfrm>
+          <a:prstGeom prst="rect">
+            <a:avLst/>
+          </a:prstGeom>
+          <a:noFill/>
+          <a:ln/>
+        </p:spPr>
+        <p:txBody>
+          <a:bodyPr wrap="square" lIns="0" tIns="0" rIns="0" bIns="0" rtlCol="0" anchor="t"/>
+          <a:lstStyle/>
+          <a:p>
+            <a:pPr algn="ctr" indent="0" marL="0">
+              <a:buNone/>
+            </a:pPr>
+            <a:r>
+              <a:rPr lang="en-US" sz="900" dirty="0">
+                <a:solidFill>
+                  <a:srgbClr val="707070"/>
+                </a:solidFill>
+                <a:latin typeface="Pretendard" pitchFamily="34" charset="0"/>
+                <a:ea typeface="Pretendard" pitchFamily="34" charset="-122"/>
+                <a:cs typeface="Pretendard" pitchFamily="34" charset="-120"/>
+              </a:rPr>
+              <a:t>2025년 전망</a:t>
+            </a:r>
+            <a:endParaRPr lang="en-US" sz="900" dirty="0"/>
+          </a:p>
+        </p:txBody>
+      </p:sp>
+      <p:sp>
+        <p:nvSpPr>
+          <p:cNvPr id="31" name="Text 29"/>
+          <p:cNvSpPr/>
+          <p:nvPr/>
+        </p:nvSpPr>
+        <p:spPr>
+          <a:xfrm>
+            <a:off x="6553048" y="4315968"/>
+            <a:ext cx="4705960" cy="237744"/>
+          </a:xfrm>
+          <a:prstGeom prst="rect">
+            <a:avLst/>
+          </a:prstGeom>
+          <a:noFill/>
+          <a:ln/>
+        </p:spPr>
+        <p:txBody>
+          <a:bodyPr wrap="square" lIns="0" tIns="0" rIns="0" bIns="0" rtlCol="0" anchor="t"/>
+          <a:lstStyle/>
+          <a:p>
+            <a:pPr indent="0" marL="0">
+              <a:buNone/>
+            </a:pPr>
+            <a:r>
+              <a:rPr lang="en-US" sz="950" dirty="0">
+                <a:solidFill>
+                  <a:srgbClr val="3C3C3C"/>
+                </a:solidFill>
+                <a:latin typeface="Pretendard" pitchFamily="34" charset="0"/>
+                <a:ea typeface="Pretendard" pitchFamily="34" charset="-122"/>
+                <a:cs typeface="Pretendard" pitchFamily="34" charset="-120"/>
+              </a:rPr>
+              <a:t>국내 볶은 커피 시장도 </a:t>
+            </a:r>
+            <a:pPr indent="0" marL="0">
+              <a:buNone/>
+            </a:pPr>
+            <a:r>
+              <a:rPr lang="en-US" sz="950" b="1" dirty="0">
                 <a:solidFill>
                   <a:srgbClr val="191919"/>
                 </a:solidFill>
@@ -4628,68 +4852,182 @@
                 <a:ea typeface="Pretendard" pitchFamily="34" charset="-122"/>
                 <a:cs typeface="Pretendard" pitchFamily="34" charset="-120"/>
               </a:rPr>
-              <a:t>가격이 올라 카페 소비를 줄였다</a:t>
-            </a:r>
-            <a:endParaRPr lang="en-US" sz="1000" dirty="0"/>
-          </a:p>
-        </p:txBody>
-      </p:sp>
-      <p:sp>
-        <p:nvSpPr>
-          <p:cNvPr id="25" name="Shape 23"/>
-          <p:cNvSpPr/>
-          <p:nvPr/>
-        </p:nvSpPr>
-        <p:spPr>
-          <a:xfrm>
-            <a:off x="6553048" y="3822192"/>
-            <a:ext cx="4705960" cy="786384"/>
+              <a:t>2018년 이후 연평균 두 자릿수</a:t>
+            </a:r>
+            <a:pPr indent="0" marL="0">
+              <a:buNone/>
+            </a:pPr>
+            <a:r>
+              <a:rPr lang="en-US" sz="950" dirty="0">
+                <a:solidFill>
+                  <a:srgbClr val="3C3C3C"/>
+                </a:solidFill>
+                <a:latin typeface="Pretendard" pitchFamily="34" charset="0"/>
+                <a:ea typeface="Pretendard" pitchFamily="34" charset="-122"/>
+                <a:cs typeface="Pretendard" pitchFamily="34" charset="-120"/>
+              </a:rPr>
+              <a:t>로 커지고 있다.</a:t>
+            </a:r>
+            <a:endParaRPr lang="en-US" sz="950" dirty="0"/>
+          </a:p>
+        </p:txBody>
+      </p:sp>
+      <p:sp>
+        <p:nvSpPr>
+          <p:cNvPr id="32" name="Text 30"/>
+          <p:cNvSpPr/>
+          <p:nvPr/>
+        </p:nvSpPr>
+        <p:spPr>
+          <a:xfrm>
+            <a:off x="6553048" y="4572000"/>
+            <a:ext cx="4705960" cy="182880"/>
+          </a:xfrm>
+          <a:prstGeom prst="rect">
+            <a:avLst/>
+          </a:prstGeom>
+          <a:noFill/>
+          <a:ln/>
+        </p:spPr>
+        <p:txBody>
+          <a:bodyPr wrap="square" lIns="0" tIns="0" rIns="0" bIns="0" rtlCol="0" anchor="t"/>
+          <a:lstStyle/>
+          <a:p>
+            <a:pPr indent="0" marL="0">
+              <a:buNone/>
+            </a:pPr>
+            <a:r>
+              <a:rPr lang="en-US" sz="800" dirty="0">
+                <a:solidFill>
+                  <a:srgbClr val="959595"/>
+                </a:solidFill>
+                <a:latin typeface="Pretendard" pitchFamily="34" charset="0"/>
+                <a:ea typeface="Pretendard" pitchFamily="34" charset="-122"/>
+                <a:cs typeface="Pretendard" pitchFamily="34" charset="-120"/>
+              </a:rPr>
+              <a:t>한국갤럽 가전 보유율 조사 · 언론 보도 재인용</a:t>
+            </a:r>
+            <a:endParaRPr lang="en-US" sz="800" dirty="0"/>
+          </a:p>
+        </p:txBody>
+      </p:sp>
+      <p:sp>
+        <p:nvSpPr>
+          <p:cNvPr id="33" name="Shape 31"/>
+          <p:cNvSpPr/>
+          <p:nvPr/>
+        </p:nvSpPr>
+        <p:spPr>
+          <a:xfrm>
+            <a:off x="658368" y="5065776"/>
+            <a:ext cx="10874959" cy="475488"/>
           </a:xfrm>
           <a:prstGeom prst="roundRect">
             <a:avLst>
-              <a:gd name="adj" fmla="val 10465"/>
+              <a:gd name="adj" fmla="val 17308"/>
             </a:avLst>
           </a:prstGeom>
           <a:solidFill>
-            <a:srgbClr val="FFFFFF"/>
+            <a:srgbClr val="F5F5F7"/>
+          </a:solidFill>
+          <a:ln/>
+        </p:spPr>
+      </p:sp>
+      <p:sp>
+        <p:nvSpPr>
+          <p:cNvPr id="34" name="Shape 32"/>
+          <p:cNvSpPr/>
+          <p:nvPr/>
+        </p:nvSpPr>
+        <p:spPr>
+          <a:xfrm>
+            <a:off x="877824" y="5193792"/>
+            <a:ext cx="1051560" cy="219456"/>
+          </a:xfrm>
+          <a:prstGeom prst="roundRect">
+            <a:avLst>
+              <a:gd name="adj" fmla="val 50000"/>
+            </a:avLst>
+          </a:prstGeom>
+          <a:solidFill>
+            <a:srgbClr val="F0F0F0"/>
           </a:solidFill>
           <a:ln w="12700">
             <a:solidFill>
               <a:srgbClr val="E8E8E8"/>
             </a:solidFill>
-            <a:prstDash val="solid"/>
+            <a:prstDash val="dash"/>
           </a:ln>
         </p:spPr>
       </p:sp>
       <p:sp>
         <p:nvSpPr>
-          <p:cNvPr id="26" name="Text 24"/>
-          <p:cNvSpPr/>
-          <p:nvPr/>
-        </p:nvSpPr>
-        <p:spPr>
-          <a:xfrm>
-            <a:off x="6717640" y="3931920"/>
-            <a:ext cx="4376776" cy="603504"/>
-          </a:xfrm>
-          <a:prstGeom prst="rect">
-            <a:avLst/>
-          </a:prstGeom>
-          <a:noFill/>
-          <a:ln/>
-        </p:spPr>
-        <p:txBody>
-          <a:bodyPr wrap="square" lIns="0" tIns="0" rIns="0" bIns="0" rtlCol="0" anchor="t"/>
+          <p:cNvPr id="35" name="Text 33"/>
+          <p:cNvSpPr/>
+          <p:nvPr/>
+        </p:nvSpPr>
+        <p:spPr>
+          <a:xfrm>
+            <a:off x="877824" y="5193792"/>
+            <a:ext cx="1051560" cy="219456"/>
+          </a:xfrm>
+          <a:prstGeom prst="rect">
+            <a:avLst/>
+          </a:prstGeom>
+          <a:noFill/>
+          <a:ln/>
+        </p:spPr>
+        <p:txBody>
+          <a:bodyPr wrap="square" lIns="0" tIns="0" rIns="0" bIns="0" rtlCol="0" anchor="ctr"/>
+          <a:lstStyle/>
+          <a:p>
+            <a:pPr algn="ctr" indent="0" marL="0">
+              <a:buNone/>
+            </a:pPr>
+            <a:r>
+              <a:rPr lang="en-US" sz="800" b="1" dirty="0">
+                <a:solidFill>
+                  <a:srgbClr val="707070"/>
+                </a:solidFill>
+                <a:latin typeface="Pretendard" pitchFamily="34" charset="0"/>
+                <a:ea typeface="Pretendard" pitchFamily="34" charset="-122"/>
+                <a:cs typeface="Pretendard" pitchFamily="34" charset="-120"/>
+              </a:rPr>
+              <a:t>해외 기준 · 참고</a:t>
+            </a:r>
+            <a:endParaRPr lang="en-US" sz="800" dirty="0"/>
+          </a:p>
+        </p:txBody>
+      </p:sp>
+      <p:sp>
+        <p:nvSpPr>
+          <p:cNvPr id="36" name="Text 34"/>
+          <p:cNvSpPr/>
+          <p:nvPr/>
+        </p:nvSpPr>
+        <p:spPr>
+          <a:xfrm>
+            <a:off x="2075688" y="5065776"/>
+            <a:ext cx="9229039" cy="475488"/>
+          </a:xfrm>
+          <a:prstGeom prst="rect">
+            <a:avLst/>
+          </a:prstGeom>
+          <a:noFill/>
+          <a:ln/>
+        </p:spPr>
+        <p:txBody>
+          <a:bodyPr wrap="square" lIns="0" tIns="0" rIns="0" bIns="0" rtlCol="0" anchor="ctr"/>
           <a:lstStyle/>
           <a:p>
             <a:pPr indent="0" marL="0">
               <a:lnSpc>
-                <a:spcPts val="1350"/>
+                <a:spcPts val="1200"/>
               </a:lnSpc>
               <a:buNone/>
             </a:pPr>
             <a:r>
-              <a:rPr lang="en-US" sz="1000" dirty="0">
+              <a:rPr lang="en-US" sz="900" dirty="0">
                 <a:solidFill>
                   <a:srgbClr val="3C3C3C"/>
                 </a:solidFill>
@@ -4697,16 +5035,16 @@
                 <a:ea typeface="Pretendard" pitchFamily="34" charset="-122"/>
                 <a:cs typeface="Pretendard" pitchFamily="34" charset="-120"/>
               </a:rPr>
-              <a:t>카페를 끊은 게 아니라 </a:t>
+              <a:t>가격이 오르자 커피는 집으로 옮겨갔다. 13개국 조사에서 </a:t>
             </a:r>
             <a:pPr indent="0" marL="0">
               <a:lnSpc>
-                <a:spcPts val="1350"/>
+                <a:spcPts val="1200"/>
               </a:lnSpc>
               <a:buNone/>
             </a:pPr>
             <a:r>
-              <a:rPr lang="en-US" sz="1000" b="1" dirty="0">
+              <a:rPr lang="en-US" sz="900" b="1" dirty="0">
                 <a:solidFill>
                   <a:srgbClr val="191919"/>
                 </a:solidFill>
@@ -4714,39 +5052,39 @@
                 <a:ea typeface="Pretendard" pitchFamily="34" charset="-122"/>
                 <a:cs typeface="Pretendard" pitchFamily="34" charset="-120"/>
               </a:rPr>
-              <a:t>집으로 옮겨간 것</a:t>
+              <a:t>70%가 매일 집에서 커피를 내리고, 55%가 가격 때문에 카페 소비를 줄였다</a:t>
             </a:r>
             <a:pPr indent="0" marL="0">
               <a:lnSpc>
-                <a:spcPts val="1350"/>
+                <a:spcPts val="1200"/>
               </a:lnSpc>
               <a:buNone/>
             </a:pPr>
             <a:r>
-              <a:rPr lang="en-US" sz="1000" dirty="0">
-                <a:solidFill>
-                  <a:srgbClr val="3C3C3C"/>
-                </a:solidFill>
-                <a:latin typeface="Pretendard" pitchFamily="34" charset="0"/>
-                <a:ea typeface="Pretendard" pitchFamily="34" charset="-122"/>
-                <a:cs typeface="Pretendard" pitchFamily="34" charset="-120"/>
-              </a:rPr>
-              <a:t>이다. 집에서 마시는 커피가 기본이 되면, 준비 과정이 그대로 생활의 일이 된다.</a:t>
-            </a:r>
-            <a:endParaRPr lang="en-US" sz="1000" dirty="0"/>
-          </a:p>
-        </p:txBody>
-      </p:sp>
-      <p:sp>
-        <p:nvSpPr>
-          <p:cNvPr id="27" name="Text 25"/>
-          <p:cNvSpPr/>
-          <p:nvPr/>
-        </p:nvSpPr>
-        <p:spPr>
-          <a:xfrm>
-            <a:off x="6553048" y="5120640"/>
-            <a:ext cx="4705960" cy="201168"/>
+              <a:rPr lang="en-US" sz="900" dirty="0">
+                <a:solidFill>
+                  <a:srgbClr val="959595"/>
+                </a:solidFill>
+                <a:latin typeface="Pretendard" pitchFamily="34" charset="0"/>
+                <a:ea typeface="Pretendard" pitchFamily="34" charset="-122"/>
+                <a:cs typeface="Pretendard" pitchFamily="34" charset="-120"/>
+              </a:rPr>
+              <a:t>고 답했다.  딜로이트 글로벌 커피 조사 2024 · 7,000명 · 국내 응답만 분리한 값은 아니다</a:t>
+            </a:r>
+            <a:endParaRPr lang="en-US" sz="900" dirty="0"/>
+          </a:p>
+        </p:txBody>
+      </p:sp>
+      <p:sp>
+        <p:nvSpPr>
+          <p:cNvPr id="37" name="Text 35"/>
+          <p:cNvSpPr/>
+          <p:nvPr/>
+        </p:nvSpPr>
+        <p:spPr>
+          <a:xfrm>
+            <a:off x="658368" y="6035040"/>
+            <a:ext cx="7498080" cy="219456"/>
           </a:xfrm>
           <a:prstGeom prst="rect">
             <a:avLst/>
@@ -4770,7 +5108,7 @@
                 <a:ea typeface="Pretendard" pitchFamily="34" charset="-122"/>
                 <a:cs typeface="Pretendard" pitchFamily="34" charset="-120"/>
               </a:rPr>
-              <a:t>딜로이트 글로벌 커피 조사 2024 · 13개국 7,000명</a:t>
+              <a:t>국내 ‘집에서 마시는 비율’ 자체를 직접 측정한 공식 통계는 확보 전이며, 보유율·시장 성장률로 대신했다.</a:t>
             </a:r>
             <a:endParaRPr lang="en-US" sz="800" dirty="0"/>
           </a:p>
@@ -4778,52 +5116,13 @@
       </p:sp>
       <p:sp>
         <p:nvSpPr>
-          <p:cNvPr id="28" name="Text 26"/>
-          <p:cNvSpPr/>
-          <p:nvPr/>
-        </p:nvSpPr>
-        <p:spPr>
-          <a:xfrm>
-            <a:off x="658368" y="5779008"/>
-            <a:ext cx="6858000" cy="219456"/>
-          </a:xfrm>
-          <a:prstGeom prst="rect">
-            <a:avLst/>
-          </a:prstGeom>
-          <a:noFill/>
-          <a:ln/>
-        </p:spPr>
-        <p:txBody>
-          <a:bodyPr wrap="square" lIns="0" tIns="0" rIns="0" bIns="0" rtlCol="0" anchor="t"/>
-          <a:lstStyle/>
-          <a:p>
-            <a:pPr indent="0" marL="0">
-              <a:buNone/>
-            </a:pPr>
-            <a:r>
-              <a:rPr lang="en-US" sz="800" dirty="0">
-                <a:solidFill>
-                  <a:srgbClr val="959595"/>
-                </a:solidFill>
-                <a:latin typeface="Pretendard" pitchFamily="34" charset="0"/>
-                <a:ea typeface="Pretendard" pitchFamily="34" charset="-122"/>
-                <a:cs typeface="Pretendard" pitchFamily="34" charset="-120"/>
-              </a:rPr>
-              <a:t>국내 응답만 분리한 수치는 확보 전이며, 딜로이트 수치는 글로벌 기준이다.</a:t>
-            </a:r>
-            <a:endParaRPr lang="en-US" sz="800" dirty="0"/>
-          </a:p>
-        </p:txBody>
-      </p:sp>
-      <p:sp>
-        <p:nvSpPr>
-          <p:cNvPr id="29" name="Text 27"/>
-          <p:cNvSpPr/>
-          <p:nvPr/>
-        </p:nvSpPr>
-        <p:spPr>
-          <a:xfrm>
-            <a:off x="7509967" y="5779008"/>
+          <p:cNvPr id="38" name="Text 36"/>
+          <p:cNvSpPr/>
+          <p:nvPr/>
+        </p:nvSpPr>
+        <p:spPr>
+          <a:xfrm>
+            <a:off x="7509967" y="6035040"/>
             <a:ext cx="4023360" cy="219456"/>
           </a:xfrm>
           <a:prstGeom prst="rect">
@@ -4856,7 +5155,7 @@
       </p:sp>
       <p:sp>
         <p:nvSpPr>
-          <p:cNvPr id="30" name="Text 28"/>
+          <p:cNvPr id="39" name="Text 37"/>
           <p:cNvSpPr/>
           <p:nvPr/>
         </p:nvSpPr>
@@ -4895,7 +5194,7 @@
       </p:sp>
       <p:sp>
         <p:nvSpPr>
-          <p:cNvPr id="31" name="Text 29"/>
+          <p:cNvPr id="40" name="Text 38"/>
           <p:cNvSpPr/>
           <p:nvPr/>
         </p:nvSpPr>
